--- a/docs/Viva_Presentation.pptx
+++ b/docs/Viva_Presentation.pptx
@@ -16,9 +16,10 @@
     <p:sldId id="264" r:id="rId10"/>
     <p:sldId id="265" r:id="rId11"/>
     <p:sldId id="266" r:id="rId12"/>
+    <p:sldId id="267" r:id="rId13"/>
   </p:sldIdLst>
   <p:notesMasterIdLst>
-    <p:notesMasterId r:id="rId13"/>
+    <p:notesMasterId r:id="rId14"/>
   </p:notesMasterIdLst>
   <p:sldSz cx="9144000" cy="5143500"/>
   <p:notesSz cx="5143500" cy="9144000"/>
@@ -600,7 +601,7 @@
           <a:p>
             <a:r>
               <a:rPr lang="en-US" dirty="0"/>
-              <a:t>Full table in docs/Code_Review.md. Every fix is protected by a test, so it cannot silently come back.</a:t>
+              <a:t>Report section 3.2 maps every participant, research area and scope item in the brief to a class, operation and scenario. Section 3.1 answers the brief's eight open questions one by one.</a:t>
             </a:r>
             <a:endParaRPr lang="en-US" dirty="0"/>
           </a:p>
@@ -688,7 +689,7 @@
           <a:p>
             <a:r>
               <a:rPr lang="en-US" dirty="0"/>
-              <a:t>The Arrangement level is where the design pays off for new business models: an Ijarah or Murabaha contract is a new kind of arrangement, not a change to existing classes.</a:t>
+              <a:t>Full table in docs/Code_Review.md. Every fix is protected by a test, so it cannot silently come back.</a:t>
             </a:r>
             <a:endParaRPr lang="en-US" dirty="0"/>
           </a:p>
@@ -712,6 +713,94 @@
             <a:fld id="{F7021451-1387-4CA6-816F-3879F97B5CBC}" type="slidenum">
               <a:rPr lang="en-US"/>
               <a:t>11</a:t>
+            </a:fld>
+            <a:endParaRPr lang="en-US"/>
+          </a:p>
+        </p:txBody>
+      </p:sp>
+    </p:spTree>
+    <p:extLst>
+      <p:ext uri="{BB962C8B-B14F-4D97-AF65-F5344CB8AC3E}">
+        <p14:creationId xmlns:p14="http://schemas.microsoft.com/office/powerpoint/2010/main" val="1024086991"/>
+      </p:ext>
+    </p:extLst>
+  </p:cSld>
+  <p:clrMapOvr>
+    <a:masterClrMapping/>
+  </p:clrMapOvr>
+</p:notes>
+</file>
+
+<file path=ppt/notesSlides/notesSlide12.xml><?xml version="1.0" encoding="utf-8"?>
+<p:notes xmlns:a="http://schemas.openxmlformats.org/drawingml/2006/main" xmlns:r="http://schemas.openxmlformats.org/officeDocument/2006/relationships" xmlns:p="http://schemas.openxmlformats.org/presentationml/2006/main">
+  <p:cSld>
+    <p:spTree>
+      <p:nvGrpSpPr>
+        <p:cNvPr id="1" name=""/>
+        <p:cNvGrpSpPr/>
+        <p:nvPr/>
+      </p:nvGrpSpPr>
+      <p:grpSpPr>
+        <a:xfrm>
+          <a:off x="0" y="0"/>
+          <a:ext cx="0" cy="0"/>
+          <a:chOff x="0" y="0"/>
+          <a:chExt cx="0" cy="0"/>
+        </a:xfrm>
+      </p:grpSpPr>
+      <p:sp>
+        <p:nvSpPr>
+          <p:cNvPr id="2" name="Slide Image Placeholder 1"/>
+          <p:cNvSpPr>
+            <a:spLocks noGrp="1" noRot="1" noChangeAspect="1"/>
+          </p:cNvSpPr>
+          <p:nvPr>
+            <p:ph type="sldImg"/>
+          </p:nvPr>
+        </p:nvSpPr>
+        <p:spPr/>
+      </p:sp>
+      <p:sp>
+        <p:nvSpPr>
+          <p:cNvPr id="3" name="Notes Placeholder 2"/>
+          <p:cNvSpPr>
+            <a:spLocks noGrp="1"/>
+          </p:cNvSpPr>
+          <p:nvPr>
+            <p:ph type="body" idx="1"/>
+          </p:nvPr>
+        </p:nvSpPr>
+        <p:spPr/>
+        <p:txBody>
+          <a:bodyPr/>
+          <a:lstStyle/>
+          <a:p>
+            <a:r>
+              <a:rPr lang="en-US" dirty="0"/>
+              <a:t>The Arrangement level is where the design pays off for new business models: an Ijarah or Murabaha contract is a new kind of arrangement, not a change to existing classes.</a:t>
+            </a:r>
+            <a:endParaRPr lang="en-US" dirty="0"/>
+          </a:p>
+        </p:txBody>
+      </p:sp>
+      <p:sp>
+        <p:nvSpPr>
+          <p:cNvPr id="4" name="Slide Number Placeholder 3"/>
+          <p:cNvSpPr>
+            <a:spLocks noGrp="1"/>
+          </p:cNvSpPr>
+          <p:nvPr>
+            <p:ph type="sldNum" sz="quarter" idx="10"/>
+          </p:nvPr>
+        </p:nvSpPr>
+        <p:spPr/>
+        <p:txBody>
+          <a:bodyPr/>
+          <a:lstStyle/>
+          <a:p>
+            <a:fld id="{F7021451-1387-4CA6-816F-3879F97B5CBC}" type="slidenum">
+              <a:rPr lang="en-US"/>
+              <a:t>12</a:t>
             </a:fld>
             <a:endParaRPr lang="en-US"/>
           </a:p>
@@ -776,7 +865,7 @@
           <a:p>
             <a:r>
               <a:rPr lang="en-US" dirty="0"/>
-              <a:t>The brief asks for at least 30 classes and 30 meaningful operations. Even counting only the 66 state-changing commands we are more than double. The trial balance is zero at the end of the demo, so no scenario created or lost money.</a:t>
+              <a:t>The brief asks for at least 30 classes and 30 meaningful operations. Even counting only the 78 state-changing commands we are more than double. The trial balance is zero at the end of the demo, so no scenario created or lost money.</a:t>
             </a:r>
             <a:endParaRPr lang="en-US" dirty="0"/>
           </a:p>
@@ -2014,7 +2103,7 @@
               <a:buNone/>
             </a:pPr>
             <a:r>
-              <a:rPr lang="en-US" sz="2200" b="1" dirty="0">
+              <a:rPr lang="en-US" sz="2800" b="1" dirty="0">
                 <a:solidFill>
                   <a:srgbClr val="0B4F4A"/>
                 </a:solidFill>
@@ -2022,34 +2111,73 @@
                 <a:ea typeface="Cambria" pitchFamily="34" charset="-122"/>
                 <a:cs typeface="Cambria" pitchFamily="34" charset="-120"/>
               </a:rPr>
-              <a:t>Code review: 20 defects fixed, each with a test</a:t>
-            </a:r>
-            <a:endParaRPr lang="en-US" sz="2200" dirty="0"/>
-          </a:p>
-        </p:txBody>
-      </p:sp>
-      <p:sp>
-        <p:nvSpPr>
-          <p:cNvPr id="3" name="Shape 1"/>
+              <a:t>Everything the brief names is modelled</a:t>
+            </a:r>
+            <a:endParaRPr lang="en-US" sz="2800" dirty="0"/>
+          </a:p>
+        </p:txBody>
+      </p:sp>
+      <p:sp>
+        <p:nvSpPr>
+          <p:cNvPr id="3" name="Text 1"/>
+          <p:cNvSpPr txBox="1"/>
+          <p:nvPr/>
+        </p:nvSpPr>
+        <p:spPr>
+          <a:xfrm>
+            <a:off x="457200" y="804672"/>
+            <a:ext cx="8229600" cy="320040"/>
+          </a:xfrm>
+          <a:prstGeom prst="rect">
+            <a:avLst/>
+          </a:prstGeom>
+          <a:noFill/>
+          <a:ln/>
+        </p:spPr>
+        <p:txBody>
+          <a:bodyPr wrap="square" lIns="0" tIns="0" rIns="0" bIns="0" rtlCol="0" anchor="ctr"/>
+          <a:lstStyle/>
+          <a:p>
+            <a:pPr indent="0" marL="0">
+              <a:buNone/>
+            </a:pPr>
+            <a:r>
+              <a:rPr lang="en-US" sz="1200" i="1" dirty="0">
+                <a:solidFill>
+                  <a:srgbClr val="5B6B69"/>
+                </a:solidFill>
+                <a:latin typeface="Calibri" pitchFamily="34" charset="0"/>
+                <a:ea typeface="Calibri" pitchFamily="34" charset="-122"/>
+                <a:cs typeface="Calibri" pitchFamily="34" charset="-120"/>
+              </a:rPr>
+              <a:t>Found by rereading Problem 4 line by line; each has a test</a:t>
+            </a:r>
+            <a:endParaRPr lang="en-US" sz="1200" dirty="0"/>
+          </a:p>
+        </p:txBody>
+      </p:sp>
+      <p:sp>
+        <p:nvSpPr>
+          <p:cNvPr id="4" name="Shape 2"/>
           <p:cNvSpPr/>
           <p:nvPr/>
         </p:nvSpPr>
         <p:spPr>
           <a:xfrm>
-            <a:off x="457200" y="1097280"/>
-            <a:ext cx="2651760" cy="3566160"/>
+            <a:off x="457200" y="1280160"/>
+            <a:ext cx="2606040" cy="1600200"/>
           </a:xfrm>
           <a:prstGeom prst="roundRect">
             <a:avLst>
-              <a:gd name="adj" fmla="val 2759"/>
+              <a:gd name="adj" fmla="val 4571"/>
             </a:avLst>
           </a:prstGeom>
           <a:solidFill>
-            <a:srgbClr val="0B4F4A"/>
+            <a:srgbClr val="E8F0EE"/>
           </a:solidFill>
           <a:ln w="12700">
             <a:solidFill>
-              <a:srgbClr val="0B4F4A"/>
+              <a:srgbClr val="E8F0EE"/>
             </a:solidFill>
             <a:prstDash val="solid"/>
           </a:ln>
@@ -2057,14 +2185,14 @@
       </p:sp>
       <p:sp>
         <p:nvSpPr>
-          <p:cNvPr id="4" name="Text 2"/>
-          <p:cNvSpPr txBox="1"/>
-          <p:nvPr/>
-        </p:nvSpPr>
-        <p:spPr>
-          <a:xfrm>
-            <a:off x="457200" y="1463040"/>
-            <a:ext cx="2651760" cy="1097280"/>
+          <p:cNvPr id="5" name="Text 3"/>
+          <p:cNvSpPr txBox="1"/>
+          <p:nvPr/>
+        </p:nvSpPr>
+        <p:spPr>
+          <a:xfrm>
+            <a:off x="594360" y="1389888"/>
+            <a:ext cx="2331720" cy="502920"/>
           </a:xfrm>
           <a:prstGeom prst="rect">
             <a:avLst/>
@@ -2076,58 +2204,124 @@
           <a:bodyPr wrap="square" lIns="0" tIns="0" rIns="0" bIns="0" rtlCol="0" anchor="ctr"/>
           <a:lstStyle/>
           <a:p>
-            <a:pPr algn="ctr" indent="0" marL="0">
-              <a:buNone/>
-            </a:pPr>
-            <a:r>
-              <a:rPr lang="en-US" sz="6000" b="1" dirty="0">
-                <a:solidFill>
-                  <a:srgbClr val="FFFFFF"/>
+            <a:pPr indent="0" marL="0">
+              <a:buNone/>
+            </a:pPr>
+            <a:r>
+              <a:rPr lang="en-US" sz="1400" b="1" dirty="0">
+                <a:solidFill>
+                  <a:srgbClr val="0B4F4A"/>
                 </a:solidFill>
                 <a:latin typeface="Cambria" pitchFamily="34" charset="0"/>
                 <a:ea typeface="Cambria" pitchFamily="34" charset="-122"/>
                 <a:cs typeface="Cambria" pitchFamily="34" charset="-120"/>
               </a:rPr>
-              <a:t>20</a:t>
-            </a:r>
-            <a:endParaRPr lang="en-US" sz="6000" dirty="0"/>
-          </a:p>
-        </p:txBody>
-      </p:sp>
-      <p:sp>
-        <p:nvSpPr>
-          <p:cNvPr id="5" name="Text 3"/>
-          <p:cNvSpPr txBox="1"/>
-          <p:nvPr/>
-        </p:nvSpPr>
-        <p:spPr>
-          <a:xfrm>
-            <a:off x="685800" y="2651760"/>
-            <a:ext cx="2194560" cy="1097280"/>
-          </a:xfrm>
-          <a:prstGeom prst="rect">
-            <a:avLst/>
-          </a:prstGeom>
-          <a:noFill/>
-          <a:ln/>
-        </p:spPr>
-        <p:txBody>
-          <a:bodyPr wrap="square" lIns="0" tIns="0" rIns="0" bIns="0" rtlCol="0" anchor="ctr"/>
-          <a:lstStyle/>
-          <a:p>
-            <a:pPr algn="ctr" indent="0" marL="0">
-              <a:buNone/>
-            </a:pPr>
-            <a:r>
-              <a:rPr lang="en-US" sz="1400" dirty="0">
-                <a:solidFill>
-                  <a:srgbClr val="CFE3DF"/>
+              <a:t>Sole traders &amp; private clients</a:t>
+            </a:r>
+            <a:endParaRPr lang="en-US" sz="1400" dirty="0"/>
+          </a:p>
+        </p:txBody>
+      </p:sp>
+      <p:sp>
+        <p:nvSpPr>
+          <p:cNvPr id="6" name="Text 4"/>
+          <p:cNvSpPr txBox="1"/>
+          <p:nvPr/>
+        </p:nvSpPr>
+        <p:spPr>
+          <a:xfrm>
+            <a:off x="594360" y="1920240"/>
+            <a:ext cx="2331720" cy="868680"/>
+          </a:xfrm>
+          <a:prstGeom prst="rect">
+            <a:avLst/>
+          </a:prstGeom>
+          <a:noFill/>
+          <a:ln/>
+        </p:spPr>
+        <p:txBody>
+          <a:bodyPr wrap="square" lIns="0" tIns="0" rIns="0" bIns="0" rtlCol="0" anchor="t"/>
+          <a:lstStyle/>
+          <a:p>
+            <a:pPr indent="0" marL="0">
+              <a:buNone/>
+            </a:pPr>
+            <a:r>
+              <a:rPr lang="en-US" sz="1200" dirty="0">
+                <a:solidFill>
+                  <a:srgbClr val="1D2B2A"/>
                 </a:solidFill>
                 <a:latin typeface="Calibri" pitchFamily="34" charset="0"/>
                 <a:ea typeface="Calibri" pitchFamily="34" charset="-122"/>
                 <a:cs typeface="Calibri" pitchFamily="34" charset="-120"/>
               </a:rPr>
-              <a:t>defects found and fixed, each with a regression test</a:t>
+              <a:t>Person with a trading name; PRIVATE needs verified source of wealth (EDD)</a:t>
+            </a:r>
+            <a:endParaRPr lang="en-US" sz="1200" dirty="0"/>
+          </a:p>
+        </p:txBody>
+      </p:sp>
+      <p:sp>
+        <p:nvSpPr>
+          <p:cNvPr id="7" name="Shape 5"/>
+          <p:cNvSpPr/>
+          <p:nvPr/>
+        </p:nvSpPr>
+        <p:spPr>
+          <a:xfrm>
+            <a:off x="3246120" y="1280160"/>
+            <a:ext cx="2606040" cy="1600200"/>
+          </a:xfrm>
+          <a:prstGeom prst="roundRect">
+            <a:avLst>
+              <a:gd name="adj" fmla="val 4571"/>
+            </a:avLst>
+          </a:prstGeom>
+          <a:solidFill>
+            <a:srgbClr val="E8F0EE"/>
+          </a:solidFill>
+          <a:ln w="12700">
+            <a:solidFill>
+              <a:srgbClr val="E8F0EE"/>
+            </a:solidFill>
+            <a:prstDash val="solid"/>
+          </a:ln>
+        </p:spPr>
+      </p:sp>
+      <p:sp>
+        <p:nvSpPr>
+          <p:cNvPr id="8" name="Text 6"/>
+          <p:cNvSpPr txBox="1"/>
+          <p:nvPr/>
+        </p:nvSpPr>
+        <p:spPr>
+          <a:xfrm>
+            <a:off x="3383280" y="1389888"/>
+            <a:ext cx="2331720" cy="502920"/>
+          </a:xfrm>
+          <a:prstGeom prst="rect">
+            <a:avLst/>
+          </a:prstGeom>
+          <a:noFill/>
+          <a:ln/>
+        </p:spPr>
+        <p:txBody>
+          <a:bodyPr wrap="square" lIns="0" tIns="0" rIns="0" bIns="0" rtlCol="0" anchor="ctr"/>
+          <a:lstStyle/>
+          <a:p>
+            <a:pPr indent="0" marL="0">
+              <a:buNone/>
+            </a:pPr>
+            <a:r>
+              <a:rPr lang="en-US" sz="1400" b="1" dirty="0">
+                <a:solidFill>
+                  <a:srgbClr val="0B4F4A"/>
+                </a:solidFill>
+                <a:latin typeface="Cambria" pitchFamily="34" charset="0"/>
+                <a:ea typeface="Cambria" pitchFamily="34" charset="-122"/>
+                <a:cs typeface="Cambria" pitchFamily="34" charset="-120"/>
+              </a:rPr>
+              <a:t>Fixed-term deposits</a:t>
             </a:r>
             <a:endParaRPr lang="en-US" sz="1400" dirty="0"/>
           </a:p>
@@ -2135,34 +2329,30 @@
       </p:sp>
       <p:sp>
         <p:nvSpPr>
-          <p:cNvPr id="6" name="Text 4"/>
-          <p:cNvSpPr txBox="1"/>
-          <p:nvPr/>
-        </p:nvSpPr>
-        <p:spPr>
-          <a:xfrm>
-            <a:off x="3474720" y="1143000"/>
-            <a:ext cx="5212080" cy="3566160"/>
-          </a:xfrm>
-          <a:prstGeom prst="rect">
-            <a:avLst/>
-          </a:prstGeom>
-          <a:noFill/>
-          <a:ln/>
-        </p:spPr>
-        <p:txBody>
-          <a:bodyPr wrap="square" lIns="635" tIns="635" rIns="635" bIns="635" rtlCol="0" anchor="t"/>
-          <a:lstStyle/>
-          <a:p>
-            <a:pPr marL="342900" indent="-342900">
-              <a:spcAft>
-                <a:spcPts val="600"/>
-              </a:spcAft>
-              <a:buSzPct val="100000"/>
-              <a:buChar char="•"/>
-            </a:pPr>
-            <a:r>
-              <a:rPr lang="en-US" sz="1350" dirty="0">
+          <p:cNvPr id="9" name="Text 7"/>
+          <p:cNvSpPr txBox="1"/>
+          <p:nvPr/>
+        </p:nvSpPr>
+        <p:spPr>
+          <a:xfrm>
+            <a:off x="3383280" y="1920240"/>
+            <a:ext cx="2331720" cy="868680"/>
+          </a:xfrm>
+          <a:prstGeom prst="rect">
+            <a:avLst/>
+          </a:prstGeom>
+          <a:noFill/>
+          <a:ln/>
+        </p:spPr>
+        <p:txBody>
+          <a:bodyPr wrap="square" lIns="0" tIns="0" rIns="0" bIns="0" rtlCol="0" anchor="t"/>
+          <a:lstStyle/>
+          <a:p>
+            <a:pPr indent="0" marL="0">
+              <a:buNone/>
+            </a:pPr>
+            <a:r>
+              <a:rPr lang="en-US" sz="1200" dirty="0">
                 <a:solidFill>
                   <a:srgbClr val="1D2B2A"/>
                 </a:solidFill>
@@ -2170,20 +2360,104 @@
                 <a:ea typeface="Calibri" pitchFamily="34" charset="-122"/>
                 <a:cs typeface="Calibri" pitchFamily="34" charset="-120"/>
               </a:rPr>
-              <a:t>A refused loan overpayment still marked installments as paid</a:t>
-            </a:r>
-            <a:endParaRPr lang="en-US" sz="1350" dirty="0"/>
-          </a:p>
-          <a:p>
-            <a:pPr marL="342900" indent="-342900">
-              <a:spcAft>
-                <a:spcPts val="600"/>
-              </a:spcAft>
-              <a:buSzPct val="100000"/>
-              <a:buChar char="•"/>
-            </a:pPr>
-            <a:r>
-              <a:rPr lang="en-US" sz="1350" dirty="0">
+              <a:t>Third DepositAccount subclass: no early debits, maturity payout, break penalty</a:t>
+            </a:r>
+            <a:endParaRPr lang="en-US" sz="1200" dirty="0"/>
+          </a:p>
+        </p:txBody>
+      </p:sp>
+      <p:sp>
+        <p:nvSpPr>
+          <p:cNvPr id="10" name="Shape 8"/>
+          <p:cNvSpPr/>
+          <p:nvPr/>
+        </p:nvSpPr>
+        <p:spPr>
+          <a:xfrm>
+            <a:off x="6035040" y="1280160"/>
+            <a:ext cx="2606040" cy="1600200"/>
+          </a:xfrm>
+          <a:prstGeom prst="roundRect">
+            <a:avLst>
+              <a:gd name="adj" fmla="val 4571"/>
+            </a:avLst>
+          </a:prstGeom>
+          <a:solidFill>
+            <a:srgbClr val="E8F0EE"/>
+          </a:solidFill>
+          <a:ln w="12700">
+            <a:solidFill>
+              <a:srgbClr val="E8F0EE"/>
+            </a:solidFill>
+            <a:prstDash val="solid"/>
+          </a:ln>
+        </p:spPr>
+      </p:sp>
+      <p:sp>
+        <p:nvSpPr>
+          <p:cNvPr id="11" name="Text 9"/>
+          <p:cNvSpPr txBox="1"/>
+          <p:nvPr/>
+        </p:nvSpPr>
+        <p:spPr>
+          <a:xfrm>
+            <a:off x="6172200" y="1389888"/>
+            <a:ext cx="2331720" cy="502920"/>
+          </a:xfrm>
+          <a:prstGeom prst="rect">
+            <a:avLst/>
+          </a:prstGeom>
+          <a:noFill/>
+          <a:ln/>
+        </p:spPr>
+        <p:txBody>
+          <a:bodyPr wrap="square" lIns="0" tIns="0" rIns="0" bIns="0" rtlCol="0" anchor="ctr"/>
+          <a:lstStyle/>
+          <a:p>
+            <a:pPr indent="0" marL="0">
+              <a:buNone/>
+            </a:pPr>
+            <a:r>
+              <a:rPr lang="en-US" sz="1400" b="1" dirty="0">
+                <a:solidFill>
+                  <a:srgbClr val="0B4F4A"/>
+                </a:solidFill>
+                <a:latin typeface="Cambria" pitchFamily="34" charset="0"/>
+                <a:ea typeface="Cambria" pitchFamily="34" charset="-122"/>
+                <a:cs typeface="Cambria" pitchFamily="34" charset="-120"/>
+              </a:rPr>
+              <a:t>Card controls</a:t>
+            </a:r>
+            <a:endParaRPr lang="en-US" sz="1400" dirty="0"/>
+          </a:p>
+        </p:txBody>
+      </p:sp>
+      <p:sp>
+        <p:nvSpPr>
+          <p:cNvPr id="12" name="Text 10"/>
+          <p:cNvSpPr txBox="1"/>
+          <p:nvPr/>
+        </p:nvSpPr>
+        <p:spPr>
+          <a:xfrm>
+            <a:off x="6172200" y="1920240"/>
+            <a:ext cx="2331720" cy="868680"/>
+          </a:xfrm>
+          <a:prstGeom prst="rect">
+            <a:avLst/>
+          </a:prstGeom>
+          <a:noFill/>
+          <a:ln/>
+        </p:spPr>
+        <p:txBody>
+          <a:bodyPr wrap="square" lIns="0" tIns="0" rIns="0" bIns="0" rtlCol="0" anchor="t"/>
+          <a:lstStyle/>
+          <a:p>
+            <a:pPr indent="0" marL="0">
+              <a:buNone/>
+            </a:pPr>
+            <a:r>
+              <a:rPr lang="en-US" sz="1200" dirty="0">
                 <a:solidFill>
                   <a:srgbClr val="1D2B2A"/>
                 </a:solidFill>
@@ -2191,20 +2465,104 @@
                 <a:ea typeface="Calibri" pitchFamily="34" charset="-122"/>
                 <a:cs typeface="Calibri" pitchFamily="34" charset="-120"/>
               </a:rPr>
-              <a:t>Resolving a dispute twice refunded the customer twice</a:t>
-            </a:r>
-            <a:endParaRPr lang="en-US" sz="1350" dirty="0"/>
-          </a:p>
-          <a:p>
-            <a:pPr marL="342900" indent="-342900">
-              <a:spcAft>
-                <a:spcPts val="600"/>
-              </a:spcAft>
-              <a:buSzPct val="100000"/>
-              <a:buChar char="•"/>
-            </a:pPr>
-            <a:r>
-              <a:rPr lang="en-US" sz="1350" dirty="0">
+              <a:t>Online, international, cash, merchant category - each with a validity period</a:t>
+            </a:r>
+            <a:endParaRPr lang="en-US" sz="1200" dirty="0"/>
+          </a:p>
+        </p:txBody>
+      </p:sp>
+      <p:sp>
+        <p:nvSpPr>
+          <p:cNvPr id="13" name="Shape 11"/>
+          <p:cNvSpPr/>
+          <p:nvPr/>
+        </p:nvSpPr>
+        <p:spPr>
+          <a:xfrm>
+            <a:off x="457200" y="3063240"/>
+            <a:ext cx="2606040" cy="1600200"/>
+          </a:xfrm>
+          <a:prstGeom prst="roundRect">
+            <a:avLst>
+              <a:gd name="adj" fmla="val 4571"/>
+            </a:avLst>
+          </a:prstGeom>
+          <a:solidFill>
+            <a:srgbClr val="E8F0EE"/>
+          </a:solidFill>
+          <a:ln w="12700">
+            <a:solidFill>
+              <a:srgbClr val="E8F0EE"/>
+            </a:solidFill>
+            <a:prstDash val="solid"/>
+          </a:ln>
+        </p:spPr>
+      </p:sp>
+      <p:sp>
+        <p:nvSpPr>
+          <p:cNvPr id="14" name="Text 12"/>
+          <p:cNvSpPr txBox="1"/>
+          <p:nvPr/>
+        </p:nvSpPr>
+        <p:spPr>
+          <a:xfrm>
+            <a:off x="594360" y="3172968"/>
+            <a:ext cx="2331720" cy="502920"/>
+          </a:xfrm>
+          <a:prstGeom prst="rect">
+            <a:avLst/>
+          </a:prstGeom>
+          <a:noFill/>
+          <a:ln/>
+        </p:spPr>
+        <p:txBody>
+          <a:bodyPr wrap="square" lIns="0" tIns="0" rIns="0" bIns="0" rtlCol="0" anchor="ctr"/>
+          <a:lstStyle/>
+          <a:p>
+            <a:pPr indent="0" marL="0">
+              <a:buNone/>
+            </a:pPr>
+            <a:r>
+              <a:rPr lang="en-US" sz="1400" b="1" dirty="0">
+                <a:solidFill>
+                  <a:srgbClr val="0B4F4A"/>
+                </a:solidFill>
+                <a:latin typeface="Cambria" pitchFamily="34" charset="0"/>
+                <a:ea typeface="Cambria" pitchFamily="34" charset="-122"/>
+                <a:cs typeface="Cambria" pitchFamily="34" charset="-120"/>
+              </a:rPr>
+              <a:t>Billers</a:t>
+            </a:r>
+            <a:endParaRPr lang="en-US" sz="1400" dirty="0"/>
+          </a:p>
+        </p:txBody>
+      </p:sp>
+      <p:sp>
+        <p:nvSpPr>
+          <p:cNvPr id="15" name="Text 13"/>
+          <p:cNvSpPr txBox="1"/>
+          <p:nvPr/>
+        </p:nvSpPr>
+        <p:spPr>
+          <a:xfrm>
+            <a:off x="594360" y="3703320"/>
+            <a:ext cx="2331720" cy="868680"/>
+          </a:xfrm>
+          <a:prstGeom prst="rect">
+            <a:avLst/>
+          </a:prstGeom>
+          <a:noFill/>
+          <a:ln/>
+        </p:spPr>
+        <p:txBody>
+          <a:bodyPr wrap="square" lIns="0" tIns="0" rIns="0" bIns="0" rtlCol="0" anchor="t"/>
+          <a:lstStyle/>
+          <a:p>
+            <a:pPr indent="0" marL="0">
+              <a:buNone/>
+            </a:pPr>
+            <a:r>
+              <a:rPr lang="en-US" sz="1200" dirty="0">
                 <a:solidFill>
                   <a:srgbClr val="1D2B2A"/>
                 </a:solidFill>
@@ -2212,20 +2570,104 @@
                 <a:ea typeface="Calibri" pitchFamily="34" charset="-122"/>
                 <a:cs typeface="Calibri" pitchFamily="34" charset="-120"/>
               </a:rPr>
-              <a:t>Recording an ACTIVE card as found destroyed it</a:t>
-            </a:r>
-            <a:endParaRPr lang="en-US" sz="1350" dirty="0"/>
-          </a:p>
-          <a:p>
-            <a:pPr marL="342900" indent="-342900">
-              <a:spcAft>
-                <a:spcPts val="600"/>
-              </a:spcAft>
-              <a:buSzPct val="100000"/>
-              <a:buChar char="•"/>
-            </a:pPr>
-            <a:r>
-              <a:rPr lang="en-US" sz="1350" dirty="0">
+              <a:t>BillPayment is a CustomerPayment: same mandates, restrictions, dual control</a:t>
+            </a:r>
+            <a:endParaRPr lang="en-US" sz="1200" dirty="0"/>
+          </a:p>
+        </p:txBody>
+      </p:sp>
+      <p:sp>
+        <p:nvSpPr>
+          <p:cNvPr id="16" name="Shape 14"/>
+          <p:cNvSpPr/>
+          <p:nvPr/>
+        </p:nvSpPr>
+        <p:spPr>
+          <a:xfrm>
+            <a:off x="3246120" y="3063240"/>
+            <a:ext cx="2606040" cy="1600200"/>
+          </a:xfrm>
+          <a:prstGeom prst="roundRect">
+            <a:avLst>
+              <a:gd name="adj" fmla="val 4571"/>
+            </a:avLst>
+          </a:prstGeom>
+          <a:solidFill>
+            <a:srgbClr val="E8F0EE"/>
+          </a:solidFill>
+          <a:ln w="12700">
+            <a:solidFill>
+              <a:srgbClr val="E8F0EE"/>
+            </a:solidFill>
+            <a:prstDash val="solid"/>
+          </a:ln>
+        </p:spPr>
+      </p:sp>
+      <p:sp>
+        <p:nvSpPr>
+          <p:cNvPr id="17" name="Text 15"/>
+          <p:cNvSpPr txBox="1"/>
+          <p:nvPr/>
+        </p:nvSpPr>
+        <p:spPr>
+          <a:xfrm>
+            <a:off x="3383280" y="3172968"/>
+            <a:ext cx="2331720" cy="502920"/>
+          </a:xfrm>
+          <a:prstGeom prst="rect">
+            <a:avLst/>
+          </a:prstGeom>
+          <a:noFill/>
+          <a:ln/>
+        </p:spPr>
+        <p:txBody>
+          <a:bodyPr wrap="square" lIns="0" tIns="0" rIns="0" bIns="0" rtlCol="0" anchor="ctr"/>
+          <a:lstStyle/>
+          <a:p>
+            <a:pPr indent="0" marL="0">
+              <a:buNone/>
+            </a:pPr>
+            <a:r>
+              <a:rPr lang="en-US" sz="1400" b="1" dirty="0">
+                <a:solidFill>
+                  <a:srgbClr val="0B4F4A"/>
+                </a:solidFill>
+                <a:latin typeface="Cambria" pitchFamily="34" charset="0"/>
+                <a:ea typeface="Cambria" pitchFamily="34" charset="-122"/>
+                <a:cs typeface="Cambria" pitchFamily="34" charset="-120"/>
+              </a:rPr>
+              <a:t>Collections staff</a:t>
+            </a:r>
+            <a:endParaRPr lang="en-US" sz="1400" dirty="0"/>
+          </a:p>
+        </p:txBody>
+      </p:sp>
+      <p:sp>
+        <p:nvSpPr>
+          <p:cNvPr id="18" name="Text 16"/>
+          <p:cNvSpPr txBox="1"/>
+          <p:nvPr/>
+        </p:nvSpPr>
+        <p:spPr>
+          <a:xfrm>
+            <a:off x="3383280" y="3703320"/>
+            <a:ext cx="2331720" cy="868680"/>
+          </a:xfrm>
+          <a:prstGeom prst="rect">
+            <a:avLst/>
+          </a:prstGeom>
+          <a:noFill/>
+          <a:ln/>
+        </p:spPr>
+        <p:txBody>
+          <a:bodyPr wrap="square" lIns="0" tIns="0" rIns="0" bIns="0" rtlCol="0" anchor="t"/>
+          <a:lstStyle/>
+          <a:p>
+            <a:pPr indent="0" marL="0">
+              <a:buNone/>
+            </a:pPr>
+            <a:r>
+              <a:rPr lang="en-US" sz="1200" dirty="0">
                 <a:solidFill>
                   <a:srgbClr val="1D2B2A"/>
                 </a:solidFill>
@@ -2233,20 +2675,104 @@
                 <a:ea typeface="Calibri" pitchFamily="34" charset="-122"/>
                 <a:cs typeface="Calibri" pitchFamily="34" charset="-120"/>
               </a:rPr>
-              <a:t>Replacement cards blocked once the product was withdrawn</a:t>
-            </a:r>
-            <a:endParaRPr lang="en-US" sz="1350" dirty="0"/>
-          </a:p>
-          <a:p>
-            <a:pPr marL="342900" indent="-342900">
-              <a:spcAft>
-                <a:spcPts val="600"/>
-              </a:spcAft>
-              <a:buSzPct val="100000"/>
-              <a:buChar char="•"/>
-            </a:pPr>
-            <a:r>
-              <a:rPr lang="en-US" sz="1350" dirty="0">
+              <a:t>Collections officer works the case; promise to pay marked kept or broken</a:t>
+            </a:r>
+            <a:endParaRPr lang="en-US" sz="1200" dirty="0"/>
+          </a:p>
+        </p:txBody>
+      </p:sp>
+      <p:sp>
+        <p:nvSpPr>
+          <p:cNvPr id="19" name="Shape 17"/>
+          <p:cNvSpPr/>
+          <p:nvPr/>
+        </p:nvSpPr>
+        <p:spPr>
+          <a:xfrm>
+            <a:off x="6035040" y="3063240"/>
+            <a:ext cx="2606040" cy="1600200"/>
+          </a:xfrm>
+          <a:prstGeom prst="roundRect">
+            <a:avLst>
+              <a:gd name="adj" fmla="val 4571"/>
+            </a:avLst>
+          </a:prstGeom>
+          <a:solidFill>
+            <a:srgbClr val="E8F0EE"/>
+          </a:solidFill>
+          <a:ln w="12700">
+            <a:solidFill>
+              <a:srgbClr val="E8F0EE"/>
+            </a:solidFill>
+            <a:prstDash val="solid"/>
+          </a:ln>
+        </p:spPr>
+      </p:sp>
+      <p:sp>
+        <p:nvSpPr>
+          <p:cNvPr id="20" name="Text 18"/>
+          <p:cNvSpPr txBox="1"/>
+          <p:nvPr/>
+        </p:nvSpPr>
+        <p:spPr>
+          <a:xfrm>
+            <a:off x="6172200" y="3172968"/>
+            <a:ext cx="2331720" cy="502920"/>
+          </a:xfrm>
+          <a:prstGeom prst="rect">
+            <a:avLst/>
+          </a:prstGeom>
+          <a:noFill/>
+          <a:ln/>
+        </p:spPr>
+        <p:txBody>
+          <a:bodyPr wrap="square" lIns="0" tIns="0" rIns="0" bIns="0" rtlCol="0" anchor="ctr"/>
+          <a:lstStyle/>
+          <a:p>
+            <a:pPr indent="0" marL="0">
+              <a:buNone/>
+            </a:pPr>
+            <a:r>
+              <a:rPr lang="en-US" sz="1400" b="1" dirty="0">
+                <a:solidFill>
+                  <a:srgbClr val="0B4F4A"/>
+                </a:solidFill>
+                <a:latin typeface="Cambria" pitchFamily="34" charset="0"/>
+                <a:ea typeface="Cambria" pitchFamily="34" charset="-122"/>
+                <a:cs typeface="Cambria" pitchFamily="34" charset="-120"/>
+              </a:rPr>
+              <a:t>Auditors &amp; retention</a:t>
+            </a:r>
+            <a:endParaRPr lang="en-US" sz="1400" dirty="0"/>
+          </a:p>
+        </p:txBody>
+      </p:sp>
+      <p:sp>
+        <p:nvSpPr>
+          <p:cNvPr id="21" name="Text 19"/>
+          <p:cNvSpPr txBox="1"/>
+          <p:nvPr/>
+        </p:nvSpPr>
+        <p:spPr>
+          <a:xfrm>
+            <a:off x="6172200" y="3703320"/>
+            <a:ext cx="2331720" cy="868680"/>
+          </a:xfrm>
+          <a:prstGeom prst="rect">
+            <a:avLst/>
+          </a:prstGeom>
+          <a:noFill/>
+          <a:ln/>
+        </p:spPr>
+        <p:txBody>
+          <a:bodyPr wrap="square" lIns="0" tIns="0" rIns="0" bIns="0" rtlCol="0" anchor="t"/>
+          <a:lstStyle/>
+          <a:p>
+            <a:pPr indent="0" marL="0">
+              <a:buNone/>
+            </a:pPr>
+            <a:r>
+              <a:rPr lang="en-US" sz="1200" dirty="0">
                 <a:solidFill>
                   <a:srgbClr val="1D2B2A"/>
                 </a:solidFill>
@@ -2254,51 +2780,9 @@
                 <a:ea typeface="Calibri" pitchFamily="34" charset="-122"/>
                 <a:cs typeface="Calibri" pitchFamily="34" charset="-120"/>
               </a:rPr>
-              <a:t>Bank fees used up customers' savings withdrawals</a:t>
-            </a:r>
-            <a:endParaRPr lang="en-US" sz="1350" dirty="0"/>
-          </a:p>
-          <a:p>
-            <a:pPr marL="342900" indent="-342900">
-              <a:spcAft>
-                <a:spcPts val="600"/>
-              </a:spcAft>
-              <a:buSzPct val="100000"/>
-              <a:buChar char="•"/>
-            </a:pPr>
-            <a:r>
-              <a:rPr lang="en-US" sz="1350" dirty="0">
-                <a:solidFill>
-                  <a:srgbClr val="1D2B2A"/>
-                </a:solidFill>
-                <a:latin typeface="Calibri" pitchFamily="34" charset="0"/>
-                <a:ea typeface="Calibri" pitchFamily="34" charset="-122"/>
-                <a:cs typeface="Calibri" pitchFamily="34" charset="-120"/>
-              </a:rPr>
-              <a:t>Account closure ignored holds and pending payments</a:t>
-            </a:r>
-            <a:endParaRPr lang="en-US" sz="1350" dirty="0"/>
-          </a:p>
-          <a:p>
-            <a:pPr marL="342900" indent="-342900">
-              <a:spcAft>
-                <a:spcPts val="600"/>
-              </a:spcAft>
-              <a:buSzPct val="100000"/>
-              <a:buChar char="•"/>
-            </a:pPr>
-            <a:r>
-              <a:rPr lang="en-US" sz="1350" dirty="0">
-                <a:solidFill>
-                  <a:srgbClr val="1D2B2A"/>
-                </a:solidFill>
-                <a:latin typeface="Calibri" pitchFamily="34" charset="0"/>
-                <a:ea typeface="Calibri" pitchFamily="34" charset="-122"/>
-                <a:cs typeface="Calibri" pitchFamily="34" charset="-120"/>
-              </a:rPr>
-              <a:t>No delegated limit on credit approvals</a:t>
-            </a:r>
-            <a:endParaRPr lang="en-US" sz="1350" dirty="0"/>
+              <a:t>Approvals audit with role at the time; archive, never delete (10-year retention)</a:t>
+            </a:r>
+            <a:endParaRPr lang="en-US" sz="1200" dirty="0"/>
           </a:p>
         </p:txBody>
       </p:sp>
@@ -2313,6 +2797,353 @@
 <file path=ppt/slides/slide11.xml><?xml version="1.0" encoding="utf-8"?>
 <p:sld xmlns:a="http://schemas.openxmlformats.org/drawingml/2006/main" xmlns:r="http://schemas.openxmlformats.org/officeDocument/2006/relationships" xmlns:p="http://schemas.openxmlformats.org/presentationml/2006/main">
   <p:cSld name="Slide 11">
+    <p:bg>
+      <p:bgPr>
+        <a:solidFill>
+          <a:srgbClr val="FFFFFF"/>
+        </a:solidFill>
+      </p:bgPr>
+    </p:bg>
+    <p:spTree>
+      <p:nvGrpSpPr>
+        <p:cNvPr id="1" name=""/>
+        <p:cNvGrpSpPr/>
+        <p:nvPr/>
+      </p:nvGrpSpPr>
+      <p:grpSpPr>
+        <a:xfrm>
+          <a:off x="0" y="0"/>
+          <a:ext cx="0" cy="0"/>
+          <a:chOff x="0" y="0"/>
+          <a:chExt cx="0" cy="0"/>
+        </a:xfrm>
+      </p:grpSpPr>
+      <p:sp>
+        <p:nvSpPr>
+          <p:cNvPr id="2" name="Text 0"/>
+          <p:cNvSpPr txBox="1"/>
+          <p:nvPr/>
+        </p:nvSpPr>
+        <p:spPr>
+          <a:xfrm>
+            <a:off x="457200" y="274320"/>
+            <a:ext cx="8229600" cy="548640"/>
+          </a:xfrm>
+          <a:prstGeom prst="rect">
+            <a:avLst/>
+          </a:prstGeom>
+          <a:noFill/>
+          <a:ln/>
+        </p:spPr>
+        <p:txBody>
+          <a:bodyPr wrap="square" lIns="0" tIns="0" rIns="0" bIns="0" rtlCol="0" anchor="ctr">
+            <a:normAutofit/>
+          </a:bodyPr>
+          <a:lstStyle/>
+          <a:p>
+            <a:pPr indent="0" marL="0">
+              <a:buNone/>
+            </a:pPr>
+            <a:r>
+              <a:rPr lang="en-US" sz="2200" b="1" dirty="0">
+                <a:solidFill>
+                  <a:srgbClr val="0B4F4A"/>
+                </a:solidFill>
+                <a:latin typeface="Cambria" pitchFamily="34" charset="0"/>
+                <a:ea typeface="Cambria" pitchFamily="34" charset="-122"/>
+                <a:cs typeface="Cambria" pitchFamily="34" charset="-120"/>
+              </a:rPr>
+              <a:t>Code review: 20 defects fixed, each with a test</a:t>
+            </a:r>
+            <a:endParaRPr lang="en-US" sz="2200" dirty="0"/>
+          </a:p>
+        </p:txBody>
+      </p:sp>
+      <p:sp>
+        <p:nvSpPr>
+          <p:cNvPr id="3" name="Shape 1"/>
+          <p:cNvSpPr/>
+          <p:nvPr/>
+        </p:nvSpPr>
+        <p:spPr>
+          <a:xfrm>
+            <a:off x="457200" y="1097280"/>
+            <a:ext cx="2651760" cy="3566160"/>
+          </a:xfrm>
+          <a:prstGeom prst="roundRect">
+            <a:avLst>
+              <a:gd name="adj" fmla="val 2759"/>
+            </a:avLst>
+          </a:prstGeom>
+          <a:solidFill>
+            <a:srgbClr val="0B4F4A"/>
+          </a:solidFill>
+          <a:ln w="12700">
+            <a:solidFill>
+              <a:srgbClr val="0B4F4A"/>
+            </a:solidFill>
+            <a:prstDash val="solid"/>
+          </a:ln>
+        </p:spPr>
+      </p:sp>
+      <p:sp>
+        <p:nvSpPr>
+          <p:cNvPr id="4" name="Text 2"/>
+          <p:cNvSpPr txBox="1"/>
+          <p:nvPr/>
+        </p:nvSpPr>
+        <p:spPr>
+          <a:xfrm>
+            <a:off x="457200" y="1463040"/>
+            <a:ext cx="2651760" cy="1097280"/>
+          </a:xfrm>
+          <a:prstGeom prst="rect">
+            <a:avLst/>
+          </a:prstGeom>
+          <a:noFill/>
+          <a:ln/>
+        </p:spPr>
+        <p:txBody>
+          <a:bodyPr wrap="square" lIns="0" tIns="0" rIns="0" bIns="0" rtlCol="0" anchor="ctr"/>
+          <a:lstStyle/>
+          <a:p>
+            <a:pPr algn="ctr" indent="0" marL="0">
+              <a:buNone/>
+            </a:pPr>
+            <a:r>
+              <a:rPr lang="en-US" sz="6000" b="1" dirty="0">
+                <a:solidFill>
+                  <a:srgbClr val="FFFFFF"/>
+                </a:solidFill>
+                <a:latin typeface="Cambria" pitchFamily="34" charset="0"/>
+                <a:ea typeface="Cambria" pitchFamily="34" charset="-122"/>
+                <a:cs typeface="Cambria" pitchFamily="34" charset="-120"/>
+              </a:rPr>
+              <a:t>20</a:t>
+            </a:r>
+            <a:endParaRPr lang="en-US" sz="6000" dirty="0"/>
+          </a:p>
+        </p:txBody>
+      </p:sp>
+      <p:sp>
+        <p:nvSpPr>
+          <p:cNvPr id="5" name="Text 3"/>
+          <p:cNvSpPr txBox="1"/>
+          <p:nvPr/>
+        </p:nvSpPr>
+        <p:spPr>
+          <a:xfrm>
+            <a:off x="685800" y="2651760"/>
+            <a:ext cx="2194560" cy="1097280"/>
+          </a:xfrm>
+          <a:prstGeom prst="rect">
+            <a:avLst/>
+          </a:prstGeom>
+          <a:noFill/>
+          <a:ln/>
+        </p:spPr>
+        <p:txBody>
+          <a:bodyPr wrap="square" lIns="0" tIns="0" rIns="0" bIns="0" rtlCol="0" anchor="ctr"/>
+          <a:lstStyle/>
+          <a:p>
+            <a:pPr algn="ctr" indent="0" marL="0">
+              <a:buNone/>
+            </a:pPr>
+            <a:r>
+              <a:rPr lang="en-US" sz="1400" dirty="0">
+                <a:solidFill>
+                  <a:srgbClr val="CFE3DF"/>
+                </a:solidFill>
+                <a:latin typeface="Calibri" pitchFamily="34" charset="0"/>
+                <a:ea typeface="Calibri" pitchFamily="34" charset="-122"/>
+                <a:cs typeface="Calibri" pitchFamily="34" charset="-120"/>
+              </a:rPr>
+              <a:t>defects found and fixed, each with a regression test</a:t>
+            </a:r>
+            <a:endParaRPr lang="en-US" sz="1400" dirty="0"/>
+          </a:p>
+        </p:txBody>
+      </p:sp>
+      <p:sp>
+        <p:nvSpPr>
+          <p:cNvPr id="6" name="Text 4"/>
+          <p:cNvSpPr txBox="1"/>
+          <p:nvPr/>
+        </p:nvSpPr>
+        <p:spPr>
+          <a:xfrm>
+            <a:off x="3474720" y="1143000"/>
+            <a:ext cx="5212080" cy="3566160"/>
+          </a:xfrm>
+          <a:prstGeom prst="rect">
+            <a:avLst/>
+          </a:prstGeom>
+          <a:noFill/>
+          <a:ln/>
+        </p:spPr>
+        <p:txBody>
+          <a:bodyPr wrap="square" lIns="635" tIns="635" rIns="635" bIns="635" rtlCol="0" anchor="t"/>
+          <a:lstStyle/>
+          <a:p>
+            <a:pPr marL="342900" indent="-342900">
+              <a:spcAft>
+                <a:spcPts val="600"/>
+              </a:spcAft>
+              <a:buSzPct val="100000"/>
+              <a:buChar char="•"/>
+            </a:pPr>
+            <a:r>
+              <a:rPr lang="en-US" sz="1350" dirty="0">
+                <a:solidFill>
+                  <a:srgbClr val="1D2B2A"/>
+                </a:solidFill>
+                <a:latin typeface="Calibri" pitchFamily="34" charset="0"/>
+                <a:ea typeface="Calibri" pitchFamily="34" charset="-122"/>
+                <a:cs typeface="Calibri" pitchFamily="34" charset="-120"/>
+              </a:rPr>
+              <a:t>A refused loan overpayment still marked installments as paid</a:t>
+            </a:r>
+            <a:endParaRPr lang="en-US" sz="1350" dirty="0"/>
+          </a:p>
+          <a:p>
+            <a:pPr marL="342900" indent="-342900">
+              <a:spcAft>
+                <a:spcPts val="600"/>
+              </a:spcAft>
+              <a:buSzPct val="100000"/>
+              <a:buChar char="•"/>
+            </a:pPr>
+            <a:r>
+              <a:rPr lang="en-US" sz="1350" dirty="0">
+                <a:solidFill>
+                  <a:srgbClr val="1D2B2A"/>
+                </a:solidFill>
+                <a:latin typeface="Calibri" pitchFamily="34" charset="0"/>
+                <a:ea typeface="Calibri" pitchFamily="34" charset="-122"/>
+                <a:cs typeface="Calibri" pitchFamily="34" charset="-120"/>
+              </a:rPr>
+              <a:t>Resolving a dispute twice refunded the customer twice</a:t>
+            </a:r>
+            <a:endParaRPr lang="en-US" sz="1350" dirty="0"/>
+          </a:p>
+          <a:p>
+            <a:pPr marL="342900" indent="-342900">
+              <a:spcAft>
+                <a:spcPts val="600"/>
+              </a:spcAft>
+              <a:buSzPct val="100000"/>
+              <a:buChar char="•"/>
+            </a:pPr>
+            <a:r>
+              <a:rPr lang="en-US" sz="1350" dirty="0">
+                <a:solidFill>
+                  <a:srgbClr val="1D2B2A"/>
+                </a:solidFill>
+                <a:latin typeface="Calibri" pitchFamily="34" charset="0"/>
+                <a:ea typeface="Calibri" pitchFamily="34" charset="-122"/>
+                <a:cs typeface="Calibri" pitchFamily="34" charset="-120"/>
+              </a:rPr>
+              <a:t>Recording an ACTIVE card as found destroyed it</a:t>
+            </a:r>
+            <a:endParaRPr lang="en-US" sz="1350" dirty="0"/>
+          </a:p>
+          <a:p>
+            <a:pPr marL="342900" indent="-342900">
+              <a:spcAft>
+                <a:spcPts val="600"/>
+              </a:spcAft>
+              <a:buSzPct val="100000"/>
+              <a:buChar char="•"/>
+            </a:pPr>
+            <a:r>
+              <a:rPr lang="en-US" sz="1350" dirty="0">
+                <a:solidFill>
+                  <a:srgbClr val="1D2B2A"/>
+                </a:solidFill>
+                <a:latin typeface="Calibri" pitchFamily="34" charset="0"/>
+                <a:ea typeface="Calibri" pitchFamily="34" charset="-122"/>
+                <a:cs typeface="Calibri" pitchFamily="34" charset="-120"/>
+              </a:rPr>
+              <a:t>Replacement cards blocked once the product was withdrawn</a:t>
+            </a:r>
+            <a:endParaRPr lang="en-US" sz="1350" dirty="0"/>
+          </a:p>
+          <a:p>
+            <a:pPr marL="342900" indent="-342900">
+              <a:spcAft>
+                <a:spcPts val="600"/>
+              </a:spcAft>
+              <a:buSzPct val="100000"/>
+              <a:buChar char="•"/>
+            </a:pPr>
+            <a:r>
+              <a:rPr lang="en-US" sz="1350" dirty="0">
+                <a:solidFill>
+                  <a:srgbClr val="1D2B2A"/>
+                </a:solidFill>
+                <a:latin typeface="Calibri" pitchFamily="34" charset="0"/>
+                <a:ea typeface="Calibri" pitchFamily="34" charset="-122"/>
+                <a:cs typeface="Calibri" pitchFamily="34" charset="-120"/>
+              </a:rPr>
+              <a:t>Bank fees used up customers' savings withdrawals</a:t>
+            </a:r>
+            <a:endParaRPr lang="en-US" sz="1350" dirty="0"/>
+          </a:p>
+          <a:p>
+            <a:pPr marL="342900" indent="-342900">
+              <a:spcAft>
+                <a:spcPts val="600"/>
+              </a:spcAft>
+              <a:buSzPct val="100000"/>
+              <a:buChar char="•"/>
+            </a:pPr>
+            <a:r>
+              <a:rPr lang="en-US" sz="1350" dirty="0">
+                <a:solidFill>
+                  <a:srgbClr val="1D2B2A"/>
+                </a:solidFill>
+                <a:latin typeface="Calibri" pitchFamily="34" charset="0"/>
+                <a:ea typeface="Calibri" pitchFamily="34" charset="-122"/>
+                <a:cs typeface="Calibri" pitchFamily="34" charset="-120"/>
+              </a:rPr>
+              <a:t>Account closure ignored holds and pending payments</a:t>
+            </a:r>
+            <a:endParaRPr lang="en-US" sz="1350" dirty="0"/>
+          </a:p>
+          <a:p>
+            <a:pPr marL="342900" indent="-342900">
+              <a:spcAft>
+                <a:spcPts val="600"/>
+              </a:spcAft>
+              <a:buSzPct val="100000"/>
+              <a:buChar char="•"/>
+            </a:pPr>
+            <a:r>
+              <a:rPr lang="en-US" sz="1350" dirty="0">
+                <a:solidFill>
+                  <a:srgbClr val="1D2B2A"/>
+                </a:solidFill>
+                <a:latin typeface="Calibri" pitchFamily="34" charset="0"/>
+                <a:ea typeface="Calibri" pitchFamily="34" charset="-122"/>
+                <a:cs typeface="Calibri" pitchFamily="34" charset="-120"/>
+              </a:rPr>
+              <a:t>No delegated limit on credit approvals</a:t>
+            </a:r>
+            <a:endParaRPr lang="en-US" sz="1350" dirty="0"/>
+          </a:p>
+        </p:txBody>
+      </p:sp>
+    </p:spTree>
+  </p:cSld>
+  <p:clrMapOvr>
+    <a:masterClrMapping/>
+  </p:clrMapOvr>
+</p:sld>
+</file>
+
+<file path=ppt/slides/slide12.xml><?xml version="1.0" encoding="utf-8"?>
+<p:sld xmlns:a="http://schemas.openxmlformats.org/drawingml/2006/main" xmlns:r="http://schemas.openxmlformats.org/officeDocument/2006/relationships" xmlns:p="http://schemas.openxmlformats.org/presentationml/2006/main">
+  <p:cSld name="Slide 12">
     <p:bg>
       <p:bgPr>
         <a:solidFill>
@@ -2874,7 +3705,7 @@
                 <a:ea typeface="Cambria" pitchFamily="34" charset="-122"/>
                 <a:cs typeface="Cambria" pitchFamily="34" charset="-120"/>
               </a:rPr>
-              <a:t>67</a:t>
+              <a:t>73</a:t>
             </a:r>
             <a:endParaRPr lang="en-US" sz="4000" dirty="0"/>
           </a:p>
@@ -2979,7 +3810,7 @@
                 <a:ea typeface="Cambria" pitchFamily="34" charset="-122"/>
                 <a:cs typeface="Cambria" pitchFamily="34" charset="-120"/>
               </a:rPr>
-              <a:t>78</a:t>
+              <a:t>96</a:t>
             </a:r>
             <a:endParaRPr lang="en-US" sz="4000" dirty="0"/>
           </a:p>
@@ -3018,7 +3849,7 @@
                 <a:ea typeface="Calibri" pitchFamily="34" charset="-122"/>
                 <a:cs typeface="Calibri" pitchFamily="34" charset="-120"/>
               </a:rPr>
-              <a:t>Bank operations (66 commands)</a:t>
+              <a:t>Bank operations (78 commands)</a:t>
             </a:r>
             <a:endParaRPr lang="en-US" sz="1300" dirty="0"/>
           </a:p>
@@ -3189,7 +4020,7 @@
                 <a:ea typeface="Cambria" pitchFamily="34" charset="-122"/>
                 <a:cs typeface="Cambria" pitchFamily="34" charset="-120"/>
               </a:rPr>
-              <a:t>13</a:t>
+              <a:t>16</a:t>
             </a:r>
             <a:endParaRPr lang="en-US" sz="4000" dirty="0"/>
           </a:p>
@@ -3294,7 +4125,7 @@
                 <a:ea typeface="Cambria" pitchFamily="34" charset="-122"/>
                 <a:cs typeface="Cambria" pitchFamily="34" charset="-120"/>
               </a:rPr>
-              <a:t>49</a:t>
+              <a:t>60</a:t>
             </a:r>
             <a:endParaRPr lang="en-US" sz="4000" dirty="0"/>
           </a:p>
@@ -4594,7 +5425,7 @@
                 <a:ea typeface="Calibri" pitchFamily="34" charset="-122"/>
                 <a:cs typeface="Calibri" pitchFamily="34" charset="-120"/>
               </a:rPr>
-              <a:t>CurrentAccount overrides overdraft_limit(); SavingsAccount extends check_debit()</a:t>
+              <a:t>Current overrides overdraft_limit(); Savings and FixedTermDeposit extend check_debit()</a:t>
             </a:r>
             <a:endParaRPr lang="en-US" sz="1300" dirty="0"/>
           </a:p>
@@ -4664,8 +5495,8 @@
         </p:blipFill>
         <p:spPr>
           <a:xfrm>
-            <a:off x="4761269" y="1097280"/>
-            <a:ext cx="3599102" cy="3611880"/>
+            <a:off x="4526280" y="1173952"/>
+            <a:ext cx="4069080" cy="3458535"/>
           </a:xfrm>
           <a:prstGeom prst="rect">
             <a:avLst/>
@@ -4800,8 +5631,8 @@
         </p:blipFill>
         <p:spPr>
           <a:xfrm>
-            <a:off x="365760" y="1328703"/>
-            <a:ext cx="8412480" cy="2188914"/>
+            <a:off x="365760" y="1490736"/>
+            <a:ext cx="8412480" cy="1864848"/>
           </a:xfrm>
           <a:prstGeom prst="rect">
             <a:avLst/>
@@ -4866,7 +5697,7 @@
                 <a:ea typeface="Calibri" pitchFamily="34" charset="-122"/>
                 <a:cs typeface="Calibri" pitchFamily="34" charset="-120"/>
               </a:rPr>
-              <a:t>TransferPayment snapshots the beneficiary version; CardPayment the exact card</a:t>
+              <a:t>Transfer snapshots the beneficiary version; Card the exact card; Bill the biller; OwnAccount the target</a:t>
             </a:r>
             <a:endParaRPr lang="en-US" sz="1250" dirty="0"/>
           </a:p>
@@ -5021,8 +5852,8 @@
         </p:blipFill>
         <p:spPr>
           <a:xfrm>
-            <a:off x="1689354" y="1234440"/>
-            <a:ext cx="5765292" cy="2377440"/>
+            <a:off x="1803357" y="1234440"/>
+            <a:ext cx="5537286" cy="2377440"/>
           </a:xfrm>
           <a:prstGeom prst="rect">
             <a:avLst/>
@@ -5877,7 +6708,7 @@
                 <a:ea typeface="Cambria" pitchFamily="34" charset="-122"/>
                 <a:cs typeface="Cambria" pitchFamily="34" charset="-120"/>
               </a:rPr>
-              <a:t>13 scenarios break the normal workflow</a:t>
+              <a:t>16 scenarios break the normal workflow</a:t>
             </a:r>
             <a:endParaRPr lang="en-US" sz="2800" dirty="0"/>
           </a:p>
@@ -5916,7 +6747,7 @@
                 <a:ea typeface="Calibri" pitchFamily="34" charset="-122"/>
                 <a:cs typeface="Calibri" pitchFamily="34" charset="-120"/>
               </a:rPr>
-              <a:t>All ten critical cases in the brief are covered</a:t>
+              <a:t>All ten critical cases in the brief are covered, plus every participant it names</a:t>
             </a:r>
             <a:endParaRPr lang="en-US" sz="1200" dirty="0"/>
           </a:p>
@@ -5930,7 +6761,7 @@
         </p:nvSpPr>
         <p:spPr>
           <a:xfrm>
-            <a:off x="457200" y="1234440"/>
+            <a:off x="457200" y="1188720"/>
             <a:ext cx="384048" cy="384048"/>
           </a:xfrm>
           <a:prstGeom prst="ellipse">
@@ -5950,7 +6781,7 @@
         </p:nvSpPr>
         <p:spPr>
           <a:xfrm>
-            <a:off x="457200" y="1234440"/>
+            <a:off x="457200" y="1188720"/>
             <a:ext cx="384048" cy="384048"/>
           </a:xfrm>
           <a:prstGeom prst="rect">
@@ -5989,7 +6820,7 @@
         </p:nvSpPr>
         <p:spPr>
           <a:xfrm>
-            <a:off x="960120" y="1234440"/>
+            <a:off x="960120" y="1188720"/>
             <a:ext cx="3566160" cy="384048"/>
           </a:xfrm>
           <a:prstGeom prst="rect">
@@ -6028,7 +6859,7 @@
         </p:nvSpPr>
         <p:spPr>
           <a:xfrm>
-            <a:off x="457200" y="1746504"/>
+            <a:off x="457200" y="1645920"/>
             <a:ext cx="384048" cy="384048"/>
           </a:xfrm>
           <a:prstGeom prst="ellipse">
@@ -6048,7 +6879,7 @@
         </p:nvSpPr>
         <p:spPr>
           <a:xfrm>
-            <a:off x="457200" y="1746504"/>
+            <a:off x="457200" y="1645920"/>
             <a:ext cx="384048" cy="384048"/>
           </a:xfrm>
           <a:prstGeom prst="rect">
@@ -6087,7 +6918,7 @@
         </p:nvSpPr>
         <p:spPr>
           <a:xfrm>
-            <a:off x="960120" y="1746504"/>
+            <a:off x="960120" y="1645920"/>
             <a:ext cx="3566160" cy="384048"/>
           </a:xfrm>
           <a:prstGeom prst="rect">
@@ -6126,7 +6957,7 @@
         </p:nvSpPr>
         <p:spPr>
           <a:xfrm>
-            <a:off x="457200" y="2258568"/>
+            <a:off x="457200" y="2103120"/>
             <a:ext cx="384048" cy="384048"/>
           </a:xfrm>
           <a:prstGeom prst="ellipse">
@@ -6146,7 +6977,7 @@
         </p:nvSpPr>
         <p:spPr>
           <a:xfrm>
-            <a:off x="457200" y="2258568"/>
+            <a:off x="457200" y="2103120"/>
             <a:ext cx="384048" cy="384048"/>
           </a:xfrm>
           <a:prstGeom prst="rect">
@@ -6185,7 +7016,7 @@
         </p:nvSpPr>
         <p:spPr>
           <a:xfrm>
-            <a:off x="960120" y="2258568"/>
+            <a:off x="960120" y="2103120"/>
             <a:ext cx="3566160" cy="384048"/>
           </a:xfrm>
           <a:prstGeom prst="rect">
@@ -6224,7 +7055,7 @@
         </p:nvSpPr>
         <p:spPr>
           <a:xfrm>
-            <a:off x="457200" y="2770632"/>
+            <a:off x="457200" y="2560320"/>
             <a:ext cx="384048" cy="384048"/>
           </a:xfrm>
           <a:prstGeom prst="ellipse">
@@ -6244,7 +7075,7 @@
         </p:nvSpPr>
         <p:spPr>
           <a:xfrm>
-            <a:off x="457200" y="2770632"/>
+            <a:off x="457200" y="2560320"/>
             <a:ext cx="384048" cy="384048"/>
           </a:xfrm>
           <a:prstGeom prst="rect">
@@ -6283,7 +7114,7 @@
         </p:nvSpPr>
         <p:spPr>
           <a:xfrm>
-            <a:off x="960120" y="2770632"/>
+            <a:off x="960120" y="2560320"/>
             <a:ext cx="3566160" cy="384048"/>
           </a:xfrm>
           <a:prstGeom prst="rect">
@@ -6322,7 +7153,7 @@
         </p:nvSpPr>
         <p:spPr>
           <a:xfrm>
-            <a:off x="457200" y="3282696"/>
+            <a:off x="457200" y="3017520"/>
             <a:ext cx="384048" cy="384048"/>
           </a:xfrm>
           <a:prstGeom prst="ellipse">
@@ -6342,7 +7173,7 @@
         </p:nvSpPr>
         <p:spPr>
           <a:xfrm>
-            <a:off x="457200" y="3282696"/>
+            <a:off x="457200" y="3017520"/>
             <a:ext cx="384048" cy="384048"/>
           </a:xfrm>
           <a:prstGeom prst="rect">
@@ -6381,7 +7212,7 @@
         </p:nvSpPr>
         <p:spPr>
           <a:xfrm>
-            <a:off x="960120" y="3282696"/>
+            <a:off x="960120" y="3017520"/>
             <a:ext cx="3566160" cy="384048"/>
           </a:xfrm>
           <a:prstGeom prst="rect">
@@ -6420,7 +7251,7 @@
         </p:nvSpPr>
         <p:spPr>
           <a:xfrm>
-            <a:off x="457200" y="3794760"/>
+            <a:off x="457200" y="3474720"/>
             <a:ext cx="384048" cy="384048"/>
           </a:xfrm>
           <a:prstGeom prst="ellipse">
@@ -6440,7 +7271,7 @@
         </p:nvSpPr>
         <p:spPr>
           <a:xfrm>
-            <a:off x="457200" y="3794760"/>
+            <a:off x="457200" y="3474720"/>
             <a:ext cx="384048" cy="384048"/>
           </a:xfrm>
           <a:prstGeom prst="rect">
@@ -6479,7 +7310,7 @@
         </p:nvSpPr>
         <p:spPr>
           <a:xfrm>
-            <a:off x="960120" y="3794760"/>
+            <a:off x="960120" y="3474720"/>
             <a:ext cx="3566160" cy="384048"/>
           </a:xfrm>
           <a:prstGeom prst="rect">
@@ -6518,7 +7349,7 @@
         </p:nvSpPr>
         <p:spPr>
           <a:xfrm>
-            <a:off x="457200" y="4306824"/>
+            <a:off x="457200" y="3931920"/>
             <a:ext cx="384048" cy="384048"/>
           </a:xfrm>
           <a:prstGeom prst="ellipse">
@@ -6538,7 +7369,7 @@
         </p:nvSpPr>
         <p:spPr>
           <a:xfrm>
-            <a:off x="457200" y="4306824"/>
+            <a:off x="457200" y="3931920"/>
             <a:ext cx="384048" cy="384048"/>
           </a:xfrm>
           <a:prstGeom prst="rect">
@@ -6577,7 +7408,7 @@
         </p:nvSpPr>
         <p:spPr>
           <a:xfrm>
-            <a:off x="960120" y="4306824"/>
+            <a:off x="960120" y="3931920"/>
             <a:ext cx="3566160" cy="384048"/>
           </a:xfrm>
           <a:prstGeom prst="rect">
@@ -6616,7 +7447,7 @@
         </p:nvSpPr>
         <p:spPr>
           <a:xfrm>
-            <a:off x="4663440" y="1234440"/>
+            <a:off x="457200" y="4389120"/>
             <a:ext cx="384048" cy="384048"/>
           </a:xfrm>
           <a:prstGeom prst="ellipse">
@@ -6636,7 +7467,7 @@
         </p:nvSpPr>
         <p:spPr>
           <a:xfrm>
-            <a:off x="4663440" y="1234440"/>
+            <a:off x="457200" y="4389120"/>
             <a:ext cx="384048" cy="384048"/>
           </a:xfrm>
           <a:prstGeom prst="rect">
@@ -6675,7 +7506,7 @@
         </p:nvSpPr>
         <p:spPr>
           <a:xfrm>
-            <a:off x="5166360" y="1234440"/>
+            <a:off x="960120" y="4389120"/>
             <a:ext cx="3566160" cy="384048"/>
           </a:xfrm>
           <a:prstGeom prst="rect">
@@ -6714,7 +7545,7 @@
         </p:nvSpPr>
         <p:spPr>
           <a:xfrm>
-            <a:off x="4663440" y="1746504"/>
+            <a:off x="4663440" y="1188720"/>
             <a:ext cx="384048" cy="384048"/>
           </a:xfrm>
           <a:prstGeom prst="ellipse">
@@ -6734,7 +7565,7 @@
         </p:nvSpPr>
         <p:spPr>
           <a:xfrm>
-            <a:off x="4663440" y="1746504"/>
+            <a:off x="4663440" y="1188720"/>
             <a:ext cx="384048" cy="384048"/>
           </a:xfrm>
           <a:prstGeom prst="rect">
@@ -6773,7 +7604,7 @@
         </p:nvSpPr>
         <p:spPr>
           <a:xfrm>
-            <a:off x="5166360" y="1746504"/>
+            <a:off x="5166360" y="1188720"/>
             <a:ext cx="3566160" cy="384048"/>
           </a:xfrm>
           <a:prstGeom prst="rect">
@@ -6812,7 +7643,7 @@
         </p:nvSpPr>
         <p:spPr>
           <a:xfrm>
-            <a:off x="4663440" y="2258568"/>
+            <a:off x="4663440" y="1645920"/>
             <a:ext cx="384048" cy="384048"/>
           </a:xfrm>
           <a:prstGeom prst="ellipse">
@@ -6832,7 +7663,7 @@
         </p:nvSpPr>
         <p:spPr>
           <a:xfrm>
-            <a:off x="4663440" y="2258568"/>
+            <a:off x="4663440" y="1645920"/>
             <a:ext cx="384048" cy="384048"/>
           </a:xfrm>
           <a:prstGeom prst="rect">
@@ -6871,7 +7702,7 @@
         </p:nvSpPr>
         <p:spPr>
           <a:xfrm>
-            <a:off x="5166360" y="2258568"/>
+            <a:off x="5166360" y="1645920"/>
             <a:ext cx="3566160" cy="384048"/>
           </a:xfrm>
           <a:prstGeom prst="rect">
@@ -6910,7 +7741,7 @@
         </p:nvSpPr>
         <p:spPr>
           <a:xfrm>
-            <a:off x="4663440" y="2770632"/>
+            <a:off x="4663440" y="2103120"/>
             <a:ext cx="384048" cy="384048"/>
           </a:xfrm>
           <a:prstGeom prst="ellipse">
@@ -6930,7 +7761,7 @@
         </p:nvSpPr>
         <p:spPr>
           <a:xfrm>
-            <a:off x="4663440" y="2770632"/>
+            <a:off x="4663440" y="2103120"/>
             <a:ext cx="384048" cy="384048"/>
           </a:xfrm>
           <a:prstGeom prst="rect">
@@ -6969,7 +7800,7 @@
         </p:nvSpPr>
         <p:spPr>
           <a:xfrm>
-            <a:off x="5166360" y="2770632"/>
+            <a:off x="5166360" y="2103120"/>
             <a:ext cx="3566160" cy="384048"/>
           </a:xfrm>
           <a:prstGeom prst="rect">
@@ -7008,7 +7839,7 @@
         </p:nvSpPr>
         <p:spPr>
           <a:xfrm>
-            <a:off x="4663440" y="3282696"/>
+            <a:off x="4663440" y="2560320"/>
             <a:ext cx="384048" cy="384048"/>
           </a:xfrm>
           <a:prstGeom prst="ellipse">
@@ -7028,7 +7859,7 @@
         </p:nvSpPr>
         <p:spPr>
           <a:xfrm>
-            <a:off x="4663440" y="3282696"/>
+            <a:off x="4663440" y="2560320"/>
             <a:ext cx="384048" cy="384048"/>
           </a:xfrm>
           <a:prstGeom prst="rect">
@@ -7067,7 +7898,7 @@
         </p:nvSpPr>
         <p:spPr>
           <a:xfrm>
-            <a:off x="5166360" y="3282696"/>
+            <a:off x="5166360" y="2560320"/>
             <a:ext cx="3566160" cy="384048"/>
           </a:xfrm>
           <a:prstGeom prst="rect">
@@ -7106,7 +7937,7 @@
         </p:nvSpPr>
         <p:spPr>
           <a:xfrm>
-            <a:off x="4663440" y="3794760"/>
+            <a:off x="4663440" y="3017520"/>
             <a:ext cx="384048" cy="384048"/>
           </a:xfrm>
           <a:prstGeom prst="ellipse">
@@ -7126,7 +7957,7 @@
         </p:nvSpPr>
         <p:spPr>
           <a:xfrm>
-            <a:off x="4663440" y="3794760"/>
+            <a:off x="4663440" y="3017520"/>
             <a:ext cx="384048" cy="384048"/>
           </a:xfrm>
           <a:prstGeom prst="rect">
@@ -7165,7 +7996,7 @@
         </p:nvSpPr>
         <p:spPr>
           <a:xfrm>
-            <a:off x="5166360" y="3794760"/>
+            <a:off x="5166360" y="3017520"/>
             <a:ext cx="3566160" cy="384048"/>
           </a:xfrm>
           <a:prstGeom prst="rect">
@@ -7191,6 +8022,300 @@
                 <a:cs typeface="Calibri" pitchFamily="34" charset="-120"/>
               </a:rPr>
               <a:t>Staff and customer leave</a:t>
+            </a:r>
+            <a:endParaRPr lang="en-US" sz="1250" dirty="0"/>
+          </a:p>
+        </p:txBody>
+      </p:sp>
+      <p:sp>
+        <p:nvSpPr>
+          <p:cNvPr id="43" name="Shape 41"/>
+          <p:cNvSpPr/>
+          <p:nvPr/>
+        </p:nvSpPr>
+        <p:spPr>
+          <a:xfrm>
+            <a:off x="4663440" y="3474720"/>
+            <a:ext cx="384048" cy="384048"/>
+          </a:xfrm>
+          <a:prstGeom prst="ellipse">
+            <a:avLst/>
+          </a:prstGeom>
+          <a:solidFill>
+            <a:srgbClr val="B8862F"/>
+          </a:solidFill>
+          <a:ln/>
+        </p:spPr>
+      </p:sp>
+      <p:sp>
+        <p:nvSpPr>
+          <p:cNvPr id="44" name="Text 42"/>
+          <p:cNvSpPr txBox="1"/>
+          <p:nvPr/>
+        </p:nvSpPr>
+        <p:spPr>
+          <a:xfrm>
+            <a:off x="4663440" y="3474720"/>
+            <a:ext cx="384048" cy="384048"/>
+          </a:xfrm>
+          <a:prstGeom prst="rect">
+            <a:avLst/>
+          </a:prstGeom>
+          <a:noFill/>
+          <a:ln/>
+        </p:spPr>
+        <p:txBody>
+          <a:bodyPr wrap="square" lIns="0" tIns="0" rIns="0" bIns="0" rtlCol="0" anchor="ctr"/>
+          <a:lstStyle/>
+          <a:p>
+            <a:pPr algn="ctr" indent="0" marL="0">
+              <a:buNone/>
+            </a:pPr>
+            <a:r>
+              <a:rPr lang="en-US" sz="1400" b="1" dirty="0">
+                <a:solidFill>
+                  <a:srgbClr val="FFFFFF"/>
+                </a:solidFill>
+                <a:latin typeface="Cambria" pitchFamily="34" charset="0"/>
+                <a:ea typeface="Cambria" pitchFamily="34" charset="-122"/>
+                <a:cs typeface="Cambria" pitchFamily="34" charset="-120"/>
+              </a:rPr>
+              <a:t>14</a:t>
+            </a:r>
+            <a:endParaRPr lang="en-US" sz="1400" dirty="0"/>
+          </a:p>
+        </p:txBody>
+      </p:sp>
+      <p:sp>
+        <p:nvSpPr>
+          <p:cNvPr id="45" name="Text 43"/>
+          <p:cNvSpPr txBox="1"/>
+          <p:nvPr/>
+        </p:nvSpPr>
+        <p:spPr>
+          <a:xfrm>
+            <a:off x="5166360" y="3474720"/>
+            <a:ext cx="3566160" cy="384048"/>
+          </a:xfrm>
+          <a:prstGeom prst="rect">
+            <a:avLst/>
+          </a:prstGeom>
+          <a:noFill/>
+          <a:ln/>
+        </p:spPr>
+        <p:txBody>
+          <a:bodyPr wrap="square" lIns="0" tIns="0" rIns="0" bIns="0" rtlCol="0" anchor="ctr"/>
+          <a:lstStyle/>
+          <a:p>
+            <a:pPr indent="0" marL="0">
+              <a:buNone/>
+            </a:pPr>
+            <a:r>
+              <a:rPr lang="en-US" sz="1250" dirty="0">
+                <a:solidFill>
+                  <a:srgbClr val="1D2B2A"/>
+                </a:solidFill>
+                <a:latin typeface="Calibri" pitchFamily="34" charset="0"/>
+                <a:ea typeface="Calibri" pitchFamily="34" charset="-122"/>
+                <a:cs typeface="Calibri" pitchFamily="34" charset="-120"/>
+              </a:rPr>
+              <a:t>Sole trader, private client, term deposits</a:t>
+            </a:r>
+            <a:endParaRPr lang="en-US" sz="1250" dirty="0"/>
+          </a:p>
+        </p:txBody>
+      </p:sp>
+      <p:sp>
+        <p:nvSpPr>
+          <p:cNvPr id="46" name="Shape 44"/>
+          <p:cNvSpPr/>
+          <p:nvPr/>
+        </p:nvSpPr>
+        <p:spPr>
+          <a:xfrm>
+            <a:off x="4663440" y="3931920"/>
+            <a:ext cx="384048" cy="384048"/>
+          </a:xfrm>
+          <a:prstGeom prst="ellipse">
+            <a:avLst/>
+          </a:prstGeom>
+          <a:solidFill>
+            <a:srgbClr val="B8862F"/>
+          </a:solidFill>
+          <a:ln/>
+        </p:spPr>
+      </p:sp>
+      <p:sp>
+        <p:nvSpPr>
+          <p:cNvPr id="47" name="Text 45"/>
+          <p:cNvSpPr txBox="1"/>
+          <p:nvPr/>
+        </p:nvSpPr>
+        <p:spPr>
+          <a:xfrm>
+            <a:off x="4663440" y="3931920"/>
+            <a:ext cx="384048" cy="384048"/>
+          </a:xfrm>
+          <a:prstGeom prst="rect">
+            <a:avLst/>
+          </a:prstGeom>
+          <a:noFill/>
+          <a:ln/>
+        </p:spPr>
+        <p:txBody>
+          <a:bodyPr wrap="square" lIns="0" tIns="0" rIns="0" bIns="0" rtlCol="0" anchor="ctr"/>
+          <a:lstStyle/>
+          <a:p>
+            <a:pPr algn="ctr" indent="0" marL="0">
+              <a:buNone/>
+            </a:pPr>
+            <a:r>
+              <a:rPr lang="en-US" sz="1400" b="1" dirty="0">
+                <a:solidFill>
+                  <a:srgbClr val="FFFFFF"/>
+                </a:solidFill>
+                <a:latin typeface="Cambria" pitchFamily="34" charset="0"/>
+                <a:ea typeface="Cambria" pitchFamily="34" charset="-122"/>
+                <a:cs typeface="Cambria" pitchFamily="34" charset="-120"/>
+              </a:rPr>
+              <a:t>15</a:t>
+            </a:r>
+            <a:endParaRPr lang="en-US" sz="1400" dirty="0"/>
+          </a:p>
+        </p:txBody>
+      </p:sp>
+      <p:sp>
+        <p:nvSpPr>
+          <p:cNvPr id="48" name="Text 46"/>
+          <p:cNvSpPr txBox="1"/>
+          <p:nvPr/>
+        </p:nvSpPr>
+        <p:spPr>
+          <a:xfrm>
+            <a:off x="5166360" y="3931920"/>
+            <a:ext cx="3566160" cy="384048"/>
+          </a:xfrm>
+          <a:prstGeom prst="rect">
+            <a:avLst/>
+          </a:prstGeom>
+          <a:noFill/>
+          <a:ln/>
+        </p:spPr>
+        <p:txBody>
+          <a:bodyPr wrap="square" lIns="0" tIns="0" rIns="0" bIns="0" rtlCol="0" anchor="ctr"/>
+          <a:lstStyle/>
+          <a:p>
+            <a:pPr indent="0" marL="0">
+              <a:buNone/>
+            </a:pPr>
+            <a:r>
+              <a:rPr lang="en-US" sz="1250" dirty="0">
+                <a:solidFill>
+                  <a:srgbClr val="1D2B2A"/>
+                </a:solidFill>
+                <a:latin typeface="Calibri" pitchFamily="34" charset="0"/>
+                <a:ea typeface="Calibri" pitchFamily="34" charset="-122"/>
+                <a:cs typeface="Calibri" pitchFamily="34" charset="-120"/>
+              </a:rPr>
+              <a:t>Card controls, bills, card search</a:t>
+            </a:r>
+            <a:endParaRPr lang="en-US" sz="1250" dirty="0"/>
+          </a:p>
+        </p:txBody>
+      </p:sp>
+      <p:sp>
+        <p:nvSpPr>
+          <p:cNvPr id="49" name="Shape 47"/>
+          <p:cNvSpPr/>
+          <p:nvPr/>
+        </p:nvSpPr>
+        <p:spPr>
+          <a:xfrm>
+            <a:off x="4663440" y="4389120"/>
+            <a:ext cx="384048" cy="384048"/>
+          </a:xfrm>
+          <a:prstGeom prst="ellipse">
+            <a:avLst/>
+          </a:prstGeom>
+          <a:solidFill>
+            <a:srgbClr val="B8862F"/>
+          </a:solidFill>
+          <a:ln/>
+        </p:spPr>
+      </p:sp>
+      <p:sp>
+        <p:nvSpPr>
+          <p:cNvPr id="50" name="Text 48"/>
+          <p:cNvSpPr txBox="1"/>
+          <p:nvPr/>
+        </p:nvSpPr>
+        <p:spPr>
+          <a:xfrm>
+            <a:off x="4663440" y="4389120"/>
+            <a:ext cx="384048" cy="384048"/>
+          </a:xfrm>
+          <a:prstGeom prst="rect">
+            <a:avLst/>
+          </a:prstGeom>
+          <a:noFill/>
+          <a:ln/>
+        </p:spPr>
+        <p:txBody>
+          <a:bodyPr wrap="square" lIns="0" tIns="0" rIns="0" bIns="0" rtlCol="0" anchor="ctr"/>
+          <a:lstStyle/>
+          <a:p>
+            <a:pPr algn="ctr" indent="0" marL="0">
+              <a:buNone/>
+            </a:pPr>
+            <a:r>
+              <a:rPr lang="en-US" sz="1400" b="1" dirty="0">
+                <a:solidFill>
+                  <a:srgbClr val="FFFFFF"/>
+                </a:solidFill>
+                <a:latin typeface="Cambria" pitchFamily="34" charset="0"/>
+                <a:ea typeface="Cambria" pitchFamily="34" charset="-122"/>
+                <a:cs typeface="Cambria" pitchFamily="34" charset="-120"/>
+              </a:rPr>
+              <a:t>16</a:t>
+            </a:r>
+            <a:endParaRPr lang="en-US" sz="1400" dirty="0"/>
+          </a:p>
+        </p:txBody>
+      </p:sp>
+      <p:sp>
+        <p:nvSpPr>
+          <p:cNvPr id="51" name="Text 49"/>
+          <p:cNvSpPr txBox="1"/>
+          <p:nvPr/>
+        </p:nvSpPr>
+        <p:spPr>
+          <a:xfrm>
+            <a:off x="5166360" y="4389120"/>
+            <a:ext cx="3566160" cy="384048"/>
+          </a:xfrm>
+          <a:prstGeom prst="rect">
+            <a:avLst/>
+          </a:prstGeom>
+          <a:noFill/>
+          <a:ln/>
+        </p:spPr>
+        <p:txBody>
+          <a:bodyPr wrap="square" lIns="0" tIns="0" rIns="0" bIns="0" rtlCol="0" anchor="ctr"/>
+          <a:lstStyle/>
+          <a:p>
+            <a:pPr indent="0" marL="0">
+              <a:buNone/>
+            </a:pPr>
+            <a:r>
+              <a:rPr lang="en-US" sz="1250" dirty="0">
+                <a:solidFill>
+                  <a:srgbClr val="1D2B2A"/>
+                </a:solidFill>
+                <a:latin typeface="Calibri" pitchFamily="34" charset="0"/>
+                <a:ea typeface="Calibri" pitchFamily="34" charset="-122"/>
+                <a:cs typeface="Calibri" pitchFamily="34" charset="-120"/>
+              </a:rPr>
+              <a:t>Auditor review; archive vs delete</a:t>
             </a:r>
             <a:endParaRPr lang="en-US" sz="1250" dirty="0"/>
           </a:p>

--- a/docs/Viva_Presentation.pptx
+++ b/docs/Viva_Presentation.pptx
@@ -17,9 +17,10 @@
     <p:sldId id="265" r:id="rId11"/>
     <p:sldId id="266" r:id="rId12"/>
     <p:sldId id="267" r:id="rId13"/>
+    <p:sldId id="268" r:id="rId14"/>
   </p:sldIdLst>
   <p:notesMasterIdLst>
-    <p:notesMasterId r:id="rId14"/>
+    <p:notesMasterId r:id="rId15"/>
   </p:notesMasterIdLst>
   <p:sldSz cx="9144000" cy="5143500"/>
   <p:notesSz cx="5143500" cy="9144000"/>
@@ -689,7 +690,7 @@
           <a:p>
             <a:r>
               <a:rPr lang="en-US" dirty="0"/>
-              <a:t>Full table in docs/Code_Review.md. Every fix is protected by a test, so it cannot silently come back.</a:t>
+              <a:t>Run Operations &gt; Guided rule checks in order. Then Customers: Ayesha's roles as ribbons, and the time machine on 11 April 2026. The GUI contains no business rules: refusals come from the model and name its error class.</a:t>
             </a:r>
             <a:endParaRPr lang="en-US" dirty="0"/>
           </a:p>
@@ -777,7 +778,7 @@
           <a:p>
             <a:r>
               <a:rPr lang="en-US" dirty="0"/>
-              <a:t>The Arrangement level is where the design pays off for new business models: an Ijarah or Murabaha contract is a new kind of arrangement, not a change to existing classes.</a:t>
+              <a:t>Full table in docs/Code_Review.md. Every fix is protected by a test, so it cannot silently come back.</a:t>
             </a:r>
             <a:endParaRPr lang="en-US" dirty="0"/>
           </a:p>
@@ -801,6 +802,94 @@
             <a:fld id="{F7021451-1387-4CA6-816F-3879F97B5CBC}" type="slidenum">
               <a:rPr lang="en-US"/>
               <a:t>12</a:t>
+            </a:fld>
+            <a:endParaRPr lang="en-US"/>
+          </a:p>
+        </p:txBody>
+      </p:sp>
+    </p:spTree>
+    <p:extLst>
+      <p:ext uri="{BB962C8B-B14F-4D97-AF65-F5344CB8AC3E}">
+        <p14:creationId xmlns:p14="http://schemas.microsoft.com/office/powerpoint/2010/main" val="1024086991"/>
+      </p:ext>
+    </p:extLst>
+  </p:cSld>
+  <p:clrMapOvr>
+    <a:masterClrMapping/>
+  </p:clrMapOvr>
+</p:notes>
+</file>
+
+<file path=ppt/notesSlides/notesSlide13.xml><?xml version="1.0" encoding="utf-8"?>
+<p:notes xmlns:a="http://schemas.openxmlformats.org/drawingml/2006/main" xmlns:r="http://schemas.openxmlformats.org/officeDocument/2006/relationships" xmlns:p="http://schemas.openxmlformats.org/presentationml/2006/main">
+  <p:cSld>
+    <p:spTree>
+      <p:nvGrpSpPr>
+        <p:cNvPr id="1" name=""/>
+        <p:cNvGrpSpPr/>
+        <p:nvPr/>
+      </p:nvGrpSpPr>
+      <p:grpSpPr>
+        <a:xfrm>
+          <a:off x="0" y="0"/>
+          <a:ext cx="0" cy="0"/>
+          <a:chOff x="0" y="0"/>
+          <a:chExt cx="0" cy="0"/>
+        </a:xfrm>
+      </p:grpSpPr>
+      <p:sp>
+        <p:nvSpPr>
+          <p:cNvPr id="2" name="Slide Image Placeholder 1"/>
+          <p:cNvSpPr>
+            <a:spLocks noGrp="1" noRot="1" noChangeAspect="1"/>
+          </p:cNvSpPr>
+          <p:nvPr>
+            <p:ph type="sldImg"/>
+          </p:nvPr>
+        </p:nvSpPr>
+        <p:spPr/>
+      </p:sp>
+      <p:sp>
+        <p:nvSpPr>
+          <p:cNvPr id="3" name="Notes Placeholder 2"/>
+          <p:cNvSpPr>
+            <a:spLocks noGrp="1"/>
+          </p:cNvSpPr>
+          <p:nvPr>
+            <p:ph type="body" idx="1"/>
+          </p:nvPr>
+        </p:nvSpPr>
+        <p:spPr/>
+        <p:txBody>
+          <a:bodyPr/>
+          <a:lstStyle/>
+          <a:p>
+            <a:r>
+              <a:rPr lang="en-US" dirty="0"/>
+              <a:t>The Arrangement level is where the design pays off for new business models: an Ijarah or Murabaha contract is a new kind of arrangement, not a change to existing classes.</a:t>
+            </a:r>
+            <a:endParaRPr lang="en-US" dirty="0"/>
+          </a:p>
+        </p:txBody>
+      </p:sp>
+      <p:sp>
+        <p:nvSpPr>
+          <p:cNvPr id="4" name="Slide Number Placeholder 3"/>
+          <p:cNvSpPr>
+            <a:spLocks noGrp="1"/>
+          </p:cNvSpPr>
+          <p:nvPr>
+            <p:ph type="sldNum" sz="quarter" idx="10"/>
+          </p:nvPr>
+        </p:nvSpPr>
+        <p:spPr/>
+        <p:txBody>
+          <a:bodyPr/>
+          <a:lstStyle/>
+          <a:p>
+            <a:fld id="{F7021451-1387-4CA6-816F-3879F97B5CBC}" type="slidenum">
+              <a:rPr lang="en-US"/>
+              <a:t>13</a:t>
             </a:fld>
             <a:endParaRPr lang="en-US"/>
           </a:p>
@@ -2845,7 +2934,7 @@
               <a:buNone/>
             </a:pPr>
             <a:r>
-              <a:rPr lang="en-US" sz="2200" b="1" dirty="0">
+              <a:rPr lang="en-US" sz="2800" b="1" dirty="0">
                 <a:solidFill>
                   <a:srgbClr val="0B4F4A"/>
                 </a:solidFill>
@@ -2853,127 +2942,112 @@
                 <a:ea typeface="Cambria" pitchFamily="34" charset="-122"/>
                 <a:cs typeface="Cambria" pitchFamily="34" charset="-120"/>
               </a:rPr>
-              <a:t>Code review: 20 defects fixed, each with a test</a:t>
-            </a:r>
-            <a:endParaRPr lang="en-US" sz="2200" dirty="0"/>
-          </a:p>
-        </p:txBody>
-      </p:sp>
-      <p:sp>
-        <p:nvSpPr>
-          <p:cNvPr id="3" name="Shape 1"/>
+              <a:t>Live demo: the desktop console</a:t>
+            </a:r>
+            <a:endParaRPr lang="en-US" sz="2800" dirty="0"/>
+          </a:p>
+        </p:txBody>
+      </p:sp>
+      <p:sp>
+        <p:nvSpPr>
+          <p:cNvPr id="3" name="Text 1"/>
+          <p:cNvSpPr txBox="1"/>
+          <p:nvPr/>
+        </p:nvSpPr>
+        <p:spPr>
+          <a:xfrm>
+            <a:off x="457200" y="804672"/>
+            <a:ext cx="8229600" cy="320040"/>
+          </a:xfrm>
+          <a:prstGeom prst="rect">
+            <a:avLst/>
+          </a:prstGeom>
+          <a:noFill/>
+          <a:ln/>
+        </p:spPr>
+        <p:txBody>
+          <a:bodyPr wrap="square" lIns="0" tIns="0" rIns="0" bIns="0" rtlCol="0" anchor="ctr"/>
+          <a:lstStyle/>
+          <a:p>
+            <a:pPr indent="0" marL="0">
+              <a:buNone/>
+            </a:pPr>
+            <a:r>
+              <a:rPr lang="en-US" sz="1200" i="1" dirty="0">
+                <a:solidFill>
+                  <a:srgbClr val="5B6B69"/>
+                </a:solidFill>
+                <a:latin typeface="Calibri" pitchFamily="34" charset="0"/>
+                <a:ea typeface="Calibri" pitchFamily="34" charset="-122"/>
+                <a:cs typeface="Calibri" pitchFamily="34" charset="-120"/>
+              </a:rPr>
+              <a:t>banking_gui.py - pure Python (Tkinter); every button calls one Bank operation</a:t>
+            </a:r>
+            <a:endParaRPr lang="en-US" sz="1200" dirty="0"/>
+          </a:p>
+        </p:txBody>
+      </p:sp>
+      <p:sp>
+        <p:nvSpPr>
+          <p:cNvPr id="4" name="Shape 2"/>
           <p:cNvSpPr/>
           <p:nvPr/>
         </p:nvSpPr>
         <p:spPr>
           <a:xfrm>
-            <a:off x="457200" y="1097280"/>
-            <a:ext cx="2651760" cy="3566160"/>
+            <a:off x="457200" y="1188720"/>
+            <a:ext cx="5577840" cy="3611880"/>
           </a:xfrm>
           <a:prstGeom prst="roundRect">
             <a:avLst>
-              <a:gd name="adj" fmla="val 2759"/>
+              <a:gd name="adj" fmla="val 2025"/>
             </a:avLst>
           </a:prstGeom>
           <a:solidFill>
-            <a:srgbClr val="0B4F4A"/>
+            <a:srgbClr val="F4F8F7"/>
           </a:solidFill>
           <a:ln w="12700">
             <a:solidFill>
-              <a:srgbClr val="0B4F4A"/>
+              <a:srgbClr val="F4F8F7"/>
             </a:solidFill>
             <a:prstDash val="solid"/>
           </a:ln>
         </p:spPr>
       </p:sp>
-      <p:sp>
-        <p:nvSpPr>
-          <p:cNvPr id="4" name="Text 2"/>
-          <p:cNvSpPr txBox="1"/>
-          <p:nvPr/>
-        </p:nvSpPr>
-        <p:spPr>
-          <a:xfrm>
-            <a:off x="457200" y="1463040"/>
-            <a:ext cx="2651760" cy="1097280"/>
-          </a:xfrm>
-          <a:prstGeom prst="rect">
-            <a:avLst/>
-          </a:prstGeom>
-          <a:noFill/>
-          <a:ln/>
-        </p:spPr>
-        <p:txBody>
-          <a:bodyPr wrap="square" lIns="0" tIns="0" rIns="0" bIns="0" rtlCol="0" anchor="ctr"/>
-          <a:lstStyle/>
-          <a:p>
-            <a:pPr algn="ctr" indent="0" marL="0">
-              <a:buNone/>
-            </a:pPr>
-            <a:r>
-              <a:rPr lang="en-US" sz="6000" b="1" dirty="0">
-                <a:solidFill>
-                  <a:srgbClr val="FFFFFF"/>
-                </a:solidFill>
-                <a:latin typeface="Cambria" pitchFamily="34" charset="0"/>
-                <a:ea typeface="Cambria" pitchFamily="34" charset="-122"/>
-                <a:cs typeface="Cambria" pitchFamily="34" charset="-120"/>
-              </a:rPr>
-              <a:t>20</a:t>
-            </a:r>
-            <a:endParaRPr lang="en-US" sz="6000" dirty="0"/>
-          </a:p>
-        </p:txBody>
-      </p:sp>
-      <p:sp>
-        <p:nvSpPr>
-          <p:cNvPr id="5" name="Text 3"/>
-          <p:cNvSpPr txBox="1"/>
-          <p:nvPr/>
-        </p:nvSpPr>
-        <p:spPr>
-          <a:xfrm>
-            <a:off x="685800" y="2651760"/>
-            <a:ext cx="2194560" cy="1097280"/>
-          </a:xfrm>
-          <a:prstGeom prst="rect">
-            <a:avLst/>
-          </a:prstGeom>
-          <a:noFill/>
-          <a:ln/>
-        </p:spPr>
-        <p:txBody>
-          <a:bodyPr wrap="square" lIns="0" tIns="0" rIns="0" bIns="0" rtlCol="0" anchor="ctr"/>
-          <a:lstStyle/>
-          <a:p>
-            <a:pPr algn="ctr" indent="0" marL="0">
-              <a:buNone/>
-            </a:pPr>
-            <a:r>
-              <a:rPr lang="en-US" sz="1400" dirty="0">
-                <a:solidFill>
-                  <a:srgbClr val="CFE3DF"/>
-                </a:solidFill>
-                <a:latin typeface="Calibri" pitchFamily="34" charset="0"/>
-                <a:ea typeface="Calibri" pitchFamily="34" charset="-122"/>
-                <a:cs typeface="Calibri" pitchFamily="34" charset="-120"/>
-              </a:rPr>
-              <a:t>defects found and fixed, each with a regression test</a:t>
-            </a:r>
-            <a:endParaRPr lang="en-US" sz="1400" dirty="0"/>
-          </a:p>
-        </p:txBody>
-      </p:sp>
-      <p:sp>
-        <p:nvSpPr>
-          <p:cNvPr id="6" name="Text 4"/>
-          <p:cNvSpPr txBox="1"/>
-          <p:nvPr/>
-        </p:nvSpPr>
-        <p:spPr>
-          <a:xfrm>
-            <a:off x="3474720" y="1143000"/>
-            <a:ext cx="5212080" cy="3566160"/>
+      <p:pic>
+        <p:nvPicPr>
+          <p:cNvPr id="5" name="Image 0" descr="/home/user/commercial-banking/docs/screenshots/gui_01_overview.png">    </p:cNvPr>
+          <p:cNvPicPr>
+            <a:picLocks noChangeAspect="1"/>
+          </p:cNvPicPr>
+          <p:nvPr/>
+        </p:nvPicPr>
+        <p:blipFill>
+          <a:blip r:embed="rId1"/>
+          <a:stretch>
+            <a:fillRect/>
+          </a:stretch>
+        </p:blipFill>
+        <p:spPr>
+          <a:xfrm>
+            <a:off x="548640" y="1280160"/>
+            <a:ext cx="5394960" cy="3291840"/>
+          </a:xfrm>
+          <a:prstGeom prst="rect">
+            <a:avLst/>
+          </a:prstGeom>
+        </p:spPr>
+      </p:pic>
+      <p:sp>
+        <p:nvSpPr>
+          <p:cNvPr id="6" name="Text 3"/>
+          <p:cNvSpPr txBox="1"/>
+          <p:nvPr/>
+        </p:nvSpPr>
+        <p:spPr>
+          <a:xfrm>
+            <a:off x="6263640" y="1234440"/>
+            <a:ext cx="2468880" cy="3566160"/>
           </a:xfrm>
           <a:prstGeom prst="rect">
             <a:avLst/>
@@ -2993,7 +3067,7 @@
               <a:buChar char="•"/>
             </a:pPr>
             <a:r>
-              <a:rPr lang="en-US" sz="1350" dirty="0">
+              <a:rPr lang="en-US" sz="1200" dirty="0">
                 <a:solidFill>
                   <a:srgbClr val="1D2B2A"/>
                 </a:solidFill>
@@ -3001,9 +3075,9 @@
                 <a:ea typeface="Calibri" pitchFamily="34" charset="-122"/>
                 <a:cs typeface="Calibri" pitchFamily="34" charset="-120"/>
               </a:rPr>
-              <a:t>A refused loan overpayment still marked installments as paid</a:t>
-            </a:r>
-            <a:endParaRPr lang="en-US" sz="1350" dirty="0"/>
+              <a:t>Guided rule checks: 14 real operations, each showing the model's own refusal</a:t>
+            </a:r>
+            <a:endParaRPr lang="en-US" sz="1200" dirty="0"/>
           </a:p>
           <a:p>
             <a:pPr marL="342900" indent="-342900">
@@ -3014,7 +3088,7 @@
               <a:buChar char="•"/>
             </a:pPr>
             <a:r>
-              <a:rPr lang="en-US" sz="1350" dirty="0">
+              <a:rPr lang="en-US" sz="1200" dirty="0">
                 <a:solidFill>
                   <a:srgbClr val="1D2B2A"/>
                 </a:solidFill>
@@ -3022,9 +3096,9 @@
                 <a:ea typeface="Calibri" pitchFamily="34" charset="-122"/>
                 <a:cs typeface="Calibri" pitchFamily="34" charset="-120"/>
               </a:rPr>
-              <a:t>Resolving a dispute twice refunded the customer twice</a:t>
-            </a:r>
-            <a:endParaRPr lang="en-US" sz="1350" dirty="0"/>
+              <a:t>Customer timeline and time machine for any past date</a:t>
+            </a:r>
+            <a:endParaRPr lang="en-US" sz="1200" dirty="0"/>
           </a:p>
           <a:p>
             <a:pPr marL="342900" indent="-342900">
@@ -3035,7 +3109,7 @@
               <a:buChar char="•"/>
             </a:pPr>
             <a:r>
-              <a:rPr lang="en-US" sz="1350" dirty="0">
+              <a:rPr lang="en-US" sz="1200" dirty="0">
                 <a:solidFill>
                   <a:srgbClr val="1D2B2A"/>
                 </a:solidFill>
@@ -3043,9 +3117,9 @@
                 <a:ea typeface="Calibri" pitchFamily="34" charset="-122"/>
                 <a:cs typeface="Calibri" pitchFamily="34" charset="-120"/>
               </a:rPr>
-              <a:t>Recording an ACTIVE card as found destroyed it</a:t>
-            </a:r>
-            <a:endParaRPr lang="en-US" sz="1350" dirty="0"/>
+              <a:t>Card chains, cases, audit log and a zero trial balance</a:t>
+            </a:r>
+            <a:endParaRPr lang="en-US" sz="1200" dirty="0"/>
           </a:p>
           <a:p>
             <a:pPr marL="342900" indent="-342900">
@@ -3056,7 +3130,7 @@
               <a:buChar char="•"/>
             </a:pPr>
             <a:r>
-              <a:rPr lang="en-US" sz="1350" dirty="0">
+              <a:rPr lang="en-US" sz="1200" dirty="0">
                 <a:solidFill>
                   <a:srgbClr val="1D2B2A"/>
                 </a:solidFill>
@@ -3064,72 +3138,9 @@
                 <a:ea typeface="Calibri" pitchFamily="34" charset="-122"/>
                 <a:cs typeface="Calibri" pitchFamily="34" charset="-120"/>
               </a:rPr>
-              <a:t>Replacement cards blocked once the product was withdrawn</a:t>
-            </a:r>
-            <a:endParaRPr lang="en-US" sz="1350" dirty="0"/>
-          </a:p>
-          <a:p>
-            <a:pPr marL="342900" indent="-342900">
-              <a:spcAft>
-                <a:spcPts val="600"/>
-              </a:spcAft>
-              <a:buSzPct val="100000"/>
-              <a:buChar char="•"/>
-            </a:pPr>
-            <a:r>
-              <a:rPr lang="en-US" sz="1350" dirty="0">
-                <a:solidFill>
-                  <a:srgbClr val="1D2B2A"/>
-                </a:solidFill>
-                <a:latin typeface="Calibri" pitchFamily="34" charset="0"/>
-                <a:ea typeface="Calibri" pitchFamily="34" charset="-122"/>
-                <a:cs typeface="Calibri" pitchFamily="34" charset="-120"/>
-              </a:rPr>
-              <a:t>Bank fees used up customers' savings withdrawals</a:t>
-            </a:r>
-            <a:endParaRPr lang="en-US" sz="1350" dirty="0"/>
-          </a:p>
-          <a:p>
-            <a:pPr marL="342900" indent="-342900">
-              <a:spcAft>
-                <a:spcPts val="600"/>
-              </a:spcAft>
-              <a:buSzPct val="100000"/>
-              <a:buChar char="•"/>
-            </a:pPr>
-            <a:r>
-              <a:rPr lang="en-US" sz="1350" dirty="0">
-                <a:solidFill>
-                  <a:srgbClr val="1D2B2A"/>
-                </a:solidFill>
-                <a:latin typeface="Calibri" pitchFamily="34" charset="0"/>
-                <a:ea typeface="Calibri" pitchFamily="34" charset="-122"/>
-                <a:cs typeface="Calibri" pitchFamily="34" charset="-120"/>
-              </a:rPr>
-              <a:t>Account closure ignored holds and pending payments</a:t>
-            </a:r>
-            <a:endParaRPr lang="en-US" sz="1350" dirty="0"/>
-          </a:p>
-          <a:p>
-            <a:pPr marL="342900" indent="-342900">
-              <a:spcAft>
-                <a:spcPts val="600"/>
-              </a:spcAft>
-              <a:buSzPct val="100000"/>
-              <a:buChar char="•"/>
-            </a:pPr>
-            <a:r>
-              <a:rPr lang="en-US" sz="1350" dirty="0">
-                <a:solidFill>
-                  <a:srgbClr val="1D2B2A"/>
-                </a:solidFill>
-                <a:latin typeface="Calibri" pitchFamily="34" charset="0"/>
-                <a:ea typeface="Calibri" pitchFamily="34" charset="-122"/>
-                <a:cs typeface="Calibri" pitchFamily="34" charset="-120"/>
-              </a:rPr>
-              <a:t>No delegated limit on credit approvals</a:t>
-            </a:r>
-            <a:endParaRPr lang="en-US" sz="1350" dirty="0"/>
+              <a:t>GUI classes inherit too: Page -&gt; MasterDetailPage -&gt; CustomersPage</a:t>
+            </a:r>
+            <a:endParaRPr lang="en-US" sz="1200" dirty="0"/>
           </a:p>
         </p:txBody>
       </p:sp>
@@ -3144,6 +3155,353 @@
 <file path=ppt/slides/slide12.xml><?xml version="1.0" encoding="utf-8"?>
 <p:sld xmlns:a="http://schemas.openxmlformats.org/drawingml/2006/main" xmlns:r="http://schemas.openxmlformats.org/officeDocument/2006/relationships" xmlns:p="http://schemas.openxmlformats.org/presentationml/2006/main">
   <p:cSld name="Slide 12">
+    <p:bg>
+      <p:bgPr>
+        <a:solidFill>
+          <a:srgbClr val="FFFFFF"/>
+        </a:solidFill>
+      </p:bgPr>
+    </p:bg>
+    <p:spTree>
+      <p:nvGrpSpPr>
+        <p:cNvPr id="1" name=""/>
+        <p:cNvGrpSpPr/>
+        <p:nvPr/>
+      </p:nvGrpSpPr>
+      <p:grpSpPr>
+        <a:xfrm>
+          <a:off x="0" y="0"/>
+          <a:ext cx="0" cy="0"/>
+          <a:chOff x="0" y="0"/>
+          <a:chExt cx="0" cy="0"/>
+        </a:xfrm>
+      </p:grpSpPr>
+      <p:sp>
+        <p:nvSpPr>
+          <p:cNvPr id="2" name="Text 0"/>
+          <p:cNvSpPr txBox="1"/>
+          <p:nvPr/>
+        </p:nvSpPr>
+        <p:spPr>
+          <a:xfrm>
+            <a:off x="457200" y="274320"/>
+            <a:ext cx="8229600" cy="548640"/>
+          </a:xfrm>
+          <a:prstGeom prst="rect">
+            <a:avLst/>
+          </a:prstGeom>
+          <a:noFill/>
+          <a:ln/>
+        </p:spPr>
+        <p:txBody>
+          <a:bodyPr wrap="square" lIns="0" tIns="0" rIns="0" bIns="0" rtlCol="0" anchor="ctr">
+            <a:normAutofit/>
+          </a:bodyPr>
+          <a:lstStyle/>
+          <a:p>
+            <a:pPr indent="0" marL="0">
+              <a:buNone/>
+            </a:pPr>
+            <a:r>
+              <a:rPr lang="en-US" sz="2200" b="1" dirty="0">
+                <a:solidFill>
+                  <a:srgbClr val="0B4F4A"/>
+                </a:solidFill>
+                <a:latin typeface="Cambria" pitchFamily="34" charset="0"/>
+                <a:ea typeface="Cambria" pitchFamily="34" charset="-122"/>
+                <a:cs typeface="Cambria" pitchFamily="34" charset="-120"/>
+              </a:rPr>
+              <a:t>Code review: 20 defects fixed, each with a test</a:t>
+            </a:r>
+            <a:endParaRPr lang="en-US" sz="2200" dirty="0"/>
+          </a:p>
+        </p:txBody>
+      </p:sp>
+      <p:sp>
+        <p:nvSpPr>
+          <p:cNvPr id="3" name="Shape 1"/>
+          <p:cNvSpPr/>
+          <p:nvPr/>
+        </p:nvSpPr>
+        <p:spPr>
+          <a:xfrm>
+            <a:off x="457200" y="1097280"/>
+            <a:ext cx="2651760" cy="3566160"/>
+          </a:xfrm>
+          <a:prstGeom prst="roundRect">
+            <a:avLst>
+              <a:gd name="adj" fmla="val 2759"/>
+            </a:avLst>
+          </a:prstGeom>
+          <a:solidFill>
+            <a:srgbClr val="0B4F4A"/>
+          </a:solidFill>
+          <a:ln w="12700">
+            <a:solidFill>
+              <a:srgbClr val="0B4F4A"/>
+            </a:solidFill>
+            <a:prstDash val="solid"/>
+          </a:ln>
+        </p:spPr>
+      </p:sp>
+      <p:sp>
+        <p:nvSpPr>
+          <p:cNvPr id="4" name="Text 2"/>
+          <p:cNvSpPr txBox="1"/>
+          <p:nvPr/>
+        </p:nvSpPr>
+        <p:spPr>
+          <a:xfrm>
+            <a:off x="457200" y="1463040"/>
+            <a:ext cx="2651760" cy="1097280"/>
+          </a:xfrm>
+          <a:prstGeom prst="rect">
+            <a:avLst/>
+          </a:prstGeom>
+          <a:noFill/>
+          <a:ln/>
+        </p:spPr>
+        <p:txBody>
+          <a:bodyPr wrap="square" lIns="0" tIns="0" rIns="0" bIns="0" rtlCol="0" anchor="ctr"/>
+          <a:lstStyle/>
+          <a:p>
+            <a:pPr algn="ctr" indent="0" marL="0">
+              <a:buNone/>
+            </a:pPr>
+            <a:r>
+              <a:rPr lang="en-US" sz="6000" b="1" dirty="0">
+                <a:solidFill>
+                  <a:srgbClr val="FFFFFF"/>
+                </a:solidFill>
+                <a:latin typeface="Cambria" pitchFamily="34" charset="0"/>
+                <a:ea typeface="Cambria" pitchFamily="34" charset="-122"/>
+                <a:cs typeface="Cambria" pitchFamily="34" charset="-120"/>
+              </a:rPr>
+              <a:t>20</a:t>
+            </a:r>
+            <a:endParaRPr lang="en-US" sz="6000" dirty="0"/>
+          </a:p>
+        </p:txBody>
+      </p:sp>
+      <p:sp>
+        <p:nvSpPr>
+          <p:cNvPr id="5" name="Text 3"/>
+          <p:cNvSpPr txBox="1"/>
+          <p:nvPr/>
+        </p:nvSpPr>
+        <p:spPr>
+          <a:xfrm>
+            <a:off x="685800" y="2651760"/>
+            <a:ext cx="2194560" cy="1097280"/>
+          </a:xfrm>
+          <a:prstGeom prst="rect">
+            <a:avLst/>
+          </a:prstGeom>
+          <a:noFill/>
+          <a:ln/>
+        </p:spPr>
+        <p:txBody>
+          <a:bodyPr wrap="square" lIns="0" tIns="0" rIns="0" bIns="0" rtlCol="0" anchor="ctr"/>
+          <a:lstStyle/>
+          <a:p>
+            <a:pPr algn="ctr" indent="0" marL="0">
+              <a:buNone/>
+            </a:pPr>
+            <a:r>
+              <a:rPr lang="en-US" sz="1400" dirty="0">
+                <a:solidFill>
+                  <a:srgbClr val="CFE3DF"/>
+                </a:solidFill>
+                <a:latin typeface="Calibri" pitchFamily="34" charset="0"/>
+                <a:ea typeface="Calibri" pitchFamily="34" charset="-122"/>
+                <a:cs typeface="Calibri" pitchFamily="34" charset="-120"/>
+              </a:rPr>
+              <a:t>defects found and fixed, each with a regression test</a:t>
+            </a:r>
+            <a:endParaRPr lang="en-US" sz="1400" dirty="0"/>
+          </a:p>
+        </p:txBody>
+      </p:sp>
+      <p:sp>
+        <p:nvSpPr>
+          <p:cNvPr id="6" name="Text 4"/>
+          <p:cNvSpPr txBox="1"/>
+          <p:nvPr/>
+        </p:nvSpPr>
+        <p:spPr>
+          <a:xfrm>
+            <a:off x="3474720" y="1143000"/>
+            <a:ext cx="5212080" cy="3566160"/>
+          </a:xfrm>
+          <a:prstGeom prst="rect">
+            <a:avLst/>
+          </a:prstGeom>
+          <a:noFill/>
+          <a:ln/>
+        </p:spPr>
+        <p:txBody>
+          <a:bodyPr wrap="square" lIns="635" tIns="635" rIns="635" bIns="635" rtlCol="0" anchor="t"/>
+          <a:lstStyle/>
+          <a:p>
+            <a:pPr marL="342900" indent="-342900">
+              <a:spcAft>
+                <a:spcPts val="600"/>
+              </a:spcAft>
+              <a:buSzPct val="100000"/>
+              <a:buChar char="•"/>
+            </a:pPr>
+            <a:r>
+              <a:rPr lang="en-US" sz="1350" dirty="0">
+                <a:solidFill>
+                  <a:srgbClr val="1D2B2A"/>
+                </a:solidFill>
+                <a:latin typeface="Calibri" pitchFamily="34" charset="0"/>
+                <a:ea typeface="Calibri" pitchFamily="34" charset="-122"/>
+                <a:cs typeface="Calibri" pitchFamily="34" charset="-120"/>
+              </a:rPr>
+              <a:t>A refused loan overpayment still marked installments as paid</a:t>
+            </a:r>
+            <a:endParaRPr lang="en-US" sz="1350" dirty="0"/>
+          </a:p>
+          <a:p>
+            <a:pPr marL="342900" indent="-342900">
+              <a:spcAft>
+                <a:spcPts val="600"/>
+              </a:spcAft>
+              <a:buSzPct val="100000"/>
+              <a:buChar char="•"/>
+            </a:pPr>
+            <a:r>
+              <a:rPr lang="en-US" sz="1350" dirty="0">
+                <a:solidFill>
+                  <a:srgbClr val="1D2B2A"/>
+                </a:solidFill>
+                <a:latin typeface="Calibri" pitchFamily="34" charset="0"/>
+                <a:ea typeface="Calibri" pitchFamily="34" charset="-122"/>
+                <a:cs typeface="Calibri" pitchFamily="34" charset="-120"/>
+              </a:rPr>
+              <a:t>Resolving a dispute twice refunded the customer twice</a:t>
+            </a:r>
+            <a:endParaRPr lang="en-US" sz="1350" dirty="0"/>
+          </a:p>
+          <a:p>
+            <a:pPr marL="342900" indent="-342900">
+              <a:spcAft>
+                <a:spcPts val="600"/>
+              </a:spcAft>
+              <a:buSzPct val="100000"/>
+              <a:buChar char="•"/>
+            </a:pPr>
+            <a:r>
+              <a:rPr lang="en-US" sz="1350" dirty="0">
+                <a:solidFill>
+                  <a:srgbClr val="1D2B2A"/>
+                </a:solidFill>
+                <a:latin typeface="Calibri" pitchFamily="34" charset="0"/>
+                <a:ea typeface="Calibri" pitchFamily="34" charset="-122"/>
+                <a:cs typeface="Calibri" pitchFamily="34" charset="-120"/>
+              </a:rPr>
+              <a:t>Recording an ACTIVE card as found destroyed it</a:t>
+            </a:r>
+            <a:endParaRPr lang="en-US" sz="1350" dirty="0"/>
+          </a:p>
+          <a:p>
+            <a:pPr marL="342900" indent="-342900">
+              <a:spcAft>
+                <a:spcPts val="600"/>
+              </a:spcAft>
+              <a:buSzPct val="100000"/>
+              <a:buChar char="•"/>
+            </a:pPr>
+            <a:r>
+              <a:rPr lang="en-US" sz="1350" dirty="0">
+                <a:solidFill>
+                  <a:srgbClr val="1D2B2A"/>
+                </a:solidFill>
+                <a:latin typeface="Calibri" pitchFamily="34" charset="0"/>
+                <a:ea typeface="Calibri" pitchFamily="34" charset="-122"/>
+                <a:cs typeface="Calibri" pitchFamily="34" charset="-120"/>
+              </a:rPr>
+              <a:t>Replacement cards blocked once the product was withdrawn</a:t>
+            </a:r>
+            <a:endParaRPr lang="en-US" sz="1350" dirty="0"/>
+          </a:p>
+          <a:p>
+            <a:pPr marL="342900" indent="-342900">
+              <a:spcAft>
+                <a:spcPts val="600"/>
+              </a:spcAft>
+              <a:buSzPct val="100000"/>
+              <a:buChar char="•"/>
+            </a:pPr>
+            <a:r>
+              <a:rPr lang="en-US" sz="1350" dirty="0">
+                <a:solidFill>
+                  <a:srgbClr val="1D2B2A"/>
+                </a:solidFill>
+                <a:latin typeface="Calibri" pitchFamily="34" charset="0"/>
+                <a:ea typeface="Calibri" pitchFamily="34" charset="-122"/>
+                <a:cs typeface="Calibri" pitchFamily="34" charset="-120"/>
+              </a:rPr>
+              <a:t>Bank fees used up customers' savings withdrawals</a:t>
+            </a:r>
+            <a:endParaRPr lang="en-US" sz="1350" dirty="0"/>
+          </a:p>
+          <a:p>
+            <a:pPr marL="342900" indent="-342900">
+              <a:spcAft>
+                <a:spcPts val="600"/>
+              </a:spcAft>
+              <a:buSzPct val="100000"/>
+              <a:buChar char="•"/>
+            </a:pPr>
+            <a:r>
+              <a:rPr lang="en-US" sz="1350" dirty="0">
+                <a:solidFill>
+                  <a:srgbClr val="1D2B2A"/>
+                </a:solidFill>
+                <a:latin typeface="Calibri" pitchFamily="34" charset="0"/>
+                <a:ea typeface="Calibri" pitchFamily="34" charset="-122"/>
+                <a:cs typeface="Calibri" pitchFamily="34" charset="-120"/>
+              </a:rPr>
+              <a:t>Account closure ignored holds and pending payments</a:t>
+            </a:r>
+            <a:endParaRPr lang="en-US" sz="1350" dirty="0"/>
+          </a:p>
+          <a:p>
+            <a:pPr marL="342900" indent="-342900">
+              <a:spcAft>
+                <a:spcPts val="600"/>
+              </a:spcAft>
+              <a:buSzPct val="100000"/>
+              <a:buChar char="•"/>
+            </a:pPr>
+            <a:r>
+              <a:rPr lang="en-US" sz="1350" dirty="0">
+                <a:solidFill>
+                  <a:srgbClr val="1D2B2A"/>
+                </a:solidFill>
+                <a:latin typeface="Calibri" pitchFamily="34" charset="0"/>
+                <a:ea typeface="Calibri" pitchFamily="34" charset="-122"/>
+                <a:cs typeface="Calibri" pitchFamily="34" charset="-120"/>
+              </a:rPr>
+              <a:t>No delegated limit on credit approvals</a:t>
+            </a:r>
+            <a:endParaRPr lang="en-US" sz="1350" dirty="0"/>
+          </a:p>
+        </p:txBody>
+      </p:sp>
+    </p:spTree>
+  </p:cSld>
+  <p:clrMapOvr>
+    <a:masterClrMapping/>
+  </p:clrMapOvr>
+</p:sld>
+</file>
+
+<file path=ppt/slides/slide13.xml><?xml version="1.0" encoding="utf-8"?>
+<p:sld xmlns:a="http://schemas.openxmlformats.org/drawingml/2006/main" xmlns:r="http://schemas.openxmlformats.org/officeDocument/2006/relationships" xmlns:p="http://schemas.openxmlformats.org/presentationml/2006/main">
+  <p:cSld name="Slide 13">
     <p:bg>
       <p:bgPr>
         <a:solidFill>

--- a/docs/Viva_Presentation.pptx
+++ b/docs/Viva_Presentation.pptx
@@ -18,9 +18,10 @@
     <p:sldId id="266" r:id="rId12"/>
     <p:sldId id="267" r:id="rId13"/>
     <p:sldId id="268" r:id="rId14"/>
+    <p:sldId id="269" r:id="rId15"/>
   </p:sldIdLst>
   <p:notesMasterIdLst>
-    <p:notesMasterId r:id="rId15"/>
+    <p:notesMasterId r:id="rId16"/>
   </p:notesMasterIdLst>
   <p:sldSz cx="9144000" cy="5143500"/>
   <p:notesSz cx="5143500" cy="9144000"/>
@@ -690,7 +691,7 @@
           <a:p>
             <a:r>
               <a:rPr lang="en-US" dirty="0"/>
-              <a:t>Run Operations &gt; Guided rule checks in order. Then Customers: Ayesha's roles as ribbons, and the time machine on 11 April 2026. The GUI contains no business rules: refusals come from the model and name its error class.</a:t>
+              <a:t>The class diagrams show structure; the flowcharts show behaviour. Walk through the transfer: beneficiary, authority (mandate within limit), funds, dual control, then the PKR 1,000,000 compliance hold. Every red terminator is a refusal that is still kept on record.</a:t>
             </a:r>
             <a:endParaRPr lang="en-US" dirty="0"/>
           </a:p>
@@ -778,7 +779,7 @@
           <a:p>
             <a:r>
               <a:rPr lang="en-US" dirty="0"/>
-              <a:t>Full table in docs/Code_Review.md. Every fix is protected by a test, so it cannot silently come back.</a:t>
+              <a:t>Run Operations &gt; Guided rule checks in order. Then Customers: Ayesha's roles as ribbons, and the time machine on 11 April 2026. The GUI contains no business rules: refusals come from the model and name its error class.</a:t>
             </a:r>
             <a:endParaRPr lang="en-US" dirty="0"/>
           </a:p>
@@ -866,7 +867,7 @@
           <a:p>
             <a:r>
               <a:rPr lang="en-US" dirty="0"/>
-              <a:t>The Arrangement level is where the design pays off for new business models: an Ijarah or Murabaha contract is a new kind of arrangement, not a change to existing classes.</a:t>
+              <a:t>Full table in docs/Code_Review.md. Every fix is protected by a test, so it cannot silently come back.</a:t>
             </a:r>
             <a:endParaRPr lang="en-US" dirty="0"/>
           </a:p>
@@ -890,6 +891,94 @@
             <a:fld id="{F7021451-1387-4CA6-816F-3879F97B5CBC}" type="slidenum">
               <a:rPr lang="en-US"/>
               <a:t>13</a:t>
+            </a:fld>
+            <a:endParaRPr lang="en-US"/>
+          </a:p>
+        </p:txBody>
+      </p:sp>
+    </p:spTree>
+    <p:extLst>
+      <p:ext uri="{BB962C8B-B14F-4D97-AF65-F5344CB8AC3E}">
+        <p14:creationId xmlns:p14="http://schemas.microsoft.com/office/powerpoint/2010/main" val="1024086991"/>
+      </p:ext>
+    </p:extLst>
+  </p:cSld>
+  <p:clrMapOvr>
+    <a:masterClrMapping/>
+  </p:clrMapOvr>
+</p:notes>
+</file>
+
+<file path=ppt/notesSlides/notesSlide14.xml><?xml version="1.0" encoding="utf-8"?>
+<p:notes xmlns:a="http://schemas.openxmlformats.org/drawingml/2006/main" xmlns:r="http://schemas.openxmlformats.org/officeDocument/2006/relationships" xmlns:p="http://schemas.openxmlformats.org/presentationml/2006/main">
+  <p:cSld>
+    <p:spTree>
+      <p:nvGrpSpPr>
+        <p:cNvPr id="1" name=""/>
+        <p:cNvGrpSpPr/>
+        <p:nvPr/>
+      </p:nvGrpSpPr>
+      <p:grpSpPr>
+        <a:xfrm>
+          <a:off x="0" y="0"/>
+          <a:ext cx="0" cy="0"/>
+          <a:chOff x="0" y="0"/>
+          <a:chExt cx="0" cy="0"/>
+        </a:xfrm>
+      </p:grpSpPr>
+      <p:sp>
+        <p:nvSpPr>
+          <p:cNvPr id="2" name="Slide Image Placeholder 1"/>
+          <p:cNvSpPr>
+            <a:spLocks noGrp="1" noRot="1" noChangeAspect="1"/>
+          </p:cNvSpPr>
+          <p:nvPr>
+            <p:ph type="sldImg"/>
+          </p:nvPr>
+        </p:nvSpPr>
+        <p:spPr/>
+      </p:sp>
+      <p:sp>
+        <p:nvSpPr>
+          <p:cNvPr id="3" name="Notes Placeholder 2"/>
+          <p:cNvSpPr>
+            <a:spLocks noGrp="1"/>
+          </p:cNvSpPr>
+          <p:nvPr>
+            <p:ph type="body" idx="1"/>
+          </p:nvPr>
+        </p:nvSpPr>
+        <p:spPr/>
+        <p:txBody>
+          <a:bodyPr/>
+          <a:lstStyle/>
+          <a:p>
+            <a:r>
+              <a:rPr lang="en-US" dirty="0"/>
+              <a:t>The Arrangement level is where the design pays off for new business models: an Ijarah or Murabaha contract is a new kind of arrangement, not a change to existing classes.</a:t>
+            </a:r>
+            <a:endParaRPr lang="en-US" dirty="0"/>
+          </a:p>
+        </p:txBody>
+      </p:sp>
+      <p:sp>
+        <p:nvSpPr>
+          <p:cNvPr id="4" name="Slide Number Placeholder 3"/>
+          <p:cNvSpPr>
+            <a:spLocks noGrp="1"/>
+          </p:cNvSpPr>
+          <p:nvPr>
+            <p:ph type="sldNum" sz="quarter" idx="10"/>
+          </p:nvPr>
+        </p:nvSpPr>
+        <p:spPr/>
+        <p:txBody>
+          <a:bodyPr/>
+          <a:lstStyle/>
+          <a:p>
+            <a:fld id="{F7021451-1387-4CA6-816F-3879F97B5CBC}" type="slidenum">
+              <a:rPr lang="en-US"/>
+              <a:t>14</a:t>
             </a:fld>
             <a:endParaRPr lang="en-US"/>
           </a:p>
@@ -2934,7 +3023,7 @@
               <a:buNone/>
             </a:pPr>
             <a:r>
-              <a:rPr lang="en-US" sz="2800" b="1" dirty="0">
+              <a:rPr lang="en-US" sz="2200" b="1" dirty="0">
                 <a:solidFill>
                   <a:srgbClr val="0B4F4A"/>
                 </a:solidFill>
@@ -2942,9 +3031,9 @@
                 <a:ea typeface="Cambria" pitchFamily="34" charset="-122"/>
                 <a:cs typeface="Cambria" pitchFamily="34" charset="-120"/>
               </a:rPr>
-              <a:t>Live demo: the desktop console</a:t>
-            </a:r>
-            <a:endParaRPr lang="en-US" sz="2800" dirty="0"/>
+              <a:t>Behaviour: six flowcharts traced from the code</a:t>
+            </a:r>
+            <a:endParaRPr lang="en-US" sz="2200" dirty="0"/>
           </a:p>
         </p:txBody>
       </p:sp>
@@ -2981,7 +3070,7 @@
                 <a:ea typeface="Calibri" pitchFamily="34" charset="-122"/>
                 <a:cs typeface="Calibri" pitchFamily="34" charset="-120"/>
               </a:rPr>
-              <a:t>banking_gui.py - pure Python (Tkinter); every button calls one Bank operation</a:t>
+              <a:t>Standard symbols (ISO 5807); the diamonds are in the order the code checks the rules</a:t>
             </a:r>
             <a:endParaRPr lang="en-US" sz="1200" dirty="0"/>
           </a:p>
@@ -2996,11 +3085,11 @@
         <p:spPr>
           <a:xfrm>
             <a:off x="457200" y="1188720"/>
-            <a:ext cx="5577840" cy="3611880"/>
+            <a:ext cx="3200400" cy="3611880"/>
           </a:xfrm>
           <a:prstGeom prst="roundRect">
             <a:avLst>
-              <a:gd name="adj" fmla="val 2025"/>
+              <a:gd name="adj" fmla="val 2286"/>
             </a:avLst>
           </a:prstGeom>
           <a:solidFill>
@@ -3016,7 +3105,7 @@
       </p:sp>
       <p:pic>
         <p:nvPicPr>
-          <p:cNvPr id="5" name="Image 0" descr="/home/user/commercial-banking/docs/screenshots/gui_01_overview.png">    </p:cNvPr>
+          <p:cNvPr id="5" name="Image 0" descr="/home/user/commercial-banking/docs/flowchart_3_transfer.png">    </p:cNvPr>
           <p:cNvPicPr>
             <a:picLocks noChangeAspect="1"/>
           </p:cNvPicPr>
@@ -3030,8 +3119,8 @@
         </p:blipFill>
         <p:spPr>
           <a:xfrm>
-            <a:off x="548640" y="1280160"/>
-            <a:ext cx="5394960" cy="3291840"/>
+            <a:off x="782195" y="1261872"/>
+            <a:ext cx="2550410" cy="3474720"/>
           </a:xfrm>
           <a:prstGeom prst="rect">
             <a:avLst/>
@@ -3040,31 +3129,414 @@
       </p:pic>
       <p:sp>
         <p:nvSpPr>
-          <p:cNvPr id="6" name="Text 3"/>
-          <p:cNvSpPr txBox="1"/>
-          <p:nvPr/>
-        </p:nvSpPr>
-        <p:spPr>
-          <a:xfrm>
-            <a:off x="6263640" y="1234440"/>
-            <a:ext cx="2468880" cy="3566160"/>
-          </a:xfrm>
-          <a:prstGeom prst="rect">
-            <a:avLst/>
-          </a:prstGeom>
-          <a:noFill/>
-          <a:ln/>
-        </p:spPr>
-        <p:txBody>
-          <a:bodyPr wrap="square" lIns="635" tIns="635" rIns="635" bIns="635" rtlCol="0" anchor="t"/>
-          <a:lstStyle/>
-          <a:p>
-            <a:pPr marL="342900" indent="-342900">
+          <p:cNvPr id="6" name="Shape 3"/>
+          <p:cNvSpPr/>
+          <p:nvPr/>
+        </p:nvSpPr>
+        <p:spPr>
+          <a:xfrm>
+            <a:off x="3931920" y="1234440"/>
+            <a:ext cx="640080" cy="329184"/>
+          </a:xfrm>
+          <a:prstGeom prst="flowChartTerminator">
+            <a:avLst/>
+          </a:prstGeom>
+          <a:solidFill>
+            <a:srgbClr val="E8F0EE"/>
+          </a:solidFill>
+          <a:ln w="12700">
+            <a:solidFill>
+              <a:srgbClr val="0B4F4A"/>
+            </a:solidFill>
+            <a:prstDash val="solid"/>
+          </a:ln>
+        </p:spPr>
+      </p:sp>
+      <p:sp>
+        <p:nvSpPr>
+          <p:cNvPr id="7" name="Text 4"/>
+          <p:cNvSpPr txBox="1"/>
+          <p:nvPr/>
+        </p:nvSpPr>
+        <p:spPr>
+          <a:xfrm>
+            <a:off x="4663440" y="1234440"/>
+            <a:ext cx="1874520" cy="329184"/>
+          </a:xfrm>
+          <a:prstGeom prst="rect">
+            <a:avLst/>
+          </a:prstGeom>
+          <a:noFill/>
+          <a:ln/>
+        </p:spPr>
+        <p:txBody>
+          <a:bodyPr wrap="square" lIns="0" tIns="0" rIns="0" bIns="0" rtlCol="0" anchor="ctr"/>
+          <a:lstStyle/>
+          <a:p>
+            <a:pPr indent="0" marL="0">
+              <a:buNone/>
+            </a:pPr>
+            <a:r>
+              <a:rPr lang="en-US" sz="1100" dirty="0">
+                <a:solidFill>
+                  <a:srgbClr val="1D2B2A"/>
+                </a:solidFill>
+                <a:latin typeface="Calibri" pitchFamily="34" charset="0"/>
+                <a:ea typeface="Calibri" pitchFamily="34" charset="-122"/>
+                <a:cs typeface="Calibri" pitchFamily="34" charset="-120"/>
+              </a:rPr>
+              <a:t>Start / end; red = refused</a:t>
+            </a:r>
+            <a:endParaRPr lang="en-US" sz="1100" dirty="0"/>
+          </a:p>
+        </p:txBody>
+      </p:sp>
+      <p:sp>
+        <p:nvSpPr>
+          <p:cNvPr id="8" name="Shape 5"/>
+          <p:cNvSpPr/>
+          <p:nvPr/>
+        </p:nvSpPr>
+        <p:spPr>
+          <a:xfrm>
+            <a:off x="3931920" y="1664208"/>
+            <a:ext cx="640080" cy="329184"/>
+          </a:xfrm>
+          <a:prstGeom prst="flowChartProcess">
+            <a:avLst/>
+          </a:prstGeom>
+          <a:solidFill>
+            <a:srgbClr val="E8F0EE"/>
+          </a:solidFill>
+          <a:ln w="12700">
+            <a:solidFill>
+              <a:srgbClr val="0B4F4A"/>
+            </a:solidFill>
+            <a:prstDash val="solid"/>
+          </a:ln>
+        </p:spPr>
+      </p:sp>
+      <p:sp>
+        <p:nvSpPr>
+          <p:cNvPr id="9" name="Text 6"/>
+          <p:cNvSpPr txBox="1"/>
+          <p:nvPr/>
+        </p:nvSpPr>
+        <p:spPr>
+          <a:xfrm>
+            <a:off x="4663440" y="1664208"/>
+            <a:ext cx="1874520" cy="329184"/>
+          </a:xfrm>
+          <a:prstGeom prst="rect">
+            <a:avLst/>
+          </a:prstGeom>
+          <a:noFill/>
+          <a:ln/>
+        </p:spPr>
+        <p:txBody>
+          <a:bodyPr wrap="square" lIns="0" tIns="0" rIns="0" bIns="0" rtlCol="0" anchor="ctr"/>
+          <a:lstStyle/>
+          <a:p>
+            <a:pPr indent="0" marL="0">
+              <a:buNone/>
+            </a:pPr>
+            <a:r>
+              <a:rPr lang="en-US" sz="1100" dirty="0">
+                <a:solidFill>
+                  <a:srgbClr val="1D2B2A"/>
+                </a:solidFill>
+                <a:latin typeface="Calibri" pitchFamily="34" charset="0"/>
+                <a:ea typeface="Calibri" pitchFamily="34" charset="-122"/>
+                <a:cs typeface="Calibri" pitchFamily="34" charset="-120"/>
+              </a:rPr>
+              <a:t>Process: one step</a:t>
+            </a:r>
+            <a:endParaRPr lang="en-US" sz="1100" dirty="0"/>
+          </a:p>
+        </p:txBody>
+      </p:sp>
+      <p:sp>
+        <p:nvSpPr>
+          <p:cNvPr id="10" name="Shape 7"/>
+          <p:cNvSpPr/>
+          <p:nvPr/>
+        </p:nvSpPr>
+        <p:spPr>
+          <a:xfrm>
+            <a:off x="3931920" y="2093976"/>
+            <a:ext cx="640080" cy="329184"/>
+          </a:xfrm>
+          <a:prstGeom prst="flowChartDecision">
+            <a:avLst/>
+          </a:prstGeom>
+          <a:solidFill>
+            <a:srgbClr val="FDF1D6"/>
+          </a:solidFill>
+          <a:ln w="12700">
+            <a:solidFill>
+              <a:srgbClr val="0B4F4A"/>
+            </a:solidFill>
+            <a:prstDash val="solid"/>
+          </a:ln>
+        </p:spPr>
+      </p:sp>
+      <p:sp>
+        <p:nvSpPr>
+          <p:cNvPr id="11" name="Text 8"/>
+          <p:cNvSpPr txBox="1"/>
+          <p:nvPr/>
+        </p:nvSpPr>
+        <p:spPr>
+          <a:xfrm>
+            <a:off x="4663440" y="2093976"/>
+            <a:ext cx="1874520" cy="329184"/>
+          </a:xfrm>
+          <a:prstGeom prst="rect">
+            <a:avLst/>
+          </a:prstGeom>
+          <a:noFill/>
+          <a:ln/>
+        </p:spPr>
+        <p:txBody>
+          <a:bodyPr wrap="square" lIns="0" tIns="0" rIns="0" bIns="0" rtlCol="0" anchor="ctr"/>
+          <a:lstStyle/>
+          <a:p>
+            <a:pPr indent="0" marL="0">
+              <a:buNone/>
+            </a:pPr>
+            <a:r>
+              <a:rPr lang="en-US" sz="1100" dirty="0">
+                <a:solidFill>
+                  <a:srgbClr val="1D2B2A"/>
+                </a:solidFill>
+                <a:latin typeface="Calibri" pitchFamily="34" charset="0"/>
+                <a:ea typeface="Calibri" pitchFamily="34" charset="-122"/>
+                <a:cs typeface="Calibri" pitchFamily="34" charset="-120"/>
+              </a:rPr>
+              <a:t>Decision: Yes / No</a:t>
+            </a:r>
+            <a:endParaRPr lang="en-US" sz="1100" dirty="0"/>
+          </a:p>
+        </p:txBody>
+      </p:sp>
+      <p:sp>
+        <p:nvSpPr>
+          <p:cNvPr id="12" name="Shape 9"/>
+          <p:cNvSpPr/>
+          <p:nvPr/>
+        </p:nvSpPr>
+        <p:spPr>
+          <a:xfrm>
+            <a:off x="3931920" y="2523744"/>
+            <a:ext cx="640080" cy="329184"/>
+          </a:xfrm>
+          <a:prstGeom prst="flowChartInputOutput">
+            <a:avLst/>
+          </a:prstGeom>
+          <a:solidFill>
+            <a:srgbClr val="E8F0EE"/>
+          </a:solidFill>
+          <a:ln w="12700">
+            <a:solidFill>
+              <a:srgbClr val="0B4F4A"/>
+            </a:solidFill>
+            <a:prstDash val="solid"/>
+          </a:ln>
+        </p:spPr>
+      </p:sp>
+      <p:sp>
+        <p:nvSpPr>
+          <p:cNvPr id="13" name="Text 10"/>
+          <p:cNvSpPr txBox="1"/>
+          <p:nvPr/>
+        </p:nvSpPr>
+        <p:spPr>
+          <a:xfrm>
+            <a:off x="4663440" y="2523744"/>
+            <a:ext cx="1874520" cy="329184"/>
+          </a:xfrm>
+          <a:prstGeom prst="rect">
+            <a:avLst/>
+          </a:prstGeom>
+          <a:noFill/>
+          <a:ln/>
+        </p:spPr>
+        <p:txBody>
+          <a:bodyPr wrap="square" lIns="0" tIns="0" rIns="0" bIns="0" rtlCol="0" anchor="ctr"/>
+          <a:lstStyle/>
+          <a:p>
+            <a:pPr indent="0" marL="0">
+              <a:buNone/>
+            </a:pPr>
+            <a:r>
+              <a:rPr lang="en-US" sz="1100" dirty="0">
+                <a:solidFill>
+                  <a:srgbClr val="1D2B2A"/>
+                </a:solidFill>
+                <a:latin typeface="Calibri" pitchFamily="34" charset="0"/>
+                <a:ea typeface="Calibri" pitchFamily="34" charset="-122"/>
+                <a:cs typeface="Calibri" pitchFamily="34" charset="-120"/>
+              </a:rPr>
+              <a:t>Input / output</a:t>
+            </a:r>
+            <a:endParaRPr lang="en-US" sz="1100" dirty="0"/>
+          </a:p>
+        </p:txBody>
+      </p:sp>
+      <p:sp>
+        <p:nvSpPr>
+          <p:cNvPr id="14" name="Shape 11"/>
+          <p:cNvSpPr/>
+          <p:nvPr/>
+        </p:nvSpPr>
+        <p:spPr>
+          <a:xfrm>
+            <a:off x="3931920" y="2953512"/>
+            <a:ext cx="640080" cy="329184"/>
+          </a:xfrm>
+          <a:prstGeom prst="flowChartPredefinedProcess">
+            <a:avLst/>
+          </a:prstGeom>
+          <a:solidFill>
+            <a:srgbClr val="E8F0EE"/>
+          </a:solidFill>
+          <a:ln w="12700">
+            <a:solidFill>
+              <a:srgbClr val="0B4F4A"/>
+            </a:solidFill>
+            <a:prstDash val="solid"/>
+          </a:ln>
+        </p:spPr>
+      </p:sp>
+      <p:sp>
+        <p:nvSpPr>
+          <p:cNvPr id="15" name="Text 12"/>
+          <p:cNvSpPr txBox="1"/>
+          <p:nvPr/>
+        </p:nvSpPr>
+        <p:spPr>
+          <a:xfrm>
+            <a:off x="4663440" y="2953512"/>
+            <a:ext cx="1874520" cy="329184"/>
+          </a:xfrm>
+          <a:prstGeom prst="rect">
+            <a:avLst/>
+          </a:prstGeom>
+          <a:noFill/>
+          <a:ln/>
+        </p:spPr>
+        <p:txBody>
+          <a:bodyPr wrap="square" lIns="0" tIns="0" rIns="0" bIns="0" rtlCol="0" anchor="ctr"/>
+          <a:lstStyle/>
+          <a:p>
+            <a:pPr indent="0" marL="0">
+              <a:buNone/>
+            </a:pPr>
+            <a:r>
+              <a:rPr lang="en-US" sz="1100" dirty="0">
+                <a:solidFill>
+                  <a:srgbClr val="1D2B2A"/>
+                </a:solidFill>
+                <a:latin typeface="Calibri" pitchFamily="34" charset="0"/>
+                <a:ea typeface="Calibri" pitchFamily="34" charset="-122"/>
+                <a:cs typeface="Calibri" pitchFamily="34" charset="-120"/>
+              </a:rPr>
+              <a:t>A named Bank operation</a:t>
+            </a:r>
+            <a:endParaRPr lang="en-US" sz="1100" dirty="0"/>
+          </a:p>
+        </p:txBody>
+      </p:sp>
+      <p:sp>
+        <p:nvSpPr>
+          <p:cNvPr id="16" name="Shape 13"/>
+          <p:cNvSpPr/>
+          <p:nvPr/>
+        </p:nvSpPr>
+        <p:spPr>
+          <a:xfrm>
+            <a:off x="3931920" y="3383280"/>
+            <a:ext cx="640080" cy="329184"/>
+          </a:xfrm>
+          <a:prstGeom prst="flowChartMagneticDisk">
+            <a:avLst/>
+          </a:prstGeom>
+          <a:solidFill>
+            <a:srgbClr val="E8F0EE"/>
+          </a:solidFill>
+          <a:ln w="12700">
+            <a:solidFill>
+              <a:srgbClr val="0B4F4A"/>
+            </a:solidFill>
+            <a:prstDash val="solid"/>
+          </a:ln>
+        </p:spPr>
+      </p:sp>
+      <p:sp>
+        <p:nvSpPr>
+          <p:cNvPr id="17" name="Text 14"/>
+          <p:cNvSpPr txBox="1"/>
+          <p:nvPr/>
+        </p:nvSpPr>
+        <p:spPr>
+          <a:xfrm>
+            <a:off x="4663440" y="3383280"/>
+            <a:ext cx="1874520" cy="329184"/>
+          </a:xfrm>
+          <a:prstGeom prst="rect">
+            <a:avLst/>
+          </a:prstGeom>
+          <a:noFill/>
+          <a:ln/>
+        </p:spPr>
+        <p:txBody>
+          <a:bodyPr wrap="square" lIns="0" tIns="0" rIns="0" bIns="0" rtlCol="0" anchor="ctr"/>
+          <a:lstStyle/>
+          <a:p>
+            <a:pPr indent="0" marL="0">
+              <a:buNone/>
+            </a:pPr>
+            <a:r>
+              <a:rPr lang="en-US" sz="1100" dirty="0">
+                <a:solidFill>
+                  <a:srgbClr val="1D2B2A"/>
+                </a:solidFill>
+                <a:latin typeface="Calibri" pitchFamily="34" charset="0"/>
+                <a:ea typeface="Calibri" pitchFamily="34" charset="-122"/>
+                <a:cs typeface="Calibri" pitchFamily="34" charset="-120"/>
+              </a:rPr>
+              <a:t>Ledger / audit log</a:t>
+            </a:r>
+            <a:endParaRPr lang="en-US" sz="1100" dirty="0"/>
+          </a:p>
+        </p:txBody>
+      </p:sp>
+      <p:sp>
+        <p:nvSpPr>
+          <p:cNvPr id="18" name="Text 15"/>
+          <p:cNvSpPr txBox="1"/>
+          <p:nvPr/>
+        </p:nvSpPr>
+        <p:spPr>
+          <a:xfrm>
+            <a:off x="6720840" y="1234440"/>
+            <a:ext cx="1965960" cy="2560320"/>
+          </a:xfrm>
+          <a:prstGeom prst="rect">
+            <a:avLst/>
+          </a:prstGeom>
+          <a:noFill/>
+          <a:ln/>
+        </p:spPr>
+        <p:txBody>
+          <a:bodyPr wrap="square" lIns="0" tIns="0" rIns="0" bIns="0" rtlCol="0" anchor="t"/>
+          <a:lstStyle/>
+          <a:p>
+            <a:pPr indent="0" marL="0">
               <a:spcAft>
                 <a:spcPts val="600"/>
               </a:spcAft>
-              <a:buSzPct val="100000"/>
-              <a:buChar char="•"/>
+              <a:buNone/>
             </a:pPr>
             <a:r>
               <a:rPr lang="en-US" sz="1200" dirty="0">
@@ -3075,17 +3547,16 @@
                 <a:ea typeface="Calibri" pitchFamily="34" charset="-122"/>
                 <a:cs typeface="Calibri" pitchFamily="34" charset="-120"/>
               </a:rPr>
-              <a:t>Guided rule checks: 14 real operations, each showing the model's own refusal</a:t>
+              <a:t>1. Program overview</a:t>
             </a:r>
             <a:endParaRPr lang="en-US" sz="1200" dirty="0"/>
           </a:p>
           <a:p>
-            <a:pPr marL="342900" indent="-342900">
+            <a:pPr indent="0" marL="0">
               <a:spcAft>
                 <a:spcPts val="600"/>
               </a:spcAft>
-              <a:buSzPct val="100000"/>
-              <a:buChar char="•"/>
+              <a:buNone/>
             </a:pPr>
             <a:r>
               <a:rPr lang="en-US" sz="1200" dirty="0">
@@ -3096,17 +3567,16 @@
                 <a:ea typeface="Calibri" pitchFamily="34" charset="-122"/>
                 <a:cs typeface="Calibri" pitchFamily="34" charset="-120"/>
               </a:rPr>
-              <a:t>Customer timeline and time machine for any past date</a:t>
+              <a:t>2. Onboarding</a:t>
             </a:r>
             <a:endParaRPr lang="en-US" sz="1200" dirty="0"/>
           </a:p>
           <a:p>
-            <a:pPr marL="342900" indent="-342900">
+            <a:pPr indent="0" marL="0">
               <a:spcAft>
                 <a:spcPts val="600"/>
               </a:spcAft>
-              <a:buSzPct val="100000"/>
-              <a:buChar char="•"/>
+              <a:buNone/>
             </a:pPr>
             <a:r>
               <a:rPr lang="en-US" sz="1200" dirty="0">
@@ -3117,17 +3587,16 @@
                 <a:ea typeface="Calibri" pitchFamily="34" charset="-122"/>
                 <a:cs typeface="Calibri" pitchFamily="34" charset="-120"/>
               </a:rPr>
-              <a:t>Card chains, cases, audit log and a zero trial balance</a:t>
+              <a:t>3. Transfer payment</a:t>
             </a:r>
             <a:endParaRPr lang="en-US" sz="1200" dirty="0"/>
           </a:p>
           <a:p>
-            <a:pPr marL="342900" indent="-342900">
+            <a:pPr indent="0" marL="0">
               <a:spcAft>
                 <a:spcPts val="600"/>
               </a:spcAft>
-              <a:buSzPct val="100000"/>
-              <a:buChar char="•"/>
+              <a:buNone/>
             </a:pPr>
             <a:r>
               <a:rPr lang="en-US" sz="1200" dirty="0">
@@ -3138,9 +3607,88 @@
                 <a:ea typeface="Calibri" pitchFamily="34" charset="-122"/>
                 <a:cs typeface="Calibri" pitchFamily="34" charset="-120"/>
               </a:rPr>
-              <a:t>GUI classes inherit too: Page -&gt; MasterDetailPage -&gt; CustomersPage</a:t>
+              <a:t>4. Card purchase</a:t>
             </a:r>
             <a:endParaRPr lang="en-US" sz="1200" dirty="0"/>
+          </a:p>
+          <a:p>
+            <a:pPr indent="0" marL="0">
+              <a:spcAft>
+                <a:spcPts val="600"/>
+              </a:spcAft>
+              <a:buNone/>
+            </a:pPr>
+            <a:r>
+              <a:rPr lang="en-US" sz="1200" dirty="0">
+                <a:solidFill>
+                  <a:srgbClr val="1D2B2A"/>
+                </a:solidFill>
+                <a:latin typeface="Calibri" pitchFamily="34" charset="0"/>
+                <a:ea typeface="Calibri" pitchFamily="34" charset="-122"/>
+                <a:cs typeface="Calibri" pitchFamily="34" charset="-120"/>
+              </a:rPr>
+              <a:t>5. Financing lifecycle</a:t>
+            </a:r>
+            <a:endParaRPr lang="en-US" sz="1200" dirty="0"/>
+          </a:p>
+          <a:p>
+            <a:pPr indent="0" marL="0">
+              <a:spcAft>
+                <a:spcPts val="600"/>
+              </a:spcAft>
+              <a:buNone/>
+            </a:pPr>
+            <a:r>
+              <a:rPr lang="en-US" sz="1200" dirty="0">
+                <a:solidFill>
+                  <a:srgbClr val="1D2B2A"/>
+                </a:solidFill>
+                <a:latin typeface="Calibri" pitchFamily="34" charset="0"/>
+                <a:ea typeface="Calibri" pitchFamily="34" charset="-122"/>
+                <a:cs typeface="Calibri" pitchFamily="34" charset="-120"/>
+              </a:rPr>
+              <a:t>6. Desktop console</a:t>
+            </a:r>
+            <a:endParaRPr lang="en-US" sz="1200" dirty="0"/>
+          </a:p>
+        </p:txBody>
+      </p:sp>
+      <p:sp>
+        <p:nvSpPr>
+          <p:cNvPr id="19" name="Text 16"/>
+          <p:cNvSpPr txBox="1"/>
+          <p:nvPr/>
+        </p:nvSpPr>
+        <p:spPr>
+          <a:xfrm>
+            <a:off x="3931920" y="4069080"/>
+            <a:ext cx="4754880" cy="457200"/>
+          </a:xfrm>
+          <a:prstGeom prst="rect">
+            <a:avLst/>
+          </a:prstGeom>
+          <a:noFill/>
+          <a:ln/>
+        </p:spPr>
+        <p:txBody>
+          <a:bodyPr wrap="square" lIns="0" tIns="0" rIns="0" bIns="0" rtlCol="0" anchor="ctr"/>
+          <a:lstStyle/>
+          <a:p>
+            <a:pPr indent="0" marL="0">
+              <a:buNone/>
+            </a:pPr>
+            <a:r>
+              <a:rPr lang="en-US" sz="1100" i="1" dirty="0">
+                <a:solidFill>
+                  <a:srgbClr val="5B6B69"/>
+                </a:solidFill>
+                <a:latin typeface="Calibri" pitchFamily="34" charset="0"/>
+                <a:ea typeface="Calibri" pitchFamily="34" charset="-122"/>
+                <a:cs typeface="Calibri" pitchFamily="34" charset="-120"/>
+              </a:rPr>
+              <a:t>Report section 4.1; also on the GUI's Diagrams screen</a:t>
+            </a:r>
+            <a:endParaRPr lang="en-US" sz="1100" dirty="0"/>
           </a:p>
         </p:txBody>
       </p:sp>
@@ -3203,7 +3751,7 @@
               <a:buNone/>
             </a:pPr>
             <a:r>
-              <a:rPr lang="en-US" sz="2200" b="1" dirty="0">
+              <a:rPr lang="en-US" sz="2800" b="1" dirty="0">
                 <a:solidFill>
                   <a:srgbClr val="0B4F4A"/>
                 </a:solidFill>
@@ -3211,127 +3759,112 @@
                 <a:ea typeface="Cambria" pitchFamily="34" charset="-122"/>
                 <a:cs typeface="Cambria" pitchFamily="34" charset="-120"/>
               </a:rPr>
-              <a:t>Code review: 20 defects fixed, each with a test</a:t>
-            </a:r>
-            <a:endParaRPr lang="en-US" sz="2200" dirty="0"/>
-          </a:p>
-        </p:txBody>
-      </p:sp>
-      <p:sp>
-        <p:nvSpPr>
-          <p:cNvPr id="3" name="Shape 1"/>
+              <a:t>Live demo: the desktop console</a:t>
+            </a:r>
+            <a:endParaRPr lang="en-US" sz="2800" dirty="0"/>
+          </a:p>
+        </p:txBody>
+      </p:sp>
+      <p:sp>
+        <p:nvSpPr>
+          <p:cNvPr id="3" name="Text 1"/>
+          <p:cNvSpPr txBox="1"/>
+          <p:nvPr/>
+        </p:nvSpPr>
+        <p:spPr>
+          <a:xfrm>
+            <a:off x="457200" y="804672"/>
+            <a:ext cx="8229600" cy="320040"/>
+          </a:xfrm>
+          <a:prstGeom prst="rect">
+            <a:avLst/>
+          </a:prstGeom>
+          <a:noFill/>
+          <a:ln/>
+        </p:spPr>
+        <p:txBody>
+          <a:bodyPr wrap="square" lIns="0" tIns="0" rIns="0" bIns="0" rtlCol="0" anchor="ctr"/>
+          <a:lstStyle/>
+          <a:p>
+            <a:pPr indent="0" marL="0">
+              <a:buNone/>
+            </a:pPr>
+            <a:r>
+              <a:rPr lang="en-US" sz="1200" i="1" dirty="0">
+                <a:solidFill>
+                  <a:srgbClr val="5B6B69"/>
+                </a:solidFill>
+                <a:latin typeface="Calibri" pitchFamily="34" charset="0"/>
+                <a:ea typeface="Calibri" pitchFamily="34" charset="-122"/>
+                <a:cs typeface="Calibri" pitchFamily="34" charset="-120"/>
+              </a:rPr>
+              <a:t>banking_gui.py - pure Python (Tkinter); every button calls one Bank operation</a:t>
+            </a:r>
+            <a:endParaRPr lang="en-US" sz="1200" dirty="0"/>
+          </a:p>
+        </p:txBody>
+      </p:sp>
+      <p:sp>
+        <p:nvSpPr>
+          <p:cNvPr id="4" name="Shape 2"/>
           <p:cNvSpPr/>
           <p:nvPr/>
         </p:nvSpPr>
         <p:spPr>
           <a:xfrm>
-            <a:off x="457200" y="1097280"/>
-            <a:ext cx="2651760" cy="3566160"/>
+            <a:off x="457200" y="1188720"/>
+            <a:ext cx="5577840" cy="3611880"/>
           </a:xfrm>
           <a:prstGeom prst="roundRect">
             <a:avLst>
-              <a:gd name="adj" fmla="val 2759"/>
+              <a:gd name="adj" fmla="val 2025"/>
             </a:avLst>
           </a:prstGeom>
           <a:solidFill>
-            <a:srgbClr val="0B4F4A"/>
+            <a:srgbClr val="F4F8F7"/>
           </a:solidFill>
           <a:ln w="12700">
             <a:solidFill>
-              <a:srgbClr val="0B4F4A"/>
+              <a:srgbClr val="F4F8F7"/>
             </a:solidFill>
             <a:prstDash val="solid"/>
           </a:ln>
         </p:spPr>
       </p:sp>
-      <p:sp>
-        <p:nvSpPr>
-          <p:cNvPr id="4" name="Text 2"/>
-          <p:cNvSpPr txBox="1"/>
-          <p:nvPr/>
-        </p:nvSpPr>
-        <p:spPr>
-          <a:xfrm>
-            <a:off x="457200" y="1463040"/>
-            <a:ext cx="2651760" cy="1097280"/>
-          </a:xfrm>
-          <a:prstGeom prst="rect">
-            <a:avLst/>
-          </a:prstGeom>
-          <a:noFill/>
-          <a:ln/>
-        </p:spPr>
-        <p:txBody>
-          <a:bodyPr wrap="square" lIns="0" tIns="0" rIns="0" bIns="0" rtlCol="0" anchor="ctr"/>
-          <a:lstStyle/>
-          <a:p>
-            <a:pPr algn="ctr" indent="0" marL="0">
-              <a:buNone/>
-            </a:pPr>
-            <a:r>
-              <a:rPr lang="en-US" sz="6000" b="1" dirty="0">
-                <a:solidFill>
-                  <a:srgbClr val="FFFFFF"/>
-                </a:solidFill>
-                <a:latin typeface="Cambria" pitchFamily="34" charset="0"/>
-                <a:ea typeface="Cambria" pitchFamily="34" charset="-122"/>
-                <a:cs typeface="Cambria" pitchFamily="34" charset="-120"/>
-              </a:rPr>
-              <a:t>20</a:t>
-            </a:r>
-            <a:endParaRPr lang="en-US" sz="6000" dirty="0"/>
-          </a:p>
-        </p:txBody>
-      </p:sp>
-      <p:sp>
-        <p:nvSpPr>
-          <p:cNvPr id="5" name="Text 3"/>
-          <p:cNvSpPr txBox="1"/>
-          <p:nvPr/>
-        </p:nvSpPr>
-        <p:spPr>
-          <a:xfrm>
-            <a:off x="685800" y="2651760"/>
-            <a:ext cx="2194560" cy="1097280"/>
-          </a:xfrm>
-          <a:prstGeom prst="rect">
-            <a:avLst/>
-          </a:prstGeom>
-          <a:noFill/>
-          <a:ln/>
-        </p:spPr>
-        <p:txBody>
-          <a:bodyPr wrap="square" lIns="0" tIns="0" rIns="0" bIns="0" rtlCol="0" anchor="ctr"/>
-          <a:lstStyle/>
-          <a:p>
-            <a:pPr algn="ctr" indent="0" marL="0">
-              <a:buNone/>
-            </a:pPr>
-            <a:r>
-              <a:rPr lang="en-US" sz="1400" dirty="0">
-                <a:solidFill>
-                  <a:srgbClr val="CFE3DF"/>
-                </a:solidFill>
-                <a:latin typeface="Calibri" pitchFamily="34" charset="0"/>
-                <a:ea typeface="Calibri" pitchFamily="34" charset="-122"/>
-                <a:cs typeface="Calibri" pitchFamily="34" charset="-120"/>
-              </a:rPr>
-              <a:t>defects found and fixed, each with a regression test</a:t>
-            </a:r>
-            <a:endParaRPr lang="en-US" sz="1400" dirty="0"/>
-          </a:p>
-        </p:txBody>
-      </p:sp>
-      <p:sp>
-        <p:nvSpPr>
-          <p:cNvPr id="6" name="Text 4"/>
-          <p:cNvSpPr txBox="1"/>
-          <p:nvPr/>
-        </p:nvSpPr>
-        <p:spPr>
-          <a:xfrm>
-            <a:off x="3474720" y="1143000"/>
-            <a:ext cx="5212080" cy="3566160"/>
+      <p:pic>
+        <p:nvPicPr>
+          <p:cNvPr id="5" name="Image 0" descr="/home/user/commercial-banking/docs/screenshots/gui_01_overview.png">    </p:cNvPr>
+          <p:cNvPicPr>
+            <a:picLocks noChangeAspect="1"/>
+          </p:cNvPicPr>
+          <p:nvPr/>
+        </p:nvPicPr>
+        <p:blipFill>
+          <a:blip r:embed="rId1"/>
+          <a:stretch>
+            <a:fillRect/>
+          </a:stretch>
+        </p:blipFill>
+        <p:spPr>
+          <a:xfrm>
+            <a:off x="548640" y="1280160"/>
+            <a:ext cx="5394960" cy="3291840"/>
+          </a:xfrm>
+          <a:prstGeom prst="rect">
+            <a:avLst/>
+          </a:prstGeom>
+        </p:spPr>
+      </p:pic>
+      <p:sp>
+        <p:nvSpPr>
+          <p:cNvPr id="6" name="Text 3"/>
+          <p:cNvSpPr txBox="1"/>
+          <p:nvPr/>
+        </p:nvSpPr>
+        <p:spPr>
+          <a:xfrm>
+            <a:off x="6263640" y="1234440"/>
+            <a:ext cx="2468880" cy="3566160"/>
           </a:xfrm>
           <a:prstGeom prst="rect">
             <a:avLst/>
@@ -3351,7 +3884,7 @@
               <a:buChar char="•"/>
             </a:pPr>
             <a:r>
-              <a:rPr lang="en-US" sz="1350" dirty="0">
+              <a:rPr lang="en-US" sz="1200" dirty="0">
                 <a:solidFill>
                   <a:srgbClr val="1D2B2A"/>
                 </a:solidFill>
@@ -3359,9 +3892,9 @@
                 <a:ea typeface="Calibri" pitchFamily="34" charset="-122"/>
                 <a:cs typeface="Calibri" pitchFamily="34" charset="-120"/>
               </a:rPr>
-              <a:t>A refused loan overpayment still marked installments as paid</a:t>
-            </a:r>
-            <a:endParaRPr lang="en-US" sz="1350" dirty="0"/>
+              <a:t>Guided rule checks: 14 real operations, each showing the model's own refusal</a:t>
+            </a:r>
+            <a:endParaRPr lang="en-US" sz="1200" dirty="0"/>
           </a:p>
           <a:p>
             <a:pPr marL="342900" indent="-342900">
@@ -3372,7 +3905,7 @@
               <a:buChar char="•"/>
             </a:pPr>
             <a:r>
-              <a:rPr lang="en-US" sz="1350" dirty="0">
+              <a:rPr lang="en-US" sz="1200" dirty="0">
                 <a:solidFill>
                   <a:srgbClr val="1D2B2A"/>
                 </a:solidFill>
@@ -3380,9 +3913,9 @@
                 <a:ea typeface="Calibri" pitchFamily="34" charset="-122"/>
                 <a:cs typeface="Calibri" pitchFamily="34" charset="-120"/>
               </a:rPr>
-              <a:t>Resolving a dispute twice refunded the customer twice</a:t>
-            </a:r>
-            <a:endParaRPr lang="en-US" sz="1350" dirty="0"/>
+              <a:t>30 forms, including full customer onboarding</a:t>
+            </a:r>
+            <a:endParaRPr lang="en-US" sz="1200" dirty="0"/>
           </a:p>
           <a:p>
             <a:pPr marL="342900" indent="-342900">
@@ -3393,7 +3926,7 @@
               <a:buChar char="•"/>
             </a:pPr>
             <a:r>
-              <a:rPr lang="en-US" sz="1350" dirty="0">
+              <a:rPr lang="en-US" sz="1200" dirty="0">
                 <a:solidFill>
                   <a:srgbClr val="1D2B2A"/>
                 </a:solidFill>
@@ -3401,9 +3934,9 @@
                 <a:ea typeface="Calibri" pitchFamily="34" charset="-122"/>
                 <a:cs typeface="Calibri" pitchFamily="34" charset="-120"/>
               </a:rPr>
-              <a:t>Recording an ACTIVE card as found destroyed it</a:t>
-            </a:r>
-            <a:endParaRPr lang="en-US" sz="1350" dirty="0"/>
+              <a:t>Customer timeline and time machine for any past date</a:t>
+            </a:r>
+            <a:endParaRPr lang="en-US" sz="1200" dirty="0"/>
           </a:p>
           <a:p>
             <a:pPr marL="342900" indent="-342900">
@@ -3414,7 +3947,7 @@
               <a:buChar char="•"/>
             </a:pPr>
             <a:r>
-              <a:rPr lang="en-US" sz="1350" dirty="0">
+              <a:rPr lang="en-US" sz="1200" dirty="0">
                 <a:solidFill>
                   <a:srgbClr val="1D2B2A"/>
                 </a:solidFill>
@@ -3422,9 +3955,9 @@
                 <a:ea typeface="Calibri" pitchFamily="34" charset="-122"/>
                 <a:cs typeface="Calibri" pitchFamily="34" charset="-120"/>
               </a:rPr>
-              <a:t>Replacement cards blocked once the product was withdrawn</a:t>
-            </a:r>
-            <a:endParaRPr lang="en-US" sz="1350" dirty="0"/>
+              <a:t>Card chains, cases, audit log and a zero trial balance</a:t>
+            </a:r>
+            <a:endParaRPr lang="en-US" sz="1200" dirty="0"/>
           </a:p>
           <a:p>
             <a:pPr marL="342900" indent="-342900">
@@ -3435,7 +3968,7 @@
               <a:buChar char="•"/>
             </a:pPr>
             <a:r>
-              <a:rPr lang="en-US" sz="1350" dirty="0">
+              <a:rPr lang="en-US" sz="1200" dirty="0">
                 <a:solidFill>
                   <a:srgbClr val="1D2B2A"/>
                 </a:solidFill>
@@ -3443,51 +3976,9 @@
                 <a:ea typeface="Calibri" pitchFamily="34" charset="-122"/>
                 <a:cs typeface="Calibri" pitchFamily="34" charset="-120"/>
               </a:rPr>
-              <a:t>Bank fees used up customers' savings withdrawals</a:t>
-            </a:r>
-            <a:endParaRPr lang="en-US" sz="1350" dirty="0"/>
-          </a:p>
-          <a:p>
-            <a:pPr marL="342900" indent="-342900">
-              <a:spcAft>
-                <a:spcPts val="600"/>
-              </a:spcAft>
-              <a:buSzPct val="100000"/>
-              <a:buChar char="•"/>
-            </a:pPr>
-            <a:r>
-              <a:rPr lang="en-US" sz="1350" dirty="0">
-                <a:solidFill>
-                  <a:srgbClr val="1D2B2A"/>
-                </a:solidFill>
-                <a:latin typeface="Calibri" pitchFamily="34" charset="0"/>
-                <a:ea typeface="Calibri" pitchFamily="34" charset="-122"/>
-                <a:cs typeface="Calibri" pitchFamily="34" charset="-120"/>
-              </a:rPr>
-              <a:t>Account closure ignored holds and pending payments</a:t>
-            </a:r>
-            <a:endParaRPr lang="en-US" sz="1350" dirty="0"/>
-          </a:p>
-          <a:p>
-            <a:pPr marL="342900" indent="-342900">
-              <a:spcAft>
-                <a:spcPts val="600"/>
-              </a:spcAft>
-              <a:buSzPct val="100000"/>
-              <a:buChar char="•"/>
-            </a:pPr>
-            <a:r>
-              <a:rPr lang="en-US" sz="1350" dirty="0">
-                <a:solidFill>
-                  <a:srgbClr val="1D2B2A"/>
-                </a:solidFill>
-                <a:latin typeface="Calibri" pitchFamily="34" charset="0"/>
-                <a:ea typeface="Calibri" pitchFamily="34" charset="-122"/>
-                <a:cs typeface="Calibri" pitchFamily="34" charset="-120"/>
-              </a:rPr>
-              <a:t>No delegated limit on credit approvals</a:t>
-            </a:r>
-            <a:endParaRPr lang="en-US" sz="1350" dirty="0"/>
+              <a:t>GUI classes inherit too: Page -&gt; MasterDetailPage -&gt; CustomersPage</a:t>
+            </a:r>
+            <a:endParaRPr lang="en-US" sz="1200" dirty="0"/>
           </a:p>
         </p:txBody>
       </p:sp>
@@ -3502,6 +3993,353 @@
 <file path=ppt/slides/slide13.xml><?xml version="1.0" encoding="utf-8"?>
 <p:sld xmlns:a="http://schemas.openxmlformats.org/drawingml/2006/main" xmlns:r="http://schemas.openxmlformats.org/officeDocument/2006/relationships" xmlns:p="http://schemas.openxmlformats.org/presentationml/2006/main">
   <p:cSld name="Slide 13">
+    <p:bg>
+      <p:bgPr>
+        <a:solidFill>
+          <a:srgbClr val="FFFFFF"/>
+        </a:solidFill>
+      </p:bgPr>
+    </p:bg>
+    <p:spTree>
+      <p:nvGrpSpPr>
+        <p:cNvPr id="1" name=""/>
+        <p:cNvGrpSpPr/>
+        <p:nvPr/>
+      </p:nvGrpSpPr>
+      <p:grpSpPr>
+        <a:xfrm>
+          <a:off x="0" y="0"/>
+          <a:ext cx="0" cy="0"/>
+          <a:chOff x="0" y="0"/>
+          <a:chExt cx="0" cy="0"/>
+        </a:xfrm>
+      </p:grpSpPr>
+      <p:sp>
+        <p:nvSpPr>
+          <p:cNvPr id="2" name="Text 0"/>
+          <p:cNvSpPr txBox="1"/>
+          <p:nvPr/>
+        </p:nvSpPr>
+        <p:spPr>
+          <a:xfrm>
+            <a:off x="457200" y="274320"/>
+            <a:ext cx="8229600" cy="548640"/>
+          </a:xfrm>
+          <a:prstGeom prst="rect">
+            <a:avLst/>
+          </a:prstGeom>
+          <a:noFill/>
+          <a:ln/>
+        </p:spPr>
+        <p:txBody>
+          <a:bodyPr wrap="square" lIns="0" tIns="0" rIns="0" bIns="0" rtlCol="0" anchor="ctr">
+            <a:normAutofit/>
+          </a:bodyPr>
+          <a:lstStyle/>
+          <a:p>
+            <a:pPr indent="0" marL="0">
+              <a:buNone/>
+            </a:pPr>
+            <a:r>
+              <a:rPr lang="en-US" sz="2200" b="1" dirty="0">
+                <a:solidFill>
+                  <a:srgbClr val="0B4F4A"/>
+                </a:solidFill>
+                <a:latin typeface="Cambria" pitchFamily="34" charset="0"/>
+                <a:ea typeface="Cambria" pitchFamily="34" charset="-122"/>
+                <a:cs typeface="Cambria" pitchFamily="34" charset="-120"/>
+              </a:rPr>
+              <a:t>Code review: 20 defects fixed, each with a test</a:t>
+            </a:r>
+            <a:endParaRPr lang="en-US" sz="2200" dirty="0"/>
+          </a:p>
+        </p:txBody>
+      </p:sp>
+      <p:sp>
+        <p:nvSpPr>
+          <p:cNvPr id="3" name="Shape 1"/>
+          <p:cNvSpPr/>
+          <p:nvPr/>
+        </p:nvSpPr>
+        <p:spPr>
+          <a:xfrm>
+            <a:off x="457200" y="1097280"/>
+            <a:ext cx="2651760" cy="3566160"/>
+          </a:xfrm>
+          <a:prstGeom prst="roundRect">
+            <a:avLst>
+              <a:gd name="adj" fmla="val 2759"/>
+            </a:avLst>
+          </a:prstGeom>
+          <a:solidFill>
+            <a:srgbClr val="0B4F4A"/>
+          </a:solidFill>
+          <a:ln w="12700">
+            <a:solidFill>
+              <a:srgbClr val="0B4F4A"/>
+            </a:solidFill>
+            <a:prstDash val="solid"/>
+          </a:ln>
+        </p:spPr>
+      </p:sp>
+      <p:sp>
+        <p:nvSpPr>
+          <p:cNvPr id="4" name="Text 2"/>
+          <p:cNvSpPr txBox="1"/>
+          <p:nvPr/>
+        </p:nvSpPr>
+        <p:spPr>
+          <a:xfrm>
+            <a:off x="457200" y="1463040"/>
+            <a:ext cx="2651760" cy="1097280"/>
+          </a:xfrm>
+          <a:prstGeom prst="rect">
+            <a:avLst/>
+          </a:prstGeom>
+          <a:noFill/>
+          <a:ln/>
+        </p:spPr>
+        <p:txBody>
+          <a:bodyPr wrap="square" lIns="0" tIns="0" rIns="0" bIns="0" rtlCol="0" anchor="ctr"/>
+          <a:lstStyle/>
+          <a:p>
+            <a:pPr algn="ctr" indent="0" marL="0">
+              <a:buNone/>
+            </a:pPr>
+            <a:r>
+              <a:rPr lang="en-US" sz="6000" b="1" dirty="0">
+                <a:solidFill>
+                  <a:srgbClr val="FFFFFF"/>
+                </a:solidFill>
+                <a:latin typeface="Cambria" pitchFamily="34" charset="0"/>
+                <a:ea typeface="Cambria" pitchFamily="34" charset="-122"/>
+                <a:cs typeface="Cambria" pitchFamily="34" charset="-120"/>
+              </a:rPr>
+              <a:t>20</a:t>
+            </a:r>
+            <a:endParaRPr lang="en-US" sz="6000" dirty="0"/>
+          </a:p>
+        </p:txBody>
+      </p:sp>
+      <p:sp>
+        <p:nvSpPr>
+          <p:cNvPr id="5" name="Text 3"/>
+          <p:cNvSpPr txBox="1"/>
+          <p:nvPr/>
+        </p:nvSpPr>
+        <p:spPr>
+          <a:xfrm>
+            <a:off x="685800" y="2651760"/>
+            <a:ext cx="2194560" cy="1097280"/>
+          </a:xfrm>
+          <a:prstGeom prst="rect">
+            <a:avLst/>
+          </a:prstGeom>
+          <a:noFill/>
+          <a:ln/>
+        </p:spPr>
+        <p:txBody>
+          <a:bodyPr wrap="square" lIns="0" tIns="0" rIns="0" bIns="0" rtlCol="0" anchor="ctr"/>
+          <a:lstStyle/>
+          <a:p>
+            <a:pPr algn="ctr" indent="0" marL="0">
+              <a:buNone/>
+            </a:pPr>
+            <a:r>
+              <a:rPr lang="en-US" sz="1400" dirty="0">
+                <a:solidFill>
+                  <a:srgbClr val="CFE3DF"/>
+                </a:solidFill>
+                <a:latin typeface="Calibri" pitchFamily="34" charset="0"/>
+                <a:ea typeface="Calibri" pitchFamily="34" charset="-122"/>
+                <a:cs typeface="Calibri" pitchFamily="34" charset="-120"/>
+              </a:rPr>
+              <a:t>defects found and fixed, each with a regression test</a:t>
+            </a:r>
+            <a:endParaRPr lang="en-US" sz="1400" dirty="0"/>
+          </a:p>
+        </p:txBody>
+      </p:sp>
+      <p:sp>
+        <p:nvSpPr>
+          <p:cNvPr id="6" name="Text 4"/>
+          <p:cNvSpPr txBox="1"/>
+          <p:nvPr/>
+        </p:nvSpPr>
+        <p:spPr>
+          <a:xfrm>
+            <a:off x="3474720" y="1143000"/>
+            <a:ext cx="5212080" cy="3566160"/>
+          </a:xfrm>
+          <a:prstGeom prst="rect">
+            <a:avLst/>
+          </a:prstGeom>
+          <a:noFill/>
+          <a:ln/>
+        </p:spPr>
+        <p:txBody>
+          <a:bodyPr wrap="square" lIns="635" tIns="635" rIns="635" bIns="635" rtlCol="0" anchor="t"/>
+          <a:lstStyle/>
+          <a:p>
+            <a:pPr marL="342900" indent="-342900">
+              <a:spcAft>
+                <a:spcPts val="600"/>
+              </a:spcAft>
+              <a:buSzPct val="100000"/>
+              <a:buChar char="•"/>
+            </a:pPr>
+            <a:r>
+              <a:rPr lang="en-US" sz="1350" dirty="0">
+                <a:solidFill>
+                  <a:srgbClr val="1D2B2A"/>
+                </a:solidFill>
+                <a:latin typeface="Calibri" pitchFamily="34" charset="0"/>
+                <a:ea typeface="Calibri" pitchFamily="34" charset="-122"/>
+                <a:cs typeface="Calibri" pitchFamily="34" charset="-120"/>
+              </a:rPr>
+              <a:t>A refused loan overpayment still marked installments as paid</a:t>
+            </a:r>
+            <a:endParaRPr lang="en-US" sz="1350" dirty="0"/>
+          </a:p>
+          <a:p>
+            <a:pPr marL="342900" indent="-342900">
+              <a:spcAft>
+                <a:spcPts val="600"/>
+              </a:spcAft>
+              <a:buSzPct val="100000"/>
+              <a:buChar char="•"/>
+            </a:pPr>
+            <a:r>
+              <a:rPr lang="en-US" sz="1350" dirty="0">
+                <a:solidFill>
+                  <a:srgbClr val="1D2B2A"/>
+                </a:solidFill>
+                <a:latin typeface="Calibri" pitchFamily="34" charset="0"/>
+                <a:ea typeface="Calibri" pitchFamily="34" charset="-122"/>
+                <a:cs typeface="Calibri" pitchFamily="34" charset="-120"/>
+              </a:rPr>
+              <a:t>Resolving a dispute twice refunded the customer twice</a:t>
+            </a:r>
+            <a:endParaRPr lang="en-US" sz="1350" dirty="0"/>
+          </a:p>
+          <a:p>
+            <a:pPr marL="342900" indent="-342900">
+              <a:spcAft>
+                <a:spcPts val="600"/>
+              </a:spcAft>
+              <a:buSzPct val="100000"/>
+              <a:buChar char="•"/>
+            </a:pPr>
+            <a:r>
+              <a:rPr lang="en-US" sz="1350" dirty="0">
+                <a:solidFill>
+                  <a:srgbClr val="1D2B2A"/>
+                </a:solidFill>
+                <a:latin typeface="Calibri" pitchFamily="34" charset="0"/>
+                <a:ea typeface="Calibri" pitchFamily="34" charset="-122"/>
+                <a:cs typeface="Calibri" pitchFamily="34" charset="-120"/>
+              </a:rPr>
+              <a:t>Recording an ACTIVE card as found destroyed it</a:t>
+            </a:r>
+            <a:endParaRPr lang="en-US" sz="1350" dirty="0"/>
+          </a:p>
+          <a:p>
+            <a:pPr marL="342900" indent="-342900">
+              <a:spcAft>
+                <a:spcPts val="600"/>
+              </a:spcAft>
+              <a:buSzPct val="100000"/>
+              <a:buChar char="•"/>
+            </a:pPr>
+            <a:r>
+              <a:rPr lang="en-US" sz="1350" dirty="0">
+                <a:solidFill>
+                  <a:srgbClr val="1D2B2A"/>
+                </a:solidFill>
+                <a:latin typeface="Calibri" pitchFamily="34" charset="0"/>
+                <a:ea typeface="Calibri" pitchFamily="34" charset="-122"/>
+                <a:cs typeface="Calibri" pitchFamily="34" charset="-120"/>
+              </a:rPr>
+              <a:t>Replacement cards blocked once the product was withdrawn</a:t>
+            </a:r>
+            <a:endParaRPr lang="en-US" sz="1350" dirty="0"/>
+          </a:p>
+          <a:p>
+            <a:pPr marL="342900" indent="-342900">
+              <a:spcAft>
+                <a:spcPts val="600"/>
+              </a:spcAft>
+              <a:buSzPct val="100000"/>
+              <a:buChar char="•"/>
+            </a:pPr>
+            <a:r>
+              <a:rPr lang="en-US" sz="1350" dirty="0">
+                <a:solidFill>
+                  <a:srgbClr val="1D2B2A"/>
+                </a:solidFill>
+                <a:latin typeface="Calibri" pitchFamily="34" charset="0"/>
+                <a:ea typeface="Calibri" pitchFamily="34" charset="-122"/>
+                <a:cs typeface="Calibri" pitchFamily="34" charset="-120"/>
+              </a:rPr>
+              <a:t>Bank fees used up customers' savings withdrawals</a:t>
+            </a:r>
+            <a:endParaRPr lang="en-US" sz="1350" dirty="0"/>
+          </a:p>
+          <a:p>
+            <a:pPr marL="342900" indent="-342900">
+              <a:spcAft>
+                <a:spcPts val="600"/>
+              </a:spcAft>
+              <a:buSzPct val="100000"/>
+              <a:buChar char="•"/>
+            </a:pPr>
+            <a:r>
+              <a:rPr lang="en-US" sz="1350" dirty="0">
+                <a:solidFill>
+                  <a:srgbClr val="1D2B2A"/>
+                </a:solidFill>
+                <a:latin typeface="Calibri" pitchFamily="34" charset="0"/>
+                <a:ea typeface="Calibri" pitchFamily="34" charset="-122"/>
+                <a:cs typeface="Calibri" pitchFamily="34" charset="-120"/>
+              </a:rPr>
+              <a:t>Account closure ignored holds and pending payments</a:t>
+            </a:r>
+            <a:endParaRPr lang="en-US" sz="1350" dirty="0"/>
+          </a:p>
+          <a:p>
+            <a:pPr marL="342900" indent="-342900">
+              <a:spcAft>
+                <a:spcPts val="600"/>
+              </a:spcAft>
+              <a:buSzPct val="100000"/>
+              <a:buChar char="•"/>
+            </a:pPr>
+            <a:r>
+              <a:rPr lang="en-US" sz="1350" dirty="0">
+                <a:solidFill>
+                  <a:srgbClr val="1D2B2A"/>
+                </a:solidFill>
+                <a:latin typeface="Calibri" pitchFamily="34" charset="0"/>
+                <a:ea typeface="Calibri" pitchFamily="34" charset="-122"/>
+                <a:cs typeface="Calibri" pitchFamily="34" charset="-120"/>
+              </a:rPr>
+              <a:t>No delegated limit on credit approvals</a:t>
+            </a:r>
+            <a:endParaRPr lang="en-US" sz="1350" dirty="0"/>
+          </a:p>
+        </p:txBody>
+      </p:sp>
+    </p:spTree>
+  </p:cSld>
+  <p:clrMapOvr>
+    <a:masterClrMapping/>
+  </p:clrMapOvr>
+</p:sld>
+</file>
+
+<file path=ppt/slides/slide14.xml><?xml version="1.0" encoding="utf-8"?>
+<p:sld xmlns:a="http://schemas.openxmlformats.org/drawingml/2006/main" xmlns:r="http://schemas.openxmlformats.org/officeDocument/2006/relationships" xmlns:p="http://schemas.openxmlformats.org/presentationml/2006/main">
+  <p:cSld name="Slide 14">
     <p:bg>
       <p:bgPr>
         <a:solidFill>

--- a/docs/Viva_Presentation.pptx
+++ b/docs/Viva_Presentation.pptx
@@ -19,9 +19,10 @@
     <p:sldId id="267" r:id="rId13"/>
     <p:sldId id="268" r:id="rId14"/>
     <p:sldId id="269" r:id="rId15"/>
+    <p:sldId id="270" r:id="rId16"/>
   </p:sldIdLst>
   <p:notesMasterIdLst>
-    <p:notesMasterId r:id="rId16"/>
+    <p:notesMasterId r:id="rId17"/>
   </p:notesMasterIdLst>
   <p:sldSz cx="9144000" cy="5143500"/>
   <p:notesSz cx="5143500" cy="9144000"/>
@@ -603,7 +604,7 @@
           <a:p>
             <a:r>
               <a:rPr lang="en-US" dirty="0"/>
-              <a:t>Report section 3.2 maps every participant, research area and scope item in the brief to a class, operation and scenario. Section 3.1 answers the brief's eight open questions one by one.</a:t>
+              <a:t>Run python banking_system.py to show them live. Each refusal prints the exact rule, e.g. AuthorityError: the initiator cannot also be the second signatory.</a:t>
             </a:r>
             <a:endParaRPr lang="en-US" dirty="0"/>
           </a:p>
@@ -691,7 +692,7 @@
           <a:p>
             <a:r>
               <a:rPr lang="en-US" dirty="0"/>
-              <a:t>The class diagrams show structure; the flowcharts show behaviour. Walk through the transfer: beneficiary, authority (mandate within limit), funds, dual control, then the PKR 1,000,000 compliance hold. Every red terminator is a refusal that is still kept on record.</a:t>
+              <a:t>Report section 3.2 maps every participant, research area and scope item in the brief to a class, operation and scenario. Section 3.1 answers the brief's eight open questions one by one.</a:t>
             </a:r>
             <a:endParaRPr lang="en-US" dirty="0"/>
           </a:p>
@@ -779,7 +780,7 @@
           <a:p>
             <a:r>
               <a:rPr lang="en-US" dirty="0"/>
-              <a:t>Run Operations &gt; Guided rule checks in order. Then Customers: Ayesha's roles as ribbons, and the time machine on 11 April 2026. The GUI contains no business rules: refusals come from the model and name its error class.</a:t>
+              <a:t>The class diagrams show structure; the flowcharts show behaviour. Walk through the transfer: beneficiary, authority (mandate within limit), funds, dual control, then the PKR 1,000,000 compliance hold. Every red terminator is a refusal that is still kept on record.</a:t>
             </a:r>
             <a:endParaRPr lang="en-US" dirty="0"/>
           </a:p>
@@ -867,7 +868,7 @@
           <a:p>
             <a:r>
               <a:rPr lang="en-US" dirty="0"/>
-              <a:t>Full table in docs/Code_Review.md. Every fix is protected by a test, so it cannot silently come back.</a:t>
+              <a:t>Run Operations &gt; Guided rule checks in order. Then Customers: Ayesha's roles as ribbons, and the time machine on 11 April 2026. The GUI contains no business rules: refusals come from the model and name its error class.</a:t>
             </a:r>
             <a:endParaRPr lang="en-US" dirty="0"/>
           </a:p>
@@ -955,7 +956,7 @@
           <a:p>
             <a:r>
               <a:rPr lang="en-US" dirty="0"/>
-              <a:t>The Arrangement level is where the design pays off for new business models: an Ijarah or Murabaha contract is a new kind of arrangement, not a change to existing classes.</a:t>
+              <a:t>Full table in docs/Code_Review.md. Every fix is protected by a test, so it cannot silently come back.</a:t>
             </a:r>
             <a:endParaRPr lang="en-US" dirty="0"/>
           </a:p>
@@ -979,6 +980,94 @@
             <a:fld id="{F7021451-1387-4CA6-816F-3879F97B5CBC}" type="slidenum">
               <a:rPr lang="en-US"/>
               <a:t>14</a:t>
+            </a:fld>
+            <a:endParaRPr lang="en-US"/>
+          </a:p>
+        </p:txBody>
+      </p:sp>
+    </p:spTree>
+    <p:extLst>
+      <p:ext uri="{BB962C8B-B14F-4D97-AF65-F5344CB8AC3E}">
+        <p14:creationId xmlns:p14="http://schemas.microsoft.com/office/powerpoint/2010/main" val="1024086991"/>
+      </p:ext>
+    </p:extLst>
+  </p:cSld>
+  <p:clrMapOvr>
+    <a:masterClrMapping/>
+  </p:clrMapOvr>
+</p:notes>
+</file>
+
+<file path=ppt/notesSlides/notesSlide15.xml><?xml version="1.0" encoding="utf-8"?>
+<p:notes xmlns:a="http://schemas.openxmlformats.org/drawingml/2006/main" xmlns:r="http://schemas.openxmlformats.org/officeDocument/2006/relationships" xmlns:p="http://schemas.openxmlformats.org/presentationml/2006/main">
+  <p:cSld>
+    <p:spTree>
+      <p:nvGrpSpPr>
+        <p:cNvPr id="1" name=""/>
+        <p:cNvGrpSpPr/>
+        <p:nvPr/>
+      </p:nvGrpSpPr>
+      <p:grpSpPr>
+        <a:xfrm>
+          <a:off x="0" y="0"/>
+          <a:ext cx="0" cy="0"/>
+          <a:chOff x="0" y="0"/>
+          <a:chExt cx="0" cy="0"/>
+        </a:xfrm>
+      </p:grpSpPr>
+      <p:sp>
+        <p:nvSpPr>
+          <p:cNvPr id="2" name="Slide Image Placeholder 1"/>
+          <p:cNvSpPr>
+            <a:spLocks noGrp="1" noRot="1" noChangeAspect="1"/>
+          </p:cNvSpPr>
+          <p:nvPr>
+            <p:ph type="sldImg"/>
+          </p:nvPr>
+        </p:nvSpPr>
+        <p:spPr/>
+      </p:sp>
+      <p:sp>
+        <p:nvSpPr>
+          <p:cNvPr id="3" name="Notes Placeholder 2"/>
+          <p:cNvSpPr>
+            <a:spLocks noGrp="1"/>
+          </p:cNvSpPr>
+          <p:nvPr>
+            <p:ph type="body" idx="1"/>
+          </p:nvPr>
+        </p:nvSpPr>
+        <p:spPr/>
+        <p:txBody>
+          <a:bodyPr/>
+          <a:lstStyle/>
+          <a:p>
+            <a:r>
+              <a:rPr lang="en-US" dirty="0"/>
+              <a:t>The Arrangement level is where the design pays off for new business models: an Ijarah or Murabaha contract is a new kind of arrangement, not a change to existing classes.</a:t>
+            </a:r>
+            <a:endParaRPr lang="en-US" dirty="0"/>
+          </a:p>
+        </p:txBody>
+      </p:sp>
+      <p:sp>
+        <p:nvSpPr>
+          <p:cNvPr id="4" name="Slide Number Placeholder 3"/>
+          <p:cNvSpPr>
+            <a:spLocks noGrp="1"/>
+          </p:cNvSpPr>
+          <p:nvPr>
+            <p:ph type="sldNum" sz="quarter" idx="10"/>
+          </p:nvPr>
+        </p:nvSpPr>
+        <p:spPr/>
+        <p:txBody>
+          <a:bodyPr/>
+          <a:lstStyle/>
+          <a:p>
+            <a:fld id="{F7021451-1387-4CA6-816F-3879F97B5CBC}" type="slidenum">
+              <a:rPr lang="en-US"/>
+              <a:t>15</a:t>
             </a:fld>
             <a:endParaRPr lang="en-US"/>
           </a:p>
@@ -1571,7 +1660,7 @@
           <a:p>
             <a:r>
               <a:rPr lang="en-US" dirty="0"/>
-              <a:t>The obvious alternative, 'everything is an account with flags', fails every critical case: a flag change destroys the fact that it was once different.</a:t>
+              <a:t>Colours on the state diagram show which class introduced each status: blue BankTransaction, green CustomerPayment, amber TransferPayment. The diagram is drawn from the LIFECYCLE declarations, the same objects the code enforces, and CI fails if the committed diagram differs from the code.</a:t>
             </a:r>
             <a:endParaRPr lang="en-US" dirty="0"/>
           </a:p>
@@ -1659,7 +1748,7 @@
           <a:p>
             <a:r>
               <a:rPr lang="en-US" dirty="0"/>
-              <a:t>Run python banking_system.py to show them live. Each refusal prints the exact rule, e.g. AuthorityError: the initiator cannot also be the second signatory.</a:t>
+              <a:t>The obvious alternative, 'everything is an account with flags', fails every critical case: a flag change destroys the fact that it was once different.</a:t>
             </a:r>
             <a:endParaRPr lang="en-US" dirty="0"/>
           </a:p>
@@ -2289,7 +2378,7 @@
                 <a:ea typeface="Cambria" pitchFamily="34" charset="-122"/>
                 <a:cs typeface="Cambria" pitchFamily="34" charset="-120"/>
               </a:rPr>
-              <a:t>Everything the brief names is modelled</a:t>
+              <a:t>16 scenarios break the normal workflow</a:t>
             </a:r>
             <a:endParaRPr lang="en-US" sz="2800" dirty="0"/>
           </a:p>
@@ -2328,7 +2417,7 @@
                 <a:ea typeface="Calibri" pitchFamily="34" charset="-122"/>
                 <a:cs typeface="Calibri" pitchFamily="34" charset="-120"/>
               </a:rPr>
-              <a:t>Found by rereading Problem 4 line by line; each has a test</a:t>
+              <a:t>All ten critical cases in the brief are covered, plus every participant it names</a:t>
             </a:r>
             <a:endParaRPr lang="en-US" sz="1200" dirty="0"/>
           </a:p>
@@ -2342,23 +2431,16 @@
         </p:nvSpPr>
         <p:spPr>
           <a:xfrm>
-            <a:off x="457200" y="1280160"/>
-            <a:ext cx="2606040" cy="1600200"/>
-          </a:xfrm>
-          <a:prstGeom prst="roundRect">
-            <a:avLst>
-              <a:gd name="adj" fmla="val 4571"/>
-            </a:avLst>
+            <a:off x="457200" y="1188720"/>
+            <a:ext cx="384048" cy="384048"/>
+          </a:xfrm>
+          <a:prstGeom prst="ellipse">
+            <a:avLst/>
           </a:prstGeom>
           <a:solidFill>
-            <a:srgbClr val="E8F0EE"/>
+            <a:srgbClr val="B8862F"/>
           </a:solidFill>
-          <a:ln w="12700">
-            <a:solidFill>
-              <a:srgbClr val="E8F0EE"/>
-            </a:solidFill>
-            <a:prstDash val="solid"/>
-          </a:ln>
+          <a:ln/>
         </p:spPr>
       </p:sp>
       <p:sp>
@@ -2369,8 +2451,8 @@
         </p:nvSpPr>
         <p:spPr>
           <a:xfrm>
-            <a:off x="594360" y="1389888"/>
-            <a:ext cx="2331720" cy="502920"/>
+            <a:off x="457200" y="1188720"/>
+            <a:ext cx="384048" cy="384048"/>
           </a:xfrm>
           <a:prstGeom prst="rect">
             <a:avLst/>
@@ -2382,19 +2464,19 @@
           <a:bodyPr wrap="square" lIns="0" tIns="0" rIns="0" bIns="0" rtlCol="0" anchor="ctr"/>
           <a:lstStyle/>
           <a:p>
-            <a:pPr indent="0" marL="0">
+            <a:pPr algn="ctr" indent="0" marL="0">
               <a:buNone/>
             </a:pPr>
             <a:r>
               <a:rPr lang="en-US" sz="1400" b="1" dirty="0">
                 <a:solidFill>
-                  <a:srgbClr val="0B4F4A"/>
+                  <a:srgbClr val="FFFFFF"/>
                 </a:solidFill>
                 <a:latin typeface="Cambria" pitchFamily="34" charset="0"/>
                 <a:ea typeface="Cambria" pitchFamily="34" charset="-122"/>
                 <a:cs typeface="Cambria" pitchFamily="34" charset="-120"/>
               </a:rPr>
-              <a:t>Sole traders &amp; private clients</a:t>
+              <a:t>1</a:t>
             </a:r>
             <a:endParaRPr lang="en-US" sz="1400" dirty="0"/>
           </a:p>
@@ -2408,24 +2490,24 @@
         </p:nvSpPr>
         <p:spPr>
           <a:xfrm>
-            <a:off x="594360" y="1920240"/>
-            <a:ext cx="2331720" cy="868680"/>
-          </a:xfrm>
-          <a:prstGeom prst="rect">
-            <a:avLst/>
-          </a:prstGeom>
-          <a:noFill/>
-          <a:ln/>
-        </p:spPr>
-        <p:txBody>
-          <a:bodyPr wrap="square" lIns="0" tIns="0" rIns="0" bIns="0" rtlCol="0" anchor="t"/>
+            <a:off x="960120" y="1188720"/>
+            <a:ext cx="3566160" cy="384048"/>
+          </a:xfrm>
+          <a:prstGeom prst="rect">
+            <a:avLst/>
+          </a:prstGeom>
+          <a:noFill/>
+          <a:ln/>
+        </p:spPr>
+        <p:txBody>
+          <a:bodyPr wrap="square" lIns="0" tIns="0" rIns="0" bIns="0" rtlCol="0" anchor="ctr"/>
           <a:lstStyle/>
           <a:p>
             <a:pPr indent="0" marL="0">
               <a:buNone/>
             </a:pPr>
             <a:r>
-              <a:rPr lang="en-US" sz="1200" dirty="0">
+              <a:rPr lang="en-US" sz="1250" dirty="0">
                 <a:solidFill>
                   <a:srgbClr val="1D2B2A"/>
                 </a:solidFill>
@@ -2433,9 +2515,9 @@
                 <a:ea typeface="Calibri" pitchFamily="34" charset="-122"/>
                 <a:cs typeface="Calibri" pitchFamily="34" charset="-120"/>
               </a:rPr>
-              <a:t>Person with a trading name; PRIVATE needs verified source of wealth (EDD)</a:t>
-            </a:r>
-            <a:endParaRPr lang="en-US" sz="1200" dirty="0"/>
+              <a:t>Document expires mid-onboarding</a:t>
+            </a:r>
+            <a:endParaRPr lang="en-US" sz="1250" dirty="0"/>
           </a:p>
         </p:txBody>
       </p:sp>
@@ -2447,23 +2529,16 @@
         </p:nvSpPr>
         <p:spPr>
           <a:xfrm>
-            <a:off x="3246120" y="1280160"/>
-            <a:ext cx="2606040" cy="1600200"/>
-          </a:xfrm>
-          <a:prstGeom prst="roundRect">
-            <a:avLst>
-              <a:gd name="adj" fmla="val 4571"/>
-            </a:avLst>
+            <a:off x="457200" y="1645920"/>
+            <a:ext cx="384048" cy="384048"/>
+          </a:xfrm>
+          <a:prstGeom prst="ellipse">
+            <a:avLst/>
           </a:prstGeom>
           <a:solidFill>
-            <a:srgbClr val="E8F0EE"/>
+            <a:srgbClr val="B8862F"/>
           </a:solidFill>
-          <a:ln w="12700">
-            <a:solidFill>
-              <a:srgbClr val="E8F0EE"/>
-            </a:solidFill>
-            <a:prstDash val="solid"/>
-          </a:ln>
+          <a:ln/>
         </p:spPr>
       </p:sp>
       <p:sp>
@@ -2474,8 +2549,8 @@
         </p:nvSpPr>
         <p:spPr>
           <a:xfrm>
-            <a:off x="3383280" y="1389888"/>
-            <a:ext cx="2331720" cy="502920"/>
+            <a:off x="457200" y="1645920"/>
+            <a:ext cx="384048" cy="384048"/>
           </a:xfrm>
           <a:prstGeom prst="rect">
             <a:avLst/>
@@ -2487,19 +2562,19 @@
           <a:bodyPr wrap="square" lIns="0" tIns="0" rIns="0" bIns="0" rtlCol="0" anchor="ctr"/>
           <a:lstStyle/>
           <a:p>
-            <a:pPr indent="0" marL="0">
+            <a:pPr algn="ctr" indent="0" marL="0">
               <a:buNone/>
             </a:pPr>
             <a:r>
               <a:rPr lang="en-US" sz="1400" b="1" dirty="0">
                 <a:solidFill>
-                  <a:srgbClr val="0B4F4A"/>
+                  <a:srgbClr val="FFFFFF"/>
                 </a:solidFill>
                 <a:latin typeface="Cambria" pitchFamily="34" charset="0"/>
                 <a:ea typeface="Cambria" pitchFamily="34" charset="-122"/>
                 <a:cs typeface="Cambria" pitchFamily="34" charset="-120"/>
               </a:rPr>
-              <a:t>Fixed-term deposits</a:t>
+              <a:t>2</a:t>
             </a:r>
             <a:endParaRPr lang="en-US" sz="1400" dirty="0"/>
           </a:p>
@@ -2513,24 +2588,24 @@
         </p:nvSpPr>
         <p:spPr>
           <a:xfrm>
-            <a:off x="3383280" y="1920240"/>
-            <a:ext cx="2331720" cy="868680"/>
-          </a:xfrm>
-          <a:prstGeom prst="rect">
-            <a:avLst/>
-          </a:prstGeom>
-          <a:noFill/>
-          <a:ln/>
-        </p:spPr>
-        <p:txBody>
-          <a:bodyPr wrap="square" lIns="0" tIns="0" rIns="0" bIns="0" rtlCol="0" anchor="t"/>
+            <a:off x="960120" y="1645920"/>
+            <a:ext cx="3566160" cy="384048"/>
+          </a:xfrm>
+          <a:prstGeom prst="rect">
+            <a:avLst/>
+          </a:prstGeom>
+          <a:noFill/>
+          <a:ln/>
+        </p:spPr>
+        <p:txBody>
+          <a:bodyPr wrap="square" lIns="0" tIns="0" rIns="0" bIns="0" rtlCol="0" anchor="ctr"/>
           <a:lstStyle/>
           <a:p>
             <a:pPr indent="0" marL="0">
               <a:buNone/>
             </a:pPr>
             <a:r>
-              <a:rPr lang="en-US" sz="1200" dirty="0">
+              <a:rPr lang="en-US" sz="1250" dirty="0">
                 <a:solidFill>
                   <a:srgbClr val="1D2B2A"/>
                 </a:solidFill>
@@ -2538,9 +2613,9 @@
                 <a:ea typeface="Calibri" pitchFamily="34" charset="-122"/>
                 <a:cs typeface="Calibri" pitchFamily="34" charset="-120"/>
               </a:rPr>
-              <a:t>Third DepositAccount subclass: no early debits, maturity payout, break penalty</a:t>
-            </a:r>
-            <a:endParaRPr lang="en-US" sz="1200" dirty="0"/>
+              <a:t>Large transfer: dual control, hold, release</a:t>
+            </a:r>
+            <a:endParaRPr lang="en-US" sz="1250" dirty="0"/>
           </a:p>
         </p:txBody>
       </p:sp>
@@ -2552,23 +2627,16 @@
         </p:nvSpPr>
         <p:spPr>
           <a:xfrm>
-            <a:off x="6035040" y="1280160"/>
-            <a:ext cx="2606040" cy="1600200"/>
-          </a:xfrm>
-          <a:prstGeom prst="roundRect">
-            <a:avLst>
-              <a:gd name="adj" fmla="val 4571"/>
-            </a:avLst>
+            <a:off x="457200" y="2103120"/>
+            <a:ext cx="384048" cy="384048"/>
+          </a:xfrm>
+          <a:prstGeom prst="ellipse">
+            <a:avLst/>
           </a:prstGeom>
           <a:solidFill>
-            <a:srgbClr val="E8F0EE"/>
+            <a:srgbClr val="B8862F"/>
           </a:solidFill>
-          <a:ln w="12700">
-            <a:solidFill>
-              <a:srgbClr val="E8F0EE"/>
-            </a:solidFill>
-            <a:prstDash val="solid"/>
-          </a:ln>
+          <a:ln/>
         </p:spPr>
       </p:sp>
       <p:sp>
@@ -2579,8 +2647,8 @@
         </p:nvSpPr>
         <p:spPr>
           <a:xfrm>
-            <a:off x="6172200" y="1389888"/>
-            <a:ext cx="2331720" cy="502920"/>
+            <a:off x="457200" y="2103120"/>
+            <a:ext cx="384048" cy="384048"/>
           </a:xfrm>
           <a:prstGeom prst="rect">
             <a:avLst/>
@@ -2592,19 +2660,19 @@
           <a:bodyPr wrap="square" lIns="0" tIns="0" rIns="0" bIns="0" rtlCol="0" anchor="ctr"/>
           <a:lstStyle/>
           <a:p>
-            <a:pPr indent="0" marL="0">
+            <a:pPr algn="ctr" indent="0" marL="0">
               <a:buNone/>
             </a:pPr>
             <a:r>
               <a:rPr lang="en-US" sz="1400" b="1" dirty="0">
                 <a:solidFill>
-                  <a:srgbClr val="0B4F4A"/>
+                  <a:srgbClr val="FFFFFF"/>
                 </a:solidFill>
                 <a:latin typeface="Cambria" pitchFamily="34" charset="0"/>
                 <a:ea typeface="Cambria" pitchFamily="34" charset="-122"/>
                 <a:cs typeface="Cambria" pitchFamily="34" charset="-120"/>
               </a:rPr>
-              <a:t>Card controls</a:t>
+              <a:t>3</a:t>
             </a:r>
             <a:endParaRPr lang="en-US" sz="1400" dirty="0"/>
           </a:p>
@@ -2618,24 +2686,24 @@
         </p:nvSpPr>
         <p:spPr>
           <a:xfrm>
-            <a:off x="6172200" y="1920240"/>
-            <a:ext cx="2331720" cy="868680"/>
-          </a:xfrm>
-          <a:prstGeom prst="rect">
-            <a:avLst/>
-          </a:prstGeom>
-          <a:noFill/>
-          <a:ln/>
-        </p:spPr>
-        <p:txBody>
-          <a:bodyPr wrap="square" lIns="0" tIns="0" rIns="0" bIns="0" rtlCol="0" anchor="t"/>
+            <a:off x="960120" y="2103120"/>
+            <a:ext cx="3566160" cy="384048"/>
+          </a:xfrm>
+          <a:prstGeom prst="rect">
+            <a:avLst/>
+          </a:prstGeom>
+          <a:noFill/>
+          <a:ln/>
+        </p:spPr>
+        <p:txBody>
+          <a:bodyPr wrap="square" lIns="0" tIns="0" rIns="0" bIns="0" rtlCol="0" anchor="ctr"/>
           <a:lstStyle/>
           <a:p>
             <a:pPr indent="0" marL="0">
               <a:buNone/>
             </a:pPr>
             <a:r>
-              <a:rPr lang="en-US" sz="1200" dirty="0">
+              <a:rPr lang="en-US" sz="1250" dirty="0">
                 <a:solidFill>
                   <a:srgbClr val="1D2B2A"/>
                 </a:solidFill>
@@ -2643,9 +2711,9 @@
                 <a:ea typeface="Calibri" pitchFamily="34" charset="-122"/>
                 <a:cs typeface="Calibri" pitchFamily="34" charset="-120"/>
               </a:rPr>
-              <a:t>Online, international, cash, merchant category - each with a validity period</a:t>
-            </a:r>
-            <a:endParaRPr lang="en-US" sz="1200" dirty="0"/>
+              <a:t>Card stolen, replaced twice, found</a:t>
+            </a:r>
+            <a:endParaRPr lang="en-US" sz="1250" dirty="0"/>
           </a:p>
         </p:txBody>
       </p:sp>
@@ -2657,23 +2725,16 @@
         </p:nvSpPr>
         <p:spPr>
           <a:xfrm>
-            <a:off x="457200" y="3063240"/>
-            <a:ext cx="2606040" cy="1600200"/>
-          </a:xfrm>
-          <a:prstGeom prst="roundRect">
-            <a:avLst>
-              <a:gd name="adj" fmla="val 4571"/>
-            </a:avLst>
+            <a:off x="457200" y="2560320"/>
+            <a:ext cx="384048" cy="384048"/>
+          </a:xfrm>
+          <a:prstGeom prst="ellipse">
+            <a:avLst/>
           </a:prstGeom>
           <a:solidFill>
-            <a:srgbClr val="E8F0EE"/>
+            <a:srgbClr val="B8862F"/>
           </a:solidFill>
-          <a:ln w="12700">
-            <a:solidFill>
-              <a:srgbClr val="E8F0EE"/>
-            </a:solidFill>
-            <a:prstDash val="solid"/>
-          </a:ln>
+          <a:ln/>
         </p:spPr>
       </p:sp>
       <p:sp>
@@ -2684,8 +2745,8 @@
         </p:nvSpPr>
         <p:spPr>
           <a:xfrm>
-            <a:off x="594360" y="3172968"/>
-            <a:ext cx="2331720" cy="502920"/>
+            <a:off x="457200" y="2560320"/>
+            <a:ext cx="384048" cy="384048"/>
           </a:xfrm>
           <a:prstGeom prst="rect">
             <a:avLst/>
@@ -2697,19 +2758,19 @@
           <a:bodyPr wrap="square" lIns="0" tIns="0" rIns="0" bIns="0" rtlCol="0" anchor="ctr"/>
           <a:lstStyle/>
           <a:p>
-            <a:pPr indent="0" marL="0">
+            <a:pPr algn="ctr" indent="0" marL="0">
               <a:buNone/>
             </a:pPr>
             <a:r>
               <a:rPr lang="en-US" sz="1400" b="1" dirty="0">
                 <a:solidFill>
-                  <a:srgbClr val="0B4F4A"/>
+                  <a:srgbClr val="FFFFFF"/>
                 </a:solidFill>
                 <a:latin typeface="Cambria" pitchFamily="34" charset="0"/>
                 <a:ea typeface="Cambria" pitchFamily="34" charset="-122"/>
                 <a:cs typeface="Cambria" pitchFamily="34" charset="-120"/>
               </a:rPr>
-              <a:t>Billers</a:t>
+              <a:t>4</a:t>
             </a:r>
             <a:endParaRPr lang="en-US" sz="1400" dirty="0"/>
           </a:p>
@@ -2723,24 +2784,24 @@
         </p:nvSpPr>
         <p:spPr>
           <a:xfrm>
-            <a:off x="594360" y="3703320"/>
-            <a:ext cx="2331720" cy="868680"/>
-          </a:xfrm>
-          <a:prstGeom prst="rect">
-            <a:avLst/>
-          </a:prstGeom>
-          <a:noFill/>
-          <a:ln/>
-        </p:spPr>
-        <p:txBody>
-          <a:bodyPr wrap="square" lIns="0" tIns="0" rIns="0" bIns="0" rtlCol="0" anchor="t"/>
+            <a:off x="960120" y="2560320"/>
+            <a:ext cx="3566160" cy="384048"/>
+          </a:xfrm>
+          <a:prstGeom prst="rect">
+            <a:avLst/>
+          </a:prstGeom>
+          <a:noFill/>
+          <a:ln/>
+        </p:spPr>
+        <p:txBody>
+          <a:bodyPr wrap="square" lIns="0" tIns="0" rIns="0" bIns="0" rtlCol="0" anchor="ctr"/>
           <a:lstStyle/>
           <a:p>
             <a:pPr indent="0" marL="0">
               <a:buNone/>
             </a:pPr>
             <a:r>
-              <a:rPr lang="en-US" sz="1200" dirty="0">
+              <a:rPr lang="en-US" sz="1250" dirty="0">
                 <a:solidFill>
                   <a:srgbClr val="1D2B2A"/>
                 </a:solidFill>
@@ -2748,9 +2809,9 @@
                 <a:ea typeface="Calibri" pitchFamily="34" charset="-122"/>
                 <a:cs typeface="Calibri" pitchFamily="34" charset="-120"/>
               </a:rPr>
-              <a:t>BillPayment is a CustomerPayment: same mandates, restrictions, dual control</a:t>
-            </a:r>
-            <a:endParaRPr lang="en-US" sz="1200" dirty="0"/>
+              <a:t>Posted, reversed, re-posted, disputed</a:t>
+            </a:r>
+            <a:endParaRPr lang="en-US" sz="1250" dirty="0"/>
           </a:p>
         </p:txBody>
       </p:sp>
@@ -2762,23 +2823,16 @@
         </p:nvSpPr>
         <p:spPr>
           <a:xfrm>
-            <a:off x="3246120" y="3063240"/>
-            <a:ext cx="2606040" cy="1600200"/>
-          </a:xfrm>
-          <a:prstGeom prst="roundRect">
-            <a:avLst>
-              <a:gd name="adj" fmla="val 4571"/>
-            </a:avLst>
+            <a:off x="457200" y="3017520"/>
+            <a:ext cx="384048" cy="384048"/>
+          </a:xfrm>
+          <a:prstGeom prst="ellipse">
+            <a:avLst/>
           </a:prstGeom>
           <a:solidFill>
-            <a:srgbClr val="E8F0EE"/>
+            <a:srgbClr val="B8862F"/>
           </a:solidFill>
-          <a:ln w="12700">
-            <a:solidFill>
-              <a:srgbClr val="E8F0EE"/>
-            </a:solidFill>
-            <a:prstDash val="solid"/>
-          </a:ln>
+          <a:ln/>
         </p:spPr>
       </p:sp>
       <p:sp>
@@ -2789,8 +2843,8 @@
         </p:nvSpPr>
         <p:spPr>
           <a:xfrm>
-            <a:off x="3383280" y="3172968"/>
-            <a:ext cx="2331720" cy="502920"/>
+            <a:off x="457200" y="3017520"/>
+            <a:ext cx="384048" cy="384048"/>
           </a:xfrm>
           <a:prstGeom prst="rect">
             <a:avLst/>
@@ -2802,19 +2856,19 @@
           <a:bodyPr wrap="square" lIns="0" tIns="0" rIns="0" bIns="0" rtlCol="0" anchor="ctr"/>
           <a:lstStyle/>
           <a:p>
-            <a:pPr indent="0" marL="0">
+            <a:pPr algn="ctr" indent="0" marL="0">
               <a:buNone/>
             </a:pPr>
             <a:r>
               <a:rPr lang="en-US" sz="1400" b="1" dirty="0">
                 <a:solidFill>
-                  <a:srgbClr val="0B4F4A"/>
+                  <a:srgbClr val="FFFFFF"/>
                 </a:solidFill>
                 <a:latin typeface="Cambria" pitchFamily="34" charset="0"/>
                 <a:ea typeface="Cambria" pitchFamily="34" charset="-122"/>
                 <a:cs typeface="Cambria" pitchFamily="34" charset="-120"/>
               </a:rPr>
-              <a:t>Collections staff</a:t>
+              <a:t>5</a:t>
             </a:r>
             <a:endParaRPr lang="en-US" sz="1400" dirty="0"/>
           </a:p>
@@ -2828,24 +2882,24 @@
         </p:nvSpPr>
         <p:spPr>
           <a:xfrm>
-            <a:off x="3383280" y="3703320"/>
-            <a:ext cx="2331720" cy="868680"/>
-          </a:xfrm>
-          <a:prstGeom prst="rect">
-            <a:avLst/>
-          </a:prstGeom>
-          <a:noFill/>
-          <a:ln/>
-        </p:spPr>
-        <p:txBody>
-          <a:bodyPr wrap="square" lIns="0" tIns="0" rIns="0" bIns="0" rtlCol="0" anchor="t"/>
+            <a:off x="960120" y="3017520"/>
+            <a:ext cx="3566160" cy="384048"/>
+          </a:xfrm>
+          <a:prstGeom prst="rect">
+            <a:avLst/>
+          </a:prstGeom>
+          <a:noFill/>
+          <a:ln/>
+        </p:spPr>
+        <p:txBody>
+          <a:bodyPr wrap="square" lIns="0" tIns="0" rIns="0" bIns="0" rtlCol="0" anchor="ctr"/>
           <a:lstStyle/>
           <a:p>
             <a:pPr indent="0" marL="0">
               <a:buNone/>
             </a:pPr>
             <a:r>
-              <a:rPr lang="en-US" sz="1200" dirty="0">
+              <a:rPr lang="en-US" sz="1250" dirty="0">
                 <a:solidFill>
                   <a:srgbClr val="1D2B2A"/>
                 </a:solidFill>
@@ -2853,9 +2907,9 @@
                 <a:ea typeface="Calibri" pitchFamily="34" charset="-122"/>
                 <a:cs typeface="Calibri" pitchFamily="34" charset="-120"/>
               </a:rPr>
-              <a:t>Collections officer works the case; promise to pay marked kept or broken</a:t>
-            </a:r>
-            <a:endParaRPr lang="en-US" sz="1200" dirty="0"/>
+              <a:t>Restricted then cleared</a:t>
+            </a:r>
+            <a:endParaRPr lang="en-US" sz="1250" dirty="0"/>
           </a:p>
         </p:txBody>
       </p:sp>
@@ -2867,23 +2921,16 @@
         </p:nvSpPr>
         <p:spPr>
           <a:xfrm>
-            <a:off x="6035040" y="3063240"/>
-            <a:ext cx="2606040" cy="1600200"/>
-          </a:xfrm>
-          <a:prstGeom prst="roundRect">
-            <a:avLst>
-              <a:gd name="adj" fmla="val 4571"/>
-            </a:avLst>
+            <a:off x="457200" y="3474720"/>
+            <a:ext cx="384048" cy="384048"/>
+          </a:xfrm>
+          <a:prstGeom prst="ellipse">
+            <a:avLst/>
           </a:prstGeom>
           <a:solidFill>
-            <a:srgbClr val="E8F0EE"/>
+            <a:srgbClr val="B8862F"/>
           </a:solidFill>
-          <a:ln w="12700">
-            <a:solidFill>
-              <a:srgbClr val="E8F0EE"/>
-            </a:solidFill>
-            <a:prstDash val="solid"/>
-          </a:ln>
+          <a:ln/>
         </p:spPr>
       </p:sp>
       <p:sp>
@@ -2894,8 +2941,8 @@
         </p:nvSpPr>
         <p:spPr>
           <a:xfrm>
-            <a:off x="6172200" y="3172968"/>
-            <a:ext cx="2331720" cy="502920"/>
+            <a:off x="457200" y="3474720"/>
+            <a:ext cx="384048" cy="384048"/>
           </a:xfrm>
           <a:prstGeom prst="rect">
             <a:avLst/>
@@ -2907,19 +2954,19 @@
           <a:bodyPr wrap="square" lIns="0" tIns="0" rIns="0" bIns="0" rtlCol="0" anchor="ctr"/>
           <a:lstStyle/>
           <a:p>
-            <a:pPr indent="0" marL="0">
+            <a:pPr algn="ctr" indent="0" marL="0">
               <a:buNone/>
             </a:pPr>
             <a:r>
               <a:rPr lang="en-US" sz="1400" b="1" dirty="0">
                 <a:solidFill>
-                  <a:srgbClr val="0B4F4A"/>
+                  <a:srgbClr val="FFFFFF"/>
                 </a:solidFill>
                 <a:latin typeface="Cambria" pitchFamily="34" charset="0"/>
                 <a:ea typeface="Cambria" pitchFamily="34" charset="-122"/>
                 <a:cs typeface="Cambria" pitchFamily="34" charset="-120"/>
               </a:rPr>
-              <a:t>Auditors &amp; retention</a:t>
+              <a:t>6</a:t>
             </a:r>
             <a:endParaRPr lang="en-US" sz="1400" dirty="0"/>
           </a:p>
@@ -2933,24 +2980,24 @@
         </p:nvSpPr>
         <p:spPr>
           <a:xfrm>
-            <a:off x="6172200" y="3703320"/>
-            <a:ext cx="2331720" cy="868680"/>
-          </a:xfrm>
-          <a:prstGeom prst="rect">
-            <a:avLst/>
-          </a:prstGeom>
-          <a:noFill/>
-          <a:ln/>
-        </p:spPr>
-        <p:txBody>
-          <a:bodyPr wrap="square" lIns="0" tIns="0" rIns="0" bIns="0" rtlCol="0" anchor="t"/>
+            <a:off x="960120" y="3474720"/>
+            <a:ext cx="3566160" cy="384048"/>
+          </a:xfrm>
+          <a:prstGeom prst="rect">
+            <a:avLst/>
+          </a:prstGeom>
+          <a:noFill/>
+          <a:ln/>
+        </p:spPr>
+        <p:txBody>
+          <a:bodyPr wrap="square" lIns="0" tIns="0" rIns="0" bIns="0" rtlCol="0" anchor="ctr"/>
           <a:lstStyle/>
           <a:p>
             <a:pPr indent="0" marL="0">
               <a:buNone/>
             </a:pPr>
             <a:r>
-              <a:rPr lang="en-US" sz="1200" dirty="0">
+              <a:rPr lang="en-US" sz="1250" dirty="0">
                 <a:solidFill>
                   <a:srgbClr val="1D2B2A"/>
                 </a:solidFill>
@@ -2958,9 +3005,989 @@
                 <a:ea typeface="Calibri" pitchFamily="34" charset="-122"/>
                 <a:cs typeface="Calibri" pitchFamily="34" charset="-120"/>
               </a:rPr>
-              <a:t>Approvals audit with role at the time; archive, never delete (10-year retention)</a:t>
-            </a:r>
-            <a:endParaRPr lang="en-US" sz="1200" dirty="0"/>
+              <a:t>Financing: limits, arrears, restructure</a:t>
+            </a:r>
+            <a:endParaRPr lang="en-US" sz="1250" dirty="0"/>
+          </a:p>
+        </p:txBody>
+      </p:sp>
+      <p:sp>
+        <p:nvSpPr>
+          <p:cNvPr id="22" name="Shape 20"/>
+          <p:cNvSpPr/>
+          <p:nvPr/>
+        </p:nvSpPr>
+        <p:spPr>
+          <a:xfrm>
+            <a:off x="457200" y="3931920"/>
+            <a:ext cx="384048" cy="384048"/>
+          </a:xfrm>
+          <a:prstGeom prst="ellipse">
+            <a:avLst/>
+          </a:prstGeom>
+          <a:solidFill>
+            <a:srgbClr val="B8862F"/>
+          </a:solidFill>
+          <a:ln/>
+        </p:spPr>
+      </p:sp>
+      <p:sp>
+        <p:nvSpPr>
+          <p:cNvPr id="23" name="Text 21"/>
+          <p:cNvSpPr txBox="1"/>
+          <p:nvPr/>
+        </p:nvSpPr>
+        <p:spPr>
+          <a:xfrm>
+            <a:off x="457200" y="3931920"/>
+            <a:ext cx="384048" cy="384048"/>
+          </a:xfrm>
+          <a:prstGeom prst="rect">
+            <a:avLst/>
+          </a:prstGeom>
+          <a:noFill/>
+          <a:ln/>
+        </p:spPr>
+        <p:txBody>
+          <a:bodyPr wrap="square" lIns="0" tIns="0" rIns="0" bIns="0" rtlCol="0" anchor="ctr"/>
+          <a:lstStyle/>
+          <a:p>
+            <a:pPr algn="ctr" indent="0" marL="0">
+              <a:buNone/>
+            </a:pPr>
+            <a:r>
+              <a:rPr lang="en-US" sz="1400" b="1" dirty="0">
+                <a:solidFill>
+                  <a:srgbClr val="FFFFFF"/>
+                </a:solidFill>
+                <a:latin typeface="Cambria" pitchFamily="34" charset="0"/>
+                <a:ea typeface="Cambria" pitchFamily="34" charset="-122"/>
+                <a:cs typeface="Cambria" pitchFamily="34" charset="-120"/>
+              </a:rPr>
+              <a:t>7</a:t>
+            </a:r>
+            <a:endParaRPr lang="en-US" sz="1400" dirty="0"/>
+          </a:p>
+        </p:txBody>
+      </p:sp>
+      <p:sp>
+        <p:nvSpPr>
+          <p:cNvPr id="24" name="Text 22"/>
+          <p:cNvSpPr txBox="1"/>
+          <p:nvPr/>
+        </p:nvSpPr>
+        <p:spPr>
+          <a:xfrm>
+            <a:off x="960120" y="3931920"/>
+            <a:ext cx="3566160" cy="384048"/>
+          </a:xfrm>
+          <a:prstGeom prst="rect">
+            <a:avLst/>
+          </a:prstGeom>
+          <a:noFill/>
+          <a:ln/>
+        </p:spPr>
+        <p:txBody>
+          <a:bodyPr wrap="square" lIns="0" tIns="0" rIns="0" bIns="0" rtlCol="0" anchor="ctr"/>
+          <a:lstStyle/>
+          <a:p>
+            <a:pPr indent="0" marL="0">
+              <a:buNone/>
+            </a:pPr>
+            <a:r>
+              <a:rPr lang="en-US" sz="1250" dirty="0">
+                <a:solidFill>
+                  <a:srgbClr val="1D2B2A"/>
+                </a:solidFill>
+                <a:latin typeface="Calibri" pitchFamily="34" charset="0"/>
+                <a:ea typeface="Calibri" pitchFamily="34" charset="-122"/>
+                <a:cs typeface="Calibri" pitchFamily="34" charset="-120"/>
+              </a:rPr>
+              <a:t>Director leaves; authority provable</a:t>
+            </a:r>
+            <a:endParaRPr lang="en-US" sz="1250" dirty="0"/>
+          </a:p>
+        </p:txBody>
+      </p:sp>
+      <p:sp>
+        <p:nvSpPr>
+          <p:cNvPr id="25" name="Shape 23"/>
+          <p:cNvSpPr/>
+          <p:nvPr/>
+        </p:nvSpPr>
+        <p:spPr>
+          <a:xfrm>
+            <a:off x="457200" y="4389120"/>
+            <a:ext cx="384048" cy="384048"/>
+          </a:xfrm>
+          <a:prstGeom prst="ellipse">
+            <a:avLst/>
+          </a:prstGeom>
+          <a:solidFill>
+            <a:srgbClr val="B8862F"/>
+          </a:solidFill>
+          <a:ln/>
+        </p:spPr>
+      </p:sp>
+      <p:sp>
+        <p:nvSpPr>
+          <p:cNvPr id="26" name="Text 24"/>
+          <p:cNvSpPr txBox="1"/>
+          <p:nvPr/>
+        </p:nvSpPr>
+        <p:spPr>
+          <a:xfrm>
+            <a:off x="457200" y="4389120"/>
+            <a:ext cx="384048" cy="384048"/>
+          </a:xfrm>
+          <a:prstGeom prst="rect">
+            <a:avLst/>
+          </a:prstGeom>
+          <a:noFill/>
+          <a:ln/>
+        </p:spPr>
+        <p:txBody>
+          <a:bodyPr wrap="square" lIns="0" tIns="0" rIns="0" bIns="0" rtlCol="0" anchor="ctr"/>
+          <a:lstStyle/>
+          <a:p>
+            <a:pPr algn="ctr" indent="0" marL="0">
+              <a:buNone/>
+            </a:pPr>
+            <a:r>
+              <a:rPr lang="en-US" sz="1400" b="1" dirty="0">
+                <a:solidFill>
+                  <a:srgbClr val="FFFFFF"/>
+                </a:solidFill>
+                <a:latin typeface="Cambria" pitchFamily="34" charset="0"/>
+                <a:ea typeface="Cambria" pitchFamily="34" charset="-122"/>
+                <a:cs typeface="Cambria" pitchFamily="34" charset="-120"/>
+              </a:rPr>
+              <a:t>8</a:t>
+            </a:r>
+            <a:endParaRPr lang="en-US" sz="1400" dirty="0"/>
+          </a:p>
+        </p:txBody>
+      </p:sp>
+      <p:sp>
+        <p:nvSpPr>
+          <p:cNvPr id="27" name="Text 25"/>
+          <p:cNvSpPr txBox="1"/>
+          <p:nvPr/>
+        </p:nvSpPr>
+        <p:spPr>
+          <a:xfrm>
+            <a:off x="960120" y="4389120"/>
+            <a:ext cx="3566160" cy="384048"/>
+          </a:xfrm>
+          <a:prstGeom prst="rect">
+            <a:avLst/>
+          </a:prstGeom>
+          <a:noFill/>
+          <a:ln/>
+        </p:spPr>
+        <p:txBody>
+          <a:bodyPr wrap="square" lIns="0" tIns="0" rIns="0" bIns="0" rtlCol="0" anchor="ctr"/>
+          <a:lstStyle/>
+          <a:p>
+            <a:pPr indent="0" marL="0">
+              <a:buNone/>
+            </a:pPr>
+            <a:r>
+              <a:rPr lang="en-US" sz="1250" dirty="0">
+                <a:solidFill>
+                  <a:srgbClr val="1D2B2A"/>
+                </a:solidFill>
+                <a:latin typeface="Calibri" pitchFamily="34" charset="0"/>
+                <a:ea typeface="Calibri" pitchFamily="34" charset="-122"/>
+                <a:cs typeface="Calibri" pitchFamily="34" charset="-120"/>
+              </a:rPr>
+              <a:t>Beneficiary changes bank details</a:t>
+            </a:r>
+            <a:endParaRPr lang="en-US" sz="1250" dirty="0"/>
+          </a:p>
+        </p:txBody>
+      </p:sp>
+      <p:sp>
+        <p:nvSpPr>
+          <p:cNvPr id="28" name="Shape 26"/>
+          <p:cNvSpPr/>
+          <p:nvPr/>
+        </p:nvSpPr>
+        <p:spPr>
+          <a:xfrm>
+            <a:off x="4663440" y="1188720"/>
+            <a:ext cx="384048" cy="384048"/>
+          </a:xfrm>
+          <a:prstGeom prst="ellipse">
+            <a:avLst/>
+          </a:prstGeom>
+          <a:solidFill>
+            <a:srgbClr val="B8862F"/>
+          </a:solidFill>
+          <a:ln/>
+        </p:spPr>
+      </p:sp>
+      <p:sp>
+        <p:nvSpPr>
+          <p:cNvPr id="29" name="Text 27"/>
+          <p:cNvSpPr txBox="1"/>
+          <p:nvPr/>
+        </p:nvSpPr>
+        <p:spPr>
+          <a:xfrm>
+            <a:off x="4663440" y="1188720"/>
+            <a:ext cx="384048" cy="384048"/>
+          </a:xfrm>
+          <a:prstGeom prst="rect">
+            <a:avLst/>
+          </a:prstGeom>
+          <a:noFill/>
+          <a:ln/>
+        </p:spPr>
+        <p:txBody>
+          <a:bodyPr wrap="square" lIns="0" tIns="0" rIns="0" bIns="0" rtlCol="0" anchor="ctr"/>
+          <a:lstStyle/>
+          <a:p>
+            <a:pPr algn="ctr" indent="0" marL="0">
+              <a:buNone/>
+            </a:pPr>
+            <a:r>
+              <a:rPr lang="en-US" sz="1400" b="1" dirty="0">
+                <a:solidFill>
+                  <a:srgbClr val="FFFFFF"/>
+                </a:solidFill>
+                <a:latin typeface="Cambria" pitchFamily="34" charset="0"/>
+                <a:ea typeface="Cambria" pitchFamily="34" charset="-122"/>
+                <a:cs typeface="Cambria" pitchFamily="34" charset="-120"/>
+              </a:rPr>
+              <a:t>9</a:t>
+            </a:r>
+            <a:endParaRPr lang="en-US" sz="1400" dirty="0"/>
+          </a:p>
+        </p:txBody>
+      </p:sp>
+      <p:sp>
+        <p:nvSpPr>
+          <p:cNvPr id="30" name="Text 28"/>
+          <p:cNvSpPr txBox="1"/>
+          <p:nvPr/>
+        </p:nvSpPr>
+        <p:spPr>
+          <a:xfrm>
+            <a:off x="5166360" y="1188720"/>
+            <a:ext cx="3566160" cy="384048"/>
+          </a:xfrm>
+          <a:prstGeom prst="rect">
+            <a:avLst/>
+          </a:prstGeom>
+          <a:noFill/>
+          <a:ln/>
+        </p:spPr>
+        <p:txBody>
+          <a:bodyPr wrap="square" lIns="0" tIns="0" rIns="0" bIns="0" rtlCol="0" anchor="ctr"/>
+          <a:lstStyle/>
+          <a:p>
+            <a:pPr indent="0" marL="0">
+              <a:buNone/>
+            </a:pPr>
+            <a:r>
+              <a:rPr lang="en-US" sz="1250" dirty="0">
+                <a:solidFill>
+                  <a:srgbClr val="1D2B2A"/>
+                </a:solidFill>
+                <a:latin typeface="Calibri" pitchFamily="34" charset="0"/>
+                <a:ea typeface="Calibri" pitchFamily="34" charset="-122"/>
+                <a:cs typeface="Calibri" pitchFamily="34" charset="-120"/>
+              </a:rPr>
+              <a:t>Evidence keeps corrected data</a:t>
+            </a:r>
+            <a:endParaRPr lang="en-US" sz="1250" dirty="0"/>
+          </a:p>
+        </p:txBody>
+      </p:sp>
+      <p:sp>
+        <p:nvSpPr>
+          <p:cNvPr id="31" name="Shape 29"/>
+          <p:cNvSpPr/>
+          <p:nvPr/>
+        </p:nvSpPr>
+        <p:spPr>
+          <a:xfrm>
+            <a:off x="4663440" y="1645920"/>
+            <a:ext cx="384048" cy="384048"/>
+          </a:xfrm>
+          <a:prstGeom prst="ellipse">
+            <a:avLst/>
+          </a:prstGeom>
+          <a:solidFill>
+            <a:srgbClr val="B8862F"/>
+          </a:solidFill>
+          <a:ln/>
+        </p:spPr>
+      </p:sp>
+      <p:sp>
+        <p:nvSpPr>
+          <p:cNvPr id="32" name="Text 30"/>
+          <p:cNvSpPr txBox="1"/>
+          <p:nvPr/>
+        </p:nvSpPr>
+        <p:spPr>
+          <a:xfrm>
+            <a:off x="4663440" y="1645920"/>
+            <a:ext cx="384048" cy="384048"/>
+          </a:xfrm>
+          <a:prstGeom prst="rect">
+            <a:avLst/>
+          </a:prstGeom>
+          <a:noFill/>
+          <a:ln/>
+        </p:spPr>
+        <p:txBody>
+          <a:bodyPr wrap="square" lIns="0" tIns="0" rIns="0" bIns="0" rtlCol="0" anchor="ctr"/>
+          <a:lstStyle/>
+          <a:p>
+            <a:pPr algn="ctr" indent="0" marL="0">
+              <a:buNone/>
+            </a:pPr>
+            <a:r>
+              <a:rPr lang="en-US" sz="1400" b="1" dirty="0">
+                <a:solidFill>
+                  <a:srgbClr val="FFFFFF"/>
+                </a:solidFill>
+                <a:latin typeface="Cambria" pitchFamily="34" charset="0"/>
+                <a:ea typeface="Cambria" pitchFamily="34" charset="-122"/>
+                <a:cs typeface="Cambria" pitchFamily="34" charset="-120"/>
+              </a:rPr>
+              <a:t>10</a:t>
+            </a:r>
+            <a:endParaRPr lang="en-US" sz="1400" dirty="0"/>
+          </a:p>
+        </p:txBody>
+      </p:sp>
+      <p:sp>
+        <p:nvSpPr>
+          <p:cNvPr id="33" name="Text 31"/>
+          <p:cNvSpPr txBox="1"/>
+          <p:nvPr/>
+        </p:nvSpPr>
+        <p:spPr>
+          <a:xfrm>
+            <a:off x="5166360" y="1645920"/>
+            <a:ext cx="3566160" cy="384048"/>
+          </a:xfrm>
+          <a:prstGeom prst="rect">
+            <a:avLst/>
+          </a:prstGeom>
+          <a:noFill/>
+          <a:ln/>
+        </p:spPr>
+        <p:txBody>
+          <a:bodyPr wrap="square" lIns="0" tIns="0" rIns="0" bIns="0" rtlCol="0" anchor="ctr"/>
+          <a:lstStyle/>
+          <a:p>
+            <a:pPr indent="0" marL="0">
+              <a:buNone/>
+            </a:pPr>
+            <a:r>
+              <a:rPr lang="en-US" sz="1250" dirty="0">
+                <a:solidFill>
+                  <a:srgbClr val="1D2B2A"/>
+                </a:solidFill>
+                <a:latin typeface="Calibri" pitchFamily="34" charset="0"/>
+                <a:ea typeface="Calibri" pitchFamily="34" charset="-122"/>
+                <a:cs typeface="Calibri" pitchFamily="34" charset="-120"/>
+              </a:rPr>
+              <a:t>Product withdrawn, terms pinned</a:t>
+            </a:r>
+            <a:endParaRPr lang="en-US" sz="1250" dirty="0"/>
+          </a:p>
+        </p:txBody>
+      </p:sp>
+      <p:sp>
+        <p:nvSpPr>
+          <p:cNvPr id="34" name="Shape 32"/>
+          <p:cNvSpPr/>
+          <p:nvPr/>
+        </p:nvSpPr>
+        <p:spPr>
+          <a:xfrm>
+            <a:off x="4663440" y="2103120"/>
+            <a:ext cx="384048" cy="384048"/>
+          </a:xfrm>
+          <a:prstGeom prst="ellipse">
+            <a:avLst/>
+          </a:prstGeom>
+          <a:solidFill>
+            <a:srgbClr val="B8862F"/>
+          </a:solidFill>
+          <a:ln/>
+        </p:spPr>
+      </p:sp>
+      <p:sp>
+        <p:nvSpPr>
+          <p:cNvPr id="35" name="Text 33"/>
+          <p:cNvSpPr txBox="1"/>
+          <p:nvPr/>
+        </p:nvSpPr>
+        <p:spPr>
+          <a:xfrm>
+            <a:off x="4663440" y="2103120"/>
+            <a:ext cx="384048" cy="384048"/>
+          </a:xfrm>
+          <a:prstGeom prst="rect">
+            <a:avLst/>
+          </a:prstGeom>
+          <a:noFill/>
+          <a:ln/>
+        </p:spPr>
+        <p:txBody>
+          <a:bodyPr wrap="square" lIns="0" tIns="0" rIns="0" bIns="0" rtlCol="0" anchor="ctr"/>
+          <a:lstStyle/>
+          <a:p>
+            <a:pPr algn="ctr" indent="0" marL="0">
+              <a:buNone/>
+            </a:pPr>
+            <a:r>
+              <a:rPr lang="en-US" sz="1400" b="1" dirty="0">
+                <a:solidFill>
+                  <a:srgbClr val="FFFFFF"/>
+                </a:solidFill>
+                <a:latin typeface="Cambria" pitchFamily="34" charset="0"/>
+                <a:ea typeface="Cambria" pitchFamily="34" charset="-122"/>
+                <a:cs typeface="Cambria" pitchFamily="34" charset="-120"/>
+              </a:rPr>
+              <a:t>11</a:t>
+            </a:r>
+            <a:endParaRPr lang="en-US" sz="1400" dirty="0"/>
+          </a:p>
+        </p:txBody>
+      </p:sp>
+      <p:sp>
+        <p:nvSpPr>
+          <p:cNvPr id="36" name="Text 34"/>
+          <p:cNvSpPr txBox="1"/>
+          <p:nvPr/>
+        </p:nvSpPr>
+        <p:spPr>
+          <a:xfrm>
+            <a:off x="5166360" y="2103120"/>
+            <a:ext cx="3566160" cy="384048"/>
+          </a:xfrm>
+          <a:prstGeom prst="rect">
+            <a:avLst/>
+          </a:prstGeom>
+          <a:noFill/>
+          <a:ln/>
+        </p:spPr>
+        <p:txBody>
+          <a:bodyPr wrap="square" lIns="0" tIns="0" rIns="0" bIns="0" rtlCol="0" anchor="ctr"/>
+          <a:lstStyle/>
+          <a:p>
+            <a:pPr indent="0" marL="0">
+              <a:buNone/>
+            </a:pPr>
+            <a:r>
+              <a:rPr lang="en-US" sz="1250" dirty="0">
+                <a:solidFill>
+                  <a:srgbClr val="1D2B2A"/>
+                </a:solidFill>
+                <a:latin typeface="Calibri" pitchFamily="34" charset="0"/>
+                <a:ea typeface="Calibri" pitchFamily="34" charset="-122"/>
+                <a:cs typeface="Calibri" pitchFamily="34" charset="-120"/>
+              </a:rPr>
+              <a:t>Branch closes; all moves</a:t>
+            </a:r>
+            <a:endParaRPr lang="en-US" sz="1250" dirty="0"/>
+          </a:p>
+        </p:txBody>
+      </p:sp>
+      <p:sp>
+        <p:nvSpPr>
+          <p:cNvPr id="37" name="Shape 35"/>
+          <p:cNvSpPr/>
+          <p:nvPr/>
+        </p:nvSpPr>
+        <p:spPr>
+          <a:xfrm>
+            <a:off x="4663440" y="2560320"/>
+            <a:ext cx="384048" cy="384048"/>
+          </a:xfrm>
+          <a:prstGeom prst="ellipse">
+            <a:avLst/>
+          </a:prstGeom>
+          <a:solidFill>
+            <a:srgbClr val="B8862F"/>
+          </a:solidFill>
+          <a:ln/>
+        </p:spPr>
+      </p:sp>
+      <p:sp>
+        <p:nvSpPr>
+          <p:cNvPr id="38" name="Text 36"/>
+          <p:cNvSpPr txBox="1"/>
+          <p:nvPr/>
+        </p:nvSpPr>
+        <p:spPr>
+          <a:xfrm>
+            <a:off x="4663440" y="2560320"/>
+            <a:ext cx="384048" cy="384048"/>
+          </a:xfrm>
+          <a:prstGeom prst="rect">
+            <a:avLst/>
+          </a:prstGeom>
+          <a:noFill/>
+          <a:ln/>
+        </p:spPr>
+        <p:txBody>
+          <a:bodyPr wrap="square" lIns="0" tIns="0" rIns="0" bIns="0" rtlCol="0" anchor="ctr"/>
+          <a:lstStyle/>
+          <a:p>
+            <a:pPr algn="ctr" indent="0" marL="0">
+              <a:buNone/>
+            </a:pPr>
+            <a:r>
+              <a:rPr lang="en-US" sz="1400" b="1" dirty="0">
+                <a:solidFill>
+                  <a:srgbClr val="FFFFFF"/>
+                </a:solidFill>
+                <a:latin typeface="Cambria" pitchFamily="34" charset="0"/>
+                <a:ea typeface="Cambria" pitchFamily="34" charset="-122"/>
+                <a:cs typeface="Cambria" pitchFamily="34" charset="-120"/>
+              </a:rPr>
+              <a:t>12</a:t>
+            </a:r>
+            <a:endParaRPr lang="en-US" sz="1400" dirty="0"/>
+          </a:p>
+        </p:txBody>
+      </p:sp>
+      <p:sp>
+        <p:nvSpPr>
+          <p:cNvPr id="39" name="Text 37"/>
+          <p:cNvSpPr txBox="1"/>
+          <p:nvPr/>
+        </p:nvSpPr>
+        <p:spPr>
+          <a:xfrm>
+            <a:off x="5166360" y="2560320"/>
+            <a:ext cx="3566160" cy="384048"/>
+          </a:xfrm>
+          <a:prstGeom prst="rect">
+            <a:avLst/>
+          </a:prstGeom>
+          <a:noFill/>
+          <a:ln/>
+        </p:spPr>
+        <p:txBody>
+          <a:bodyPr wrap="square" lIns="0" tIns="0" rIns="0" bIns="0" rtlCol="0" anchor="ctr"/>
+          <a:lstStyle/>
+          <a:p>
+            <a:pPr indent="0" marL="0">
+              <a:buNone/>
+            </a:pPr>
+            <a:r>
+              <a:rPr lang="en-US" sz="1250" dirty="0">
+                <a:solidFill>
+                  <a:srgbClr val="1D2B2A"/>
+                </a:solidFill>
+                <a:latin typeface="Calibri" pitchFamily="34" charset="0"/>
+                <a:ea typeface="Calibri" pitchFamily="34" charset="-122"/>
+                <a:cs typeface="Calibri" pitchFamily="34" charset="-120"/>
+              </a:rPr>
+              <a:t>Savings limit; closure not deletion</a:t>
+            </a:r>
+            <a:endParaRPr lang="en-US" sz="1250" dirty="0"/>
+          </a:p>
+        </p:txBody>
+      </p:sp>
+      <p:sp>
+        <p:nvSpPr>
+          <p:cNvPr id="40" name="Shape 38"/>
+          <p:cNvSpPr/>
+          <p:nvPr/>
+        </p:nvSpPr>
+        <p:spPr>
+          <a:xfrm>
+            <a:off x="4663440" y="3017520"/>
+            <a:ext cx="384048" cy="384048"/>
+          </a:xfrm>
+          <a:prstGeom prst="ellipse">
+            <a:avLst/>
+          </a:prstGeom>
+          <a:solidFill>
+            <a:srgbClr val="B8862F"/>
+          </a:solidFill>
+          <a:ln/>
+        </p:spPr>
+      </p:sp>
+      <p:sp>
+        <p:nvSpPr>
+          <p:cNvPr id="41" name="Text 39"/>
+          <p:cNvSpPr txBox="1"/>
+          <p:nvPr/>
+        </p:nvSpPr>
+        <p:spPr>
+          <a:xfrm>
+            <a:off x="4663440" y="3017520"/>
+            <a:ext cx="384048" cy="384048"/>
+          </a:xfrm>
+          <a:prstGeom prst="rect">
+            <a:avLst/>
+          </a:prstGeom>
+          <a:noFill/>
+          <a:ln/>
+        </p:spPr>
+        <p:txBody>
+          <a:bodyPr wrap="square" lIns="0" tIns="0" rIns="0" bIns="0" rtlCol="0" anchor="ctr"/>
+          <a:lstStyle/>
+          <a:p>
+            <a:pPr algn="ctr" indent="0" marL="0">
+              <a:buNone/>
+            </a:pPr>
+            <a:r>
+              <a:rPr lang="en-US" sz="1400" b="1" dirty="0">
+                <a:solidFill>
+                  <a:srgbClr val="FFFFFF"/>
+                </a:solidFill>
+                <a:latin typeface="Cambria" pitchFamily="34" charset="0"/>
+                <a:ea typeface="Cambria" pitchFamily="34" charset="-122"/>
+                <a:cs typeface="Cambria" pitchFamily="34" charset="-120"/>
+              </a:rPr>
+              <a:t>13</a:t>
+            </a:r>
+            <a:endParaRPr lang="en-US" sz="1400" dirty="0"/>
+          </a:p>
+        </p:txBody>
+      </p:sp>
+      <p:sp>
+        <p:nvSpPr>
+          <p:cNvPr id="42" name="Text 40"/>
+          <p:cNvSpPr txBox="1"/>
+          <p:nvPr/>
+        </p:nvSpPr>
+        <p:spPr>
+          <a:xfrm>
+            <a:off x="5166360" y="3017520"/>
+            <a:ext cx="3566160" cy="384048"/>
+          </a:xfrm>
+          <a:prstGeom prst="rect">
+            <a:avLst/>
+          </a:prstGeom>
+          <a:noFill/>
+          <a:ln/>
+        </p:spPr>
+        <p:txBody>
+          <a:bodyPr wrap="square" lIns="0" tIns="0" rIns="0" bIns="0" rtlCol="0" anchor="ctr"/>
+          <a:lstStyle/>
+          <a:p>
+            <a:pPr indent="0" marL="0">
+              <a:buNone/>
+            </a:pPr>
+            <a:r>
+              <a:rPr lang="en-US" sz="1250" dirty="0">
+                <a:solidFill>
+                  <a:srgbClr val="1D2B2A"/>
+                </a:solidFill>
+                <a:latin typeface="Calibri" pitchFamily="34" charset="0"/>
+                <a:ea typeface="Calibri" pitchFamily="34" charset="-122"/>
+                <a:cs typeface="Calibri" pitchFamily="34" charset="-120"/>
+              </a:rPr>
+              <a:t>Staff and customer leave</a:t>
+            </a:r>
+            <a:endParaRPr lang="en-US" sz="1250" dirty="0"/>
+          </a:p>
+        </p:txBody>
+      </p:sp>
+      <p:sp>
+        <p:nvSpPr>
+          <p:cNvPr id="43" name="Shape 41"/>
+          <p:cNvSpPr/>
+          <p:nvPr/>
+        </p:nvSpPr>
+        <p:spPr>
+          <a:xfrm>
+            <a:off x="4663440" y="3474720"/>
+            <a:ext cx="384048" cy="384048"/>
+          </a:xfrm>
+          <a:prstGeom prst="ellipse">
+            <a:avLst/>
+          </a:prstGeom>
+          <a:solidFill>
+            <a:srgbClr val="B8862F"/>
+          </a:solidFill>
+          <a:ln/>
+        </p:spPr>
+      </p:sp>
+      <p:sp>
+        <p:nvSpPr>
+          <p:cNvPr id="44" name="Text 42"/>
+          <p:cNvSpPr txBox="1"/>
+          <p:nvPr/>
+        </p:nvSpPr>
+        <p:spPr>
+          <a:xfrm>
+            <a:off x="4663440" y="3474720"/>
+            <a:ext cx="384048" cy="384048"/>
+          </a:xfrm>
+          <a:prstGeom prst="rect">
+            <a:avLst/>
+          </a:prstGeom>
+          <a:noFill/>
+          <a:ln/>
+        </p:spPr>
+        <p:txBody>
+          <a:bodyPr wrap="square" lIns="0" tIns="0" rIns="0" bIns="0" rtlCol="0" anchor="ctr"/>
+          <a:lstStyle/>
+          <a:p>
+            <a:pPr algn="ctr" indent="0" marL="0">
+              <a:buNone/>
+            </a:pPr>
+            <a:r>
+              <a:rPr lang="en-US" sz="1400" b="1" dirty="0">
+                <a:solidFill>
+                  <a:srgbClr val="FFFFFF"/>
+                </a:solidFill>
+                <a:latin typeface="Cambria" pitchFamily="34" charset="0"/>
+                <a:ea typeface="Cambria" pitchFamily="34" charset="-122"/>
+                <a:cs typeface="Cambria" pitchFamily="34" charset="-120"/>
+              </a:rPr>
+              <a:t>14</a:t>
+            </a:r>
+            <a:endParaRPr lang="en-US" sz="1400" dirty="0"/>
+          </a:p>
+        </p:txBody>
+      </p:sp>
+      <p:sp>
+        <p:nvSpPr>
+          <p:cNvPr id="45" name="Text 43"/>
+          <p:cNvSpPr txBox="1"/>
+          <p:nvPr/>
+        </p:nvSpPr>
+        <p:spPr>
+          <a:xfrm>
+            <a:off x="5166360" y="3474720"/>
+            <a:ext cx="3566160" cy="384048"/>
+          </a:xfrm>
+          <a:prstGeom prst="rect">
+            <a:avLst/>
+          </a:prstGeom>
+          <a:noFill/>
+          <a:ln/>
+        </p:spPr>
+        <p:txBody>
+          <a:bodyPr wrap="square" lIns="0" tIns="0" rIns="0" bIns="0" rtlCol="0" anchor="ctr"/>
+          <a:lstStyle/>
+          <a:p>
+            <a:pPr indent="0" marL="0">
+              <a:buNone/>
+            </a:pPr>
+            <a:r>
+              <a:rPr lang="en-US" sz="1250" dirty="0">
+                <a:solidFill>
+                  <a:srgbClr val="1D2B2A"/>
+                </a:solidFill>
+                <a:latin typeface="Calibri" pitchFamily="34" charset="0"/>
+                <a:ea typeface="Calibri" pitchFamily="34" charset="-122"/>
+                <a:cs typeface="Calibri" pitchFamily="34" charset="-120"/>
+              </a:rPr>
+              <a:t>Sole trader, private client, term deposits</a:t>
+            </a:r>
+            <a:endParaRPr lang="en-US" sz="1250" dirty="0"/>
+          </a:p>
+        </p:txBody>
+      </p:sp>
+      <p:sp>
+        <p:nvSpPr>
+          <p:cNvPr id="46" name="Shape 44"/>
+          <p:cNvSpPr/>
+          <p:nvPr/>
+        </p:nvSpPr>
+        <p:spPr>
+          <a:xfrm>
+            <a:off x="4663440" y="3931920"/>
+            <a:ext cx="384048" cy="384048"/>
+          </a:xfrm>
+          <a:prstGeom prst="ellipse">
+            <a:avLst/>
+          </a:prstGeom>
+          <a:solidFill>
+            <a:srgbClr val="B8862F"/>
+          </a:solidFill>
+          <a:ln/>
+        </p:spPr>
+      </p:sp>
+      <p:sp>
+        <p:nvSpPr>
+          <p:cNvPr id="47" name="Text 45"/>
+          <p:cNvSpPr txBox="1"/>
+          <p:nvPr/>
+        </p:nvSpPr>
+        <p:spPr>
+          <a:xfrm>
+            <a:off x="4663440" y="3931920"/>
+            <a:ext cx="384048" cy="384048"/>
+          </a:xfrm>
+          <a:prstGeom prst="rect">
+            <a:avLst/>
+          </a:prstGeom>
+          <a:noFill/>
+          <a:ln/>
+        </p:spPr>
+        <p:txBody>
+          <a:bodyPr wrap="square" lIns="0" tIns="0" rIns="0" bIns="0" rtlCol="0" anchor="ctr"/>
+          <a:lstStyle/>
+          <a:p>
+            <a:pPr algn="ctr" indent="0" marL="0">
+              <a:buNone/>
+            </a:pPr>
+            <a:r>
+              <a:rPr lang="en-US" sz="1400" b="1" dirty="0">
+                <a:solidFill>
+                  <a:srgbClr val="FFFFFF"/>
+                </a:solidFill>
+                <a:latin typeface="Cambria" pitchFamily="34" charset="0"/>
+                <a:ea typeface="Cambria" pitchFamily="34" charset="-122"/>
+                <a:cs typeface="Cambria" pitchFamily="34" charset="-120"/>
+              </a:rPr>
+              <a:t>15</a:t>
+            </a:r>
+            <a:endParaRPr lang="en-US" sz="1400" dirty="0"/>
+          </a:p>
+        </p:txBody>
+      </p:sp>
+      <p:sp>
+        <p:nvSpPr>
+          <p:cNvPr id="48" name="Text 46"/>
+          <p:cNvSpPr txBox="1"/>
+          <p:nvPr/>
+        </p:nvSpPr>
+        <p:spPr>
+          <a:xfrm>
+            <a:off x="5166360" y="3931920"/>
+            <a:ext cx="3566160" cy="384048"/>
+          </a:xfrm>
+          <a:prstGeom prst="rect">
+            <a:avLst/>
+          </a:prstGeom>
+          <a:noFill/>
+          <a:ln/>
+        </p:spPr>
+        <p:txBody>
+          <a:bodyPr wrap="square" lIns="0" tIns="0" rIns="0" bIns="0" rtlCol="0" anchor="ctr"/>
+          <a:lstStyle/>
+          <a:p>
+            <a:pPr indent="0" marL="0">
+              <a:buNone/>
+            </a:pPr>
+            <a:r>
+              <a:rPr lang="en-US" sz="1250" dirty="0">
+                <a:solidFill>
+                  <a:srgbClr val="1D2B2A"/>
+                </a:solidFill>
+                <a:latin typeface="Calibri" pitchFamily="34" charset="0"/>
+                <a:ea typeface="Calibri" pitchFamily="34" charset="-122"/>
+                <a:cs typeface="Calibri" pitchFamily="34" charset="-120"/>
+              </a:rPr>
+              <a:t>Card controls, bills, card search</a:t>
+            </a:r>
+            <a:endParaRPr lang="en-US" sz="1250" dirty="0"/>
+          </a:p>
+        </p:txBody>
+      </p:sp>
+      <p:sp>
+        <p:nvSpPr>
+          <p:cNvPr id="49" name="Shape 47"/>
+          <p:cNvSpPr/>
+          <p:nvPr/>
+        </p:nvSpPr>
+        <p:spPr>
+          <a:xfrm>
+            <a:off x="4663440" y="4389120"/>
+            <a:ext cx="384048" cy="384048"/>
+          </a:xfrm>
+          <a:prstGeom prst="ellipse">
+            <a:avLst/>
+          </a:prstGeom>
+          <a:solidFill>
+            <a:srgbClr val="B8862F"/>
+          </a:solidFill>
+          <a:ln/>
+        </p:spPr>
+      </p:sp>
+      <p:sp>
+        <p:nvSpPr>
+          <p:cNvPr id="50" name="Text 48"/>
+          <p:cNvSpPr txBox="1"/>
+          <p:nvPr/>
+        </p:nvSpPr>
+        <p:spPr>
+          <a:xfrm>
+            <a:off x="4663440" y="4389120"/>
+            <a:ext cx="384048" cy="384048"/>
+          </a:xfrm>
+          <a:prstGeom prst="rect">
+            <a:avLst/>
+          </a:prstGeom>
+          <a:noFill/>
+          <a:ln/>
+        </p:spPr>
+        <p:txBody>
+          <a:bodyPr wrap="square" lIns="0" tIns="0" rIns="0" bIns="0" rtlCol="0" anchor="ctr"/>
+          <a:lstStyle/>
+          <a:p>
+            <a:pPr algn="ctr" indent="0" marL="0">
+              <a:buNone/>
+            </a:pPr>
+            <a:r>
+              <a:rPr lang="en-US" sz="1400" b="1" dirty="0">
+                <a:solidFill>
+                  <a:srgbClr val="FFFFFF"/>
+                </a:solidFill>
+                <a:latin typeface="Cambria" pitchFamily="34" charset="0"/>
+                <a:ea typeface="Cambria" pitchFamily="34" charset="-122"/>
+                <a:cs typeface="Cambria" pitchFamily="34" charset="-120"/>
+              </a:rPr>
+              <a:t>16</a:t>
+            </a:r>
+            <a:endParaRPr lang="en-US" sz="1400" dirty="0"/>
+          </a:p>
+        </p:txBody>
+      </p:sp>
+      <p:sp>
+        <p:nvSpPr>
+          <p:cNvPr id="51" name="Text 49"/>
+          <p:cNvSpPr txBox="1"/>
+          <p:nvPr/>
+        </p:nvSpPr>
+        <p:spPr>
+          <a:xfrm>
+            <a:off x="5166360" y="4389120"/>
+            <a:ext cx="3566160" cy="384048"/>
+          </a:xfrm>
+          <a:prstGeom prst="rect">
+            <a:avLst/>
+          </a:prstGeom>
+          <a:noFill/>
+          <a:ln/>
+        </p:spPr>
+        <p:txBody>
+          <a:bodyPr wrap="square" lIns="0" tIns="0" rIns="0" bIns="0" rtlCol="0" anchor="ctr"/>
+          <a:lstStyle/>
+          <a:p>
+            <a:pPr indent="0" marL="0">
+              <a:buNone/>
+            </a:pPr>
+            <a:r>
+              <a:rPr lang="en-US" sz="1250" dirty="0">
+                <a:solidFill>
+                  <a:srgbClr val="1D2B2A"/>
+                </a:solidFill>
+                <a:latin typeface="Calibri" pitchFamily="34" charset="0"/>
+                <a:ea typeface="Calibri" pitchFamily="34" charset="-122"/>
+                <a:cs typeface="Calibri" pitchFamily="34" charset="-120"/>
+              </a:rPr>
+              <a:t>Auditor review; archive vs delete</a:t>
+            </a:r>
+            <a:endParaRPr lang="en-US" sz="1250" dirty="0"/>
           </a:p>
         </p:txBody>
       </p:sp>
@@ -3023,7 +4050,7 @@
               <a:buNone/>
             </a:pPr>
             <a:r>
-              <a:rPr lang="en-US" sz="2200" b="1" dirty="0">
+              <a:rPr lang="en-US" sz="2800" b="1" dirty="0">
                 <a:solidFill>
                   <a:srgbClr val="0B4F4A"/>
                 </a:solidFill>
@@ -3031,9 +4058,9 @@
                 <a:ea typeface="Cambria" pitchFamily="34" charset="-122"/>
                 <a:cs typeface="Cambria" pitchFamily="34" charset="-120"/>
               </a:rPr>
-              <a:t>Behaviour: six flowcharts traced from the code</a:t>
-            </a:r>
-            <a:endParaRPr lang="en-US" sz="2200" dirty="0"/>
+              <a:t>Everything the brief names is modelled</a:t>
+            </a:r>
+            <a:endParaRPr lang="en-US" sz="2800" dirty="0"/>
           </a:p>
         </p:txBody>
       </p:sp>
@@ -3070,7 +4097,7 @@
                 <a:ea typeface="Calibri" pitchFamily="34" charset="-122"/>
                 <a:cs typeface="Calibri" pitchFamily="34" charset="-120"/>
               </a:rPr>
-              <a:t>Standard symbols (ISO 5807); the diamonds are in the order the code checks the rules</a:t>
+              <a:t>Found by rereading Problem 4 line by line; each has a test</a:t>
             </a:r>
             <a:endParaRPr lang="en-US" sz="1200" dirty="0"/>
           </a:p>
@@ -3084,69 +4111,20 @@
         </p:nvSpPr>
         <p:spPr>
           <a:xfrm>
-            <a:off x="457200" y="1188720"/>
-            <a:ext cx="3200400" cy="3611880"/>
+            <a:off x="457200" y="1280160"/>
+            <a:ext cx="2606040" cy="1600200"/>
           </a:xfrm>
           <a:prstGeom prst="roundRect">
             <a:avLst>
-              <a:gd name="adj" fmla="val 2286"/>
+              <a:gd name="adj" fmla="val 4571"/>
             </a:avLst>
-          </a:prstGeom>
-          <a:solidFill>
-            <a:srgbClr val="F4F8F7"/>
-          </a:solidFill>
-          <a:ln w="12700">
-            <a:solidFill>
-              <a:srgbClr val="F4F8F7"/>
-            </a:solidFill>
-            <a:prstDash val="solid"/>
-          </a:ln>
-        </p:spPr>
-      </p:sp>
-      <p:pic>
-        <p:nvPicPr>
-          <p:cNvPr id="5" name="Image 0" descr="/home/user/commercial-banking/docs/flowchart_3_transfer.png">    </p:cNvPr>
-          <p:cNvPicPr>
-            <a:picLocks noChangeAspect="1"/>
-          </p:cNvPicPr>
-          <p:nvPr/>
-        </p:nvPicPr>
-        <p:blipFill>
-          <a:blip r:embed="rId1"/>
-          <a:stretch>
-            <a:fillRect/>
-          </a:stretch>
-        </p:blipFill>
-        <p:spPr>
-          <a:xfrm>
-            <a:off x="782195" y="1261872"/>
-            <a:ext cx="2550410" cy="3474720"/>
-          </a:xfrm>
-          <a:prstGeom prst="rect">
-            <a:avLst/>
-          </a:prstGeom>
-        </p:spPr>
-      </p:pic>
-      <p:sp>
-        <p:nvSpPr>
-          <p:cNvPr id="6" name="Shape 3"/>
-          <p:cNvSpPr/>
-          <p:nvPr/>
-        </p:nvSpPr>
-        <p:spPr>
-          <a:xfrm>
-            <a:off x="3931920" y="1234440"/>
-            <a:ext cx="640080" cy="329184"/>
-          </a:xfrm>
-          <a:prstGeom prst="flowChartTerminator">
-            <a:avLst/>
           </a:prstGeom>
           <a:solidFill>
             <a:srgbClr val="E8F0EE"/>
           </a:solidFill>
           <a:ln w="12700">
             <a:solidFill>
-              <a:srgbClr val="0B4F4A"/>
+              <a:srgbClr val="E8F0EE"/>
             </a:solidFill>
             <a:prstDash val="solid"/>
           </a:ln>
@@ -3154,14 +4132,14 @@
       </p:sp>
       <p:sp>
         <p:nvSpPr>
-          <p:cNvPr id="7" name="Text 4"/>
-          <p:cNvSpPr txBox="1"/>
-          <p:nvPr/>
-        </p:nvSpPr>
-        <p:spPr>
-          <a:xfrm>
-            <a:off x="4663440" y="1234440"/>
-            <a:ext cx="1874520" cy="329184"/>
+          <p:cNvPr id="5" name="Text 3"/>
+          <p:cNvSpPr txBox="1"/>
+          <p:nvPr/>
+        </p:nvSpPr>
+        <p:spPr>
+          <a:xfrm>
+            <a:off x="594360" y="1389888"/>
+            <a:ext cx="2331720" cy="502920"/>
           </a:xfrm>
           <a:prstGeom prst="rect">
             <a:avLst/>
@@ -3177,7 +4155,46 @@
               <a:buNone/>
             </a:pPr>
             <a:r>
-              <a:rPr lang="en-US" sz="1100" dirty="0">
+              <a:rPr lang="en-US" sz="1400" b="1" dirty="0">
+                <a:solidFill>
+                  <a:srgbClr val="0B4F4A"/>
+                </a:solidFill>
+                <a:latin typeface="Cambria" pitchFamily="34" charset="0"/>
+                <a:ea typeface="Cambria" pitchFamily="34" charset="-122"/>
+                <a:cs typeface="Cambria" pitchFamily="34" charset="-120"/>
+              </a:rPr>
+              <a:t>Sole traders &amp; private clients</a:t>
+            </a:r>
+            <a:endParaRPr lang="en-US" sz="1400" dirty="0"/>
+          </a:p>
+        </p:txBody>
+      </p:sp>
+      <p:sp>
+        <p:nvSpPr>
+          <p:cNvPr id="6" name="Text 4"/>
+          <p:cNvSpPr txBox="1"/>
+          <p:nvPr/>
+        </p:nvSpPr>
+        <p:spPr>
+          <a:xfrm>
+            <a:off x="594360" y="1920240"/>
+            <a:ext cx="2331720" cy="868680"/>
+          </a:xfrm>
+          <a:prstGeom prst="rect">
+            <a:avLst/>
+          </a:prstGeom>
+          <a:noFill/>
+          <a:ln/>
+        </p:spPr>
+        <p:txBody>
+          <a:bodyPr wrap="square" lIns="0" tIns="0" rIns="0" bIns="0" rtlCol="0" anchor="t"/>
+          <a:lstStyle/>
+          <a:p>
+            <a:pPr indent="0" marL="0">
+              <a:buNone/>
+            </a:pPr>
+            <a:r>
+              <a:rPr lang="en-US" sz="1200" dirty="0">
                 <a:solidFill>
                   <a:srgbClr val="1D2B2A"/>
                 </a:solidFill>
@@ -3185,32 +4202,34 @@
                 <a:ea typeface="Calibri" pitchFamily="34" charset="-122"/>
                 <a:cs typeface="Calibri" pitchFamily="34" charset="-120"/>
               </a:rPr>
-              <a:t>Start / end; red = refused</a:t>
-            </a:r>
-            <a:endParaRPr lang="en-US" sz="1100" dirty="0"/>
-          </a:p>
-        </p:txBody>
-      </p:sp>
-      <p:sp>
-        <p:nvSpPr>
-          <p:cNvPr id="8" name="Shape 5"/>
+              <a:t>Person with a trading name; PRIVATE needs verified source of wealth (EDD)</a:t>
+            </a:r>
+            <a:endParaRPr lang="en-US" sz="1200" dirty="0"/>
+          </a:p>
+        </p:txBody>
+      </p:sp>
+      <p:sp>
+        <p:nvSpPr>
+          <p:cNvPr id="7" name="Shape 5"/>
           <p:cNvSpPr/>
           <p:nvPr/>
         </p:nvSpPr>
         <p:spPr>
           <a:xfrm>
-            <a:off x="3931920" y="1664208"/>
-            <a:ext cx="640080" cy="329184"/>
-          </a:xfrm>
-          <a:prstGeom prst="flowChartProcess">
-            <a:avLst/>
+            <a:off x="3246120" y="1280160"/>
+            <a:ext cx="2606040" cy="1600200"/>
+          </a:xfrm>
+          <a:prstGeom prst="roundRect">
+            <a:avLst>
+              <a:gd name="adj" fmla="val 4571"/>
+            </a:avLst>
           </a:prstGeom>
           <a:solidFill>
             <a:srgbClr val="E8F0EE"/>
           </a:solidFill>
           <a:ln w="12700">
             <a:solidFill>
-              <a:srgbClr val="0B4F4A"/>
+              <a:srgbClr val="E8F0EE"/>
             </a:solidFill>
             <a:prstDash val="solid"/>
           </a:ln>
@@ -3218,14 +4237,14 @@
       </p:sp>
       <p:sp>
         <p:nvSpPr>
-          <p:cNvPr id="9" name="Text 6"/>
-          <p:cNvSpPr txBox="1"/>
-          <p:nvPr/>
-        </p:nvSpPr>
-        <p:spPr>
-          <a:xfrm>
-            <a:off x="4663440" y="1664208"/>
-            <a:ext cx="1874520" cy="329184"/>
+          <p:cNvPr id="8" name="Text 6"/>
+          <p:cNvSpPr txBox="1"/>
+          <p:nvPr/>
+        </p:nvSpPr>
+        <p:spPr>
+          <a:xfrm>
+            <a:off x="3383280" y="1389888"/>
+            <a:ext cx="2331720" cy="502920"/>
           </a:xfrm>
           <a:prstGeom prst="rect">
             <a:avLst/>
@@ -3241,7 +4260,46 @@
               <a:buNone/>
             </a:pPr>
             <a:r>
-              <a:rPr lang="en-US" sz="1100" dirty="0">
+              <a:rPr lang="en-US" sz="1400" b="1" dirty="0">
+                <a:solidFill>
+                  <a:srgbClr val="0B4F4A"/>
+                </a:solidFill>
+                <a:latin typeface="Cambria" pitchFamily="34" charset="0"/>
+                <a:ea typeface="Cambria" pitchFamily="34" charset="-122"/>
+                <a:cs typeface="Cambria" pitchFamily="34" charset="-120"/>
+              </a:rPr>
+              <a:t>Fixed-term deposits</a:t>
+            </a:r>
+            <a:endParaRPr lang="en-US" sz="1400" dirty="0"/>
+          </a:p>
+        </p:txBody>
+      </p:sp>
+      <p:sp>
+        <p:nvSpPr>
+          <p:cNvPr id="9" name="Text 7"/>
+          <p:cNvSpPr txBox="1"/>
+          <p:nvPr/>
+        </p:nvSpPr>
+        <p:spPr>
+          <a:xfrm>
+            <a:off x="3383280" y="1920240"/>
+            <a:ext cx="2331720" cy="868680"/>
+          </a:xfrm>
+          <a:prstGeom prst="rect">
+            <a:avLst/>
+          </a:prstGeom>
+          <a:noFill/>
+          <a:ln/>
+        </p:spPr>
+        <p:txBody>
+          <a:bodyPr wrap="square" lIns="0" tIns="0" rIns="0" bIns="0" rtlCol="0" anchor="t"/>
+          <a:lstStyle/>
+          <a:p>
+            <a:pPr indent="0" marL="0">
+              <a:buNone/>
+            </a:pPr>
+            <a:r>
+              <a:rPr lang="en-US" sz="1200" dirty="0">
                 <a:solidFill>
                   <a:srgbClr val="1D2B2A"/>
                 </a:solidFill>
@@ -3249,96 +4307,34 @@
                 <a:ea typeface="Calibri" pitchFamily="34" charset="-122"/>
                 <a:cs typeface="Calibri" pitchFamily="34" charset="-120"/>
               </a:rPr>
-              <a:t>Process: one step</a:t>
-            </a:r>
-            <a:endParaRPr lang="en-US" sz="1100" dirty="0"/>
-          </a:p>
-        </p:txBody>
-      </p:sp>
-      <p:sp>
-        <p:nvSpPr>
-          <p:cNvPr id="10" name="Shape 7"/>
+              <a:t>Third DepositAccount subclass: no early debits, maturity payout, break penalty</a:t>
+            </a:r>
+            <a:endParaRPr lang="en-US" sz="1200" dirty="0"/>
+          </a:p>
+        </p:txBody>
+      </p:sp>
+      <p:sp>
+        <p:nvSpPr>
+          <p:cNvPr id="10" name="Shape 8"/>
           <p:cNvSpPr/>
           <p:nvPr/>
         </p:nvSpPr>
         <p:spPr>
           <a:xfrm>
-            <a:off x="3931920" y="2093976"/>
-            <a:ext cx="640080" cy="329184"/>
-          </a:xfrm>
-          <a:prstGeom prst="flowChartDecision">
-            <a:avLst/>
-          </a:prstGeom>
-          <a:solidFill>
-            <a:srgbClr val="FDF1D6"/>
-          </a:solidFill>
-          <a:ln w="12700">
-            <a:solidFill>
-              <a:srgbClr val="0B4F4A"/>
-            </a:solidFill>
-            <a:prstDash val="solid"/>
-          </a:ln>
-        </p:spPr>
-      </p:sp>
-      <p:sp>
-        <p:nvSpPr>
-          <p:cNvPr id="11" name="Text 8"/>
-          <p:cNvSpPr txBox="1"/>
-          <p:nvPr/>
-        </p:nvSpPr>
-        <p:spPr>
-          <a:xfrm>
-            <a:off x="4663440" y="2093976"/>
-            <a:ext cx="1874520" cy="329184"/>
-          </a:xfrm>
-          <a:prstGeom prst="rect">
-            <a:avLst/>
-          </a:prstGeom>
-          <a:noFill/>
-          <a:ln/>
-        </p:spPr>
-        <p:txBody>
-          <a:bodyPr wrap="square" lIns="0" tIns="0" rIns="0" bIns="0" rtlCol="0" anchor="ctr"/>
-          <a:lstStyle/>
-          <a:p>
-            <a:pPr indent="0" marL="0">
-              <a:buNone/>
-            </a:pPr>
-            <a:r>
-              <a:rPr lang="en-US" sz="1100" dirty="0">
-                <a:solidFill>
-                  <a:srgbClr val="1D2B2A"/>
-                </a:solidFill>
-                <a:latin typeface="Calibri" pitchFamily="34" charset="0"/>
-                <a:ea typeface="Calibri" pitchFamily="34" charset="-122"/>
-                <a:cs typeface="Calibri" pitchFamily="34" charset="-120"/>
-              </a:rPr>
-              <a:t>Decision: Yes / No</a:t>
-            </a:r>
-            <a:endParaRPr lang="en-US" sz="1100" dirty="0"/>
-          </a:p>
-        </p:txBody>
-      </p:sp>
-      <p:sp>
-        <p:nvSpPr>
-          <p:cNvPr id="12" name="Shape 9"/>
-          <p:cNvSpPr/>
-          <p:nvPr/>
-        </p:nvSpPr>
-        <p:spPr>
-          <a:xfrm>
-            <a:off x="3931920" y="2523744"/>
-            <a:ext cx="640080" cy="329184"/>
-          </a:xfrm>
-          <a:prstGeom prst="flowChartInputOutput">
-            <a:avLst/>
+            <a:off x="6035040" y="1280160"/>
+            <a:ext cx="2606040" cy="1600200"/>
+          </a:xfrm>
+          <a:prstGeom prst="roundRect">
+            <a:avLst>
+              <a:gd name="adj" fmla="val 4571"/>
+            </a:avLst>
           </a:prstGeom>
           <a:solidFill>
             <a:srgbClr val="E8F0EE"/>
           </a:solidFill>
           <a:ln w="12700">
             <a:solidFill>
-              <a:srgbClr val="0B4F4A"/>
+              <a:srgbClr val="E8F0EE"/>
             </a:solidFill>
             <a:prstDash val="solid"/>
           </a:ln>
@@ -3346,14 +4342,14 @@
       </p:sp>
       <p:sp>
         <p:nvSpPr>
-          <p:cNvPr id="13" name="Text 10"/>
-          <p:cNvSpPr txBox="1"/>
-          <p:nvPr/>
-        </p:nvSpPr>
-        <p:spPr>
-          <a:xfrm>
-            <a:off x="4663440" y="2523744"/>
-            <a:ext cx="1874520" cy="329184"/>
+          <p:cNvPr id="11" name="Text 9"/>
+          <p:cNvSpPr txBox="1"/>
+          <p:nvPr/>
+        </p:nvSpPr>
+        <p:spPr>
+          <a:xfrm>
+            <a:off x="6172200" y="1389888"/>
+            <a:ext cx="2331720" cy="502920"/>
           </a:xfrm>
           <a:prstGeom prst="rect">
             <a:avLst/>
@@ -3369,7 +4365,46 @@
               <a:buNone/>
             </a:pPr>
             <a:r>
-              <a:rPr lang="en-US" sz="1100" dirty="0">
+              <a:rPr lang="en-US" sz="1400" b="1" dirty="0">
+                <a:solidFill>
+                  <a:srgbClr val="0B4F4A"/>
+                </a:solidFill>
+                <a:latin typeface="Cambria" pitchFamily="34" charset="0"/>
+                <a:ea typeface="Cambria" pitchFamily="34" charset="-122"/>
+                <a:cs typeface="Cambria" pitchFamily="34" charset="-120"/>
+              </a:rPr>
+              <a:t>Card controls</a:t>
+            </a:r>
+            <a:endParaRPr lang="en-US" sz="1400" dirty="0"/>
+          </a:p>
+        </p:txBody>
+      </p:sp>
+      <p:sp>
+        <p:nvSpPr>
+          <p:cNvPr id="12" name="Text 10"/>
+          <p:cNvSpPr txBox="1"/>
+          <p:nvPr/>
+        </p:nvSpPr>
+        <p:spPr>
+          <a:xfrm>
+            <a:off x="6172200" y="1920240"/>
+            <a:ext cx="2331720" cy="868680"/>
+          </a:xfrm>
+          <a:prstGeom prst="rect">
+            <a:avLst/>
+          </a:prstGeom>
+          <a:noFill/>
+          <a:ln/>
+        </p:spPr>
+        <p:txBody>
+          <a:bodyPr wrap="square" lIns="0" tIns="0" rIns="0" bIns="0" rtlCol="0" anchor="t"/>
+          <a:lstStyle/>
+          <a:p>
+            <a:pPr indent="0" marL="0">
+              <a:buNone/>
+            </a:pPr>
+            <a:r>
+              <a:rPr lang="en-US" sz="1200" dirty="0">
                 <a:solidFill>
                   <a:srgbClr val="1D2B2A"/>
                 </a:solidFill>
@@ -3377,32 +4412,34 @@
                 <a:ea typeface="Calibri" pitchFamily="34" charset="-122"/>
                 <a:cs typeface="Calibri" pitchFamily="34" charset="-120"/>
               </a:rPr>
-              <a:t>Input / output</a:t>
-            </a:r>
-            <a:endParaRPr lang="en-US" sz="1100" dirty="0"/>
-          </a:p>
-        </p:txBody>
-      </p:sp>
-      <p:sp>
-        <p:nvSpPr>
-          <p:cNvPr id="14" name="Shape 11"/>
+              <a:t>Online, international, cash, merchant category - each with a validity period</a:t>
+            </a:r>
+            <a:endParaRPr lang="en-US" sz="1200" dirty="0"/>
+          </a:p>
+        </p:txBody>
+      </p:sp>
+      <p:sp>
+        <p:nvSpPr>
+          <p:cNvPr id="13" name="Shape 11"/>
           <p:cNvSpPr/>
           <p:nvPr/>
         </p:nvSpPr>
         <p:spPr>
           <a:xfrm>
-            <a:off x="3931920" y="2953512"/>
-            <a:ext cx="640080" cy="329184"/>
-          </a:xfrm>
-          <a:prstGeom prst="flowChartPredefinedProcess">
-            <a:avLst/>
+            <a:off x="457200" y="3063240"/>
+            <a:ext cx="2606040" cy="1600200"/>
+          </a:xfrm>
+          <a:prstGeom prst="roundRect">
+            <a:avLst>
+              <a:gd name="adj" fmla="val 4571"/>
+            </a:avLst>
           </a:prstGeom>
           <a:solidFill>
             <a:srgbClr val="E8F0EE"/>
           </a:solidFill>
           <a:ln w="12700">
             <a:solidFill>
-              <a:srgbClr val="0B4F4A"/>
+              <a:srgbClr val="E8F0EE"/>
             </a:solidFill>
             <a:prstDash val="solid"/>
           </a:ln>
@@ -3410,14 +4447,14 @@
       </p:sp>
       <p:sp>
         <p:nvSpPr>
-          <p:cNvPr id="15" name="Text 12"/>
-          <p:cNvSpPr txBox="1"/>
-          <p:nvPr/>
-        </p:nvSpPr>
-        <p:spPr>
-          <a:xfrm>
-            <a:off x="4663440" y="2953512"/>
-            <a:ext cx="1874520" cy="329184"/>
+          <p:cNvPr id="14" name="Text 12"/>
+          <p:cNvSpPr txBox="1"/>
+          <p:nvPr/>
+        </p:nvSpPr>
+        <p:spPr>
+          <a:xfrm>
+            <a:off x="594360" y="3172968"/>
+            <a:ext cx="2331720" cy="502920"/>
           </a:xfrm>
           <a:prstGeom prst="rect">
             <a:avLst/>
@@ -3433,7 +4470,46 @@
               <a:buNone/>
             </a:pPr>
             <a:r>
-              <a:rPr lang="en-US" sz="1100" dirty="0">
+              <a:rPr lang="en-US" sz="1400" b="1" dirty="0">
+                <a:solidFill>
+                  <a:srgbClr val="0B4F4A"/>
+                </a:solidFill>
+                <a:latin typeface="Cambria" pitchFamily="34" charset="0"/>
+                <a:ea typeface="Cambria" pitchFamily="34" charset="-122"/>
+                <a:cs typeface="Cambria" pitchFamily="34" charset="-120"/>
+              </a:rPr>
+              <a:t>Billers</a:t>
+            </a:r>
+            <a:endParaRPr lang="en-US" sz="1400" dirty="0"/>
+          </a:p>
+        </p:txBody>
+      </p:sp>
+      <p:sp>
+        <p:nvSpPr>
+          <p:cNvPr id="15" name="Text 13"/>
+          <p:cNvSpPr txBox="1"/>
+          <p:nvPr/>
+        </p:nvSpPr>
+        <p:spPr>
+          <a:xfrm>
+            <a:off x="594360" y="3703320"/>
+            <a:ext cx="2331720" cy="868680"/>
+          </a:xfrm>
+          <a:prstGeom prst="rect">
+            <a:avLst/>
+          </a:prstGeom>
+          <a:noFill/>
+          <a:ln/>
+        </p:spPr>
+        <p:txBody>
+          <a:bodyPr wrap="square" lIns="0" tIns="0" rIns="0" bIns="0" rtlCol="0" anchor="t"/>
+          <a:lstStyle/>
+          <a:p>
+            <a:pPr indent="0" marL="0">
+              <a:buNone/>
+            </a:pPr>
+            <a:r>
+              <a:rPr lang="en-US" sz="1200" dirty="0">
                 <a:solidFill>
                   <a:srgbClr val="1D2B2A"/>
                 </a:solidFill>
@@ -3441,32 +4517,34 @@
                 <a:ea typeface="Calibri" pitchFamily="34" charset="-122"/>
                 <a:cs typeface="Calibri" pitchFamily="34" charset="-120"/>
               </a:rPr>
-              <a:t>A named Bank operation</a:t>
-            </a:r>
-            <a:endParaRPr lang="en-US" sz="1100" dirty="0"/>
-          </a:p>
-        </p:txBody>
-      </p:sp>
-      <p:sp>
-        <p:nvSpPr>
-          <p:cNvPr id="16" name="Shape 13"/>
+              <a:t>BillPayment is a CustomerPayment: same mandates, restrictions, dual control</a:t>
+            </a:r>
+            <a:endParaRPr lang="en-US" sz="1200" dirty="0"/>
+          </a:p>
+        </p:txBody>
+      </p:sp>
+      <p:sp>
+        <p:nvSpPr>
+          <p:cNvPr id="16" name="Shape 14"/>
           <p:cNvSpPr/>
           <p:nvPr/>
         </p:nvSpPr>
         <p:spPr>
           <a:xfrm>
-            <a:off x="3931920" y="3383280"/>
-            <a:ext cx="640080" cy="329184"/>
-          </a:xfrm>
-          <a:prstGeom prst="flowChartMagneticDisk">
-            <a:avLst/>
+            <a:off x="3246120" y="3063240"/>
+            <a:ext cx="2606040" cy="1600200"/>
+          </a:xfrm>
+          <a:prstGeom prst="roundRect">
+            <a:avLst>
+              <a:gd name="adj" fmla="val 4571"/>
+            </a:avLst>
           </a:prstGeom>
           <a:solidFill>
             <a:srgbClr val="E8F0EE"/>
           </a:solidFill>
           <a:ln w="12700">
             <a:solidFill>
-              <a:srgbClr val="0B4F4A"/>
+              <a:srgbClr val="E8F0EE"/>
             </a:solidFill>
             <a:prstDash val="solid"/>
           </a:ln>
@@ -3474,14 +4552,14 @@
       </p:sp>
       <p:sp>
         <p:nvSpPr>
-          <p:cNvPr id="17" name="Text 14"/>
-          <p:cNvSpPr txBox="1"/>
-          <p:nvPr/>
-        </p:nvSpPr>
-        <p:spPr>
-          <a:xfrm>
-            <a:off x="4663440" y="3383280"/>
-            <a:ext cx="1874520" cy="329184"/>
+          <p:cNvPr id="17" name="Text 15"/>
+          <p:cNvSpPr txBox="1"/>
+          <p:nvPr/>
+        </p:nvSpPr>
+        <p:spPr>
+          <a:xfrm>
+            <a:off x="3383280" y="3172968"/>
+            <a:ext cx="2331720" cy="502920"/>
           </a:xfrm>
           <a:prstGeom prst="rect">
             <a:avLst/>
@@ -3497,7 +4575,46 @@
               <a:buNone/>
             </a:pPr>
             <a:r>
-              <a:rPr lang="en-US" sz="1100" dirty="0">
+              <a:rPr lang="en-US" sz="1400" b="1" dirty="0">
+                <a:solidFill>
+                  <a:srgbClr val="0B4F4A"/>
+                </a:solidFill>
+                <a:latin typeface="Cambria" pitchFamily="34" charset="0"/>
+                <a:ea typeface="Cambria" pitchFamily="34" charset="-122"/>
+                <a:cs typeface="Cambria" pitchFamily="34" charset="-120"/>
+              </a:rPr>
+              <a:t>Collections staff</a:t>
+            </a:r>
+            <a:endParaRPr lang="en-US" sz="1400" dirty="0"/>
+          </a:p>
+        </p:txBody>
+      </p:sp>
+      <p:sp>
+        <p:nvSpPr>
+          <p:cNvPr id="18" name="Text 16"/>
+          <p:cNvSpPr txBox="1"/>
+          <p:nvPr/>
+        </p:nvSpPr>
+        <p:spPr>
+          <a:xfrm>
+            <a:off x="3383280" y="3703320"/>
+            <a:ext cx="2331720" cy="868680"/>
+          </a:xfrm>
+          <a:prstGeom prst="rect">
+            <a:avLst/>
+          </a:prstGeom>
+          <a:noFill/>
+          <a:ln/>
+        </p:spPr>
+        <p:txBody>
+          <a:bodyPr wrap="square" lIns="0" tIns="0" rIns="0" bIns="0" rtlCol="0" anchor="t"/>
+          <a:lstStyle/>
+          <a:p>
+            <a:pPr indent="0" marL="0">
+              <a:buNone/>
+            </a:pPr>
+            <a:r>
+              <a:rPr lang="en-US" sz="1200" dirty="0">
                 <a:solidFill>
                   <a:srgbClr val="1D2B2A"/>
                 </a:solidFill>
@@ -3505,22 +4622,88 @@
                 <a:ea typeface="Calibri" pitchFamily="34" charset="-122"/>
                 <a:cs typeface="Calibri" pitchFamily="34" charset="-120"/>
               </a:rPr>
-              <a:t>Ledger / audit log</a:t>
-            </a:r>
-            <a:endParaRPr lang="en-US" sz="1100" dirty="0"/>
-          </a:p>
-        </p:txBody>
-      </p:sp>
-      <p:sp>
-        <p:nvSpPr>
-          <p:cNvPr id="18" name="Text 15"/>
-          <p:cNvSpPr txBox="1"/>
-          <p:nvPr/>
-        </p:nvSpPr>
-        <p:spPr>
-          <a:xfrm>
-            <a:off x="6720840" y="1234440"/>
-            <a:ext cx="1965960" cy="2560320"/>
+              <a:t>Collections officer works the case; promise to pay marked kept or broken</a:t>
+            </a:r>
+            <a:endParaRPr lang="en-US" sz="1200" dirty="0"/>
+          </a:p>
+        </p:txBody>
+      </p:sp>
+      <p:sp>
+        <p:nvSpPr>
+          <p:cNvPr id="19" name="Shape 17"/>
+          <p:cNvSpPr/>
+          <p:nvPr/>
+        </p:nvSpPr>
+        <p:spPr>
+          <a:xfrm>
+            <a:off x="6035040" y="3063240"/>
+            <a:ext cx="2606040" cy="1600200"/>
+          </a:xfrm>
+          <a:prstGeom prst="roundRect">
+            <a:avLst>
+              <a:gd name="adj" fmla="val 4571"/>
+            </a:avLst>
+          </a:prstGeom>
+          <a:solidFill>
+            <a:srgbClr val="E8F0EE"/>
+          </a:solidFill>
+          <a:ln w="12700">
+            <a:solidFill>
+              <a:srgbClr val="E8F0EE"/>
+            </a:solidFill>
+            <a:prstDash val="solid"/>
+          </a:ln>
+        </p:spPr>
+      </p:sp>
+      <p:sp>
+        <p:nvSpPr>
+          <p:cNvPr id="20" name="Text 18"/>
+          <p:cNvSpPr txBox="1"/>
+          <p:nvPr/>
+        </p:nvSpPr>
+        <p:spPr>
+          <a:xfrm>
+            <a:off x="6172200" y="3172968"/>
+            <a:ext cx="2331720" cy="502920"/>
+          </a:xfrm>
+          <a:prstGeom prst="rect">
+            <a:avLst/>
+          </a:prstGeom>
+          <a:noFill/>
+          <a:ln/>
+        </p:spPr>
+        <p:txBody>
+          <a:bodyPr wrap="square" lIns="0" tIns="0" rIns="0" bIns="0" rtlCol="0" anchor="ctr"/>
+          <a:lstStyle/>
+          <a:p>
+            <a:pPr indent="0" marL="0">
+              <a:buNone/>
+            </a:pPr>
+            <a:r>
+              <a:rPr lang="en-US" sz="1400" b="1" dirty="0">
+                <a:solidFill>
+                  <a:srgbClr val="0B4F4A"/>
+                </a:solidFill>
+                <a:latin typeface="Cambria" pitchFamily="34" charset="0"/>
+                <a:ea typeface="Cambria" pitchFamily="34" charset="-122"/>
+                <a:cs typeface="Cambria" pitchFamily="34" charset="-120"/>
+              </a:rPr>
+              <a:t>Auditors &amp; retention</a:t>
+            </a:r>
+            <a:endParaRPr lang="en-US" sz="1400" dirty="0"/>
+          </a:p>
+        </p:txBody>
+      </p:sp>
+      <p:sp>
+        <p:nvSpPr>
+          <p:cNvPr id="21" name="Text 19"/>
+          <p:cNvSpPr txBox="1"/>
+          <p:nvPr/>
+        </p:nvSpPr>
+        <p:spPr>
+          <a:xfrm>
+            <a:off x="6172200" y="3703320"/>
+            <a:ext cx="2331720" cy="868680"/>
           </a:xfrm>
           <a:prstGeom prst="rect">
             <a:avLst/>
@@ -3533,9 +4716,6 @@
           <a:lstStyle/>
           <a:p>
             <a:pPr indent="0" marL="0">
-              <a:spcAft>
-                <a:spcPts val="600"/>
-              </a:spcAft>
               <a:buNone/>
             </a:pPr>
             <a:r>
@@ -3547,148 +4727,9 @@
                 <a:ea typeface="Calibri" pitchFamily="34" charset="-122"/>
                 <a:cs typeface="Calibri" pitchFamily="34" charset="-120"/>
               </a:rPr>
-              <a:t>1. Program overview</a:t>
+              <a:t>Approvals audit with role at the time; archive, never delete (10-year retention)</a:t>
             </a:r>
             <a:endParaRPr lang="en-US" sz="1200" dirty="0"/>
-          </a:p>
-          <a:p>
-            <a:pPr indent="0" marL="0">
-              <a:spcAft>
-                <a:spcPts val="600"/>
-              </a:spcAft>
-              <a:buNone/>
-            </a:pPr>
-            <a:r>
-              <a:rPr lang="en-US" sz="1200" dirty="0">
-                <a:solidFill>
-                  <a:srgbClr val="1D2B2A"/>
-                </a:solidFill>
-                <a:latin typeface="Calibri" pitchFamily="34" charset="0"/>
-                <a:ea typeface="Calibri" pitchFamily="34" charset="-122"/>
-                <a:cs typeface="Calibri" pitchFamily="34" charset="-120"/>
-              </a:rPr>
-              <a:t>2. Onboarding</a:t>
-            </a:r>
-            <a:endParaRPr lang="en-US" sz="1200" dirty="0"/>
-          </a:p>
-          <a:p>
-            <a:pPr indent="0" marL="0">
-              <a:spcAft>
-                <a:spcPts val="600"/>
-              </a:spcAft>
-              <a:buNone/>
-            </a:pPr>
-            <a:r>
-              <a:rPr lang="en-US" sz="1200" dirty="0">
-                <a:solidFill>
-                  <a:srgbClr val="1D2B2A"/>
-                </a:solidFill>
-                <a:latin typeface="Calibri" pitchFamily="34" charset="0"/>
-                <a:ea typeface="Calibri" pitchFamily="34" charset="-122"/>
-                <a:cs typeface="Calibri" pitchFamily="34" charset="-120"/>
-              </a:rPr>
-              <a:t>3. Transfer payment</a:t>
-            </a:r>
-            <a:endParaRPr lang="en-US" sz="1200" dirty="0"/>
-          </a:p>
-          <a:p>
-            <a:pPr indent="0" marL="0">
-              <a:spcAft>
-                <a:spcPts val="600"/>
-              </a:spcAft>
-              <a:buNone/>
-            </a:pPr>
-            <a:r>
-              <a:rPr lang="en-US" sz="1200" dirty="0">
-                <a:solidFill>
-                  <a:srgbClr val="1D2B2A"/>
-                </a:solidFill>
-                <a:latin typeface="Calibri" pitchFamily="34" charset="0"/>
-                <a:ea typeface="Calibri" pitchFamily="34" charset="-122"/>
-                <a:cs typeface="Calibri" pitchFamily="34" charset="-120"/>
-              </a:rPr>
-              <a:t>4. Card purchase</a:t>
-            </a:r>
-            <a:endParaRPr lang="en-US" sz="1200" dirty="0"/>
-          </a:p>
-          <a:p>
-            <a:pPr indent="0" marL="0">
-              <a:spcAft>
-                <a:spcPts val="600"/>
-              </a:spcAft>
-              <a:buNone/>
-            </a:pPr>
-            <a:r>
-              <a:rPr lang="en-US" sz="1200" dirty="0">
-                <a:solidFill>
-                  <a:srgbClr val="1D2B2A"/>
-                </a:solidFill>
-                <a:latin typeface="Calibri" pitchFamily="34" charset="0"/>
-                <a:ea typeface="Calibri" pitchFamily="34" charset="-122"/>
-                <a:cs typeface="Calibri" pitchFamily="34" charset="-120"/>
-              </a:rPr>
-              <a:t>5. Financing lifecycle</a:t>
-            </a:r>
-            <a:endParaRPr lang="en-US" sz="1200" dirty="0"/>
-          </a:p>
-          <a:p>
-            <a:pPr indent="0" marL="0">
-              <a:spcAft>
-                <a:spcPts val="600"/>
-              </a:spcAft>
-              <a:buNone/>
-            </a:pPr>
-            <a:r>
-              <a:rPr lang="en-US" sz="1200" dirty="0">
-                <a:solidFill>
-                  <a:srgbClr val="1D2B2A"/>
-                </a:solidFill>
-                <a:latin typeface="Calibri" pitchFamily="34" charset="0"/>
-                <a:ea typeface="Calibri" pitchFamily="34" charset="-122"/>
-                <a:cs typeface="Calibri" pitchFamily="34" charset="-120"/>
-              </a:rPr>
-              <a:t>6. Desktop console</a:t>
-            </a:r>
-            <a:endParaRPr lang="en-US" sz="1200" dirty="0"/>
-          </a:p>
-        </p:txBody>
-      </p:sp>
-      <p:sp>
-        <p:nvSpPr>
-          <p:cNvPr id="19" name="Text 16"/>
-          <p:cNvSpPr txBox="1"/>
-          <p:nvPr/>
-        </p:nvSpPr>
-        <p:spPr>
-          <a:xfrm>
-            <a:off x="3931920" y="4069080"/>
-            <a:ext cx="4754880" cy="457200"/>
-          </a:xfrm>
-          <a:prstGeom prst="rect">
-            <a:avLst/>
-          </a:prstGeom>
-          <a:noFill/>
-          <a:ln/>
-        </p:spPr>
-        <p:txBody>
-          <a:bodyPr wrap="square" lIns="0" tIns="0" rIns="0" bIns="0" rtlCol="0" anchor="ctr"/>
-          <a:lstStyle/>
-          <a:p>
-            <a:pPr indent="0" marL="0">
-              <a:buNone/>
-            </a:pPr>
-            <a:r>
-              <a:rPr lang="en-US" sz="1100" i="1" dirty="0">
-                <a:solidFill>
-                  <a:srgbClr val="5B6B69"/>
-                </a:solidFill>
-                <a:latin typeface="Calibri" pitchFamily="34" charset="0"/>
-                <a:ea typeface="Calibri" pitchFamily="34" charset="-122"/>
-                <a:cs typeface="Calibri" pitchFamily="34" charset="-120"/>
-              </a:rPr>
-              <a:t>Report section 4.1; also on the GUI's Diagrams screen</a:t>
-            </a:r>
-            <a:endParaRPr lang="en-US" sz="1100" dirty="0"/>
           </a:p>
         </p:txBody>
       </p:sp>
@@ -3751,7 +4792,7 @@
               <a:buNone/>
             </a:pPr>
             <a:r>
-              <a:rPr lang="en-US" sz="2800" b="1" dirty="0">
+              <a:rPr lang="en-US" sz="2200" b="1" dirty="0">
                 <a:solidFill>
                   <a:srgbClr val="0B4F4A"/>
                 </a:solidFill>
@@ -3759,9 +4800,9 @@
                 <a:ea typeface="Cambria" pitchFamily="34" charset="-122"/>
                 <a:cs typeface="Cambria" pitchFamily="34" charset="-120"/>
               </a:rPr>
-              <a:t>Live demo: the desktop console</a:t>
-            </a:r>
-            <a:endParaRPr lang="en-US" sz="2800" dirty="0"/>
+              <a:t>Behaviour: six flowcharts traced from the code</a:t>
+            </a:r>
+            <a:endParaRPr lang="en-US" sz="2200" dirty="0"/>
           </a:p>
         </p:txBody>
       </p:sp>
@@ -3798,7 +4839,7 @@
                 <a:ea typeface="Calibri" pitchFamily="34" charset="-122"/>
                 <a:cs typeface="Calibri" pitchFamily="34" charset="-120"/>
               </a:rPr>
-              <a:t>banking_gui.py - pure Python (Tkinter); every button calls one Bank operation</a:t>
+              <a:t>Standard symbols (ISO 5807); the diamonds are in the order the code checks the rules</a:t>
             </a:r>
             <a:endParaRPr lang="en-US" sz="1200" dirty="0"/>
           </a:p>
@@ -3813,11 +4854,11 @@
         <p:spPr>
           <a:xfrm>
             <a:off x="457200" y="1188720"/>
-            <a:ext cx="5577840" cy="3611880"/>
+            <a:ext cx="3200400" cy="3611880"/>
           </a:xfrm>
           <a:prstGeom prst="roundRect">
             <a:avLst>
-              <a:gd name="adj" fmla="val 2025"/>
+              <a:gd name="adj" fmla="val 2286"/>
             </a:avLst>
           </a:prstGeom>
           <a:solidFill>
@@ -3833,7 +4874,7 @@
       </p:sp>
       <p:pic>
         <p:nvPicPr>
-          <p:cNvPr id="5" name="Image 0" descr="/home/user/commercial-banking/docs/screenshots/gui_01_overview.png">    </p:cNvPr>
+          <p:cNvPr id="5" name="Image 0" descr="/home/user/commercial-banking/docs/flowchart_3_transfer.png">    </p:cNvPr>
           <p:cNvPicPr>
             <a:picLocks noChangeAspect="1"/>
           </p:cNvPicPr>
@@ -3847,8 +4888,8 @@
         </p:blipFill>
         <p:spPr>
           <a:xfrm>
-            <a:off x="548640" y="1280160"/>
-            <a:ext cx="5394960" cy="3291840"/>
+            <a:off x="782195" y="1261872"/>
+            <a:ext cx="2550410" cy="3474720"/>
           </a:xfrm>
           <a:prstGeom prst="rect">
             <a:avLst/>
@@ -3857,31 +4898,414 @@
       </p:pic>
       <p:sp>
         <p:nvSpPr>
-          <p:cNvPr id="6" name="Text 3"/>
-          <p:cNvSpPr txBox="1"/>
-          <p:nvPr/>
-        </p:nvSpPr>
-        <p:spPr>
-          <a:xfrm>
-            <a:off x="6263640" y="1234440"/>
-            <a:ext cx="2468880" cy="3566160"/>
-          </a:xfrm>
-          <a:prstGeom prst="rect">
-            <a:avLst/>
-          </a:prstGeom>
-          <a:noFill/>
-          <a:ln/>
-        </p:spPr>
-        <p:txBody>
-          <a:bodyPr wrap="square" lIns="635" tIns="635" rIns="635" bIns="635" rtlCol="0" anchor="t"/>
-          <a:lstStyle/>
-          <a:p>
-            <a:pPr marL="342900" indent="-342900">
+          <p:cNvPr id="6" name="Shape 3"/>
+          <p:cNvSpPr/>
+          <p:nvPr/>
+        </p:nvSpPr>
+        <p:spPr>
+          <a:xfrm>
+            <a:off x="3931920" y="1234440"/>
+            <a:ext cx="640080" cy="329184"/>
+          </a:xfrm>
+          <a:prstGeom prst="flowChartTerminator">
+            <a:avLst/>
+          </a:prstGeom>
+          <a:solidFill>
+            <a:srgbClr val="E8F0EE"/>
+          </a:solidFill>
+          <a:ln w="12700">
+            <a:solidFill>
+              <a:srgbClr val="0B4F4A"/>
+            </a:solidFill>
+            <a:prstDash val="solid"/>
+          </a:ln>
+        </p:spPr>
+      </p:sp>
+      <p:sp>
+        <p:nvSpPr>
+          <p:cNvPr id="7" name="Text 4"/>
+          <p:cNvSpPr txBox="1"/>
+          <p:nvPr/>
+        </p:nvSpPr>
+        <p:spPr>
+          <a:xfrm>
+            <a:off x="4663440" y="1234440"/>
+            <a:ext cx="1874520" cy="329184"/>
+          </a:xfrm>
+          <a:prstGeom prst="rect">
+            <a:avLst/>
+          </a:prstGeom>
+          <a:noFill/>
+          <a:ln/>
+        </p:spPr>
+        <p:txBody>
+          <a:bodyPr wrap="square" lIns="0" tIns="0" rIns="0" bIns="0" rtlCol="0" anchor="ctr"/>
+          <a:lstStyle/>
+          <a:p>
+            <a:pPr indent="0" marL="0">
+              <a:buNone/>
+            </a:pPr>
+            <a:r>
+              <a:rPr lang="en-US" sz="1100" dirty="0">
+                <a:solidFill>
+                  <a:srgbClr val="1D2B2A"/>
+                </a:solidFill>
+                <a:latin typeface="Calibri" pitchFamily="34" charset="0"/>
+                <a:ea typeface="Calibri" pitchFamily="34" charset="-122"/>
+                <a:cs typeface="Calibri" pitchFamily="34" charset="-120"/>
+              </a:rPr>
+              <a:t>Start / end; red = refused</a:t>
+            </a:r>
+            <a:endParaRPr lang="en-US" sz="1100" dirty="0"/>
+          </a:p>
+        </p:txBody>
+      </p:sp>
+      <p:sp>
+        <p:nvSpPr>
+          <p:cNvPr id="8" name="Shape 5"/>
+          <p:cNvSpPr/>
+          <p:nvPr/>
+        </p:nvSpPr>
+        <p:spPr>
+          <a:xfrm>
+            <a:off x="3931920" y="1664208"/>
+            <a:ext cx="640080" cy="329184"/>
+          </a:xfrm>
+          <a:prstGeom prst="flowChartProcess">
+            <a:avLst/>
+          </a:prstGeom>
+          <a:solidFill>
+            <a:srgbClr val="E8F0EE"/>
+          </a:solidFill>
+          <a:ln w="12700">
+            <a:solidFill>
+              <a:srgbClr val="0B4F4A"/>
+            </a:solidFill>
+            <a:prstDash val="solid"/>
+          </a:ln>
+        </p:spPr>
+      </p:sp>
+      <p:sp>
+        <p:nvSpPr>
+          <p:cNvPr id="9" name="Text 6"/>
+          <p:cNvSpPr txBox="1"/>
+          <p:nvPr/>
+        </p:nvSpPr>
+        <p:spPr>
+          <a:xfrm>
+            <a:off x="4663440" y="1664208"/>
+            <a:ext cx="1874520" cy="329184"/>
+          </a:xfrm>
+          <a:prstGeom prst="rect">
+            <a:avLst/>
+          </a:prstGeom>
+          <a:noFill/>
+          <a:ln/>
+        </p:spPr>
+        <p:txBody>
+          <a:bodyPr wrap="square" lIns="0" tIns="0" rIns="0" bIns="0" rtlCol="0" anchor="ctr"/>
+          <a:lstStyle/>
+          <a:p>
+            <a:pPr indent="0" marL="0">
+              <a:buNone/>
+            </a:pPr>
+            <a:r>
+              <a:rPr lang="en-US" sz="1100" dirty="0">
+                <a:solidFill>
+                  <a:srgbClr val="1D2B2A"/>
+                </a:solidFill>
+                <a:latin typeface="Calibri" pitchFamily="34" charset="0"/>
+                <a:ea typeface="Calibri" pitchFamily="34" charset="-122"/>
+                <a:cs typeface="Calibri" pitchFamily="34" charset="-120"/>
+              </a:rPr>
+              <a:t>Process: one step</a:t>
+            </a:r>
+            <a:endParaRPr lang="en-US" sz="1100" dirty="0"/>
+          </a:p>
+        </p:txBody>
+      </p:sp>
+      <p:sp>
+        <p:nvSpPr>
+          <p:cNvPr id="10" name="Shape 7"/>
+          <p:cNvSpPr/>
+          <p:nvPr/>
+        </p:nvSpPr>
+        <p:spPr>
+          <a:xfrm>
+            <a:off x="3931920" y="2093976"/>
+            <a:ext cx="640080" cy="329184"/>
+          </a:xfrm>
+          <a:prstGeom prst="flowChartDecision">
+            <a:avLst/>
+          </a:prstGeom>
+          <a:solidFill>
+            <a:srgbClr val="FDF1D6"/>
+          </a:solidFill>
+          <a:ln w="12700">
+            <a:solidFill>
+              <a:srgbClr val="0B4F4A"/>
+            </a:solidFill>
+            <a:prstDash val="solid"/>
+          </a:ln>
+        </p:spPr>
+      </p:sp>
+      <p:sp>
+        <p:nvSpPr>
+          <p:cNvPr id="11" name="Text 8"/>
+          <p:cNvSpPr txBox="1"/>
+          <p:nvPr/>
+        </p:nvSpPr>
+        <p:spPr>
+          <a:xfrm>
+            <a:off x="4663440" y="2093976"/>
+            <a:ext cx="1874520" cy="329184"/>
+          </a:xfrm>
+          <a:prstGeom prst="rect">
+            <a:avLst/>
+          </a:prstGeom>
+          <a:noFill/>
+          <a:ln/>
+        </p:spPr>
+        <p:txBody>
+          <a:bodyPr wrap="square" lIns="0" tIns="0" rIns="0" bIns="0" rtlCol="0" anchor="ctr"/>
+          <a:lstStyle/>
+          <a:p>
+            <a:pPr indent="0" marL="0">
+              <a:buNone/>
+            </a:pPr>
+            <a:r>
+              <a:rPr lang="en-US" sz="1100" dirty="0">
+                <a:solidFill>
+                  <a:srgbClr val="1D2B2A"/>
+                </a:solidFill>
+                <a:latin typeface="Calibri" pitchFamily="34" charset="0"/>
+                <a:ea typeface="Calibri" pitchFamily="34" charset="-122"/>
+                <a:cs typeface="Calibri" pitchFamily="34" charset="-120"/>
+              </a:rPr>
+              <a:t>Decision: Yes / No</a:t>
+            </a:r>
+            <a:endParaRPr lang="en-US" sz="1100" dirty="0"/>
+          </a:p>
+        </p:txBody>
+      </p:sp>
+      <p:sp>
+        <p:nvSpPr>
+          <p:cNvPr id="12" name="Shape 9"/>
+          <p:cNvSpPr/>
+          <p:nvPr/>
+        </p:nvSpPr>
+        <p:spPr>
+          <a:xfrm>
+            <a:off x="3931920" y="2523744"/>
+            <a:ext cx="640080" cy="329184"/>
+          </a:xfrm>
+          <a:prstGeom prst="flowChartInputOutput">
+            <a:avLst/>
+          </a:prstGeom>
+          <a:solidFill>
+            <a:srgbClr val="E8F0EE"/>
+          </a:solidFill>
+          <a:ln w="12700">
+            <a:solidFill>
+              <a:srgbClr val="0B4F4A"/>
+            </a:solidFill>
+            <a:prstDash val="solid"/>
+          </a:ln>
+        </p:spPr>
+      </p:sp>
+      <p:sp>
+        <p:nvSpPr>
+          <p:cNvPr id="13" name="Text 10"/>
+          <p:cNvSpPr txBox="1"/>
+          <p:nvPr/>
+        </p:nvSpPr>
+        <p:spPr>
+          <a:xfrm>
+            <a:off x="4663440" y="2523744"/>
+            <a:ext cx="1874520" cy="329184"/>
+          </a:xfrm>
+          <a:prstGeom prst="rect">
+            <a:avLst/>
+          </a:prstGeom>
+          <a:noFill/>
+          <a:ln/>
+        </p:spPr>
+        <p:txBody>
+          <a:bodyPr wrap="square" lIns="0" tIns="0" rIns="0" bIns="0" rtlCol="0" anchor="ctr"/>
+          <a:lstStyle/>
+          <a:p>
+            <a:pPr indent="0" marL="0">
+              <a:buNone/>
+            </a:pPr>
+            <a:r>
+              <a:rPr lang="en-US" sz="1100" dirty="0">
+                <a:solidFill>
+                  <a:srgbClr val="1D2B2A"/>
+                </a:solidFill>
+                <a:latin typeface="Calibri" pitchFamily="34" charset="0"/>
+                <a:ea typeface="Calibri" pitchFamily="34" charset="-122"/>
+                <a:cs typeface="Calibri" pitchFamily="34" charset="-120"/>
+              </a:rPr>
+              <a:t>Input / output</a:t>
+            </a:r>
+            <a:endParaRPr lang="en-US" sz="1100" dirty="0"/>
+          </a:p>
+        </p:txBody>
+      </p:sp>
+      <p:sp>
+        <p:nvSpPr>
+          <p:cNvPr id="14" name="Shape 11"/>
+          <p:cNvSpPr/>
+          <p:nvPr/>
+        </p:nvSpPr>
+        <p:spPr>
+          <a:xfrm>
+            <a:off x="3931920" y="2953512"/>
+            <a:ext cx="640080" cy="329184"/>
+          </a:xfrm>
+          <a:prstGeom prst="flowChartPredefinedProcess">
+            <a:avLst/>
+          </a:prstGeom>
+          <a:solidFill>
+            <a:srgbClr val="E8F0EE"/>
+          </a:solidFill>
+          <a:ln w="12700">
+            <a:solidFill>
+              <a:srgbClr val="0B4F4A"/>
+            </a:solidFill>
+            <a:prstDash val="solid"/>
+          </a:ln>
+        </p:spPr>
+      </p:sp>
+      <p:sp>
+        <p:nvSpPr>
+          <p:cNvPr id="15" name="Text 12"/>
+          <p:cNvSpPr txBox="1"/>
+          <p:nvPr/>
+        </p:nvSpPr>
+        <p:spPr>
+          <a:xfrm>
+            <a:off x="4663440" y="2953512"/>
+            <a:ext cx="1874520" cy="329184"/>
+          </a:xfrm>
+          <a:prstGeom prst="rect">
+            <a:avLst/>
+          </a:prstGeom>
+          <a:noFill/>
+          <a:ln/>
+        </p:spPr>
+        <p:txBody>
+          <a:bodyPr wrap="square" lIns="0" tIns="0" rIns="0" bIns="0" rtlCol="0" anchor="ctr"/>
+          <a:lstStyle/>
+          <a:p>
+            <a:pPr indent="0" marL="0">
+              <a:buNone/>
+            </a:pPr>
+            <a:r>
+              <a:rPr lang="en-US" sz="1100" dirty="0">
+                <a:solidFill>
+                  <a:srgbClr val="1D2B2A"/>
+                </a:solidFill>
+                <a:latin typeface="Calibri" pitchFamily="34" charset="0"/>
+                <a:ea typeface="Calibri" pitchFamily="34" charset="-122"/>
+                <a:cs typeface="Calibri" pitchFamily="34" charset="-120"/>
+              </a:rPr>
+              <a:t>A named Bank operation</a:t>
+            </a:r>
+            <a:endParaRPr lang="en-US" sz="1100" dirty="0"/>
+          </a:p>
+        </p:txBody>
+      </p:sp>
+      <p:sp>
+        <p:nvSpPr>
+          <p:cNvPr id="16" name="Shape 13"/>
+          <p:cNvSpPr/>
+          <p:nvPr/>
+        </p:nvSpPr>
+        <p:spPr>
+          <a:xfrm>
+            <a:off x="3931920" y="3383280"/>
+            <a:ext cx="640080" cy="329184"/>
+          </a:xfrm>
+          <a:prstGeom prst="flowChartMagneticDisk">
+            <a:avLst/>
+          </a:prstGeom>
+          <a:solidFill>
+            <a:srgbClr val="E8F0EE"/>
+          </a:solidFill>
+          <a:ln w="12700">
+            <a:solidFill>
+              <a:srgbClr val="0B4F4A"/>
+            </a:solidFill>
+            <a:prstDash val="solid"/>
+          </a:ln>
+        </p:spPr>
+      </p:sp>
+      <p:sp>
+        <p:nvSpPr>
+          <p:cNvPr id="17" name="Text 14"/>
+          <p:cNvSpPr txBox="1"/>
+          <p:nvPr/>
+        </p:nvSpPr>
+        <p:spPr>
+          <a:xfrm>
+            <a:off x="4663440" y="3383280"/>
+            <a:ext cx="1874520" cy="329184"/>
+          </a:xfrm>
+          <a:prstGeom prst="rect">
+            <a:avLst/>
+          </a:prstGeom>
+          <a:noFill/>
+          <a:ln/>
+        </p:spPr>
+        <p:txBody>
+          <a:bodyPr wrap="square" lIns="0" tIns="0" rIns="0" bIns="0" rtlCol="0" anchor="ctr"/>
+          <a:lstStyle/>
+          <a:p>
+            <a:pPr indent="0" marL="0">
+              <a:buNone/>
+            </a:pPr>
+            <a:r>
+              <a:rPr lang="en-US" sz="1100" dirty="0">
+                <a:solidFill>
+                  <a:srgbClr val="1D2B2A"/>
+                </a:solidFill>
+                <a:latin typeface="Calibri" pitchFamily="34" charset="0"/>
+                <a:ea typeface="Calibri" pitchFamily="34" charset="-122"/>
+                <a:cs typeface="Calibri" pitchFamily="34" charset="-120"/>
+              </a:rPr>
+              <a:t>Ledger / audit log</a:t>
+            </a:r>
+            <a:endParaRPr lang="en-US" sz="1100" dirty="0"/>
+          </a:p>
+        </p:txBody>
+      </p:sp>
+      <p:sp>
+        <p:nvSpPr>
+          <p:cNvPr id="18" name="Text 15"/>
+          <p:cNvSpPr txBox="1"/>
+          <p:nvPr/>
+        </p:nvSpPr>
+        <p:spPr>
+          <a:xfrm>
+            <a:off x="6720840" y="1234440"/>
+            <a:ext cx="1965960" cy="2560320"/>
+          </a:xfrm>
+          <a:prstGeom prst="rect">
+            <a:avLst/>
+          </a:prstGeom>
+          <a:noFill/>
+          <a:ln/>
+        </p:spPr>
+        <p:txBody>
+          <a:bodyPr wrap="square" lIns="0" tIns="0" rIns="0" bIns="0" rtlCol="0" anchor="t"/>
+          <a:lstStyle/>
+          <a:p>
+            <a:pPr indent="0" marL="0">
               <a:spcAft>
                 <a:spcPts val="600"/>
               </a:spcAft>
-              <a:buSzPct val="100000"/>
-              <a:buChar char="•"/>
+              <a:buNone/>
             </a:pPr>
             <a:r>
               <a:rPr lang="en-US" sz="1200" dirty="0">
@@ -3892,17 +5316,16 @@
                 <a:ea typeface="Calibri" pitchFamily="34" charset="-122"/>
                 <a:cs typeface="Calibri" pitchFamily="34" charset="-120"/>
               </a:rPr>
-              <a:t>Guided rule checks: 14 real operations, each showing the model's own refusal</a:t>
+              <a:t>1. Program overview</a:t>
             </a:r>
             <a:endParaRPr lang="en-US" sz="1200" dirty="0"/>
           </a:p>
           <a:p>
-            <a:pPr marL="342900" indent="-342900">
+            <a:pPr indent="0" marL="0">
               <a:spcAft>
                 <a:spcPts val="600"/>
               </a:spcAft>
-              <a:buSzPct val="100000"/>
-              <a:buChar char="•"/>
+              <a:buNone/>
             </a:pPr>
             <a:r>
               <a:rPr lang="en-US" sz="1200" dirty="0">
@@ -3913,17 +5336,16 @@
                 <a:ea typeface="Calibri" pitchFamily="34" charset="-122"/>
                 <a:cs typeface="Calibri" pitchFamily="34" charset="-120"/>
               </a:rPr>
-              <a:t>30 forms, including full customer onboarding</a:t>
+              <a:t>2. Onboarding</a:t>
             </a:r>
             <a:endParaRPr lang="en-US" sz="1200" dirty="0"/>
           </a:p>
           <a:p>
-            <a:pPr marL="342900" indent="-342900">
+            <a:pPr indent="0" marL="0">
               <a:spcAft>
                 <a:spcPts val="600"/>
               </a:spcAft>
-              <a:buSzPct val="100000"/>
-              <a:buChar char="•"/>
+              <a:buNone/>
             </a:pPr>
             <a:r>
               <a:rPr lang="en-US" sz="1200" dirty="0">
@@ -3934,17 +5356,16 @@
                 <a:ea typeface="Calibri" pitchFamily="34" charset="-122"/>
                 <a:cs typeface="Calibri" pitchFamily="34" charset="-120"/>
               </a:rPr>
-              <a:t>Customer timeline and time machine for any past date</a:t>
+              <a:t>3. Transfer payment</a:t>
             </a:r>
             <a:endParaRPr lang="en-US" sz="1200" dirty="0"/>
           </a:p>
           <a:p>
-            <a:pPr marL="342900" indent="-342900">
+            <a:pPr indent="0" marL="0">
               <a:spcAft>
                 <a:spcPts val="600"/>
               </a:spcAft>
-              <a:buSzPct val="100000"/>
-              <a:buChar char="•"/>
+              <a:buNone/>
             </a:pPr>
             <a:r>
               <a:rPr lang="en-US" sz="1200" dirty="0">
@@ -3955,17 +5376,16 @@
                 <a:ea typeface="Calibri" pitchFamily="34" charset="-122"/>
                 <a:cs typeface="Calibri" pitchFamily="34" charset="-120"/>
               </a:rPr>
-              <a:t>Card chains, cases, audit log and a zero trial balance</a:t>
+              <a:t>4. Card purchase</a:t>
             </a:r>
             <a:endParaRPr lang="en-US" sz="1200" dirty="0"/>
           </a:p>
           <a:p>
-            <a:pPr marL="342900" indent="-342900">
+            <a:pPr indent="0" marL="0">
               <a:spcAft>
                 <a:spcPts val="600"/>
               </a:spcAft>
-              <a:buSzPct val="100000"/>
-              <a:buChar char="•"/>
+              <a:buNone/>
             </a:pPr>
             <a:r>
               <a:rPr lang="en-US" sz="1200" dirty="0">
@@ -3976,9 +5396,68 @@
                 <a:ea typeface="Calibri" pitchFamily="34" charset="-122"/>
                 <a:cs typeface="Calibri" pitchFamily="34" charset="-120"/>
               </a:rPr>
-              <a:t>GUI classes inherit too: Page -&gt; MasterDetailPage -&gt; CustomersPage</a:t>
+              <a:t>5. Financing lifecycle</a:t>
             </a:r>
             <a:endParaRPr lang="en-US" sz="1200" dirty="0"/>
+          </a:p>
+          <a:p>
+            <a:pPr indent="0" marL="0">
+              <a:spcAft>
+                <a:spcPts val="600"/>
+              </a:spcAft>
+              <a:buNone/>
+            </a:pPr>
+            <a:r>
+              <a:rPr lang="en-US" sz="1200" dirty="0">
+                <a:solidFill>
+                  <a:srgbClr val="1D2B2A"/>
+                </a:solidFill>
+                <a:latin typeface="Calibri" pitchFamily="34" charset="0"/>
+                <a:ea typeface="Calibri" pitchFamily="34" charset="-122"/>
+                <a:cs typeface="Calibri" pitchFamily="34" charset="-120"/>
+              </a:rPr>
+              <a:t>6. Desktop console</a:t>
+            </a:r>
+            <a:endParaRPr lang="en-US" sz="1200" dirty="0"/>
+          </a:p>
+        </p:txBody>
+      </p:sp>
+      <p:sp>
+        <p:nvSpPr>
+          <p:cNvPr id="19" name="Text 16"/>
+          <p:cNvSpPr txBox="1"/>
+          <p:nvPr/>
+        </p:nvSpPr>
+        <p:spPr>
+          <a:xfrm>
+            <a:off x="3931920" y="4069080"/>
+            <a:ext cx="4754880" cy="457200"/>
+          </a:xfrm>
+          <a:prstGeom prst="rect">
+            <a:avLst/>
+          </a:prstGeom>
+          <a:noFill/>
+          <a:ln/>
+        </p:spPr>
+        <p:txBody>
+          <a:bodyPr wrap="square" lIns="0" tIns="0" rIns="0" bIns="0" rtlCol="0" anchor="ctr"/>
+          <a:lstStyle/>
+          <a:p>
+            <a:pPr indent="0" marL="0">
+              <a:buNone/>
+            </a:pPr>
+            <a:r>
+              <a:rPr lang="en-US" sz="1100" i="1" dirty="0">
+                <a:solidFill>
+                  <a:srgbClr val="5B6B69"/>
+                </a:solidFill>
+                <a:latin typeface="Calibri" pitchFamily="34" charset="0"/>
+                <a:ea typeface="Calibri" pitchFamily="34" charset="-122"/>
+                <a:cs typeface="Calibri" pitchFamily="34" charset="-120"/>
+              </a:rPr>
+              <a:t>Report section 4.1; also on the GUI's Diagrams screen</a:t>
+            </a:r>
+            <a:endParaRPr lang="en-US" sz="1100" dirty="0"/>
           </a:p>
         </p:txBody>
       </p:sp>
@@ -4041,7 +5520,7 @@
               <a:buNone/>
             </a:pPr>
             <a:r>
-              <a:rPr lang="en-US" sz="2200" b="1" dirty="0">
+              <a:rPr lang="en-US" sz="2800" b="1" dirty="0">
                 <a:solidFill>
                   <a:srgbClr val="0B4F4A"/>
                 </a:solidFill>
@@ -4049,127 +5528,112 @@
                 <a:ea typeface="Cambria" pitchFamily="34" charset="-122"/>
                 <a:cs typeface="Cambria" pitchFamily="34" charset="-120"/>
               </a:rPr>
-              <a:t>Code review: 20 defects fixed, each with a test</a:t>
-            </a:r>
-            <a:endParaRPr lang="en-US" sz="2200" dirty="0"/>
-          </a:p>
-        </p:txBody>
-      </p:sp>
-      <p:sp>
-        <p:nvSpPr>
-          <p:cNvPr id="3" name="Shape 1"/>
+              <a:t>Live demo: the desktop console</a:t>
+            </a:r>
+            <a:endParaRPr lang="en-US" sz="2800" dirty="0"/>
+          </a:p>
+        </p:txBody>
+      </p:sp>
+      <p:sp>
+        <p:nvSpPr>
+          <p:cNvPr id="3" name="Text 1"/>
+          <p:cNvSpPr txBox="1"/>
+          <p:nvPr/>
+        </p:nvSpPr>
+        <p:spPr>
+          <a:xfrm>
+            <a:off x="457200" y="804672"/>
+            <a:ext cx="8229600" cy="320040"/>
+          </a:xfrm>
+          <a:prstGeom prst="rect">
+            <a:avLst/>
+          </a:prstGeom>
+          <a:noFill/>
+          <a:ln/>
+        </p:spPr>
+        <p:txBody>
+          <a:bodyPr wrap="square" lIns="0" tIns="0" rIns="0" bIns="0" rtlCol="0" anchor="ctr"/>
+          <a:lstStyle/>
+          <a:p>
+            <a:pPr indent="0" marL="0">
+              <a:buNone/>
+            </a:pPr>
+            <a:r>
+              <a:rPr lang="en-US" sz="1200" i="1" dirty="0">
+                <a:solidFill>
+                  <a:srgbClr val="5B6B69"/>
+                </a:solidFill>
+                <a:latin typeface="Calibri" pitchFamily="34" charset="0"/>
+                <a:ea typeface="Calibri" pitchFamily="34" charset="-122"/>
+                <a:cs typeface="Calibri" pitchFamily="34" charset="-120"/>
+              </a:rPr>
+              <a:t>banking_gui.py - pure Python (Tkinter); every button calls one Bank operation</a:t>
+            </a:r>
+            <a:endParaRPr lang="en-US" sz="1200" dirty="0"/>
+          </a:p>
+        </p:txBody>
+      </p:sp>
+      <p:sp>
+        <p:nvSpPr>
+          <p:cNvPr id="4" name="Shape 2"/>
           <p:cNvSpPr/>
           <p:nvPr/>
         </p:nvSpPr>
         <p:spPr>
           <a:xfrm>
-            <a:off x="457200" y="1097280"/>
-            <a:ext cx="2651760" cy="3566160"/>
+            <a:off x="457200" y="1188720"/>
+            <a:ext cx="5577840" cy="3611880"/>
           </a:xfrm>
           <a:prstGeom prst="roundRect">
             <a:avLst>
-              <a:gd name="adj" fmla="val 2759"/>
+              <a:gd name="adj" fmla="val 2025"/>
             </a:avLst>
           </a:prstGeom>
           <a:solidFill>
-            <a:srgbClr val="0B4F4A"/>
+            <a:srgbClr val="F4F8F7"/>
           </a:solidFill>
           <a:ln w="12700">
             <a:solidFill>
-              <a:srgbClr val="0B4F4A"/>
+              <a:srgbClr val="F4F8F7"/>
             </a:solidFill>
             <a:prstDash val="solid"/>
           </a:ln>
         </p:spPr>
       </p:sp>
-      <p:sp>
-        <p:nvSpPr>
-          <p:cNvPr id="4" name="Text 2"/>
-          <p:cNvSpPr txBox="1"/>
-          <p:nvPr/>
-        </p:nvSpPr>
-        <p:spPr>
-          <a:xfrm>
-            <a:off x="457200" y="1463040"/>
-            <a:ext cx="2651760" cy="1097280"/>
-          </a:xfrm>
-          <a:prstGeom prst="rect">
-            <a:avLst/>
-          </a:prstGeom>
-          <a:noFill/>
-          <a:ln/>
-        </p:spPr>
-        <p:txBody>
-          <a:bodyPr wrap="square" lIns="0" tIns="0" rIns="0" bIns="0" rtlCol="0" anchor="ctr"/>
-          <a:lstStyle/>
-          <a:p>
-            <a:pPr algn="ctr" indent="0" marL="0">
-              <a:buNone/>
-            </a:pPr>
-            <a:r>
-              <a:rPr lang="en-US" sz="6000" b="1" dirty="0">
-                <a:solidFill>
-                  <a:srgbClr val="FFFFFF"/>
-                </a:solidFill>
-                <a:latin typeface="Cambria" pitchFamily="34" charset="0"/>
-                <a:ea typeface="Cambria" pitchFamily="34" charset="-122"/>
-                <a:cs typeface="Cambria" pitchFamily="34" charset="-120"/>
-              </a:rPr>
-              <a:t>20</a:t>
-            </a:r>
-            <a:endParaRPr lang="en-US" sz="6000" dirty="0"/>
-          </a:p>
-        </p:txBody>
-      </p:sp>
-      <p:sp>
-        <p:nvSpPr>
-          <p:cNvPr id="5" name="Text 3"/>
-          <p:cNvSpPr txBox="1"/>
-          <p:nvPr/>
-        </p:nvSpPr>
-        <p:spPr>
-          <a:xfrm>
-            <a:off x="685800" y="2651760"/>
-            <a:ext cx="2194560" cy="1097280"/>
-          </a:xfrm>
-          <a:prstGeom prst="rect">
-            <a:avLst/>
-          </a:prstGeom>
-          <a:noFill/>
-          <a:ln/>
-        </p:spPr>
-        <p:txBody>
-          <a:bodyPr wrap="square" lIns="0" tIns="0" rIns="0" bIns="0" rtlCol="0" anchor="ctr"/>
-          <a:lstStyle/>
-          <a:p>
-            <a:pPr algn="ctr" indent="0" marL="0">
-              <a:buNone/>
-            </a:pPr>
-            <a:r>
-              <a:rPr lang="en-US" sz="1400" dirty="0">
-                <a:solidFill>
-                  <a:srgbClr val="CFE3DF"/>
-                </a:solidFill>
-                <a:latin typeface="Calibri" pitchFamily="34" charset="0"/>
-                <a:ea typeface="Calibri" pitchFamily="34" charset="-122"/>
-                <a:cs typeface="Calibri" pitchFamily="34" charset="-120"/>
-              </a:rPr>
-              <a:t>defects found and fixed, each with a regression test</a:t>
-            </a:r>
-            <a:endParaRPr lang="en-US" sz="1400" dirty="0"/>
-          </a:p>
-        </p:txBody>
-      </p:sp>
-      <p:sp>
-        <p:nvSpPr>
-          <p:cNvPr id="6" name="Text 4"/>
-          <p:cNvSpPr txBox="1"/>
-          <p:nvPr/>
-        </p:nvSpPr>
-        <p:spPr>
-          <a:xfrm>
-            <a:off x="3474720" y="1143000"/>
-            <a:ext cx="5212080" cy="3566160"/>
+      <p:pic>
+        <p:nvPicPr>
+          <p:cNvPr id="5" name="Image 0" descr="/home/user/commercial-banking/docs/screenshots/gui_01_overview.png">    </p:cNvPr>
+          <p:cNvPicPr>
+            <a:picLocks noChangeAspect="1"/>
+          </p:cNvPicPr>
+          <p:nvPr/>
+        </p:nvPicPr>
+        <p:blipFill>
+          <a:blip r:embed="rId1"/>
+          <a:stretch>
+            <a:fillRect/>
+          </a:stretch>
+        </p:blipFill>
+        <p:spPr>
+          <a:xfrm>
+            <a:off x="548640" y="1280160"/>
+            <a:ext cx="5394960" cy="3291840"/>
+          </a:xfrm>
+          <a:prstGeom prst="rect">
+            <a:avLst/>
+          </a:prstGeom>
+        </p:spPr>
+      </p:pic>
+      <p:sp>
+        <p:nvSpPr>
+          <p:cNvPr id="6" name="Text 3"/>
+          <p:cNvSpPr txBox="1"/>
+          <p:nvPr/>
+        </p:nvSpPr>
+        <p:spPr>
+          <a:xfrm>
+            <a:off x="6263640" y="1234440"/>
+            <a:ext cx="2468880" cy="3566160"/>
           </a:xfrm>
           <a:prstGeom prst="rect">
             <a:avLst/>
@@ -4189,7 +5653,7 @@
               <a:buChar char="•"/>
             </a:pPr>
             <a:r>
-              <a:rPr lang="en-US" sz="1350" dirty="0">
+              <a:rPr lang="en-US" sz="1200" dirty="0">
                 <a:solidFill>
                   <a:srgbClr val="1D2B2A"/>
                 </a:solidFill>
@@ -4197,9 +5661,9 @@
                 <a:ea typeface="Calibri" pitchFamily="34" charset="-122"/>
                 <a:cs typeface="Calibri" pitchFamily="34" charset="-120"/>
               </a:rPr>
-              <a:t>A refused loan overpayment still marked installments as paid</a:t>
-            </a:r>
-            <a:endParaRPr lang="en-US" sz="1350" dirty="0"/>
+              <a:t>Guided rule checks: 14 real operations, each showing the model's own refusal</a:t>
+            </a:r>
+            <a:endParaRPr lang="en-US" sz="1200" dirty="0"/>
           </a:p>
           <a:p>
             <a:pPr marL="342900" indent="-342900">
@@ -4210,7 +5674,7 @@
               <a:buChar char="•"/>
             </a:pPr>
             <a:r>
-              <a:rPr lang="en-US" sz="1350" dirty="0">
+              <a:rPr lang="en-US" sz="1200" dirty="0">
                 <a:solidFill>
                   <a:srgbClr val="1D2B2A"/>
                 </a:solidFill>
@@ -4218,9 +5682,9 @@
                 <a:ea typeface="Calibri" pitchFamily="34" charset="-122"/>
                 <a:cs typeface="Calibri" pitchFamily="34" charset="-120"/>
               </a:rPr>
-              <a:t>Resolving a dispute twice refunded the customer twice</a:t>
-            </a:r>
-            <a:endParaRPr lang="en-US" sz="1350" dirty="0"/>
+              <a:t>30 forms, including full customer onboarding</a:t>
+            </a:r>
+            <a:endParaRPr lang="en-US" sz="1200" dirty="0"/>
           </a:p>
           <a:p>
             <a:pPr marL="342900" indent="-342900">
@@ -4231,7 +5695,7 @@
               <a:buChar char="•"/>
             </a:pPr>
             <a:r>
-              <a:rPr lang="en-US" sz="1350" dirty="0">
+              <a:rPr lang="en-US" sz="1200" dirty="0">
                 <a:solidFill>
                   <a:srgbClr val="1D2B2A"/>
                 </a:solidFill>
@@ -4239,9 +5703,9 @@
                 <a:ea typeface="Calibri" pitchFamily="34" charset="-122"/>
                 <a:cs typeface="Calibri" pitchFamily="34" charset="-120"/>
               </a:rPr>
-              <a:t>Recording an ACTIVE card as found destroyed it</a:t>
-            </a:r>
-            <a:endParaRPr lang="en-US" sz="1350" dirty="0"/>
+              <a:t>Customer timeline and time machine for any past date</a:t>
+            </a:r>
+            <a:endParaRPr lang="en-US" sz="1200" dirty="0"/>
           </a:p>
           <a:p>
             <a:pPr marL="342900" indent="-342900">
@@ -4252,7 +5716,7 @@
               <a:buChar char="•"/>
             </a:pPr>
             <a:r>
-              <a:rPr lang="en-US" sz="1350" dirty="0">
+              <a:rPr lang="en-US" sz="1200" dirty="0">
                 <a:solidFill>
                   <a:srgbClr val="1D2B2A"/>
                 </a:solidFill>
@@ -4260,9 +5724,9 @@
                 <a:ea typeface="Calibri" pitchFamily="34" charset="-122"/>
                 <a:cs typeface="Calibri" pitchFamily="34" charset="-120"/>
               </a:rPr>
-              <a:t>Replacement cards blocked once the product was withdrawn</a:t>
-            </a:r>
-            <a:endParaRPr lang="en-US" sz="1350" dirty="0"/>
+              <a:t>Card chains, cases, audit log and a zero trial balance</a:t>
+            </a:r>
+            <a:endParaRPr lang="en-US" sz="1200" dirty="0"/>
           </a:p>
           <a:p>
             <a:pPr marL="342900" indent="-342900">
@@ -4273,7 +5737,7 @@
               <a:buChar char="•"/>
             </a:pPr>
             <a:r>
-              <a:rPr lang="en-US" sz="1350" dirty="0">
+              <a:rPr lang="en-US" sz="1200" dirty="0">
                 <a:solidFill>
                   <a:srgbClr val="1D2B2A"/>
                 </a:solidFill>
@@ -4281,51 +5745,9 @@
                 <a:ea typeface="Calibri" pitchFamily="34" charset="-122"/>
                 <a:cs typeface="Calibri" pitchFamily="34" charset="-120"/>
               </a:rPr>
-              <a:t>Bank fees used up customers' savings withdrawals</a:t>
-            </a:r>
-            <a:endParaRPr lang="en-US" sz="1350" dirty="0"/>
-          </a:p>
-          <a:p>
-            <a:pPr marL="342900" indent="-342900">
-              <a:spcAft>
-                <a:spcPts val="600"/>
-              </a:spcAft>
-              <a:buSzPct val="100000"/>
-              <a:buChar char="•"/>
-            </a:pPr>
-            <a:r>
-              <a:rPr lang="en-US" sz="1350" dirty="0">
-                <a:solidFill>
-                  <a:srgbClr val="1D2B2A"/>
-                </a:solidFill>
-                <a:latin typeface="Calibri" pitchFamily="34" charset="0"/>
-                <a:ea typeface="Calibri" pitchFamily="34" charset="-122"/>
-                <a:cs typeface="Calibri" pitchFamily="34" charset="-120"/>
-              </a:rPr>
-              <a:t>Account closure ignored holds and pending payments</a:t>
-            </a:r>
-            <a:endParaRPr lang="en-US" sz="1350" dirty="0"/>
-          </a:p>
-          <a:p>
-            <a:pPr marL="342900" indent="-342900">
-              <a:spcAft>
-                <a:spcPts val="600"/>
-              </a:spcAft>
-              <a:buSzPct val="100000"/>
-              <a:buChar char="•"/>
-            </a:pPr>
-            <a:r>
-              <a:rPr lang="en-US" sz="1350" dirty="0">
-                <a:solidFill>
-                  <a:srgbClr val="1D2B2A"/>
-                </a:solidFill>
-                <a:latin typeface="Calibri" pitchFamily="34" charset="0"/>
-                <a:ea typeface="Calibri" pitchFamily="34" charset="-122"/>
-                <a:cs typeface="Calibri" pitchFamily="34" charset="-120"/>
-              </a:rPr>
-              <a:t>No delegated limit on credit approvals</a:t>
-            </a:r>
-            <a:endParaRPr lang="en-US" sz="1350" dirty="0"/>
+              <a:t>GUI classes inherit too: Page -&gt; MasterDetailPage -&gt; CustomersPage</a:t>
+            </a:r>
+            <a:endParaRPr lang="en-US" sz="1200" dirty="0"/>
           </a:p>
         </p:txBody>
       </p:sp>
@@ -4340,6 +5762,353 @@
 <file path=ppt/slides/slide14.xml><?xml version="1.0" encoding="utf-8"?>
 <p:sld xmlns:a="http://schemas.openxmlformats.org/drawingml/2006/main" xmlns:r="http://schemas.openxmlformats.org/officeDocument/2006/relationships" xmlns:p="http://schemas.openxmlformats.org/presentationml/2006/main">
   <p:cSld name="Slide 14">
+    <p:bg>
+      <p:bgPr>
+        <a:solidFill>
+          <a:srgbClr val="FFFFFF"/>
+        </a:solidFill>
+      </p:bgPr>
+    </p:bg>
+    <p:spTree>
+      <p:nvGrpSpPr>
+        <p:cNvPr id="1" name=""/>
+        <p:cNvGrpSpPr/>
+        <p:nvPr/>
+      </p:nvGrpSpPr>
+      <p:grpSpPr>
+        <a:xfrm>
+          <a:off x="0" y="0"/>
+          <a:ext cx="0" cy="0"/>
+          <a:chOff x="0" y="0"/>
+          <a:chExt cx="0" cy="0"/>
+        </a:xfrm>
+      </p:grpSpPr>
+      <p:sp>
+        <p:nvSpPr>
+          <p:cNvPr id="2" name="Text 0"/>
+          <p:cNvSpPr txBox="1"/>
+          <p:nvPr/>
+        </p:nvSpPr>
+        <p:spPr>
+          <a:xfrm>
+            <a:off x="457200" y="274320"/>
+            <a:ext cx="8229600" cy="548640"/>
+          </a:xfrm>
+          <a:prstGeom prst="rect">
+            <a:avLst/>
+          </a:prstGeom>
+          <a:noFill/>
+          <a:ln/>
+        </p:spPr>
+        <p:txBody>
+          <a:bodyPr wrap="square" lIns="0" tIns="0" rIns="0" bIns="0" rtlCol="0" anchor="ctr">
+            <a:normAutofit/>
+          </a:bodyPr>
+          <a:lstStyle/>
+          <a:p>
+            <a:pPr indent="0" marL="0">
+              <a:buNone/>
+            </a:pPr>
+            <a:r>
+              <a:rPr lang="en-US" sz="2200" b="1" dirty="0">
+                <a:solidFill>
+                  <a:srgbClr val="0B4F4A"/>
+                </a:solidFill>
+                <a:latin typeface="Cambria" pitchFamily="34" charset="0"/>
+                <a:ea typeface="Cambria" pitchFamily="34" charset="-122"/>
+                <a:cs typeface="Cambria" pitchFamily="34" charset="-120"/>
+              </a:rPr>
+              <a:t>Code review: 20 defects fixed, each with a test</a:t>
+            </a:r>
+            <a:endParaRPr lang="en-US" sz="2200" dirty="0"/>
+          </a:p>
+        </p:txBody>
+      </p:sp>
+      <p:sp>
+        <p:nvSpPr>
+          <p:cNvPr id="3" name="Shape 1"/>
+          <p:cNvSpPr/>
+          <p:nvPr/>
+        </p:nvSpPr>
+        <p:spPr>
+          <a:xfrm>
+            <a:off x="457200" y="1097280"/>
+            <a:ext cx="2651760" cy="3566160"/>
+          </a:xfrm>
+          <a:prstGeom prst="roundRect">
+            <a:avLst>
+              <a:gd name="adj" fmla="val 2759"/>
+            </a:avLst>
+          </a:prstGeom>
+          <a:solidFill>
+            <a:srgbClr val="0B4F4A"/>
+          </a:solidFill>
+          <a:ln w="12700">
+            <a:solidFill>
+              <a:srgbClr val="0B4F4A"/>
+            </a:solidFill>
+            <a:prstDash val="solid"/>
+          </a:ln>
+        </p:spPr>
+      </p:sp>
+      <p:sp>
+        <p:nvSpPr>
+          <p:cNvPr id="4" name="Text 2"/>
+          <p:cNvSpPr txBox="1"/>
+          <p:nvPr/>
+        </p:nvSpPr>
+        <p:spPr>
+          <a:xfrm>
+            <a:off x="457200" y="1463040"/>
+            <a:ext cx="2651760" cy="1097280"/>
+          </a:xfrm>
+          <a:prstGeom prst="rect">
+            <a:avLst/>
+          </a:prstGeom>
+          <a:noFill/>
+          <a:ln/>
+        </p:spPr>
+        <p:txBody>
+          <a:bodyPr wrap="square" lIns="0" tIns="0" rIns="0" bIns="0" rtlCol="0" anchor="ctr"/>
+          <a:lstStyle/>
+          <a:p>
+            <a:pPr algn="ctr" indent="0" marL="0">
+              <a:buNone/>
+            </a:pPr>
+            <a:r>
+              <a:rPr lang="en-US" sz="6000" b="1" dirty="0">
+                <a:solidFill>
+                  <a:srgbClr val="FFFFFF"/>
+                </a:solidFill>
+                <a:latin typeface="Cambria" pitchFamily="34" charset="0"/>
+                <a:ea typeface="Cambria" pitchFamily="34" charset="-122"/>
+                <a:cs typeface="Cambria" pitchFamily="34" charset="-120"/>
+              </a:rPr>
+              <a:t>20</a:t>
+            </a:r>
+            <a:endParaRPr lang="en-US" sz="6000" dirty="0"/>
+          </a:p>
+        </p:txBody>
+      </p:sp>
+      <p:sp>
+        <p:nvSpPr>
+          <p:cNvPr id="5" name="Text 3"/>
+          <p:cNvSpPr txBox="1"/>
+          <p:nvPr/>
+        </p:nvSpPr>
+        <p:spPr>
+          <a:xfrm>
+            <a:off x="685800" y="2651760"/>
+            <a:ext cx="2194560" cy="1097280"/>
+          </a:xfrm>
+          <a:prstGeom prst="rect">
+            <a:avLst/>
+          </a:prstGeom>
+          <a:noFill/>
+          <a:ln/>
+        </p:spPr>
+        <p:txBody>
+          <a:bodyPr wrap="square" lIns="0" tIns="0" rIns="0" bIns="0" rtlCol="0" anchor="ctr"/>
+          <a:lstStyle/>
+          <a:p>
+            <a:pPr algn="ctr" indent="0" marL="0">
+              <a:buNone/>
+            </a:pPr>
+            <a:r>
+              <a:rPr lang="en-US" sz="1400" dirty="0">
+                <a:solidFill>
+                  <a:srgbClr val="CFE3DF"/>
+                </a:solidFill>
+                <a:latin typeface="Calibri" pitchFamily="34" charset="0"/>
+                <a:ea typeface="Calibri" pitchFamily="34" charset="-122"/>
+                <a:cs typeface="Calibri" pitchFamily="34" charset="-120"/>
+              </a:rPr>
+              <a:t>defects found and fixed, each with a regression test</a:t>
+            </a:r>
+            <a:endParaRPr lang="en-US" sz="1400" dirty="0"/>
+          </a:p>
+        </p:txBody>
+      </p:sp>
+      <p:sp>
+        <p:nvSpPr>
+          <p:cNvPr id="6" name="Text 4"/>
+          <p:cNvSpPr txBox="1"/>
+          <p:nvPr/>
+        </p:nvSpPr>
+        <p:spPr>
+          <a:xfrm>
+            <a:off x="3474720" y="1143000"/>
+            <a:ext cx="5212080" cy="3566160"/>
+          </a:xfrm>
+          <a:prstGeom prst="rect">
+            <a:avLst/>
+          </a:prstGeom>
+          <a:noFill/>
+          <a:ln/>
+        </p:spPr>
+        <p:txBody>
+          <a:bodyPr wrap="square" lIns="635" tIns="635" rIns="635" bIns="635" rtlCol="0" anchor="t"/>
+          <a:lstStyle/>
+          <a:p>
+            <a:pPr marL="342900" indent="-342900">
+              <a:spcAft>
+                <a:spcPts val="600"/>
+              </a:spcAft>
+              <a:buSzPct val="100000"/>
+              <a:buChar char="•"/>
+            </a:pPr>
+            <a:r>
+              <a:rPr lang="en-US" sz="1350" dirty="0">
+                <a:solidFill>
+                  <a:srgbClr val="1D2B2A"/>
+                </a:solidFill>
+                <a:latin typeface="Calibri" pitchFamily="34" charset="0"/>
+                <a:ea typeface="Calibri" pitchFamily="34" charset="-122"/>
+                <a:cs typeface="Calibri" pitchFamily="34" charset="-120"/>
+              </a:rPr>
+              <a:t>A refused loan overpayment still marked installments as paid</a:t>
+            </a:r>
+            <a:endParaRPr lang="en-US" sz="1350" dirty="0"/>
+          </a:p>
+          <a:p>
+            <a:pPr marL="342900" indent="-342900">
+              <a:spcAft>
+                <a:spcPts val="600"/>
+              </a:spcAft>
+              <a:buSzPct val="100000"/>
+              <a:buChar char="•"/>
+            </a:pPr>
+            <a:r>
+              <a:rPr lang="en-US" sz="1350" dirty="0">
+                <a:solidFill>
+                  <a:srgbClr val="1D2B2A"/>
+                </a:solidFill>
+                <a:latin typeface="Calibri" pitchFamily="34" charset="0"/>
+                <a:ea typeface="Calibri" pitchFamily="34" charset="-122"/>
+                <a:cs typeface="Calibri" pitchFamily="34" charset="-120"/>
+              </a:rPr>
+              <a:t>Resolving a dispute twice refunded the customer twice</a:t>
+            </a:r>
+            <a:endParaRPr lang="en-US" sz="1350" dirty="0"/>
+          </a:p>
+          <a:p>
+            <a:pPr marL="342900" indent="-342900">
+              <a:spcAft>
+                <a:spcPts val="600"/>
+              </a:spcAft>
+              <a:buSzPct val="100000"/>
+              <a:buChar char="•"/>
+            </a:pPr>
+            <a:r>
+              <a:rPr lang="en-US" sz="1350" dirty="0">
+                <a:solidFill>
+                  <a:srgbClr val="1D2B2A"/>
+                </a:solidFill>
+                <a:latin typeface="Calibri" pitchFamily="34" charset="0"/>
+                <a:ea typeface="Calibri" pitchFamily="34" charset="-122"/>
+                <a:cs typeface="Calibri" pitchFamily="34" charset="-120"/>
+              </a:rPr>
+              <a:t>Recording an ACTIVE card as found destroyed it</a:t>
+            </a:r>
+            <a:endParaRPr lang="en-US" sz="1350" dirty="0"/>
+          </a:p>
+          <a:p>
+            <a:pPr marL="342900" indent="-342900">
+              <a:spcAft>
+                <a:spcPts val="600"/>
+              </a:spcAft>
+              <a:buSzPct val="100000"/>
+              <a:buChar char="•"/>
+            </a:pPr>
+            <a:r>
+              <a:rPr lang="en-US" sz="1350" dirty="0">
+                <a:solidFill>
+                  <a:srgbClr val="1D2B2A"/>
+                </a:solidFill>
+                <a:latin typeface="Calibri" pitchFamily="34" charset="0"/>
+                <a:ea typeface="Calibri" pitchFamily="34" charset="-122"/>
+                <a:cs typeface="Calibri" pitchFamily="34" charset="-120"/>
+              </a:rPr>
+              <a:t>Replacement cards blocked once the product was withdrawn</a:t>
+            </a:r>
+            <a:endParaRPr lang="en-US" sz="1350" dirty="0"/>
+          </a:p>
+          <a:p>
+            <a:pPr marL="342900" indent="-342900">
+              <a:spcAft>
+                <a:spcPts val="600"/>
+              </a:spcAft>
+              <a:buSzPct val="100000"/>
+              <a:buChar char="•"/>
+            </a:pPr>
+            <a:r>
+              <a:rPr lang="en-US" sz="1350" dirty="0">
+                <a:solidFill>
+                  <a:srgbClr val="1D2B2A"/>
+                </a:solidFill>
+                <a:latin typeface="Calibri" pitchFamily="34" charset="0"/>
+                <a:ea typeface="Calibri" pitchFamily="34" charset="-122"/>
+                <a:cs typeface="Calibri" pitchFamily="34" charset="-120"/>
+              </a:rPr>
+              <a:t>Bank fees used up customers' savings withdrawals</a:t>
+            </a:r>
+            <a:endParaRPr lang="en-US" sz="1350" dirty="0"/>
+          </a:p>
+          <a:p>
+            <a:pPr marL="342900" indent="-342900">
+              <a:spcAft>
+                <a:spcPts val="600"/>
+              </a:spcAft>
+              <a:buSzPct val="100000"/>
+              <a:buChar char="•"/>
+            </a:pPr>
+            <a:r>
+              <a:rPr lang="en-US" sz="1350" dirty="0">
+                <a:solidFill>
+                  <a:srgbClr val="1D2B2A"/>
+                </a:solidFill>
+                <a:latin typeface="Calibri" pitchFamily="34" charset="0"/>
+                <a:ea typeface="Calibri" pitchFamily="34" charset="-122"/>
+                <a:cs typeface="Calibri" pitchFamily="34" charset="-120"/>
+              </a:rPr>
+              <a:t>Account closure ignored holds and pending payments</a:t>
+            </a:r>
+            <a:endParaRPr lang="en-US" sz="1350" dirty="0"/>
+          </a:p>
+          <a:p>
+            <a:pPr marL="342900" indent="-342900">
+              <a:spcAft>
+                <a:spcPts val="600"/>
+              </a:spcAft>
+              <a:buSzPct val="100000"/>
+              <a:buChar char="•"/>
+            </a:pPr>
+            <a:r>
+              <a:rPr lang="en-US" sz="1350" dirty="0">
+                <a:solidFill>
+                  <a:srgbClr val="1D2B2A"/>
+                </a:solidFill>
+                <a:latin typeface="Calibri" pitchFamily="34" charset="0"/>
+                <a:ea typeface="Calibri" pitchFamily="34" charset="-122"/>
+                <a:cs typeface="Calibri" pitchFamily="34" charset="-120"/>
+              </a:rPr>
+              <a:t>No delegated limit on credit approvals</a:t>
+            </a:r>
+            <a:endParaRPr lang="en-US" sz="1350" dirty="0"/>
+          </a:p>
+        </p:txBody>
+      </p:sp>
+    </p:spTree>
+  </p:cSld>
+  <p:clrMapOvr>
+    <a:masterClrMapping/>
+  </p:clrMapOvr>
+</p:sld>
+</file>
+
+<file path=ppt/slides/slide15.xml><?xml version="1.0" encoding="utf-8"?>
+<p:sld xmlns:a="http://schemas.openxmlformats.org/drawingml/2006/main" xmlns:r="http://schemas.openxmlformats.org/officeDocument/2006/relationships" xmlns:p="http://schemas.openxmlformats.org/presentationml/2006/main">
+  <p:cSld name="Slide 15">
     <p:bg>
       <p:bgPr>
         <a:solidFill>
@@ -4901,7 +6670,7 @@
                 <a:ea typeface="Cambria" pitchFamily="34" charset="-122"/>
                 <a:cs typeface="Cambria" pitchFamily="34" charset="-120"/>
               </a:rPr>
-              <a:t>73</a:t>
+              <a:t>74</a:t>
             </a:r>
             <a:endParaRPr lang="en-US" sz="4000" dirty="0"/>
           </a:p>
@@ -5321,7 +7090,7 @@
                 <a:ea typeface="Cambria" pitchFamily="34" charset="-122"/>
                 <a:cs typeface="Cambria" pitchFamily="34" charset="-120"/>
               </a:rPr>
-              <a:t>60</a:t>
+              <a:t>69</a:t>
             </a:r>
             <a:endParaRPr lang="en-US" sz="4000" dirty="0"/>
           </a:p>
@@ -6691,8 +8460,8 @@
         </p:blipFill>
         <p:spPr>
           <a:xfrm>
-            <a:off x="4526280" y="1173952"/>
-            <a:ext cx="4069080" cy="3458535"/>
+            <a:off x="4582463" y="1097280"/>
+            <a:ext cx="3956715" cy="3611880"/>
           </a:xfrm>
           <a:prstGeom prst="rect">
             <a:avLst/>
@@ -6827,8 +8596,8 @@
         </p:blipFill>
         <p:spPr>
           <a:xfrm>
-            <a:off x="365760" y="1490736"/>
-            <a:ext cx="8412480" cy="1864848"/>
+            <a:off x="365760" y="1328014"/>
+            <a:ext cx="8412480" cy="2190293"/>
           </a:xfrm>
           <a:prstGeom prst="rect">
             <a:avLst/>
@@ -7048,8 +8817,8 @@
         </p:blipFill>
         <p:spPr>
           <a:xfrm>
-            <a:off x="1803357" y="1234440"/>
-            <a:ext cx="5537286" cy="2377440"/>
+            <a:off x="1908686" y="1234440"/>
+            <a:ext cx="5326628" cy="2377440"/>
           </a:xfrm>
           <a:prstGeom prst="rect">
             <a:avLst/>
@@ -7200,7 +8969,7 @@
               <a:buNone/>
             </a:pPr>
             <a:r>
-              <a:rPr lang="en-US" sz="2800" b="1" dirty="0">
+              <a:rPr lang="en-US" sz="2200" b="1" dirty="0">
                 <a:solidFill>
                   <a:srgbClr val="0B4F4A"/>
                 </a:solidFill>
@@ -7208,9 +8977,9 @@
                 <a:ea typeface="Cambria" pitchFamily="34" charset="-122"/>
                 <a:cs typeface="Cambria" pitchFamily="34" charset="-120"/>
               </a:rPr>
-              <a:t>Tempting inheritances we rejected</a:t>
-            </a:r>
-            <a:endParaRPr lang="en-US" sz="2800" dirty="0"/>
+              <a:t>Abstract classes and inherited state machines</a:t>
+            </a:r>
+            <a:endParaRPr lang="en-US" sz="2200" dirty="0"/>
           </a:p>
         </p:txBody>
       </p:sp>
@@ -7222,34 +8991,122 @@
         </p:nvSpPr>
         <p:spPr>
           <a:xfrm>
-            <a:off x="457200" y="804672"/>
-            <a:ext cx="8229600" cy="320040"/>
-          </a:xfrm>
-          <a:prstGeom prst="rect">
-            <a:avLst/>
-          </a:prstGeom>
-          <a:noFill/>
-          <a:ln/>
-        </p:spPr>
-        <p:txBody>
-          <a:bodyPr wrap="square" lIns="0" tIns="0" rIns="0" bIns="0" rtlCol="0" anchor="ctr"/>
-          <a:lstStyle/>
-          <a:p>
-            <a:pPr indent="0" marL="0">
-              <a:buNone/>
-            </a:pPr>
-            <a:r>
-              <a:rPr lang="en-US" sz="1200" i="1" dirty="0">
-                <a:solidFill>
-                  <a:srgbClr val="5B6B69"/>
-                </a:solidFill>
-                <a:latin typeface="Calibri" pitchFamily="34" charset="0"/>
-                <a:ea typeface="Calibri" pitchFamily="34" charset="-122"/>
-                <a:cs typeface="Calibri" pitchFamily="34" charset="-120"/>
-              </a:rPr>
-              <a:t>Ten in the report; four of the strongest</a:t>
-            </a:r>
-            <a:endParaRPr lang="en-US" sz="1200" dirty="0"/>
+            <a:off x="457200" y="1097280"/>
+            <a:ext cx="3749040" cy="3566160"/>
+          </a:xfrm>
+          <a:prstGeom prst="rect">
+            <a:avLst/>
+          </a:prstGeom>
+          <a:noFill/>
+          <a:ln/>
+        </p:spPr>
+        <p:txBody>
+          <a:bodyPr wrap="square" lIns="635" tIns="635" rIns="635" bIns="635" rtlCol="0" anchor="t"/>
+          <a:lstStyle/>
+          <a:p>
+            <a:pPr marL="342900" indent="-342900">
+              <a:spcAft>
+                <a:spcPts val="600"/>
+              </a:spcAft>
+              <a:buSzPct val="100000"/>
+              <a:buChar char="•"/>
+            </a:pPr>
+            <a:r>
+              <a:rPr lang="en-US" sz="1300" dirty="0">
+                <a:solidFill>
+                  <a:srgbClr val="1D2B2A"/>
+                </a:solidFill>
+                <a:latin typeface="Calibri" pitchFamily="34" charset="0"/>
+                <a:ea typeface="Calibri" pitchFamily="34" charset="-122"/>
+                <a:cs typeface="Calibri" pitchFamily="34" charset="-120"/>
+              </a:rPr>
+              <a:t>Hierarchy roots are abstract (abc): no "plain" transaction or party can exist</a:t>
+            </a:r>
+            <a:endParaRPr lang="en-US" sz="1300" dirty="0"/>
+          </a:p>
+          <a:p>
+            <a:pPr marL="342900" indent="-342900">
+              <a:spcAft>
+                <a:spcPts val="600"/>
+              </a:spcAft>
+              <a:buSzPct val="100000"/>
+              <a:buChar char="•"/>
+            </a:pPr>
+            <a:r>
+              <a:rPr lang="en-US" sz="1300" dirty="0">
+                <a:solidFill>
+                  <a:srgbClr val="1D2B2A"/>
+                </a:solidFill>
+                <a:latin typeface="Calibri" pitchFamily="34" charset="0"/>
+                <a:ea typeface="Calibri" pitchFamily="34" charset="-122"/>
+                <a:cs typeface="Calibri" pitchFamily="34" charset="-120"/>
+              </a:rPr>
+              <a:t>Abstract methods differ by class: counterparty(), overdraft_limit(), position(), handler_roles()</a:t>
+            </a:r>
+            <a:endParaRPr lang="en-US" sz="1300" dirty="0"/>
+          </a:p>
+          <a:p>
+            <a:pPr marL="342900" indent="-342900">
+              <a:spcAft>
+                <a:spcPts val="600"/>
+              </a:spcAft>
+              <a:buSzPct val="100000"/>
+              <a:buChar char="•"/>
+            </a:pPr>
+            <a:r>
+              <a:rPr lang="en-US" sz="1300" dirty="0">
+                <a:solidFill>
+                  <a:srgbClr val="1D2B2A"/>
+                </a:solidFill>
+                <a:latin typeface="Calibri" pitchFamily="34" charset="0"/>
+                <a:ea typeface="Calibri" pitchFamily="34" charset="-122"/>
+                <a:cs typeface="Calibri" pitchFamily="34" charset="-120"/>
+              </a:rPr>
+              <a:t>Type checks replaced by polymorphism: transaction_story is txn.story_lines()</a:t>
+            </a:r>
+            <a:endParaRPr lang="en-US" sz="1300" dirty="0"/>
+          </a:p>
+          <a:p>
+            <a:pPr marL="342900" indent="-342900">
+              <a:spcAft>
+                <a:spcPts val="600"/>
+              </a:spcAft>
+              <a:buSzPct val="100000"/>
+              <a:buChar char="•"/>
+            </a:pPr>
+            <a:r>
+              <a:rPr lang="en-US" sz="1300" dirty="0">
+                <a:solidFill>
+                  <a:srgbClr val="1D2B2A"/>
+                </a:solidFill>
+                <a:latin typeface="Calibri" pitchFamily="34" charset="0"/>
+                <a:ea typeface="Calibri" pitchFamily="34" charset="-122"/>
+                <a:cs typeface="Calibri" pitchFamily="34" charset="-120"/>
+              </a:rPr>
+              <a:t>Each class declares its LIFECYCLE; StatusHistory refuses any other move</a:t>
+            </a:r>
+            <a:endParaRPr lang="en-US" sz="1300" dirty="0"/>
+          </a:p>
+          <a:p>
+            <a:pPr marL="342900" indent="-342900">
+              <a:spcAft>
+                <a:spcPts val="600"/>
+              </a:spcAft>
+              <a:buSzPct val="100000"/>
+              <a:buChar char="•"/>
+            </a:pPr>
+            <a:r>
+              <a:rPr lang="en-US" sz="1300" dirty="0">
+                <a:solidFill>
+                  <a:srgbClr val="1D2B2A"/>
+                </a:solidFill>
+                <a:latin typeface="Calibri" pitchFamily="34" charset="0"/>
+                <a:ea typeface="Calibri" pitchFamily="34" charset="-122"/>
+                <a:cs typeface="Calibri" pitchFamily="34" charset="-120"/>
+              </a:rPr>
+              <a:t>Subclasses extend it: CustomerPayment adds dual control, TransferPayment the review hold</a:t>
+            </a:r>
+            <a:endParaRPr lang="en-US" sz="1300" dirty="0"/>
           </a:p>
         </p:txBody>
       </p:sp>
@@ -7261,582 +9118,49 @@
         </p:nvSpPr>
         <p:spPr>
           <a:xfrm>
-            <a:off x="457200" y="1325880"/>
-            <a:ext cx="4023360" cy="1600200"/>
+            <a:off x="4434840" y="1005840"/>
+            <a:ext cx="4251960" cy="3794760"/>
           </a:xfrm>
           <a:prstGeom prst="roundRect">
             <a:avLst>
-              <a:gd name="adj" fmla="val 4571"/>
+              <a:gd name="adj" fmla="val 1928"/>
             </a:avLst>
           </a:prstGeom>
           <a:solidFill>
-            <a:srgbClr val="E8F0EE"/>
+            <a:srgbClr val="F4F8F7"/>
           </a:solidFill>
           <a:ln w="12700">
             <a:solidFill>
-              <a:srgbClr val="E8F0EE"/>
+              <a:srgbClr val="F4F8F7"/>
             </a:solidFill>
             <a:prstDash val="solid"/>
           </a:ln>
         </p:spPr>
       </p:sp>
-      <p:sp>
-        <p:nvSpPr>
-          <p:cNvPr id="5" name="Text 3"/>
-          <p:cNvSpPr txBox="1"/>
-          <p:nvPr/>
-        </p:nvSpPr>
-        <p:spPr>
-          <a:xfrm>
-            <a:off x="640080" y="1527048"/>
-            <a:ext cx="384048" cy="384048"/>
-          </a:xfrm>
-          <a:prstGeom prst="rect">
-            <a:avLst/>
-          </a:prstGeom>
-          <a:solidFill>
-            <a:srgbClr val="9C3D10"/>
-          </a:solidFill>
-          <a:ln/>
-        </p:spPr>
-        <p:txBody>
-          <a:bodyPr wrap="square" lIns="0" tIns="0" rIns="0" bIns="0" rtlCol="0" anchor="ctr"/>
-          <a:lstStyle/>
-          <a:p>
-            <a:pPr algn="ctr" indent="0" marL="0">
-              <a:buNone/>
-            </a:pPr>
-            <a:r>
-              <a:rPr lang="en-US" sz="1600" b="1" dirty="0">
-                <a:solidFill>
-                  <a:srgbClr val="FFFFFF"/>
-                </a:solidFill>
-                <a:latin typeface="Cambria" pitchFamily="34" charset="0"/>
-                <a:ea typeface="Cambria" pitchFamily="34" charset="-122"/>
-                <a:cs typeface="Cambria" pitchFamily="34" charset="-120"/>
-              </a:rPr>
-              <a:t>x</a:t>
-            </a:r>
-            <a:endParaRPr lang="en-US" sz="1600" dirty="0"/>
-          </a:p>
-        </p:txBody>
-      </p:sp>
-      <p:sp>
-        <p:nvSpPr>
-          <p:cNvPr id="6" name="Text 4"/>
-          <p:cNvSpPr txBox="1"/>
-          <p:nvPr/>
-        </p:nvSpPr>
-        <p:spPr>
-          <a:xfrm>
-            <a:off x="1188720" y="1508760"/>
-            <a:ext cx="3154680" cy="411480"/>
-          </a:xfrm>
-          <a:prstGeom prst="rect">
-            <a:avLst/>
-          </a:prstGeom>
-          <a:noFill/>
-          <a:ln/>
-        </p:spPr>
-        <p:txBody>
-          <a:bodyPr wrap="square" lIns="0" tIns="0" rIns="0" bIns="0" rtlCol="0" anchor="ctr"/>
-          <a:lstStyle/>
-          <a:p>
-            <a:pPr indent="0" marL="0">
-              <a:buNone/>
-            </a:pPr>
-            <a:r>
-              <a:rPr lang="en-US" sz="1100" b="1" dirty="0">
-                <a:solidFill>
-                  <a:srgbClr val="0B4F4A"/>
-                </a:solidFill>
-                <a:latin typeface="Courier New" pitchFamily="34" charset="0"/>
-                <a:ea typeface="Courier New" pitchFamily="34" charset="-122"/>
-                <a:cs typeface="Courier New" pitchFamily="34" charset="-120"/>
-              </a:rPr>
-              <a:t>Customer(Person)</a:t>
-            </a:r>
-            <a:endParaRPr lang="en-US" sz="1100" dirty="0"/>
-          </a:p>
-        </p:txBody>
-      </p:sp>
-      <p:sp>
-        <p:nvSpPr>
-          <p:cNvPr id="7" name="Text 5"/>
-          <p:cNvSpPr txBox="1"/>
-          <p:nvPr/>
-        </p:nvSpPr>
-        <p:spPr>
-          <a:xfrm>
-            <a:off x="1188720" y="1965960"/>
-            <a:ext cx="3154680" cy="868680"/>
-          </a:xfrm>
-          <a:prstGeom prst="rect">
-            <a:avLst/>
-          </a:prstGeom>
-          <a:noFill/>
-          <a:ln/>
-        </p:spPr>
-        <p:txBody>
-          <a:bodyPr wrap="square" lIns="0" tIns="0" rIns="0" bIns="0" rtlCol="0" anchor="t"/>
-          <a:lstStyle/>
-          <a:p>
-            <a:pPr indent="0" marL="0">
-              <a:buNone/>
-            </a:pPr>
-            <a:r>
-              <a:rPr lang="en-US" sz="1250" dirty="0">
-                <a:solidFill>
-                  <a:srgbClr val="1D2B2A"/>
-                </a:solidFill>
-                <a:latin typeface="Calibri" pitchFamily="34" charset="0"/>
-                <a:ea typeface="Calibri" pitchFamily="34" charset="-122"/>
-                <a:cs typeface="Calibri" pitchFamily="34" charset="-120"/>
-              </a:rPr>
-              <a:t>One human is customer, director and signatory at once; roles start and end on different dates.</a:t>
-            </a:r>
-            <a:endParaRPr lang="en-US" sz="1250" dirty="0"/>
-          </a:p>
-        </p:txBody>
-      </p:sp>
-      <p:sp>
-        <p:nvSpPr>
-          <p:cNvPr id="8" name="Shape 6"/>
-          <p:cNvSpPr/>
-          <p:nvPr/>
-        </p:nvSpPr>
-        <p:spPr>
-          <a:xfrm>
-            <a:off x="4663440" y="1325880"/>
-            <a:ext cx="4023360" cy="1600200"/>
-          </a:xfrm>
-          <a:prstGeom prst="roundRect">
-            <a:avLst>
-              <a:gd name="adj" fmla="val 4571"/>
-            </a:avLst>
-          </a:prstGeom>
-          <a:solidFill>
-            <a:srgbClr val="E8F0EE"/>
-          </a:solidFill>
-          <a:ln w="12700">
-            <a:solidFill>
-              <a:srgbClr val="E8F0EE"/>
-            </a:solidFill>
-            <a:prstDash val="solid"/>
-          </a:ln>
-        </p:spPr>
-      </p:sp>
-      <p:sp>
-        <p:nvSpPr>
-          <p:cNvPr id="9" name="Text 7"/>
-          <p:cNvSpPr txBox="1"/>
-          <p:nvPr/>
-        </p:nvSpPr>
-        <p:spPr>
-          <a:xfrm>
-            <a:off x="4846320" y="1527048"/>
-            <a:ext cx="384048" cy="384048"/>
-          </a:xfrm>
-          <a:prstGeom prst="rect">
-            <a:avLst/>
-          </a:prstGeom>
-          <a:solidFill>
-            <a:srgbClr val="9C3D10"/>
-          </a:solidFill>
-          <a:ln/>
-        </p:spPr>
-        <p:txBody>
-          <a:bodyPr wrap="square" lIns="0" tIns="0" rIns="0" bIns="0" rtlCol="0" anchor="ctr"/>
-          <a:lstStyle/>
-          <a:p>
-            <a:pPr algn="ctr" indent="0" marL="0">
-              <a:buNone/>
-            </a:pPr>
-            <a:r>
-              <a:rPr lang="en-US" sz="1600" b="1" dirty="0">
-                <a:solidFill>
-                  <a:srgbClr val="FFFFFF"/>
-                </a:solidFill>
-                <a:latin typeface="Cambria" pitchFamily="34" charset="0"/>
-                <a:ea typeface="Cambria" pitchFamily="34" charset="-122"/>
-                <a:cs typeface="Cambria" pitchFamily="34" charset="-120"/>
-              </a:rPr>
-              <a:t>x</a:t>
-            </a:r>
-            <a:endParaRPr lang="en-US" sz="1600" dirty="0"/>
-          </a:p>
-        </p:txBody>
-      </p:sp>
-      <p:sp>
-        <p:nvSpPr>
-          <p:cNvPr id="10" name="Text 8"/>
-          <p:cNvSpPr txBox="1"/>
-          <p:nvPr/>
-        </p:nvSpPr>
-        <p:spPr>
-          <a:xfrm>
-            <a:off x="5394960" y="1508760"/>
-            <a:ext cx="3154680" cy="411480"/>
-          </a:xfrm>
-          <a:prstGeom prst="rect">
-            <a:avLst/>
-          </a:prstGeom>
-          <a:noFill/>
-          <a:ln/>
-        </p:spPr>
-        <p:txBody>
-          <a:bodyPr wrap="square" lIns="0" tIns="0" rIns="0" bIns="0" rtlCol="0" anchor="ctr"/>
-          <a:lstStyle/>
-          <a:p>
-            <a:pPr indent="0" marL="0">
-              <a:buNone/>
-            </a:pPr>
-            <a:r>
-              <a:rPr lang="en-US" sz="1100" b="1" dirty="0">
-                <a:solidFill>
-                  <a:srgbClr val="0B4F4A"/>
-                </a:solidFill>
-                <a:latin typeface="Courier New" pitchFamily="34" charset="0"/>
-                <a:ea typeface="Courier New" pitchFamily="34" charset="-122"/>
-                <a:cs typeface="Courier New" pitchFamily="34" charset="-120"/>
-              </a:rPr>
-              <a:t>IssuedCard(DepositAccount)</a:t>
-            </a:r>
-            <a:endParaRPr lang="en-US" sz="1100" dirty="0"/>
-          </a:p>
-        </p:txBody>
-      </p:sp>
-      <p:sp>
-        <p:nvSpPr>
-          <p:cNvPr id="11" name="Text 9"/>
-          <p:cNvSpPr txBox="1"/>
-          <p:nvPr/>
-        </p:nvSpPr>
-        <p:spPr>
-          <a:xfrm>
-            <a:off x="5394960" y="1965960"/>
-            <a:ext cx="3154680" cy="868680"/>
-          </a:xfrm>
-          <a:prstGeom prst="rect">
-            <a:avLst/>
-          </a:prstGeom>
-          <a:noFill/>
-          <a:ln/>
-        </p:spPr>
-        <p:txBody>
-          <a:bodyPr wrap="square" lIns="0" tIns="0" rIns="0" bIns="0" rtlCol="0" anchor="t"/>
-          <a:lstStyle/>
-          <a:p>
-            <a:pPr indent="0" marL="0">
-              <a:buNone/>
-            </a:pPr>
-            <a:r>
-              <a:rPr lang="en-US" sz="1250" dirty="0">
-                <a:solidFill>
-                  <a:srgbClr val="1D2B2A"/>
-                </a:solidFill>
-                <a:latin typeface="Calibri" pitchFamily="34" charset="0"/>
-                <a:ea typeface="Calibri" pitchFamily="34" charset="-122"/>
-                <a:cs typeface="Calibri" pitchFamily="34" charset="-120"/>
-              </a:rPr>
-              <a:t>A card holds no money and many cards share one account: it is a credential.</a:t>
-            </a:r>
-            <a:endParaRPr lang="en-US" sz="1250" dirty="0"/>
-          </a:p>
-        </p:txBody>
-      </p:sp>
-      <p:sp>
-        <p:nvSpPr>
-          <p:cNvPr id="12" name="Shape 10"/>
-          <p:cNvSpPr/>
-          <p:nvPr/>
-        </p:nvSpPr>
-        <p:spPr>
-          <a:xfrm>
-            <a:off x="457200" y="3108960"/>
-            <a:ext cx="4023360" cy="1600200"/>
-          </a:xfrm>
-          <a:prstGeom prst="roundRect">
-            <a:avLst>
-              <a:gd name="adj" fmla="val 4571"/>
-            </a:avLst>
-          </a:prstGeom>
-          <a:solidFill>
-            <a:srgbClr val="E8F0EE"/>
-          </a:solidFill>
-          <a:ln w="12700">
-            <a:solidFill>
-              <a:srgbClr val="E8F0EE"/>
-            </a:solidFill>
-            <a:prstDash val="solid"/>
-          </a:ln>
-        </p:spPr>
-      </p:sp>
-      <p:sp>
-        <p:nvSpPr>
-          <p:cNvPr id="13" name="Text 11"/>
-          <p:cNvSpPr txBox="1"/>
-          <p:nvPr/>
-        </p:nvSpPr>
-        <p:spPr>
-          <a:xfrm>
-            <a:off x="640080" y="3310128"/>
-            <a:ext cx="384048" cy="384048"/>
-          </a:xfrm>
-          <a:prstGeom prst="rect">
-            <a:avLst/>
-          </a:prstGeom>
-          <a:solidFill>
-            <a:srgbClr val="9C3D10"/>
-          </a:solidFill>
-          <a:ln/>
-        </p:spPr>
-        <p:txBody>
-          <a:bodyPr wrap="square" lIns="0" tIns="0" rIns="0" bIns="0" rtlCol="0" anchor="ctr"/>
-          <a:lstStyle/>
-          <a:p>
-            <a:pPr algn="ctr" indent="0" marL="0">
-              <a:buNone/>
-            </a:pPr>
-            <a:r>
-              <a:rPr lang="en-US" sz="1600" b="1" dirty="0">
-                <a:solidFill>
-                  <a:srgbClr val="FFFFFF"/>
-                </a:solidFill>
-                <a:latin typeface="Cambria" pitchFamily="34" charset="0"/>
-                <a:ea typeface="Cambria" pitchFamily="34" charset="-122"/>
-                <a:cs typeface="Cambria" pitchFamily="34" charset="-120"/>
-              </a:rPr>
-              <a:t>x</a:t>
-            </a:r>
-            <a:endParaRPr lang="en-US" sz="1600" dirty="0"/>
-          </a:p>
-        </p:txBody>
-      </p:sp>
-      <p:sp>
-        <p:nvSpPr>
-          <p:cNvPr id="14" name="Text 12"/>
-          <p:cNvSpPr txBox="1"/>
-          <p:nvPr/>
-        </p:nvSpPr>
-        <p:spPr>
-          <a:xfrm>
-            <a:off x="1188720" y="3291840"/>
-            <a:ext cx="3154680" cy="411480"/>
-          </a:xfrm>
-          <a:prstGeom prst="rect">
-            <a:avLst/>
-          </a:prstGeom>
-          <a:noFill/>
-          <a:ln/>
-        </p:spPr>
-        <p:txBody>
-          <a:bodyPr wrap="square" lIns="0" tIns="0" rIns="0" bIns="0" rtlCol="0" anchor="ctr"/>
-          <a:lstStyle/>
-          <a:p>
-            <a:pPr indent="0" marL="0">
-              <a:buNone/>
-            </a:pPr>
-            <a:r>
-              <a:rPr lang="en-US" sz="1100" b="1" dirty="0">
-                <a:solidFill>
-                  <a:srgbClr val="0B4F4A"/>
-                </a:solidFill>
-                <a:latin typeface="Courier New" pitchFamily="34" charset="0"/>
-                <a:ea typeface="Courier New" pitchFamily="34" charset="-122"/>
-                <a:cs typeface="Courier New" pitchFamily="34" charset="-120"/>
-              </a:rPr>
-              <a:t>FinancingAgreement(DepositAccount)</a:t>
-            </a:r>
-            <a:endParaRPr lang="en-US" sz="1100" dirty="0"/>
-          </a:p>
-        </p:txBody>
-      </p:sp>
-      <p:sp>
-        <p:nvSpPr>
-          <p:cNvPr id="15" name="Text 13"/>
-          <p:cNvSpPr txBox="1"/>
-          <p:nvPr/>
-        </p:nvSpPr>
-        <p:spPr>
-          <a:xfrm>
-            <a:off x="1188720" y="3749040"/>
-            <a:ext cx="3154680" cy="868680"/>
-          </a:xfrm>
-          <a:prstGeom prst="rect">
-            <a:avLst/>
-          </a:prstGeom>
-          <a:noFill/>
-          <a:ln/>
-        </p:spPr>
-        <p:txBody>
-          <a:bodyPr wrap="square" lIns="0" tIns="0" rIns="0" bIns="0" rtlCol="0" anchor="t"/>
-          <a:lstStyle/>
-          <a:p>
-            <a:pPr indent="0" marL="0">
-              <a:buNone/>
-            </a:pPr>
-            <a:r>
-              <a:rPr lang="en-US" sz="1250" dirty="0">
-                <a:solidFill>
-                  <a:srgbClr val="1D2B2A"/>
-                </a:solidFill>
-                <a:latin typeface="Calibri" pitchFamily="34" charset="0"/>
-                <a:ea typeface="Calibri" pitchFamily="34" charset="-122"/>
-                <a:cs typeface="Calibri" pitchFamily="34" charset="-120"/>
-              </a:rPr>
-              <a:t>A loan has no ledger of customer funds, holds or available balance.</a:t>
-            </a:r>
-            <a:endParaRPr lang="en-US" sz="1250" dirty="0"/>
-          </a:p>
-        </p:txBody>
-      </p:sp>
-      <p:sp>
-        <p:nvSpPr>
-          <p:cNvPr id="16" name="Shape 14"/>
-          <p:cNvSpPr/>
-          <p:nvPr/>
-        </p:nvSpPr>
-        <p:spPr>
-          <a:xfrm>
-            <a:off x="4663440" y="3108960"/>
-            <a:ext cx="4023360" cy="1600200"/>
-          </a:xfrm>
-          <a:prstGeom prst="roundRect">
-            <a:avLst>
-              <a:gd name="adj" fmla="val 4571"/>
-            </a:avLst>
-          </a:prstGeom>
-          <a:solidFill>
-            <a:srgbClr val="E8F0EE"/>
-          </a:solidFill>
-          <a:ln w="12700">
-            <a:solidFill>
-              <a:srgbClr val="E8F0EE"/>
-            </a:solidFill>
-            <a:prstDash val="solid"/>
-          </a:ln>
-        </p:spPr>
-      </p:sp>
-      <p:sp>
-        <p:nvSpPr>
-          <p:cNvPr id="17" name="Text 15"/>
-          <p:cNvSpPr txBox="1"/>
-          <p:nvPr/>
-        </p:nvSpPr>
-        <p:spPr>
-          <a:xfrm>
-            <a:off x="4846320" y="3310128"/>
-            <a:ext cx="384048" cy="384048"/>
-          </a:xfrm>
-          <a:prstGeom prst="rect">
-            <a:avLst/>
-          </a:prstGeom>
-          <a:solidFill>
-            <a:srgbClr val="9C3D10"/>
-          </a:solidFill>
-          <a:ln/>
-        </p:spPr>
-        <p:txBody>
-          <a:bodyPr wrap="square" lIns="0" tIns="0" rIns="0" bIns="0" rtlCol="0" anchor="ctr"/>
-          <a:lstStyle/>
-          <a:p>
-            <a:pPr algn="ctr" indent="0" marL="0">
-              <a:buNone/>
-            </a:pPr>
-            <a:r>
-              <a:rPr lang="en-US" sz="1600" b="1" dirty="0">
-                <a:solidFill>
-                  <a:srgbClr val="FFFFFF"/>
-                </a:solidFill>
-                <a:latin typeface="Cambria" pitchFamily="34" charset="0"/>
-                <a:ea typeface="Cambria" pitchFamily="34" charset="-122"/>
-                <a:cs typeface="Cambria" pitchFamily="34" charset="-120"/>
-              </a:rPr>
-              <a:t>x</a:t>
-            </a:r>
-            <a:endParaRPr lang="en-US" sz="1600" dirty="0"/>
-          </a:p>
-        </p:txBody>
-      </p:sp>
-      <p:sp>
-        <p:nvSpPr>
-          <p:cNvPr id="18" name="Text 16"/>
-          <p:cNvSpPr txBox="1"/>
-          <p:nvPr/>
-        </p:nvSpPr>
-        <p:spPr>
-          <a:xfrm>
-            <a:off x="5394960" y="3291840"/>
-            <a:ext cx="3154680" cy="411480"/>
-          </a:xfrm>
-          <a:prstGeom prst="rect">
-            <a:avLst/>
-          </a:prstGeom>
-          <a:noFill/>
-          <a:ln/>
-        </p:spPr>
-        <p:txBody>
-          <a:bodyPr wrap="square" lIns="0" tIns="0" rIns="0" bIns="0" rtlCol="0" anchor="ctr"/>
-          <a:lstStyle/>
-          <a:p>
-            <a:pPr indent="0" marL="0">
-              <a:buNone/>
-            </a:pPr>
-            <a:r>
-              <a:rPr lang="en-US" sz="1100" b="1" dirty="0">
-                <a:solidFill>
-                  <a:srgbClr val="0B4F4A"/>
-                </a:solidFill>
-                <a:latin typeface="Courier New" pitchFamily="34" charset="0"/>
-                <a:ea typeface="Courier New" pitchFamily="34" charset="-122"/>
-                <a:cs typeface="Courier New" pitchFamily="34" charset="-120"/>
-              </a:rPr>
-              <a:t>reversed = True flag</a:t>
-            </a:r>
-            <a:endParaRPr lang="en-US" sz="1100" dirty="0"/>
-          </a:p>
-        </p:txBody>
-      </p:sp>
-      <p:sp>
-        <p:nvSpPr>
-          <p:cNvPr id="19" name="Text 17"/>
-          <p:cNvSpPr txBox="1"/>
-          <p:nvPr/>
-        </p:nvSpPr>
-        <p:spPr>
-          <a:xfrm>
-            <a:off x="5394960" y="3749040"/>
-            <a:ext cx="3154680" cy="868680"/>
-          </a:xfrm>
-          <a:prstGeom prst="rect">
-            <a:avLst/>
-          </a:prstGeom>
-          <a:noFill/>
-          <a:ln/>
-        </p:spPr>
-        <p:txBody>
-          <a:bodyPr wrap="square" lIns="0" tIns="0" rIns="0" bIns="0" rtlCol="0" anchor="t"/>
-          <a:lstStyle/>
-          <a:p>
-            <a:pPr indent="0" marL="0">
-              <a:buNone/>
-            </a:pPr>
-            <a:r>
-              <a:rPr lang="en-US" sz="1250" dirty="0">
-                <a:solidFill>
-                  <a:srgbClr val="1D2B2A"/>
-                </a:solidFill>
-                <a:latin typeface="Calibri" pitchFamily="34" charset="0"/>
-                <a:ea typeface="Calibri" pitchFamily="34" charset="-122"/>
-                <a:cs typeface="Calibri" pitchFamily="34" charset="-120"/>
-              </a:rPr>
-              <a:t>A reversal has its own date, amount, approver and reason, and can be partial.</a:t>
-            </a:r>
-            <a:endParaRPr lang="en-US" sz="1250" dirty="0"/>
-          </a:p>
-        </p:txBody>
-      </p:sp>
+      <p:pic>
+        <p:nvPicPr>
+          <p:cNvPr id="5" name="Image 0" descr="/home/user/commercial-banking/docs/state_1_payment.png">    </p:cNvPr>
+          <p:cNvPicPr>
+            <a:picLocks noChangeAspect="1"/>
+          </p:cNvPicPr>
+          <p:nvPr/>
+        </p:nvPicPr>
+        <p:blipFill>
+          <a:blip r:embed="rId1"/>
+          <a:stretch>
+            <a:fillRect/>
+          </a:stretch>
+        </p:blipFill>
+        <p:spPr>
+          <a:xfrm>
+            <a:off x="4526280" y="1668518"/>
+            <a:ext cx="4069080" cy="2469404"/>
+          </a:xfrm>
+          <a:prstGeom prst="rect">
+            <a:avLst/>
+          </a:prstGeom>
+        </p:spPr>
+      </p:pic>
     </p:spTree>
   </p:cSld>
   <p:clrMapOvr>
@@ -7904,7 +9228,7 @@
                 <a:ea typeface="Cambria" pitchFamily="34" charset="-122"/>
                 <a:cs typeface="Cambria" pitchFamily="34" charset="-120"/>
               </a:rPr>
-              <a:t>16 scenarios break the normal workflow</a:t>
+              <a:t>Tempting inheritances we rejected</a:t>
             </a:r>
             <a:endParaRPr lang="en-US" sz="2800" dirty="0"/>
           </a:p>
@@ -7943,7 +9267,7 @@
                 <a:ea typeface="Calibri" pitchFamily="34" charset="-122"/>
                 <a:cs typeface="Calibri" pitchFamily="34" charset="-120"/>
               </a:rPr>
-              <a:t>All ten critical cases in the brief are covered, plus every participant it names</a:t>
+              <a:t>Ten in the report; four of the strongest</a:t>
             </a:r>
             <a:endParaRPr lang="en-US" sz="1200" dirty="0"/>
           </a:p>
@@ -7957,35 +9281,44 @@
         </p:nvSpPr>
         <p:spPr>
           <a:xfrm>
-            <a:off x="457200" y="1188720"/>
+            <a:off x="457200" y="1325880"/>
+            <a:ext cx="4023360" cy="1600200"/>
+          </a:xfrm>
+          <a:prstGeom prst="roundRect">
+            <a:avLst>
+              <a:gd name="adj" fmla="val 4571"/>
+            </a:avLst>
+          </a:prstGeom>
+          <a:solidFill>
+            <a:srgbClr val="E8F0EE"/>
+          </a:solidFill>
+          <a:ln w="12700">
+            <a:solidFill>
+              <a:srgbClr val="E8F0EE"/>
+            </a:solidFill>
+            <a:prstDash val="solid"/>
+          </a:ln>
+        </p:spPr>
+      </p:sp>
+      <p:sp>
+        <p:nvSpPr>
+          <p:cNvPr id="5" name="Text 3"/>
+          <p:cNvSpPr txBox="1"/>
+          <p:nvPr/>
+        </p:nvSpPr>
+        <p:spPr>
+          <a:xfrm>
+            <a:off x="640080" y="1527048"/>
             <a:ext cx="384048" cy="384048"/>
           </a:xfrm>
-          <a:prstGeom prst="ellipse">
+          <a:prstGeom prst="rect">
             <a:avLst/>
           </a:prstGeom>
           <a:solidFill>
-            <a:srgbClr val="B8862F"/>
+            <a:srgbClr val="9C3D10"/>
           </a:solidFill>
           <a:ln/>
         </p:spPr>
-      </p:sp>
-      <p:sp>
-        <p:nvSpPr>
-          <p:cNvPr id="5" name="Text 3"/>
-          <p:cNvSpPr txBox="1"/>
-          <p:nvPr/>
-        </p:nvSpPr>
-        <p:spPr>
-          <a:xfrm>
-            <a:off x="457200" y="1188720"/>
-            <a:ext cx="384048" cy="384048"/>
-          </a:xfrm>
-          <a:prstGeom prst="rect">
-            <a:avLst/>
-          </a:prstGeom>
-          <a:noFill/>
-          <a:ln/>
-        </p:spPr>
         <p:txBody>
           <a:bodyPr wrap="square" lIns="0" tIns="0" rIns="0" bIns="0" rtlCol="0" anchor="ctr"/>
           <a:lstStyle/>
@@ -7994,7 +9327,7 @@
               <a:buNone/>
             </a:pPr>
             <a:r>
-              <a:rPr lang="en-US" sz="1400" b="1" dirty="0">
+              <a:rPr lang="en-US" sz="1600" b="1" dirty="0">
                 <a:solidFill>
                   <a:srgbClr val="FFFFFF"/>
                 </a:solidFill>
@@ -8002,9 +9335,9 @@
                 <a:ea typeface="Cambria" pitchFamily="34" charset="-122"/>
                 <a:cs typeface="Cambria" pitchFamily="34" charset="-120"/>
               </a:rPr>
-              <a:t>1</a:t>
-            </a:r>
-            <a:endParaRPr lang="en-US" sz="1400" dirty="0"/>
+              <a:t>x</a:t>
+            </a:r>
+            <a:endParaRPr lang="en-US" sz="1600" dirty="0"/>
           </a:p>
         </p:txBody>
       </p:sp>
@@ -8016,8 +9349,8 @@
         </p:nvSpPr>
         <p:spPr>
           <a:xfrm>
-            <a:off x="960120" y="1188720"/>
-            <a:ext cx="3566160" cy="384048"/>
+            <a:off x="1188720" y="1508760"/>
+            <a:ext cx="3154680" cy="411480"/>
           </a:xfrm>
           <a:prstGeom prst="rect">
             <a:avLst/>
@@ -8033,6 +9366,45 @@
               <a:buNone/>
             </a:pPr>
             <a:r>
+              <a:rPr lang="en-US" sz="1100" b="1" dirty="0">
+                <a:solidFill>
+                  <a:srgbClr val="0B4F4A"/>
+                </a:solidFill>
+                <a:latin typeface="Courier New" pitchFamily="34" charset="0"/>
+                <a:ea typeface="Courier New" pitchFamily="34" charset="-122"/>
+                <a:cs typeface="Courier New" pitchFamily="34" charset="-120"/>
+              </a:rPr>
+              <a:t>Customer(Person)</a:t>
+            </a:r>
+            <a:endParaRPr lang="en-US" sz="1100" dirty="0"/>
+          </a:p>
+        </p:txBody>
+      </p:sp>
+      <p:sp>
+        <p:nvSpPr>
+          <p:cNvPr id="7" name="Text 5"/>
+          <p:cNvSpPr txBox="1"/>
+          <p:nvPr/>
+        </p:nvSpPr>
+        <p:spPr>
+          <a:xfrm>
+            <a:off x="1188720" y="1965960"/>
+            <a:ext cx="3154680" cy="868680"/>
+          </a:xfrm>
+          <a:prstGeom prst="rect">
+            <a:avLst/>
+          </a:prstGeom>
+          <a:noFill/>
+          <a:ln/>
+        </p:spPr>
+        <p:txBody>
+          <a:bodyPr wrap="square" lIns="0" tIns="0" rIns="0" bIns="0" rtlCol="0" anchor="t"/>
+          <a:lstStyle/>
+          <a:p>
+            <a:pPr indent="0" marL="0">
+              <a:buNone/>
+            </a:pPr>
+            <a:r>
               <a:rPr lang="en-US" sz="1250" dirty="0">
                 <a:solidFill>
                   <a:srgbClr val="1D2B2A"/>
@@ -8041,7 +9413,7 @@
                 <a:ea typeface="Calibri" pitchFamily="34" charset="-122"/>
                 <a:cs typeface="Calibri" pitchFamily="34" charset="-120"/>
               </a:rPr>
-              <a:t>Document expires mid-onboarding</a:t>
+              <a:t>One human is customer, director and signatory at once; roles start and end on different dates.</a:t>
             </a:r>
             <a:endParaRPr lang="en-US" sz="1250" dirty="0"/>
           </a:p>
@@ -8049,41 +9421,50 @@
       </p:sp>
       <p:sp>
         <p:nvSpPr>
-          <p:cNvPr id="7" name="Shape 5"/>
+          <p:cNvPr id="8" name="Shape 6"/>
           <p:cNvSpPr/>
           <p:nvPr/>
         </p:nvSpPr>
         <p:spPr>
           <a:xfrm>
-            <a:off x="457200" y="1645920"/>
+            <a:off x="4663440" y="1325880"/>
+            <a:ext cx="4023360" cy="1600200"/>
+          </a:xfrm>
+          <a:prstGeom prst="roundRect">
+            <a:avLst>
+              <a:gd name="adj" fmla="val 4571"/>
+            </a:avLst>
+          </a:prstGeom>
+          <a:solidFill>
+            <a:srgbClr val="E8F0EE"/>
+          </a:solidFill>
+          <a:ln w="12700">
+            <a:solidFill>
+              <a:srgbClr val="E8F0EE"/>
+            </a:solidFill>
+            <a:prstDash val="solid"/>
+          </a:ln>
+        </p:spPr>
+      </p:sp>
+      <p:sp>
+        <p:nvSpPr>
+          <p:cNvPr id="9" name="Text 7"/>
+          <p:cNvSpPr txBox="1"/>
+          <p:nvPr/>
+        </p:nvSpPr>
+        <p:spPr>
+          <a:xfrm>
+            <a:off x="4846320" y="1527048"/>
             <a:ext cx="384048" cy="384048"/>
           </a:xfrm>
-          <a:prstGeom prst="ellipse">
+          <a:prstGeom prst="rect">
             <a:avLst/>
           </a:prstGeom>
           <a:solidFill>
-            <a:srgbClr val="B8862F"/>
+            <a:srgbClr val="9C3D10"/>
           </a:solidFill>
           <a:ln/>
         </p:spPr>
-      </p:sp>
-      <p:sp>
-        <p:nvSpPr>
-          <p:cNvPr id="8" name="Text 6"/>
-          <p:cNvSpPr txBox="1"/>
-          <p:nvPr/>
-        </p:nvSpPr>
-        <p:spPr>
-          <a:xfrm>
-            <a:off x="457200" y="1645920"/>
-            <a:ext cx="384048" cy="384048"/>
-          </a:xfrm>
-          <a:prstGeom prst="rect">
-            <a:avLst/>
-          </a:prstGeom>
-          <a:noFill/>
-          <a:ln/>
-        </p:spPr>
         <p:txBody>
           <a:bodyPr wrap="square" lIns="0" tIns="0" rIns="0" bIns="0" rtlCol="0" anchor="ctr"/>
           <a:lstStyle/>
@@ -8092,7 +9473,7 @@
               <a:buNone/>
             </a:pPr>
             <a:r>
-              <a:rPr lang="en-US" sz="1400" b="1" dirty="0">
+              <a:rPr lang="en-US" sz="1600" b="1" dirty="0">
                 <a:solidFill>
                   <a:srgbClr val="FFFFFF"/>
                 </a:solidFill>
@@ -8100,22 +9481,22 @@
                 <a:ea typeface="Cambria" pitchFamily="34" charset="-122"/>
                 <a:cs typeface="Cambria" pitchFamily="34" charset="-120"/>
               </a:rPr>
-              <a:t>2</a:t>
-            </a:r>
-            <a:endParaRPr lang="en-US" sz="1400" dirty="0"/>
-          </a:p>
-        </p:txBody>
-      </p:sp>
-      <p:sp>
-        <p:nvSpPr>
-          <p:cNvPr id="9" name="Text 7"/>
-          <p:cNvSpPr txBox="1"/>
-          <p:nvPr/>
-        </p:nvSpPr>
-        <p:spPr>
-          <a:xfrm>
-            <a:off x="960120" y="1645920"/>
-            <a:ext cx="3566160" cy="384048"/>
+              <a:t>x</a:t>
+            </a:r>
+            <a:endParaRPr lang="en-US" sz="1600" dirty="0"/>
+          </a:p>
+        </p:txBody>
+      </p:sp>
+      <p:sp>
+        <p:nvSpPr>
+          <p:cNvPr id="10" name="Text 8"/>
+          <p:cNvSpPr txBox="1"/>
+          <p:nvPr/>
+        </p:nvSpPr>
+        <p:spPr>
+          <a:xfrm>
+            <a:off x="5394960" y="1508760"/>
+            <a:ext cx="3154680" cy="411480"/>
           </a:xfrm>
           <a:prstGeom prst="rect">
             <a:avLst/>
@@ -8131,6 +9512,45 @@
               <a:buNone/>
             </a:pPr>
             <a:r>
+              <a:rPr lang="en-US" sz="1100" b="1" dirty="0">
+                <a:solidFill>
+                  <a:srgbClr val="0B4F4A"/>
+                </a:solidFill>
+                <a:latin typeface="Courier New" pitchFamily="34" charset="0"/>
+                <a:ea typeface="Courier New" pitchFamily="34" charset="-122"/>
+                <a:cs typeface="Courier New" pitchFamily="34" charset="-120"/>
+              </a:rPr>
+              <a:t>IssuedCard(DepositAccount)</a:t>
+            </a:r>
+            <a:endParaRPr lang="en-US" sz="1100" dirty="0"/>
+          </a:p>
+        </p:txBody>
+      </p:sp>
+      <p:sp>
+        <p:nvSpPr>
+          <p:cNvPr id="11" name="Text 9"/>
+          <p:cNvSpPr txBox="1"/>
+          <p:nvPr/>
+        </p:nvSpPr>
+        <p:spPr>
+          <a:xfrm>
+            <a:off x="5394960" y="1965960"/>
+            <a:ext cx="3154680" cy="868680"/>
+          </a:xfrm>
+          <a:prstGeom prst="rect">
+            <a:avLst/>
+          </a:prstGeom>
+          <a:noFill/>
+          <a:ln/>
+        </p:spPr>
+        <p:txBody>
+          <a:bodyPr wrap="square" lIns="0" tIns="0" rIns="0" bIns="0" rtlCol="0" anchor="t"/>
+          <a:lstStyle/>
+          <a:p>
+            <a:pPr indent="0" marL="0">
+              <a:buNone/>
+            </a:pPr>
+            <a:r>
               <a:rPr lang="en-US" sz="1250" dirty="0">
                 <a:solidFill>
                   <a:srgbClr val="1D2B2A"/>
@@ -8139,7 +9559,7 @@
                 <a:ea typeface="Calibri" pitchFamily="34" charset="-122"/>
                 <a:cs typeface="Calibri" pitchFamily="34" charset="-120"/>
               </a:rPr>
-              <a:t>Large transfer: dual control, hold, release</a:t>
+              <a:t>A card holds no money and many cards share one account: it is a credential.</a:t>
             </a:r>
             <a:endParaRPr lang="en-US" sz="1250" dirty="0"/>
           </a:p>
@@ -8147,41 +9567,50 @@
       </p:sp>
       <p:sp>
         <p:nvSpPr>
-          <p:cNvPr id="10" name="Shape 8"/>
+          <p:cNvPr id="12" name="Shape 10"/>
           <p:cNvSpPr/>
           <p:nvPr/>
         </p:nvSpPr>
         <p:spPr>
           <a:xfrm>
-            <a:off x="457200" y="2103120"/>
+            <a:off x="457200" y="3108960"/>
+            <a:ext cx="4023360" cy="1600200"/>
+          </a:xfrm>
+          <a:prstGeom prst="roundRect">
+            <a:avLst>
+              <a:gd name="adj" fmla="val 4571"/>
+            </a:avLst>
+          </a:prstGeom>
+          <a:solidFill>
+            <a:srgbClr val="E8F0EE"/>
+          </a:solidFill>
+          <a:ln w="12700">
+            <a:solidFill>
+              <a:srgbClr val="E8F0EE"/>
+            </a:solidFill>
+            <a:prstDash val="solid"/>
+          </a:ln>
+        </p:spPr>
+      </p:sp>
+      <p:sp>
+        <p:nvSpPr>
+          <p:cNvPr id="13" name="Text 11"/>
+          <p:cNvSpPr txBox="1"/>
+          <p:nvPr/>
+        </p:nvSpPr>
+        <p:spPr>
+          <a:xfrm>
+            <a:off x="640080" y="3310128"/>
             <a:ext cx="384048" cy="384048"/>
           </a:xfrm>
-          <a:prstGeom prst="ellipse">
+          <a:prstGeom prst="rect">
             <a:avLst/>
           </a:prstGeom>
           <a:solidFill>
-            <a:srgbClr val="B8862F"/>
+            <a:srgbClr val="9C3D10"/>
           </a:solidFill>
           <a:ln/>
         </p:spPr>
-      </p:sp>
-      <p:sp>
-        <p:nvSpPr>
-          <p:cNvPr id="11" name="Text 9"/>
-          <p:cNvSpPr txBox="1"/>
-          <p:nvPr/>
-        </p:nvSpPr>
-        <p:spPr>
-          <a:xfrm>
-            <a:off x="457200" y="2103120"/>
-            <a:ext cx="384048" cy="384048"/>
-          </a:xfrm>
-          <a:prstGeom prst="rect">
-            <a:avLst/>
-          </a:prstGeom>
-          <a:noFill/>
-          <a:ln/>
-        </p:spPr>
         <p:txBody>
           <a:bodyPr wrap="square" lIns="0" tIns="0" rIns="0" bIns="0" rtlCol="0" anchor="ctr"/>
           <a:lstStyle/>
@@ -8190,7 +9619,7 @@
               <a:buNone/>
             </a:pPr>
             <a:r>
-              <a:rPr lang="en-US" sz="1400" b="1" dirty="0">
+              <a:rPr lang="en-US" sz="1600" b="1" dirty="0">
                 <a:solidFill>
                   <a:srgbClr val="FFFFFF"/>
                 </a:solidFill>
@@ -8198,22 +9627,22 @@
                 <a:ea typeface="Cambria" pitchFamily="34" charset="-122"/>
                 <a:cs typeface="Cambria" pitchFamily="34" charset="-120"/>
               </a:rPr>
-              <a:t>3</a:t>
-            </a:r>
-            <a:endParaRPr lang="en-US" sz="1400" dirty="0"/>
-          </a:p>
-        </p:txBody>
-      </p:sp>
-      <p:sp>
-        <p:nvSpPr>
-          <p:cNvPr id="12" name="Text 10"/>
-          <p:cNvSpPr txBox="1"/>
-          <p:nvPr/>
-        </p:nvSpPr>
-        <p:spPr>
-          <a:xfrm>
-            <a:off x="960120" y="2103120"/>
-            <a:ext cx="3566160" cy="384048"/>
+              <a:t>x</a:t>
+            </a:r>
+            <a:endParaRPr lang="en-US" sz="1600" dirty="0"/>
+          </a:p>
+        </p:txBody>
+      </p:sp>
+      <p:sp>
+        <p:nvSpPr>
+          <p:cNvPr id="14" name="Text 12"/>
+          <p:cNvSpPr txBox="1"/>
+          <p:nvPr/>
+        </p:nvSpPr>
+        <p:spPr>
+          <a:xfrm>
+            <a:off x="1188720" y="3291840"/>
+            <a:ext cx="3154680" cy="411480"/>
           </a:xfrm>
           <a:prstGeom prst="rect">
             <a:avLst/>
@@ -8229,6 +9658,45 @@
               <a:buNone/>
             </a:pPr>
             <a:r>
+              <a:rPr lang="en-US" sz="1100" b="1" dirty="0">
+                <a:solidFill>
+                  <a:srgbClr val="0B4F4A"/>
+                </a:solidFill>
+                <a:latin typeface="Courier New" pitchFamily="34" charset="0"/>
+                <a:ea typeface="Courier New" pitchFamily="34" charset="-122"/>
+                <a:cs typeface="Courier New" pitchFamily="34" charset="-120"/>
+              </a:rPr>
+              <a:t>FinancingAgreement(DepositAccount)</a:t>
+            </a:r>
+            <a:endParaRPr lang="en-US" sz="1100" dirty="0"/>
+          </a:p>
+        </p:txBody>
+      </p:sp>
+      <p:sp>
+        <p:nvSpPr>
+          <p:cNvPr id="15" name="Text 13"/>
+          <p:cNvSpPr txBox="1"/>
+          <p:nvPr/>
+        </p:nvSpPr>
+        <p:spPr>
+          <a:xfrm>
+            <a:off x="1188720" y="3749040"/>
+            <a:ext cx="3154680" cy="868680"/>
+          </a:xfrm>
+          <a:prstGeom prst="rect">
+            <a:avLst/>
+          </a:prstGeom>
+          <a:noFill/>
+          <a:ln/>
+        </p:spPr>
+        <p:txBody>
+          <a:bodyPr wrap="square" lIns="0" tIns="0" rIns="0" bIns="0" rtlCol="0" anchor="t"/>
+          <a:lstStyle/>
+          <a:p>
+            <a:pPr indent="0" marL="0">
+              <a:buNone/>
+            </a:pPr>
+            <a:r>
               <a:rPr lang="en-US" sz="1250" dirty="0">
                 <a:solidFill>
                   <a:srgbClr val="1D2B2A"/>
@@ -8237,7 +9705,7 @@
                 <a:ea typeface="Calibri" pitchFamily="34" charset="-122"/>
                 <a:cs typeface="Calibri" pitchFamily="34" charset="-120"/>
               </a:rPr>
-              <a:t>Card stolen, replaced twice, found</a:t>
+              <a:t>A loan has no ledger of customer funds, holds or available balance.</a:t>
             </a:r>
             <a:endParaRPr lang="en-US" sz="1250" dirty="0"/>
           </a:p>
@@ -8245,41 +9713,50 @@
       </p:sp>
       <p:sp>
         <p:nvSpPr>
-          <p:cNvPr id="13" name="Shape 11"/>
+          <p:cNvPr id="16" name="Shape 14"/>
           <p:cNvSpPr/>
           <p:nvPr/>
         </p:nvSpPr>
         <p:spPr>
           <a:xfrm>
-            <a:off x="457200" y="2560320"/>
+            <a:off x="4663440" y="3108960"/>
+            <a:ext cx="4023360" cy="1600200"/>
+          </a:xfrm>
+          <a:prstGeom prst="roundRect">
+            <a:avLst>
+              <a:gd name="adj" fmla="val 4571"/>
+            </a:avLst>
+          </a:prstGeom>
+          <a:solidFill>
+            <a:srgbClr val="E8F0EE"/>
+          </a:solidFill>
+          <a:ln w="12700">
+            <a:solidFill>
+              <a:srgbClr val="E8F0EE"/>
+            </a:solidFill>
+            <a:prstDash val="solid"/>
+          </a:ln>
+        </p:spPr>
+      </p:sp>
+      <p:sp>
+        <p:nvSpPr>
+          <p:cNvPr id="17" name="Text 15"/>
+          <p:cNvSpPr txBox="1"/>
+          <p:nvPr/>
+        </p:nvSpPr>
+        <p:spPr>
+          <a:xfrm>
+            <a:off x="4846320" y="3310128"/>
             <a:ext cx="384048" cy="384048"/>
           </a:xfrm>
-          <a:prstGeom prst="ellipse">
+          <a:prstGeom prst="rect">
             <a:avLst/>
           </a:prstGeom>
           <a:solidFill>
-            <a:srgbClr val="B8862F"/>
+            <a:srgbClr val="9C3D10"/>
           </a:solidFill>
           <a:ln/>
         </p:spPr>
-      </p:sp>
-      <p:sp>
-        <p:nvSpPr>
-          <p:cNvPr id="14" name="Text 12"/>
-          <p:cNvSpPr txBox="1"/>
-          <p:nvPr/>
-        </p:nvSpPr>
-        <p:spPr>
-          <a:xfrm>
-            <a:off x="457200" y="2560320"/>
-            <a:ext cx="384048" cy="384048"/>
-          </a:xfrm>
-          <a:prstGeom prst="rect">
-            <a:avLst/>
-          </a:prstGeom>
-          <a:noFill/>
-          <a:ln/>
-        </p:spPr>
         <p:txBody>
           <a:bodyPr wrap="square" lIns="0" tIns="0" rIns="0" bIns="0" rtlCol="0" anchor="ctr"/>
           <a:lstStyle/>
@@ -8288,7 +9765,7 @@
               <a:buNone/>
             </a:pPr>
             <a:r>
-              <a:rPr lang="en-US" sz="1400" b="1" dirty="0">
+              <a:rPr lang="en-US" sz="1600" b="1" dirty="0">
                 <a:solidFill>
                   <a:srgbClr val="FFFFFF"/>
                 </a:solidFill>
@@ -8296,22 +9773,22 @@
                 <a:ea typeface="Cambria" pitchFamily="34" charset="-122"/>
                 <a:cs typeface="Cambria" pitchFamily="34" charset="-120"/>
               </a:rPr>
-              <a:t>4</a:t>
-            </a:r>
-            <a:endParaRPr lang="en-US" sz="1400" dirty="0"/>
-          </a:p>
-        </p:txBody>
-      </p:sp>
-      <p:sp>
-        <p:nvSpPr>
-          <p:cNvPr id="15" name="Text 13"/>
-          <p:cNvSpPr txBox="1"/>
-          <p:nvPr/>
-        </p:nvSpPr>
-        <p:spPr>
-          <a:xfrm>
-            <a:off x="960120" y="2560320"/>
-            <a:ext cx="3566160" cy="384048"/>
+              <a:t>x</a:t>
+            </a:r>
+            <a:endParaRPr lang="en-US" sz="1600" dirty="0"/>
+          </a:p>
+        </p:txBody>
+      </p:sp>
+      <p:sp>
+        <p:nvSpPr>
+          <p:cNvPr id="18" name="Text 16"/>
+          <p:cNvSpPr txBox="1"/>
+          <p:nvPr/>
+        </p:nvSpPr>
+        <p:spPr>
+          <a:xfrm>
+            <a:off x="5394960" y="3291840"/>
+            <a:ext cx="3154680" cy="411480"/>
           </a:xfrm>
           <a:prstGeom prst="rect">
             <a:avLst/>
@@ -8327,6 +9804,45 @@
               <a:buNone/>
             </a:pPr>
             <a:r>
+              <a:rPr lang="en-US" sz="1100" b="1" dirty="0">
+                <a:solidFill>
+                  <a:srgbClr val="0B4F4A"/>
+                </a:solidFill>
+                <a:latin typeface="Courier New" pitchFamily="34" charset="0"/>
+                <a:ea typeface="Courier New" pitchFamily="34" charset="-122"/>
+                <a:cs typeface="Courier New" pitchFamily="34" charset="-120"/>
+              </a:rPr>
+              <a:t>reversed = True flag</a:t>
+            </a:r>
+            <a:endParaRPr lang="en-US" sz="1100" dirty="0"/>
+          </a:p>
+        </p:txBody>
+      </p:sp>
+      <p:sp>
+        <p:nvSpPr>
+          <p:cNvPr id="19" name="Text 17"/>
+          <p:cNvSpPr txBox="1"/>
+          <p:nvPr/>
+        </p:nvSpPr>
+        <p:spPr>
+          <a:xfrm>
+            <a:off x="5394960" y="3749040"/>
+            <a:ext cx="3154680" cy="868680"/>
+          </a:xfrm>
+          <a:prstGeom prst="rect">
+            <a:avLst/>
+          </a:prstGeom>
+          <a:noFill/>
+          <a:ln/>
+        </p:spPr>
+        <p:txBody>
+          <a:bodyPr wrap="square" lIns="0" tIns="0" rIns="0" bIns="0" rtlCol="0" anchor="t"/>
+          <a:lstStyle/>
+          <a:p>
+            <a:pPr indent="0" marL="0">
+              <a:buNone/>
+            </a:pPr>
+            <a:r>
               <a:rPr lang="en-US" sz="1250" dirty="0">
                 <a:solidFill>
                   <a:srgbClr val="1D2B2A"/>
@@ -8335,1183 +9851,7 @@
                 <a:ea typeface="Calibri" pitchFamily="34" charset="-122"/>
                 <a:cs typeface="Calibri" pitchFamily="34" charset="-120"/>
               </a:rPr>
-              <a:t>Posted, reversed, re-posted, disputed</a:t>
-            </a:r>
-            <a:endParaRPr lang="en-US" sz="1250" dirty="0"/>
-          </a:p>
-        </p:txBody>
-      </p:sp>
-      <p:sp>
-        <p:nvSpPr>
-          <p:cNvPr id="16" name="Shape 14"/>
-          <p:cNvSpPr/>
-          <p:nvPr/>
-        </p:nvSpPr>
-        <p:spPr>
-          <a:xfrm>
-            <a:off x="457200" y="3017520"/>
-            <a:ext cx="384048" cy="384048"/>
-          </a:xfrm>
-          <a:prstGeom prst="ellipse">
-            <a:avLst/>
-          </a:prstGeom>
-          <a:solidFill>
-            <a:srgbClr val="B8862F"/>
-          </a:solidFill>
-          <a:ln/>
-        </p:spPr>
-      </p:sp>
-      <p:sp>
-        <p:nvSpPr>
-          <p:cNvPr id="17" name="Text 15"/>
-          <p:cNvSpPr txBox="1"/>
-          <p:nvPr/>
-        </p:nvSpPr>
-        <p:spPr>
-          <a:xfrm>
-            <a:off x="457200" y="3017520"/>
-            <a:ext cx="384048" cy="384048"/>
-          </a:xfrm>
-          <a:prstGeom prst="rect">
-            <a:avLst/>
-          </a:prstGeom>
-          <a:noFill/>
-          <a:ln/>
-        </p:spPr>
-        <p:txBody>
-          <a:bodyPr wrap="square" lIns="0" tIns="0" rIns="0" bIns="0" rtlCol="0" anchor="ctr"/>
-          <a:lstStyle/>
-          <a:p>
-            <a:pPr algn="ctr" indent="0" marL="0">
-              <a:buNone/>
-            </a:pPr>
-            <a:r>
-              <a:rPr lang="en-US" sz="1400" b="1" dirty="0">
-                <a:solidFill>
-                  <a:srgbClr val="FFFFFF"/>
-                </a:solidFill>
-                <a:latin typeface="Cambria" pitchFamily="34" charset="0"/>
-                <a:ea typeface="Cambria" pitchFamily="34" charset="-122"/>
-                <a:cs typeface="Cambria" pitchFamily="34" charset="-120"/>
-              </a:rPr>
-              <a:t>5</a:t>
-            </a:r>
-            <a:endParaRPr lang="en-US" sz="1400" dirty="0"/>
-          </a:p>
-        </p:txBody>
-      </p:sp>
-      <p:sp>
-        <p:nvSpPr>
-          <p:cNvPr id="18" name="Text 16"/>
-          <p:cNvSpPr txBox="1"/>
-          <p:nvPr/>
-        </p:nvSpPr>
-        <p:spPr>
-          <a:xfrm>
-            <a:off x="960120" y="3017520"/>
-            <a:ext cx="3566160" cy="384048"/>
-          </a:xfrm>
-          <a:prstGeom prst="rect">
-            <a:avLst/>
-          </a:prstGeom>
-          <a:noFill/>
-          <a:ln/>
-        </p:spPr>
-        <p:txBody>
-          <a:bodyPr wrap="square" lIns="0" tIns="0" rIns="0" bIns="0" rtlCol="0" anchor="ctr"/>
-          <a:lstStyle/>
-          <a:p>
-            <a:pPr indent="0" marL="0">
-              <a:buNone/>
-            </a:pPr>
-            <a:r>
-              <a:rPr lang="en-US" sz="1250" dirty="0">
-                <a:solidFill>
-                  <a:srgbClr val="1D2B2A"/>
-                </a:solidFill>
-                <a:latin typeface="Calibri" pitchFamily="34" charset="0"/>
-                <a:ea typeface="Calibri" pitchFamily="34" charset="-122"/>
-                <a:cs typeface="Calibri" pitchFamily="34" charset="-120"/>
-              </a:rPr>
-              <a:t>Restricted then cleared</a:t>
-            </a:r>
-            <a:endParaRPr lang="en-US" sz="1250" dirty="0"/>
-          </a:p>
-        </p:txBody>
-      </p:sp>
-      <p:sp>
-        <p:nvSpPr>
-          <p:cNvPr id="19" name="Shape 17"/>
-          <p:cNvSpPr/>
-          <p:nvPr/>
-        </p:nvSpPr>
-        <p:spPr>
-          <a:xfrm>
-            <a:off x="457200" y="3474720"/>
-            <a:ext cx="384048" cy="384048"/>
-          </a:xfrm>
-          <a:prstGeom prst="ellipse">
-            <a:avLst/>
-          </a:prstGeom>
-          <a:solidFill>
-            <a:srgbClr val="B8862F"/>
-          </a:solidFill>
-          <a:ln/>
-        </p:spPr>
-      </p:sp>
-      <p:sp>
-        <p:nvSpPr>
-          <p:cNvPr id="20" name="Text 18"/>
-          <p:cNvSpPr txBox="1"/>
-          <p:nvPr/>
-        </p:nvSpPr>
-        <p:spPr>
-          <a:xfrm>
-            <a:off x="457200" y="3474720"/>
-            <a:ext cx="384048" cy="384048"/>
-          </a:xfrm>
-          <a:prstGeom prst="rect">
-            <a:avLst/>
-          </a:prstGeom>
-          <a:noFill/>
-          <a:ln/>
-        </p:spPr>
-        <p:txBody>
-          <a:bodyPr wrap="square" lIns="0" tIns="0" rIns="0" bIns="0" rtlCol="0" anchor="ctr"/>
-          <a:lstStyle/>
-          <a:p>
-            <a:pPr algn="ctr" indent="0" marL="0">
-              <a:buNone/>
-            </a:pPr>
-            <a:r>
-              <a:rPr lang="en-US" sz="1400" b="1" dirty="0">
-                <a:solidFill>
-                  <a:srgbClr val="FFFFFF"/>
-                </a:solidFill>
-                <a:latin typeface="Cambria" pitchFamily="34" charset="0"/>
-                <a:ea typeface="Cambria" pitchFamily="34" charset="-122"/>
-                <a:cs typeface="Cambria" pitchFamily="34" charset="-120"/>
-              </a:rPr>
-              <a:t>6</a:t>
-            </a:r>
-            <a:endParaRPr lang="en-US" sz="1400" dirty="0"/>
-          </a:p>
-        </p:txBody>
-      </p:sp>
-      <p:sp>
-        <p:nvSpPr>
-          <p:cNvPr id="21" name="Text 19"/>
-          <p:cNvSpPr txBox="1"/>
-          <p:nvPr/>
-        </p:nvSpPr>
-        <p:spPr>
-          <a:xfrm>
-            <a:off x="960120" y="3474720"/>
-            <a:ext cx="3566160" cy="384048"/>
-          </a:xfrm>
-          <a:prstGeom prst="rect">
-            <a:avLst/>
-          </a:prstGeom>
-          <a:noFill/>
-          <a:ln/>
-        </p:spPr>
-        <p:txBody>
-          <a:bodyPr wrap="square" lIns="0" tIns="0" rIns="0" bIns="0" rtlCol="0" anchor="ctr"/>
-          <a:lstStyle/>
-          <a:p>
-            <a:pPr indent="0" marL="0">
-              <a:buNone/>
-            </a:pPr>
-            <a:r>
-              <a:rPr lang="en-US" sz="1250" dirty="0">
-                <a:solidFill>
-                  <a:srgbClr val="1D2B2A"/>
-                </a:solidFill>
-                <a:latin typeface="Calibri" pitchFamily="34" charset="0"/>
-                <a:ea typeface="Calibri" pitchFamily="34" charset="-122"/>
-                <a:cs typeface="Calibri" pitchFamily="34" charset="-120"/>
-              </a:rPr>
-              <a:t>Financing: limits, arrears, restructure</a:t>
-            </a:r>
-            <a:endParaRPr lang="en-US" sz="1250" dirty="0"/>
-          </a:p>
-        </p:txBody>
-      </p:sp>
-      <p:sp>
-        <p:nvSpPr>
-          <p:cNvPr id="22" name="Shape 20"/>
-          <p:cNvSpPr/>
-          <p:nvPr/>
-        </p:nvSpPr>
-        <p:spPr>
-          <a:xfrm>
-            <a:off x="457200" y="3931920"/>
-            <a:ext cx="384048" cy="384048"/>
-          </a:xfrm>
-          <a:prstGeom prst="ellipse">
-            <a:avLst/>
-          </a:prstGeom>
-          <a:solidFill>
-            <a:srgbClr val="B8862F"/>
-          </a:solidFill>
-          <a:ln/>
-        </p:spPr>
-      </p:sp>
-      <p:sp>
-        <p:nvSpPr>
-          <p:cNvPr id="23" name="Text 21"/>
-          <p:cNvSpPr txBox="1"/>
-          <p:nvPr/>
-        </p:nvSpPr>
-        <p:spPr>
-          <a:xfrm>
-            <a:off x="457200" y="3931920"/>
-            <a:ext cx="384048" cy="384048"/>
-          </a:xfrm>
-          <a:prstGeom prst="rect">
-            <a:avLst/>
-          </a:prstGeom>
-          <a:noFill/>
-          <a:ln/>
-        </p:spPr>
-        <p:txBody>
-          <a:bodyPr wrap="square" lIns="0" tIns="0" rIns="0" bIns="0" rtlCol="0" anchor="ctr"/>
-          <a:lstStyle/>
-          <a:p>
-            <a:pPr algn="ctr" indent="0" marL="0">
-              <a:buNone/>
-            </a:pPr>
-            <a:r>
-              <a:rPr lang="en-US" sz="1400" b="1" dirty="0">
-                <a:solidFill>
-                  <a:srgbClr val="FFFFFF"/>
-                </a:solidFill>
-                <a:latin typeface="Cambria" pitchFamily="34" charset="0"/>
-                <a:ea typeface="Cambria" pitchFamily="34" charset="-122"/>
-                <a:cs typeface="Cambria" pitchFamily="34" charset="-120"/>
-              </a:rPr>
-              <a:t>7</a:t>
-            </a:r>
-            <a:endParaRPr lang="en-US" sz="1400" dirty="0"/>
-          </a:p>
-        </p:txBody>
-      </p:sp>
-      <p:sp>
-        <p:nvSpPr>
-          <p:cNvPr id="24" name="Text 22"/>
-          <p:cNvSpPr txBox="1"/>
-          <p:nvPr/>
-        </p:nvSpPr>
-        <p:spPr>
-          <a:xfrm>
-            <a:off x="960120" y="3931920"/>
-            <a:ext cx="3566160" cy="384048"/>
-          </a:xfrm>
-          <a:prstGeom prst="rect">
-            <a:avLst/>
-          </a:prstGeom>
-          <a:noFill/>
-          <a:ln/>
-        </p:spPr>
-        <p:txBody>
-          <a:bodyPr wrap="square" lIns="0" tIns="0" rIns="0" bIns="0" rtlCol="0" anchor="ctr"/>
-          <a:lstStyle/>
-          <a:p>
-            <a:pPr indent="0" marL="0">
-              <a:buNone/>
-            </a:pPr>
-            <a:r>
-              <a:rPr lang="en-US" sz="1250" dirty="0">
-                <a:solidFill>
-                  <a:srgbClr val="1D2B2A"/>
-                </a:solidFill>
-                <a:latin typeface="Calibri" pitchFamily="34" charset="0"/>
-                <a:ea typeface="Calibri" pitchFamily="34" charset="-122"/>
-                <a:cs typeface="Calibri" pitchFamily="34" charset="-120"/>
-              </a:rPr>
-              <a:t>Director leaves; authority provable</a:t>
-            </a:r>
-            <a:endParaRPr lang="en-US" sz="1250" dirty="0"/>
-          </a:p>
-        </p:txBody>
-      </p:sp>
-      <p:sp>
-        <p:nvSpPr>
-          <p:cNvPr id="25" name="Shape 23"/>
-          <p:cNvSpPr/>
-          <p:nvPr/>
-        </p:nvSpPr>
-        <p:spPr>
-          <a:xfrm>
-            <a:off x="457200" y="4389120"/>
-            <a:ext cx="384048" cy="384048"/>
-          </a:xfrm>
-          <a:prstGeom prst="ellipse">
-            <a:avLst/>
-          </a:prstGeom>
-          <a:solidFill>
-            <a:srgbClr val="B8862F"/>
-          </a:solidFill>
-          <a:ln/>
-        </p:spPr>
-      </p:sp>
-      <p:sp>
-        <p:nvSpPr>
-          <p:cNvPr id="26" name="Text 24"/>
-          <p:cNvSpPr txBox="1"/>
-          <p:nvPr/>
-        </p:nvSpPr>
-        <p:spPr>
-          <a:xfrm>
-            <a:off x="457200" y="4389120"/>
-            <a:ext cx="384048" cy="384048"/>
-          </a:xfrm>
-          <a:prstGeom prst="rect">
-            <a:avLst/>
-          </a:prstGeom>
-          <a:noFill/>
-          <a:ln/>
-        </p:spPr>
-        <p:txBody>
-          <a:bodyPr wrap="square" lIns="0" tIns="0" rIns="0" bIns="0" rtlCol="0" anchor="ctr"/>
-          <a:lstStyle/>
-          <a:p>
-            <a:pPr algn="ctr" indent="0" marL="0">
-              <a:buNone/>
-            </a:pPr>
-            <a:r>
-              <a:rPr lang="en-US" sz="1400" b="1" dirty="0">
-                <a:solidFill>
-                  <a:srgbClr val="FFFFFF"/>
-                </a:solidFill>
-                <a:latin typeface="Cambria" pitchFamily="34" charset="0"/>
-                <a:ea typeface="Cambria" pitchFamily="34" charset="-122"/>
-                <a:cs typeface="Cambria" pitchFamily="34" charset="-120"/>
-              </a:rPr>
-              <a:t>8</a:t>
-            </a:r>
-            <a:endParaRPr lang="en-US" sz="1400" dirty="0"/>
-          </a:p>
-        </p:txBody>
-      </p:sp>
-      <p:sp>
-        <p:nvSpPr>
-          <p:cNvPr id="27" name="Text 25"/>
-          <p:cNvSpPr txBox="1"/>
-          <p:nvPr/>
-        </p:nvSpPr>
-        <p:spPr>
-          <a:xfrm>
-            <a:off x="960120" y="4389120"/>
-            <a:ext cx="3566160" cy="384048"/>
-          </a:xfrm>
-          <a:prstGeom prst="rect">
-            <a:avLst/>
-          </a:prstGeom>
-          <a:noFill/>
-          <a:ln/>
-        </p:spPr>
-        <p:txBody>
-          <a:bodyPr wrap="square" lIns="0" tIns="0" rIns="0" bIns="0" rtlCol="0" anchor="ctr"/>
-          <a:lstStyle/>
-          <a:p>
-            <a:pPr indent="0" marL="0">
-              <a:buNone/>
-            </a:pPr>
-            <a:r>
-              <a:rPr lang="en-US" sz="1250" dirty="0">
-                <a:solidFill>
-                  <a:srgbClr val="1D2B2A"/>
-                </a:solidFill>
-                <a:latin typeface="Calibri" pitchFamily="34" charset="0"/>
-                <a:ea typeface="Calibri" pitchFamily="34" charset="-122"/>
-                <a:cs typeface="Calibri" pitchFamily="34" charset="-120"/>
-              </a:rPr>
-              <a:t>Beneficiary changes bank details</a:t>
-            </a:r>
-            <a:endParaRPr lang="en-US" sz="1250" dirty="0"/>
-          </a:p>
-        </p:txBody>
-      </p:sp>
-      <p:sp>
-        <p:nvSpPr>
-          <p:cNvPr id="28" name="Shape 26"/>
-          <p:cNvSpPr/>
-          <p:nvPr/>
-        </p:nvSpPr>
-        <p:spPr>
-          <a:xfrm>
-            <a:off x="4663440" y="1188720"/>
-            <a:ext cx="384048" cy="384048"/>
-          </a:xfrm>
-          <a:prstGeom prst="ellipse">
-            <a:avLst/>
-          </a:prstGeom>
-          <a:solidFill>
-            <a:srgbClr val="B8862F"/>
-          </a:solidFill>
-          <a:ln/>
-        </p:spPr>
-      </p:sp>
-      <p:sp>
-        <p:nvSpPr>
-          <p:cNvPr id="29" name="Text 27"/>
-          <p:cNvSpPr txBox="1"/>
-          <p:nvPr/>
-        </p:nvSpPr>
-        <p:spPr>
-          <a:xfrm>
-            <a:off x="4663440" y="1188720"/>
-            <a:ext cx="384048" cy="384048"/>
-          </a:xfrm>
-          <a:prstGeom prst="rect">
-            <a:avLst/>
-          </a:prstGeom>
-          <a:noFill/>
-          <a:ln/>
-        </p:spPr>
-        <p:txBody>
-          <a:bodyPr wrap="square" lIns="0" tIns="0" rIns="0" bIns="0" rtlCol="0" anchor="ctr"/>
-          <a:lstStyle/>
-          <a:p>
-            <a:pPr algn="ctr" indent="0" marL="0">
-              <a:buNone/>
-            </a:pPr>
-            <a:r>
-              <a:rPr lang="en-US" sz="1400" b="1" dirty="0">
-                <a:solidFill>
-                  <a:srgbClr val="FFFFFF"/>
-                </a:solidFill>
-                <a:latin typeface="Cambria" pitchFamily="34" charset="0"/>
-                <a:ea typeface="Cambria" pitchFamily="34" charset="-122"/>
-                <a:cs typeface="Cambria" pitchFamily="34" charset="-120"/>
-              </a:rPr>
-              <a:t>9</a:t>
-            </a:r>
-            <a:endParaRPr lang="en-US" sz="1400" dirty="0"/>
-          </a:p>
-        </p:txBody>
-      </p:sp>
-      <p:sp>
-        <p:nvSpPr>
-          <p:cNvPr id="30" name="Text 28"/>
-          <p:cNvSpPr txBox="1"/>
-          <p:nvPr/>
-        </p:nvSpPr>
-        <p:spPr>
-          <a:xfrm>
-            <a:off x="5166360" y="1188720"/>
-            <a:ext cx="3566160" cy="384048"/>
-          </a:xfrm>
-          <a:prstGeom prst="rect">
-            <a:avLst/>
-          </a:prstGeom>
-          <a:noFill/>
-          <a:ln/>
-        </p:spPr>
-        <p:txBody>
-          <a:bodyPr wrap="square" lIns="0" tIns="0" rIns="0" bIns="0" rtlCol="0" anchor="ctr"/>
-          <a:lstStyle/>
-          <a:p>
-            <a:pPr indent="0" marL="0">
-              <a:buNone/>
-            </a:pPr>
-            <a:r>
-              <a:rPr lang="en-US" sz="1250" dirty="0">
-                <a:solidFill>
-                  <a:srgbClr val="1D2B2A"/>
-                </a:solidFill>
-                <a:latin typeface="Calibri" pitchFamily="34" charset="0"/>
-                <a:ea typeface="Calibri" pitchFamily="34" charset="-122"/>
-                <a:cs typeface="Calibri" pitchFamily="34" charset="-120"/>
-              </a:rPr>
-              <a:t>Evidence keeps corrected data</a:t>
-            </a:r>
-            <a:endParaRPr lang="en-US" sz="1250" dirty="0"/>
-          </a:p>
-        </p:txBody>
-      </p:sp>
-      <p:sp>
-        <p:nvSpPr>
-          <p:cNvPr id="31" name="Shape 29"/>
-          <p:cNvSpPr/>
-          <p:nvPr/>
-        </p:nvSpPr>
-        <p:spPr>
-          <a:xfrm>
-            <a:off x="4663440" y="1645920"/>
-            <a:ext cx="384048" cy="384048"/>
-          </a:xfrm>
-          <a:prstGeom prst="ellipse">
-            <a:avLst/>
-          </a:prstGeom>
-          <a:solidFill>
-            <a:srgbClr val="B8862F"/>
-          </a:solidFill>
-          <a:ln/>
-        </p:spPr>
-      </p:sp>
-      <p:sp>
-        <p:nvSpPr>
-          <p:cNvPr id="32" name="Text 30"/>
-          <p:cNvSpPr txBox="1"/>
-          <p:nvPr/>
-        </p:nvSpPr>
-        <p:spPr>
-          <a:xfrm>
-            <a:off x="4663440" y="1645920"/>
-            <a:ext cx="384048" cy="384048"/>
-          </a:xfrm>
-          <a:prstGeom prst="rect">
-            <a:avLst/>
-          </a:prstGeom>
-          <a:noFill/>
-          <a:ln/>
-        </p:spPr>
-        <p:txBody>
-          <a:bodyPr wrap="square" lIns="0" tIns="0" rIns="0" bIns="0" rtlCol="0" anchor="ctr"/>
-          <a:lstStyle/>
-          <a:p>
-            <a:pPr algn="ctr" indent="0" marL="0">
-              <a:buNone/>
-            </a:pPr>
-            <a:r>
-              <a:rPr lang="en-US" sz="1400" b="1" dirty="0">
-                <a:solidFill>
-                  <a:srgbClr val="FFFFFF"/>
-                </a:solidFill>
-                <a:latin typeface="Cambria" pitchFamily="34" charset="0"/>
-                <a:ea typeface="Cambria" pitchFamily="34" charset="-122"/>
-                <a:cs typeface="Cambria" pitchFamily="34" charset="-120"/>
-              </a:rPr>
-              <a:t>10</a:t>
-            </a:r>
-            <a:endParaRPr lang="en-US" sz="1400" dirty="0"/>
-          </a:p>
-        </p:txBody>
-      </p:sp>
-      <p:sp>
-        <p:nvSpPr>
-          <p:cNvPr id="33" name="Text 31"/>
-          <p:cNvSpPr txBox="1"/>
-          <p:nvPr/>
-        </p:nvSpPr>
-        <p:spPr>
-          <a:xfrm>
-            <a:off x="5166360" y="1645920"/>
-            <a:ext cx="3566160" cy="384048"/>
-          </a:xfrm>
-          <a:prstGeom prst="rect">
-            <a:avLst/>
-          </a:prstGeom>
-          <a:noFill/>
-          <a:ln/>
-        </p:spPr>
-        <p:txBody>
-          <a:bodyPr wrap="square" lIns="0" tIns="0" rIns="0" bIns="0" rtlCol="0" anchor="ctr"/>
-          <a:lstStyle/>
-          <a:p>
-            <a:pPr indent="0" marL="0">
-              <a:buNone/>
-            </a:pPr>
-            <a:r>
-              <a:rPr lang="en-US" sz="1250" dirty="0">
-                <a:solidFill>
-                  <a:srgbClr val="1D2B2A"/>
-                </a:solidFill>
-                <a:latin typeface="Calibri" pitchFamily="34" charset="0"/>
-                <a:ea typeface="Calibri" pitchFamily="34" charset="-122"/>
-                <a:cs typeface="Calibri" pitchFamily="34" charset="-120"/>
-              </a:rPr>
-              <a:t>Product withdrawn, terms pinned</a:t>
-            </a:r>
-            <a:endParaRPr lang="en-US" sz="1250" dirty="0"/>
-          </a:p>
-        </p:txBody>
-      </p:sp>
-      <p:sp>
-        <p:nvSpPr>
-          <p:cNvPr id="34" name="Shape 32"/>
-          <p:cNvSpPr/>
-          <p:nvPr/>
-        </p:nvSpPr>
-        <p:spPr>
-          <a:xfrm>
-            <a:off x="4663440" y="2103120"/>
-            <a:ext cx="384048" cy="384048"/>
-          </a:xfrm>
-          <a:prstGeom prst="ellipse">
-            <a:avLst/>
-          </a:prstGeom>
-          <a:solidFill>
-            <a:srgbClr val="B8862F"/>
-          </a:solidFill>
-          <a:ln/>
-        </p:spPr>
-      </p:sp>
-      <p:sp>
-        <p:nvSpPr>
-          <p:cNvPr id="35" name="Text 33"/>
-          <p:cNvSpPr txBox="1"/>
-          <p:nvPr/>
-        </p:nvSpPr>
-        <p:spPr>
-          <a:xfrm>
-            <a:off x="4663440" y="2103120"/>
-            <a:ext cx="384048" cy="384048"/>
-          </a:xfrm>
-          <a:prstGeom prst="rect">
-            <a:avLst/>
-          </a:prstGeom>
-          <a:noFill/>
-          <a:ln/>
-        </p:spPr>
-        <p:txBody>
-          <a:bodyPr wrap="square" lIns="0" tIns="0" rIns="0" bIns="0" rtlCol="0" anchor="ctr"/>
-          <a:lstStyle/>
-          <a:p>
-            <a:pPr algn="ctr" indent="0" marL="0">
-              <a:buNone/>
-            </a:pPr>
-            <a:r>
-              <a:rPr lang="en-US" sz="1400" b="1" dirty="0">
-                <a:solidFill>
-                  <a:srgbClr val="FFFFFF"/>
-                </a:solidFill>
-                <a:latin typeface="Cambria" pitchFamily="34" charset="0"/>
-                <a:ea typeface="Cambria" pitchFamily="34" charset="-122"/>
-                <a:cs typeface="Cambria" pitchFamily="34" charset="-120"/>
-              </a:rPr>
-              <a:t>11</a:t>
-            </a:r>
-            <a:endParaRPr lang="en-US" sz="1400" dirty="0"/>
-          </a:p>
-        </p:txBody>
-      </p:sp>
-      <p:sp>
-        <p:nvSpPr>
-          <p:cNvPr id="36" name="Text 34"/>
-          <p:cNvSpPr txBox="1"/>
-          <p:nvPr/>
-        </p:nvSpPr>
-        <p:spPr>
-          <a:xfrm>
-            <a:off x="5166360" y="2103120"/>
-            <a:ext cx="3566160" cy="384048"/>
-          </a:xfrm>
-          <a:prstGeom prst="rect">
-            <a:avLst/>
-          </a:prstGeom>
-          <a:noFill/>
-          <a:ln/>
-        </p:spPr>
-        <p:txBody>
-          <a:bodyPr wrap="square" lIns="0" tIns="0" rIns="0" bIns="0" rtlCol="0" anchor="ctr"/>
-          <a:lstStyle/>
-          <a:p>
-            <a:pPr indent="0" marL="0">
-              <a:buNone/>
-            </a:pPr>
-            <a:r>
-              <a:rPr lang="en-US" sz="1250" dirty="0">
-                <a:solidFill>
-                  <a:srgbClr val="1D2B2A"/>
-                </a:solidFill>
-                <a:latin typeface="Calibri" pitchFamily="34" charset="0"/>
-                <a:ea typeface="Calibri" pitchFamily="34" charset="-122"/>
-                <a:cs typeface="Calibri" pitchFamily="34" charset="-120"/>
-              </a:rPr>
-              <a:t>Branch closes; all moves</a:t>
-            </a:r>
-            <a:endParaRPr lang="en-US" sz="1250" dirty="0"/>
-          </a:p>
-        </p:txBody>
-      </p:sp>
-      <p:sp>
-        <p:nvSpPr>
-          <p:cNvPr id="37" name="Shape 35"/>
-          <p:cNvSpPr/>
-          <p:nvPr/>
-        </p:nvSpPr>
-        <p:spPr>
-          <a:xfrm>
-            <a:off x="4663440" y="2560320"/>
-            <a:ext cx="384048" cy="384048"/>
-          </a:xfrm>
-          <a:prstGeom prst="ellipse">
-            <a:avLst/>
-          </a:prstGeom>
-          <a:solidFill>
-            <a:srgbClr val="B8862F"/>
-          </a:solidFill>
-          <a:ln/>
-        </p:spPr>
-      </p:sp>
-      <p:sp>
-        <p:nvSpPr>
-          <p:cNvPr id="38" name="Text 36"/>
-          <p:cNvSpPr txBox="1"/>
-          <p:nvPr/>
-        </p:nvSpPr>
-        <p:spPr>
-          <a:xfrm>
-            <a:off x="4663440" y="2560320"/>
-            <a:ext cx="384048" cy="384048"/>
-          </a:xfrm>
-          <a:prstGeom prst="rect">
-            <a:avLst/>
-          </a:prstGeom>
-          <a:noFill/>
-          <a:ln/>
-        </p:spPr>
-        <p:txBody>
-          <a:bodyPr wrap="square" lIns="0" tIns="0" rIns="0" bIns="0" rtlCol="0" anchor="ctr"/>
-          <a:lstStyle/>
-          <a:p>
-            <a:pPr algn="ctr" indent="0" marL="0">
-              <a:buNone/>
-            </a:pPr>
-            <a:r>
-              <a:rPr lang="en-US" sz="1400" b="1" dirty="0">
-                <a:solidFill>
-                  <a:srgbClr val="FFFFFF"/>
-                </a:solidFill>
-                <a:latin typeface="Cambria" pitchFamily="34" charset="0"/>
-                <a:ea typeface="Cambria" pitchFamily="34" charset="-122"/>
-                <a:cs typeface="Cambria" pitchFamily="34" charset="-120"/>
-              </a:rPr>
-              <a:t>12</a:t>
-            </a:r>
-            <a:endParaRPr lang="en-US" sz="1400" dirty="0"/>
-          </a:p>
-        </p:txBody>
-      </p:sp>
-      <p:sp>
-        <p:nvSpPr>
-          <p:cNvPr id="39" name="Text 37"/>
-          <p:cNvSpPr txBox="1"/>
-          <p:nvPr/>
-        </p:nvSpPr>
-        <p:spPr>
-          <a:xfrm>
-            <a:off x="5166360" y="2560320"/>
-            <a:ext cx="3566160" cy="384048"/>
-          </a:xfrm>
-          <a:prstGeom prst="rect">
-            <a:avLst/>
-          </a:prstGeom>
-          <a:noFill/>
-          <a:ln/>
-        </p:spPr>
-        <p:txBody>
-          <a:bodyPr wrap="square" lIns="0" tIns="0" rIns="0" bIns="0" rtlCol="0" anchor="ctr"/>
-          <a:lstStyle/>
-          <a:p>
-            <a:pPr indent="0" marL="0">
-              <a:buNone/>
-            </a:pPr>
-            <a:r>
-              <a:rPr lang="en-US" sz="1250" dirty="0">
-                <a:solidFill>
-                  <a:srgbClr val="1D2B2A"/>
-                </a:solidFill>
-                <a:latin typeface="Calibri" pitchFamily="34" charset="0"/>
-                <a:ea typeface="Calibri" pitchFamily="34" charset="-122"/>
-                <a:cs typeface="Calibri" pitchFamily="34" charset="-120"/>
-              </a:rPr>
-              <a:t>Savings limit; closure not deletion</a:t>
-            </a:r>
-            <a:endParaRPr lang="en-US" sz="1250" dirty="0"/>
-          </a:p>
-        </p:txBody>
-      </p:sp>
-      <p:sp>
-        <p:nvSpPr>
-          <p:cNvPr id="40" name="Shape 38"/>
-          <p:cNvSpPr/>
-          <p:nvPr/>
-        </p:nvSpPr>
-        <p:spPr>
-          <a:xfrm>
-            <a:off x="4663440" y="3017520"/>
-            <a:ext cx="384048" cy="384048"/>
-          </a:xfrm>
-          <a:prstGeom prst="ellipse">
-            <a:avLst/>
-          </a:prstGeom>
-          <a:solidFill>
-            <a:srgbClr val="B8862F"/>
-          </a:solidFill>
-          <a:ln/>
-        </p:spPr>
-      </p:sp>
-      <p:sp>
-        <p:nvSpPr>
-          <p:cNvPr id="41" name="Text 39"/>
-          <p:cNvSpPr txBox="1"/>
-          <p:nvPr/>
-        </p:nvSpPr>
-        <p:spPr>
-          <a:xfrm>
-            <a:off x="4663440" y="3017520"/>
-            <a:ext cx="384048" cy="384048"/>
-          </a:xfrm>
-          <a:prstGeom prst="rect">
-            <a:avLst/>
-          </a:prstGeom>
-          <a:noFill/>
-          <a:ln/>
-        </p:spPr>
-        <p:txBody>
-          <a:bodyPr wrap="square" lIns="0" tIns="0" rIns="0" bIns="0" rtlCol="0" anchor="ctr"/>
-          <a:lstStyle/>
-          <a:p>
-            <a:pPr algn="ctr" indent="0" marL="0">
-              <a:buNone/>
-            </a:pPr>
-            <a:r>
-              <a:rPr lang="en-US" sz="1400" b="1" dirty="0">
-                <a:solidFill>
-                  <a:srgbClr val="FFFFFF"/>
-                </a:solidFill>
-                <a:latin typeface="Cambria" pitchFamily="34" charset="0"/>
-                <a:ea typeface="Cambria" pitchFamily="34" charset="-122"/>
-                <a:cs typeface="Cambria" pitchFamily="34" charset="-120"/>
-              </a:rPr>
-              <a:t>13</a:t>
-            </a:r>
-            <a:endParaRPr lang="en-US" sz="1400" dirty="0"/>
-          </a:p>
-        </p:txBody>
-      </p:sp>
-      <p:sp>
-        <p:nvSpPr>
-          <p:cNvPr id="42" name="Text 40"/>
-          <p:cNvSpPr txBox="1"/>
-          <p:nvPr/>
-        </p:nvSpPr>
-        <p:spPr>
-          <a:xfrm>
-            <a:off x="5166360" y="3017520"/>
-            <a:ext cx="3566160" cy="384048"/>
-          </a:xfrm>
-          <a:prstGeom prst="rect">
-            <a:avLst/>
-          </a:prstGeom>
-          <a:noFill/>
-          <a:ln/>
-        </p:spPr>
-        <p:txBody>
-          <a:bodyPr wrap="square" lIns="0" tIns="0" rIns="0" bIns="0" rtlCol="0" anchor="ctr"/>
-          <a:lstStyle/>
-          <a:p>
-            <a:pPr indent="0" marL="0">
-              <a:buNone/>
-            </a:pPr>
-            <a:r>
-              <a:rPr lang="en-US" sz="1250" dirty="0">
-                <a:solidFill>
-                  <a:srgbClr val="1D2B2A"/>
-                </a:solidFill>
-                <a:latin typeface="Calibri" pitchFamily="34" charset="0"/>
-                <a:ea typeface="Calibri" pitchFamily="34" charset="-122"/>
-                <a:cs typeface="Calibri" pitchFamily="34" charset="-120"/>
-              </a:rPr>
-              <a:t>Staff and customer leave</a:t>
-            </a:r>
-            <a:endParaRPr lang="en-US" sz="1250" dirty="0"/>
-          </a:p>
-        </p:txBody>
-      </p:sp>
-      <p:sp>
-        <p:nvSpPr>
-          <p:cNvPr id="43" name="Shape 41"/>
-          <p:cNvSpPr/>
-          <p:nvPr/>
-        </p:nvSpPr>
-        <p:spPr>
-          <a:xfrm>
-            <a:off x="4663440" y="3474720"/>
-            <a:ext cx="384048" cy="384048"/>
-          </a:xfrm>
-          <a:prstGeom prst="ellipse">
-            <a:avLst/>
-          </a:prstGeom>
-          <a:solidFill>
-            <a:srgbClr val="B8862F"/>
-          </a:solidFill>
-          <a:ln/>
-        </p:spPr>
-      </p:sp>
-      <p:sp>
-        <p:nvSpPr>
-          <p:cNvPr id="44" name="Text 42"/>
-          <p:cNvSpPr txBox="1"/>
-          <p:nvPr/>
-        </p:nvSpPr>
-        <p:spPr>
-          <a:xfrm>
-            <a:off x="4663440" y="3474720"/>
-            <a:ext cx="384048" cy="384048"/>
-          </a:xfrm>
-          <a:prstGeom prst="rect">
-            <a:avLst/>
-          </a:prstGeom>
-          <a:noFill/>
-          <a:ln/>
-        </p:spPr>
-        <p:txBody>
-          <a:bodyPr wrap="square" lIns="0" tIns="0" rIns="0" bIns="0" rtlCol="0" anchor="ctr"/>
-          <a:lstStyle/>
-          <a:p>
-            <a:pPr algn="ctr" indent="0" marL="0">
-              <a:buNone/>
-            </a:pPr>
-            <a:r>
-              <a:rPr lang="en-US" sz="1400" b="1" dirty="0">
-                <a:solidFill>
-                  <a:srgbClr val="FFFFFF"/>
-                </a:solidFill>
-                <a:latin typeface="Cambria" pitchFamily="34" charset="0"/>
-                <a:ea typeface="Cambria" pitchFamily="34" charset="-122"/>
-                <a:cs typeface="Cambria" pitchFamily="34" charset="-120"/>
-              </a:rPr>
-              <a:t>14</a:t>
-            </a:r>
-            <a:endParaRPr lang="en-US" sz="1400" dirty="0"/>
-          </a:p>
-        </p:txBody>
-      </p:sp>
-      <p:sp>
-        <p:nvSpPr>
-          <p:cNvPr id="45" name="Text 43"/>
-          <p:cNvSpPr txBox="1"/>
-          <p:nvPr/>
-        </p:nvSpPr>
-        <p:spPr>
-          <a:xfrm>
-            <a:off x="5166360" y="3474720"/>
-            <a:ext cx="3566160" cy="384048"/>
-          </a:xfrm>
-          <a:prstGeom prst="rect">
-            <a:avLst/>
-          </a:prstGeom>
-          <a:noFill/>
-          <a:ln/>
-        </p:spPr>
-        <p:txBody>
-          <a:bodyPr wrap="square" lIns="0" tIns="0" rIns="0" bIns="0" rtlCol="0" anchor="ctr"/>
-          <a:lstStyle/>
-          <a:p>
-            <a:pPr indent="0" marL="0">
-              <a:buNone/>
-            </a:pPr>
-            <a:r>
-              <a:rPr lang="en-US" sz="1250" dirty="0">
-                <a:solidFill>
-                  <a:srgbClr val="1D2B2A"/>
-                </a:solidFill>
-                <a:latin typeface="Calibri" pitchFamily="34" charset="0"/>
-                <a:ea typeface="Calibri" pitchFamily="34" charset="-122"/>
-                <a:cs typeface="Calibri" pitchFamily="34" charset="-120"/>
-              </a:rPr>
-              <a:t>Sole trader, private client, term deposits</a:t>
-            </a:r>
-            <a:endParaRPr lang="en-US" sz="1250" dirty="0"/>
-          </a:p>
-        </p:txBody>
-      </p:sp>
-      <p:sp>
-        <p:nvSpPr>
-          <p:cNvPr id="46" name="Shape 44"/>
-          <p:cNvSpPr/>
-          <p:nvPr/>
-        </p:nvSpPr>
-        <p:spPr>
-          <a:xfrm>
-            <a:off x="4663440" y="3931920"/>
-            <a:ext cx="384048" cy="384048"/>
-          </a:xfrm>
-          <a:prstGeom prst="ellipse">
-            <a:avLst/>
-          </a:prstGeom>
-          <a:solidFill>
-            <a:srgbClr val="B8862F"/>
-          </a:solidFill>
-          <a:ln/>
-        </p:spPr>
-      </p:sp>
-      <p:sp>
-        <p:nvSpPr>
-          <p:cNvPr id="47" name="Text 45"/>
-          <p:cNvSpPr txBox="1"/>
-          <p:nvPr/>
-        </p:nvSpPr>
-        <p:spPr>
-          <a:xfrm>
-            <a:off x="4663440" y="3931920"/>
-            <a:ext cx="384048" cy="384048"/>
-          </a:xfrm>
-          <a:prstGeom prst="rect">
-            <a:avLst/>
-          </a:prstGeom>
-          <a:noFill/>
-          <a:ln/>
-        </p:spPr>
-        <p:txBody>
-          <a:bodyPr wrap="square" lIns="0" tIns="0" rIns="0" bIns="0" rtlCol="0" anchor="ctr"/>
-          <a:lstStyle/>
-          <a:p>
-            <a:pPr algn="ctr" indent="0" marL="0">
-              <a:buNone/>
-            </a:pPr>
-            <a:r>
-              <a:rPr lang="en-US" sz="1400" b="1" dirty="0">
-                <a:solidFill>
-                  <a:srgbClr val="FFFFFF"/>
-                </a:solidFill>
-                <a:latin typeface="Cambria" pitchFamily="34" charset="0"/>
-                <a:ea typeface="Cambria" pitchFamily="34" charset="-122"/>
-                <a:cs typeface="Cambria" pitchFamily="34" charset="-120"/>
-              </a:rPr>
-              <a:t>15</a:t>
-            </a:r>
-            <a:endParaRPr lang="en-US" sz="1400" dirty="0"/>
-          </a:p>
-        </p:txBody>
-      </p:sp>
-      <p:sp>
-        <p:nvSpPr>
-          <p:cNvPr id="48" name="Text 46"/>
-          <p:cNvSpPr txBox="1"/>
-          <p:nvPr/>
-        </p:nvSpPr>
-        <p:spPr>
-          <a:xfrm>
-            <a:off x="5166360" y="3931920"/>
-            <a:ext cx="3566160" cy="384048"/>
-          </a:xfrm>
-          <a:prstGeom prst="rect">
-            <a:avLst/>
-          </a:prstGeom>
-          <a:noFill/>
-          <a:ln/>
-        </p:spPr>
-        <p:txBody>
-          <a:bodyPr wrap="square" lIns="0" tIns="0" rIns="0" bIns="0" rtlCol="0" anchor="ctr"/>
-          <a:lstStyle/>
-          <a:p>
-            <a:pPr indent="0" marL="0">
-              <a:buNone/>
-            </a:pPr>
-            <a:r>
-              <a:rPr lang="en-US" sz="1250" dirty="0">
-                <a:solidFill>
-                  <a:srgbClr val="1D2B2A"/>
-                </a:solidFill>
-                <a:latin typeface="Calibri" pitchFamily="34" charset="0"/>
-                <a:ea typeface="Calibri" pitchFamily="34" charset="-122"/>
-                <a:cs typeface="Calibri" pitchFamily="34" charset="-120"/>
-              </a:rPr>
-              <a:t>Card controls, bills, card search</a:t>
-            </a:r>
-            <a:endParaRPr lang="en-US" sz="1250" dirty="0"/>
-          </a:p>
-        </p:txBody>
-      </p:sp>
-      <p:sp>
-        <p:nvSpPr>
-          <p:cNvPr id="49" name="Shape 47"/>
-          <p:cNvSpPr/>
-          <p:nvPr/>
-        </p:nvSpPr>
-        <p:spPr>
-          <a:xfrm>
-            <a:off x="4663440" y="4389120"/>
-            <a:ext cx="384048" cy="384048"/>
-          </a:xfrm>
-          <a:prstGeom prst="ellipse">
-            <a:avLst/>
-          </a:prstGeom>
-          <a:solidFill>
-            <a:srgbClr val="B8862F"/>
-          </a:solidFill>
-          <a:ln/>
-        </p:spPr>
-      </p:sp>
-      <p:sp>
-        <p:nvSpPr>
-          <p:cNvPr id="50" name="Text 48"/>
-          <p:cNvSpPr txBox="1"/>
-          <p:nvPr/>
-        </p:nvSpPr>
-        <p:spPr>
-          <a:xfrm>
-            <a:off x="4663440" y="4389120"/>
-            <a:ext cx="384048" cy="384048"/>
-          </a:xfrm>
-          <a:prstGeom prst="rect">
-            <a:avLst/>
-          </a:prstGeom>
-          <a:noFill/>
-          <a:ln/>
-        </p:spPr>
-        <p:txBody>
-          <a:bodyPr wrap="square" lIns="0" tIns="0" rIns="0" bIns="0" rtlCol="0" anchor="ctr"/>
-          <a:lstStyle/>
-          <a:p>
-            <a:pPr algn="ctr" indent="0" marL="0">
-              <a:buNone/>
-            </a:pPr>
-            <a:r>
-              <a:rPr lang="en-US" sz="1400" b="1" dirty="0">
-                <a:solidFill>
-                  <a:srgbClr val="FFFFFF"/>
-                </a:solidFill>
-                <a:latin typeface="Cambria" pitchFamily="34" charset="0"/>
-                <a:ea typeface="Cambria" pitchFamily="34" charset="-122"/>
-                <a:cs typeface="Cambria" pitchFamily="34" charset="-120"/>
-              </a:rPr>
-              <a:t>16</a:t>
-            </a:r>
-            <a:endParaRPr lang="en-US" sz="1400" dirty="0"/>
-          </a:p>
-        </p:txBody>
-      </p:sp>
-      <p:sp>
-        <p:nvSpPr>
-          <p:cNvPr id="51" name="Text 49"/>
-          <p:cNvSpPr txBox="1"/>
-          <p:nvPr/>
-        </p:nvSpPr>
-        <p:spPr>
-          <a:xfrm>
-            <a:off x="5166360" y="4389120"/>
-            <a:ext cx="3566160" cy="384048"/>
-          </a:xfrm>
-          <a:prstGeom prst="rect">
-            <a:avLst/>
-          </a:prstGeom>
-          <a:noFill/>
-          <a:ln/>
-        </p:spPr>
-        <p:txBody>
-          <a:bodyPr wrap="square" lIns="0" tIns="0" rIns="0" bIns="0" rtlCol="0" anchor="ctr"/>
-          <a:lstStyle/>
-          <a:p>
-            <a:pPr indent="0" marL="0">
-              <a:buNone/>
-            </a:pPr>
-            <a:r>
-              <a:rPr lang="en-US" sz="1250" dirty="0">
-                <a:solidFill>
-                  <a:srgbClr val="1D2B2A"/>
-                </a:solidFill>
-                <a:latin typeface="Calibri" pitchFamily="34" charset="0"/>
-                <a:ea typeface="Calibri" pitchFamily="34" charset="-122"/>
-                <a:cs typeface="Calibri" pitchFamily="34" charset="-120"/>
-              </a:rPr>
-              <a:t>Auditor review; archive vs delete</a:t>
+              <a:t>A reversal has its own date, amount, approver and reason, and can be partial.</a:t>
             </a:r>
             <a:endParaRPr lang="en-US" sz="1250" dirty="0"/>
           </a:p>

--- a/docs/Viva_Presentation.pptx
+++ b/docs/Viva_Presentation.pptx
@@ -1132,7 +1132,7 @@
           <a:p>
             <a:r>
               <a:rPr lang="en-US" dirty="0"/>
-              <a:t>The brief asks for at least 30 classes and 30 meaningful operations. Even counting only the 78 state-changing commands we are more than double. The trial balance is zero at the end of the demo, so no scenario created or lost money.</a:t>
+              <a:t>The brief asks for at least 30 classes and 30 meaningful operations. Even counting only the 69 business classes and the 79 state-changing commands we are more than double. The trial balance is zero at the end of the demo, so no scenario created or lost money.</a:t>
             </a:r>
             <a:endParaRPr lang="en-US" dirty="0"/>
           </a:p>
@@ -5455,7 +5455,7 @@
                 <a:ea typeface="Calibri" pitchFamily="34" charset="-122"/>
                 <a:cs typeface="Calibri" pitchFamily="34" charset="-120"/>
               </a:rPr>
-              <a:t>Report section 4.1; also on the GUI's Diagrams screen</a:t>
+              <a:t>Report section 4.1 (flowcharts) and 4.2 (state machines)</a:t>
             </a:r>
             <a:endParaRPr lang="en-US" sz="1100" dirty="0"/>
           </a:p>
@@ -5682,7 +5682,7 @@
                 <a:ea typeface="Calibri" pitchFamily="34" charset="-122"/>
                 <a:cs typeface="Calibri" pitchFamily="34" charset="-120"/>
               </a:rPr>
-              <a:t>30 forms, including full customer onboarding</a:t>
+              <a:t>31 forms, including full customer onboarding</a:t>
             </a:r>
             <a:endParaRPr lang="en-US" sz="1200" dirty="0"/>
           </a:p>
@@ -6670,7 +6670,7 @@
                 <a:ea typeface="Cambria" pitchFamily="34" charset="-122"/>
                 <a:cs typeface="Cambria" pitchFamily="34" charset="-120"/>
               </a:rPr>
-              <a:t>74</a:t>
+              <a:t>69</a:t>
             </a:r>
             <a:endParaRPr lang="en-US" sz="4000" dirty="0"/>
           </a:p>
@@ -6709,7 +6709,7 @@
                 <a:ea typeface="Calibri" pitchFamily="34" charset="-122"/>
                 <a:cs typeface="Calibri" pitchFamily="34" charset="-120"/>
               </a:rPr>
-              <a:t>domain classes</a:t>
+              <a:t>business classes (+6 supporting)</a:t>
             </a:r>
             <a:endParaRPr lang="en-US" sz="1300" dirty="0"/>
           </a:p>
@@ -6775,7 +6775,7 @@
                 <a:ea typeface="Cambria" pitchFamily="34" charset="-122"/>
                 <a:cs typeface="Cambria" pitchFamily="34" charset="-120"/>
               </a:rPr>
-              <a:t>96</a:t>
+              <a:t>97</a:t>
             </a:r>
             <a:endParaRPr lang="en-US" sz="4000" dirty="0"/>
           </a:p>
@@ -6814,7 +6814,7 @@
                 <a:ea typeface="Calibri" pitchFamily="34" charset="-122"/>
                 <a:cs typeface="Calibri" pitchFamily="34" charset="-120"/>
               </a:rPr>
-              <a:t>Bank operations (78 commands)</a:t>
+              <a:t>Bank operations (79 commands)</a:t>
             </a:r>
             <a:endParaRPr lang="en-US" sz="1300" dirty="0"/>
           </a:p>
@@ -7090,7 +7090,7 @@
                 <a:ea typeface="Cambria" pitchFamily="34" charset="-122"/>
                 <a:cs typeface="Cambria" pitchFamily="34" charset="-120"/>
               </a:rPr>
-              <a:t>69</a:t>
+              <a:t>70</a:t>
             </a:r>
             <a:endParaRPr lang="en-US" sz="4000" dirty="0"/>
           </a:p>

--- a/docs/Viva_Presentation.pptx
+++ b/docs/Viva_Presentation.pptx
@@ -20,9 +20,10 @@
     <p:sldId id="268" r:id="rId14"/>
     <p:sldId id="269" r:id="rId15"/>
     <p:sldId id="270" r:id="rId16"/>
+    <p:sldId id="271" r:id="rId17"/>
   </p:sldIdLst>
   <p:notesMasterIdLst>
-    <p:notesMasterId r:id="rId17"/>
+    <p:notesMasterId r:id="rId18"/>
   </p:notesMasterIdLst>
   <p:sldSz cx="9144000" cy="5143500"/>
   <p:notesSz cx="5143500" cy="9144000"/>
@@ -604,7 +605,7 @@
           <a:p>
             <a:r>
               <a:rPr lang="en-US" dirty="0"/>
-              <a:t>Run python banking_system.py to show them live. Each refusal prints the exact rule, e.g. AuthorityError: the initiator cannot also be the second signatory.</a:t>
+              <a:t>The brief asks us to defend the design against at least one plausible alternative. The account-centric model is simpler and would pass the class count, but it answers every historical question with the current value only.</a:t>
             </a:r>
             <a:endParaRPr lang="en-US" dirty="0"/>
           </a:p>
@@ -692,7 +693,7 @@
           <a:p>
             <a:r>
               <a:rPr lang="en-US" dirty="0"/>
-              <a:t>Report section 3.2 maps every participant, research area and scope item in the brief to a class, operation and scenario. Section 3.1 answers the brief's eight open questions one by one.</a:t>
+              <a:t>Run python banking_system.py to show them live. Each refusal prints the exact rule, e.g. AuthorityError: the initiator cannot also be the second signatory.</a:t>
             </a:r>
             <a:endParaRPr lang="en-US" dirty="0"/>
           </a:p>
@@ -780,7 +781,7 @@
           <a:p>
             <a:r>
               <a:rPr lang="en-US" dirty="0"/>
-              <a:t>The class diagrams show structure; the flowcharts show behaviour. Walk through the transfer: beneficiary, authority (mandate within limit), funds, dual control, then the PKR 1,000,000 compliance hold. Every red terminator is a refusal that is still kept on record.</a:t>
+              <a:t>Report section 3.2 maps every participant, research area and scope item in the brief to a class, operation and scenario. Section 3.1 answers the brief's eight open questions one by one.</a:t>
             </a:r>
             <a:endParaRPr lang="en-US" dirty="0"/>
           </a:p>
@@ -868,7 +869,7 @@
           <a:p>
             <a:r>
               <a:rPr lang="en-US" dirty="0"/>
-              <a:t>Run Operations &gt; Guided rule checks in order. Then Customers: Ayesha's roles as ribbons, and the time machine on 11 April 2026. The GUI contains no business rules: refusals come from the model and name its error class.</a:t>
+              <a:t>The class diagrams show structure; the flowcharts show behaviour. Walk through the transfer: beneficiary, authority (mandate within limit), funds, dual control, then the PKR 1,000,000 compliance hold. Every red terminator is a refusal that is still kept on record.</a:t>
             </a:r>
             <a:endParaRPr lang="en-US" dirty="0"/>
           </a:p>
@@ -956,7 +957,7 @@
           <a:p>
             <a:r>
               <a:rPr lang="en-US" dirty="0"/>
-              <a:t>Full table in docs/Code_Review.md. Every fix is protected by a test, so it cannot silently come back.</a:t>
+              <a:t>Run Operations &gt; Guided rule checks in order. Then Customers: Ayesha's roles as ribbons, and the time machine on 11 April 2026. The GUI contains no business rules: refusals come from the model and name its error class.</a:t>
             </a:r>
             <a:endParaRPr lang="en-US" dirty="0"/>
           </a:p>
@@ -1044,7 +1045,7 @@
           <a:p>
             <a:r>
               <a:rPr lang="en-US" dirty="0"/>
-              <a:t>The Arrangement level is where the design pays off for new business models: an Ijarah or Murabaha contract is a new kind of arrangement, not a change to existing classes.</a:t>
+              <a:t>Full table in docs/Code_Review.md. Every fix is protected by a test, so it cannot silently come back.</a:t>
             </a:r>
             <a:endParaRPr lang="en-US" dirty="0"/>
           </a:p>
@@ -1068,6 +1069,94 @@
             <a:fld id="{F7021451-1387-4CA6-816F-3879F97B5CBC}" type="slidenum">
               <a:rPr lang="en-US"/>
               <a:t>15</a:t>
+            </a:fld>
+            <a:endParaRPr lang="en-US"/>
+          </a:p>
+        </p:txBody>
+      </p:sp>
+    </p:spTree>
+    <p:extLst>
+      <p:ext uri="{BB962C8B-B14F-4D97-AF65-F5344CB8AC3E}">
+        <p14:creationId xmlns:p14="http://schemas.microsoft.com/office/powerpoint/2010/main" val="1024086991"/>
+      </p:ext>
+    </p:extLst>
+  </p:cSld>
+  <p:clrMapOvr>
+    <a:masterClrMapping/>
+  </p:clrMapOvr>
+</p:notes>
+</file>
+
+<file path=ppt/notesSlides/notesSlide16.xml><?xml version="1.0" encoding="utf-8"?>
+<p:notes xmlns:a="http://schemas.openxmlformats.org/drawingml/2006/main" xmlns:r="http://schemas.openxmlformats.org/officeDocument/2006/relationships" xmlns:p="http://schemas.openxmlformats.org/presentationml/2006/main">
+  <p:cSld>
+    <p:spTree>
+      <p:nvGrpSpPr>
+        <p:cNvPr id="1" name=""/>
+        <p:cNvGrpSpPr/>
+        <p:nvPr/>
+      </p:nvGrpSpPr>
+      <p:grpSpPr>
+        <a:xfrm>
+          <a:off x="0" y="0"/>
+          <a:ext cx="0" cy="0"/>
+          <a:chOff x="0" y="0"/>
+          <a:chExt cx="0" cy="0"/>
+        </a:xfrm>
+      </p:grpSpPr>
+      <p:sp>
+        <p:nvSpPr>
+          <p:cNvPr id="2" name="Slide Image Placeholder 1"/>
+          <p:cNvSpPr>
+            <a:spLocks noGrp="1" noRot="1" noChangeAspect="1"/>
+          </p:cNvSpPr>
+          <p:nvPr>
+            <p:ph type="sldImg"/>
+          </p:nvPr>
+        </p:nvSpPr>
+        <p:spPr/>
+      </p:sp>
+      <p:sp>
+        <p:nvSpPr>
+          <p:cNvPr id="3" name="Notes Placeholder 2"/>
+          <p:cNvSpPr>
+            <a:spLocks noGrp="1"/>
+          </p:cNvSpPr>
+          <p:nvPr>
+            <p:ph type="body" idx="1"/>
+          </p:nvPr>
+        </p:nvSpPr>
+        <p:spPr/>
+        <p:txBody>
+          <a:bodyPr/>
+          <a:lstStyle/>
+          <a:p>
+            <a:r>
+              <a:rPr lang="en-US" dirty="0"/>
+              <a:t>The Arrangement level is where the design pays off for new business models: an Ijarah or Murabaha contract is a new kind of arrangement, not a change to existing classes.</a:t>
+            </a:r>
+            <a:endParaRPr lang="en-US" dirty="0"/>
+          </a:p>
+        </p:txBody>
+      </p:sp>
+      <p:sp>
+        <p:nvSpPr>
+          <p:cNvPr id="4" name="Slide Number Placeholder 3"/>
+          <p:cNvSpPr>
+            <a:spLocks noGrp="1"/>
+          </p:cNvSpPr>
+          <p:nvPr>
+            <p:ph type="sldNum" sz="quarter" idx="10"/>
+          </p:nvPr>
+        </p:nvSpPr>
+        <p:spPr/>
+        <p:txBody>
+          <a:bodyPr/>
+          <a:lstStyle/>
+          <a:p>
+            <a:fld id="{F7021451-1387-4CA6-816F-3879F97B5CBC}" type="slidenum">
+              <a:rPr lang="en-US"/>
+              <a:t>16</a:t>
             </a:fld>
             <a:endParaRPr lang="en-US"/>
           </a:p>
@@ -1132,7 +1221,7 @@
           <a:p>
             <a:r>
               <a:rPr lang="en-US" dirty="0"/>
-              <a:t>The brief asks for at least 30 classes and 30 meaningful operations. Even counting only the 69 business classes and the 79 state-changing commands we are more than double. The trial balance is zero at the end of the demo, so no scenario created or lost money.</a:t>
+              <a:t>The brief asks for at least 30 classes and 30 meaningful operations. Even counting only the 71 business classes and the 80 state-changing commands we are more than double. The trial balance is zero at the end of the demo, so no scenario created or lost money.</a:t>
             </a:r>
             <a:endParaRPr lang="en-US" dirty="0"/>
           </a:p>
@@ -1484,7 +1573,7 @@
           <a:p>
             <a:r>
               <a:rPr lang="en-US" dirty="0"/>
-              <a:t>Only customer payments can be disputed, which is why that level exists. A reversal is a transaction of its own, pointing at the original.</a:t>
+              <a:t>Only customer payments can be disputed, which is why that level exists. A reversal is a transaction of its own, pointing at the original. Research on card schemes showed three different things: the bank's reversal, the merchant's refund and the chargeback. A chargeback has everything a reversal has plus a dispute, a merchant and a reason code, so it is a subclass; a refund is started by the merchant with no bank approval and leaves the purchase posted, so it is not.</a:t>
             </a:r>
             <a:endParaRPr lang="en-US" dirty="0"/>
           </a:p>
@@ -2378,7 +2467,7 @@
                 <a:ea typeface="Cambria" pitchFamily="34" charset="-122"/>
                 <a:cs typeface="Cambria" pitchFamily="34" charset="-120"/>
               </a:rPr>
-              <a:t>16 scenarios break the normal workflow</a:t>
+              <a:t>Why not the obvious alternative?</a:t>
             </a:r>
             <a:endParaRPr lang="en-US" sz="2800" dirty="0"/>
           </a:p>
@@ -2417,42 +2506,1289 @@
                 <a:ea typeface="Calibri" pitchFamily="34" charset="-122"/>
                 <a:cs typeface="Calibri" pitchFamily="34" charset="-120"/>
               </a:rPr>
-              <a:t>All ten critical cases in the brief are covered, plus every participant it names</a:t>
+              <a:t>An account-centric model: Customer with flags, Account with a type field, edits in place</a:t>
             </a:r>
             <a:endParaRPr lang="en-US" sz="1200" dirty="0"/>
           </a:p>
         </p:txBody>
       </p:sp>
-      <p:sp>
-        <p:nvSpPr>
-          <p:cNvPr id="4" name="Shape 2"/>
-          <p:cNvSpPr/>
-          <p:nvPr/>
-        </p:nvSpPr>
-        <p:spPr>
-          <a:xfrm>
-            <a:off x="457200" y="1188720"/>
-            <a:ext cx="384048" cy="384048"/>
-          </a:xfrm>
-          <a:prstGeom prst="ellipse">
-            <a:avLst/>
-          </a:prstGeom>
-          <a:solidFill>
-            <a:srgbClr val="B8862F"/>
-          </a:solidFill>
-          <a:ln/>
-        </p:spPr>
-      </p:sp>
-      <p:sp>
-        <p:nvSpPr>
-          <p:cNvPr id="5" name="Text 3"/>
-          <p:cNvSpPr txBox="1"/>
-          <p:nvPr/>
-        </p:nvSpPr>
-        <p:spPr>
-          <a:xfrm>
-            <a:off x="457200" y="1188720"/>
-            <a:ext cx="384048" cy="384048"/>
+      <p:graphicFrame>
+        <p:nvGraphicFramePr>
+          <p:cNvPr id="11" name="Table 0"/>
+          <p:cNvGraphicFramePr>
+            <a:graphicFrameLocks noGrp="1"/>
+          </p:cNvGraphicFramePr>
+          <p:nvPr>
+            <p:extLst>
+              <p:ext uri="{D42A27DB-BD31-4B8C-83A1-F6EECF244321}">
+                <p14:modId xmlns:p14="http://schemas.microsoft.com/office/powerpoint/2010/main" val="1579011935"/>
+              </p:ext>
+            </p:extLst>
+          </p:nvPr>
+        </p:nvGraphicFramePr>
+        <p:xfrm>
+          <a:off x="457200" y="1234440"/>
+          <a:ext cx="8229600" cy="914400"/>
+        </p:xfrm>
+        <a:graphic>
+          <a:graphicData uri="http://schemas.openxmlformats.org/drawingml/2006/table">
+            <a:tbl>
+              <a:tblPr/>
+              <a:tblGrid>
+                <a:gridCol w="2286000"/>
+                <a:gridCol w="2880360"/>
+                <a:gridCol w="3063240"/>
+              </a:tblGrid>
+              <a:tr h="457200">
+                <a:tc>
+                  <a:txBody>
+                    <a:bodyPr/>
+                    <a:lstStyle/>
+                    <a:p>
+                      <a:pPr indent="0" marL="0">
+                        <a:buNone/>
+                      </a:pPr>
+                      <a:r>
+                        <a:rPr lang="en-US" sz="1100" b="1" dirty="0">
+                          <a:solidFill>
+                            <a:srgbClr val="FFFFFF"/>
+                          </a:solidFill>
+                          <a:latin typeface="Calibri" pitchFamily="34" charset="0"/>
+                          <a:ea typeface="Calibri" pitchFamily="34" charset="-122"/>
+                          <a:cs typeface="Calibri" pitchFamily="34" charset="-120"/>
+                        </a:rPr>
+                        <a:t>Critical case</a:t>
+                      </a:r>
+                      <a:endParaRPr lang="en-US" sz="1100" dirty="0">
+                        <a:latin typeface="Calibri" charset="0"/>
+                        <a:ea typeface="Calibri" charset="0"/>
+                        <a:cs typeface="Calibri" charset="0"/>
+                      </a:endParaRPr>
+                    </a:p>
+                  </a:txBody>
+                  <a:tcPr marL="91440" marR="91440" marT="45720" marB="45720" anchor="ctr">
+                    <a:lnL w="6350" cap="flat" cmpd="sng" algn="ctr">
+                      <a:solidFill>
+                        <a:srgbClr val="D5E0DD"/>
+                      </a:solidFill>
+                      <a:prstDash val="solid"/>
+                      <a:round/>
+                      <a:headEnd type="none" w="med" len="med"/>
+                      <a:tailEnd type="none" w="med" len="med"/>
+                    </a:lnL>
+                    <a:lnR w="6350" cap="flat" cmpd="sng" algn="ctr">
+                      <a:solidFill>
+                        <a:srgbClr val="D5E0DD"/>
+                      </a:solidFill>
+                      <a:prstDash val="solid"/>
+                      <a:round/>
+                      <a:headEnd type="none" w="med" len="med"/>
+                      <a:tailEnd type="none" w="med" len="med"/>
+                    </a:lnR>
+                    <a:lnT w="6350" cap="flat" cmpd="sng" algn="ctr">
+                      <a:solidFill>
+                        <a:srgbClr val="D5E0DD"/>
+                      </a:solidFill>
+                      <a:prstDash val="solid"/>
+                      <a:round/>
+                      <a:headEnd type="none" w="med" len="med"/>
+                      <a:tailEnd type="none" w="med" len="med"/>
+                    </a:lnT>
+                    <a:lnB w="6350" cap="flat" cmpd="sng" algn="ctr">
+                      <a:solidFill>
+                        <a:srgbClr val="D5E0DD"/>
+                      </a:solidFill>
+                      <a:prstDash val="solid"/>
+                      <a:round/>
+                      <a:headEnd type="none" w="med" len="med"/>
+                      <a:tailEnd type="none" w="med" len="med"/>
+                    </a:lnB>
+                    <a:solidFill>
+                      <a:srgbClr val="0B4F4A"/>
+                    </a:solidFill>
+                  </a:tcPr>
+                </a:tc>
+                <a:tc>
+                  <a:txBody>
+                    <a:bodyPr/>
+                    <a:lstStyle/>
+                    <a:p>
+                      <a:pPr indent="0" marL="0">
+                        <a:buNone/>
+                      </a:pPr>
+                      <a:r>
+                        <a:rPr lang="en-US" sz="1100" b="1" dirty="0">
+                          <a:solidFill>
+                            <a:srgbClr val="FFFFFF"/>
+                          </a:solidFill>
+                          <a:latin typeface="Calibri" pitchFamily="34" charset="0"/>
+                          <a:ea typeface="Calibri" pitchFamily="34" charset="-122"/>
+                          <a:cs typeface="Calibri" pitchFamily="34" charset="-120"/>
+                        </a:rPr>
+                        <a:t>Account-centric alternative</a:t>
+                      </a:r>
+                      <a:endParaRPr lang="en-US" sz="1100" dirty="0">
+                        <a:latin typeface="Calibri" charset="0"/>
+                        <a:ea typeface="Calibri" charset="0"/>
+                        <a:cs typeface="Calibri" charset="0"/>
+                      </a:endParaRPr>
+                    </a:p>
+                  </a:txBody>
+                  <a:tcPr marL="91440" marR="91440" marT="45720" marB="45720" anchor="ctr">
+                    <a:lnL w="6350" cap="flat" cmpd="sng" algn="ctr">
+                      <a:solidFill>
+                        <a:srgbClr val="D5E0DD"/>
+                      </a:solidFill>
+                      <a:prstDash val="solid"/>
+                      <a:round/>
+                      <a:headEnd type="none" w="med" len="med"/>
+                      <a:tailEnd type="none" w="med" len="med"/>
+                    </a:lnL>
+                    <a:lnR w="6350" cap="flat" cmpd="sng" algn="ctr">
+                      <a:solidFill>
+                        <a:srgbClr val="D5E0DD"/>
+                      </a:solidFill>
+                      <a:prstDash val="solid"/>
+                      <a:round/>
+                      <a:headEnd type="none" w="med" len="med"/>
+                      <a:tailEnd type="none" w="med" len="med"/>
+                    </a:lnR>
+                    <a:lnT w="6350" cap="flat" cmpd="sng" algn="ctr">
+                      <a:solidFill>
+                        <a:srgbClr val="D5E0DD"/>
+                      </a:solidFill>
+                      <a:prstDash val="solid"/>
+                      <a:round/>
+                      <a:headEnd type="none" w="med" len="med"/>
+                      <a:tailEnd type="none" w="med" len="med"/>
+                    </a:lnT>
+                    <a:lnB w="6350" cap="flat" cmpd="sng" algn="ctr">
+                      <a:solidFill>
+                        <a:srgbClr val="D5E0DD"/>
+                      </a:solidFill>
+                      <a:prstDash val="solid"/>
+                      <a:round/>
+                      <a:headEnd type="none" w="med" len="med"/>
+                      <a:tailEnd type="none" w="med" len="med"/>
+                    </a:lnB>
+                    <a:solidFill>
+                      <a:srgbClr val="0B4F4A"/>
+                    </a:solidFill>
+                  </a:tcPr>
+                </a:tc>
+                <a:tc>
+                  <a:txBody>
+                    <a:bodyPr/>
+                    <a:lstStyle/>
+                    <a:p>
+                      <a:pPr indent="0" marL="0">
+                        <a:buNone/>
+                      </a:pPr>
+                      <a:r>
+                        <a:rPr lang="en-US" sz="1100" b="1" dirty="0">
+                          <a:solidFill>
+                            <a:srgbClr val="FFFFFF"/>
+                          </a:solidFill>
+                          <a:latin typeface="Calibri" pitchFamily="34" charset="0"/>
+                          <a:ea typeface="Calibri" pitchFamily="34" charset="-122"/>
+                          <a:cs typeface="Calibri" pitchFamily="34" charset="-120"/>
+                        </a:rPr>
+                        <a:t>This design</a:t>
+                      </a:r>
+                      <a:endParaRPr lang="en-US" sz="1100" dirty="0">
+                        <a:latin typeface="Calibri" charset="0"/>
+                        <a:ea typeface="Calibri" charset="0"/>
+                        <a:cs typeface="Calibri" charset="0"/>
+                      </a:endParaRPr>
+                    </a:p>
+                  </a:txBody>
+                  <a:tcPr marL="91440" marR="91440" marT="45720" marB="45720" anchor="ctr">
+                    <a:lnL w="6350" cap="flat" cmpd="sng" algn="ctr">
+                      <a:solidFill>
+                        <a:srgbClr val="D5E0DD"/>
+                      </a:solidFill>
+                      <a:prstDash val="solid"/>
+                      <a:round/>
+                      <a:headEnd type="none" w="med" len="med"/>
+                      <a:tailEnd type="none" w="med" len="med"/>
+                    </a:lnL>
+                    <a:lnR w="6350" cap="flat" cmpd="sng" algn="ctr">
+                      <a:solidFill>
+                        <a:srgbClr val="D5E0DD"/>
+                      </a:solidFill>
+                      <a:prstDash val="solid"/>
+                      <a:round/>
+                      <a:headEnd type="none" w="med" len="med"/>
+                      <a:tailEnd type="none" w="med" len="med"/>
+                    </a:lnR>
+                    <a:lnT w="6350" cap="flat" cmpd="sng" algn="ctr">
+                      <a:solidFill>
+                        <a:srgbClr val="D5E0DD"/>
+                      </a:solidFill>
+                      <a:prstDash val="solid"/>
+                      <a:round/>
+                      <a:headEnd type="none" w="med" len="med"/>
+                      <a:tailEnd type="none" w="med" len="med"/>
+                    </a:lnT>
+                    <a:lnB w="6350" cap="flat" cmpd="sng" algn="ctr">
+                      <a:solidFill>
+                        <a:srgbClr val="D5E0DD"/>
+                      </a:solidFill>
+                      <a:prstDash val="solid"/>
+                      <a:round/>
+                      <a:headEnd type="none" w="med" len="med"/>
+                      <a:tailEnd type="none" w="med" len="med"/>
+                    </a:lnB>
+                    <a:solidFill>
+                      <a:srgbClr val="0B4F4A"/>
+                    </a:solidFill>
+                  </a:tcPr>
+                </a:tc>
+              </a:tr>
+              <a:tr h="457200">
+                <a:tc>
+                  <a:txBody>
+                    <a:bodyPr/>
+                    <a:lstStyle/>
+                    <a:p>
+                      <a:pPr indent="0" marL="0">
+                        <a:buNone/>
+                      </a:pPr>
+                      <a:r>
+                        <a:rPr lang="en-US" sz="1100" dirty="0">
+                          <a:solidFill>
+                            <a:srgbClr val="1D2B2A"/>
+                          </a:solidFill>
+                          <a:latin typeface="Calibri" pitchFamily="34" charset="0"/>
+                          <a:ea typeface="Calibri" pitchFamily="34" charset="-122"/>
+                          <a:cs typeface="Calibri" pitchFamily="34" charset="-120"/>
+                        </a:rPr>
+                        <a:t>Signatory loses authority</a:t>
+                      </a:r>
+                      <a:endParaRPr lang="en-US" sz="1100" dirty="0">
+                        <a:latin typeface="Calibri" charset="0"/>
+                        <a:ea typeface="Calibri" charset="0"/>
+                        <a:cs typeface="Calibri" charset="0"/>
+                      </a:endParaRPr>
+                    </a:p>
+                  </a:txBody>
+                  <a:tcPr marL="91440" marR="91440" marT="45720" marB="45720" anchor="ctr">
+                    <a:lnL w="6350" cap="flat" cmpd="sng" algn="ctr">
+                      <a:solidFill>
+                        <a:srgbClr val="D5E0DD"/>
+                      </a:solidFill>
+                      <a:prstDash val="solid"/>
+                      <a:round/>
+                      <a:headEnd type="none" w="med" len="med"/>
+                      <a:tailEnd type="none" w="med" len="med"/>
+                    </a:lnL>
+                    <a:lnR w="6350" cap="flat" cmpd="sng" algn="ctr">
+                      <a:solidFill>
+                        <a:srgbClr val="D5E0DD"/>
+                      </a:solidFill>
+                      <a:prstDash val="solid"/>
+                      <a:round/>
+                      <a:headEnd type="none" w="med" len="med"/>
+                      <a:tailEnd type="none" w="med" len="med"/>
+                    </a:lnR>
+                    <a:lnT w="6350" cap="flat" cmpd="sng" algn="ctr">
+                      <a:solidFill>
+                        <a:srgbClr val="D5E0DD"/>
+                      </a:solidFill>
+                      <a:prstDash val="solid"/>
+                      <a:round/>
+                      <a:headEnd type="none" w="med" len="med"/>
+                      <a:tailEnd type="none" w="med" len="med"/>
+                    </a:lnT>
+                    <a:lnB w="6350" cap="flat" cmpd="sng" algn="ctr">
+                      <a:solidFill>
+                        <a:srgbClr val="D5E0DD"/>
+                      </a:solidFill>
+                      <a:prstDash val="solid"/>
+                      <a:round/>
+                      <a:headEnd type="none" w="med" len="med"/>
+                      <a:tailEnd type="none" w="med" len="med"/>
+                    </a:lnB>
+                    <a:solidFill>
+                      <a:srgbClr val="F4F8F7"/>
+                    </a:solidFill>
+                  </a:tcPr>
+                </a:tc>
+                <a:tc>
+                  <a:txBody>
+                    <a:bodyPr/>
+                    <a:lstStyle/>
+                    <a:p>
+                      <a:pPr indent="0" marL="0">
+                        <a:buNone/>
+                      </a:pPr>
+                      <a:r>
+                        <a:rPr lang="en-US" sz="1100" dirty="0">
+                          <a:solidFill>
+                            <a:srgbClr val="1D2B2A"/>
+                          </a:solidFill>
+                          <a:latin typeface="Calibri" pitchFamily="34" charset="0"/>
+                          <a:ea typeface="Calibri" pitchFamily="34" charset="-122"/>
+                          <a:cs typeface="Calibri" pitchFamily="34" charset="-120"/>
+                        </a:rPr>
+                        <a:t>is_signatory = False erases the past</a:t>
+                      </a:r>
+                      <a:endParaRPr lang="en-US" sz="1100" dirty="0">
+                        <a:latin typeface="Calibri" charset="0"/>
+                        <a:ea typeface="Calibri" charset="0"/>
+                        <a:cs typeface="Calibri" charset="0"/>
+                      </a:endParaRPr>
+                    </a:p>
+                  </a:txBody>
+                  <a:tcPr marL="91440" marR="91440" marT="45720" marB="45720" anchor="ctr">
+                    <a:lnL w="6350" cap="flat" cmpd="sng" algn="ctr">
+                      <a:solidFill>
+                        <a:srgbClr val="D5E0DD"/>
+                      </a:solidFill>
+                      <a:prstDash val="solid"/>
+                      <a:round/>
+                      <a:headEnd type="none" w="med" len="med"/>
+                      <a:tailEnd type="none" w="med" len="med"/>
+                    </a:lnL>
+                    <a:lnR w="6350" cap="flat" cmpd="sng" algn="ctr">
+                      <a:solidFill>
+                        <a:srgbClr val="D5E0DD"/>
+                      </a:solidFill>
+                      <a:prstDash val="solid"/>
+                      <a:round/>
+                      <a:headEnd type="none" w="med" len="med"/>
+                      <a:tailEnd type="none" w="med" len="med"/>
+                    </a:lnR>
+                    <a:lnT w="6350" cap="flat" cmpd="sng" algn="ctr">
+                      <a:solidFill>
+                        <a:srgbClr val="D5E0DD"/>
+                      </a:solidFill>
+                      <a:prstDash val="solid"/>
+                      <a:round/>
+                      <a:headEnd type="none" w="med" len="med"/>
+                      <a:tailEnd type="none" w="med" len="med"/>
+                    </a:lnT>
+                    <a:lnB w="6350" cap="flat" cmpd="sng" algn="ctr">
+                      <a:solidFill>
+                        <a:srgbClr val="D5E0DD"/>
+                      </a:solidFill>
+                      <a:prstDash val="solid"/>
+                      <a:round/>
+                      <a:headEnd type="none" w="med" len="med"/>
+                      <a:tailEnd type="none" w="med" len="med"/>
+                    </a:lnB>
+                    <a:solidFill>
+                      <a:srgbClr val="F4F8F7"/>
+                    </a:solidFill>
+                  </a:tcPr>
+                </a:tc>
+                <a:tc>
+                  <a:txBody>
+                    <a:bodyPr/>
+                    <a:lstStyle/>
+                    <a:p>
+                      <a:pPr indent="0" marL="0">
+                        <a:buNone/>
+                      </a:pPr>
+                      <a:r>
+                        <a:rPr lang="en-US" sz="1100" dirty="0">
+                          <a:solidFill>
+                            <a:srgbClr val="1D2B2A"/>
+                          </a:solidFill>
+                          <a:latin typeface="Calibri" pitchFamily="34" charset="0"/>
+                          <a:ea typeface="Calibri" pitchFamily="34" charset="-122"/>
+                          <a:cs typeface="Calibri" pitchFamily="34" charset="-120"/>
+                        </a:rPr>
+                        <a:t>Mandate with a Period; payments keep it</a:t>
+                      </a:r>
+                      <a:endParaRPr lang="en-US" sz="1100" dirty="0">
+                        <a:latin typeface="Calibri" charset="0"/>
+                        <a:ea typeface="Calibri" charset="0"/>
+                        <a:cs typeface="Calibri" charset="0"/>
+                      </a:endParaRPr>
+                    </a:p>
+                  </a:txBody>
+                  <a:tcPr marL="91440" marR="91440" marT="45720" marB="45720" anchor="ctr">
+                    <a:lnL w="6350" cap="flat" cmpd="sng" algn="ctr">
+                      <a:solidFill>
+                        <a:srgbClr val="D5E0DD"/>
+                      </a:solidFill>
+                      <a:prstDash val="solid"/>
+                      <a:round/>
+                      <a:headEnd type="none" w="med" len="med"/>
+                      <a:tailEnd type="none" w="med" len="med"/>
+                    </a:lnL>
+                    <a:lnR w="6350" cap="flat" cmpd="sng" algn="ctr">
+                      <a:solidFill>
+                        <a:srgbClr val="D5E0DD"/>
+                      </a:solidFill>
+                      <a:prstDash val="solid"/>
+                      <a:round/>
+                      <a:headEnd type="none" w="med" len="med"/>
+                      <a:tailEnd type="none" w="med" len="med"/>
+                    </a:lnR>
+                    <a:lnT w="6350" cap="flat" cmpd="sng" algn="ctr">
+                      <a:solidFill>
+                        <a:srgbClr val="D5E0DD"/>
+                      </a:solidFill>
+                      <a:prstDash val="solid"/>
+                      <a:round/>
+                      <a:headEnd type="none" w="med" len="med"/>
+                      <a:tailEnd type="none" w="med" len="med"/>
+                    </a:lnT>
+                    <a:lnB w="6350" cap="flat" cmpd="sng" algn="ctr">
+                      <a:solidFill>
+                        <a:srgbClr val="D5E0DD"/>
+                      </a:solidFill>
+                      <a:prstDash val="solid"/>
+                      <a:round/>
+                      <a:headEnd type="none" w="med" len="med"/>
+                      <a:tailEnd type="none" w="med" len="med"/>
+                    </a:lnB>
+                    <a:solidFill>
+                      <a:srgbClr val="F4F8F7"/>
+                    </a:solidFill>
+                  </a:tcPr>
+                </a:tc>
+              </a:tr>
+              <a:tr h="457200">
+                <a:tc>
+                  <a:txBody>
+                    <a:bodyPr/>
+                    <a:lstStyle/>
+                    <a:p>
+                      <a:pPr indent="0" marL="0">
+                        <a:buNone/>
+                      </a:pPr>
+                      <a:r>
+                        <a:rPr lang="en-US" sz="1100" dirty="0">
+                          <a:solidFill>
+                            <a:srgbClr val="1D2B2A"/>
+                          </a:solidFill>
+                          <a:latin typeface="Calibri" pitchFamily="34" charset="0"/>
+                          <a:ea typeface="Calibri" pitchFamily="34" charset="-122"/>
+                          <a:cs typeface="Calibri" pitchFamily="34" charset="-120"/>
+                        </a:rPr>
+                        <a:t>Posted, reversed, disputed</a:t>
+                      </a:r>
+                      <a:endParaRPr lang="en-US" sz="1100" dirty="0">
+                        <a:latin typeface="Calibri" charset="0"/>
+                        <a:ea typeface="Calibri" charset="0"/>
+                        <a:cs typeface="Calibri" charset="0"/>
+                      </a:endParaRPr>
+                    </a:p>
+                  </a:txBody>
+                  <a:tcPr marL="91440" marR="91440" marT="45720" marB="45720" anchor="ctr">
+                    <a:lnL w="6350" cap="flat" cmpd="sng" algn="ctr">
+                      <a:solidFill>
+                        <a:srgbClr val="D5E0DD"/>
+                      </a:solidFill>
+                      <a:prstDash val="solid"/>
+                      <a:round/>
+                      <a:headEnd type="none" w="med" len="med"/>
+                      <a:tailEnd type="none" w="med" len="med"/>
+                    </a:lnL>
+                    <a:lnR w="6350" cap="flat" cmpd="sng" algn="ctr">
+                      <a:solidFill>
+                        <a:srgbClr val="D5E0DD"/>
+                      </a:solidFill>
+                      <a:prstDash val="solid"/>
+                      <a:round/>
+                      <a:headEnd type="none" w="med" len="med"/>
+                      <a:tailEnd type="none" w="med" len="med"/>
+                    </a:lnR>
+                    <a:lnT w="6350" cap="flat" cmpd="sng" algn="ctr">
+                      <a:solidFill>
+                        <a:srgbClr val="D5E0DD"/>
+                      </a:solidFill>
+                      <a:prstDash val="solid"/>
+                      <a:round/>
+                      <a:headEnd type="none" w="med" len="med"/>
+                      <a:tailEnd type="none" w="med" len="med"/>
+                    </a:lnT>
+                    <a:lnB w="6350" cap="flat" cmpd="sng" algn="ctr">
+                      <a:solidFill>
+                        <a:srgbClr val="D5E0DD"/>
+                      </a:solidFill>
+                      <a:prstDash val="solid"/>
+                      <a:round/>
+                      <a:headEnd type="none" w="med" len="med"/>
+                      <a:tailEnd type="none" w="med" len="med"/>
+                    </a:lnB>
+                    <a:solidFill>
+                      <a:srgbClr val="FFFFFF"/>
+                    </a:solidFill>
+                  </a:tcPr>
+                </a:tc>
+                <a:tc>
+                  <a:txBody>
+                    <a:bodyPr/>
+                    <a:lstStyle/>
+                    <a:p>
+                      <a:pPr indent="0" marL="0">
+                        <a:buNone/>
+                      </a:pPr>
+                      <a:r>
+                        <a:rPr lang="en-US" sz="1100" dirty="0">
+                          <a:solidFill>
+                            <a:srgbClr val="1D2B2A"/>
+                          </a:solidFill>
+                          <a:latin typeface="Calibri" pitchFamily="34" charset="0"/>
+                          <a:ea typeface="Calibri" pitchFamily="34" charset="-122"/>
+                          <a:cs typeface="Calibri" pitchFamily="34" charset="-120"/>
+                        </a:rPr>
+                        <a:t>amount edited, original lost</a:t>
+                      </a:r>
+                      <a:endParaRPr lang="en-US" sz="1100" dirty="0">
+                        <a:latin typeface="Calibri" charset="0"/>
+                        <a:ea typeface="Calibri" charset="0"/>
+                        <a:cs typeface="Calibri" charset="0"/>
+                      </a:endParaRPr>
+                    </a:p>
+                  </a:txBody>
+                  <a:tcPr marL="91440" marR="91440" marT="45720" marB="45720" anchor="ctr">
+                    <a:lnL w="6350" cap="flat" cmpd="sng" algn="ctr">
+                      <a:solidFill>
+                        <a:srgbClr val="D5E0DD"/>
+                      </a:solidFill>
+                      <a:prstDash val="solid"/>
+                      <a:round/>
+                      <a:headEnd type="none" w="med" len="med"/>
+                      <a:tailEnd type="none" w="med" len="med"/>
+                    </a:lnL>
+                    <a:lnR w="6350" cap="flat" cmpd="sng" algn="ctr">
+                      <a:solidFill>
+                        <a:srgbClr val="D5E0DD"/>
+                      </a:solidFill>
+                      <a:prstDash val="solid"/>
+                      <a:round/>
+                      <a:headEnd type="none" w="med" len="med"/>
+                      <a:tailEnd type="none" w="med" len="med"/>
+                    </a:lnR>
+                    <a:lnT w="6350" cap="flat" cmpd="sng" algn="ctr">
+                      <a:solidFill>
+                        <a:srgbClr val="D5E0DD"/>
+                      </a:solidFill>
+                      <a:prstDash val="solid"/>
+                      <a:round/>
+                      <a:headEnd type="none" w="med" len="med"/>
+                      <a:tailEnd type="none" w="med" len="med"/>
+                    </a:lnT>
+                    <a:lnB w="6350" cap="flat" cmpd="sng" algn="ctr">
+                      <a:solidFill>
+                        <a:srgbClr val="D5E0DD"/>
+                      </a:solidFill>
+                      <a:prstDash val="solid"/>
+                      <a:round/>
+                      <a:headEnd type="none" w="med" len="med"/>
+                      <a:tailEnd type="none" w="med" len="med"/>
+                    </a:lnB>
+                    <a:solidFill>
+                      <a:srgbClr val="FFFFFF"/>
+                    </a:solidFill>
+                  </a:tcPr>
+                </a:tc>
+                <a:tc>
+                  <a:txBody>
+                    <a:bodyPr/>
+                    <a:lstStyle/>
+                    <a:p>
+                      <a:pPr indent="0" marL="0">
+                        <a:buNone/>
+                      </a:pPr>
+                      <a:r>
+                        <a:rPr lang="en-US" sz="1100" dirty="0">
+                          <a:solidFill>
+                            <a:srgbClr val="1D2B2A"/>
+                          </a:solidFill>
+                          <a:latin typeface="Calibri" pitchFamily="34" charset="0"/>
+                          <a:ea typeface="Calibri" pitchFamily="34" charset="-122"/>
+                          <a:cs typeface="Calibri" pitchFamily="34" charset="-120"/>
+                        </a:rPr>
+                        <a:t>Reversal, re-post and Chargeback records</a:t>
+                      </a:r>
+                      <a:endParaRPr lang="en-US" sz="1100" dirty="0">
+                        <a:latin typeface="Calibri" charset="0"/>
+                        <a:ea typeface="Calibri" charset="0"/>
+                        <a:cs typeface="Calibri" charset="0"/>
+                      </a:endParaRPr>
+                    </a:p>
+                  </a:txBody>
+                  <a:tcPr marL="91440" marR="91440" marT="45720" marB="45720" anchor="ctr">
+                    <a:lnL w="6350" cap="flat" cmpd="sng" algn="ctr">
+                      <a:solidFill>
+                        <a:srgbClr val="D5E0DD"/>
+                      </a:solidFill>
+                      <a:prstDash val="solid"/>
+                      <a:round/>
+                      <a:headEnd type="none" w="med" len="med"/>
+                      <a:tailEnd type="none" w="med" len="med"/>
+                    </a:lnL>
+                    <a:lnR w="6350" cap="flat" cmpd="sng" algn="ctr">
+                      <a:solidFill>
+                        <a:srgbClr val="D5E0DD"/>
+                      </a:solidFill>
+                      <a:prstDash val="solid"/>
+                      <a:round/>
+                      <a:headEnd type="none" w="med" len="med"/>
+                      <a:tailEnd type="none" w="med" len="med"/>
+                    </a:lnR>
+                    <a:lnT w="6350" cap="flat" cmpd="sng" algn="ctr">
+                      <a:solidFill>
+                        <a:srgbClr val="D5E0DD"/>
+                      </a:solidFill>
+                      <a:prstDash val="solid"/>
+                      <a:round/>
+                      <a:headEnd type="none" w="med" len="med"/>
+                      <a:tailEnd type="none" w="med" len="med"/>
+                    </a:lnT>
+                    <a:lnB w="6350" cap="flat" cmpd="sng" algn="ctr">
+                      <a:solidFill>
+                        <a:srgbClr val="D5E0DD"/>
+                      </a:solidFill>
+                      <a:prstDash val="solid"/>
+                      <a:round/>
+                      <a:headEnd type="none" w="med" len="med"/>
+                      <a:tailEnd type="none" w="med" len="med"/>
+                    </a:lnB>
+                    <a:solidFill>
+                      <a:srgbClr val="FFFFFF"/>
+                    </a:solidFill>
+                  </a:tcPr>
+                </a:tc>
+              </a:tr>
+              <a:tr h="457200">
+                <a:tc>
+                  <a:txBody>
+                    <a:bodyPr/>
+                    <a:lstStyle/>
+                    <a:p>
+                      <a:pPr indent="0" marL="0">
+                        <a:buNone/>
+                      </a:pPr>
+                      <a:r>
+                        <a:rPr lang="en-US" sz="1100" dirty="0">
+                          <a:solidFill>
+                            <a:srgbClr val="1D2B2A"/>
+                          </a:solidFill>
+                          <a:latin typeface="Calibri" pitchFamily="34" charset="0"/>
+                          <a:ea typeface="Calibri" pitchFamily="34" charset="-122"/>
+                          <a:cs typeface="Calibri" pitchFamily="34" charset="-120"/>
+                        </a:rPr>
+                        <a:t>Card replaced several times</a:t>
+                      </a:r>
+                      <a:endParaRPr lang="en-US" sz="1100" dirty="0">
+                        <a:latin typeface="Calibri" charset="0"/>
+                        <a:ea typeface="Calibri" charset="0"/>
+                        <a:cs typeface="Calibri" charset="0"/>
+                      </a:endParaRPr>
+                    </a:p>
+                  </a:txBody>
+                  <a:tcPr marL="91440" marR="91440" marT="45720" marB="45720" anchor="ctr">
+                    <a:lnL w="6350" cap="flat" cmpd="sng" algn="ctr">
+                      <a:solidFill>
+                        <a:srgbClr val="D5E0DD"/>
+                      </a:solidFill>
+                      <a:prstDash val="solid"/>
+                      <a:round/>
+                      <a:headEnd type="none" w="med" len="med"/>
+                      <a:tailEnd type="none" w="med" len="med"/>
+                    </a:lnL>
+                    <a:lnR w="6350" cap="flat" cmpd="sng" algn="ctr">
+                      <a:solidFill>
+                        <a:srgbClr val="D5E0DD"/>
+                      </a:solidFill>
+                      <a:prstDash val="solid"/>
+                      <a:round/>
+                      <a:headEnd type="none" w="med" len="med"/>
+                      <a:tailEnd type="none" w="med" len="med"/>
+                    </a:lnR>
+                    <a:lnT w="6350" cap="flat" cmpd="sng" algn="ctr">
+                      <a:solidFill>
+                        <a:srgbClr val="D5E0DD"/>
+                      </a:solidFill>
+                      <a:prstDash val="solid"/>
+                      <a:round/>
+                      <a:headEnd type="none" w="med" len="med"/>
+                      <a:tailEnd type="none" w="med" len="med"/>
+                    </a:lnT>
+                    <a:lnB w="6350" cap="flat" cmpd="sng" algn="ctr">
+                      <a:solidFill>
+                        <a:srgbClr val="D5E0DD"/>
+                      </a:solidFill>
+                      <a:prstDash val="solid"/>
+                      <a:round/>
+                      <a:headEnd type="none" w="med" len="med"/>
+                      <a:tailEnd type="none" w="med" len="med"/>
+                    </a:lnB>
+                    <a:solidFill>
+                      <a:srgbClr val="F4F8F7"/>
+                    </a:solidFill>
+                  </a:tcPr>
+                </a:tc>
+                <a:tc>
+                  <a:txBody>
+                    <a:bodyPr/>
+                    <a:lstStyle/>
+                    <a:p>
+                      <a:pPr indent="0" marL="0">
+                        <a:buNone/>
+                      </a:pPr>
+                      <a:r>
+                        <a:rPr lang="en-US" sz="1100" dirty="0">
+                          <a:solidFill>
+                            <a:srgbClr val="1D2B2A"/>
+                          </a:solidFill>
+                          <a:latin typeface="Calibri" pitchFamily="34" charset="0"/>
+                          <a:ea typeface="Calibri" pitchFamily="34" charset="-122"/>
+                          <a:cs typeface="Calibri" pitchFamily="34" charset="-120"/>
+                        </a:rPr>
+                        <a:t>one card_number overwritten</a:t>
+                      </a:r>
+                      <a:endParaRPr lang="en-US" sz="1100" dirty="0">
+                        <a:latin typeface="Calibri" charset="0"/>
+                        <a:ea typeface="Calibri" charset="0"/>
+                        <a:cs typeface="Calibri" charset="0"/>
+                      </a:endParaRPr>
+                    </a:p>
+                  </a:txBody>
+                  <a:tcPr marL="91440" marR="91440" marT="45720" marB="45720" anchor="ctr">
+                    <a:lnL w="6350" cap="flat" cmpd="sng" algn="ctr">
+                      <a:solidFill>
+                        <a:srgbClr val="D5E0DD"/>
+                      </a:solidFill>
+                      <a:prstDash val="solid"/>
+                      <a:round/>
+                      <a:headEnd type="none" w="med" len="med"/>
+                      <a:tailEnd type="none" w="med" len="med"/>
+                    </a:lnL>
+                    <a:lnR w="6350" cap="flat" cmpd="sng" algn="ctr">
+                      <a:solidFill>
+                        <a:srgbClr val="D5E0DD"/>
+                      </a:solidFill>
+                      <a:prstDash val="solid"/>
+                      <a:round/>
+                      <a:headEnd type="none" w="med" len="med"/>
+                      <a:tailEnd type="none" w="med" len="med"/>
+                    </a:lnR>
+                    <a:lnT w="6350" cap="flat" cmpd="sng" algn="ctr">
+                      <a:solidFill>
+                        <a:srgbClr val="D5E0DD"/>
+                      </a:solidFill>
+                      <a:prstDash val="solid"/>
+                      <a:round/>
+                      <a:headEnd type="none" w="med" len="med"/>
+                      <a:tailEnd type="none" w="med" len="med"/>
+                    </a:lnT>
+                    <a:lnB w="6350" cap="flat" cmpd="sng" algn="ctr">
+                      <a:solidFill>
+                        <a:srgbClr val="D5E0DD"/>
+                      </a:solidFill>
+                      <a:prstDash val="solid"/>
+                      <a:round/>
+                      <a:headEnd type="none" w="med" len="med"/>
+                      <a:tailEnd type="none" w="med" len="med"/>
+                    </a:lnB>
+                    <a:solidFill>
+                      <a:srgbClr val="F4F8F7"/>
+                    </a:solidFill>
+                  </a:tcPr>
+                </a:tc>
+                <a:tc>
+                  <a:txBody>
+                    <a:bodyPr/>
+                    <a:lstStyle/>
+                    <a:p>
+                      <a:pPr indent="0" marL="0">
+                        <a:buNone/>
+                      </a:pPr>
+                      <a:r>
+                        <a:rPr lang="en-US" sz="1100" dirty="0">
+                          <a:solidFill>
+                            <a:srgbClr val="1D2B2A"/>
+                          </a:solidFill>
+                          <a:latin typeface="Calibri" pitchFamily="34" charset="0"/>
+                          <a:ea typeface="Calibri" pitchFamily="34" charset="-122"/>
+                          <a:cs typeface="Calibri" pitchFamily="34" charset="-120"/>
+                        </a:rPr>
+                        <a:t>IssuedCard chain; each payment keeps its card</a:t>
+                      </a:r>
+                      <a:endParaRPr lang="en-US" sz="1100" dirty="0">
+                        <a:latin typeface="Calibri" charset="0"/>
+                        <a:ea typeface="Calibri" charset="0"/>
+                        <a:cs typeface="Calibri" charset="0"/>
+                      </a:endParaRPr>
+                    </a:p>
+                  </a:txBody>
+                  <a:tcPr marL="91440" marR="91440" marT="45720" marB="45720" anchor="ctr">
+                    <a:lnL w="6350" cap="flat" cmpd="sng" algn="ctr">
+                      <a:solidFill>
+                        <a:srgbClr val="D5E0DD"/>
+                      </a:solidFill>
+                      <a:prstDash val="solid"/>
+                      <a:round/>
+                      <a:headEnd type="none" w="med" len="med"/>
+                      <a:tailEnd type="none" w="med" len="med"/>
+                    </a:lnL>
+                    <a:lnR w="6350" cap="flat" cmpd="sng" algn="ctr">
+                      <a:solidFill>
+                        <a:srgbClr val="D5E0DD"/>
+                      </a:solidFill>
+                      <a:prstDash val="solid"/>
+                      <a:round/>
+                      <a:headEnd type="none" w="med" len="med"/>
+                      <a:tailEnd type="none" w="med" len="med"/>
+                    </a:lnR>
+                    <a:lnT w="6350" cap="flat" cmpd="sng" algn="ctr">
+                      <a:solidFill>
+                        <a:srgbClr val="D5E0DD"/>
+                      </a:solidFill>
+                      <a:prstDash val="solid"/>
+                      <a:round/>
+                      <a:headEnd type="none" w="med" len="med"/>
+                      <a:tailEnd type="none" w="med" len="med"/>
+                    </a:lnT>
+                    <a:lnB w="6350" cap="flat" cmpd="sng" algn="ctr">
+                      <a:solidFill>
+                        <a:srgbClr val="D5E0DD"/>
+                      </a:solidFill>
+                      <a:prstDash val="solid"/>
+                      <a:round/>
+                      <a:headEnd type="none" w="med" len="med"/>
+                      <a:tailEnd type="none" w="med" len="med"/>
+                    </a:lnB>
+                    <a:solidFill>
+                      <a:srgbClr val="F4F8F7"/>
+                    </a:solidFill>
+                  </a:tcPr>
+                </a:tc>
+              </a:tr>
+              <a:tr h="457200">
+                <a:tc>
+                  <a:txBody>
+                    <a:bodyPr/>
+                    <a:lstStyle/>
+                    <a:p>
+                      <a:pPr indent="0" marL="0">
+                        <a:buNone/>
+                      </a:pPr>
+                      <a:r>
+                        <a:rPr lang="en-US" sz="1100" dirty="0">
+                          <a:solidFill>
+                            <a:srgbClr val="1D2B2A"/>
+                          </a:solidFill>
+                          <a:latin typeface="Calibri" pitchFamily="34" charset="0"/>
+                          <a:ea typeface="Calibri" pitchFamily="34" charset="-122"/>
+                          <a:cs typeface="Calibri" pitchFamily="34" charset="-120"/>
+                        </a:rPr>
+                        <a:t>Loan restructured</a:t>
+                      </a:r>
+                      <a:endParaRPr lang="en-US" sz="1100" dirty="0">
+                        <a:latin typeface="Calibri" charset="0"/>
+                        <a:ea typeface="Calibri" charset="0"/>
+                        <a:cs typeface="Calibri" charset="0"/>
+                      </a:endParaRPr>
+                    </a:p>
+                  </a:txBody>
+                  <a:tcPr marL="91440" marR="91440" marT="45720" marB="45720" anchor="ctr">
+                    <a:lnL w="6350" cap="flat" cmpd="sng" algn="ctr">
+                      <a:solidFill>
+                        <a:srgbClr val="D5E0DD"/>
+                      </a:solidFill>
+                      <a:prstDash val="solid"/>
+                      <a:round/>
+                      <a:headEnd type="none" w="med" len="med"/>
+                      <a:tailEnd type="none" w="med" len="med"/>
+                    </a:lnL>
+                    <a:lnR w="6350" cap="flat" cmpd="sng" algn="ctr">
+                      <a:solidFill>
+                        <a:srgbClr val="D5E0DD"/>
+                      </a:solidFill>
+                      <a:prstDash val="solid"/>
+                      <a:round/>
+                      <a:headEnd type="none" w="med" len="med"/>
+                      <a:tailEnd type="none" w="med" len="med"/>
+                    </a:lnR>
+                    <a:lnT w="6350" cap="flat" cmpd="sng" algn="ctr">
+                      <a:solidFill>
+                        <a:srgbClr val="D5E0DD"/>
+                      </a:solidFill>
+                      <a:prstDash val="solid"/>
+                      <a:round/>
+                      <a:headEnd type="none" w="med" len="med"/>
+                      <a:tailEnd type="none" w="med" len="med"/>
+                    </a:lnT>
+                    <a:lnB w="6350" cap="flat" cmpd="sng" algn="ctr">
+                      <a:solidFill>
+                        <a:srgbClr val="D5E0DD"/>
+                      </a:solidFill>
+                      <a:prstDash val="solid"/>
+                      <a:round/>
+                      <a:headEnd type="none" w="med" len="med"/>
+                      <a:tailEnd type="none" w="med" len="med"/>
+                    </a:lnB>
+                    <a:solidFill>
+                      <a:srgbClr val="FFFFFF"/>
+                    </a:solidFill>
+                  </a:tcPr>
+                </a:tc>
+                <a:tc>
+                  <a:txBody>
+                    <a:bodyPr/>
+                    <a:lstStyle/>
+                    <a:p>
+                      <a:pPr indent="0" marL="0">
+                        <a:buNone/>
+                      </a:pPr>
+                      <a:r>
+                        <a:rPr lang="en-US" sz="1100" dirty="0">
+                          <a:solidFill>
+                            <a:srgbClr val="1D2B2A"/>
+                          </a:solidFill>
+                          <a:latin typeface="Calibri" pitchFamily="34" charset="0"/>
+                          <a:ea typeface="Calibri" pitchFamily="34" charset="-122"/>
+                          <a:cs typeface="Calibri" pitchFamily="34" charset="-120"/>
+                        </a:rPr>
+                        <a:t>installments rewritten</a:t>
+                      </a:r>
+                      <a:endParaRPr lang="en-US" sz="1100" dirty="0">
+                        <a:latin typeface="Calibri" charset="0"/>
+                        <a:ea typeface="Calibri" charset="0"/>
+                        <a:cs typeface="Calibri" charset="0"/>
+                      </a:endParaRPr>
+                    </a:p>
+                  </a:txBody>
+                  <a:tcPr marL="91440" marR="91440" marT="45720" marB="45720" anchor="ctr">
+                    <a:lnL w="6350" cap="flat" cmpd="sng" algn="ctr">
+                      <a:solidFill>
+                        <a:srgbClr val="D5E0DD"/>
+                      </a:solidFill>
+                      <a:prstDash val="solid"/>
+                      <a:round/>
+                      <a:headEnd type="none" w="med" len="med"/>
+                      <a:tailEnd type="none" w="med" len="med"/>
+                    </a:lnL>
+                    <a:lnR w="6350" cap="flat" cmpd="sng" algn="ctr">
+                      <a:solidFill>
+                        <a:srgbClr val="D5E0DD"/>
+                      </a:solidFill>
+                      <a:prstDash val="solid"/>
+                      <a:round/>
+                      <a:headEnd type="none" w="med" len="med"/>
+                      <a:tailEnd type="none" w="med" len="med"/>
+                    </a:lnR>
+                    <a:lnT w="6350" cap="flat" cmpd="sng" algn="ctr">
+                      <a:solidFill>
+                        <a:srgbClr val="D5E0DD"/>
+                      </a:solidFill>
+                      <a:prstDash val="solid"/>
+                      <a:round/>
+                      <a:headEnd type="none" w="med" len="med"/>
+                      <a:tailEnd type="none" w="med" len="med"/>
+                    </a:lnT>
+                    <a:lnB w="6350" cap="flat" cmpd="sng" algn="ctr">
+                      <a:solidFill>
+                        <a:srgbClr val="D5E0DD"/>
+                      </a:solidFill>
+                      <a:prstDash val="solid"/>
+                      <a:round/>
+                      <a:headEnd type="none" w="med" len="med"/>
+                      <a:tailEnd type="none" w="med" len="med"/>
+                    </a:lnB>
+                    <a:solidFill>
+                      <a:srgbClr val="FFFFFF"/>
+                    </a:solidFill>
+                  </a:tcPr>
+                </a:tc>
+                <a:tc>
+                  <a:txBody>
+                    <a:bodyPr/>
+                    <a:lstStyle/>
+                    <a:p>
+                      <a:pPr indent="0" marL="0">
+                        <a:buNone/>
+                      </a:pPr>
+                      <a:r>
+                        <a:rPr lang="en-US" sz="1100" dirty="0">
+                          <a:solidFill>
+                            <a:srgbClr val="1D2B2A"/>
+                          </a:solidFill>
+                          <a:latin typeface="Calibri" pitchFamily="34" charset="0"/>
+                          <a:ea typeface="Calibri" pitchFamily="34" charset="-122"/>
+                          <a:cs typeface="Calibri" pitchFamily="34" charset="-120"/>
+                        </a:rPr>
+                        <a:t>new schedule version; paid stay PAID</a:t>
+                      </a:r>
+                      <a:endParaRPr lang="en-US" sz="1100" dirty="0">
+                        <a:latin typeface="Calibri" charset="0"/>
+                        <a:ea typeface="Calibri" charset="0"/>
+                        <a:cs typeface="Calibri" charset="0"/>
+                      </a:endParaRPr>
+                    </a:p>
+                  </a:txBody>
+                  <a:tcPr marL="91440" marR="91440" marT="45720" marB="45720" anchor="ctr">
+                    <a:lnL w="6350" cap="flat" cmpd="sng" algn="ctr">
+                      <a:solidFill>
+                        <a:srgbClr val="D5E0DD"/>
+                      </a:solidFill>
+                      <a:prstDash val="solid"/>
+                      <a:round/>
+                      <a:headEnd type="none" w="med" len="med"/>
+                      <a:tailEnd type="none" w="med" len="med"/>
+                    </a:lnL>
+                    <a:lnR w="6350" cap="flat" cmpd="sng" algn="ctr">
+                      <a:solidFill>
+                        <a:srgbClr val="D5E0DD"/>
+                      </a:solidFill>
+                      <a:prstDash val="solid"/>
+                      <a:round/>
+                      <a:headEnd type="none" w="med" len="med"/>
+                      <a:tailEnd type="none" w="med" len="med"/>
+                    </a:lnR>
+                    <a:lnT w="6350" cap="flat" cmpd="sng" algn="ctr">
+                      <a:solidFill>
+                        <a:srgbClr val="D5E0DD"/>
+                      </a:solidFill>
+                      <a:prstDash val="solid"/>
+                      <a:round/>
+                      <a:headEnd type="none" w="med" len="med"/>
+                      <a:tailEnd type="none" w="med" len="med"/>
+                    </a:lnT>
+                    <a:lnB w="6350" cap="flat" cmpd="sng" algn="ctr">
+                      <a:solidFill>
+                        <a:srgbClr val="D5E0DD"/>
+                      </a:solidFill>
+                      <a:prstDash val="solid"/>
+                      <a:round/>
+                      <a:headEnd type="none" w="med" len="med"/>
+                      <a:tailEnd type="none" w="med" len="med"/>
+                    </a:lnB>
+                    <a:solidFill>
+                      <a:srgbClr val="FFFFFF"/>
+                    </a:solidFill>
+                  </a:tcPr>
+                </a:tc>
+              </a:tr>
+              <a:tr h="457200">
+                <a:tc>
+                  <a:txBody>
+                    <a:bodyPr/>
+                    <a:lstStyle/>
+                    <a:p>
+                      <a:pPr indent="0" marL="0">
+                        <a:buNone/>
+                      </a:pPr>
+                      <a:r>
+                        <a:rPr lang="en-US" sz="1100" dirty="0">
+                          <a:solidFill>
+                            <a:srgbClr val="1D2B2A"/>
+                          </a:solidFill>
+                          <a:latin typeface="Calibri" pitchFamily="34" charset="0"/>
+                          <a:ea typeface="Calibri" pitchFamily="34" charset="-122"/>
+                          <a:cs typeface="Calibri" pitchFamily="34" charset="-120"/>
+                        </a:rPr>
+                        <a:t>Product withdrawn</a:t>
+                      </a:r>
+                      <a:endParaRPr lang="en-US" sz="1100" dirty="0">
+                        <a:latin typeface="Calibri" charset="0"/>
+                        <a:ea typeface="Calibri" charset="0"/>
+                        <a:cs typeface="Calibri" charset="0"/>
+                      </a:endParaRPr>
+                    </a:p>
+                  </a:txBody>
+                  <a:tcPr marL="91440" marR="91440" marT="45720" marB="45720" anchor="ctr">
+                    <a:lnL w="6350" cap="flat" cmpd="sng" algn="ctr">
+                      <a:solidFill>
+                        <a:srgbClr val="D5E0DD"/>
+                      </a:solidFill>
+                      <a:prstDash val="solid"/>
+                      <a:round/>
+                      <a:headEnd type="none" w="med" len="med"/>
+                      <a:tailEnd type="none" w="med" len="med"/>
+                    </a:lnL>
+                    <a:lnR w="6350" cap="flat" cmpd="sng" algn="ctr">
+                      <a:solidFill>
+                        <a:srgbClr val="D5E0DD"/>
+                      </a:solidFill>
+                      <a:prstDash val="solid"/>
+                      <a:round/>
+                      <a:headEnd type="none" w="med" len="med"/>
+                      <a:tailEnd type="none" w="med" len="med"/>
+                    </a:lnR>
+                    <a:lnT w="6350" cap="flat" cmpd="sng" algn="ctr">
+                      <a:solidFill>
+                        <a:srgbClr val="D5E0DD"/>
+                      </a:solidFill>
+                      <a:prstDash val="solid"/>
+                      <a:round/>
+                      <a:headEnd type="none" w="med" len="med"/>
+                      <a:tailEnd type="none" w="med" len="med"/>
+                    </a:lnT>
+                    <a:lnB w="6350" cap="flat" cmpd="sng" algn="ctr">
+                      <a:solidFill>
+                        <a:srgbClr val="D5E0DD"/>
+                      </a:solidFill>
+                      <a:prstDash val="solid"/>
+                      <a:round/>
+                      <a:headEnd type="none" w="med" len="med"/>
+                      <a:tailEnd type="none" w="med" len="med"/>
+                    </a:lnB>
+                    <a:solidFill>
+                      <a:srgbClr val="F4F8F7"/>
+                    </a:solidFill>
+                  </a:tcPr>
+                </a:tc>
+                <a:tc>
+                  <a:txBody>
+                    <a:bodyPr/>
+                    <a:lstStyle/>
+                    <a:p>
+                      <a:pPr indent="0" marL="0">
+                        <a:buNone/>
+                      </a:pPr>
+                      <a:r>
+                        <a:rPr lang="en-US" sz="1100" dirty="0">
+                          <a:solidFill>
+                            <a:srgbClr val="1D2B2A"/>
+                          </a:solidFill>
+                          <a:latin typeface="Calibri" pitchFamily="34" charset="0"/>
+                          <a:ea typeface="Calibri" pitchFamily="34" charset="-122"/>
+                          <a:cs typeface="Calibri" pitchFamily="34" charset="-120"/>
+                        </a:rPr>
+                        <a:t>is_active blocks old customers too</a:t>
+                      </a:r>
+                      <a:endParaRPr lang="en-US" sz="1100" dirty="0">
+                        <a:latin typeface="Calibri" charset="0"/>
+                        <a:ea typeface="Calibri" charset="0"/>
+                        <a:cs typeface="Calibri" charset="0"/>
+                      </a:endParaRPr>
+                    </a:p>
+                  </a:txBody>
+                  <a:tcPr marL="91440" marR="91440" marT="45720" marB="45720" anchor="ctr">
+                    <a:lnL w="6350" cap="flat" cmpd="sng" algn="ctr">
+                      <a:solidFill>
+                        <a:srgbClr val="D5E0DD"/>
+                      </a:solidFill>
+                      <a:prstDash val="solid"/>
+                      <a:round/>
+                      <a:headEnd type="none" w="med" len="med"/>
+                      <a:tailEnd type="none" w="med" len="med"/>
+                    </a:lnL>
+                    <a:lnR w="6350" cap="flat" cmpd="sng" algn="ctr">
+                      <a:solidFill>
+                        <a:srgbClr val="D5E0DD"/>
+                      </a:solidFill>
+                      <a:prstDash val="solid"/>
+                      <a:round/>
+                      <a:headEnd type="none" w="med" len="med"/>
+                      <a:tailEnd type="none" w="med" len="med"/>
+                    </a:lnR>
+                    <a:lnT w="6350" cap="flat" cmpd="sng" algn="ctr">
+                      <a:solidFill>
+                        <a:srgbClr val="D5E0DD"/>
+                      </a:solidFill>
+                      <a:prstDash val="solid"/>
+                      <a:round/>
+                      <a:headEnd type="none" w="med" len="med"/>
+                      <a:tailEnd type="none" w="med" len="med"/>
+                    </a:lnT>
+                    <a:lnB w="6350" cap="flat" cmpd="sng" algn="ctr">
+                      <a:solidFill>
+                        <a:srgbClr val="D5E0DD"/>
+                      </a:solidFill>
+                      <a:prstDash val="solid"/>
+                      <a:round/>
+                      <a:headEnd type="none" w="med" len="med"/>
+                      <a:tailEnd type="none" w="med" len="med"/>
+                    </a:lnB>
+                    <a:solidFill>
+                      <a:srgbClr val="F4F8F7"/>
+                    </a:solidFill>
+                  </a:tcPr>
+                </a:tc>
+                <a:tc>
+                  <a:txBody>
+                    <a:bodyPr/>
+                    <a:lstStyle/>
+                    <a:p>
+                      <a:pPr indent="0" marL="0">
+                        <a:buNone/>
+                      </a:pPr>
+                      <a:r>
+                        <a:rPr lang="en-US" sz="1100" dirty="0">
+                          <a:solidFill>
+                            <a:srgbClr val="1D2B2A"/>
+                          </a:solidFill>
+                          <a:latin typeface="Calibri" pitchFamily="34" charset="0"/>
+                          <a:ea typeface="Calibri" pitchFamily="34" charset="-122"/>
+                          <a:cs typeface="Calibri" pitchFamily="34" charset="-120"/>
+                        </a:rPr>
+                        <a:t>sale status + pinned terms version</a:t>
+                      </a:r>
+                      <a:endParaRPr lang="en-US" sz="1100" dirty="0">
+                        <a:latin typeface="Calibri" charset="0"/>
+                        <a:ea typeface="Calibri" charset="0"/>
+                        <a:cs typeface="Calibri" charset="0"/>
+                      </a:endParaRPr>
+                    </a:p>
+                  </a:txBody>
+                  <a:tcPr marL="91440" marR="91440" marT="45720" marB="45720" anchor="ctr">
+                    <a:lnL w="6350" cap="flat" cmpd="sng" algn="ctr">
+                      <a:solidFill>
+                        <a:srgbClr val="D5E0DD"/>
+                      </a:solidFill>
+                      <a:prstDash val="solid"/>
+                      <a:round/>
+                      <a:headEnd type="none" w="med" len="med"/>
+                      <a:tailEnd type="none" w="med" len="med"/>
+                    </a:lnL>
+                    <a:lnR w="6350" cap="flat" cmpd="sng" algn="ctr">
+                      <a:solidFill>
+                        <a:srgbClr val="D5E0DD"/>
+                      </a:solidFill>
+                      <a:prstDash val="solid"/>
+                      <a:round/>
+                      <a:headEnd type="none" w="med" len="med"/>
+                      <a:tailEnd type="none" w="med" len="med"/>
+                    </a:lnR>
+                    <a:lnT w="6350" cap="flat" cmpd="sng" algn="ctr">
+                      <a:solidFill>
+                        <a:srgbClr val="D5E0DD"/>
+                      </a:solidFill>
+                      <a:prstDash val="solid"/>
+                      <a:round/>
+                      <a:headEnd type="none" w="med" len="med"/>
+                      <a:tailEnd type="none" w="med" len="med"/>
+                    </a:lnT>
+                    <a:lnB w="6350" cap="flat" cmpd="sng" algn="ctr">
+                      <a:solidFill>
+                        <a:srgbClr val="D5E0DD"/>
+                      </a:solidFill>
+                      <a:prstDash val="solid"/>
+                      <a:round/>
+                      <a:headEnd type="none" w="med" len="med"/>
+                      <a:tailEnd type="none" w="med" len="med"/>
+                    </a:lnB>
+                    <a:solidFill>
+                      <a:srgbClr val="F4F8F7"/>
+                    </a:solidFill>
+                  </a:tcPr>
+                </a:tc>
+              </a:tr>
+            </a:tbl>
+          </a:graphicData>
+        </a:graphic>
+      </p:graphicFrame>
+      <p:sp>
+        <p:nvSpPr>
+          <p:cNvPr id="5" name="Text 2"/>
+          <p:cNvSpPr txBox="1"/>
+          <p:nvPr/>
+        </p:nvSpPr>
+        <p:spPr>
+          <a:xfrm>
+            <a:off x="457200" y="4526280"/>
+            <a:ext cx="8229600" cy="365760"/>
           </a:xfrm>
           <a:prstGeom prst="rect">
             <a:avLst/>
@@ -2464,1530 +3800,21 @@
           <a:bodyPr wrap="square" lIns="0" tIns="0" rIns="0" bIns="0" rtlCol="0" anchor="ctr"/>
           <a:lstStyle/>
           <a:p>
-            <a:pPr algn="ctr" indent="0" marL="0">
-              <a:buNone/>
-            </a:pPr>
-            <a:r>
-              <a:rPr lang="en-US" sz="1400" b="1" dirty="0">
-                <a:solidFill>
-                  <a:srgbClr val="FFFFFF"/>
-                </a:solidFill>
-                <a:latin typeface="Cambria" pitchFamily="34" charset="0"/>
-                <a:ea typeface="Cambria" pitchFamily="34" charset="-122"/>
-                <a:cs typeface="Cambria" pitchFamily="34" charset="-120"/>
-              </a:rPr>
-              <a:t>1</a:t>
-            </a:r>
-            <a:endParaRPr lang="en-US" sz="1400" dirty="0"/>
-          </a:p>
-        </p:txBody>
-      </p:sp>
-      <p:sp>
-        <p:nvSpPr>
-          <p:cNvPr id="6" name="Text 4"/>
-          <p:cNvSpPr txBox="1"/>
-          <p:nvPr/>
-        </p:nvSpPr>
-        <p:spPr>
-          <a:xfrm>
-            <a:off x="960120" y="1188720"/>
-            <a:ext cx="3566160" cy="384048"/>
-          </a:xfrm>
-          <a:prstGeom prst="rect">
-            <a:avLst/>
-          </a:prstGeom>
-          <a:noFill/>
-          <a:ln/>
-        </p:spPr>
-        <p:txBody>
-          <a:bodyPr wrap="square" lIns="0" tIns="0" rIns="0" bIns="0" rtlCol="0" anchor="ctr"/>
-          <a:lstStyle/>
-          <a:p>
             <a:pPr indent="0" marL="0">
               <a:buNone/>
             </a:pPr>
             <a:r>
-              <a:rPr lang="en-US" sz="1250" dirty="0">
-                <a:solidFill>
-                  <a:srgbClr val="1D2B2A"/>
+              <a:rPr lang="en-US" sz="1200" i="1" dirty="0">
+                <a:solidFill>
+                  <a:srgbClr val="5B6B69"/>
                 </a:solidFill>
                 <a:latin typeface="Calibri" pitchFamily="34" charset="0"/>
                 <a:ea typeface="Calibri" pitchFamily="34" charset="-122"/>
                 <a:cs typeface="Calibri" pitchFamily="34" charset="-120"/>
               </a:rPr>
-              <a:t>Document expires mid-onboarding</a:t>
-            </a:r>
-            <a:endParaRPr lang="en-US" sz="1250" dirty="0"/>
-          </a:p>
-        </p:txBody>
-      </p:sp>
-      <p:sp>
-        <p:nvSpPr>
-          <p:cNvPr id="7" name="Shape 5"/>
-          <p:cNvSpPr/>
-          <p:nvPr/>
-        </p:nvSpPr>
-        <p:spPr>
-          <a:xfrm>
-            <a:off x="457200" y="1645920"/>
-            <a:ext cx="384048" cy="384048"/>
-          </a:xfrm>
-          <a:prstGeom prst="ellipse">
-            <a:avLst/>
-          </a:prstGeom>
-          <a:solidFill>
-            <a:srgbClr val="B8862F"/>
-          </a:solidFill>
-          <a:ln/>
-        </p:spPr>
-      </p:sp>
-      <p:sp>
-        <p:nvSpPr>
-          <p:cNvPr id="8" name="Text 6"/>
-          <p:cNvSpPr txBox="1"/>
-          <p:nvPr/>
-        </p:nvSpPr>
-        <p:spPr>
-          <a:xfrm>
-            <a:off x="457200" y="1645920"/>
-            <a:ext cx="384048" cy="384048"/>
-          </a:xfrm>
-          <a:prstGeom prst="rect">
-            <a:avLst/>
-          </a:prstGeom>
-          <a:noFill/>
-          <a:ln/>
-        </p:spPr>
-        <p:txBody>
-          <a:bodyPr wrap="square" lIns="0" tIns="0" rIns="0" bIns="0" rtlCol="0" anchor="ctr"/>
-          <a:lstStyle/>
-          <a:p>
-            <a:pPr algn="ctr" indent="0" marL="0">
-              <a:buNone/>
-            </a:pPr>
-            <a:r>
-              <a:rPr lang="en-US" sz="1400" b="1" dirty="0">
-                <a:solidFill>
-                  <a:srgbClr val="FFFFFF"/>
-                </a:solidFill>
-                <a:latin typeface="Cambria" pitchFamily="34" charset="0"/>
-                <a:ea typeface="Cambria" pitchFamily="34" charset="-122"/>
-                <a:cs typeface="Cambria" pitchFamily="34" charset="-120"/>
-              </a:rPr>
-              <a:t>2</a:t>
-            </a:r>
-            <a:endParaRPr lang="en-US" sz="1400" dirty="0"/>
-          </a:p>
-        </p:txBody>
-      </p:sp>
-      <p:sp>
-        <p:nvSpPr>
-          <p:cNvPr id="9" name="Text 7"/>
-          <p:cNvSpPr txBox="1"/>
-          <p:nvPr/>
-        </p:nvSpPr>
-        <p:spPr>
-          <a:xfrm>
-            <a:off x="960120" y="1645920"/>
-            <a:ext cx="3566160" cy="384048"/>
-          </a:xfrm>
-          <a:prstGeom prst="rect">
-            <a:avLst/>
-          </a:prstGeom>
-          <a:noFill/>
-          <a:ln/>
-        </p:spPr>
-        <p:txBody>
-          <a:bodyPr wrap="square" lIns="0" tIns="0" rIns="0" bIns="0" rtlCol="0" anchor="ctr"/>
-          <a:lstStyle/>
-          <a:p>
-            <a:pPr indent="0" marL="0">
-              <a:buNone/>
-            </a:pPr>
-            <a:r>
-              <a:rPr lang="en-US" sz="1250" dirty="0">
-                <a:solidFill>
-                  <a:srgbClr val="1D2B2A"/>
-                </a:solidFill>
-                <a:latin typeface="Calibri" pitchFamily="34" charset="0"/>
-                <a:ea typeface="Calibri" pitchFamily="34" charset="-122"/>
-                <a:cs typeface="Calibri" pitchFamily="34" charset="-120"/>
-              </a:rPr>
-              <a:t>Large transfer: dual control, hold, release</a:t>
-            </a:r>
-            <a:endParaRPr lang="en-US" sz="1250" dirty="0"/>
-          </a:p>
-        </p:txBody>
-      </p:sp>
-      <p:sp>
-        <p:nvSpPr>
-          <p:cNvPr id="10" name="Shape 8"/>
-          <p:cNvSpPr/>
-          <p:nvPr/>
-        </p:nvSpPr>
-        <p:spPr>
-          <a:xfrm>
-            <a:off x="457200" y="2103120"/>
-            <a:ext cx="384048" cy="384048"/>
-          </a:xfrm>
-          <a:prstGeom prst="ellipse">
-            <a:avLst/>
-          </a:prstGeom>
-          <a:solidFill>
-            <a:srgbClr val="B8862F"/>
-          </a:solidFill>
-          <a:ln/>
-        </p:spPr>
-      </p:sp>
-      <p:sp>
-        <p:nvSpPr>
-          <p:cNvPr id="11" name="Text 9"/>
-          <p:cNvSpPr txBox="1"/>
-          <p:nvPr/>
-        </p:nvSpPr>
-        <p:spPr>
-          <a:xfrm>
-            <a:off x="457200" y="2103120"/>
-            <a:ext cx="384048" cy="384048"/>
-          </a:xfrm>
-          <a:prstGeom prst="rect">
-            <a:avLst/>
-          </a:prstGeom>
-          <a:noFill/>
-          <a:ln/>
-        </p:spPr>
-        <p:txBody>
-          <a:bodyPr wrap="square" lIns="0" tIns="0" rIns="0" bIns="0" rtlCol="0" anchor="ctr"/>
-          <a:lstStyle/>
-          <a:p>
-            <a:pPr algn="ctr" indent="0" marL="0">
-              <a:buNone/>
-            </a:pPr>
-            <a:r>
-              <a:rPr lang="en-US" sz="1400" b="1" dirty="0">
-                <a:solidFill>
-                  <a:srgbClr val="FFFFFF"/>
-                </a:solidFill>
-                <a:latin typeface="Cambria" pitchFamily="34" charset="0"/>
-                <a:ea typeface="Cambria" pitchFamily="34" charset="-122"/>
-                <a:cs typeface="Cambria" pitchFamily="34" charset="-120"/>
-              </a:rPr>
-              <a:t>3</a:t>
-            </a:r>
-            <a:endParaRPr lang="en-US" sz="1400" dirty="0"/>
-          </a:p>
-        </p:txBody>
-      </p:sp>
-      <p:sp>
-        <p:nvSpPr>
-          <p:cNvPr id="12" name="Text 10"/>
-          <p:cNvSpPr txBox="1"/>
-          <p:nvPr/>
-        </p:nvSpPr>
-        <p:spPr>
-          <a:xfrm>
-            <a:off x="960120" y="2103120"/>
-            <a:ext cx="3566160" cy="384048"/>
-          </a:xfrm>
-          <a:prstGeom prst="rect">
-            <a:avLst/>
-          </a:prstGeom>
-          <a:noFill/>
-          <a:ln/>
-        </p:spPr>
-        <p:txBody>
-          <a:bodyPr wrap="square" lIns="0" tIns="0" rIns="0" bIns="0" rtlCol="0" anchor="ctr"/>
-          <a:lstStyle/>
-          <a:p>
-            <a:pPr indent="0" marL="0">
-              <a:buNone/>
-            </a:pPr>
-            <a:r>
-              <a:rPr lang="en-US" sz="1250" dirty="0">
-                <a:solidFill>
-                  <a:srgbClr val="1D2B2A"/>
-                </a:solidFill>
-                <a:latin typeface="Calibri" pitchFamily="34" charset="0"/>
-                <a:ea typeface="Calibri" pitchFamily="34" charset="-122"/>
-                <a:cs typeface="Calibri" pitchFamily="34" charset="-120"/>
-              </a:rPr>
-              <a:t>Card stolen, replaced twice, found</a:t>
-            </a:r>
-            <a:endParaRPr lang="en-US" sz="1250" dirty="0"/>
-          </a:p>
-        </p:txBody>
-      </p:sp>
-      <p:sp>
-        <p:nvSpPr>
-          <p:cNvPr id="13" name="Shape 11"/>
-          <p:cNvSpPr/>
-          <p:nvPr/>
-        </p:nvSpPr>
-        <p:spPr>
-          <a:xfrm>
-            <a:off x="457200" y="2560320"/>
-            <a:ext cx="384048" cy="384048"/>
-          </a:xfrm>
-          <a:prstGeom prst="ellipse">
-            <a:avLst/>
-          </a:prstGeom>
-          <a:solidFill>
-            <a:srgbClr val="B8862F"/>
-          </a:solidFill>
-          <a:ln/>
-        </p:spPr>
-      </p:sp>
-      <p:sp>
-        <p:nvSpPr>
-          <p:cNvPr id="14" name="Text 12"/>
-          <p:cNvSpPr txBox="1"/>
-          <p:nvPr/>
-        </p:nvSpPr>
-        <p:spPr>
-          <a:xfrm>
-            <a:off x="457200" y="2560320"/>
-            <a:ext cx="384048" cy="384048"/>
-          </a:xfrm>
-          <a:prstGeom prst="rect">
-            <a:avLst/>
-          </a:prstGeom>
-          <a:noFill/>
-          <a:ln/>
-        </p:spPr>
-        <p:txBody>
-          <a:bodyPr wrap="square" lIns="0" tIns="0" rIns="0" bIns="0" rtlCol="0" anchor="ctr"/>
-          <a:lstStyle/>
-          <a:p>
-            <a:pPr algn="ctr" indent="0" marL="0">
-              <a:buNone/>
-            </a:pPr>
-            <a:r>
-              <a:rPr lang="en-US" sz="1400" b="1" dirty="0">
-                <a:solidFill>
-                  <a:srgbClr val="FFFFFF"/>
-                </a:solidFill>
-                <a:latin typeface="Cambria" pitchFamily="34" charset="0"/>
-                <a:ea typeface="Cambria" pitchFamily="34" charset="-122"/>
-                <a:cs typeface="Cambria" pitchFamily="34" charset="-120"/>
-              </a:rPr>
-              <a:t>4</a:t>
-            </a:r>
-            <a:endParaRPr lang="en-US" sz="1400" dirty="0"/>
-          </a:p>
-        </p:txBody>
-      </p:sp>
-      <p:sp>
-        <p:nvSpPr>
-          <p:cNvPr id="15" name="Text 13"/>
-          <p:cNvSpPr txBox="1"/>
-          <p:nvPr/>
-        </p:nvSpPr>
-        <p:spPr>
-          <a:xfrm>
-            <a:off x="960120" y="2560320"/>
-            <a:ext cx="3566160" cy="384048"/>
-          </a:xfrm>
-          <a:prstGeom prst="rect">
-            <a:avLst/>
-          </a:prstGeom>
-          <a:noFill/>
-          <a:ln/>
-        </p:spPr>
-        <p:txBody>
-          <a:bodyPr wrap="square" lIns="0" tIns="0" rIns="0" bIns="0" rtlCol="0" anchor="ctr"/>
-          <a:lstStyle/>
-          <a:p>
-            <a:pPr indent="0" marL="0">
-              <a:buNone/>
-            </a:pPr>
-            <a:r>
-              <a:rPr lang="en-US" sz="1250" dirty="0">
-                <a:solidFill>
-                  <a:srgbClr val="1D2B2A"/>
-                </a:solidFill>
-                <a:latin typeface="Calibri" pitchFamily="34" charset="0"/>
-                <a:ea typeface="Calibri" pitchFamily="34" charset="-122"/>
-                <a:cs typeface="Calibri" pitchFamily="34" charset="-120"/>
-              </a:rPr>
-              <a:t>Posted, reversed, re-posted, disputed</a:t>
-            </a:r>
-            <a:endParaRPr lang="en-US" sz="1250" dirty="0"/>
-          </a:p>
-        </p:txBody>
-      </p:sp>
-      <p:sp>
-        <p:nvSpPr>
-          <p:cNvPr id="16" name="Shape 14"/>
-          <p:cNvSpPr/>
-          <p:nvPr/>
-        </p:nvSpPr>
-        <p:spPr>
-          <a:xfrm>
-            <a:off x="457200" y="3017520"/>
-            <a:ext cx="384048" cy="384048"/>
-          </a:xfrm>
-          <a:prstGeom prst="ellipse">
-            <a:avLst/>
-          </a:prstGeom>
-          <a:solidFill>
-            <a:srgbClr val="B8862F"/>
-          </a:solidFill>
-          <a:ln/>
-        </p:spPr>
-      </p:sp>
-      <p:sp>
-        <p:nvSpPr>
-          <p:cNvPr id="17" name="Text 15"/>
-          <p:cNvSpPr txBox="1"/>
-          <p:nvPr/>
-        </p:nvSpPr>
-        <p:spPr>
-          <a:xfrm>
-            <a:off x="457200" y="3017520"/>
-            <a:ext cx="384048" cy="384048"/>
-          </a:xfrm>
-          <a:prstGeom prst="rect">
-            <a:avLst/>
-          </a:prstGeom>
-          <a:noFill/>
-          <a:ln/>
-        </p:spPr>
-        <p:txBody>
-          <a:bodyPr wrap="square" lIns="0" tIns="0" rIns="0" bIns="0" rtlCol="0" anchor="ctr"/>
-          <a:lstStyle/>
-          <a:p>
-            <a:pPr algn="ctr" indent="0" marL="0">
-              <a:buNone/>
-            </a:pPr>
-            <a:r>
-              <a:rPr lang="en-US" sz="1400" b="1" dirty="0">
-                <a:solidFill>
-                  <a:srgbClr val="FFFFFF"/>
-                </a:solidFill>
-                <a:latin typeface="Cambria" pitchFamily="34" charset="0"/>
-                <a:ea typeface="Cambria" pitchFamily="34" charset="-122"/>
-                <a:cs typeface="Cambria" pitchFamily="34" charset="-120"/>
-              </a:rPr>
-              <a:t>5</a:t>
-            </a:r>
-            <a:endParaRPr lang="en-US" sz="1400" dirty="0"/>
-          </a:p>
-        </p:txBody>
-      </p:sp>
-      <p:sp>
-        <p:nvSpPr>
-          <p:cNvPr id="18" name="Text 16"/>
-          <p:cNvSpPr txBox="1"/>
-          <p:nvPr/>
-        </p:nvSpPr>
-        <p:spPr>
-          <a:xfrm>
-            <a:off x="960120" y="3017520"/>
-            <a:ext cx="3566160" cy="384048"/>
-          </a:xfrm>
-          <a:prstGeom prst="rect">
-            <a:avLst/>
-          </a:prstGeom>
-          <a:noFill/>
-          <a:ln/>
-        </p:spPr>
-        <p:txBody>
-          <a:bodyPr wrap="square" lIns="0" tIns="0" rIns="0" bIns="0" rtlCol="0" anchor="ctr"/>
-          <a:lstStyle/>
-          <a:p>
-            <a:pPr indent="0" marL="0">
-              <a:buNone/>
-            </a:pPr>
-            <a:r>
-              <a:rPr lang="en-US" sz="1250" dirty="0">
-                <a:solidFill>
-                  <a:srgbClr val="1D2B2A"/>
-                </a:solidFill>
-                <a:latin typeface="Calibri" pitchFamily="34" charset="0"/>
-                <a:ea typeface="Calibri" pitchFamily="34" charset="-122"/>
-                <a:cs typeface="Calibri" pitchFamily="34" charset="-120"/>
-              </a:rPr>
-              <a:t>Restricted then cleared</a:t>
-            </a:r>
-            <a:endParaRPr lang="en-US" sz="1250" dirty="0"/>
-          </a:p>
-        </p:txBody>
-      </p:sp>
-      <p:sp>
-        <p:nvSpPr>
-          <p:cNvPr id="19" name="Shape 17"/>
-          <p:cNvSpPr/>
-          <p:nvPr/>
-        </p:nvSpPr>
-        <p:spPr>
-          <a:xfrm>
-            <a:off x="457200" y="3474720"/>
-            <a:ext cx="384048" cy="384048"/>
-          </a:xfrm>
-          <a:prstGeom prst="ellipse">
-            <a:avLst/>
-          </a:prstGeom>
-          <a:solidFill>
-            <a:srgbClr val="B8862F"/>
-          </a:solidFill>
-          <a:ln/>
-        </p:spPr>
-      </p:sp>
-      <p:sp>
-        <p:nvSpPr>
-          <p:cNvPr id="20" name="Text 18"/>
-          <p:cNvSpPr txBox="1"/>
-          <p:nvPr/>
-        </p:nvSpPr>
-        <p:spPr>
-          <a:xfrm>
-            <a:off x="457200" y="3474720"/>
-            <a:ext cx="384048" cy="384048"/>
-          </a:xfrm>
-          <a:prstGeom prst="rect">
-            <a:avLst/>
-          </a:prstGeom>
-          <a:noFill/>
-          <a:ln/>
-        </p:spPr>
-        <p:txBody>
-          <a:bodyPr wrap="square" lIns="0" tIns="0" rIns="0" bIns="0" rtlCol="0" anchor="ctr"/>
-          <a:lstStyle/>
-          <a:p>
-            <a:pPr algn="ctr" indent="0" marL="0">
-              <a:buNone/>
-            </a:pPr>
-            <a:r>
-              <a:rPr lang="en-US" sz="1400" b="1" dirty="0">
-                <a:solidFill>
-                  <a:srgbClr val="FFFFFF"/>
-                </a:solidFill>
-                <a:latin typeface="Cambria" pitchFamily="34" charset="0"/>
-                <a:ea typeface="Cambria" pitchFamily="34" charset="-122"/>
-                <a:cs typeface="Cambria" pitchFamily="34" charset="-120"/>
-              </a:rPr>
-              <a:t>6</a:t>
-            </a:r>
-            <a:endParaRPr lang="en-US" sz="1400" dirty="0"/>
-          </a:p>
-        </p:txBody>
-      </p:sp>
-      <p:sp>
-        <p:nvSpPr>
-          <p:cNvPr id="21" name="Text 19"/>
-          <p:cNvSpPr txBox="1"/>
-          <p:nvPr/>
-        </p:nvSpPr>
-        <p:spPr>
-          <a:xfrm>
-            <a:off x="960120" y="3474720"/>
-            <a:ext cx="3566160" cy="384048"/>
-          </a:xfrm>
-          <a:prstGeom prst="rect">
-            <a:avLst/>
-          </a:prstGeom>
-          <a:noFill/>
-          <a:ln/>
-        </p:spPr>
-        <p:txBody>
-          <a:bodyPr wrap="square" lIns="0" tIns="0" rIns="0" bIns="0" rtlCol="0" anchor="ctr"/>
-          <a:lstStyle/>
-          <a:p>
-            <a:pPr indent="0" marL="0">
-              <a:buNone/>
-            </a:pPr>
-            <a:r>
-              <a:rPr lang="en-US" sz="1250" dirty="0">
-                <a:solidFill>
-                  <a:srgbClr val="1D2B2A"/>
-                </a:solidFill>
-                <a:latin typeface="Calibri" pitchFamily="34" charset="0"/>
-                <a:ea typeface="Calibri" pitchFamily="34" charset="-122"/>
-                <a:cs typeface="Calibri" pitchFamily="34" charset="-120"/>
-              </a:rPr>
-              <a:t>Financing: limits, arrears, restructure</a:t>
-            </a:r>
-            <a:endParaRPr lang="en-US" sz="1250" dirty="0"/>
-          </a:p>
-        </p:txBody>
-      </p:sp>
-      <p:sp>
-        <p:nvSpPr>
-          <p:cNvPr id="22" name="Shape 20"/>
-          <p:cNvSpPr/>
-          <p:nvPr/>
-        </p:nvSpPr>
-        <p:spPr>
-          <a:xfrm>
-            <a:off x="457200" y="3931920"/>
-            <a:ext cx="384048" cy="384048"/>
-          </a:xfrm>
-          <a:prstGeom prst="ellipse">
-            <a:avLst/>
-          </a:prstGeom>
-          <a:solidFill>
-            <a:srgbClr val="B8862F"/>
-          </a:solidFill>
-          <a:ln/>
-        </p:spPr>
-      </p:sp>
-      <p:sp>
-        <p:nvSpPr>
-          <p:cNvPr id="23" name="Text 21"/>
-          <p:cNvSpPr txBox="1"/>
-          <p:nvPr/>
-        </p:nvSpPr>
-        <p:spPr>
-          <a:xfrm>
-            <a:off x="457200" y="3931920"/>
-            <a:ext cx="384048" cy="384048"/>
-          </a:xfrm>
-          <a:prstGeom prst="rect">
-            <a:avLst/>
-          </a:prstGeom>
-          <a:noFill/>
-          <a:ln/>
-        </p:spPr>
-        <p:txBody>
-          <a:bodyPr wrap="square" lIns="0" tIns="0" rIns="0" bIns="0" rtlCol="0" anchor="ctr"/>
-          <a:lstStyle/>
-          <a:p>
-            <a:pPr algn="ctr" indent="0" marL="0">
-              <a:buNone/>
-            </a:pPr>
-            <a:r>
-              <a:rPr lang="en-US" sz="1400" b="1" dirty="0">
-                <a:solidFill>
-                  <a:srgbClr val="FFFFFF"/>
-                </a:solidFill>
-                <a:latin typeface="Cambria" pitchFamily="34" charset="0"/>
-                <a:ea typeface="Cambria" pitchFamily="34" charset="-122"/>
-                <a:cs typeface="Cambria" pitchFamily="34" charset="-120"/>
-              </a:rPr>
-              <a:t>7</a:t>
-            </a:r>
-            <a:endParaRPr lang="en-US" sz="1400" dirty="0"/>
-          </a:p>
-        </p:txBody>
-      </p:sp>
-      <p:sp>
-        <p:nvSpPr>
-          <p:cNvPr id="24" name="Text 22"/>
-          <p:cNvSpPr txBox="1"/>
-          <p:nvPr/>
-        </p:nvSpPr>
-        <p:spPr>
-          <a:xfrm>
-            <a:off x="960120" y="3931920"/>
-            <a:ext cx="3566160" cy="384048"/>
-          </a:xfrm>
-          <a:prstGeom prst="rect">
-            <a:avLst/>
-          </a:prstGeom>
-          <a:noFill/>
-          <a:ln/>
-        </p:spPr>
-        <p:txBody>
-          <a:bodyPr wrap="square" lIns="0" tIns="0" rIns="0" bIns="0" rtlCol="0" anchor="ctr"/>
-          <a:lstStyle/>
-          <a:p>
-            <a:pPr indent="0" marL="0">
-              <a:buNone/>
-            </a:pPr>
-            <a:r>
-              <a:rPr lang="en-US" sz="1250" dirty="0">
-                <a:solidFill>
-                  <a:srgbClr val="1D2B2A"/>
-                </a:solidFill>
-                <a:latin typeface="Calibri" pitchFamily="34" charset="0"/>
-                <a:ea typeface="Calibri" pitchFamily="34" charset="-122"/>
-                <a:cs typeface="Calibri" pitchFamily="34" charset="-120"/>
-              </a:rPr>
-              <a:t>Director leaves; authority provable</a:t>
-            </a:r>
-            <a:endParaRPr lang="en-US" sz="1250" dirty="0"/>
-          </a:p>
-        </p:txBody>
-      </p:sp>
-      <p:sp>
-        <p:nvSpPr>
-          <p:cNvPr id="25" name="Shape 23"/>
-          <p:cNvSpPr/>
-          <p:nvPr/>
-        </p:nvSpPr>
-        <p:spPr>
-          <a:xfrm>
-            <a:off x="457200" y="4389120"/>
-            <a:ext cx="384048" cy="384048"/>
-          </a:xfrm>
-          <a:prstGeom prst="ellipse">
-            <a:avLst/>
-          </a:prstGeom>
-          <a:solidFill>
-            <a:srgbClr val="B8862F"/>
-          </a:solidFill>
-          <a:ln/>
-        </p:spPr>
-      </p:sp>
-      <p:sp>
-        <p:nvSpPr>
-          <p:cNvPr id="26" name="Text 24"/>
-          <p:cNvSpPr txBox="1"/>
-          <p:nvPr/>
-        </p:nvSpPr>
-        <p:spPr>
-          <a:xfrm>
-            <a:off x="457200" y="4389120"/>
-            <a:ext cx="384048" cy="384048"/>
-          </a:xfrm>
-          <a:prstGeom prst="rect">
-            <a:avLst/>
-          </a:prstGeom>
-          <a:noFill/>
-          <a:ln/>
-        </p:spPr>
-        <p:txBody>
-          <a:bodyPr wrap="square" lIns="0" tIns="0" rIns="0" bIns="0" rtlCol="0" anchor="ctr"/>
-          <a:lstStyle/>
-          <a:p>
-            <a:pPr algn="ctr" indent="0" marL="0">
-              <a:buNone/>
-            </a:pPr>
-            <a:r>
-              <a:rPr lang="en-US" sz="1400" b="1" dirty="0">
-                <a:solidFill>
-                  <a:srgbClr val="FFFFFF"/>
-                </a:solidFill>
-                <a:latin typeface="Cambria" pitchFamily="34" charset="0"/>
-                <a:ea typeface="Cambria" pitchFamily="34" charset="-122"/>
-                <a:cs typeface="Cambria" pitchFamily="34" charset="-120"/>
-              </a:rPr>
-              <a:t>8</a:t>
-            </a:r>
-            <a:endParaRPr lang="en-US" sz="1400" dirty="0"/>
-          </a:p>
-        </p:txBody>
-      </p:sp>
-      <p:sp>
-        <p:nvSpPr>
-          <p:cNvPr id="27" name="Text 25"/>
-          <p:cNvSpPr txBox="1"/>
-          <p:nvPr/>
-        </p:nvSpPr>
-        <p:spPr>
-          <a:xfrm>
-            <a:off x="960120" y="4389120"/>
-            <a:ext cx="3566160" cy="384048"/>
-          </a:xfrm>
-          <a:prstGeom prst="rect">
-            <a:avLst/>
-          </a:prstGeom>
-          <a:noFill/>
-          <a:ln/>
-        </p:spPr>
-        <p:txBody>
-          <a:bodyPr wrap="square" lIns="0" tIns="0" rIns="0" bIns="0" rtlCol="0" anchor="ctr"/>
-          <a:lstStyle/>
-          <a:p>
-            <a:pPr indent="0" marL="0">
-              <a:buNone/>
-            </a:pPr>
-            <a:r>
-              <a:rPr lang="en-US" sz="1250" dirty="0">
-                <a:solidFill>
-                  <a:srgbClr val="1D2B2A"/>
-                </a:solidFill>
-                <a:latin typeface="Calibri" pitchFamily="34" charset="0"/>
-                <a:ea typeface="Calibri" pitchFamily="34" charset="-122"/>
-                <a:cs typeface="Calibri" pitchFamily="34" charset="-120"/>
-              </a:rPr>
-              <a:t>Beneficiary changes bank details</a:t>
-            </a:r>
-            <a:endParaRPr lang="en-US" sz="1250" dirty="0"/>
-          </a:p>
-        </p:txBody>
-      </p:sp>
-      <p:sp>
-        <p:nvSpPr>
-          <p:cNvPr id="28" name="Shape 26"/>
-          <p:cNvSpPr/>
-          <p:nvPr/>
-        </p:nvSpPr>
-        <p:spPr>
-          <a:xfrm>
-            <a:off x="4663440" y="1188720"/>
-            <a:ext cx="384048" cy="384048"/>
-          </a:xfrm>
-          <a:prstGeom prst="ellipse">
-            <a:avLst/>
-          </a:prstGeom>
-          <a:solidFill>
-            <a:srgbClr val="B8862F"/>
-          </a:solidFill>
-          <a:ln/>
-        </p:spPr>
-      </p:sp>
-      <p:sp>
-        <p:nvSpPr>
-          <p:cNvPr id="29" name="Text 27"/>
-          <p:cNvSpPr txBox="1"/>
-          <p:nvPr/>
-        </p:nvSpPr>
-        <p:spPr>
-          <a:xfrm>
-            <a:off x="4663440" y="1188720"/>
-            <a:ext cx="384048" cy="384048"/>
-          </a:xfrm>
-          <a:prstGeom prst="rect">
-            <a:avLst/>
-          </a:prstGeom>
-          <a:noFill/>
-          <a:ln/>
-        </p:spPr>
-        <p:txBody>
-          <a:bodyPr wrap="square" lIns="0" tIns="0" rIns="0" bIns="0" rtlCol="0" anchor="ctr"/>
-          <a:lstStyle/>
-          <a:p>
-            <a:pPr algn="ctr" indent="0" marL="0">
-              <a:buNone/>
-            </a:pPr>
-            <a:r>
-              <a:rPr lang="en-US" sz="1400" b="1" dirty="0">
-                <a:solidFill>
-                  <a:srgbClr val="FFFFFF"/>
-                </a:solidFill>
-                <a:latin typeface="Cambria" pitchFamily="34" charset="0"/>
-                <a:ea typeface="Cambria" pitchFamily="34" charset="-122"/>
-                <a:cs typeface="Cambria" pitchFamily="34" charset="-120"/>
-              </a:rPr>
-              <a:t>9</a:t>
-            </a:r>
-            <a:endParaRPr lang="en-US" sz="1400" dirty="0"/>
-          </a:p>
-        </p:txBody>
-      </p:sp>
-      <p:sp>
-        <p:nvSpPr>
-          <p:cNvPr id="30" name="Text 28"/>
-          <p:cNvSpPr txBox="1"/>
-          <p:nvPr/>
-        </p:nvSpPr>
-        <p:spPr>
-          <a:xfrm>
-            <a:off x="5166360" y="1188720"/>
-            <a:ext cx="3566160" cy="384048"/>
-          </a:xfrm>
-          <a:prstGeom prst="rect">
-            <a:avLst/>
-          </a:prstGeom>
-          <a:noFill/>
-          <a:ln/>
-        </p:spPr>
-        <p:txBody>
-          <a:bodyPr wrap="square" lIns="0" tIns="0" rIns="0" bIns="0" rtlCol="0" anchor="ctr"/>
-          <a:lstStyle/>
-          <a:p>
-            <a:pPr indent="0" marL="0">
-              <a:buNone/>
-            </a:pPr>
-            <a:r>
-              <a:rPr lang="en-US" sz="1250" dirty="0">
-                <a:solidFill>
-                  <a:srgbClr val="1D2B2A"/>
-                </a:solidFill>
-                <a:latin typeface="Calibri" pitchFamily="34" charset="0"/>
-                <a:ea typeface="Calibri" pitchFamily="34" charset="-122"/>
-                <a:cs typeface="Calibri" pitchFamily="34" charset="-120"/>
-              </a:rPr>
-              <a:t>Evidence keeps corrected data</a:t>
-            </a:r>
-            <a:endParaRPr lang="en-US" sz="1250" dirty="0"/>
-          </a:p>
-        </p:txBody>
-      </p:sp>
-      <p:sp>
-        <p:nvSpPr>
-          <p:cNvPr id="31" name="Shape 29"/>
-          <p:cNvSpPr/>
-          <p:nvPr/>
-        </p:nvSpPr>
-        <p:spPr>
-          <a:xfrm>
-            <a:off x="4663440" y="1645920"/>
-            <a:ext cx="384048" cy="384048"/>
-          </a:xfrm>
-          <a:prstGeom prst="ellipse">
-            <a:avLst/>
-          </a:prstGeom>
-          <a:solidFill>
-            <a:srgbClr val="B8862F"/>
-          </a:solidFill>
-          <a:ln/>
-        </p:spPr>
-      </p:sp>
-      <p:sp>
-        <p:nvSpPr>
-          <p:cNvPr id="32" name="Text 30"/>
-          <p:cNvSpPr txBox="1"/>
-          <p:nvPr/>
-        </p:nvSpPr>
-        <p:spPr>
-          <a:xfrm>
-            <a:off x="4663440" y="1645920"/>
-            <a:ext cx="384048" cy="384048"/>
-          </a:xfrm>
-          <a:prstGeom prst="rect">
-            <a:avLst/>
-          </a:prstGeom>
-          <a:noFill/>
-          <a:ln/>
-        </p:spPr>
-        <p:txBody>
-          <a:bodyPr wrap="square" lIns="0" tIns="0" rIns="0" bIns="0" rtlCol="0" anchor="ctr"/>
-          <a:lstStyle/>
-          <a:p>
-            <a:pPr algn="ctr" indent="0" marL="0">
-              <a:buNone/>
-            </a:pPr>
-            <a:r>
-              <a:rPr lang="en-US" sz="1400" b="1" dirty="0">
-                <a:solidFill>
-                  <a:srgbClr val="FFFFFF"/>
-                </a:solidFill>
-                <a:latin typeface="Cambria" pitchFamily="34" charset="0"/>
-                <a:ea typeface="Cambria" pitchFamily="34" charset="-122"/>
-                <a:cs typeface="Cambria" pitchFamily="34" charset="-120"/>
-              </a:rPr>
-              <a:t>10</a:t>
-            </a:r>
-            <a:endParaRPr lang="en-US" sz="1400" dirty="0"/>
-          </a:p>
-        </p:txBody>
-      </p:sp>
-      <p:sp>
-        <p:nvSpPr>
-          <p:cNvPr id="33" name="Text 31"/>
-          <p:cNvSpPr txBox="1"/>
-          <p:nvPr/>
-        </p:nvSpPr>
-        <p:spPr>
-          <a:xfrm>
-            <a:off x="5166360" y="1645920"/>
-            <a:ext cx="3566160" cy="384048"/>
-          </a:xfrm>
-          <a:prstGeom prst="rect">
-            <a:avLst/>
-          </a:prstGeom>
-          <a:noFill/>
-          <a:ln/>
-        </p:spPr>
-        <p:txBody>
-          <a:bodyPr wrap="square" lIns="0" tIns="0" rIns="0" bIns="0" rtlCol="0" anchor="ctr"/>
-          <a:lstStyle/>
-          <a:p>
-            <a:pPr indent="0" marL="0">
-              <a:buNone/>
-            </a:pPr>
-            <a:r>
-              <a:rPr lang="en-US" sz="1250" dirty="0">
-                <a:solidFill>
-                  <a:srgbClr val="1D2B2A"/>
-                </a:solidFill>
-                <a:latin typeface="Calibri" pitchFamily="34" charset="0"/>
-                <a:ea typeface="Calibri" pitchFamily="34" charset="-122"/>
-                <a:cs typeface="Calibri" pitchFamily="34" charset="-120"/>
-              </a:rPr>
-              <a:t>Product withdrawn, terms pinned</a:t>
-            </a:r>
-            <a:endParaRPr lang="en-US" sz="1250" dirty="0"/>
-          </a:p>
-        </p:txBody>
-      </p:sp>
-      <p:sp>
-        <p:nvSpPr>
-          <p:cNvPr id="34" name="Shape 32"/>
-          <p:cNvSpPr/>
-          <p:nvPr/>
-        </p:nvSpPr>
-        <p:spPr>
-          <a:xfrm>
-            <a:off x="4663440" y="2103120"/>
-            <a:ext cx="384048" cy="384048"/>
-          </a:xfrm>
-          <a:prstGeom prst="ellipse">
-            <a:avLst/>
-          </a:prstGeom>
-          <a:solidFill>
-            <a:srgbClr val="B8862F"/>
-          </a:solidFill>
-          <a:ln/>
-        </p:spPr>
-      </p:sp>
-      <p:sp>
-        <p:nvSpPr>
-          <p:cNvPr id="35" name="Text 33"/>
-          <p:cNvSpPr txBox="1"/>
-          <p:nvPr/>
-        </p:nvSpPr>
-        <p:spPr>
-          <a:xfrm>
-            <a:off x="4663440" y="2103120"/>
-            <a:ext cx="384048" cy="384048"/>
-          </a:xfrm>
-          <a:prstGeom prst="rect">
-            <a:avLst/>
-          </a:prstGeom>
-          <a:noFill/>
-          <a:ln/>
-        </p:spPr>
-        <p:txBody>
-          <a:bodyPr wrap="square" lIns="0" tIns="0" rIns="0" bIns="0" rtlCol="0" anchor="ctr"/>
-          <a:lstStyle/>
-          <a:p>
-            <a:pPr algn="ctr" indent="0" marL="0">
-              <a:buNone/>
-            </a:pPr>
-            <a:r>
-              <a:rPr lang="en-US" sz="1400" b="1" dirty="0">
-                <a:solidFill>
-                  <a:srgbClr val="FFFFFF"/>
-                </a:solidFill>
-                <a:latin typeface="Cambria" pitchFamily="34" charset="0"/>
-                <a:ea typeface="Cambria" pitchFamily="34" charset="-122"/>
-                <a:cs typeface="Cambria" pitchFamily="34" charset="-120"/>
-              </a:rPr>
-              <a:t>11</a:t>
-            </a:r>
-            <a:endParaRPr lang="en-US" sz="1400" dirty="0"/>
-          </a:p>
-        </p:txBody>
-      </p:sp>
-      <p:sp>
-        <p:nvSpPr>
-          <p:cNvPr id="36" name="Text 34"/>
-          <p:cNvSpPr txBox="1"/>
-          <p:nvPr/>
-        </p:nvSpPr>
-        <p:spPr>
-          <a:xfrm>
-            <a:off x="5166360" y="2103120"/>
-            <a:ext cx="3566160" cy="384048"/>
-          </a:xfrm>
-          <a:prstGeom prst="rect">
-            <a:avLst/>
-          </a:prstGeom>
-          <a:noFill/>
-          <a:ln/>
-        </p:spPr>
-        <p:txBody>
-          <a:bodyPr wrap="square" lIns="0" tIns="0" rIns="0" bIns="0" rtlCol="0" anchor="ctr"/>
-          <a:lstStyle/>
-          <a:p>
-            <a:pPr indent="0" marL="0">
-              <a:buNone/>
-            </a:pPr>
-            <a:r>
-              <a:rPr lang="en-US" sz="1250" dirty="0">
-                <a:solidFill>
-                  <a:srgbClr val="1D2B2A"/>
-                </a:solidFill>
-                <a:latin typeface="Calibri" pitchFamily="34" charset="0"/>
-                <a:ea typeface="Calibri" pitchFamily="34" charset="-122"/>
-                <a:cs typeface="Calibri" pitchFamily="34" charset="-120"/>
-              </a:rPr>
-              <a:t>Branch closes; all moves</a:t>
-            </a:r>
-            <a:endParaRPr lang="en-US" sz="1250" dirty="0"/>
-          </a:p>
-        </p:txBody>
-      </p:sp>
-      <p:sp>
-        <p:nvSpPr>
-          <p:cNvPr id="37" name="Shape 35"/>
-          <p:cNvSpPr/>
-          <p:nvPr/>
-        </p:nvSpPr>
-        <p:spPr>
-          <a:xfrm>
-            <a:off x="4663440" y="2560320"/>
-            <a:ext cx="384048" cy="384048"/>
-          </a:xfrm>
-          <a:prstGeom prst="ellipse">
-            <a:avLst/>
-          </a:prstGeom>
-          <a:solidFill>
-            <a:srgbClr val="B8862F"/>
-          </a:solidFill>
-          <a:ln/>
-        </p:spPr>
-      </p:sp>
-      <p:sp>
-        <p:nvSpPr>
-          <p:cNvPr id="38" name="Text 36"/>
-          <p:cNvSpPr txBox="1"/>
-          <p:nvPr/>
-        </p:nvSpPr>
-        <p:spPr>
-          <a:xfrm>
-            <a:off x="4663440" y="2560320"/>
-            <a:ext cx="384048" cy="384048"/>
-          </a:xfrm>
-          <a:prstGeom prst="rect">
-            <a:avLst/>
-          </a:prstGeom>
-          <a:noFill/>
-          <a:ln/>
-        </p:spPr>
-        <p:txBody>
-          <a:bodyPr wrap="square" lIns="0" tIns="0" rIns="0" bIns="0" rtlCol="0" anchor="ctr"/>
-          <a:lstStyle/>
-          <a:p>
-            <a:pPr algn="ctr" indent="0" marL="0">
-              <a:buNone/>
-            </a:pPr>
-            <a:r>
-              <a:rPr lang="en-US" sz="1400" b="1" dirty="0">
-                <a:solidFill>
-                  <a:srgbClr val="FFFFFF"/>
-                </a:solidFill>
-                <a:latin typeface="Cambria" pitchFamily="34" charset="0"/>
-                <a:ea typeface="Cambria" pitchFamily="34" charset="-122"/>
-                <a:cs typeface="Cambria" pitchFamily="34" charset="-120"/>
-              </a:rPr>
-              <a:t>12</a:t>
-            </a:r>
-            <a:endParaRPr lang="en-US" sz="1400" dirty="0"/>
-          </a:p>
-        </p:txBody>
-      </p:sp>
-      <p:sp>
-        <p:nvSpPr>
-          <p:cNvPr id="39" name="Text 37"/>
-          <p:cNvSpPr txBox="1"/>
-          <p:nvPr/>
-        </p:nvSpPr>
-        <p:spPr>
-          <a:xfrm>
-            <a:off x="5166360" y="2560320"/>
-            <a:ext cx="3566160" cy="384048"/>
-          </a:xfrm>
-          <a:prstGeom prst="rect">
-            <a:avLst/>
-          </a:prstGeom>
-          <a:noFill/>
-          <a:ln/>
-        </p:spPr>
-        <p:txBody>
-          <a:bodyPr wrap="square" lIns="0" tIns="0" rIns="0" bIns="0" rtlCol="0" anchor="ctr"/>
-          <a:lstStyle/>
-          <a:p>
-            <a:pPr indent="0" marL="0">
-              <a:buNone/>
-            </a:pPr>
-            <a:r>
-              <a:rPr lang="en-US" sz="1250" dirty="0">
-                <a:solidFill>
-                  <a:srgbClr val="1D2B2A"/>
-                </a:solidFill>
-                <a:latin typeface="Calibri" pitchFamily="34" charset="0"/>
-                <a:ea typeface="Calibri" pitchFamily="34" charset="-122"/>
-                <a:cs typeface="Calibri" pitchFamily="34" charset="-120"/>
-              </a:rPr>
-              <a:t>Savings limit; closure not deletion</a:t>
-            </a:r>
-            <a:endParaRPr lang="en-US" sz="1250" dirty="0"/>
-          </a:p>
-        </p:txBody>
-      </p:sp>
-      <p:sp>
-        <p:nvSpPr>
-          <p:cNvPr id="40" name="Shape 38"/>
-          <p:cNvSpPr/>
-          <p:nvPr/>
-        </p:nvSpPr>
-        <p:spPr>
-          <a:xfrm>
-            <a:off x="4663440" y="3017520"/>
-            <a:ext cx="384048" cy="384048"/>
-          </a:xfrm>
-          <a:prstGeom prst="ellipse">
-            <a:avLst/>
-          </a:prstGeom>
-          <a:solidFill>
-            <a:srgbClr val="B8862F"/>
-          </a:solidFill>
-          <a:ln/>
-        </p:spPr>
-      </p:sp>
-      <p:sp>
-        <p:nvSpPr>
-          <p:cNvPr id="41" name="Text 39"/>
-          <p:cNvSpPr txBox="1"/>
-          <p:nvPr/>
-        </p:nvSpPr>
-        <p:spPr>
-          <a:xfrm>
-            <a:off x="4663440" y="3017520"/>
-            <a:ext cx="384048" cy="384048"/>
-          </a:xfrm>
-          <a:prstGeom prst="rect">
-            <a:avLst/>
-          </a:prstGeom>
-          <a:noFill/>
-          <a:ln/>
-        </p:spPr>
-        <p:txBody>
-          <a:bodyPr wrap="square" lIns="0" tIns="0" rIns="0" bIns="0" rtlCol="0" anchor="ctr"/>
-          <a:lstStyle/>
-          <a:p>
-            <a:pPr algn="ctr" indent="0" marL="0">
-              <a:buNone/>
-            </a:pPr>
-            <a:r>
-              <a:rPr lang="en-US" sz="1400" b="1" dirty="0">
-                <a:solidFill>
-                  <a:srgbClr val="FFFFFF"/>
-                </a:solidFill>
-                <a:latin typeface="Cambria" pitchFamily="34" charset="0"/>
-                <a:ea typeface="Cambria" pitchFamily="34" charset="-122"/>
-                <a:cs typeface="Cambria" pitchFamily="34" charset="-120"/>
-              </a:rPr>
-              <a:t>13</a:t>
-            </a:r>
-            <a:endParaRPr lang="en-US" sz="1400" dirty="0"/>
-          </a:p>
-        </p:txBody>
-      </p:sp>
-      <p:sp>
-        <p:nvSpPr>
-          <p:cNvPr id="42" name="Text 40"/>
-          <p:cNvSpPr txBox="1"/>
-          <p:nvPr/>
-        </p:nvSpPr>
-        <p:spPr>
-          <a:xfrm>
-            <a:off x="5166360" y="3017520"/>
-            <a:ext cx="3566160" cy="384048"/>
-          </a:xfrm>
-          <a:prstGeom prst="rect">
-            <a:avLst/>
-          </a:prstGeom>
-          <a:noFill/>
-          <a:ln/>
-        </p:spPr>
-        <p:txBody>
-          <a:bodyPr wrap="square" lIns="0" tIns="0" rIns="0" bIns="0" rtlCol="0" anchor="ctr"/>
-          <a:lstStyle/>
-          <a:p>
-            <a:pPr indent="0" marL="0">
-              <a:buNone/>
-            </a:pPr>
-            <a:r>
-              <a:rPr lang="en-US" sz="1250" dirty="0">
-                <a:solidFill>
-                  <a:srgbClr val="1D2B2A"/>
-                </a:solidFill>
-                <a:latin typeface="Calibri" pitchFamily="34" charset="0"/>
-                <a:ea typeface="Calibri" pitchFamily="34" charset="-122"/>
-                <a:cs typeface="Calibri" pitchFamily="34" charset="-120"/>
-              </a:rPr>
-              <a:t>Staff and customer leave</a:t>
-            </a:r>
-            <a:endParaRPr lang="en-US" sz="1250" dirty="0"/>
-          </a:p>
-        </p:txBody>
-      </p:sp>
-      <p:sp>
-        <p:nvSpPr>
-          <p:cNvPr id="43" name="Shape 41"/>
-          <p:cNvSpPr/>
-          <p:nvPr/>
-        </p:nvSpPr>
-        <p:spPr>
-          <a:xfrm>
-            <a:off x="4663440" y="3474720"/>
-            <a:ext cx="384048" cy="384048"/>
-          </a:xfrm>
-          <a:prstGeom prst="ellipse">
-            <a:avLst/>
-          </a:prstGeom>
-          <a:solidFill>
-            <a:srgbClr val="B8862F"/>
-          </a:solidFill>
-          <a:ln/>
-        </p:spPr>
-      </p:sp>
-      <p:sp>
-        <p:nvSpPr>
-          <p:cNvPr id="44" name="Text 42"/>
-          <p:cNvSpPr txBox="1"/>
-          <p:nvPr/>
-        </p:nvSpPr>
-        <p:spPr>
-          <a:xfrm>
-            <a:off x="4663440" y="3474720"/>
-            <a:ext cx="384048" cy="384048"/>
-          </a:xfrm>
-          <a:prstGeom prst="rect">
-            <a:avLst/>
-          </a:prstGeom>
-          <a:noFill/>
-          <a:ln/>
-        </p:spPr>
-        <p:txBody>
-          <a:bodyPr wrap="square" lIns="0" tIns="0" rIns="0" bIns="0" rtlCol="0" anchor="ctr"/>
-          <a:lstStyle/>
-          <a:p>
-            <a:pPr algn="ctr" indent="0" marL="0">
-              <a:buNone/>
-            </a:pPr>
-            <a:r>
-              <a:rPr lang="en-US" sz="1400" b="1" dirty="0">
-                <a:solidFill>
-                  <a:srgbClr val="FFFFFF"/>
-                </a:solidFill>
-                <a:latin typeface="Cambria" pitchFamily="34" charset="0"/>
-                <a:ea typeface="Cambria" pitchFamily="34" charset="-122"/>
-                <a:cs typeface="Cambria" pitchFamily="34" charset="-120"/>
-              </a:rPr>
-              <a:t>14</a:t>
-            </a:r>
-            <a:endParaRPr lang="en-US" sz="1400" dirty="0"/>
-          </a:p>
-        </p:txBody>
-      </p:sp>
-      <p:sp>
-        <p:nvSpPr>
-          <p:cNvPr id="45" name="Text 43"/>
-          <p:cNvSpPr txBox="1"/>
-          <p:nvPr/>
-        </p:nvSpPr>
-        <p:spPr>
-          <a:xfrm>
-            <a:off x="5166360" y="3474720"/>
-            <a:ext cx="3566160" cy="384048"/>
-          </a:xfrm>
-          <a:prstGeom prst="rect">
-            <a:avLst/>
-          </a:prstGeom>
-          <a:noFill/>
-          <a:ln/>
-        </p:spPr>
-        <p:txBody>
-          <a:bodyPr wrap="square" lIns="0" tIns="0" rIns="0" bIns="0" rtlCol="0" anchor="ctr"/>
-          <a:lstStyle/>
-          <a:p>
-            <a:pPr indent="0" marL="0">
-              <a:buNone/>
-            </a:pPr>
-            <a:r>
-              <a:rPr lang="en-US" sz="1250" dirty="0">
-                <a:solidFill>
-                  <a:srgbClr val="1D2B2A"/>
-                </a:solidFill>
-                <a:latin typeface="Calibri" pitchFamily="34" charset="0"/>
-                <a:ea typeface="Calibri" pitchFamily="34" charset="-122"/>
-                <a:cs typeface="Calibri" pitchFamily="34" charset="-120"/>
-              </a:rPr>
-              <a:t>Sole trader, private client, term deposits</a:t>
-            </a:r>
-            <a:endParaRPr lang="en-US" sz="1250" dirty="0"/>
-          </a:p>
-        </p:txBody>
-      </p:sp>
-      <p:sp>
-        <p:nvSpPr>
-          <p:cNvPr id="46" name="Shape 44"/>
-          <p:cNvSpPr/>
-          <p:nvPr/>
-        </p:nvSpPr>
-        <p:spPr>
-          <a:xfrm>
-            <a:off x="4663440" y="3931920"/>
-            <a:ext cx="384048" cy="384048"/>
-          </a:xfrm>
-          <a:prstGeom prst="ellipse">
-            <a:avLst/>
-          </a:prstGeom>
-          <a:solidFill>
-            <a:srgbClr val="B8862F"/>
-          </a:solidFill>
-          <a:ln/>
-        </p:spPr>
-      </p:sp>
-      <p:sp>
-        <p:nvSpPr>
-          <p:cNvPr id="47" name="Text 45"/>
-          <p:cNvSpPr txBox="1"/>
-          <p:nvPr/>
-        </p:nvSpPr>
-        <p:spPr>
-          <a:xfrm>
-            <a:off x="4663440" y="3931920"/>
-            <a:ext cx="384048" cy="384048"/>
-          </a:xfrm>
-          <a:prstGeom prst="rect">
-            <a:avLst/>
-          </a:prstGeom>
-          <a:noFill/>
-          <a:ln/>
-        </p:spPr>
-        <p:txBody>
-          <a:bodyPr wrap="square" lIns="0" tIns="0" rIns="0" bIns="0" rtlCol="0" anchor="ctr"/>
-          <a:lstStyle/>
-          <a:p>
-            <a:pPr algn="ctr" indent="0" marL="0">
-              <a:buNone/>
-            </a:pPr>
-            <a:r>
-              <a:rPr lang="en-US" sz="1400" b="1" dirty="0">
-                <a:solidFill>
-                  <a:srgbClr val="FFFFFF"/>
-                </a:solidFill>
-                <a:latin typeface="Cambria" pitchFamily="34" charset="0"/>
-                <a:ea typeface="Cambria" pitchFamily="34" charset="-122"/>
-                <a:cs typeface="Cambria" pitchFamily="34" charset="-120"/>
-              </a:rPr>
-              <a:t>15</a:t>
-            </a:r>
-            <a:endParaRPr lang="en-US" sz="1400" dirty="0"/>
-          </a:p>
-        </p:txBody>
-      </p:sp>
-      <p:sp>
-        <p:nvSpPr>
-          <p:cNvPr id="48" name="Text 46"/>
-          <p:cNvSpPr txBox="1"/>
-          <p:nvPr/>
-        </p:nvSpPr>
-        <p:spPr>
-          <a:xfrm>
-            <a:off x="5166360" y="3931920"/>
-            <a:ext cx="3566160" cy="384048"/>
-          </a:xfrm>
-          <a:prstGeom prst="rect">
-            <a:avLst/>
-          </a:prstGeom>
-          <a:noFill/>
-          <a:ln/>
-        </p:spPr>
-        <p:txBody>
-          <a:bodyPr wrap="square" lIns="0" tIns="0" rIns="0" bIns="0" rtlCol="0" anchor="ctr"/>
-          <a:lstStyle/>
-          <a:p>
-            <a:pPr indent="0" marL="0">
-              <a:buNone/>
-            </a:pPr>
-            <a:r>
-              <a:rPr lang="en-US" sz="1250" dirty="0">
-                <a:solidFill>
-                  <a:srgbClr val="1D2B2A"/>
-                </a:solidFill>
-                <a:latin typeface="Calibri" pitchFamily="34" charset="0"/>
-                <a:ea typeface="Calibri" pitchFamily="34" charset="-122"/>
-                <a:cs typeface="Calibri" pitchFamily="34" charset="-120"/>
-              </a:rPr>
-              <a:t>Card controls, bills, card search</a:t>
-            </a:r>
-            <a:endParaRPr lang="en-US" sz="1250" dirty="0"/>
-          </a:p>
-        </p:txBody>
-      </p:sp>
-      <p:sp>
-        <p:nvSpPr>
-          <p:cNvPr id="49" name="Shape 47"/>
-          <p:cNvSpPr/>
-          <p:nvPr/>
-        </p:nvSpPr>
-        <p:spPr>
-          <a:xfrm>
-            <a:off x="4663440" y="4389120"/>
-            <a:ext cx="384048" cy="384048"/>
-          </a:xfrm>
-          <a:prstGeom prst="ellipse">
-            <a:avLst/>
-          </a:prstGeom>
-          <a:solidFill>
-            <a:srgbClr val="B8862F"/>
-          </a:solidFill>
-          <a:ln/>
-        </p:spPr>
-      </p:sp>
-      <p:sp>
-        <p:nvSpPr>
-          <p:cNvPr id="50" name="Text 48"/>
-          <p:cNvSpPr txBox="1"/>
-          <p:nvPr/>
-        </p:nvSpPr>
-        <p:spPr>
-          <a:xfrm>
-            <a:off x="4663440" y="4389120"/>
-            <a:ext cx="384048" cy="384048"/>
-          </a:xfrm>
-          <a:prstGeom prst="rect">
-            <a:avLst/>
-          </a:prstGeom>
-          <a:noFill/>
-          <a:ln/>
-        </p:spPr>
-        <p:txBody>
-          <a:bodyPr wrap="square" lIns="0" tIns="0" rIns="0" bIns="0" rtlCol="0" anchor="ctr"/>
-          <a:lstStyle/>
-          <a:p>
-            <a:pPr algn="ctr" indent="0" marL="0">
-              <a:buNone/>
-            </a:pPr>
-            <a:r>
-              <a:rPr lang="en-US" sz="1400" b="1" dirty="0">
-                <a:solidFill>
-                  <a:srgbClr val="FFFFFF"/>
-                </a:solidFill>
-                <a:latin typeface="Cambria" pitchFamily="34" charset="0"/>
-                <a:ea typeface="Cambria" pitchFamily="34" charset="-122"/>
-                <a:cs typeface="Cambria" pitchFamily="34" charset="-120"/>
-              </a:rPr>
-              <a:t>16</a:t>
-            </a:r>
-            <a:endParaRPr lang="en-US" sz="1400" dirty="0"/>
-          </a:p>
-        </p:txBody>
-      </p:sp>
-      <p:sp>
-        <p:nvSpPr>
-          <p:cNvPr id="51" name="Text 49"/>
-          <p:cNvSpPr txBox="1"/>
-          <p:nvPr/>
-        </p:nvSpPr>
-        <p:spPr>
-          <a:xfrm>
-            <a:off x="5166360" y="4389120"/>
-            <a:ext cx="3566160" cy="384048"/>
-          </a:xfrm>
-          <a:prstGeom prst="rect">
-            <a:avLst/>
-          </a:prstGeom>
-          <a:noFill/>
-          <a:ln/>
-        </p:spPr>
-        <p:txBody>
-          <a:bodyPr wrap="square" lIns="0" tIns="0" rIns="0" bIns="0" rtlCol="0" anchor="ctr"/>
-          <a:lstStyle/>
-          <a:p>
-            <a:pPr indent="0" marL="0">
-              <a:buNone/>
-            </a:pPr>
-            <a:r>
-              <a:rPr lang="en-US" sz="1250" dirty="0">
-                <a:solidFill>
-                  <a:srgbClr val="1D2B2A"/>
-                </a:solidFill>
-                <a:latin typeface="Calibri" pitchFamily="34" charset="0"/>
-                <a:ea typeface="Calibri" pitchFamily="34" charset="-122"/>
-                <a:cs typeface="Calibri" pitchFamily="34" charset="-120"/>
-              </a:rPr>
-              <a:t>Auditor review; archive vs delete</a:t>
-            </a:r>
-            <a:endParaRPr lang="en-US" sz="1250" dirty="0"/>
+              <a:t>The alternative fails all ten critical cases (report section 7.1).</a:t>
+            </a:r>
+            <a:endParaRPr lang="en-US" sz="1200" dirty="0"/>
           </a:p>
         </p:txBody>
       </p:sp>
@@ -4058,7 +3885,7 @@
                 <a:ea typeface="Cambria" pitchFamily="34" charset="-122"/>
                 <a:cs typeface="Cambria" pitchFamily="34" charset="-120"/>
               </a:rPr>
-              <a:t>Everything the brief names is modelled</a:t>
+              <a:t>16 scenarios break the normal workflow</a:t>
             </a:r>
             <a:endParaRPr lang="en-US" sz="2800" dirty="0"/>
           </a:p>
@@ -4097,7 +3924,7 @@
                 <a:ea typeface="Calibri" pitchFamily="34" charset="-122"/>
                 <a:cs typeface="Calibri" pitchFamily="34" charset="-120"/>
               </a:rPr>
-              <a:t>Found by rereading Problem 4 line by line; each has a test</a:t>
+              <a:t>All ten critical cases in the brief are covered, plus every participant it names</a:t>
             </a:r>
             <a:endParaRPr lang="en-US" sz="1200" dirty="0"/>
           </a:p>
@@ -4111,23 +3938,16 @@
         </p:nvSpPr>
         <p:spPr>
           <a:xfrm>
-            <a:off x="457200" y="1280160"/>
-            <a:ext cx="2606040" cy="1600200"/>
-          </a:xfrm>
-          <a:prstGeom prst="roundRect">
-            <a:avLst>
-              <a:gd name="adj" fmla="val 4571"/>
-            </a:avLst>
+            <a:off x="457200" y="1188720"/>
+            <a:ext cx="384048" cy="384048"/>
+          </a:xfrm>
+          <a:prstGeom prst="ellipse">
+            <a:avLst/>
           </a:prstGeom>
           <a:solidFill>
-            <a:srgbClr val="E8F0EE"/>
+            <a:srgbClr val="B8862F"/>
           </a:solidFill>
-          <a:ln w="12700">
-            <a:solidFill>
-              <a:srgbClr val="E8F0EE"/>
-            </a:solidFill>
-            <a:prstDash val="solid"/>
-          </a:ln>
+          <a:ln/>
         </p:spPr>
       </p:sp>
       <p:sp>
@@ -4138,8 +3958,8 @@
         </p:nvSpPr>
         <p:spPr>
           <a:xfrm>
-            <a:off x="594360" y="1389888"/>
-            <a:ext cx="2331720" cy="502920"/>
+            <a:off x="457200" y="1188720"/>
+            <a:ext cx="384048" cy="384048"/>
           </a:xfrm>
           <a:prstGeom prst="rect">
             <a:avLst/>
@@ -4151,19 +3971,19 @@
           <a:bodyPr wrap="square" lIns="0" tIns="0" rIns="0" bIns="0" rtlCol="0" anchor="ctr"/>
           <a:lstStyle/>
           <a:p>
-            <a:pPr indent="0" marL="0">
+            <a:pPr algn="ctr" indent="0" marL="0">
               <a:buNone/>
             </a:pPr>
             <a:r>
               <a:rPr lang="en-US" sz="1400" b="1" dirty="0">
                 <a:solidFill>
-                  <a:srgbClr val="0B4F4A"/>
+                  <a:srgbClr val="FFFFFF"/>
                 </a:solidFill>
                 <a:latin typeface="Cambria" pitchFamily="34" charset="0"/>
                 <a:ea typeface="Cambria" pitchFamily="34" charset="-122"/>
                 <a:cs typeface="Cambria" pitchFamily="34" charset="-120"/>
               </a:rPr>
-              <a:t>Sole traders &amp; private clients</a:t>
+              <a:t>1</a:t>
             </a:r>
             <a:endParaRPr lang="en-US" sz="1400" dirty="0"/>
           </a:p>
@@ -4177,24 +3997,24 @@
         </p:nvSpPr>
         <p:spPr>
           <a:xfrm>
-            <a:off x="594360" y="1920240"/>
-            <a:ext cx="2331720" cy="868680"/>
-          </a:xfrm>
-          <a:prstGeom prst="rect">
-            <a:avLst/>
-          </a:prstGeom>
-          <a:noFill/>
-          <a:ln/>
-        </p:spPr>
-        <p:txBody>
-          <a:bodyPr wrap="square" lIns="0" tIns="0" rIns="0" bIns="0" rtlCol="0" anchor="t"/>
+            <a:off x="960120" y="1188720"/>
+            <a:ext cx="3566160" cy="384048"/>
+          </a:xfrm>
+          <a:prstGeom prst="rect">
+            <a:avLst/>
+          </a:prstGeom>
+          <a:noFill/>
+          <a:ln/>
+        </p:spPr>
+        <p:txBody>
+          <a:bodyPr wrap="square" lIns="0" tIns="0" rIns="0" bIns="0" rtlCol="0" anchor="ctr"/>
           <a:lstStyle/>
           <a:p>
             <a:pPr indent="0" marL="0">
               <a:buNone/>
             </a:pPr>
             <a:r>
-              <a:rPr lang="en-US" sz="1200" dirty="0">
+              <a:rPr lang="en-US" sz="1250" dirty="0">
                 <a:solidFill>
                   <a:srgbClr val="1D2B2A"/>
                 </a:solidFill>
@@ -4202,9 +4022,9 @@
                 <a:ea typeface="Calibri" pitchFamily="34" charset="-122"/>
                 <a:cs typeface="Calibri" pitchFamily="34" charset="-120"/>
               </a:rPr>
-              <a:t>Person with a trading name; PRIVATE needs verified source of wealth (EDD)</a:t>
-            </a:r>
-            <a:endParaRPr lang="en-US" sz="1200" dirty="0"/>
+              <a:t>Document expires mid-onboarding</a:t>
+            </a:r>
+            <a:endParaRPr lang="en-US" sz="1250" dirty="0"/>
           </a:p>
         </p:txBody>
       </p:sp>
@@ -4216,23 +4036,16 @@
         </p:nvSpPr>
         <p:spPr>
           <a:xfrm>
-            <a:off x="3246120" y="1280160"/>
-            <a:ext cx="2606040" cy="1600200"/>
-          </a:xfrm>
-          <a:prstGeom prst="roundRect">
-            <a:avLst>
-              <a:gd name="adj" fmla="val 4571"/>
-            </a:avLst>
+            <a:off x="457200" y="1645920"/>
+            <a:ext cx="384048" cy="384048"/>
+          </a:xfrm>
+          <a:prstGeom prst="ellipse">
+            <a:avLst/>
           </a:prstGeom>
           <a:solidFill>
-            <a:srgbClr val="E8F0EE"/>
+            <a:srgbClr val="B8862F"/>
           </a:solidFill>
-          <a:ln w="12700">
-            <a:solidFill>
-              <a:srgbClr val="E8F0EE"/>
-            </a:solidFill>
-            <a:prstDash val="solid"/>
-          </a:ln>
+          <a:ln/>
         </p:spPr>
       </p:sp>
       <p:sp>
@@ -4243,8 +4056,8 @@
         </p:nvSpPr>
         <p:spPr>
           <a:xfrm>
-            <a:off x="3383280" y="1389888"/>
-            <a:ext cx="2331720" cy="502920"/>
+            <a:off x="457200" y="1645920"/>
+            <a:ext cx="384048" cy="384048"/>
           </a:xfrm>
           <a:prstGeom prst="rect">
             <a:avLst/>
@@ -4256,19 +4069,19 @@
           <a:bodyPr wrap="square" lIns="0" tIns="0" rIns="0" bIns="0" rtlCol="0" anchor="ctr"/>
           <a:lstStyle/>
           <a:p>
-            <a:pPr indent="0" marL="0">
+            <a:pPr algn="ctr" indent="0" marL="0">
               <a:buNone/>
             </a:pPr>
             <a:r>
               <a:rPr lang="en-US" sz="1400" b="1" dirty="0">
                 <a:solidFill>
-                  <a:srgbClr val="0B4F4A"/>
+                  <a:srgbClr val="FFFFFF"/>
                 </a:solidFill>
                 <a:latin typeface="Cambria" pitchFamily="34" charset="0"/>
                 <a:ea typeface="Cambria" pitchFamily="34" charset="-122"/>
                 <a:cs typeface="Cambria" pitchFamily="34" charset="-120"/>
               </a:rPr>
-              <a:t>Fixed-term deposits</a:t>
+              <a:t>2</a:t>
             </a:r>
             <a:endParaRPr lang="en-US" sz="1400" dirty="0"/>
           </a:p>
@@ -4282,24 +4095,24 @@
         </p:nvSpPr>
         <p:spPr>
           <a:xfrm>
-            <a:off x="3383280" y="1920240"/>
-            <a:ext cx="2331720" cy="868680"/>
-          </a:xfrm>
-          <a:prstGeom prst="rect">
-            <a:avLst/>
-          </a:prstGeom>
-          <a:noFill/>
-          <a:ln/>
-        </p:spPr>
-        <p:txBody>
-          <a:bodyPr wrap="square" lIns="0" tIns="0" rIns="0" bIns="0" rtlCol="0" anchor="t"/>
+            <a:off x="960120" y="1645920"/>
+            <a:ext cx="3566160" cy="384048"/>
+          </a:xfrm>
+          <a:prstGeom prst="rect">
+            <a:avLst/>
+          </a:prstGeom>
+          <a:noFill/>
+          <a:ln/>
+        </p:spPr>
+        <p:txBody>
+          <a:bodyPr wrap="square" lIns="0" tIns="0" rIns="0" bIns="0" rtlCol="0" anchor="ctr"/>
           <a:lstStyle/>
           <a:p>
             <a:pPr indent="0" marL="0">
               <a:buNone/>
             </a:pPr>
             <a:r>
-              <a:rPr lang="en-US" sz="1200" dirty="0">
+              <a:rPr lang="en-US" sz="1250" dirty="0">
                 <a:solidFill>
                   <a:srgbClr val="1D2B2A"/>
                 </a:solidFill>
@@ -4307,9 +4120,9 @@
                 <a:ea typeface="Calibri" pitchFamily="34" charset="-122"/>
                 <a:cs typeface="Calibri" pitchFamily="34" charset="-120"/>
               </a:rPr>
-              <a:t>Third DepositAccount subclass: no early debits, maturity payout, break penalty</a:t>
-            </a:r>
-            <a:endParaRPr lang="en-US" sz="1200" dirty="0"/>
+              <a:t>Large transfer: dual control, hold, release</a:t>
+            </a:r>
+            <a:endParaRPr lang="en-US" sz="1250" dirty="0"/>
           </a:p>
         </p:txBody>
       </p:sp>
@@ -4321,23 +4134,16 @@
         </p:nvSpPr>
         <p:spPr>
           <a:xfrm>
-            <a:off x="6035040" y="1280160"/>
-            <a:ext cx="2606040" cy="1600200"/>
-          </a:xfrm>
-          <a:prstGeom prst="roundRect">
-            <a:avLst>
-              <a:gd name="adj" fmla="val 4571"/>
-            </a:avLst>
+            <a:off x="457200" y="2103120"/>
+            <a:ext cx="384048" cy="384048"/>
+          </a:xfrm>
+          <a:prstGeom prst="ellipse">
+            <a:avLst/>
           </a:prstGeom>
           <a:solidFill>
-            <a:srgbClr val="E8F0EE"/>
+            <a:srgbClr val="B8862F"/>
           </a:solidFill>
-          <a:ln w="12700">
-            <a:solidFill>
-              <a:srgbClr val="E8F0EE"/>
-            </a:solidFill>
-            <a:prstDash val="solid"/>
-          </a:ln>
+          <a:ln/>
         </p:spPr>
       </p:sp>
       <p:sp>
@@ -4348,8 +4154,8 @@
         </p:nvSpPr>
         <p:spPr>
           <a:xfrm>
-            <a:off x="6172200" y="1389888"/>
-            <a:ext cx="2331720" cy="502920"/>
+            <a:off x="457200" y="2103120"/>
+            <a:ext cx="384048" cy="384048"/>
           </a:xfrm>
           <a:prstGeom prst="rect">
             <a:avLst/>
@@ -4361,19 +4167,19 @@
           <a:bodyPr wrap="square" lIns="0" tIns="0" rIns="0" bIns="0" rtlCol="0" anchor="ctr"/>
           <a:lstStyle/>
           <a:p>
-            <a:pPr indent="0" marL="0">
+            <a:pPr algn="ctr" indent="0" marL="0">
               <a:buNone/>
             </a:pPr>
             <a:r>
               <a:rPr lang="en-US" sz="1400" b="1" dirty="0">
                 <a:solidFill>
-                  <a:srgbClr val="0B4F4A"/>
+                  <a:srgbClr val="FFFFFF"/>
                 </a:solidFill>
                 <a:latin typeface="Cambria" pitchFamily="34" charset="0"/>
                 <a:ea typeface="Cambria" pitchFamily="34" charset="-122"/>
                 <a:cs typeface="Cambria" pitchFamily="34" charset="-120"/>
               </a:rPr>
-              <a:t>Card controls</a:t>
+              <a:t>3</a:t>
             </a:r>
             <a:endParaRPr lang="en-US" sz="1400" dirty="0"/>
           </a:p>
@@ -4387,24 +4193,24 @@
         </p:nvSpPr>
         <p:spPr>
           <a:xfrm>
-            <a:off x="6172200" y="1920240"/>
-            <a:ext cx="2331720" cy="868680"/>
-          </a:xfrm>
-          <a:prstGeom prst="rect">
-            <a:avLst/>
-          </a:prstGeom>
-          <a:noFill/>
-          <a:ln/>
-        </p:spPr>
-        <p:txBody>
-          <a:bodyPr wrap="square" lIns="0" tIns="0" rIns="0" bIns="0" rtlCol="0" anchor="t"/>
+            <a:off x="960120" y="2103120"/>
+            <a:ext cx="3566160" cy="384048"/>
+          </a:xfrm>
+          <a:prstGeom prst="rect">
+            <a:avLst/>
+          </a:prstGeom>
+          <a:noFill/>
+          <a:ln/>
+        </p:spPr>
+        <p:txBody>
+          <a:bodyPr wrap="square" lIns="0" tIns="0" rIns="0" bIns="0" rtlCol="0" anchor="ctr"/>
           <a:lstStyle/>
           <a:p>
             <a:pPr indent="0" marL="0">
               <a:buNone/>
             </a:pPr>
             <a:r>
-              <a:rPr lang="en-US" sz="1200" dirty="0">
+              <a:rPr lang="en-US" sz="1250" dirty="0">
                 <a:solidFill>
                   <a:srgbClr val="1D2B2A"/>
                 </a:solidFill>
@@ -4412,9 +4218,9 @@
                 <a:ea typeface="Calibri" pitchFamily="34" charset="-122"/>
                 <a:cs typeface="Calibri" pitchFamily="34" charset="-120"/>
               </a:rPr>
-              <a:t>Online, international, cash, merchant category - each with a validity period</a:t>
-            </a:r>
-            <a:endParaRPr lang="en-US" sz="1200" dirty="0"/>
+              <a:t>Card stolen, replaced twice, found</a:t>
+            </a:r>
+            <a:endParaRPr lang="en-US" sz="1250" dirty="0"/>
           </a:p>
         </p:txBody>
       </p:sp>
@@ -4426,23 +4232,16 @@
         </p:nvSpPr>
         <p:spPr>
           <a:xfrm>
-            <a:off x="457200" y="3063240"/>
-            <a:ext cx="2606040" cy="1600200"/>
-          </a:xfrm>
-          <a:prstGeom prst="roundRect">
-            <a:avLst>
-              <a:gd name="adj" fmla="val 4571"/>
-            </a:avLst>
+            <a:off x="457200" y="2560320"/>
+            <a:ext cx="384048" cy="384048"/>
+          </a:xfrm>
+          <a:prstGeom prst="ellipse">
+            <a:avLst/>
           </a:prstGeom>
           <a:solidFill>
-            <a:srgbClr val="E8F0EE"/>
+            <a:srgbClr val="B8862F"/>
           </a:solidFill>
-          <a:ln w="12700">
-            <a:solidFill>
-              <a:srgbClr val="E8F0EE"/>
-            </a:solidFill>
-            <a:prstDash val="solid"/>
-          </a:ln>
+          <a:ln/>
         </p:spPr>
       </p:sp>
       <p:sp>
@@ -4453,8 +4252,8 @@
         </p:nvSpPr>
         <p:spPr>
           <a:xfrm>
-            <a:off x="594360" y="3172968"/>
-            <a:ext cx="2331720" cy="502920"/>
+            <a:off x="457200" y="2560320"/>
+            <a:ext cx="384048" cy="384048"/>
           </a:xfrm>
           <a:prstGeom prst="rect">
             <a:avLst/>
@@ -4466,19 +4265,19 @@
           <a:bodyPr wrap="square" lIns="0" tIns="0" rIns="0" bIns="0" rtlCol="0" anchor="ctr"/>
           <a:lstStyle/>
           <a:p>
-            <a:pPr indent="0" marL="0">
+            <a:pPr algn="ctr" indent="0" marL="0">
               <a:buNone/>
             </a:pPr>
             <a:r>
               <a:rPr lang="en-US" sz="1400" b="1" dirty="0">
                 <a:solidFill>
-                  <a:srgbClr val="0B4F4A"/>
+                  <a:srgbClr val="FFFFFF"/>
                 </a:solidFill>
                 <a:latin typeface="Cambria" pitchFamily="34" charset="0"/>
                 <a:ea typeface="Cambria" pitchFamily="34" charset="-122"/>
                 <a:cs typeface="Cambria" pitchFamily="34" charset="-120"/>
               </a:rPr>
-              <a:t>Billers</a:t>
+              <a:t>4</a:t>
             </a:r>
             <a:endParaRPr lang="en-US" sz="1400" dirty="0"/>
           </a:p>
@@ -4492,24 +4291,24 @@
         </p:nvSpPr>
         <p:spPr>
           <a:xfrm>
-            <a:off x="594360" y="3703320"/>
-            <a:ext cx="2331720" cy="868680"/>
-          </a:xfrm>
-          <a:prstGeom prst="rect">
-            <a:avLst/>
-          </a:prstGeom>
-          <a:noFill/>
-          <a:ln/>
-        </p:spPr>
-        <p:txBody>
-          <a:bodyPr wrap="square" lIns="0" tIns="0" rIns="0" bIns="0" rtlCol="0" anchor="t"/>
+            <a:off x="960120" y="2560320"/>
+            <a:ext cx="3566160" cy="384048"/>
+          </a:xfrm>
+          <a:prstGeom prst="rect">
+            <a:avLst/>
+          </a:prstGeom>
+          <a:noFill/>
+          <a:ln/>
+        </p:spPr>
+        <p:txBody>
+          <a:bodyPr wrap="square" lIns="0" tIns="0" rIns="0" bIns="0" rtlCol="0" anchor="ctr"/>
           <a:lstStyle/>
           <a:p>
             <a:pPr indent="0" marL="0">
               <a:buNone/>
             </a:pPr>
             <a:r>
-              <a:rPr lang="en-US" sz="1200" dirty="0">
+              <a:rPr lang="en-US" sz="1250" dirty="0">
                 <a:solidFill>
                   <a:srgbClr val="1D2B2A"/>
                 </a:solidFill>
@@ -4517,9 +4316,9 @@
                 <a:ea typeface="Calibri" pitchFamily="34" charset="-122"/>
                 <a:cs typeface="Calibri" pitchFamily="34" charset="-120"/>
               </a:rPr>
-              <a:t>BillPayment is a CustomerPayment: same mandates, restrictions, dual control</a:t>
-            </a:r>
-            <a:endParaRPr lang="en-US" sz="1200" dirty="0"/>
+              <a:t>Posted, reversed, re-posted, disputed</a:t>
+            </a:r>
+            <a:endParaRPr lang="en-US" sz="1250" dirty="0"/>
           </a:p>
         </p:txBody>
       </p:sp>
@@ -4531,23 +4330,16 @@
         </p:nvSpPr>
         <p:spPr>
           <a:xfrm>
-            <a:off x="3246120" y="3063240"/>
-            <a:ext cx="2606040" cy="1600200"/>
-          </a:xfrm>
-          <a:prstGeom prst="roundRect">
-            <a:avLst>
-              <a:gd name="adj" fmla="val 4571"/>
-            </a:avLst>
+            <a:off x="457200" y="3017520"/>
+            <a:ext cx="384048" cy="384048"/>
+          </a:xfrm>
+          <a:prstGeom prst="ellipse">
+            <a:avLst/>
           </a:prstGeom>
           <a:solidFill>
-            <a:srgbClr val="E8F0EE"/>
+            <a:srgbClr val="B8862F"/>
           </a:solidFill>
-          <a:ln w="12700">
-            <a:solidFill>
-              <a:srgbClr val="E8F0EE"/>
-            </a:solidFill>
-            <a:prstDash val="solid"/>
-          </a:ln>
+          <a:ln/>
         </p:spPr>
       </p:sp>
       <p:sp>
@@ -4558,8 +4350,8 @@
         </p:nvSpPr>
         <p:spPr>
           <a:xfrm>
-            <a:off x="3383280" y="3172968"/>
-            <a:ext cx="2331720" cy="502920"/>
+            <a:off x="457200" y="3017520"/>
+            <a:ext cx="384048" cy="384048"/>
           </a:xfrm>
           <a:prstGeom prst="rect">
             <a:avLst/>
@@ -4571,19 +4363,19 @@
           <a:bodyPr wrap="square" lIns="0" tIns="0" rIns="0" bIns="0" rtlCol="0" anchor="ctr"/>
           <a:lstStyle/>
           <a:p>
-            <a:pPr indent="0" marL="0">
+            <a:pPr algn="ctr" indent="0" marL="0">
               <a:buNone/>
             </a:pPr>
             <a:r>
               <a:rPr lang="en-US" sz="1400" b="1" dirty="0">
                 <a:solidFill>
-                  <a:srgbClr val="0B4F4A"/>
+                  <a:srgbClr val="FFFFFF"/>
                 </a:solidFill>
                 <a:latin typeface="Cambria" pitchFamily="34" charset="0"/>
                 <a:ea typeface="Cambria" pitchFamily="34" charset="-122"/>
                 <a:cs typeface="Cambria" pitchFamily="34" charset="-120"/>
               </a:rPr>
-              <a:t>Collections staff</a:t>
+              <a:t>5</a:t>
             </a:r>
             <a:endParaRPr lang="en-US" sz="1400" dirty="0"/>
           </a:p>
@@ -4597,24 +4389,24 @@
         </p:nvSpPr>
         <p:spPr>
           <a:xfrm>
-            <a:off x="3383280" y="3703320"/>
-            <a:ext cx="2331720" cy="868680"/>
-          </a:xfrm>
-          <a:prstGeom prst="rect">
-            <a:avLst/>
-          </a:prstGeom>
-          <a:noFill/>
-          <a:ln/>
-        </p:spPr>
-        <p:txBody>
-          <a:bodyPr wrap="square" lIns="0" tIns="0" rIns="0" bIns="0" rtlCol="0" anchor="t"/>
+            <a:off x="960120" y="3017520"/>
+            <a:ext cx="3566160" cy="384048"/>
+          </a:xfrm>
+          <a:prstGeom prst="rect">
+            <a:avLst/>
+          </a:prstGeom>
+          <a:noFill/>
+          <a:ln/>
+        </p:spPr>
+        <p:txBody>
+          <a:bodyPr wrap="square" lIns="0" tIns="0" rIns="0" bIns="0" rtlCol="0" anchor="ctr"/>
           <a:lstStyle/>
           <a:p>
             <a:pPr indent="0" marL="0">
               <a:buNone/>
             </a:pPr>
             <a:r>
-              <a:rPr lang="en-US" sz="1200" dirty="0">
+              <a:rPr lang="en-US" sz="1250" dirty="0">
                 <a:solidFill>
                   <a:srgbClr val="1D2B2A"/>
                 </a:solidFill>
@@ -4622,9 +4414,9 @@
                 <a:ea typeface="Calibri" pitchFamily="34" charset="-122"/>
                 <a:cs typeface="Calibri" pitchFamily="34" charset="-120"/>
               </a:rPr>
-              <a:t>Collections officer works the case; promise to pay marked kept or broken</a:t>
-            </a:r>
-            <a:endParaRPr lang="en-US" sz="1200" dirty="0"/>
+              <a:t>Restricted then cleared</a:t>
+            </a:r>
+            <a:endParaRPr lang="en-US" sz="1250" dirty="0"/>
           </a:p>
         </p:txBody>
       </p:sp>
@@ -4636,23 +4428,16 @@
         </p:nvSpPr>
         <p:spPr>
           <a:xfrm>
-            <a:off x="6035040" y="3063240"/>
-            <a:ext cx="2606040" cy="1600200"/>
-          </a:xfrm>
-          <a:prstGeom prst="roundRect">
-            <a:avLst>
-              <a:gd name="adj" fmla="val 4571"/>
-            </a:avLst>
+            <a:off x="457200" y="3474720"/>
+            <a:ext cx="384048" cy="384048"/>
+          </a:xfrm>
+          <a:prstGeom prst="ellipse">
+            <a:avLst/>
           </a:prstGeom>
           <a:solidFill>
-            <a:srgbClr val="E8F0EE"/>
+            <a:srgbClr val="B8862F"/>
           </a:solidFill>
-          <a:ln w="12700">
-            <a:solidFill>
-              <a:srgbClr val="E8F0EE"/>
-            </a:solidFill>
-            <a:prstDash val="solid"/>
-          </a:ln>
+          <a:ln/>
         </p:spPr>
       </p:sp>
       <p:sp>
@@ -4663,8 +4448,8 @@
         </p:nvSpPr>
         <p:spPr>
           <a:xfrm>
-            <a:off x="6172200" y="3172968"/>
-            <a:ext cx="2331720" cy="502920"/>
+            <a:off x="457200" y="3474720"/>
+            <a:ext cx="384048" cy="384048"/>
           </a:xfrm>
           <a:prstGeom prst="rect">
             <a:avLst/>
@@ -4676,19 +4461,19 @@
           <a:bodyPr wrap="square" lIns="0" tIns="0" rIns="0" bIns="0" rtlCol="0" anchor="ctr"/>
           <a:lstStyle/>
           <a:p>
-            <a:pPr indent="0" marL="0">
+            <a:pPr algn="ctr" indent="0" marL="0">
               <a:buNone/>
             </a:pPr>
             <a:r>
               <a:rPr lang="en-US" sz="1400" b="1" dirty="0">
                 <a:solidFill>
-                  <a:srgbClr val="0B4F4A"/>
+                  <a:srgbClr val="FFFFFF"/>
                 </a:solidFill>
                 <a:latin typeface="Cambria" pitchFamily="34" charset="0"/>
                 <a:ea typeface="Cambria" pitchFamily="34" charset="-122"/>
                 <a:cs typeface="Cambria" pitchFamily="34" charset="-120"/>
               </a:rPr>
-              <a:t>Auditors &amp; retention</a:t>
+              <a:t>6</a:t>
             </a:r>
             <a:endParaRPr lang="en-US" sz="1400" dirty="0"/>
           </a:p>
@@ -4702,24 +4487,24 @@
         </p:nvSpPr>
         <p:spPr>
           <a:xfrm>
-            <a:off x="6172200" y="3703320"/>
-            <a:ext cx="2331720" cy="868680"/>
-          </a:xfrm>
-          <a:prstGeom prst="rect">
-            <a:avLst/>
-          </a:prstGeom>
-          <a:noFill/>
-          <a:ln/>
-        </p:spPr>
-        <p:txBody>
-          <a:bodyPr wrap="square" lIns="0" tIns="0" rIns="0" bIns="0" rtlCol="0" anchor="t"/>
+            <a:off x="960120" y="3474720"/>
+            <a:ext cx="3566160" cy="384048"/>
+          </a:xfrm>
+          <a:prstGeom prst="rect">
+            <a:avLst/>
+          </a:prstGeom>
+          <a:noFill/>
+          <a:ln/>
+        </p:spPr>
+        <p:txBody>
+          <a:bodyPr wrap="square" lIns="0" tIns="0" rIns="0" bIns="0" rtlCol="0" anchor="ctr"/>
           <a:lstStyle/>
           <a:p>
             <a:pPr indent="0" marL="0">
               <a:buNone/>
             </a:pPr>
             <a:r>
-              <a:rPr lang="en-US" sz="1200" dirty="0">
+              <a:rPr lang="en-US" sz="1250" dirty="0">
                 <a:solidFill>
                   <a:srgbClr val="1D2B2A"/>
                 </a:solidFill>
@@ -4727,9 +4512,989 @@
                 <a:ea typeface="Calibri" pitchFamily="34" charset="-122"/>
                 <a:cs typeface="Calibri" pitchFamily="34" charset="-120"/>
               </a:rPr>
-              <a:t>Approvals audit with role at the time; archive, never delete (10-year retention)</a:t>
-            </a:r>
-            <a:endParaRPr lang="en-US" sz="1200" dirty="0"/>
+              <a:t>Financing: limits, arrears, restructure</a:t>
+            </a:r>
+            <a:endParaRPr lang="en-US" sz="1250" dirty="0"/>
+          </a:p>
+        </p:txBody>
+      </p:sp>
+      <p:sp>
+        <p:nvSpPr>
+          <p:cNvPr id="22" name="Shape 20"/>
+          <p:cNvSpPr/>
+          <p:nvPr/>
+        </p:nvSpPr>
+        <p:spPr>
+          <a:xfrm>
+            <a:off x="457200" y="3931920"/>
+            <a:ext cx="384048" cy="384048"/>
+          </a:xfrm>
+          <a:prstGeom prst="ellipse">
+            <a:avLst/>
+          </a:prstGeom>
+          <a:solidFill>
+            <a:srgbClr val="B8862F"/>
+          </a:solidFill>
+          <a:ln/>
+        </p:spPr>
+      </p:sp>
+      <p:sp>
+        <p:nvSpPr>
+          <p:cNvPr id="23" name="Text 21"/>
+          <p:cNvSpPr txBox="1"/>
+          <p:nvPr/>
+        </p:nvSpPr>
+        <p:spPr>
+          <a:xfrm>
+            <a:off x="457200" y="3931920"/>
+            <a:ext cx="384048" cy="384048"/>
+          </a:xfrm>
+          <a:prstGeom prst="rect">
+            <a:avLst/>
+          </a:prstGeom>
+          <a:noFill/>
+          <a:ln/>
+        </p:spPr>
+        <p:txBody>
+          <a:bodyPr wrap="square" lIns="0" tIns="0" rIns="0" bIns="0" rtlCol="0" anchor="ctr"/>
+          <a:lstStyle/>
+          <a:p>
+            <a:pPr algn="ctr" indent="0" marL="0">
+              <a:buNone/>
+            </a:pPr>
+            <a:r>
+              <a:rPr lang="en-US" sz="1400" b="1" dirty="0">
+                <a:solidFill>
+                  <a:srgbClr val="FFFFFF"/>
+                </a:solidFill>
+                <a:latin typeface="Cambria" pitchFamily="34" charset="0"/>
+                <a:ea typeface="Cambria" pitchFamily="34" charset="-122"/>
+                <a:cs typeface="Cambria" pitchFamily="34" charset="-120"/>
+              </a:rPr>
+              <a:t>7</a:t>
+            </a:r>
+            <a:endParaRPr lang="en-US" sz="1400" dirty="0"/>
+          </a:p>
+        </p:txBody>
+      </p:sp>
+      <p:sp>
+        <p:nvSpPr>
+          <p:cNvPr id="24" name="Text 22"/>
+          <p:cNvSpPr txBox="1"/>
+          <p:nvPr/>
+        </p:nvSpPr>
+        <p:spPr>
+          <a:xfrm>
+            <a:off x="960120" y="3931920"/>
+            <a:ext cx="3566160" cy="384048"/>
+          </a:xfrm>
+          <a:prstGeom prst="rect">
+            <a:avLst/>
+          </a:prstGeom>
+          <a:noFill/>
+          <a:ln/>
+        </p:spPr>
+        <p:txBody>
+          <a:bodyPr wrap="square" lIns="0" tIns="0" rIns="0" bIns="0" rtlCol="0" anchor="ctr"/>
+          <a:lstStyle/>
+          <a:p>
+            <a:pPr indent="0" marL="0">
+              <a:buNone/>
+            </a:pPr>
+            <a:r>
+              <a:rPr lang="en-US" sz="1250" dirty="0">
+                <a:solidFill>
+                  <a:srgbClr val="1D2B2A"/>
+                </a:solidFill>
+                <a:latin typeface="Calibri" pitchFamily="34" charset="0"/>
+                <a:ea typeface="Calibri" pitchFamily="34" charset="-122"/>
+                <a:cs typeface="Calibri" pitchFamily="34" charset="-120"/>
+              </a:rPr>
+              <a:t>Director leaves; authority provable</a:t>
+            </a:r>
+            <a:endParaRPr lang="en-US" sz="1250" dirty="0"/>
+          </a:p>
+        </p:txBody>
+      </p:sp>
+      <p:sp>
+        <p:nvSpPr>
+          <p:cNvPr id="25" name="Shape 23"/>
+          <p:cNvSpPr/>
+          <p:nvPr/>
+        </p:nvSpPr>
+        <p:spPr>
+          <a:xfrm>
+            <a:off x="457200" y="4389120"/>
+            <a:ext cx="384048" cy="384048"/>
+          </a:xfrm>
+          <a:prstGeom prst="ellipse">
+            <a:avLst/>
+          </a:prstGeom>
+          <a:solidFill>
+            <a:srgbClr val="B8862F"/>
+          </a:solidFill>
+          <a:ln/>
+        </p:spPr>
+      </p:sp>
+      <p:sp>
+        <p:nvSpPr>
+          <p:cNvPr id="26" name="Text 24"/>
+          <p:cNvSpPr txBox="1"/>
+          <p:nvPr/>
+        </p:nvSpPr>
+        <p:spPr>
+          <a:xfrm>
+            <a:off x="457200" y="4389120"/>
+            <a:ext cx="384048" cy="384048"/>
+          </a:xfrm>
+          <a:prstGeom prst="rect">
+            <a:avLst/>
+          </a:prstGeom>
+          <a:noFill/>
+          <a:ln/>
+        </p:spPr>
+        <p:txBody>
+          <a:bodyPr wrap="square" lIns="0" tIns="0" rIns="0" bIns="0" rtlCol="0" anchor="ctr"/>
+          <a:lstStyle/>
+          <a:p>
+            <a:pPr algn="ctr" indent="0" marL="0">
+              <a:buNone/>
+            </a:pPr>
+            <a:r>
+              <a:rPr lang="en-US" sz="1400" b="1" dirty="0">
+                <a:solidFill>
+                  <a:srgbClr val="FFFFFF"/>
+                </a:solidFill>
+                <a:latin typeface="Cambria" pitchFamily="34" charset="0"/>
+                <a:ea typeface="Cambria" pitchFamily="34" charset="-122"/>
+                <a:cs typeface="Cambria" pitchFamily="34" charset="-120"/>
+              </a:rPr>
+              <a:t>8</a:t>
+            </a:r>
+            <a:endParaRPr lang="en-US" sz="1400" dirty="0"/>
+          </a:p>
+        </p:txBody>
+      </p:sp>
+      <p:sp>
+        <p:nvSpPr>
+          <p:cNvPr id="27" name="Text 25"/>
+          <p:cNvSpPr txBox="1"/>
+          <p:nvPr/>
+        </p:nvSpPr>
+        <p:spPr>
+          <a:xfrm>
+            <a:off x="960120" y="4389120"/>
+            <a:ext cx="3566160" cy="384048"/>
+          </a:xfrm>
+          <a:prstGeom prst="rect">
+            <a:avLst/>
+          </a:prstGeom>
+          <a:noFill/>
+          <a:ln/>
+        </p:spPr>
+        <p:txBody>
+          <a:bodyPr wrap="square" lIns="0" tIns="0" rIns="0" bIns="0" rtlCol="0" anchor="ctr"/>
+          <a:lstStyle/>
+          <a:p>
+            <a:pPr indent="0" marL="0">
+              <a:buNone/>
+            </a:pPr>
+            <a:r>
+              <a:rPr lang="en-US" sz="1250" dirty="0">
+                <a:solidFill>
+                  <a:srgbClr val="1D2B2A"/>
+                </a:solidFill>
+                <a:latin typeface="Calibri" pitchFamily="34" charset="0"/>
+                <a:ea typeface="Calibri" pitchFamily="34" charset="-122"/>
+                <a:cs typeface="Calibri" pitchFamily="34" charset="-120"/>
+              </a:rPr>
+              <a:t>Beneficiary changes bank details</a:t>
+            </a:r>
+            <a:endParaRPr lang="en-US" sz="1250" dirty="0"/>
+          </a:p>
+        </p:txBody>
+      </p:sp>
+      <p:sp>
+        <p:nvSpPr>
+          <p:cNvPr id="28" name="Shape 26"/>
+          <p:cNvSpPr/>
+          <p:nvPr/>
+        </p:nvSpPr>
+        <p:spPr>
+          <a:xfrm>
+            <a:off x="4663440" y="1188720"/>
+            <a:ext cx="384048" cy="384048"/>
+          </a:xfrm>
+          <a:prstGeom prst="ellipse">
+            <a:avLst/>
+          </a:prstGeom>
+          <a:solidFill>
+            <a:srgbClr val="B8862F"/>
+          </a:solidFill>
+          <a:ln/>
+        </p:spPr>
+      </p:sp>
+      <p:sp>
+        <p:nvSpPr>
+          <p:cNvPr id="29" name="Text 27"/>
+          <p:cNvSpPr txBox="1"/>
+          <p:nvPr/>
+        </p:nvSpPr>
+        <p:spPr>
+          <a:xfrm>
+            <a:off x="4663440" y="1188720"/>
+            <a:ext cx="384048" cy="384048"/>
+          </a:xfrm>
+          <a:prstGeom prst="rect">
+            <a:avLst/>
+          </a:prstGeom>
+          <a:noFill/>
+          <a:ln/>
+        </p:spPr>
+        <p:txBody>
+          <a:bodyPr wrap="square" lIns="0" tIns="0" rIns="0" bIns="0" rtlCol="0" anchor="ctr"/>
+          <a:lstStyle/>
+          <a:p>
+            <a:pPr algn="ctr" indent="0" marL="0">
+              <a:buNone/>
+            </a:pPr>
+            <a:r>
+              <a:rPr lang="en-US" sz="1400" b="1" dirty="0">
+                <a:solidFill>
+                  <a:srgbClr val="FFFFFF"/>
+                </a:solidFill>
+                <a:latin typeface="Cambria" pitchFamily="34" charset="0"/>
+                <a:ea typeface="Cambria" pitchFamily="34" charset="-122"/>
+                <a:cs typeface="Cambria" pitchFamily="34" charset="-120"/>
+              </a:rPr>
+              <a:t>9</a:t>
+            </a:r>
+            <a:endParaRPr lang="en-US" sz="1400" dirty="0"/>
+          </a:p>
+        </p:txBody>
+      </p:sp>
+      <p:sp>
+        <p:nvSpPr>
+          <p:cNvPr id="30" name="Text 28"/>
+          <p:cNvSpPr txBox="1"/>
+          <p:nvPr/>
+        </p:nvSpPr>
+        <p:spPr>
+          <a:xfrm>
+            <a:off x="5166360" y="1188720"/>
+            <a:ext cx="3566160" cy="384048"/>
+          </a:xfrm>
+          <a:prstGeom prst="rect">
+            <a:avLst/>
+          </a:prstGeom>
+          <a:noFill/>
+          <a:ln/>
+        </p:spPr>
+        <p:txBody>
+          <a:bodyPr wrap="square" lIns="0" tIns="0" rIns="0" bIns="0" rtlCol="0" anchor="ctr"/>
+          <a:lstStyle/>
+          <a:p>
+            <a:pPr indent="0" marL="0">
+              <a:buNone/>
+            </a:pPr>
+            <a:r>
+              <a:rPr lang="en-US" sz="1250" dirty="0">
+                <a:solidFill>
+                  <a:srgbClr val="1D2B2A"/>
+                </a:solidFill>
+                <a:latin typeface="Calibri" pitchFamily="34" charset="0"/>
+                <a:ea typeface="Calibri" pitchFamily="34" charset="-122"/>
+                <a:cs typeface="Calibri" pitchFamily="34" charset="-120"/>
+              </a:rPr>
+              <a:t>Evidence keeps corrected data</a:t>
+            </a:r>
+            <a:endParaRPr lang="en-US" sz="1250" dirty="0"/>
+          </a:p>
+        </p:txBody>
+      </p:sp>
+      <p:sp>
+        <p:nvSpPr>
+          <p:cNvPr id="31" name="Shape 29"/>
+          <p:cNvSpPr/>
+          <p:nvPr/>
+        </p:nvSpPr>
+        <p:spPr>
+          <a:xfrm>
+            <a:off x="4663440" y="1645920"/>
+            <a:ext cx="384048" cy="384048"/>
+          </a:xfrm>
+          <a:prstGeom prst="ellipse">
+            <a:avLst/>
+          </a:prstGeom>
+          <a:solidFill>
+            <a:srgbClr val="B8862F"/>
+          </a:solidFill>
+          <a:ln/>
+        </p:spPr>
+      </p:sp>
+      <p:sp>
+        <p:nvSpPr>
+          <p:cNvPr id="32" name="Text 30"/>
+          <p:cNvSpPr txBox="1"/>
+          <p:nvPr/>
+        </p:nvSpPr>
+        <p:spPr>
+          <a:xfrm>
+            <a:off x="4663440" y="1645920"/>
+            <a:ext cx="384048" cy="384048"/>
+          </a:xfrm>
+          <a:prstGeom prst="rect">
+            <a:avLst/>
+          </a:prstGeom>
+          <a:noFill/>
+          <a:ln/>
+        </p:spPr>
+        <p:txBody>
+          <a:bodyPr wrap="square" lIns="0" tIns="0" rIns="0" bIns="0" rtlCol="0" anchor="ctr"/>
+          <a:lstStyle/>
+          <a:p>
+            <a:pPr algn="ctr" indent="0" marL="0">
+              <a:buNone/>
+            </a:pPr>
+            <a:r>
+              <a:rPr lang="en-US" sz="1400" b="1" dirty="0">
+                <a:solidFill>
+                  <a:srgbClr val="FFFFFF"/>
+                </a:solidFill>
+                <a:latin typeface="Cambria" pitchFamily="34" charset="0"/>
+                <a:ea typeface="Cambria" pitchFamily="34" charset="-122"/>
+                <a:cs typeface="Cambria" pitchFamily="34" charset="-120"/>
+              </a:rPr>
+              <a:t>10</a:t>
+            </a:r>
+            <a:endParaRPr lang="en-US" sz="1400" dirty="0"/>
+          </a:p>
+        </p:txBody>
+      </p:sp>
+      <p:sp>
+        <p:nvSpPr>
+          <p:cNvPr id="33" name="Text 31"/>
+          <p:cNvSpPr txBox="1"/>
+          <p:nvPr/>
+        </p:nvSpPr>
+        <p:spPr>
+          <a:xfrm>
+            <a:off x="5166360" y="1645920"/>
+            <a:ext cx="3566160" cy="384048"/>
+          </a:xfrm>
+          <a:prstGeom prst="rect">
+            <a:avLst/>
+          </a:prstGeom>
+          <a:noFill/>
+          <a:ln/>
+        </p:spPr>
+        <p:txBody>
+          <a:bodyPr wrap="square" lIns="0" tIns="0" rIns="0" bIns="0" rtlCol="0" anchor="ctr"/>
+          <a:lstStyle/>
+          <a:p>
+            <a:pPr indent="0" marL="0">
+              <a:buNone/>
+            </a:pPr>
+            <a:r>
+              <a:rPr lang="en-US" sz="1250" dirty="0">
+                <a:solidFill>
+                  <a:srgbClr val="1D2B2A"/>
+                </a:solidFill>
+                <a:latin typeface="Calibri" pitchFamily="34" charset="0"/>
+                <a:ea typeface="Calibri" pitchFamily="34" charset="-122"/>
+                <a:cs typeface="Calibri" pitchFamily="34" charset="-120"/>
+              </a:rPr>
+              <a:t>Product withdrawn, terms pinned</a:t>
+            </a:r>
+            <a:endParaRPr lang="en-US" sz="1250" dirty="0"/>
+          </a:p>
+        </p:txBody>
+      </p:sp>
+      <p:sp>
+        <p:nvSpPr>
+          <p:cNvPr id="34" name="Shape 32"/>
+          <p:cNvSpPr/>
+          <p:nvPr/>
+        </p:nvSpPr>
+        <p:spPr>
+          <a:xfrm>
+            <a:off x="4663440" y="2103120"/>
+            <a:ext cx="384048" cy="384048"/>
+          </a:xfrm>
+          <a:prstGeom prst="ellipse">
+            <a:avLst/>
+          </a:prstGeom>
+          <a:solidFill>
+            <a:srgbClr val="B8862F"/>
+          </a:solidFill>
+          <a:ln/>
+        </p:spPr>
+      </p:sp>
+      <p:sp>
+        <p:nvSpPr>
+          <p:cNvPr id="35" name="Text 33"/>
+          <p:cNvSpPr txBox="1"/>
+          <p:nvPr/>
+        </p:nvSpPr>
+        <p:spPr>
+          <a:xfrm>
+            <a:off x="4663440" y="2103120"/>
+            <a:ext cx="384048" cy="384048"/>
+          </a:xfrm>
+          <a:prstGeom prst="rect">
+            <a:avLst/>
+          </a:prstGeom>
+          <a:noFill/>
+          <a:ln/>
+        </p:spPr>
+        <p:txBody>
+          <a:bodyPr wrap="square" lIns="0" tIns="0" rIns="0" bIns="0" rtlCol="0" anchor="ctr"/>
+          <a:lstStyle/>
+          <a:p>
+            <a:pPr algn="ctr" indent="0" marL="0">
+              <a:buNone/>
+            </a:pPr>
+            <a:r>
+              <a:rPr lang="en-US" sz="1400" b="1" dirty="0">
+                <a:solidFill>
+                  <a:srgbClr val="FFFFFF"/>
+                </a:solidFill>
+                <a:latin typeface="Cambria" pitchFamily="34" charset="0"/>
+                <a:ea typeface="Cambria" pitchFamily="34" charset="-122"/>
+                <a:cs typeface="Cambria" pitchFamily="34" charset="-120"/>
+              </a:rPr>
+              <a:t>11</a:t>
+            </a:r>
+            <a:endParaRPr lang="en-US" sz="1400" dirty="0"/>
+          </a:p>
+        </p:txBody>
+      </p:sp>
+      <p:sp>
+        <p:nvSpPr>
+          <p:cNvPr id="36" name="Text 34"/>
+          <p:cNvSpPr txBox="1"/>
+          <p:nvPr/>
+        </p:nvSpPr>
+        <p:spPr>
+          <a:xfrm>
+            <a:off x="5166360" y="2103120"/>
+            <a:ext cx="3566160" cy="384048"/>
+          </a:xfrm>
+          <a:prstGeom prst="rect">
+            <a:avLst/>
+          </a:prstGeom>
+          <a:noFill/>
+          <a:ln/>
+        </p:spPr>
+        <p:txBody>
+          <a:bodyPr wrap="square" lIns="0" tIns="0" rIns="0" bIns="0" rtlCol="0" anchor="ctr"/>
+          <a:lstStyle/>
+          <a:p>
+            <a:pPr indent="0" marL="0">
+              <a:buNone/>
+            </a:pPr>
+            <a:r>
+              <a:rPr lang="en-US" sz="1250" dirty="0">
+                <a:solidFill>
+                  <a:srgbClr val="1D2B2A"/>
+                </a:solidFill>
+                <a:latin typeface="Calibri" pitchFamily="34" charset="0"/>
+                <a:ea typeface="Calibri" pitchFamily="34" charset="-122"/>
+                <a:cs typeface="Calibri" pitchFamily="34" charset="-120"/>
+              </a:rPr>
+              <a:t>Branch closes; all moves</a:t>
+            </a:r>
+            <a:endParaRPr lang="en-US" sz="1250" dirty="0"/>
+          </a:p>
+        </p:txBody>
+      </p:sp>
+      <p:sp>
+        <p:nvSpPr>
+          <p:cNvPr id="37" name="Shape 35"/>
+          <p:cNvSpPr/>
+          <p:nvPr/>
+        </p:nvSpPr>
+        <p:spPr>
+          <a:xfrm>
+            <a:off x="4663440" y="2560320"/>
+            <a:ext cx="384048" cy="384048"/>
+          </a:xfrm>
+          <a:prstGeom prst="ellipse">
+            <a:avLst/>
+          </a:prstGeom>
+          <a:solidFill>
+            <a:srgbClr val="B8862F"/>
+          </a:solidFill>
+          <a:ln/>
+        </p:spPr>
+      </p:sp>
+      <p:sp>
+        <p:nvSpPr>
+          <p:cNvPr id="38" name="Text 36"/>
+          <p:cNvSpPr txBox="1"/>
+          <p:nvPr/>
+        </p:nvSpPr>
+        <p:spPr>
+          <a:xfrm>
+            <a:off x="4663440" y="2560320"/>
+            <a:ext cx="384048" cy="384048"/>
+          </a:xfrm>
+          <a:prstGeom prst="rect">
+            <a:avLst/>
+          </a:prstGeom>
+          <a:noFill/>
+          <a:ln/>
+        </p:spPr>
+        <p:txBody>
+          <a:bodyPr wrap="square" lIns="0" tIns="0" rIns="0" bIns="0" rtlCol="0" anchor="ctr"/>
+          <a:lstStyle/>
+          <a:p>
+            <a:pPr algn="ctr" indent="0" marL="0">
+              <a:buNone/>
+            </a:pPr>
+            <a:r>
+              <a:rPr lang="en-US" sz="1400" b="1" dirty="0">
+                <a:solidFill>
+                  <a:srgbClr val="FFFFFF"/>
+                </a:solidFill>
+                <a:latin typeface="Cambria" pitchFamily="34" charset="0"/>
+                <a:ea typeface="Cambria" pitchFamily="34" charset="-122"/>
+                <a:cs typeface="Cambria" pitchFamily="34" charset="-120"/>
+              </a:rPr>
+              <a:t>12</a:t>
+            </a:r>
+            <a:endParaRPr lang="en-US" sz="1400" dirty="0"/>
+          </a:p>
+        </p:txBody>
+      </p:sp>
+      <p:sp>
+        <p:nvSpPr>
+          <p:cNvPr id="39" name="Text 37"/>
+          <p:cNvSpPr txBox="1"/>
+          <p:nvPr/>
+        </p:nvSpPr>
+        <p:spPr>
+          <a:xfrm>
+            <a:off x="5166360" y="2560320"/>
+            <a:ext cx="3566160" cy="384048"/>
+          </a:xfrm>
+          <a:prstGeom prst="rect">
+            <a:avLst/>
+          </a:prstGeom>
+          <a:noFill/>
+          <a:ln/>
+        </p:spPr>
+        <p:txBody>
+          <a:bodyPr wrap="square" lIns="0" tIns="0" rIns="0" bIns="0" rtlCol="0" anchor="ctr"/>
+          <a:lstStyle/>
+          <a:p>
+            <a:pPr indent="0" marL="0">
+              <a:buNone/>
+            </a:pPr>
+            <a:r>
+              <a:rPr lang="en-US" sz="1250" dirty="0">
+                <a:solidFill>
+                  <a:srgbClr val="1D2B2A"/>
+                </a:solidFill>
+                <a:latin typeface="Calibri" pitchFamily="34" charset="0"/>
+                <a:ea typeface="Calibri" pitchFamily="34" charset="-122"/>
+                <a:cs typeface="Calibri" pitchFamily="34" charset="-120"/>
+              </a:rPr>
+              <a:t>Savings limit; closure not deletion</a:t>
+            </a:r>
+            <a:endParaRPr lang="en-US" sz="1250" dirty="0"/>
+          </a:p>
+        </p:txBody>
+      </p:sp>
+      <p:sp>
+        <p:nvSpPr>
+          <p:cNvPr id="40" name="Shape 38"/>
+          <p:cNvSpPr/>
+          <p:nvPr/>
+        </p:nvSpPr>
+        <p:spPr>
+          <a:xfrm>
+            <a:off x="4663440" y="3017520"/>
+            <a:ext cx="384048" cy="384048"/>
+          </a:xfrm>
+          <a:prstGeom prst="ellipse">
+            <a:avLst/>
+          </a:prstGeom>
+          <a:solidFill>
+            <a:srgbClr val="B8862F"/>
+          </a:solidFill>
+          <a:ln/>
+        </p:spPr>
+      </p:sp>
+      <p:sp>
+        <p:nvSpPr>
+          <p:cNvPr id="41" name="Text 39"/>
+          <p:cNvSpPr txBox="1"/>
+          <p:nvPr/>
+        </p:nvSpPr>
+        <p:spPr>
+          <a:xfrm>
+            <a:off x="4663440" y="3017520"/>
+            <a:ext cx="384048" cy="384048"/>
+          </a:xfrm>
+          <a:prstGeom prst="rect">
+            <a:avLst/>
+          </a:prstGeom>
+          <a:noFill/>
+          <a:ln/>
+        </p:spPr>
+        <p:txBody>
+          <a:bodyPr wrap="square" lIns="0" tIns="0" rIns="0" bIns="0" rtlCol="0" anchor="ctr"/>
+          <a:lstStyle/>
+          <a:p>
+            <a:pPr algn="ctr" indent="0" marL="0">
+              <a:buNone/>
+            </a:pPr>
+            <a:r>
+              <a:rPr lang="en-US" sz="1400" b="1" dirty="0">
+                <a:solidFill>
+                  <a:srgbClr val="FFFFFF"/>
+                </a:solidFill>
+                <a:latin typeface="Cambria" pitchFamily="34" charset="0"/>
+                <a:ea typeface="Cambria" pitchFamily="34" charset="-122"/>
+                <a:cs typeface="Cambria" pitchFamily="34" charset="-120"/>
+              </a:rPr>
+              <a:t>13</a:t>
+            </a:r>
+            <a:endParaRPr lang="en-US" sz="1400" dirty="0"/>
+          </a:p>
+        </p:txBody>
+      </p:sp>
+      <p:sp>
+        <p:nvSpPr>
+          <p:cNvPr id="42" name="Text 40"/>
+          <p:cNvSpPr txBox="1"/>
+          <p:nvPr/>
+        </p:nvSpPr>
+        <p:spPr>
+          <a:xfrm>
+            <a:off x="5166360" y="3017520"/>
+            <a:ext cx="3566160" cy="384048"/>
+          </a:xfrm>
+          <a:prstGeom prst="rect">
+            <a:avLst/>
+          </a:prstGeom>
+          <a:noFill/>
+          <a:ln/>
+        </p:spPr>
+        <p:txBody>
+          <a:bodyPr wrap="square" lIns="0" tIns="0" rIns="0" bIns="0" rtlCol="0" anchor="ctr"/>
+          <a:lstStyle/>
+          <a:p>
+            <a:pPr indent="0" marL="0">
+              <a:buNone/>
+            </a:pPr>
+            <a:r>
+              <a:rPr lang="en-US" sz="1250" dirty="0">
+                <a:solidFill>
+                  <a:srgbClr val="1D2B2A"/>
+                </a:solidFill>
+                <a:latin typeface="Calibri" pitchFamily="34" charset="0"/>
+                <a:ea typeface="Calibri" pitchFamily="34" charset="-122"/>
+                <a:cs typeface="Calibri" pitchFamily="34" charset="-120"/>
+              </a:rPr>
+              <a:t>Staff and customer leave</a:t>
+            </a:r>
+            <a:endParaRPr lang="en-US" sz="1250" dirty="0"/>
+          </a:p>
+        </p:txBody>
+      </p:sp>
+      <p:sp>
+        <p:nvSpPr>
+          <p:cNvPr id="43" name="Shape 41"/>
+          <p:cNvSpPr/>
+          <p:nvPr/>
+        </p:nvSpPr>
+        <p:spPr>
+          <a:xfrm>
+            <a:off x="4663440" y="3474720"/>
+            <a:ext cx="384048" cy="384048"/>
+          </a:xfrm>
+          <a:prstGeom prst="ellipse">
+            <a:avLst/>
+          </a:prstGeom>
+          <a:solidFill>
+            <a:srgbClr val="B8862F"/>
+          </a:solidFill>
+          <a:ln/>
+        </p:spPr>
+      </p:sp>
+      <p:sp>
+        <p:nvSpPr>
+          <p:cNvPr id="44" name="Text 42"/>
+          <p:cNvSpPr txBox="1"/>
+          <p:nvPr/>
+        </p:nvSpPr>
+        <p:spPr>
+          <a:xfrm>
+            <a:off x="4663440" y="3474720"/>
+            <a:ext cx="384048" cy="384048"/>
+          </a:xfrm>
+          <a:prstGeom prst="rect">
+            <a:avLst/>
+          </a:prstGeom>
+          <a:noFill/>
+          <a:ln/>
+        </p:spPr>
+        <p:txBody>
+          <a:bodyPr wrap="square" lIns="0" tIns="0" rIns="0" bIns="0" rtlCol="0" anchor="ctr"/>
+          <a:lstStyle/>
+          <a:p>
+            <a:pPr algn="ctr" indent="0" marL="0">
+              <a:buNone/>
+            </a:pPr>
+            <a:r>
+              <a:rPr lang="en-US" sz="1400" b="1" dirty="0">
+                <a:solidFill>
+                  <a:srgbClr val="FFFFFF"/>
+                </a:solidFill>
+                <a:latin typeface="Cambria" pitchFamily="34" charset="0"/>
+                <a:ea typeface="Cambria" pitchFamily="34" charset="-122"/>
+                <a:cs typeface="Cambria" pitchFamily="34" charset="-120"/>
+              </a:rPr>
+              <a:t>14</a:t>
+            </a:r>
+            <a:endParaRPr lang="en-US" sz="1400" dirty="0"/>
+          </a:p>
+        </p:txBody>
+      </p:sp>
+      <p:sp>
+        <p:nvSpPr>
+          <p:cNvPr id="45" name="Text 43"/>
+          <p:cNvSpPr txBox="1"/>
+          <p:nvPr/>
+        </p:nvSpPr>
+        <p:spPr>
+          <a:xfrm>
+            <a:off x="5166360" y="3474720"/>
+            <a:ext cx="3566160" cy="384048"/>
+          </a:xfrm>
+          <a:prstGeom prst="rect">
+            <a:avLst/>
+          </a:prstGeom>
+          <a:noFill/>
+          <a:ln/>
+        </p:spPr>
+        <p:txBody>
+          <a:bodyPr wrap="square" lIns="0" tIns="0" rIns="0" bIns="0" rtlCol="0" anchor="ctr"/>
+          <a:lstStyle/>
+          <a:p>
+            <a:pPr indent="0" marL="0">
+              <a:buNone/>
+            </a:pPr>
+            <a:r>
+              <a:rPr lang="en-US" sz="1250" dirty="0">
+                <a:solidFill>
+                  <a:srgbClr val="1D2B2A"/>
+                </a:solidFill>
+                <a:latin typeface="Calibri" pitchFamily="34" charset="0"/>
+                <a:ea typeface="Calibri" pitchFamily="34" charset="-122"/>
+                <a:cs typeface="Calibri" pitchFamily="34" charset="-120"/>
+              </a:rPr>
+              <a:t>Sole trader, private client, term deposits</a:t>
+            </a:r>
+            <a:endParaRPr lang="en-US" sz="1250" dirty="0"/>
+          </a:p>
+        </p:txBody>
+      </p:sp>
+      <p:sp>
+        <p:nvSpPr>
+          <p:cNvPr id="46" name="Shape 44"/>
+          <p:cNvSpPr/>
+          <p:nvPr/>
+        </p:nvSpPr>
+        <p:spPr>
+          <a:xfrm>
+            <a:off x="4663440" y="3931920"/>
+            <a:ext cx="384048" cy="384048"/>
+          </a:xfrm>
+          <a:prstGeom prst="ellipse">
+            <a:avLst/>
+          </a:prstGeom>
+          <a:solidFill>
+            <a:srgbClr val="B8862F"/>
+          </a:solidFill>
+          <a:ln/>
+        </p:spPr>
+      </p:sp>
+      <p:sp>
+        <p:nvSpPr>
+          <p:cNvPr id="47" name="Text 45"/>
+          <p:cNvSpPr txBox="1"/>
+          <p:nvPr/>
+        </p:nvSpPr>
+        <p:spPr>
+          <a:xfrm>
+            <a:off x="4663440" y="3931920"/>
+            <a:ext cx="384048" cy="384048"/>
+          </a:xfrm>
+          <a:prstGeom prst="rect">
+            <a:avLst/>
+          </a:prstGeom>
+          <a:noFill/>
+          <a:ln/>
+        </p:spPr>
+        <p:txBody>
+          <a:bodyPr wrap="square" lIns="0" tIns="0" rIns="0" bIns="0" rtlCol="0" anchor="ctr"/>
+          <a:lstStyle/>
+          <a:p>
+            <a:pPr algn="ctr" indent="0" marL="0">
+              <a:buNone/>
+            </a:pPr>
+            <a:r>
+              <a:rPr lang="en-US" sz="1400" b="1" dirty="0">
+                <a:solidFill>
+                  <a:srgbClr val="FFFFFF"/>
+                </a:solidFill>
+                <a:latin typeface="Cambria" pitchFamily="34" charset="0"/>
+                <a:ea typeface="Cambria" pitchFamily="34" charset="-122"/>
+                <a:cs typeface="Cambria" pitchFamily="34" charset="-120"/>
+              </a:rPr>
+              <a:t>15</a:t>
+            </a:r>
+            <a:endParaRPr lang="en-US" sz="1400" dirty="0"/>
+          </a:p>
+        </p:txBody>
+      </p:sp>
+      <p:sp>
+        <p:nvSpPr>
+          <p:cNvPr id="48" name="Text 46"/>
+          <p:cNvSpPr txBox="1"/>
+          <p:nvPr/>
+        </p:nvSpPr>
+        <p:spPr>
+          <a:xfrm>
+            <a:off x="5166360" y="3931920"/>
+            <a:ext cx="3566160" cy="384048"/>
+          </a:xfrm>
+          <a:prstGeom prst="rect">
+            <a:avLst/>
+          </a:prstGeom>
+          <a:noFill/>
+          <a:ln/>
+        </p:spPr>
+        <p:txBody>
+          <a:bodyPr wrap="square" lIns="0" tIns="0" rIns="0" bIns="0" rtlCol="0" anchor="ctr"/>
+          <a:lstStyle/>
+          <a:p>
+            <a:pPr indent="0" marL="0">
+              <a:buNone/>
+            </a:pPr>
+            <a:r>
+              <a:rPr lang="en-US" sz="1250" dirty="0">
+                <a:solidFill>
+                  <a:srgbClr val="1D2B2A"/>
+                </a:solidFill>
+                <a:latin typeface="Calibri" pitchFamily="34" charset="0"/>
+                <a:ea typeface="Calibri" pitchFamily="34" charset="-122"/>
+                <a:cs typeface="Calibri" pitchFamily="34" charset="-120"/>
+              </a:rPr>
+              <a:t>Card controls, bills, card search</a:t>
+            </a:r>
+            <a:endParaRPr lang="en-US" sz="1250" dirty="0"/>
+          </a:p>
+        </p:txBody>
+      </p:sp>
+      <p:sp>
+        <p:nvSpPr>
+          <p:cNvPr id="49" name="Shape 47"/>
+          <p:cNvSpPr/>
+          <p:nvPr/>
+        </p:nvSpPr>
+        <p:spPr>
+          <a:xfrm>
+            <a:off x="4663440" y="4389120"/>
+            <a:ext cx="384048" cy="384048"/>
+          </a:xfrm>
+          <a:prstGeom prst="ellipse">
+            <a:avLst/>
+          </a:prstGeom>
+          <a:solidFill>
+            <a:srgbClr val="B8862F"/>
+          </a:solidFill>
+          <a:ln/>
+        </p:spPr>
+      </p:sp>
+      <p:sp>
+        <p:nvSpPr>
+          <p:cNvPr id="50" name="Text 48"/>
+          <p:cNvSpPr txBox="1"/>
+          <p:nvPr/>
+        </p:nvSpPr>
+        <p:spPr>
+          <a:xfrm>
+            <a:off x="4663440" y="4389120"/>
+            <a:ext cx="384048" cy="384048"/>
+          </a:xfrm>
+          <a:prstGeom prst="rect">
+            <a:avLst/>
+          </a:prstGeom>
+          <a:noFill/>
+          <a:ln/>
+        </p:spPr>
+        <p:txBody>
+          <a:bodyPr wrap="square" lIns="0" tIns="0" rIns="0" bIns="0" rtlCol="0" anchor="ctr"/>
+          <a:lstStyle/>
+          <a:p>
+            <a:pPr algn="ctr" indent="0" marL="0">
+              <a:buNone/>
+            </a:pPr>
+            <a:r>
+              <a:rPr lang="en-US" sz="1400" b="1" dirty="0">
+                <a:solidFill>
+                  <a:srgbClr val="FFFFFF"/>
+                </a:solidFill>
+                <a:latin typeface="Cambria" pitchFamily="34" charset="0"/>
+                <a:ea typeface="Cambria" pitchFamily="34" charset="-122"/>
+                <a:cs typeface="Cambria" pitchFamily="34" charset="-120"/>
+              </a:rPr>
+              <a:t>16</a:t>
+            </a:r>
+            <a:endParaRPr lang="en-US" sz="1400" dirty="0"/>
+          </a:p>
+        </p:txBody>
+      </p:sp>
+      <p:sp>
+        <p:nvSpPr>
+          <p:cNvPr id="51" name="Text 49"/>
+          <p:cNvSpPr txBox="1"/>
+          <p:nvPr/>
+        </p:nvSpPr>
+        <p:spPr>
+          <a:xfrm>
+            <a:off x="5166360" y="4389120"/>
+            <a:ext cx="3566160" cy="384048"/>
+          </a:xfrm>
+          <a:prstGeom prst="rect">
+            <a:avLst/>
+          </a:prstGeom>
+          <a:noFill/>
+          <a:ln/>
+        </p:spPr>
+        <p:txBody>
+          <a:bodyPr wrap="square" lIns="0" tIns="0" rIns="0" bIns="0" rtlCol="0" anchor="ctr"/>
+          <a:lstStyle/>
+          <a:p>
+            <a:pPr indent="0" marL="0">
+              <a:buNone/>
+            </a:pPr>
+            <a:r>
+              <a:rPr lang="en-US" sz="1250" dirty="0">
+                <a:solidFill>
+                  <a:srgbClr val="1D2B2A"/>
+                </a:solidFill>
+                <a:latin typeface="Calibri" pitchFamily="34" charset="0"/>
+                <a:ea typeface="Calibri" pitchFamily="34" charset="-122"/>
+                <a:cs typeface="Calibri" pitchFamily="34" charset="-120"/>
+              </a:rPr>
+              <a:t>Auditor review; archive vs delete</a:t>
+            </a:r>
+            <a:endParaRPr lang="en-US" sz="1250" dirty="0"/>
           </a:p>
         </p:txBody>
       </p:sp>
@@ -4792,7 +5557,7 @@
               <a:buNone/>
             </a:pPr>
             <a:r>
-              <a:rPr lang="en-US" sz="2200" b="1" dirty="0">
+              <a:rPr lang="en-US" sz="2800" b="1" dirty="0">
                 <a:solidFill>
                   <a:srgbClr val="0B4F4A"/>
                 </a:solidFill>
@@ -4800,9 +5565,9 @@
                 <a:ea typeface="Cambria" pitchFamily="34" charset="-122"/>
                 <a:cs typeface="Cambria" pitchFamily="34" charset="-120"/>
               </a:rPr>
-              <a:t>Behaviour: six flowcharts traced from the code</a:t>
-            </a:r>
-            <a:endParaRPr lang="en-US" sz="2200" dirty="0"/>
+              <a:t>Everything the brief names is modelled</a:t>
+            </a:r>
+            <a:endParaRPr lang="en-US" sz="2800" dirty="0"/>
           </a:p>
         </p:txBody>
       </p:sp>
@@ -4839,7 +5604,7 @@
                 <a:ea typeface="Calibri" pitchFamily="34" charset="-122"/>
                 <a:cs typeface="Calibri" pitchFamily="34" charset="-120"/>
               </a:rPr>
-              <a:t>Standard symbols (ISO 5807); the diamonds are in the order the code checks the rules</a:t>
+              <a:t>Found by rereading Problem 4 line by line; each has a test</a:t>
             </a:r>
             <a:endParaRPr lang="en-US" sz="1200" dirty="0"/>
           </a:p>
@@ -4853,69 +5618,20 @@
         </p:nvSpPr>
         <p:spPr>
           <a:xfrm>
-            <a:off x="457200" y="1188720"/>
-            <a:ext cx="3200400" cy="3611880"/>
+            <a:off x="457200" y="1280160"/>
+            <a:ext cx="2606040" cy="1600200"/>
           </a:xfrm>
           <a:prstGeom prst="roundRect">
             <a:avLst>
-              <a:gd name="adj" fmla="val 2286"/>
+              <a:gd name="adj" fmla="val 4571"/>
             </a:avLst>
-          </a:prstGeom>
-          <a:solidFill>
-            <a:srgbClr val="F4F8F7"/>
-          </a:solidFill>
-          <a:ln w="12700">
-            <a:solidFill>
-              <a:srgbClr val="F4F8F7"/>
-            </a:solidFill>
-            <a:prstDash val="solid"/>
-          </a:ln>
-        </p:spPr>
-      </p:sp>
-      <p:pic>
-        <p:nvPicPr>
-          <p:cNvPr id="5" name="Image 0" descr="/home/user/commercial-banking/docs/flowchart_3_transfer.png">    </p:cNvPr>
-          <p:cNvPicPr>
-            <a:picLocks noChangeAspect="1"/>
-          </p:cNvPicPr>
-          <p:nvPr/>
-        </p:nvPicPr>
-        <p:blipFill>
-          <a:blip r:embed="rId1"/>
-          <a:stretch>
-            <a:fillRect/>
-          </a:stretch>
-        </p:blipFill>
-        <p:spPr>
-          <a:xfrm>
-            <a:off x="782195" y="1261872"/>
-            <a:ext cx="2550410" cy="3474720"/>
-          </a:xfrm>
-          <a:prstGeom prst="rect">
-            <a:avLst/>
-          </a:prstGeom>
-        </p:spPr>
-      </p:pic>
-      <p:sp>
-        <p:nvSpPr>
-          <p:cNvPr id="6" name="Shape 3"/>
-          <p:cNvSpPr/>
-          <p:nvPr/>
-        </p:nvSpPr>
-        <p:spPr>
-          <a:xfrm>
-            <a:off x="3931920" y="1234440"/>
-            <a:ext cx="640080" cy="329184"/>
-          </a:xfrm>
-          <a:prstGeom prst="flowChartTerminator">
-            <a:avLst/>
           </a:prstGeom>
           <a:solidFill>
             <a:srgbClr val="E8F0EE"/>
           </a:solidFill>
           <a:ln w="12700">
             <a:solidFill>
-              <a:srgbClr val="0B4F4A"/>
+              <a:srgbClr val="E8F0EE"/>
             </a:solidFill>
             <a:prstDash val="solid"/>
           </a:ln>
@@ -4923,14 +5639,14 @@
       </p:sp>
       <p:sp>
         <p:nvSpPr>
-          <p:cNvPr id="7" name="Text 4"/>
-          <p:cNvSpPr txBox="1"/>
-          <p:nvPr/>
-        </p:nvSpPr>
-        <p:spPr>
-          <a:xfrm>
-            <a:off x="4663440" y="1234440"/>
-            <a:ext cx="1874520" cy="329184"/>
+          <p:cNvPr id="5" name="Text 3"/>
+          <p:cNvSpPr txBox="1"/>
+          <p:nvPr/>
+        </p:nvSpPr>
+        <p:spPr>
+          <a:xfrm>
+            <a:off x="594360" y="1389888"/>
+            <a:ext cx="2331720" cy="502920"/>
           </a:xfrm>
           <a:prstGeom prst="rect">
             <a:avLst/>
@@ -4946,7 +5662,46 @@
               <a:buNone/>
             </a:pPr>
             <a:r>
-              <a:rPr lang="en-US" sz="1100" dirty="0">
+              <a:rPr lang="en-US" sz="1400" b="1" dirty="0">
+                <a:solidFill>
+                  <a:srgbClr val="0B4F4A"/>
+                </a:solidFill>
+                <a:latin typeface="Cambria" pitchFamily="34" charset="0"/>
+                <a:ea typeface="Cambria" pitchFamily="34" charset="-122"/>
+                <a:cs typeface="Cambria" pitchFamily="34" charset="-120"/>
+              </a:rPr>
+              <a:t>Sole traders &amp; private clients</a:t>
+            </a:r>
+            <a:endParaRPr lang="en-US" sz="1400" dirty="0"/>
+          </a:p>
+        </p:txBody>
+      </p:sp>
+      <p:sp>
+        <p:nvSpPr>
+          <p:cNvPr id="6" name="Text 4"/>
+          <p:cNvSpPr txBox="1"/>
+          <p:nvPr/>
+        </p:nvSpPr>
+        <p:spPr>
+          <a:xfrm>
+            <a:off x="594360" y="1920240"/>
+            <a:ext cx="2331720" cy="868680"/>
+          </a:xfrm>
+          <a:prstGeom prst="rect">
+            <a:avLst/>
+          </a:prstGeom>
+          <a:noFill/>
+          <a:ln/>
+        </p:spPr>
+        <p:txBody>
+          <a:bodyPr wrap="square" lIns="0" tIns="0" rIns="0" bIns="0" rtlCol="0" anchor="t"/>
+          <a:lstStyle/>
+          <a:p>
+            <a:pPr indent="0" marL="0">
+              <a:buNone/>
+            </a:pPr>
+            <a:r>
+              <a:rPr lang="en-US" sz="1200" dirty="0">
                 <a:solidFill>
                   <a:srgbClr val="1D2B2A"/>
                 </a:solidFill>
@@ -4954,32 +5709,34 @@
                 <a:ea typeface="Calibri" pitchFamily="34" charset="-122"/>
                 <a:cs typeface="Calibri" pitchFamily="34" charset="-120"/>
               </a:rPr>
-              <a:t>Start / end; red = refused</a:t>
-            </a:r>
-            <a:endParaRPr lang="en-US" sz="1100" dirty="0"/>
-          </a:p>
-        </p:txBody>
-      </p:sp>
-      <p:sp>
-        <p:nvSpPr>
-          <p:cNvPr id="8" name="Shape 5"/>
+              <a:t>Person with a trading name; PRIVATE needs verified source of wealth (EDD)</a:t>
+            </a:r>
+            <a:endParaRPr lang="en-US" sz="1200" dirty="0"/>
+          </a:p>
+        </p:txBody>
+      </p:sp>
+      <p:sp>
+        <p:nvSpPr>
+          <p:cNvPr id="7" name="Shape 5"/>
           <p:cNvSpPr/>
           <p:nvPr/>
         </p:nvSpPr>
         <p:spPr>
           <a:xfrm>
-            <a:off x="3931920" y="1664208"/>
-            <a:ext cx="640080" cy="329184"/>
-          </a:xfrm>
-          <a:prstGeom prst="flowChartProcess">
-            <a:avLst/>
+            <a:off x="3246120" y="1280160"/>
+            <a:ext cx="2606040" cy="1600200"/>
+          </a:xfrm>
+          <a:prstGeom prst="roundRect">
+            <a:avLst>
+              <a:gd name="adj" fmla="val 4571"/>
+            </a:avLst>
           </a:prstGeom>
           <a:solidFill>
             <a:srgbClr val="E8F0EE"/>
           </a:solidFill>
           <a:ln w="12700">
             <a:solidFill>
-              <a:srgbClr val="0B4F4A"/>
+              <a:srgbClr val="E8F0EE"/>
             </a:solidFill>
             <a:prstDash val="solid"/>
           </a:ln>
@@ -4987,14 +5744,14 @@
       </p:sp>
       <p:sp>
         <p:nvSpPr>
-          <p:cNvPr id="9" name="Text 6"/>
-          <p:cNvSpPr txBox="1"/>
-          <p:nvPr/>
-        </p:nvSpPr>
-        <p:spPr>
-          <a:xfrm>
-            <a:off x="4663440" y="1664208"/>
-            <a:ext cx="1874520" cy="329184"/>
+          <p:cNvPr id="8" name="Text 6"/>
+          <p:cNvSpPr txBox="1"/>
+          <p:nvPr/>
+        </p:nvSpPr>
+        <p:spPr>
+          <a:xfrm>
+            <a:off x="3383280" y="1389888"/>
+            <a:ext cx="2331720" cy="502920"/>
           </a:xfrm>
           <a:prstGeom prst="rect">
             <a:avLst/>
@@ -5010,7 +5767,46 @@
               <a:buNone/>
             </a:pPr>
             <a:r>
-              <a:rPr lang="en-US" sz="1100" dirty="0">
+              <a:rPr lang="en-US" sz="1400" b="1" dirty="0">
+                <a:solidFill>
+                  <a:srgbClr val="0B4F4A"/>
+                </a:solidFill>
+                <a:latin typeface="Cambria" pitchFamily="34" charset="0"/>
+                <a:ea typeface="Cambria" pitchFamily="34" charset="-122"/>
+                <a:cs typeface="Cambria" pitchFamily="34" charset="-120"/>
+              </a:rPr>
+              <a:t>Fixed-term deposits</a:t>
+            </a:r>
+            <a:endParaRPr lang="en-US" sz="1400" dirty="0"/>
+          </a:p>
+        </p:txBody>
+      </p:sp>
+      <p:sp>
+        <p:nvSpPr>
+          <p:cNvPr id="9" name="Text 7"/>
+          <p:cNvSpPr txBox="1"/>
+          <p:nvPr/>
+        </p:nvSpPr>
+        <p:spPr>
+          <a:xfrm>
+            <a:off x="3383280" y="1920240"/>
+            <a:ext cx="2331720" cy="868680"/>
+          </a:xfrm>
+          <a:prstGeom prst="rect">
+            <a:avLst/>
+          </a:prstGeom>
+          <a:noFill/>
+          <a:ln/>
+        </p:spPr>
+        <p:txBody>
+          <a:bodyPr wrap="square" lIns="0" tIns="0" rIns="0" bIns="0" rtlCol="0" anchor="t"/>
+          <a:lstStyle/>
+          <a:p>
+            <a:pPr indent="0" marL="0">
+              <a:buNone/>
+            </a:pPr>
+            <a:r>
+              <a:rPr lang="en-US" sz="1200" dirty="0">
                 <a:solidFill>
                   <a:srgbClr val="1D2B2A"/>
                 </a:solidFill>
@@ -5018,96 +5814,34 @@
                 <a:ea typeface="Calibri" pitchFamily="34" charset="-122"/>
                 <a:cs typeface="Calibri" pitchFamily="34" charset="-120"/>
               </a:rPr>
-              <a:t>Process: one step</a:t>
-            </a:r>
-            <a:endParaRPr lang="en-US" sz="1100" dirty="0"/>
-          </a:p>
-        </p:txBody>
-      </p:sp>
-      <p:sp>
-        <p:nvSpPr>
-          <p:cNvPr id="10" name="Shape 7"/>
+              <a:t>Third DepositAccount subclass: no early debits, maturity payout, break penalty</a:t>
+            </a:r>
+            <a:endParaRPr lang="en-US" sz="1200" dirty="0"/>
+          </a:p>
+        </p:txBody>
+      </p:sp>
+      <p:sp>
+        <p:nvSpPr>
+          <p:cNvPr id="10" name="Shape 8"/>
           <p:cNvSpPr/>
           <p:nvPr/>
         </p:nvSpPr>
         <p:spPr>
           <a:xfrm>
-            <a:off x="3931920" y="2093976"/>
-            <a:ext cx="640080" cy="329184"/>
-          </a:xfrm>
-          <a:prstGeom prst="flowChartDecision">
-            <a:avLst/>
-          </a:prstGeom>
-          <a:solidFill>
-            <a:srgbClr val="FDF1D6"/>
-          </a:solidFill>
-          <a:ln w="12700">
-            <a:solidFill>
-              <a:srgbClr val="0B4F4A"/>
-            </a:solidFill>
-            <a:prstDash val="solid"/>
-          </a:ln>
-        </p:spPr>
-      </p:sp>
-      <p:sp>
-        <p:nvSpPr>
-          <p:cNvPr id="11" name="Text 8"/>
-          <p:cNvSpPr txBox="1"/>
-          <p:nvPr/>
-        </p:nvSpPr>
-        <p:spPr>
-          <a:xfrm>
-            <a:off x="4663440" y="2093976"/>
-            <a:ext cx="1874520" cy="329184"/>
-          </a:xfrm>
-          <a:prstGeom prst="rect">
-            <a:avLst/>
-          </a:prstGeom>
-          <a:noFill/>
-          <a:ln/>
-        </p:spPr>
-        <p:txBody>
-          <a:bodyPr wrap="square" lIns="0" tIns="0" rIns="0" bIns="0" rtlCol="0" anchor="ctr"/>
-          <a:lstStyle/>
-          <a:p>
-            <a:pPr indent="0" marL="0">
-              <a:buNone/>
-            </a:pPr>
-            <a:r>
-              <a:rPr lang="en-US" sz="1100" dirty="0">
-                <a:solidFill>
-                  <a:srgbClr val="1D2B2A"/>
-                </a:solidFill>
-                <a:latin typeface="Calibri" pitchFamily="34" charset="0"/>
-                <a:ea typeface="Calibri" pitchFamily="34" charset="-122"/>
-                <a:cs typeface="Calibri" pitchFamily="34" charset="-120"/>
-              </a:rPr>
-              <a:t>Decision: Yes / No</a:t>
-            </a:r>
-            <a:endParaRPr lang="en-US" sz="1100" dirty="0"/>
-          </a:p>
-        </p:txBody>
-      </p:sp>
-      <p:sp>
-        <p:nvSpPr>
-          <p:cNvPr id="12" name="Shape 9"/>
-          <p:cNvSpPr/>
-          <p:nvPr/>
-        </p:nvSpPr>
-        <p:spPr>
-          <a:xfrm>
-            <a:off x="3931920" y="2523744"/>
-            <a:ext cx="640080" cy="329184"/>
-          </a:xfrm>
-          <a:prstGeom prst="flowChartInputOutput">
-            <a:avLst/>
+            <a:off x="6035040" y="1280160"/>
+            <a:ext cx="2606040" cy="1600200"/>
+          </a:xfrm>
+          <a:prstGeom prst="roundRect">
+            <a:avLst>
+              <a:gd name="adj" fmla="val 4571"/>
+            </a:avLst>
           </a:prstGeom>
           <a:solidFill>
             <a:srgbClr val="E8F0EE"/>
           </a:solidFill>
           <a:ln w="12700">
             <a:solidFill>
-              <a:srgbClr val="0B4F4A"/>
+              <a:srgbClr val="E8F0EE"/>
             </a:solidFill>
             <a:prstDash val="solid"/>
           </a:ln>
@@ -5115,14 +5849,14 @@
       </p:sp>
       <p:sp>
         <p:nvSpPr>
-          <p:cNvPr id="13" name="Text 10"/>
-          <p:cNvSpPr txBox="1"/>
-          <p:nvPr/>
-        </p:nvSpPr>
-        <p:spPr>
-          <a:xfrm>
-            <a:off x="4663440" y="2523744"/>
-            <a:ext cx="1874520" cy="329184"/>
+          <p:cNvPr id="11" name="Text 9"/>
+          <p:cNvSpPr txBox="1"/>
+          <p:nvPr/>
+        </p:nvSpPr>
+        <p:spPr>
+          <a:xfrm>
+            <a:off x="6172200" y="1389888"/>
+            <a:ext cx="2331720" cy="502920"/>
           </a:xfrm>
           <a:prstGeom prst="rect">
             <a:avLst/>
@@ -5138,7 +5872,46 @@
               <a:buNone/>
             </a:pPr>
             <a:r>
-              <a:rPr lang="en-US" sz="1100" dirty="0">
+              <a:rPr lang="en-US" sz="1400" b="1" dirty="0">
+                <a:solidFill>
+                  <a:srgbClr val="0B4F4A"/>
+                </a:solidFill>
+                <a:latin typeface="Cambria" pitchFamily="34" charset="0"/>
+                <a:ea typeface="Cambria" pitchFamily="34" charset="-122"/>
+                <a:cs typeface="Cambria" pitchFamily="34" charset="-120"/>
+              </a:rPr>
+              <a:t>Card controls</a:t>
+            </a:r>
+            <a:endParaRPr lang="en-US" sz="1400" dirty="0"/>
+          </a:p>
+        </p:txBody>
+      </p:sp>
+      <p:sp>
+        <p:nvSpPr>
+          <p:cNvPr id="12" name="Text 10"/>
+          <p:cNvSpPr txBox="1"/>
+          <p:nvPr/>
+        </p:nvSpPr>
+        <p:spPr>
+          <a:xfrm>
+            <a:off x="6172200" y="1920240"/>
+            <a:ext cx="2331720" cy="868680"/>
+          </a:xfrm>
+          <a:prstGeom prst="rect">
+            <a:avLst/>
+          </a:prstGeom>
+          <a:noFill/>
+          <a:ln/>
+        </p:spPr>
+        <p:txBody>
+          <a:bodyPr wrap="square" lIns="0" tIns="0" rIns="0" bIns="0" rtlCol="0" anchor="t"/>
+          <a:lstStyle/>
+          <a:p>
+            <a:pPr indent="0" marL="0">
+              <a:buNone/>
+            </a:pPr>
+            <a:r>
+              <a:rPr lang="en-US" sz="1200" dirty="0">
                 <a:solidFill>
                   <a:srgbClr val="1D2B2A"/>
                 </a:solidFill>
@@ -5146,32 +5919,34 @@
                 <a:ea typeface="Calibri" pitchFamily="34" charset="-122"/>
                 <a:cs typeface="Calibri" pitchFamily="34" charset="-120"/>
               </a:rPr>
-              <a:t>Input / output</a:t>
-            </a:r>
-            <a:endParaRPr lang="en-US" sz="1100" dirty="0"/>
-          </a:p>
-        </p:txBody>
-      </p:sp>
-      <p:sp>
-        <p:nvSpPr>
-          <p:cNvPr id="14" name="Shape 11"/>
+              <a:t>Online, international, cash, merchant category - each with a validity period</a:t>
+            </a:r>
+            <a:endParaRPr lang="en-US" sz="1200" dirty="0"/>
+          </a:p>
+        </p:txBody>
+      </p:sp>
+      <p:sp>
+        <p:nvSpPr>
+          <p:cNvPr id="13" name="Shape 11"/>
           <p:cNvSpPr/>
           <p:nvPr/>
         </p:nvSpPr>
         <p:spPr>
           <a:xfrm>
-            <a:off x="3931920" y="2953512"/>
-            <a:ext cx="640080" cy="329184"/>
-          </a:xfrm>
-          <a:prstGeom prst="flowChartPredefinedProcess">
-            <a:avLst/>
+            <a:off x="457200" y="3063240"/>
+            <a:ext cx="2606040" cy="1600200"/>
+          </a:xfrm>
+          <a:prstGeom prst="roundRect">
+            <a:avLst>
+              <a:gd name="adj" fmla="val 4571"/>
+            </a:avLst>
           </a:prstGeom>
           <a:solidFill>
             <a:srgbClr val="E8F0EE"/>
           </a:solidFill>
           <a:ln w="12700">
             <a:solidFill>
-              <a:srgbClr val="0B4F4A"/>
+              <a:srgbClr val="E8F0EE"/>
             </a:solidFill>
             <a:prstDash val="solid"/>
           </a:ln>
@@ -5179,14 +5954,14 @@
       </p:sp>
       <p:sp>
         <p:nvSpPr>
-          <p:cNvPr id="15" name="Text 12"/>
-          <p:cNvSpPr txBox="1"/>
-          <p:nvPr/>
-        </p:nvSpPr>
-        <p:spPr>
-          <a:xfrm>
-            <a:off x="4663440" y="2953512"/>
-            <a:ext cx="1874520" cy="329184"/>
+          <p:cNvPr id="14" name="Text 12"/>
+          <p:cNvSpPr txBox="1"/>
+          <p:nvPr/>
+        </p:nvSpPr>
+        <p:spPr>
+          <a:xfrm>
+            <a:off x="594360" y="3172968"/>
+            <a:ext cx="2331720" cy="502920"/>
           </a:xfrm>
           <a:prstGeom prst="rect">
             <a:avLst/>
@@ -5202,7 +5977,46 @@
               <a:buNone/>
             </a:pPr>
             <a:r>
-              <a:rPr lang="en-US" sz="1100" dirty="0">
+              <a:rPr lang="en-US" sz="1400" b="1" dirty="0">
+                <a:solidFill>
+                  <a:srgbClr val="0B4F4A"/>
+                </a:solidFill>
+                <a:latin typeface="Cambria" pitchFamily="34" charset="0"/>
+                <a:ea typeface="Cambria" pitchFamily="34" charset="-122"/>
+                <a:cs typeface="Cambria" pitchFamily="34" charset="-120"/>
+              </a:rPr>
+              <a:t>Billers</a:t>
+            </a:r>
+            <a:endParaRPr lang="en-US" sz="1400" dirty="0"/>
+          </a:p>
+        </p:txBody>
+      </p:sp>
+      <p:sp>
+        <p:nvSpPr>
+          <p:cNvPr id="15" name="Text 13"/>
+          <p:cNvSpPr txBox="1"/>
+          <p:nvPr/>
+        </p:nvSpPr>
+        <p:spPr>
+          <a:xfrm>
+            <a:off x="594360" y="3703320"/>
+            <a:ext cx="2331720" cy="868680"/>
+          </a:xfrm>
+          <a:prstGeom prst="rect">
+            <a:avLst/>
+          </a:prstGeom>
+          <a:noFill/>
+          <a:ln/>
+        </p:spPr>
+        <p:txBody>
+          <a:bodyPr wrap="square" lIns="0" tIns="0" rIns="0" bIns="0" rtlCol="0" anchor="t"/>
+          <a:lstStyle/>
+          <a:p>
+            <a:pPr indent="0" marL="0">
+              <a:buNone/>
+            </a:pPr>
+            <a:r>
+              <a:rPr lang="en-US" sz="1200" dirty="0">
                 <a:solidFill>
                   <a:srgbClr val="1D2B2A"/>
                 </a:solidFill>
@@ -5210,32 +6024,34 @@
                 <a:ea typeface="Calibri" pitchFamily="34" charset="-122"/>
                 <a:cs typeface="Calibri" pitchFamily="34" charset="-120"/>
               </a:rPr>
-              <a:t>A named Bank operation</a:t>
-            </a:r>
-            <a:endParaRPr lang="en-US" sz="1100" dirty="0"/>
-          </a:p>
-        </p:txBody>
-      </p:sp>
-      <p:sp>
-        <p:nvSpPr>
-          <p:cNvPr id="16" name="Shape 13"/>
+              <a:t>BillPayment is a CustomerPayment: same mandates, restrictions, dual control</a:t>
+            </a:r>
+            <a:endParaRPr lang="en-US" sz="1200" dirty="0"/>
+          </a:p>
+        </p:txBody>
+      </p:sp>
+      <p:sp>
+        <p:nvSpPr>
+          <p:cNvPr id="16" name="Shape 14"/>
           <p:cNvSpPr/>
           <p:nvPr/>
         </p:nvSpPr>
         <p:spPr>
           <a:xfrm>
-            <a:off x="3931920" y="3383280"/>
-            <a:ext cx="640080" cy="329184"/>
-          </a:xfrm>
-          <a:prstGeom prst="flowChartMagneticDisk">
-            <a:avLst/>
+            <a:off x="3246120" y="3063240"/>
+            <a:ext cx="2606040" cy="1600200"/>
+          </a:xfrm>
+          <a:prstGeom prst="roundRect">
+            <a:avLst>
+              <a:gd name="adj" fmla="val 4571"/>
+            </a:avLst>
           </a:prstGeom>
           <a:solidFill>
             <a:srgbClr val="E8F0EE"/>
           </a:solidFill>
           <a:ln w="12700">
             <a:solidFill>
-              <a:srgbClr val="0B4F4A"/>
+              <a:srgbClr val="E8F0EE"/>
             </a:solidFill>
             <a:prstDash val="solid"/>
           </a:ln>
@@ -5243,14 +6059,14 @@
       </p:sp>
       <p:sp>
         <p:nvSpPr>
-          <p:cNvPr id="17" name="Text 14"/>
-          <p:cNvSpPr txBox="1"/>
-          <p:nvPr/>
-        </p:nvSpPr>
-        <p:spPr>
-          <a:xfrm>
-            <a:off x="4663440" y="3383280"/>
-            <a:ext cx="1874520" cy="329184"/>
+          <p:cNvPr id="17" name="Text 15"/>
+          <p:cNvSpPr txBox="1"/>
+          <p:nvPr/>
+        </p:nvSpPr>
+        <p:spPr>
+          <a:xfrm>
+            <a:off x="3383280" y="3172968"/>
+            <a:ext cx="2331720" cy="502920"/>
           </a:xfrm>
           <a:prstGeom prst="rect">
             <a:avLst/>
@@ -5266,7 +6082,46 @@
               <a:buNone/>
             </a:pPr>
             <a:r>
-              <a:rPr lang="en-US" sz="1100" dirty="0">
+              <a:rPr lang="en-US" sz="1400" b="1" dirty="0">
+                <a:solidFill>
+                  <a:srgbClr val="0B4F4A"/>
+                </a:solidFill>
+                <a:latin typeface="Cambria" pitchFamily="34" charset="0"/>
+                <a:ea typeface="Cambria" pitchFamily="34" charset="-122"/>
+                <a:cs typeface="Cambria" pitchFamily="34" charset="-120"/>
+              </a:rPr>
+              <a:t>Collections staff</a:t>
+            </a:r>
+            <a:endParaRPr lang="en-US" sz="1400" dirty="0"/>
+          </a:p>
+        </p:txBody>
+      </p:sp>
+      <p:sp>
+        <p:nvSpPr>
+          <p:cNvPr id="18" name="Text 16"/>
+          <p:cNvSpPr txBox="1"/>
+          <p:nvPr/>
+        </p:nvSpPr>
+        <p:spPr>
+          <a:xfrm>
+            <a:off x="3383280" y="3703320"/>
+            <a:ext cx="2331720" cy="868680"/>
+          </a:xfrm>
+          <a:prstGeom prst="rect">
+            <a:avLst/>
+          </a:prstGeom>
+          <a:noFill/>
+          <a:ln/>
+        </p:spPr>
+        <p:txBody>
+          <a:bodyPr wrap="square" lIns="0" tIns="0" rIns="0" bIns="0" rtlCol="0" anchor="t"/>
+          <a:lstStyle/>
+          <a:p>
+            <a:pPr indent="0" marL="0">
+              <a:buNone/>
+            </a:pPr>
+            <a:r>
+              <a:rPr lang="en-US" sz="1200" dirty="0">
                 <a:solidFill>
                   <a:srgbClr val="1D2B2A"/>
                 </a:solidFill>
@@ -5274,22 +6129,88 @@
                 <a:ea typeface="Calibri" pitchFamily="34" charset="-122"/>
                 <a:cs typeface="Calibri" pitchFamily="34" charset="-120"/>
               </a:rPr>
-              <a:t>Ledger / audit log</a:t>
-            </a:r>
-            <a:endParaRPr lang="en-US" sz="1100" dirty="0"/>
-          </a:p>
-        </p:txBody>
-      </p:sp>
-      <p:sp>
-        <p:nvSpPr>
-          <p:cNvPr id="18" name="Text 15"/>
-          <p:cNvSpPr txBox="1"/>
-          <p:nvPr/>
-        </p:nvSpPr>
-        <p:spPr>
-          <a:xfrm>
-            <a:off x="6720840" y="1234440"/>
-            <a:ext cx="1965960" cy="2560320"/>
+              <a:t>Collections officer works the case; promise to pay marked kept or broken</a:t>
+            </a:r>
+            <a:endParaRPr lang="en-US" sz="1200" dirty="0"/>
+          </a:p>
+        </p:txBody>
+      </p:sp>
+      <p:sp>
+        <p:nvSpPr>
+          <p:cNvPr id="19" name="Shape 17"/>
+          <p:cNvSpPr/>
+          <p:nvPr/>
+        </p:nvSpPr>
+        <p:spPr>
+          <a:xfrm>
+            <a:off x="6035040" y="3063240"/>
+            <a:ext cx="2606040" cy="1600200"/>
+          </a:xfrm>
+          <a:prstGeom prst="roundRect">
+            <a:avLst>
+              <a:gd name="adj" fmla="val 4571"/>
+            </a:avLst>
+          </a:prstGeom>
+          <a:solidFill>
+            <a:srgbClr val="E8F0EE"/>
+          </a:solidFill>
+          <a:ln w="12700">
+            <a:solidFill>
+              <a:srgbClr val="E8F0EE"/>
+            </a:solidFill>
+            <a:prstDash val="solid"/>
+          </a:ln>
+        </p:spPr>
+      </p:sp>
+      <p:sp>
+        <p:nvSpPr>
+          <p:cNvPr id="20" name="Text 18"/>
+          <p:cNvSpPr txBox="1"/>
+          <p:nvPr/>
+        </p:nvSpPr>
+        <p:spPr>
+          <a:xfrm>
+            <a:off x="6172200" y="3172968"/>
+            <a:ext cx="2331720" cy="502920"/>
+          </a:xfrm>
+          <a:prstGeom prst="rect">
+            <a:avLst/>
+          </a:prstGeom>
+          <a:noFill/>
+          <a:ln/>
+        </p:spPr>
+        <p:txBody>
+          <a:bodyPr wrap="square" lIns="0" tIns="0" rIns="0" bIns="0" rtlCol="0" anchor="ctr"/>
+          <a:lstStyle/>
+          <a:p>
+            <a:pPr indent="0" marL="0">
+              <a:buNone/>
+            </a:pPr>
+            <a:r>
+              <a:rPr lang="en-US" sz="1400" b="1" dirty="0">
+                <a:solidFill>
+                  <a:srgbClr val="0B4F4A"/>
+                </a:solidFill>
+                <a:latin typeface="Cambria" pitchFamily="34" charset="0"/>
+                <a:ea typeface="Cambria" pitchFamily="34" charset="-122"/>
+                <a:cs typeface="Cambria" pitchFamily="34" charset="-120"/>
+              </a:rPr>
+              <a:t>Auditors &amp; retention</a:t>
+            </a:r>
+            <a:endParaRPr lang="en-US" sz="1400" dirty="0"/>
+          </a:p>
+        </p:txBody>
+      </p:sp>
+      <p:sp>
+        <p:nvSpPr>
+          <p:cNvPr id="21" name="Text 19"/>
+          <p:cNvSpPr txBox="1"/>
+          <p:nvPr/>
+        </p:nvSpPr>
+        <p:spPr>
+          <a:xfrm>
+            <a:off x="6172200" y="3703320"/>
+            <a:ext cx="2331720" cy="868680"/>
           </a:xfrm>
           <a:prstGeom prst="rect">
             <a:avLst/>
@@ -5302,9 +6223,6 @@
           <a:lstStyle/>
           <a:p>
             <a:pPr indent="0" marL="0">
-              <a:spcAft>
-                <a:spcPts val="600"/>
-              </a:spcAft>
               <a:buNone/>
             </a:pPr>
             <a:r>
@@ -5316,148 +6234,9 @@
                 <a:ea typeface="Calibri" pitchFamily="34" charset="-122"/>
                 <a:cs typeface="Calibri" pitchFamily="34" charset="-120"/>
               </a:rPr>
-              <a:t>1. Program overview</a:t>
+              <a:t>Approvals audit with role at the time; archive, never delete (10-year retention)</a:t>
             </a:r>
             <a:endParaRPr lang="en-US" sz="1200" dirty="0"/>
-          </a:p>
-          <a:p>
-            <a:pPr indent="0" marL="0">
-              <a:spcAft>
-                <a:spcPts val="600"/>
-              </a:spcAft>
-              <a:buNone/>
-            </a:pPr>
-            <a:r>
-              <a:rPr lang="en-US" sz="1200" dirty="0">
-                <a:solidFill>
-                  <a:srgbClr val="1D2B2A"/>
-                </a:solidFill>
-                <a:latin typeface="Calibri" pitchFamily="34" charset="0"/>
-                <a:ea typeface="Calibri" pitchFamily="34" charset="-122"/>
-                <a:cs typeface="Calibri" pitchFamily="34" charset="-120"/>
-              </a:rPr>
-              <a:t>2. Onboarding</a:t>
-            </a:r>
-            <a:endParaRPr lang="en-US" sz="1200" dirty="0"/>
-          </a:p>
-          <a:p>
-            <a:pPr indent="0" marL="0">
-              <a:spcAft>
-                <a:spcPts val="600"/>
-              </a:spcAft>
-              <a:buNone/>
-            </a:pPr>
-            <a:r>
-              <a:rPr lang="en-US" sz="1200" dirty="0">
-                <a:solidFill>
-                  <a:srgbClr val="1D2B2A"/>
-                </a:solidFill>
-                <a:latin typeface="Calibri" pitchFamily="34" charset="0"/>
-                <a:ea typeface="Calibri" pitchFamily="34" charset="-122"/>
-                <a:cs typeface="Calibri" pitchFamily="34" charset="-120"/>
-              </a:rPr>
-              <a:t>3. Transfer payment</a:t>
-            </a:r>
-            <a:endParaRPr lang="en-US" sz="1200" dirty="0"/>
-          </a:p>
-          <a:p>
-            <a:pPr indent="0" marL="0">
-              <a:spcAft>
-                <a:spcPts val="600"/>
-              </a:spcAft>
-              <a:buNone/>
-            </a:pPr>
-            <a:r>
-              <a:rPr lang="en-US" sz="1200" dirty="0">
-                <a:solidFill>
-                  <a:srgbClr val="1D2B2A"/>
-                </a:solidFill>
-                <a:latin typeface="Calibri" pitchFamily="34" charset="0"/>
-                <a:ea typeface="Calibri" pitchFamily="34" charset="-122"/>
-                <a:cs typeface="Calibri" pitchFamily="34" charset="-120"/>
-              </a:rPr>
-              <a:t>4. Card purchase</a:t>
-            </a:r>
-            <a:endParaRPr lang="en-US" sz="1200" dirty="0"/>
-          </a:p>
-          <a:p>
-            <a:pPr indent="0" marL="0">
-              <a:spcAft>
-                <a:spcPts val="600"/>
-              </a:spcAft>
-              <a:buNone/>
-            </a:pPr>
-            <a:r>
-              <a:rPr lang="en-US" sz="1200" dirty="0">
-                <a:solidFill>
-                  <a:srgbClr val="1D2B2A"/>
-                </a:solidFill>
-                <a:latin typeface="Calibri" pitchFamily="34" charset="0"/>
-                <a:ea typeface="Calibri" pitchFamily="34" charset="-122"/>
-                <a:cs typeface="Calibri" pitchFamily="34" charset="-120"/>
-              </a:rPr>
-              <a:t>5. Financing lifecycle</a:t>
-            </a:r>
-            <a:endParaRPr lang="en-US" sz="1200" dirty="0"/>
-          </a:p>
-          <a:p>
-            <a:pPr indent="0" marL="0">
-              <a:spcAft>
-                <a:spcPts val="600"/>
-              </a:spcAft>
-              <a:buNone/>
-            </a:pPr>
-            <a:r>
-              <a:rPr lang="en-US" sz="1200" dirty="0">
-                <a:solidFill>
-                  <a:srgbClr val="1D2B2A"/>
-                </a:solidFill>
-                <a:latin typeface="Calibri" pitchFamily="34" charset="0"/>
-                <a:ea typeface="Calibri" pitchFamily="34" charset="-122"/>
-                <a:cs typeface="Calibri" pitchFamily="34" charset="-120"/>
-              </a:rPr>
-              <a:t>6. Desktop console</a:t>
-            </a:r>
-            <a:endParaRPr lang="en-US" sz="1200" dirty="0"/>
-          </a:p>
-        </p:txBody>
-      </p:sp>
-      <p:sp>
-        <p:nvSpPr>
-          <p:cNvPr id="19" name="Text 16"/>
-          <p:cNvSpPr txBox="1"/>
-          <p:nvPr/>
-        </p:nvSpPr>
-        <p:spPr>
-          <a:xfrm>
-            <a:off x="3931920" y="4069080"/>
-            <a:ext cx="4754880" cy="457200"/>
-          </a:xfrm>
-          <a:prstGeom prst="rect">
-            <a:avLst/>
-          </a:prstGeom>
-          <a:noFill/>
-          <a:ln/>
-        </p:spPr>
-        <p:txBody>
-          <a:bodyPr wrap="square" lIns="0" tIns="0" rIns="0" bIns="0" rtlCol="0" anchor="ctr"/>
-          <a:lstStyle/>
-          <a:p>
-            <a:pPr indent="0" marL="0">
-              <a:buNone/>
-            </a:pPr>
-            <a:r>
-              <a:rPr lang="en-US" sz="1100" i="1" dirty="0">
-                <a:solidFill>
-                  <a:srgbClr val="5B6B69"/>
-                </a:solidFill>
-                <a:latin typeface="Calibri" pitchFamily="34" charset="0"/>
-                <a:ea typeface="Calibri" pitchFamily="34" charset="-122"/>
-                <a:cs typeface="Calibri" pitchFamily="34" charset="-120"/>
-              </a:rPr>
-              <a:t>Report section 4.1 (flowcharts) and 4.2 (state machines)</a:t>
-            </a:r>
-            <a:endParaRPr lang="en-US" sz="1100" dirty="0"/>
           </a:p>
         </p:txBody>
       </p:sp>
@@ -5520,7 +6299,7 @@
               <a:buNone/>
             </a:pPr>
             <a:r>
-              <a:rPr lang="en-US" sz="2800" b="1" dirty="0">
+              <a:rPr lang="en-US" sz="2200" b="1" dirty="0">
                 <a:solidFill>
                   <a:srgbClr val="0B4F4A"/>
                 </a:solidFill>
@@ -5528,9 +6307,9 @@
                 <a:ea typeface="Cambria" pitchFamily="34" charset="-122"/>
                 <a:cs typeface="Cambria" pitchFamily="34" charset="-120"/>
               </a:rPr>
-              <a:t>Live demo: the desktop console</a:t>
-            </a:r>
-            <a:endParaRPr lang="en-US" sz="2800" dirty="0"/>
+              <a:t>Behaviour: six flowcharts traced from the code</a:t>
+            </a:r>
+            <a:endParaRPr lang="en-US" sz="2200" dirty="0"/>
           </a:p>
         </p:txBody>
       </p:sp>
@@ -5567,7 +6346,7 @@
                 <a:ea typeface="Calibri" pitchFamily="34" charset="-122"/>
                 <a:cs typeface="Calibri" pitchFamily="34" charset="-120"/>
               </a:rPr>
-              <a:t>banking_gui.py - pure Python (Tkinter); every button calls one Bank operation</a:t>
+              <a:t>Standard symbols (ISO 5807); the diamonds are in the order the code checks the rules</a:t>
             </a:r>
             <a:endParaRPr lang="en-US" sz="1200" dirty="0"/>
           </a:p>
@@ -5582,11 +6361,11 @@
         <p:spPr>
           <a:xfrm>
             <a:off x="457200" y="1188720"/>
-            <a:ext cx="5577840" cy="3611880"/>
+            <a:ext cx="3200400" cy="3611880"/>
           </a:xfrm>
           <a:prstGeom prst="roundRect">
             <a:avLst>
-              <a:gd name="adj" fmla="val 2025"/>
+              <a:gd name="adj" fmla="val 2286"/>
             </a:avLst>
           </a:prstGeom>
           <a:solidFill>
@@ -5602,7 +6381,7 @@
       </p:sp>
       <p:pic>
         <p:nvPicPr>
-          <p:cNvPr id="5" name="Image 0" descr="/home/user/commercial-banking/docs/screenshots/gui_01_overview.png">    </p:cNvPr>
+          <p:cNvPr id="5" name="Image 0" descr="/home/user/commercial-banking/docs/flowchart_3_transfer.png">    </p:cNvPr>
           <p:cNvPicPr>
             <a:picLocks noChangeAspect="1"/>
           </p:cNvPicPr>
@@ -5616,8 +6395,8 @@
         </p:blipFill>
         <p:spPr>
           <a:xfrm>
-            <a:off x="548640" y="1280160"/>
-            <a:ext cx="5394960" cy="3291840"/>
+            <a:off x="782195" y="1261872"/>
+            <a:ext cx="2550410" cy="3474720"/>
           </a:xfrm>
           <a:prstGeom prst="rect">
             <a:avLst/>
@@ -5626,31 +6405,414 @@
       </p:pic>
       <p:sp>
         <p:nvSpPr>
-          <p:cNvPr id="6" name="Text 3"/>
-          <p:cNvSpPr txBox="1"/>
-          <p:nvPr/>
-        </p:nvSpPr>
-        <p:spPr>
-          <a:xfrm>
-            <a:off x="6263640" y="1234440"/>
-            <a:ext cx="2468880" cy="3566160"/>
-          </a:xfrm>
-          <a:prstGeom prst="rect">
-            <a:avLst/>
-          </a:prstGeom>
-          <a:noFill/>
-          <a:ln/>
-        </p:spPr>
-        <p:txBody>
-          <a:bodyPr wrap="square" lIns="635" tIns="635" rIns="635" bIns="635" rtlCol="0" anchor="t"/>
-          <a:lstStyle/>
-          <a:p>
-            <a:pPr marL="342900" indent="-342900">
+          <p:cNvPr id="6" name="Shape 3"/>
+          <p:cNvSpPr/>
+          <p:nvPr/>
+        </p:nvSpPr>
+        <p:spPr>
+          <a:xfrm>
+            <a:off x="3931920" y="1234440"/>
+            <a:ext cx="640080" cy="329184"/>
+          </a:xfrm>
+          <a:prstGeom prst="flowChartTerminator">
+            <a:avLst/>
+          </a:prstGeom>
+          <a:solidFill>
+            <a:srgbClr val="E8F0EE"/>
+          </a:solidFill>
+          <a:ln w="12700">
+            <a:solidFill>
+              <a:srgbClr val="0B4F4A"/>
+            </a:solidFill>
+            <a:prstDash val="solid"/>
+          </a:ln>
+        </p:spPr>
+      </p:sp>
+      <p:sp>
+        <p:nvSpPr>
+          <p:cNvPr id="7" name="Text 4"/>
+          <p:cNvSpPr txBox="1"/>
+          <p:nvPr/>
+        </p:nvSpPr>
+        <p:spPr>
+          <a:xfrm>
+            <a:off x="4663440" y="1234440"/>
+            <a:ext cx="1874520" cy="329184"/>
+          </a:xfrm>
+          <a:prstGeom prst="rect">
+            <a:avLst/>
+          </a:prstGeom>
+          <a:noFill/>
+          <a:ln/>
+        </p:spPr>
+        <p:txBody>
+          <a:bodyPr wrap="square" lIns="0" tIns="0" rIns="0" bIns="0" rtlCol="0" anchor="ctr"/>
+          <a:lstStyle/>
+          <a:p>
+            <a:pPr indent="0" marL="0">
+              <a:buNone/>
+            </a:pPr>
+            <a:r>
+              <a:rPr lang="en-US" sz="1100" dirty="0">
+                <a:solidFill>
+                  <a:srgbClr val="1D2B2A"/>
+                </a:solidFill>
+                <a:latin typeface="Calibri" pitchFamily="34" charset="0"/>
+                <a:ea typeface="Calibri" pitchFamily="34" charset="-122"/>
+                <a:cs typeface="Calibri" pitchFamily="34" charset="-120"/>
+              </a:rPr>
+              <a:t>Start / end; red = refused</a:t>
+            </a:r>
+            <a:endParaRPr lang="en-US" sz="1100" dirty="0"/>
+          </a:p>
+        </p:txBody>
+      </p:sp>
+      <p:sp>
+        <p:nvSpPr>
+          <p:cNvPr id="8" name="Shape 5"/>
+          <p:cNvSpPr/>
+          <p:nvPr/>
+        </p:nvSpPr>
+        <p:spPr>
+          <a:xfrm>
+            <a:off x="3931920" y="1664208"/>
+            <a:ext cx="640080" cy="329184"/>
+          </a:xfrm>
+          <a:prstGeom prst="flowChartProcess">
+            <a:avLst/>
+          </a:prstGeom>
+          <a:solidFill>
+            <a:srgbClr val="E8F0EE"/>
+          </a:solidFill>
+          <a:ln w="12700">
+            <a:solidFill>
+              <a:srgbClr val="0B4F4A"/>
+            </a:solidFill>
+            <a:prstDash val="solid"/>
+          </a:ln>
+        </p:spPr>
+      </p:sp>
+      <p:sp>
+        <p:nvSpPr>
+          <p:cNvPr id="9" name="Text 6"/>
+          <p:cNvSpPr txBox="1"/>
+          <p:nvPr/>
+        </p:nvSpPr>
+        <p:spPr>
+          <a:xfrm>
+            <a:off x="4663440" y="1664208"/>
+            <a:ext cx="1874520" cy="329184"/>
+          </a:xfrm>
+          <a:prstGeom prst="rect">
+            <a:avLst/>
+          </a:prstGeom>
+          <a:noFill/>
+          <a:ln/>
+        </p:spPr>
+        <p:txBody>
+          <a:bodyPr wrap="square" lIns="0" tIns="0" rIns="0" bIns="0" rtlCol="0" anchor="ctr"/>
+          <a:lstStyle/>
+          <a:p>
+            <a:pPr indent="0" marL="0">
+              <a:buNone/>
+            </a:pPr>
+            <a:r>
+              <a:rPr lang="en-US" sz="1100" dirty="0">
+                <a:solidFill>
+                  <a:srgbClr val="1D2B2A"/>
+                </a:solidFill>
+                <a:latin typeface="Calibri" pitchFamily="34" charset="0"/>
+                <a:ea typeface="Calibri" pitchFamily="34" charset="-122"/>
+                <a:cs typeface="Calibri" pitchFamily="34" charset="-120"/>
+              </a:rPr>
+              <a:t>Process: one step</a:t>
+            </a:r>
+            <a:endParaRPr lang="en-US" sz="1100" dirty="0"/>
+          </a:p>
+        </p:txBody>
+      </p:sp>
+      <p:sp>
+        <p:nvSpPr>
+          <p:cNvPr id="10" name="Shape 7"/>
+          <p:cNvSpPr/>
+          <p:nvPr/>
+        </p:nvSpPr>
+        <p:spPr>
+          <a:xfrm>
+            <a:off x="3931920" y="2093976"/>
+            <a:ext cx="640080" cy="329184"/>
+          </a:xfrm>
+          <a:prstGeom prst="flowChartDecision">
+            <a:avLst/>
+          </a:prstGeom>
+          <a:solidFill>
+            <a:srgbClr val="FDF1D6"/>
+          </a:solidFill>
+          <a:ln w="12700">
+            <a:solidFill>
+              <a:srgbClr val="0B4F4A"/>
+            </a:solidFill>
+            <a:prstDash val="solid"/>
+          </a:ln>
+        </p:spPr>
+      </p:sp>
+      <p:sp>
+        <p:nvSpPr>
+          <p:cNvPr id="11" name="Text 8"/>
+          <p:cNvSpPr txBox="1"/>
+          <p:nvPr/>
+        </p:nvSpPr>
+        <p:spPr>
+          <a:xfrm>
+            <a:off x="4663440" y="2093976"/>
+            <a:ext cx="1874520" cy="329184"/>
+          </a:xfrm>
+          <a:prstGeom prst="rect">
+            <a:avLst/>
+          </a:prstGeom>
+          <a:noFill/>
+          <a:ln/>
+        </p:spPr>
+        <p:txBody>
+          <a:bodyPr wrap="square" lIns="0" tIns="0" rIns="0" bIns="0" rtlCol="0" anchor="ctr"/>
+          <a:lstStyle/>
+          <a:p>
+            <a:pPr indent="0" marL="0">
+              <a:buNone/>
+            </a:pPr>
+            <a:r>
+              <a:rPr lang="en-US" sz="1100" dirty="0">
+                <a:solidFill>
+                  <a:srgbClr val="1D2B2A"/>
+                </a:solidFill>
+                <a:latin typeface="Calibri" pitchFamily="34" charset="0"/>
+                <a:ea typeface="Calibri" pitchFamily="34" charset="-122"/>
+                <a:cs typeface="Calibri" pitchFamily="34" charset="-120"/>
+              </a:rPr>
+              <a:t>Decision: Yes / No</a:t>
+            </a:r>
+            <a:endParaRPr lang="en-US" sz="1100" dirty="0"/>
+          </a:p>
+        </p:txBody>
+      </p:sp>
+      <p:sp>
+        <p:nvSpPr>
+          <p:cNvPr id="12" name="Shape 9"/>
+          <p:cNvSpPr/>
+          <p:nvPr/>
+        </p:nvSpPr>
+        <p:spPr>
+          <a:xfrm>
+            <a:off x="3931920" y="2523744"/>
+            <a:ext cx="640080" cy="329184"/>
+          </a:xfrm>
+          <a:prstGeom prst="flowChartInputOutput">
+            <a:avLst/>
+          </a:prstGeom>
+          <a:solidFill>
+            <a:srgbClr val="E8F0EE"/>
+          </a:solidFill>
+          <a:ln w="12700">
+            <a:solidFill>
+              <a:srgbClr val="0B4F4A"/>
+            </a:solidFill>
+            <a:prstDash val="solid"/>
+          </a:ln>
+        </p:spPr>
+      </p:sp>
+      <p:sp>
+        <p:nvSpPr>
+          <p:cNvPr id="13" name="Text 10"/>
+          <p:cNvSpPr txBox="1"/>
+          <p:nvPr/>
+        </p:nvSpPr>
+        <p:spPr>
+          <a:xfrm>
+            <a:off x="4663440" y="2523744"/>
+            <a:ext cx="1874520" cy="329184"/>
+          </a:xfrm>
+          <a:prstGeom prst="rect">
+            <a:avLst/>
+          </a:prstGeom>
+          <a:noFill/>
+          <a:ln/>
+        </p:spPr>
+        <p:txBody>
+          <a:bodyPr wrap="square" lIns="0" tIns="0" rIns="0" bIns="0" rtlCol="0" anchor="ctr"/>
+          <a:lstStyle/>
+          <a:p>
+            <a:pPr indent="0" marL="0">
+              <a:buNone/>
+            </a:pPr>
+            <a:r>
+              <a:rPr lang="en-US" sz="1100" dirty="0">
+                <a:solidFill>
+                  <a:srgbClr val="1D2B2A"/>
+                </a:solidFill>
+                <a:latin typeface="Calibri" pitchFamily="34" charset="0"/>
+                <a:ea typeface="Calibri" pitchFamily="34" charset="-122"/>
+                <a:cs typeface="Calibri" pitchFamily="34" charset="-120"/>
+              </a:rPr>
+              <a:t>Input / output</a:t>
+            </a:r>
+            <a:endParaRPr lang="en-US" sz="1100" dirty="0"/>
+          </a:p>
+        </p:txBody>
+      </p:sp>
+      <p:sp>
+        <p:nvSpPr>
+          <p:cNvPr id="14" name="Shape 11"/>
+          <p:cNvSpPr/>
+          <p:nvPr/>
+        </p:nvSpPr>
+        <p:spPr>
+          <a:xfrm>
+            <a:off x="3931920" y="2953512"/>
+            <a:ext cx="640080" cy="329184"/>
+          </a:xfrm>
+          <a:prstGeom prst="flowChartPredefinedProcess">
+            <a:avLst/>
+          </a:prstGeom>
+          <a:solidFill>
+            <a:srgbClr val="E8F0EE"/>
+          </a:solidFill>
+          <a:ln w="12700">
+            <a:solidFill>
+              <a:srgbClr val="0B4F4A"/>
+            </a:solidFill>
+            <a:prstDash val="solid"/>
+          </a:ln>
+        </p:spPr>
+      </p:sp>
+      <p:sp>
+        <p:nvSpPr>
+          <p:cNvPr id="15" name="Text 12"/>
+          <p:cNvSpPr txBox="1"/>
+          <p:nvPr/>
+        </p:nvSpPr>
+        <p:spPr>
+          <a:xfrm>
+            <a:off x="4663440" y="2953512"/>
+            <a:ext cx="1874520" cy="329184"/>
+          </a:xfrm>
+          <a:prstGeom prst="rect">
+            <a:avLst/>
+          </a:prstGeom>
+          <a:noFill/>
+          <a:ln/>
+        </p:spPr>
+        <p:txBody>
+          <a:bodyPr wrap="square" lIns="0" tIns="0" rIns="0" bIns="0" rtlCol="0" anchor="ctr"/>
+          <a:lstStyle/>
+          <a:p>
+            <a:pPr indent="0" marL="0">
+              <a:buNone/>
+            </a:pPr>
+            <a:r>
+              <a:rPr lang="en-US" sz="1100" dirty="0">
+                <a:solidFill>
+                  <a:srgbClr val="1D2B2A"/>
+                </a:solidFill>
+                <a:latin typeface="Calibri" pitchFamily="34" charset="0"/>
+                <a:ea typeface="Calibri" pitchFamily="34" charset="-122"/>
+                <a:cs typeface="Calibri" pitchFamily="34" charset="-120"/>
+              </a:rPr>
+              <a:t>A named Bank operation</a:t>
+            </a:r>
+            <a:endParaRPr lang="en-US" sz="1100" dirty="0"/>
+          </a:p>
+        </p:txBody>
+      </p:sp>
+      <p:sp>
+        <p:nvSpPr>
+          <p:cNvPr id="16" name="Shape 13"/>
+          <p:cNvSpPr/>
+          <p:nvPr/>
+        </p:nvSpPr>
+        <p:spPr>
+          <a:xfrm>
+            <a:off x="3931920" y="3383280"/>
+            <a:ext cx="640080" cy="329184"/>
+          </a:xfrm>
+          <a:prstGeom prst="flowChartMagneticDisk">
+            <a:avLst/>
+          </a:prstGeom>
+          <a:solidFill>
+            <a:srgbClr val="E8F0EE"/>
+          </a:solidFill>
+          <a:ln w="12700">
+            <a:solidFill>
+              <a:srgbClr val="0B4F4A"/>
+            </a:solidFill>
+            <a:prstDash val="solid"/>
+          </a:ln>
+        </p:spPr>
+      </p:sp>
+      <p:sp>
+        <p:nvSpPr>
+          <p:cNvPr id="17" name="Text 14"/>
+          <p:cNvSpPr txBox="1"/>
+          <p:nvPr/>
+        </p:nvSpPr>
+        <p:spPr>
+          <a:xfrm>
+            <a:off x="4663440" y="3383280"/>
+            <a:ext cx="1874520" cy="329184"/>
+          </a:xfrm>
+          <a:prstGeom prst="rect">
+            <a:avLst/>
+          </a:prstGeom>
+          <a:noFill/>
+          <a:ln/>
+        </p:spPr>
+        <p:txBody>
+          <a:bodyPr wrap="square" lIns="0" tIns="0" rIns="0" bIns="0" rtlCol="0" anchor="ctr"/>
+          <a:lstStyle/>
+          <a:p>
+            <a:pPr indent="0" marL="0">
+              <a:buNone/>
+            </a:pPr>
+            <a:r>
+              <a:rPr lang="en-US" sz="1100" dirty="0">
+                <a:solidFill>
+                  <a:srgbClr val="1D2B2A"/>
+                </a:solidFill>
+                <a:latin typeface="Calibri" pitchFamily="34" charset="0"/>
+                <a:ea typeface="Calibri" pitchFamily="34" charset="-122"/>
+                <a:cs typeface="Calibri" pitchFamily="34" charset="-120"/>
+              </a:rPr>
+              <a:t>Ledger / audit log</a:t>
+            </a:r>
+            <a:endParaRPr lang="en-US" sz="1100" dirty="0"/>
+          </a:p>
+        </p:txBody>
+      </p:sp>
+      <p:sp>
+        <p:nvSpPr>
+          <p:cNvPr id="18" name="Text 15"/>
+          <p:cNvSpPr txBox="1"/>
+          <p:nvPr/>
+        </p:nvSpPr>
+        <p:spPr>
+          <a:xfrm>
+            <a:off x="6720840" y="1234440"/>
+            <a:ext cx="1965960" cy="2560320"/>
+          </a:xfrm>
+          <a:prstGeom prst="rect">
+            <a:avLst/>
+          </a:prstGeom>
+          <a:noFill/>
+          <a:ln/>
+        </p:spPr>
+        <p:txBody>
+          <a:bodyPr wrap="square" lIns="0" tIns="0" rIns="0" bIns="0" rtlCol="0" anchor="t"/>
+          <a:lstStyle/>
+          <a:p>
+            <a:pPr indent="0" marL="0">
               <a:spcAft>
                 <a:spcPts val="600"/>
               </a:spcAft>
-              <a:buSzPct val="100000"/>
-              <a:buChar char="•"/>
+              <a:buNone/>
             </a:pPr>
             <a:r>
               <a:rPr lang="en-US" sz="1200" dirty="0">
@@ -5661,17 +6823,16 @@
                 <a:ea typeface="Calibri" pitchFamily="34" charset="-122"/>
                 <a:cs typeface="Calibri" pitchFamily="34" charset="-120"/>
               </a:rPr>
-              <a:t>Guided rule checks: 14 real operations, each showing the model's own refusal</a:t>
+              <a:t>1. Program overview</a:t>
             </a:r>
             <a:endParaRPr lang="en-US" sz="1200" dirty="0"/>
           </a:p>
           <a:p>
-            <a:pPr marL="342900" indent="-342900">
+            <a:pPr indent="0" marL="0">
               <a:spcAft>
                 <a:spcPts val="600"/>
               </a:spcAft>
-              <a:buSzPct val="100000"/>
-              <a:buChar char="•"/>
+              <a:buNone/>
             </a:pPr>
             <a:r>
               <a:rPr lang="en-US" sz="1200" dirty="0">
@@ -5682,17 +6843,16 @@
                 <a:ea typeface="Calibri" pitchFamily="34" charset="-122"/>
                 <a:cs typeface="Calibri" pitchFamily="34" charset="-120"/>
               </a:rPr>
-              <a:t>31 forms, including full customer onboarding</a:t>
+              <a:t>2. Onboarding</a:t>
             </a:r>
             <a:endParaRPr lang="en-US" sz="1200" dirty="0"/>
           </a:p>
           <a:p>
-            <a:pPr marL="342900" indent="-342900">
+            <a:pPr indent="0" marL="0">
               <a:spcAft>
                 <a:spcPts val="600"/>
               </a:spcAft>
-              <a:buSzPct val="100000"/>
-              <a:buChar char="•"/>
+              <a:buNone/>
             </a:pPr>
             <a:r>
               <a:rPr lang="en-US" sz="1200" dirty="0">
@@ -5703,17 +6863,16 @@
                 <a:ea typeface="Calibri" pitchFamily="34" charset="-122"/>
                 <a:cs typeface="Calibri" pitchFamily="34" charset="-120"/>
               </a:rPr>
-              <a:t>Customer timeline and time machine for any past date</a:t>
+              <a:t>3. Transfer payment</a:t>
             </a:r>
             <a:endParaRPr lang="en-US" sz="1200" dirty="0"/>
           </a:p>
           <a:p>
-            <a:pPr marL="342900" indent="-342900">
+            <a:pPr indent="0" marL="0">
               <a:spcAft>
                 <a:spcPts val="600"/>
               </a:spcAft>
-              <a:buSzPct val="100000"/>
-              <a:buChar char="•"/>
+              <a:buNone/>
             </a:pPr>
             <a:r>
               <a:rPr lang="en-US" sz="1200" dirty="0">
@@ -5724,17 +6883,16 @@
                 <a:ea typeface="Calibri" pitchFamily="34" charset="-122"/>
                 <a:cs typeface="Calibri" pitchFamily="34" charset="-120"/>
               </a:rPr>
-              <a:t>Card chains, cases, audit log and a zero trial balance</a:t>
+              <a:t>4. Card purchase</a:t>
             </a:r>
             <a:endParaRPr lang="en-US" sz="1200" dirty="0"/>
           </a:p>
           <a:p>
-            <a:pPr marL="342900" indent="-342900">
+            <a:pPr indent="0" marL="0">
               <a:spcAft>
                 <a:spcPts val="600"/>
               </a:spcAft>
-              <a:buSzPct val="100000"/>
-              <a:buChar char="•"/>
+              <a:buNone/>
             </a:pPr>
             <a:r>
               <a:rPr lang="en-US" sz="1200" dirty="0">
@@ -5745,9 +6903,68 @@
                 <a:ea typeface="Calibri" pitchFamily="34" charset="-122"/>
                 <a:cs typeface="Calibri" pitchFamily="34" charset="-120"/>
               </a:rPr>
-              <a:t>GUI classes inherit too: Page -&gt; MasterDetailPage -&gt; CustomersPage</a:t>
+              <a:t>5. Financing lifecycle</a:t>
             </a:r>
             <a:endParaRPr lang="en-US" sz="1200" dirty="0"/>
+          </a:p>
+          <a:p>
+            <a:pPr indent="0" marL="0">
+              <a:spcAft>
+                <a:spcPts val="600"/>
+              </a:spcAft>
+              <a:buNone/>
+            </a:pPr>
+            <a:r>
+              <a:rPr lang="en-US" sz="1200" dirty="0">
+                <a:solidFill>
+                  <a:srgbClr val="1D2B2A"/>
+                </a:solidFill>
+                <a:latin typeface="Calibri" pitchFamily="34" charset="0"/>
+                <a:ea typeface="Calibri" pitchFamily="34" charset="-122"/>
+                <a:cs typeface="Calibri" pitchFamily="34" charset="-120"/>
+              </a:rPr>
+              <a:t>6. Desktop console</a:t>
+            </a:r>
+            <a:endParaRPr lang="en-US" sz="1200" dirty="0"/>
+          </a:p>
+        </p:txBody>
+      </p:sp>
+      <p:sp>
+        <p:nvSpPr>
+          <p:cNvPr id="19" name="Text 16"/>
+          <p:cNvSpPr txBox="1"/>
+          <p:nvPr/>
+        </p:nvSpPr>
+        <p:spPr>
+          <a:xfrm>
+            <a:off x="3931920" y="4069080"/>
+            <a:ext cx="4754880" cy="457200"/>
+          </a:xfrm>
+          <a:prstGeom prst="rect">
+            <a:avLst/>
+          </a:prstGeom>
+          <a:noFill/>
+          <a:ln/>
+        </p:spPr>
+        <p:txBody>
+          <a:bodyPr wrap="square" lIns="0" tIns="0" rIns="0" bIns="0" rtlCol="0" anchor="ctr"/>
+          <a:lstStyle/>
+          <a:p>
+            <a:pPr indent="0" marL="0">
+              <a:buNone/>
+            </a:pPr>
+            <a:r>
+              <a:rPr lang="en-US" sz="1100" i="1" dirty="0">
+                <a:solidFill>
+                  <a:srgbClr val="5B6B69"/>
+                </a:solidFill>
+                <a:latin typeface="Calibri" pitchFamily="34" charset="0"/>
+                <a:ea typeface="Calibri" pitchFamily="34" charset="-122"/>
+                <a:cs typeface="Calibri" pitchFamily="34" charset="-120"/>
+              </a:rPr>
+              <a:t>Report section 4.1 (flowcharts) and 4.2 (state machines)</a:t>
+            </a:r>
+            <a:endParaRPr lang="en-US" sz="1100" dirty="0"/>
           </a:p>
         </p:txBody>
       </p:sp>
@@ -5810,7 +7027,7 @@
               <a:buNone/>
             </a:pPr>
             <a:r>
-              <a:rPr lang="en-US" sz="2200" b="1" dirty="0">
+              <a:rPr lang="en-US" sz="2800" b="1" dirty="0">
                 <a:solidFill>
                   <a:srgbClr val="0B4F4A"/>
                 </a:solidFill>
@@ -5818,127 +7035,112 @@
                 <a:ea typeface="Cambria" pitchFamily="34" charset="-122"/>
                 <a:cs typeface="Cambria" pitchFamily="34" charset="-120"/>
               </a:rPr>
-              <a:t>Code review: 20 defects fixed, each with a test</a:t>
-            </a:r>
-            <a:endParaRPr lang="en-US" sz="2200" dirty="0"/>
-          </a:p>
-        </p:txBody>
-      </p:sp>
-      <p:sp>
-        <p:nvSpPr>
-          <p:cNvPr id="3" name="Shape 1"/>
+              <a:t>Live demo: the desktop console</a:t>
+            </a:r>
+            <a:endParaRPr lang="en-US" sz="2800" dirty="0"/>
+          </a:p>
+        </p:txBody>
+      </p:sp>
+      <p:sp>
+        <p:nvSpPr>
+          <p:cNvPr id="3" name="Text 1"/>
+          <p:cNvSpPr txBox="1"/>
+          <p:nvPr/>
+        </p:nvSpPr>
+        <p:spPr>
+          <a:xfrm>
+            <a:off x="457200" y="804672"/>
+            <a:ext cx="8229600" cy="320040"/>
+          </a:xfrm>
+          <a:prstGeom prst="rect">
+            <a:avLst/>
+          </a:prstGeom>
+          <a:noFill/>
+          <a:ln/>
+        </p:spPr>
+        <p:txBody>
+          <a:bodyPr wrap="square" lIns="0" tIns="0" rIns="0" bIns="0" rtlCol="0" anchor="ctr"/>
+          <a:lstStyle/>
+          <a:p>
+            <a:pPr indent="0" marL="0">
+              <a:buNone/>
+            </a:pPr>
+            <a:r>
+              <a:rPr lang="en-US" sz="1200" i="1" dirty="0">
+                <a:solidFill>
+                  <a:srgbClr val="5B6B69"/>
+                </a:solidFill>
+                <a:latin typeface="Calibri" pitchFamily="34" charset="0"/>
+                <a:ea typeface="Calibri" pitchFamily="34" charset="-122"/>
+                <a:cs typeface="Calibri" pitchFamily="34" charset="-120"/>
+              </a:rPr>
+              <a:t>banking_gui.py - pure Python (Tkinter); every button calls one Bank operation</a:t>
+            </a:r>
+            <a:endParaRPr lang="en-US" sz="1200" dirty="0"/>
+          </a:p>
+        </p:txBody>
+      </p:sp>
+      <p:sp>
+        <p:nvSpPr>
+          <p:cNvPr id="4" name="Shape 2"/>
           <p:cNvSpPr/>
           <p:nvPr/>
         </p:nvSpPr>
         <p:spPr>
           <a:xfrm>
-            <a:off x="457200" y="1097280"/>
-            <a:ext cx="2651760" cy="3566160"/>
+            <a:off x="457200" y="1188720"/>
+            <a:ext cx="5577840" cy="3611880"/>
           </a:xfrm>
           <a:prstGeom prst="roundRect">
             <a:avLst>
-              <a:gd name="adj" fmla="val 2759"/>
+              <a:gd name="adj" fmla="val 2025"/>
             </a:avLst>
           </a:prstGeom>
           <a:solidFill>
-            <a:srgbClr val="0B4F4A"/>
+            <a:srgbClr val="F4F8F7"/>
           </a:solidFill>
           <a:ln w="12700">
             <a:solidFill>
-              <a:srgbClr val="0B4F4A"/>
+              <a:srgbClr val="F4F8F7"/>
             </a:solidFill>
             <a:prstDash val="solid"/>
           </a:ln>
         </p:spPr>
       </p:sp>
-      <p:sp>
-        <p:nvSpPr>
-          <p:cNvPr id="4" name="Text 2"/>
-          <p:cNvSpPr txBox="1"/>
-          <p:nvPr/>
-        </p:nvSpPr>
-        <p:spPr>
-          <a:xfrm>
-            <a:off x="457200" y="1463040"/>
-            <a:ext cx="2651760" cy="1097280"/>
-          </a:xfrm>
-          <a:prstGeom prst="rect">
-            <a:avLst/>
-          </a:prstGeom>
-          <a:noFill/>
-          <a:ln/>
-        </p:spPr>
-        <p:txBody>
-          <a:bodyPr wrap="square" lIns="0" tIns="0" rIns="0" bIns="0" rtlCol="0" anchor="ctr"/>
-          <a:lstStyle/>
-          <a:p>
-            <a:pPr algn="ctr" indent="0" marL="0">
-              <a:buNone/>
-            </a:pPr>
-            <a:r>
-              <a:rPr lang="en-US" sz="6000" b="1" dirty="0">
-                <a:solidFill>
-                  <a:srgbClr val="FFFFFF"/>
-                </a:solidFill>
-                <a:latin typeface="Cambria" pitchFamily="34" charset="0"/>
-                <a:ea typeface="Cambria" pitchFamily="34" charset="-122"/>
-                <a:cs typeface="Cambria" pitchFamily="34" charset="-120"/>
-              </a:rPr>
-              <a:t>20</a:t>
-            </a:r>
-            <a:endParaRPr lang="en-US" sz="6000" dirty="0"/>
-          </a:p>
-        </p:txBody>
-      </p:sp>
-      <p:sp>
-        <p:nvSpPr>
-          <p:cNvPr id="5" name="Text 3"/>
-          <p:cNvSpPr txBox="1"/>
-          <p:nvPr/>
-        </p:nvSpPr>
-        <p:spPr>
-          <a:xfrm>
-            <a:off x="685800" y="2651760"/>
-            <a:ext cx="2194560" cy="1097280"/>
-          </a:xfrm>
-          <a:prstGeom prst="rect">
-            <a:avLst/>
-          </a:prstGeom>
-          <a:noFill/>
-          <a:ln/>
-        </p:spPr>
-        <p:txBody>
-          <a:bodyPr wrap="square" lIns="0" tIns="0" rIns="0" bIns="0" rtlCol="0" anchor="ctr"/>
-          <a:lstStyle/>
-          <a:p>
-            <a:pPr algn="ctr" indent="0" marL="0">
-              <a:buNone/>
-            </a:pPr>
-            <a:r>
-              <a:rPr lang="en-US" sz="1400" dirty="0">
-                <a:solidFill>
-                  <a:srgbClr val="CFE3DF"/>
-                </a:solidFill>
-                <a:latin typeface="Calibri" pitchFamily="34" charset="0"/>
-                <a:ea typeface="Calibri" pitchFamily="34" charset="-122"/>
-                <a:cs typeface="Calibri" pitchFamily="34" charset="-120"/>
-              </a:rPr>
-              <a:t>defects found and fixed, each with a regression test</a:t>
-            </a:r>
-            <a:endParaRPr lang="en-US" sz="1400" dirty="0"/>
-          </a:p>
-        </p:txBody>
-      </p:sp>
-      <p:sp>
-        <p:nvSpPr>
-          <p:cNvPr id="6" name="Text 4"/>
-          <p:cNvSpPr txBox="1"/>
-          <p:nvPr/>
-        </p:nvSpPr>
-        <p:spPr>
-          <a:xfrm>
-            <a:off x="3474720" y="1143000"/>
-            <a:ext cx="5212080" cy="3566160"/>
+      <p:pic>
+        <p:nvPicPr>
+          <p:cNvPr id="5" name="Image 0" descr="/home/user/commercial-banking/docs/screenshots/gui_01_overview.png">    </p:cNvPr>
+          <p:cNvPicPr>
+            <a:picLocks noChangeAspect="1"/>
+          </p:cNvPicPr>
+          <p:nvPr/>
+        </p:nvPicPr>
+        <p:blipFill>
+          <a:blip r:embed="rId1"/>
+          <a:stretch>
+            <a:fillRect/>
+          </a:stretch>
+        </p:blipFill>
+        <p:spPr>
+          <a:xfrm>
+            <a:off x="548640" y="1280160"/>
+            <a:ext cx="5394960" cy="3291840"/>
+          </a:xfrm>
+          <a:prstGeom prst="rect">
+            <a:avLst/>
+          </a:prstGeom>
+        </p:spPr>
+      </p:pic>
+      <p:sp>
+        <p:nvSpPr>
+          <p:cNvPr id="6" name="Text 3"/>
+          <p:cNvSpPr txBox="1"/>
+          <p:nvPr/>
+        </p:nvSpPr>
+        <p:spPr>
+          <a:xfrm>
+            <a:off x="6263640" y="1234440"/>
+            <a:ext cx="2468880" cy="3566160"/>
           </a:xfrm>
           <a:prstGeom prst="rect">
             <a:avLst/>
@@ -5958,7 +7160,7 @@
               <a:buChar char="•"/>
             </a:pPr>
             <a:r>
-              <a:rPr lang="en-US" sz="1350" dirty="0">
+              <a:rPr lang="en-US" sz="1200" dirty="0">
                 <a:solidFill>
                   <a:srgbClr val="1D2B2A"/>
                 </a:solidFill>
@@ -5966,9 +7168,9 @@
                 <a:ea typeface="Calibri" pitchFamily="34" charset="-122"/>
                 <a:cs typeface="Calibri" pitchFamily="34" charset="-120"/>
               </a:rPr>
-              <a:t>A refused loan overpayment still marked installments as paid</a:t>
-            </a:r>
-            <a:endParaRPr lang="en-US" sz="1350" dirty="0"/>
+              <a:t>Guided rule checks: 14 real operations, each showing the model's own refusal</a:t>
+            </a:r>
+            <a:endParaRPr lang="en-US" sz="1200" dirty="0"/>
           </a:p>
           <a:p>
             <a:pPr marL="342900" indent="-342900">
@@ -5979,7 +7181,7 @@
               <a:buChar char="•"/>
             </a:pPr>
             <a:r>
-              <a:rPr lang="en-US" sz="1350" dirty="0">
+              <a:rPr lang="en-US" sz="1200" dirty="0">
                 <a:solidFill>
                   <a:srgbClr val="1D2B2A"/>
                 </a:solidFill>
@@ -5987,9 +7189,9 @@
                 <a:ea typeface="Calibri" pitchFamily="34" charset="-122"/>
                 <a:cs typeface="Calibri" pitchFamily="34" charset="-120"/>
               </a:rPr>
-              <a:t>Resolving a dispute twice refunded the customer twice</a:t>
-            </a:r>
-            <a:endParaRPr lang="en-US" sz="1350" dirty="0"/>
+              <a:t>80 forms: every workflow in the brief, by hand</a:t>
+            </a:r>
+            <a:endParaRPr lang="en-US" sz="1200" dirty="0"/>
           </a:p>
           <a:p>
             <a:pPr marL="342900" indent="-342900">
@@ -6000,7 +7202,7 @@
               <a:buChar char="•"/>
             </a:pPr>
             <a:r>
-              <a:rPr lang="en-US" sz="1350" dirty="0">
+              <a:rPr lang="en-US" sz="1200" dirty="0">
                 <a:solidFill>
                   <a:srgbClr val="1D2B2A"/>
                 </a:solidFill>
@@ -6008,9 +7210,9 @@
                 <a:ea typeface="Calibri" pitchFamily="34" charset="-122"/>
                 <a:cs typeface="Calibri" pitchFamily="34" charset="-120"/>
               </a:rPr>
-              <a:t>Recording an ACTIVE card as found destroyed it</a:t>
-            </a:r>
-            <a:endParaRPr lang="en-US" sz="1350" dirty="0"/>
+              <a:t>Customer timeline and time machine for any past date</a:t>
+            </a:r>
+            <a:endParaRPr lang="en-US" sz="1200" dirty="0"/>
           </a:p>
           <a:p>
             <a:pPr marL="342900" indent="-342900">
@@ -6021,7 +7223,7 @@
               <a:buChar char="•"/>
             </a:pPr>
             <a:r>
-              <a:rPr lang="en-US" sz="1350" dirty="0">
+              <a:rPr lang="en-US" sz="1200" dirty="0">
                 <a:solidFill>
                   <a:srgbClr val="1D2B2A"/>
                 </a:solidFill>
@@ -6029,9 +7231,9 @@
                 <a:ea typeface="Calibri" pitchFamily="34" charset="-122"/>
                 <a:cs typeface="Calibri" pitchFamily="34" charset="-120"/>
               </a:rPr>
-              <a:t>Replacement cards blocked once the product was withdrawn</a:t>
-            </a:r>
-            <a:endParaRPr lang="en-US" sz="1350" dirty="0"/>
+              <a:t>Card chains, cases, audit log and a zero trial balance</a:t>
+            </a:r>
+            <a:endParaRPr lang="en-US" sz="1200" dirty="0"/>
           </a:p>
           <a:p>
             <a:pPr marL="342900" indent="-342900">
@@ -6042,7 +7244,7 @@
               <a:buChar char="•"/>
             </a:pPr>
             <a:r>
-              <a:rPr lang="en-US" sz="1350" dirty="0">
+              <a:rPr lang="en-US" sz="1200" dirty="0">
                 <a:solidFill>
                   <a:srgbClr val="1D2B2A"/>
                 </a:solidFill>
@@ -6050,51 +7252,9 @@
                 <a:ea typeface="Calibri" pitchFamily="34" charset="-122"/>
                 <a:cs typeface="Calibri" pitchFamily="34" charset="-120"/>
               </a:rPr>
-              <a:t>Bank fees used up customers' savings withdrawals</a:t>
-            </a:r>
-            <a:endParaRPr lang="en-US" sz="1350" dirty="0"/>
-          </a:p>
-          <a:p>
-            <a:pPr marL="342900" indent="-342900">
-              <a:spcAft>
-                <a:spcPts val="600"/>
-              </a:spcAft>
-              <a:buSzPct val="100000"/>
-              <a:buChar char="•"/>
-            </a:pPr>
-            <a:r>
-              <a:rPr lang="en-US" sz="1350" dirty="0">
-                <a:solidFill>
-                  <a:srgbClr val="1D2B2A"/>
-                </a:solidFill>
-                <a:latin typeface="Calibri" pitchFamily="34" charset="0"/>
-                <a:ea typeface="Calibri" pitchFamily="34" charset="-122"/>
-                <a:cs typeface="Calibri" pitchFamily="34" charset="-120"/>
-              </a:rPr>
-              <a:t>Account closure ignored holds and pending payments</a:t>
-            </a:r>
-            <a:endParaRPr lang="en-US" sz="1350" dirty="0"/>
-          </a:p>
-          <a:p>
-            <a:pPr marL="342900" indent="-342900">
-              <a:spcAft>
-                <a:spcPts val="600"/>
-              </a:spcAft>
-              <a:buSzPct val="100000"/>
-              <a:buChar char="•"/>
-            </a:pPr>
-            <a:r>
-              <a:rPr lang="en-US" sz="1350" dirty="0">
-                <a:solidFill>
-                  <a:srgbClr val="1D2B2A"/>
-                </a:solidFill>
-                <a:latin typeface="Calibri" pitchFamily="34" charset="0"/>
-                <a:ea typeface="Calibri" pitchFamily="34" charset="-122"/>
-                <a:cs typeface="Calibri" pitchFamily="34" charset="-120"/>
-              </a:rPr>
-              <a:t>No delegated limit on credit approvals</a:t>
-            </a:r>
-            <a:endParaRPr lang="en-US" sz="1350" dirty="0"/>
+              <a:t>GUI classes inherit too: Page -&gt; MasterDetailPage -&gt; CustomersPage</a:t>
+            </a:r>
+            <a:endParaRPr lang="en-US" sz="1200" dirty="0"/>
           </a:p>
         </p:txBody>
       </p:sp>
@@ -6109,6 +7269,353 @@
 <file path=ppt/slides/slide15.xml><?xml version="1.0" encoding="utf-8"?>
 <p:sld xmlns:a="http://schemas.openxmlformats.org/drawingml/2006/main" xmlns:r="http://schemas.openxmlformats.org/officeDocument/2006/relationships" xmlns:p="http://schemas.openxmlformats.org/presentationml/2006/main">
   <p:cSld name="Slide 15">
+    <p:bg>
+      <p:bgPr>
+        <a:solidFill>
+          <a:srgbClr val="FFFFFF"/>
+        </a:solidFill>
+      </p:bgPr>
+    </p:bg>
+    <p:spTree>
+      <p:nvGrpSpPr>
+        <p:cNvPr id="1" name=""/>
+        <p:cNvGrpSpPr/>
+        <p:nvPr/>
+      </p:nvGrpSpPr>
+      <p:grpSpPr>
+        <a:xfrm>
+          <a:off x="0" y="0"/>
+          <a:ext cx="0" cy="0"/>
+          <a:chOff x="0" y="0"/>
+          <a:chExt cx="0" cy="0"/>
+        </a:xfrm>
+      </p:grpSpPr>
+      <p:sp>
+        <p:nvSpPr>
+          <p:cNvPr id="2" name="Text 0"/>
+          <p:cNvSpPr txBox="1"/>
+          <p:nvPr/>
+        </p:nvSpPr>
+        <p:spPr>
+          <a:xfrm>
+            <a:off x="457200" y="274320"/>
+            <a:ext cx="8229600" cy="548640"/>
+          </a:xfrm>
+          <a:prstGeom prst="rect">
+            <a:avLst/>
+          </a:prstGeom>
+          <a:noFill/>
+          <a:ln/>
+        </p:spPr>
+        <p:txBody>
+          <a:bodyPr wrap="square" lIns="0" tIns="0" rIns="0" bIns="0" rtlCol="0" anchor="ctr">
+            <a:normAutofit/>
+          </a:bodyPr>
+          <a:lstStyle/>
+          <a:p>
+            <a:pPr indent="0" marL="0">
+              <a:buNone/>
+            </a:pPr>
+            <a:r>
+              <a:rPr lang="en-US" sz="2200" b="1" dirty="0">
+                <a:solidFill>
+                  <a:srgbClr val="0B4F4A"/>
+                </a:solidFill>
+                <a:latin typeface="Cambria" pitchFamily="34" charset="0"/>
+                <a:ea typeface="Cambria" pitchFamily="34" charset="-122"/>
+                <a:cs typeface="Cambria" pitchFamily="34" charset="-120"/>
+              </a:rPr>
+              <a:t>Code review: 20 defects fixed, each with a test</a:t>
+            </a:r>
+            <a:endParaRPr lang="en-US" sz="2200" dirty="0"/>
+          </a:p>
+        </p:txBody>
+      </p:sp>
+      <p:sp>
+        <p:nvSpPr>
+          <p:cNvPr id="3" name="Shape 1"/>
+          <p:cNvSpPr/>
+          <p:nvPr/>
+        </p:nvSpPr>
+        <p:spPr>
+          <a:xfrm>
+            <a:off x="457200" y="1097280"/>
+            <a:ext cx="2651760" cy="3566160"/>
+          </a:xfrm>
+          <a:prstGeom prst="roundRect">
+            <a:avLst>
+              <a:gd name="adj" fmla="val 2759"/>
+            </a:avLst>
+          </a:prstGeom>
+          <a:solidFill>
+            <a:srgbClr val="0B4F4A"/>
+          </a:solidFill>
+          <a:ln w="12700">
+            <a:solidFill>
+              <a:srgbClr val="0B4F4A"/>
+            </a:solidFill>
+            <a:prstDash val="solid"/>
+          </a:ln>
+        </p:spPr>
+      </p:sp>
+      <p:sp>
+        <p:nvSpPr>
+          <p:cNvPr id="4" name="Text 2"/>
+          <p:cNvSpPr txBox="1"/>
+          <p:nvPr/>
+        </p:nvSpPr>
+        <p:spPr>
+          <a:xfrm>
+            <a:off x="457200" y="1463040"/>
+            <a:ext cx="2651760" cy="1097280"/>
+          </a:xfrm>
+          <a:prstGeom prst="rect">
+            <a:avLst/>
+          </a:prstGeom>
+          <a:noFill/>
+          <a:ln/>
+        </p:spPr>
+        <p:txBody>
+          <a:bodyPr wrap="square" lIns="0" tIns="0" rIns="0" bIns="0" rtlCol="0" anchor="ctr"/>
+          <a:lstStyle/>
+          <a:p>
+            <a:pPr algn="ctr" indent="0" marL="0">
+              <a:buNone/>
+            </a:pPr>
+            <a:r>
+              <a:rPr lang="en-US" sz="6000" b="1" dirty="0">
+                <a:solidFill>
+                  <a:srgbClr val="FFFFFF"/>
+                </a:solidFill>
+                <a:latin typeface="Cambria" pitchFamily="34" charset="0"/>
+                <a:ea typeface="Cambria" pitchFamily="34" charset="-122"/>
+                <a:cs typeface="Cambria" pitchFamily="34" charset="-120"/>
+              </a:rPr>
+              <a:t>20</a:t>
+            </a:r>
+            <a:endParaRPr lang="en-US" sz="6000" dirty="0"/>
+          </a:p>
+        </p:txBody>
+      </p:sp>
+      <p:sp>
+        <p:nvSpPr>
+          <p:cNvPr id="5" name="Text 3"/>
+          <p:cNvSpPr txBox="1"/>
+          <p:nvPr/>
+        </p:nvSpPr>
+        <p:spPr>
+          <a:xfrm>
+            <a:off x="685800" y="2651760"/>
+            <a:ext cx="2194560" cy="1097280"/>
+          </a:xfrm>
+          <a:prstGeom prst="rect">
+            <a:avLst/>
+          </a:prstGeom>
+          <a:noFill/>
+          <a:ln/>
+        </p:spPr>
+        <p:txBody>
+          <a:bodyPr wrap="square" lIns="0" tIns="0" rIns="0" bIns="0" rtlCol="0" anchor="ctr"/>
+          <a:lstStyle/>
+          <a:p>
+            <a:pPr algn="ctr" indent="0" marL="0">
+              <a:buNone/>
+            </a:pPr>
+            <a:r>
+              <a:rPr lang="en-US" sz="1400" dirty="0">
+                <a:solidFill>
+                  <a:srgbClr val="CFE3DF"/>
+                </a:solidFill>
+                <a:latin typeface="Calibri" pitchFamily="34" charset="0"/>
+                <a:ea typeface="Calibri" pitchFamily="34" charset="-122"/>
+                <a:cs typeface="Calibri" pitchFamily="34" charset="-120"/>
+              </a:rPr>
+              <a:t>defects found and fixed, each with a regression test</a:t>
+            </a:r>
+            <a:endParaRPr lang="en-US" sz="1400" dirty="0"/>
+          </a:p>
+        </p:txBody>
+      </p:sp>
+      <p:sp>
+        <p:nvSpPr>
+          <p:cNvPr id="6" name="Text 4"/>
+          <p:cNvSpPr txBox="1"/>
+          <p:nvPr/>
+        </p:nvSpPr>
+        <p:spPr>
+          <a:xfrm>
+            <a:off x="3474720" y="1143000"/>
+            <a:ext cx="5212080" cy="3566160"/>
+          </a:xfrm>
+          <a:prstGeom prst="rect">
+            <a:avLst/>
+          </a:prstGeom>
+          <a:noFill/>
+          <a:ln/>
+        </p:spPr>
+        <p:txBody>
+          <a:bodyPr wrap="square" lIns="635" tIns="635" rIns="635" bIns="635" rtlCol="0" anchor="t"/>
+          <a:lstStyle/>
+          <a:p>
+            <a:pPr marL="342900" indent="-342900">
+              <a:spcAft>
+                <a:spcPts val="600"/>
+              </a:spcAft>
+              <a:buSzPct val="100000"/>
+              <a:buChar char="•"/>
+            </a:pPr>
+            <a:r>
+              <a:rPr lang="en-US" sz="1350" dirty="0">
+                <a:solidFill>
+                  <a:srgbClr val="1D2B2A"/>
+                </a:solidFill>
+                <a:latin typeface="Calibri" pitchFamily="34" charset="0"/>
+                <a:ea typeface="Calibri" pitchFamily="34" charset="-122"/>
+                <a:cs typeface="Calibri" pitchFamily="34" charset="-120"/>
+              </a:rPr>
+              <a:t>A refused loan overpayment still marked installments as paid</a:t>
+            </a:r>
+            <a:endParaRPr lang="en-US" sz="1350" dirty="0"/>
+          </a:p>
+          <a:p>
+            <a:pPr marL="342900" indent="-342900">
+              <a:spcAft>
+                <a:spcPts val="600"/>
+              </a:spcAft>
+              <a:buSzPct val="100000"/>
+              <a:buChar char="•"/>
+            </a:pPr>
+            <a:r>
+              <a:rPr lang="en-US" sz="1350" dirty="0">
+                <a:solidFill>
+                  <a:srgbClr val="1D2B2A"/>
+                </a:solidFill>
+                <a:latin typeface="Calibri" pitchFamily="34" charset="0"/>
+                <a:ea typeface="Calibri" pitchFamily="34" charset="-122"/>
+                <a:cs typeface="Calibri" pitchFamily="34" charset="-120"/>
+              </a:rPr>
+              <a:t>Resolving a dispute twice refunded the customer twice</a:t>
+            </a:r>
+            <a:endParaRPr lang="en-US" sz="1350" dirty="0"/>
+          </a:p>
+          <a:p>
+            <a:pPr marL="342900" indent="-342900">
+              <a:spcAft>
+                <a:spcPts val="600"/>
+              </a:spcAft>
+              <a:buSzPct val="100000"/>
+              <a:buChar char="•"/>
+            </a:pPr>
+            <a:r>
+              <a:rPr lang="en-US" sz="1350" dirty="0">
+                <a:solidFill>
+                  <a:srgbClr val="1D2B2A"/>
+                </a:solidFill>
+                <a:latin typeface="Calibri" pitchFamily="34" charset="0"/>
+                <a:ea typeface="Calibri" pitchFamily="34" charset="-122"/>
+                <a:cs typeface="Calibri" pitchFamily="34" charset="-120"/>
+              </a:rPr>
+              <a:t>Recording an ACTIVE card as found destroyed it</a:t>
+            </a:r>
+            <a:endParaRPr lang="en-US" sz="1350" dirty="0"/>
+          </a:p>
+          <a:p>
+            <a:pPr marL="342900" indent="-342900">
+              <a:spcAft>
+                <a:spcPts val="600"/>
+              </a:spcAft>
+              <a:buSzPct val="100000"/>
+              <a:buChar char="•"/>
+            </a:pPr>
+            <a:r>
+              <a:rPr lang="en-US" sz="1350" dirty="0">
+                <a:solidFill>
+                  <a:srgbClr val="1D2B2A"/>
+                </a:solidFill>
+                <a:latin typeface="Calibri" pitchFamily="34" charset="0"/>
+                <a:ea typeface="Calibri" pitchFamily="34" charset="-122"/>
+                <a:cs typeface="Calibri" pitchFamily="34" charset="-120"/>
+              </a:rPr>
+              <a:t>Replacement cards blocked once the product was withdrawn</a:t>
+            </a:r>
+            <a:endParaRPr lang="en-US" sz="1350" dirty="0"/>
+          </a:p>
+          <a:p>
+            <a:pPr marL="342900" indent="-342900">
+              <a:spcAft>
+                <a:spcPts val="600"/>
+              </a:spcAft>
+              <a:buSzPct val="100000"/>
+              <a:buChar char="•"/>
+            </a:pPr>
+            <a:r>
+              <a:rPr lang="en-US" sz="1350" dirty="0">
+                <a:solidFill>
+                  <a:srgbClr val="1D2B2A"/>
+                </a:solidFill>
+                <a:latin typeface="Calibri" pitchFamily="34" charset="0"/>
+                <a:ea typeface="Calibri" pitchFamily="34" charset="-122"/>
+                <a:cs typeface="Calibri" pitchFamily="34" charset="-120"/>
+              </a:rPr>
+              <a:t>Bank fees used up customers' savings withdrawals</a:t>
+            </a:r>
+            <a:endParaRPr lang="en-US" sz="1350" dirty="0"/>
+          </a:p>
+          <a:p>
+            <a:pPr marL="342900" indent="-342900">
+              <a:spcAft>
+                <a:spcPts val="600"/>
+              </a:spcAft>
+              <a:buSzPct val="100000"/>
+              <a:buChar char="•"/>
+            </a:pPr>
+            <a:r>
+              <a:rPr lang="en-US" sz="1350" dirty="0">
+                <a:solidFill>
+                  <a:srgbClr val="1D2B2A"/>
+                </a:solidFill>
+                <a:latin typeface="Calibri" pitchFamily="34" charset="0"/>
+                <a:ea typeface="Calibri" pitchFamily="34" charset="-122"/>
+                <a:cs typeface="Calibri" pitchFamily="34" charset="-120"/>
+              </a:rPr>
+              <a:t>Account closure ignored holds and pending payments</a:t>
+            </a:r>
+            <a:endParaRPr lang="en-US" sz="1350" dirty="0"/>
+          </a:p>
+          <a:p>
+            <a:pPr marL="342900" indent="-342900">
+              <a:spcAft>
+                <a:spcPts val="600"/>
+              </a:spcAft>
+              <a:buSzPct val="100000"/>
+              <a:buChar char="•"/>
+            </a:pPr>
+            <a:r>
+              <a:rPr lang="en-US" sz="1350" dirty="0">
+                <a:solidFill>
+                  <a:srgbClr val="1D2B2A"/>
+                </a:solidFill>
+                <a:latin typeface="Calibri" pitchFamily="34" charset="0"/>
+                <a:ea typeface="Calibri" pitchFamily="34" charset="-122"/>
+                <a:cs typeface="Calibri" pitchFamily="34" charset="-120"/>
+              </a:rPr>
+              <a:t>No delegated limit on credit approvals</a:t>
+            </a:r>
+            <a:endParaRPr lang="en-US" sz="1350" dirty="0"/>
+          </a:p>
+        </p:txBody>
+      </p:sp>
+    </p:spTree>
+  </p:cSld>
+  <p:clrMapOvr>
+    <a:masterClrMapping/>
+  </p:clrMapOvr>
+</p:sld>
+</file>
+
+<file path=ppt/slides/slide16.xml><?xml version="1.0" encoding="utf-8"?>
+<p:sld xmlns:a="http://schemas.openxmlformats.org/drawingml/2006/main" xmlns:r="http://schemas.openxmlformats.org/officeDocument/2006/relationships" xmlns:p="http://schemas.openxmlformats.org/presentationml/2006/main">
+  <p:cSld name="Slide 16">
     <p:bg>
       <p:bgPr>
         <a:solidFill>
@@ -6670,7 +8177,7 @@
                 <a:ea typeface="Cambria" pitchFamily="34" charset="-122"/>
                 <a:cs typeface="Cambria" pitchFamily="34" charset="-120"/>
               </a:rPr>
-              <a:t>69</a:t>
+              <a:t>71</a:t>
             </a:r>
             <a:endParaRPr lang="en-US" sz="4000" dirty="0"/>
           </a:p>
@@ -6775,7 +8282,7 @@
                 <a:ea typeface="Cambria" pitchFamily="34" charset="-122"/>
                 <a:cs typeface="Cambria" pitchFamily="34" charset="-120"/>
               </a:rPr>
-              <a:t>97</a:t>
+              <a:t>98</a:t>
             </a:r>
             <a:endParaRPr lang="en-US" sz="4000" dirty="0"/>
           </a:p>
@@ -6814,7 +8321,7 @@
                 <a:ea typeface="Calibri" pitchFamily="34" charset="-122"/>
                 <a:cs typeface="Calibri" pitchFamily="34" charset="-120"/>
               </a:rPr>
-              <a:t>Bank operations (79 commands)</a:t>
+              <a:t>Bank operations (80 commands)</a:t>
             </a:r>
             <a:endParaRPr lang="en-US" sz="1300" dirty="0"/>
           </a:p>
@@ -7090,7 +8597,7 @@
                 <a:ea typeface="Cambria" pitchFamily="34" charset="-122"/>
                 <a:cs typeface="Cambria" pitchFamily="34" charset="-120"/>
               </a:rPr>
-              <a:t>70</a:t>
+              <a:t>73</a:t>
             </a:r>
             <a:endParaRPr lang="en-US" sz="4000" dirty="0"/>
           </a:p>
@@ -8535,7 +10042,7 @@
                 <a:ea typeface="Cambria" pitchFamily="34" charset="-122"/>
                 <a:cs typeface="Cambria" pitchFamily="34" charset="-120"/>
               </a:rPr>
-              <a:t>BankTransaction -&gt; CustomerPayment / LoanTransaction</a:t>
+              <a:t>BankTransaction -&gt; CustomerPayment / LoanTransaction / Reversal</a:t>
             </a:r>
             <a:endParaRPr lang="en-US" sz="2200" dirty="0"/>
           </a:p>
@@ -8596,8 +10103,8 @@
         </p:blipFill>
         <p:spPr>
           <a:xfrm>
-            <a:off x="365760" y="1328014"/>
-            <a:ext cx="8412480" cy="2190293"/>
+            <a:off x="365760" y="1377865"/>
+            <a:ext cx="8412480" cy="2090591"/>
           </a:xfrm>
           <a:prstGeom prst="rect">
             <a:avLst/>
@@ -8641,7 +10148,7 @@
                 <a:ea typeface="Calibri" pitchFamily="34" charset="-122"/>
                 <a:cs typeface="Calibri" pitchFamily="34" charset="-120"/>
               </a:rPr>
-              <a:t>CustomerPayment adds initiator, channel, mandate used, 2nd signatory, disputes</a:t>
+              <a:t>CustomerPayment adds initiator, channel, mandate used, 2nd signatory, disputes; Transfer, Card, Bill, OwnAccount add their own facts</a:t>
             </a:r>
             <a:endParaRPr lang="en-US" sz="1250" dirty="0"/>
           </a:p>
@@ -8662,7 +10169,7 @@
                 <a:ea typeface="Calibri" pitchFamily="34" charset="-122"/>
                 <a:cs typeface="Calibri" pitchFamily="34" charset="-120"/>
               </a:rPr>
-              <a:t>Transfer snapshots the beneficiary version; Card the exact card; Bill the biller; OwnAccount the target</a:t>
+              <a:t>LoanTransaction groups disbursement, repayment and interest capitalisation</a:t>
             </a:r>
             <a:endParaRPr lang="en-US" sz="1250" dirty="0"/>
           </a:p>
@@ -8683,7 +10190,7 @@
                 <a:ea typeface="Calibri" pitchFamily="34" charset="-122"/>
                 <a:cs typeface="Calibri" pitchFamily="34" charset="-120"/>
               </a:rPr>
-              <a:t>LoanTransaction groups disbursement, repayment and interest capitalisation</a:t>
+              <a:t>Reversal -&gt; Chargeback: a card reversal claimed from the merchant with a scheme reason code; a MerchantRefund is NOT a reversal</a:t>
             </a:r>
             <a:endParaRPr lang="en-US" sz="1250" dirty="0"/>
           </a:p>
@@ -8817,8 +10324,8 @@
         </p:blipFill>
         <p:spPr>
           <a:xfrm>
-            <a:off x="1908686" y="1234440"/>
-            <a:ext cx="5326628" cy="2377440"/>
+            <a:off x="1958401" y="1234440"/>
+            <a:ext cx="5227198" cy="2377440"/>
           </a:xfrm>
           <a:prstGeom prst="rect">
             <a:avLst/>
@@ -9267,7 +10774,7 @@
                 <a:ea typeface="Calibri" pitchFamily="34" charset="-122"/>
                 <a:cs typeface="Calibri" pitchFamily="34" charset="-120"/>
               </a:rPr>
-              <a:t>Ten in the report; four of the strongest</a:t>
+              <a:t>Fourteen in the report; four of the strongest</a:t>
             </a:r>
             <a:endParaRPr lang="en-US" sz="1200" dirty="0"/>
           </a:p>
@@ -9812,7 +11319,7 @@
                 <a:ea typeface="Courier New" pitchFamily="34" charset="-122"/>
                 <a:cs typeface="Courier New" pitchFamily="34" charset="-120"/>
               </a:rPr>
-              <a:t>reversed = True flag</a:t>
+              <a:t>MerchantRefund(Reversal)</a:t>
             </a:r>
             <a:endParaRPr lang="en-US" sz="1100" dirty="0"/>
           </a:p>
@@ -9851,7 +11358,7 @@
                 <a:ea typeface="Calibri" pitchFamily="34" charset="-122"/>
                 <a:cs typeface="Calibri" pitchFamily="34" charset="-120"/>
               </a:rPr>
-              <a:t>A reversal has its own date, amount, approver and reason, and can be partial.</a:t>
+              <a:t>The merchant starts it, no bank approval, and the purchase stays POSTED: not an undo.</a:t>
             </a:r>
             <a:endParaRPr lang="en-US" sz="1250" dirty="0"/>
           </a:p>

--- a/docs/Viva_Presentation.pptx
+++ b/docs/Viva_Presentation.pptx
@@ -957,7 +957,7 @@
           <a:p>
             <a:r>
               <a:rPr lang="en-US" dirty="0"/>
-              <a:t>Run Operations &gt; Guided rule checks in order. Then Customers: Ayesha's roles as ribbons, and the time machine on 11 April 2026. The GUI contains no business rules: refusals come from the model and name its error class.</a:t>
+              <a:t>Sign in as Kamran (compliance) and show the Overview and a guided check. Then switch user to digital banking: Noor is refused (view only), Hamza starts a PKR 1.2m payment that waits for a 2nd signatory, Ayesha approves it. The GUI contains no business rules: refusals come from the model and name its rule.</a:t>
             </a:r>
             <a:endParaRPr lang="en-US" dirty="0"/>
           </a:p>
@@ -7027,7 +7027,7 @@
               <a:buNone/>
             </a:pPr>
             <a:r>
-              <a:rPr lang="en-US" sz="2800" b="1" dirty="0">
+              <a:rPr lang="en-US" sz="2200" b="1" dirty="0">
                 <a:solidFill>
                   <a:srgbClr val="0B4F4A"/>
                 </a:solidFill>
@@ -7035,9 +7035,9 @@
                 <a:ea typeface="Cambria" pitchFamily="34" charset="-122"/>
                 <a:cs typeface="Cambria" pitchFamily="34" charset="-120"/>
               </a:rPr>
-              <a:t>Live demo: the desktop console</a:t>
-            </a:r>
-            <a:endParaRPr lang="en-US" sz="2800" dirty="0"/>
+              <a:t>Live demo: staff console and digital banking</a:t>
+            </a:r>
+            <a:endParaRPr lang="en-US" sz="2200" dirty="0"/>
           </a:p>
         </p:txBody>
       </p:sp>
@@ -7109,7 +7109,7 @@
       </p:sp>
       <p:pic>
         <p:nvPicPr>
-          <p:cNvPr id="5" name="Image 0" descr="/home/user/commercial-banking/docs/screenshots/gui_01_overview.png">    </p:cNvPr>
+          <p:cNvPr id="5" name="Image 0" descr="/home/user/commercial-banking/docs/screenshots/gui_02_overview.png">    </p:cNvPr>
           <p:cNvPicPr>
             <a:picLocks noChangeAspect="1"/>
           </p:cNvPicPr>
@@ -7168,7 +7168,7 @@
                 <a:ea typeface="Calibri" pitchFamily="34" charset="-122"/>
                 <a:cs typeface="Calibri" pitchFamily="34" charset="-120"/>
               </a:rPr>
-              <a:t>Guided rule checks: 14 real operations, each showing the model's own refusal</a:t>
+              <a:t>Sign in as staff or as a customer; the model checks that person's authority</a:t>
             </a:r>
             <a:endParaRPr lang="en-US" sz="1200" dirty="0"/>
           </a:p>
@@ -7189,7 +7189,7 @@
                 <a:ea typeface="Calibri" pitchFamily="34" charset="-122"/>
                 <a:cs typeface="Calibri" pitchFamily="34" charset="-120"/>
               </a:rPr>
-              <a:t>80 forms: every workflow in the brief, by hand</a:t>
+              <a:t>Staff: forms list what your role may do and record you automatically</a:t>
             </a:r>
             <a:endParaRPr lang="en-US" sz="1200" dirty="0"/>
           </a:p>
@@ -7210,7 +7210,7 @@
                 <a:ea typeface="Calibri" pitchFamily="34" charset="-122"/>
                 <a:cs typeface="Calibri" pitchFamily="34" charset="-120"/>
               </a:rPr>
-              <a:t>Customer timeline and time machine for any past date</a:t>
+              <a:t>Digital banking: own accounts plus companies under a mandate; approvals, cards, disputes</a:t>
             </a:r>
             <a:endParaRPr lang="en-US" sz="1200" dirty="0"/>
           </a:p>
@@ -7231,7 +7231,7 @@
                 <a:ea typeface="Calibri" pitchFamily="34" charset="-122"/>
                 <a:cs typeface="Calibri" pitchFamily="34" charset="-120"/>
               </a:rPr>
-              <a:t>Card chains, cases, audit log and a zero trial balance</a:t>
+              <a:t>80 forms and 14 guided checks cover every workflow in the brief</a:t>
             </a:r>
             <a:endParaRPr lang="en-US" sz="1200" dirty="0"/>
           </a:p>
@@ -7252,7 +7252,7 @@
                 <a:ea typeface="Calibri" pitchFamily="34" charset="-122"/>
                 <a:cs typeface="Calibri" pitchFamily="34" charset="-120"/>
               </a:rPr>
-              <a:t>GUI classes inherit too: Page -&gt; MasterDetailPage -&gt; CustomersPage</a:t>
+              <a:t>GUI classes inherit too: Page -&gt; MasterDetailPage, CustomerView, Chart</a:t>
             </a:r>
             <a:endParaRPr lang="en-US" sz="1200" dirty="0"/>
           </a:p>

--- a/docs/Viva_Presentation.pptx
+++ b/docs/Viva_Presentation.pptx
@@ -2360,7 +2360,7 @@
                 <a:ea typeface="Calibri" pitchFamily="34" charset="-122"/>
                 <a:cs typeface="Calibri" pitchFamily="34" charset="-120"/>
               </a:rPr>
-              <a:t>Name: ____________________</a:t>
+              <a:t>Prepared by: Khizar Rizwan and Bilal Nadeem</a:t>
             </a:r>
             <a:endParaRPr lang="en-US" sz="1300" dirty="0"/>
           </a:p>
@@ -2377,7 +2377,7 @@
                 <a:ea typeface="Calibri" pitchFamily="34" charset="-122"/>
                 <a:cs typeface="Calibri" pitchFamily="34" charset="-120"/>
               </a:rPr>
-              <a:t>Roll number: _____________</a:t>
+              <a:t>Roll numbers: _____________</a:t>
             </a:r>
             <a:endParaRPr lang="en-US" sz="1300" dirty="0"/>
           </a:p>

--- a/docs/Viva_Presentation.pptx
+++ b/docs/Viva_Presentation.pptx
@@ -2360,7 +2360,7 @@
                 <a:ea typeface="Calibri" pitchFamily="34" charset="-122"/>
                 <a:cs typeface="Calibri" pitchFamily="34" charset="-120"/>
               </a:rPr>
-              <a:t>Prepared by: Khizar Rizwan and Bilal Nadeem</a:t>
+              <a:t>Prepared by: Khizar Rizwan</a:t>
             </a:r>
             <a:endParaRPr lang="en-US" sz="1300" dirty="0"/>
           </a:p>
@@ -2377,7 +2377,7 @@
                 <a:ea typeface="Calibri" pitchFamily="34" charset="-122"/>
                 <a:cs typeface="Calibri" pitchFamily="34" charset="-120"/>
               </a:rPr>
-              <a:t>Roll numbers: _____________</a:t>
+              <a:t>Roll number: _____________</a:t>
             </a:r>
             <a:endParaRPr lang="en-US" sz="1300" dirty="0"/>
           </a:p>
@@ -2394,7 +2394,7 @@
                 <a:ea typeface="Calibri" pitchFamily="34" charset="-122"/>
                 <a:cs typeface="Calibri" pitchFamily="34" charset="-120"/>
               </a:rPr>
-              <a:t>Course: __________________</a:t>
+              <a:t>CS2012 Introduction to OOP - Instructor: Bilal Nadeem</a:t>
             </a:r>
             <a:endParaRPr lang="en-US" sz="1300" dirty="0"/>
           </a:p>

--- a/docs/Viva_Presentation.pptx
+++ b/docs/Viva_Presentation.pptx
@@ -2377,7 +2377,7 @@
                 <a:ea typeface="Calibri" pitchFamily="34" charset="-122"/>
                 <a:cs typeface="Calibri" pitchFamily="34" charset="-120"/>
               </a:rPr>
-              <a:t>Roll number: _____________</a:t>
+              <a:t>Roll number: 25L-5668</a:t>
             </a:r>
             <a:endParaRPr lang="en-US" sz="1300" dirty="0"/>
           </a:p>

--- a/docs/Viva_Presentation.pptx
+++ b/docs/Viva_Presentation.pptx
@@ -7773,7 +7773,7 @@
                 <a:ea typeface="Calibri" pitchFamily="34" charset="-122"/>
                 <a:cs typeface="Calibri" pitchFamily="34" charset="-120"/>
               </a:rPr>
-              <a:t>In-memory storage</a:t>
+              <a:t>One JSON file, no database</a:t>
             </a:r>
             <a:endParaRPr lang="en-US" sz="1400" dirty="0"/>
           </a:p>
@@ -8216,7 +8216,7 @@
                 <a:ea typeface="Calibri" pitchFamily="34" charset="-122"/>
                 <a:cs typeface="Calibri" pitchFamily="34" charset="-120"/>
               </a:rPr>
-              <a:t>business classes (+6 supporting)</a:t>
+              <a:t>business classes (+9 supporting)</a:t>
             </a:r>
             <a:endParaRPr lang="en-US" sz="1300" dirty="0"/>
           </a:p>
@@ -8597,7 +8597,7 @@
                 <a:ea typeface="Cambria" pitchFamily="34" charset="-122"/>
                 <a:cs typeface="Cambria" pitchFamily="34" charset="-120"/>
               </a:rPr>
-              <a:t>73</a:t>
+              <a:t>77</a:t>
             </a:r>
             <a:endParaRPr lang="en-US" sz="4000" dirty="0"/>
           </a:p>

--- a/docs/Viva_Presentation.pptx
+++ b/docs/Viva_Presentation.pptx
@@ -26,9 +26,10 @@
     <p:sldId id="274" r:id="rId20"/>
     <p:sldId id="275" r:id="rId21"/>
     <p:sldId id="276" r:id="rId22"/>
+    <p:sldId id="277" r:id="rId23"/>
   </p:sldIdLst>
   <p:notesMasterIdLst>
-    <p:notesMasterId r:id="rId23"/>
+    <p:notesMasterId r:id="rId24"/>
   </p:notesMasterIdLst>
   <p:sldSz cx="9144000" cy="5143500"/>
   <p:notesSz cx="5143500" cy="9144000"/>
@@ -1402,7 +1403,7 @@
           <a:p>
             <a:r>
               <a:rPr lang="en-US" dirty="0"/>
-              <a:t>Follow the demo path in docs/Final_Presentation_Script.md. Sign in as Kamran (compliance) and show the Overview and a guided check. Then switch user to digital banking: Noor is refused (view only), Hamza starts a PKR 1.2m payment that waits for a 2nd signatory, Ayesha approves it. The GUI contains no business rules: refusals come from the model and name its rule.</a:t>
+              <a:t>Every piece a library would normally give me is a small class I can explain: an exact fraction for money, the Gregorian calendar for dates, my own abstract-class check, a JSON reader with one method per grammar rule, and an xUnit-style test runner. Money is a subclass of Exact: it inherits the arithmetic and only adds paisa rounding. The research added two checks banks run before money moves: IBAN check digits (mod 97) and the Luhn digit on card numbers, and the bank keeps only six plus four card digits.</a:t>
             </a:r>
             <a:endParaRPr lang="en-US" dirty="0"/>
           </a:p>
@@ -1578,7 +1579,7 @@
           <a:p>
             <a:r>
               <a:rPr lang="en-US" dirty="0"/>
-              <a:t>Full table in docs/Code_Review.md. Every fix is protected by a test, so it cannot silently come back.</a:t>
+              <a:t>Follow the demo path in docs/Final_Presentation_Script.md. Sign in as Kamran (compliance) and show the Overview and a guided check. Then switch user to digital banking: Noor is refused (view only), Hamza starts a PKR 1.2m payment that waits for a 2nd signatory, Ayesha approves it. The GUI contains no business rules: refusals come from the model and name its rule.</a:t>
             </a:r>
             <a:endParaRPr lang="en-US" dirty="0"/>
           </a:p>
@@ -1666,7 +1667,7 @@
           <a:p>
             <a:r>
               <a:rPr lang="en-US" dirty="0"/>
-              <a:t>The Arrangement level is where the design pays off for new business models: an Ijarah or Murabaha contract is a new kind of arrangement, not a change to existing classes.</a:t>
+              <a:t>Full table in docs/Code_Review.md. Every fix is protected by a test, so it cannot silently come back.</a:t>
             </a:r>
             <a:endParaRPr lang="en-US" dirty="0"/>
           </a:p>
@@ -1690,6 +1691,94 @@
             <a:fld id="{F7021451-1387-4CA6-816F-3879F97B5CBC}" type="slidenum">
               <a:rPr lang="en-US"/>
               <a:t>21</a:t>
+            </a:fld>
+            <a:endParaRPr lang="en-US"/>
+          </a:p>
+        </p:txBody>
+      </p:sp>
+    </p:spTree>
+    <p:extLst>
+      <p:ext uri="{BB962C8B-B14F-4D97-AF65-F5344CB8AC3E}">
+        <p14:creationId xmlns:p14="http://schemas.microsoft.com/office/powerpoint/2010/main" val="1024086991"/>
+      </p:ext>
+    </p:extLst>
+  </p:cSld>
+  <p:clrMapOvr>
+    <a:masterClrMapping/>
+  </p:clrMapOvr>
+</p:notes>
+</file>
+
+<file path=ppt/notesSlides/notesSlide22.xml><?xml version="1.0" encoding="utf-8"?>
+<p:notes xmlns:a="http://schemas.openxmlformats.org/drawingml/2006/main" xmlns:r="http://schemas.openxmlformats.org/officeDocument/2006/relationships" xmlns:p="http://schemas.openxmlformats.org/presentationml/2006/main">
+  <p:cSld>
+    <p:spTree>
+      <p:nvGrpSpPr>
+        <p:cNvPr id="1" name=""/>
+        <p:cNvGrpSpPr/>
+        <p:nvPr/>
+      </p:nvGrpSpPr>
+      <p:grpSpPr>
+        <a:xfrm>
+          <a:off x="0" y="0"/>
+          <a:ext cx="0" cy="0"/>
+          <a:chOff x="0" y="0"/>
+          <a:chExt cx="0" cy="0"/>
+        </a:xfrm>
+      </p:grpSpPr>
+      <p:sp>
+        <p:nvSpPr>
+          <p:cNvPr id="2" name="Slide Image Placeholder 1"/>
+          <p:cNvSpPr>
+            <a:spLocks noGrp="1" noRot="1" noChangeAspect="1"/>
+          </p:cNvSpPr>
+          <p:nvPr>
+            <p:ph type="sldImg"/>
+          </p:nvPr>
+        </p:nvSpPr>
+        <p:spPr/>
+      </p:sp>
+      <p:sp>
+        <p:nvSpPr>
+          <p:cNvPr id="3" name="Notes Placeholder 2"/>
+          <p:cNvSpPr>
+            <a:spLocks noGrp="1"/>
+          </p:cNvSpPr>
+          <p:nvPr>
+            <p:ph type="body" idx="1"/>
+          </p:nvPr>
+        </p:nvSpPr>
+        <p:spPr/>
+        <p:txBody>
+          <a:bodyPr/>
+          <a:lstStyle/>
+          <a:p>
+            <a:r>
+              <a:rPr lang="en-US" dirty="0"/>
+              <a:t>The Arrangement level is where the design pays off for new business models: an Ijarah or Murabaha contract is a new kind of arrangement, not a change to existing classes.</a:t>
+            </a:r>
+            <a:endParaRPr lang="en-US" dirty="0"/>
+          </a:p>
+        </p:txBody>
+      </p:sp>
+      <p:sp>
+        <p:nvSpPr>
+          <p:cNvPr id="4" name="Slide Number Placeholder 3"/>
+          <p:cNvSpPr>
+            <a:spLocks noGrp="1"/>
+          </p:cNvSpPr>
+          <p:nvPr>
+            <p:ph type="sldNum" sz="quarter" idx="10"/>
+          </p:nvPr>
+        </p:nvSpPr>
+        <p:spPr/>
+        <p:txBody>
+          <a:bodyPr/>
+          <a:lstStyle/>
+          <a:p>
+            <a:fld id="{F7021451-1387-4CA6-816F-3879F97B5CBC}" type="slidenum">
+              <a:rPr lang="en-US"/>
+              <a:t>22</a:t>
             </a:fld>
             <a:endParaRPr lang="en-US"/>
           </a:p>
@@ -1754,7 +1843,7 @@
           <a:p>
             <a:r>
               <a:rPr lang="en-US" dirty="0"/>
-              <a:t>Name each source and the one thing it taught. Only claim sources you have actually read.</a:t>
+              <a:t>Name each source and the one thing it taught. The four standards behind the code (IBAN, card numbers, PCI DSS, and the references for the building blocks) come later, on the no-libraries slide. Only claim sources you have actually read.</a:t>
             </a:r>
             <a:endParaRPr lang="en-US" dirty="0"/>
           </a:p>
@@ -1842,7 +1931,7 @@
           <a:p>
             <a:r>
               <a:rPr lang="en-US" dirty="0"/>
-              <a:t>Eight first ideas changed (report section 1, last table). These four are the clearest to explain.</a:t>
+              <a:t>Ten first ideas changed (report section 1, last table). These five are the clearest to explain.</a:t>
             </a:r>
             <a:endParaRPr lang="en-US" dirty="0"/>
           </a:p>
@@ -1930,7 +2019,7 @@
           <a:p>
             <a:r>
               <a:rPr lang="en-US" dirty="0"/>
-              <a:t>The brief asks for at least 30 classes and 30 meaningful operations. Even counting only the 48 classes with behaviour of their own and the 80 state-changing commands, the model is above the minimum. The trial balance is zero at the end of the demo, so no scenario created or lost money.</a:t>
+              <a:t>The brief asks for at least 30 classes and 30 meaningful operations. Even counting only the 51 classes with behaviour of their own and the 80 state-changing commands, the model is above the minimum. The trial balance is zero at the end of the demo, so no scenario created or lost money.</a:t>
             </a:r>
             <a:endParaRPr lang="en-US" dirty="0"/>
           </a:p>
@@ -9077,7 +9166,28 @@
                 <a:ea typeface="Calibri" pitchFamily="34" charset="-122"/>
                 <a:cs typeface="Calibri" pitchFamily="34" charset="-120"/>
               </a:rPr>
-              <a:t>Links saved as references; an exact round trip of 1,366 objects</a:t>
+              <a:t>Links saved as references; an exact round trip of 1,375 objects</a:t>
+            </a:r>
+            <a:endParaRPr lang="en-US" sz="1300" dirty="0"/>
+          </a:p>
+          <a:p>
+            <a:pPr marL="342900" indent="-342900">
+              <a:spcAft>
+                <a:spcPts val="600"/>
+              </a:spcAft>
+              <a:buSzPct val="100000"/>
+              <a:buChar char="•"/>
+            </a:pPr>
+            <a:r>
+              <a:rPr lang="en-US" sz="1300" dirty="0">
+                <a:solidFill>
+                  <a:srgbClr val="1D2B2A"/>
+                </a:solidFill>
+                <a:latin typeface="Calibri" pitchFamily="34" charset="0"/>
+                <a:ea typeface="Calibri" pitchFamily="34" charset="-122"/>
+                <a:cs typeface="Calibri" pitchFamily="34" charset="-120"/>
+              </a:rPr>
+              <a:t>JSON written and read by the model's own Json and JsonReader</a:t>
             </a:r>
             <a:endParaRPr lang="en-US" sz="1300" dirty="0"/>
           </a:p>
@@ -9301,7 +9411,7 @@
                 <a:ea typeface="Cambria" pitchFamily="34" charset="-122"/>
                 <a:cs typeface="Cambria" pitchFamily="34" charset="-120"/>
               </a:rPr>
-              <a:t>Live demo: staff console and digital banking</a:t>
+              <a:t>No libraries: the building blocks are classes too</a:t>
             </a:r>
             <a:endParaRPr lang="en-US" sz="2200" dirty="0"/>
           </a:p>
@@ -9340,73 +9450,1123 @@
                 <a:ea typeface="Calibri" pitchFamily="34" charset="-122"/>
                 <a:cs typeface="Calibri" pitchFamily="34" charset="-120"/>
               </a:rPr>
-              <a:t>banking_gui.py - pure Python (Tkinter); every button calls one Bank operation</a:t>
+              <a:t>banking_system.py imports only sys; a test reads the file's own source to prove it</a:t>
             </a:r>
             <a:endParaRPr lang="en-US" sz="1200" dirty="0"/>
           </a:p>
         </p:txBody>
       </p:sp>
-      <p:sp>
-        <p:nvSpPr>
-          <p:cNvPr id="4" name="Shape 2"/>
+      <p:graphicFrame>
+        <p:nvGraphicFramePr>
+          <p:cNvPr id="20" name="Table 0"/>
+          <p:cNvGraphicFramePr>
+            <a:graphicFrameLocks noGrp="1"/>
+          </p:cNvGraphicFramePr>
+          <p:nvPr>
+            <p:extLst>
+              <p:ext uri="{D42A27DB-BD31-4B8C-83A1-F6EECF244321}">
+                <p14:modId xmlns:p14="http://schemas.microsoft.com/office/powerpoint/2010/main" val="1579011935"/>
+              </p:ext>
+            </p:extLst>
+          </p:nvPr>
+        </p:nvGraphicFramePr>
+        <p:xfrm>
+          <a:off x="457200" y="1280160"/>
+          <a:ext cx="3931920" cy="914400"/>
+        </p:xfrm>
+        <a:graphic>
+          <a:graphicData uri="http://schemas.openxmlformats.org/drawingml/2006/table">
+            <a:tbl>
+              <a:tblPr/>
+              <a:tblGrid>
+                <a:gridCol w="2377440"/>
+                <a:gridCol w="1554480"/>
+              </a:tblGrid>
+              <a:tr h="420624">
+                <a:tc>
+                  <a:txBody>
+                    <a:bodyPr/>
+                    <a:lstStyle/>
+                    <a:p>
+                      <a:pPr indent="0" marL="0">
+                        <a:buNone/>
+                      </a:pPr>
+                      <a:r>
+                        <a:rPr lang="en-US" sz="1200" b="1" dirty="0">
+                          <a:solidFill>
+                            <a:srgbClr val="FFFFFF"/>
+                          </a:solidFill>
+                          <a:latin typeface="Calibri" pitchFamily="34" charset="0"/>
+                          <a:ea typeface="Calibri" pitchFamily="34" charset="-122"/>
+                          <a:cs typeface="Calibri" pitchFamily="34" charset="-120"/>
+                        </a:rPr>
+                        <a:t>Own class</a:t>
+                      </a:r>
+                      <a:endParaRPr lang="en-US" sz="1200" dirty="0">
+                        <a:latin typeface="Calibri" charset="0"/>
+                        <a:ea typeface="Calibri" charset="0"/>
+                        <a:cs typeface="Calibri" charset="0"/>
+                      </a:endParaRPr>
+                    </a:p>
+                  </a:txBody>
+                  <a:tcPr marL="91440" marR="91440" marT="45720" marB="45720" anchor="ctr">
+                    <a:lnL w="6350" cap="flat" cmpd="sng" algn="ctr">
+                      <a:solidFill>
+                        <a:srgbClr val="D5E0DD"/>
+                      </a:solidFill>
+                      <a:prstDash val="solid"/>
+                      <a:round/>
+                      <a:headEnd type="none" w="med" len="med"/>
+                      <a:tailEnd type="none" w="med" len="med"/>
+                    </a:lnL>
+                    <a:lnR w="6350" cap="flat" cmpd="sng" algn="ctr">
+                      <a:solidFill>
+                        <a:srgbClr val="D5E0DD"/>
+                      </a:solidFill>
+                      <a:prstDash val="solid"/>
+                      <a:round/>
+                      <a:headEnd type="none" w="med" len="med"/>
+                      <a:tailEnd type="none" w="med" len="med"/>
+                    </a:lnR>
+                    <a:lnT w="6350" cap="flat" cmpd="sng" algn="ctr">
+                      <a:solidFill>
+                        <a:srgbClr val="D5E0DD"/>
+                      </a:solidFill>
+                      <a:prstDash val="solid"/>
+                      <a:round/>
+                      <a:headEnd type="none" w="med" len="med"/>
+                      <a:tailEnd type="none" w="med" len="med"/>
+                    </a:lnT>
+                    <a:lnB w="6350" cap="flat" cmpd="sng" algn="ctr">
+                      <a:solidFill>
+                        <a:srgbClr val="D5E0DD"/>
+                      </a:solidFill>
+                      <a:prstDash val="solid"/>
+                      <a:round/>
+                      <a:headEnd type="none" w="med" len="med"/>
+                      <a:tailEnd type="none" w="med" len="med"/>
+                    </a:lnB>
+                    <a:solidFill>
+                      <a:srgbClr val="0B4F4A"/>
+                    </a:solidFill>
+                  </a:tcPr>
+                </a:tc>
+                <a:tc>
+                  <a:txBody>
+                    <a:bodyPr/>
+                    <a:lstStyle/>
+                    <a:p>
+                      <a:pPr indent="0" marL="0">
+                        <a:buNone/>
+                      </a:pPr>
+                      <a:r>
+                        <a:rPr lang="en-US" sz="1200" b="1" dirty="0">
+                          <a:solidFill>
+                            <a:srgbClr val="FFFFFF"/>
+                          </a:solidFill>
+                          <a:latin typeface="Calibri" pitchFamily="34" charset="0"/>
+                          <a:ea typeface="Calibri" pitchFamily="34" charset="-122"/>
+                          <a:cs typeface="Calibri" pitchFamily="34" charset="-120"/>
+                        </a:rPr>
+                        <a:t>Instead of</a:t>
+                      </a:r>
+                      <a:endParaRPr lang="en-US" sz="1200" dirty="0">
+                        <a:latin typeface="Calibri" charset="0"/>
+                        <a:ea typeface="Calibri" charset="0"/>
+                        <a:cs typeface="Calibri" charset="0"/>
+                      </a:endParaRPr>
+                    </a:p>
+                  </a:txBody>
+                  <a:tcPr marL="91440" marR="91440" marT="45720" marB="45720" anchor="ctr">
+                    <a:lnL w="6350" cap="flat" cmpd="sng" algn="ctr">
+                      <a:solidFill>
+                        <a:srgbClr val="D5E0DD"/>
+                      </a:solidFill>
+                      <a:prstDash val="solid"/>
+                      <a:round/>
+                      <a:headEnd type="none" w="med" len="med"/>
+                      <a:tailEnd type="none" w="med" len="med"/>
+                    </a:lnL>
+                    <a:lnR w="6350" cap="flat" cmpd="sng" algn="ctr">
+                      <a:solidFill>
+                        <a:srgbClr val="D5E0DD"/>
+                      </a:solidFill>
+                      <a:prstDash val="solid"/>
+                      <a:round/>
+                      <a:headEnd type="none" w="med" len="med"/>
+                      <a:tailEnd type="none" w="med" len="med"/>
+                    </a:lnR>
+                    <a:lnT w="6350" cap="flat" cmpd="sng" algn="ctr">
+                      <a:solidFill>
+                        <a:srgbClr val="D5E0DD"/>
+                      </a:solidFill>
+                      <a:prstDash val="solid"/>
+                      <a:round/>
+                      <a:headEnd type="none" w="med" len="med"/>
+                      <a:tailEnd type="none" w="med" len="med"/>
+                    </a:lnT>
+                    <a:lnB w="6350" cap="flat" cmpd="sng" algn="ctr">
+                      <a:solidFill>
+                        <a:srgbClr val="D5E0DD"/>
+                      </a:solidFill>
+                      <a:prstDash val="solid"/>
+                      <a:round/>
+                      <a:headEnd type="none" w="med" len="med"/>
+                      <a:tailEnd type="none" w="med" len="med"/>
+                    </a:lnB>
+                    <a:solidFill>
+                      <a:srgbClr val="0B4F4A"/>
+                    </a:solidFill>
+                  </a:tcPr>
+                </a:tc>
+              </a:tr>
+              <a:tr h="420624">
+                <a:tc>
+                  <a:txBody>
+                    <a:bodyPr/>
+                    <a:lstStyle/>
+                    <a:p>
+                      <a:pPr indent="0" marL="0">
+                        <a:buNone/>
+                      </a:pPr>
+                      <a:r>
+                        <a:rPr lang="en-US" sz="1200" dirty="0">
+                          <a:solidFill>
+                            <a:srgbClr val="1D2B2A"/>
+                          </a:solidFill>
+                          <a:latin typeface="Calibri" pitchFamily="34" charset="0"/>
+                          <a:ea typeface="Calibri" pitchFamily="34" charset="-122"/>
+                          <a:cs typeface="Calibri" pitchFamily="34" charset="-120"/>
+                        </a:rPr>
+                        <a:t>Exact → Money</a:t>
+                      </a:r>
+                      <a:endParaRPr lang="en-US" sz="1200" dirty="0">
+                        <a:latin typeface="Calibri" charset="0"/>
+                        <a:ea typeface="Calibri" charset="0"/>
+                        <a:cs typeface="Calibri" charset="0"/>
+                      </a:endParaRPr>
+                    </a:p>
+                  </a:txBody>
+                  <a:tcPr marL="91440" marR="91440" marT="45720" marB="45720" anchor="ctr">
+                    <a:lnL w="6350" cap="flat" cmpd="sng" algn="ctr">
+                      <a:solidFill>
+                        <a:srgbClr val="D5E0DD"/>
+                      </a:solidFill>
+                      <a:prstDash val="solid"/>
+                      <a:round/>
+                      <a:headEnd type="none" w="med" len="med"/>
+                      <a:tailEnd type="none" w="med" len="med"/>
+                    </a:lnL>
+                    <a:lnR w="6350" cap="flat" cmpd="sng" algn="ctr">
+                      <a:solidFill>
+                        <a:srgbClr val="D5E0DD"/>
+                      </a:solidFill>
+                      <a:prstDash val="solid"/>
+                      <a:round/>
+                      <a:headEnd type="none" w="med" len="med"/>
+                      <a:tailEnd type="none" w="med" len="med"/>
+                    </a:lnR>
+                    <a:lnT w="6350" cap="flat" cmpd="sng" algn="ctr">
+                      <a:solidFill>
+                        <a:srgbClr val="D5E0DD"/>
+                      </a:solidFill>
+                      <a:prstDash val="solid"/>
+                      <a:round/>
+                      <a:headEnd type="none" w="med" len="med"/>
+                      <a:tailEnd type="none" w="med" len="med"/>
+                    </a:lnT>
+                    <a:lnB w="6350" cap="flat" cmpd="sng" algn="ctr">
+                      <a:solidFill>
+                        <a:srgbClr val="D5E0DD"/>
+                      </a:solidFill>
+                      <a:prstDash val="solid"/>
+                      <a:round/>
+                      <a:headEnd type="none" w="med" len="med"/>
+                      <a:tailEnd type="none" w="med" len="med"/>
+                    </a:lnB>
+                    <a:solidFill>
+                      <a:srgbClr val="F4F8F7"/>
+                    </a:solidFill>
+                  </a:tcPr>
+                </a:tc>
+                <a:tc>
+                  <a:txBody>
+                    <a:bodyPr/>
+                    <a:lstStyle/>
+                    <a:p>
+                      <a:pPr indent="0" marL="0">
+                        <a:buNone/>
+                      </a:pPr>
+                      <a:r>
+                        <a:rPr lang="en-US" sz="1200" dirty="0">
+                          <a:solidFill>
+                            <a:srgbClr val="1D2B2A"/>
+                          </a:solidFill>
+                          <a:latin typeface="Courier New" pitchFamily="34" charset="0"/>
+                          <a:ea typeface="Courier New" pitchFamily="34" charset="-122"/>
+                          <a:cs typeface="Courier New" pitchFamily="34" charset="-120"/>
+                        </a:rPr>
+                        <a:t>decimal</a:t>
+                      </a:r>
+                      <a:endParaRPr lang="en-US" sz="1200" dirty="0">
+                        <a:latin typeface="Courier New" charset="0"/>
+                        <a:ea typeface="Courier New" charset="0"/>
+                        <a:cs typeface="Courier New" charset="0"/>
+                      </a:endParaRPr>
+                    </a:p>
+                  </a:txBody>
+                  <a:tcPr marL="91440" marR="91440" marT="45720" marB="45720" anchor="ctr">
+                    <a:lnL w="6350" cap="flat" cmpd="sng" algn="ctr">
+                      <a:solidFill>
+                        <a:srgbClr val="D5E0DD"/>
+                      </a:solidFill>
+                      <a:prstDash val="solid"/>
+                      <a:round/>
+                      <a:headEnd type="none" w="med" len="med"/>
+                      <a:tailEnd type="none" w="med" len="med"/>
+                    </a:lnL>
+                    <a:lnR w="6350" cap="flat" cmpd="sng" algn="ctr">
+                      <a:solidFill>
+                        <a:srgbClr val="D5E0DD"/>
+                      </a:solidFill>
+                      <a:prstDash val="solid"/>
+                      <a:round/>
+                      <a:headEnd type="none" w="med" len="med"/>
+                      <a:tailEnd type="none" w="med" len="med"/>
+                    </a:lnR>
+                    <a:lnT w="6350" cap="flat" cmpd="sng" algn="ctr">
+                      <a:solidFill>
+                        <a:srgbClr val="D5E0DD"/>
+                      </a:solidFill>
+                      <a:prstDash val="solid"/>
+                      <a:round/>
+                      <a:headEnd type="none" w="med" len="med"/>
+                      <a:tailEnd type="none" w="med" len="med"/>
+                    </a:lnT>
+                    <a:lnB w="6350" cap="flat" cmpd="sng" algn="ctr">
+                      <a:solidFill>
+                        <a:srgbClr val="D5E0DD"/>
+                      </a:solidFill>
+                      <a:prstDash val="solid"/>
+                      <a:round/>
+                      <a:headEnd type="none" w="med" len="med"/>
+                      <a:tailEnd type="none" w="med" len="med"/>
+                    </a:lnB>
+                    <a:solidFill>
+                      <a:srgbClr val="F4F8F7"/>
+                    </a:solidFill>
+                  </a:tcPr>
+                </a:tc>
+              </a:tr>
+              <a:tr h="420624">
+                <a:tc>
+                  <a:txBody>
+                    <a:bodyPr/>
+                    <a:lstStyle/>
+                    <a:p>
+                      <a:pPr indent="0" marL="0">
+                        <a:buNone/>
+                      </a:pPr>
+                      <a:r>
+                        <a:rPr lang="en-US" sz="1200" dirty="0">
+                          <a:solidFill>
+                            <a:srgbClr val="1D2B2A"/>
+                          </a:solidFill>
+                          <a:latin typeface="Calibri" pitchFamily="34" charset="0"/>
+                          <a:ea typeface="Calibri" pitchFamily="34" charset="-122"/>
+                          <a:cs typeface="Calibri" pitchFamily="34" charset="-120"/>
+                        </a:rPr>
+                        <a:t>Date, Days</a:t>
+                      </a:r>
+                      <a:endParaRPr lang="en-US" sz="1200" dirty="0">
+                        <a:latin typeface="Calibri" charset="0"/>
+                        <a:ea typeface="Calibri" charset="0"/>
+                        <a:cs typeface="Calibri" charset="0"/>
+                      </a:endParaRPr>
+                    </a:p>
+                  </a:txBody>
+                  <a:tcPr marL="91440" marR="91440" marT="45720" marB="45720" anchor="ctr">
+                    <a:lnL w="6350" cap="flat" cmpd="sng" algn="ctr">
+                      <a:solidFill>
+                        <a:srgbClr val="D5E0DD"/>
+                      </a:solidFill>
+                      <a:prstDash val="solid"/>
+                      <a:round/>
+                      <a:headEnd type="none" w="med" len="med"/>
+                      <a:tailEnd type="none" w="med" len="med"/>
+                    </a:lnL>
+                    <a:lnR w="6350" cap="flat" cmpd="sng" algn="ctr">
+                      <a:solidFill>
+                        <a:srgbClr val="D5E0DD"/>
+                      </a:solidFill>
+                      <a:prstDash val="solid"/>
+                      <a:round/>
+                      <a:headEnd type="none" w="med" len="med"/>
+                      <a:tailEnd type="none" w="med" len="med"/>
+                    </a:lnR>
+                    <a:lnT w="6350" cap="flat" cmpd="sng" algn="ctr">
+                      <a:solidFill>
+                        <a:srgbClr val="D5E0DD"/>
+                      </a:solidFill>
+                      <a:prstDash val="solid"/>
+                      <a:round/>
+                      <a:headEnd type="none" w="med" len="med"/>
+                      <a:tailEnd type="none" w="med" len="med"/>
+                    </a:lnT>
+                    <a:lnB w="6350" cap="flat" cmpd="sng" algn="ctr">
+                      <a:solidFill>
+                        <a:srgbClr val="D5E0DD"/>
+                      </a:solidFill>
+                      <a:prstDash val="solid"/>
+                      <a:round/>
+                      <a:headEnd type="none" w="med" len="med"/>
+                      <a:tailEnd type="none" w="med" len="med"/>
+                    </a:lnB>
+                    <a:solidFill>
+                      <a:srgbClr val="FFFFFF"/>
+                    </a:solidFill>
+                  </a:tcPr>
+                </a:tc>
+                <a:tc>
+                  <a:txBody>
+                    <a:bodyPr/>
+                    <a:lstStyle/>
+                    <a:p>
+                      <a:pPr indent="0" marL="0">
+                        <a:buNone/>
+                      </a:pPr>
+                      <a:r>
+                        <a:rPr lang="en-US" sz="1200" dirty="0">
+                          <a:solidFill>
+                            <a:srgbClr val="1D2B2A"/>
+                          </a:solidFill>
+                          <a:latin typeface="Courier New" pitchFamily="34" charset="0"/>
+                          <a:ea typeface="Courier New" pitchFamily="34" charset="-122"/>
+                          <a:cs typeface="Courier New" pitchFamily="34" charset="-120"/>
+                        </a:rPr>
+                        <a:t>datetime</a:t>
+                      </a:r>
+                      <a:endParaRPr lang="en-US" sz="1200" dirty="0">
+                        <a:latin typeface="Courier New" charset="0"/>
+                        <a:ea typeface="Courier New" charset="0"/>
+                        <a:cs typeface="Courier New" charset="0"/>
+                      </a:endParaRPr>
+                    </a:p>
+                  </a:txBody>
+                  <a:tcPr marL="91440" marR="91440" marT="45720" marB="45720" anchor="ctr">
+                    <a:lnL w="6350" cap="flat" cmpd="sng" algn="ctr">
+                      <a:solidFill>
+                        <a:srgbClr val="D5E0DD"/>
+                      </a:solidFill>
+                      <a:prstDash val="solid"/>
+                      <a:round/>
+                      <a:headEnd type="none" w="med" len="med"/>
+                      <a:tailEnd type="none" w="med" len="med"/>
+                    </a:lnL>
+                    <a:lnR w="6350" cap="flat" cmpd="sng" algn="ctr">
+                      <a:solidFill>
+                        <a:srgbClr val="D5E0DD"/>
+                      </a:solidFill>
+                      <a:prstDash val="solid"/>
+                      <a:round/>
+                      <a:headEnd type="none" w="med" len="med"/>
+                      <a:tailEnd type="none" w="med" len="med"/>
+                    </a:lnR>
+                    <a:lnT w="6350" cap="flat" cmpd="sng" algn="ctr">
+                      <a:solidFill>
+                        <a:srgbClr val="D5E0DD"/>
+                      </a:solidFill>
+                      <a:prstDash val="solid"/>
+                      <a:round/>
+                      <a:headEnd type="none" w="med" len="med"/>
+                      <a:tailEnd type="none" w="med" len="med"/>
+                    </a:lnT>
+                    <a:lnB w="6350" cap="flat" cmpd="sng" algn="ctr">
+                      <a:solidFill>
+                        <a:srgbClr val="D5E0DD"/>
+                      </a:solidFill>
+                      <a:prstDash val="solid"/>
+                      <a:round/>
+                      <a:headEnd type="none" w="med" len="med"/>
+                      <a:tailEnd type="none" w="med" len="med"/>
+                    </a:lnB>
+                    <a:solidFill>
+                      <a:srgbClr val="FFFFFF"/>
+                    </a:solidFill>
+                  </a:tcPr>
+                </a:tc>
+              </a:tr>
+              <a:tr h="420624">
+                <a:tc>
+                  <a:txBody>
+                    <a:bodyPr/>
+                    <a:lstStyle/>
+                    <a:p>
+                      <a:pPr indent="0" marL="0">
+                        <a:buNone/>
+                      </a:pPr>
+                      <a:r>
+                        <a:rPr lang="en-US" sz="1200" dirty="0">
+                          <a:solidFill>
+                            <a:srgbClr val="1D2B2A"/>
+                          </a:solidFill>
+                          <a:latin typeface="Calibri" pitchFamily="34" charset="0"/>
+                          <a:ea typeface="Calibri" pitchFamily="34" charset="-122"/>
+                          <a:cs typeface="Calibri" pitchFamily="34" charset="-120"/>
+                        </a:rPr>
+                        <a:t>Abstract, @abstract</a:t>
+                      </a:r>
+                      <a:endParaRPr lang="en-US" sz="1200" dirty="0">
+                        <a:latin typeface="Calibri" charset="0"/>
+                        <a:ea typeface="Calibri" charset="0"/>
+                        <a:cs typeface="Calibri" charset="0"/>
+                      </a:endParaRPr>
+                    </a:p>
+                  </a:txBody>
+                  <a:tcPr marL="91440" marR="91440" marT="45720" marB="45720" anchor="ctr">
+                    <a:lnL w="6350" cap="flat" cmpd="sng" algn="ctr">
+                      <a:solidFill>
+                        <a:srgbClr val="D5E0DD"/>
+                      </a:solidFill>
+                      <a:prstDash val="solid"/>
+                      <a:round/>
+                      <a:headEnd type="none" w="med" len="med"/>
+                      <a:tailEnd type="none" w="med" len="med"/>
+                    </a:lnL>
+                    <a:lnR w="6350" cap="flat" cmpd="sng" algn="ctr">
+                      <a:solidFill>
+                        <a:srgbClr val="D5E0DD"/>
+                      </a:solidFill>
+                      <a:prstDash val="solid"/>
+                      <a:round/>
+                      <a:headEnd type="none" w="med" len="med"/>
+                      <a:tailEnd type="none" w="med" len="med"/>
+                    </a:lnR>
+                    <a:lnT w="6350" cap="flat" cmpd="sng" algn="ctr">
+                      <a:solidFill>
+                        <a:srgbClr val="D5E0DD"/>
+                      </a:solidFill>
+                      <a:prstDash val="solid"/>
+                      <a:round/>
+                      <a:headEnd type="none" w="med" len="med"/>
+                      <a:tailEnd type="none" w="med" len="med"/>
+                    </a:lnT>
+                    <a:lnB w="6350" cap="flat" cmpd="sng" algn="ctr">
+                      <a:solidFill>
+                        <a:srgbClr val="D5E0DD"/>
+                      </a:solidFill>
+                      <a:prstDash val="solid"/>
+                      <a:round/>
+                      <a:headEnd type="none" w="med" len="med"/>
+                      <a:tailEnd type="none" w="med" len="med"/>
+                    </a:lnB>
+                    <a:solidFill>
+                      <a:srgbClr val="F4F8F7"/>
+                    </a:solidFill>
+                  </a:tcPr>
+                </a:tc>
+                <a:tc>
+                  <a:txBody>
+                    <a:bodyPr/>
+                    <a:lstStyle/>
+                    <a:p>
+                      <a:pPr indent="0" marL="0">
+                        <a:buNone/>
+                      </a:pPr>
+                      <a:r>
+                        <a:rPr lang="en-US" sz="1200" dirty="0">
+                          <a:solidFill>
+                            <a:srgbClr val="1D2B2A"/>
+                          </a:solidFill>
+                          <a:latin typeface="Courier New" pitchFamily="34" charset="0"/>
+                          <a:ea typeface="Courier New" pitchFamily="34" charset="-122"/>
+                          <a:cs typeface="Courier New" pitchFamily="34" charset="-120"/>
+                        </a:rPr>
+                        <a:t>abc</a:t>
+                      </a:r>
+                      <a:endParaRPr lang="en-US" sz="1200" dirty="0">
+                        <a:latin typeface="Courier New" charset="0"/>
+                        <a:ea typeface="Courier New" charset="0"/>
+                        <a:cs typeface="Courier New" charset="0"/>
+                      </a:endParaRPr>
+                    </a:p>
+                  </a:txBody>
+                  <a:tcPr marL="91440" marR="91440" marT="45720" marB="45720" anchor="ctr">
+                    <a:lnL w="6350" cap="flat" cmpd="sng" algn="ctr">
+                      <a:solidFill>
+                        <a:srgbClr val="D5E0DD"/>
+                      </a:solidFill>
+                      <a:prstDash val="solid"/>
+                      <a:round/>
+                      <a:headEnd type="none" w="med" len="med"/>
+                      <a:tailEnd type="none" w="med" len="med"/>
+                    </a:lnL>
+                    <a:lnR w="6350" cap="flat" cmpd="sng" algn="ctr">
+                      <a:solidFill>
+                        <a:srgbClr val="D5E0DD"/>
+                      </a:solidFill>
+                      <a:prstDash val="solid"/>
+                      <a:round/>
+                      <a:headEnd type="none" w="med" len="med"/>
+                      <a:tailEnd type="none" w="med" len="med"/>
+                    </a:lnR>
+                    <a:lnT w="6350" cap="flat" cmpd="sng" algn="ctr">
+                      <a:solidFill>
+                        <a:srgbClr val="D5E0DD"/>
+                      </a:solidFill>
+                      <a:prstDash val="solid"/>
+                      <a:round/>
+                      <a:headEnd type="none" w="med" len="med"/>
+                      <a:tailEnd type="none" w="med" len="med"/>
+                    </a:lnT>
+                    <a:lnB w="6350" cap="flat" cmpd="sng" algn="ctr">
+                      <a:solidFill>
+                        <a:srgbClr val="D5E0DD"/>
+                      </a:solidFill>
+                      <a:prstDash val="solid"/>
+                      <a:round/>
+                      <a:headEnd type="none" w="med" len="med"/>
+                      <a:tailEnd type="none" w="med" len="med"/>
+                    </a:lnB>
+                    <a:solidFill>
+                      <a:srgbClr val="F4F8F7"/>
+                    </a:solidFill>
+                  </a:tcPr>
+                </a:tc>
+              </a:tr>
+              <a:tr h="420624">
+                <a:tc>
+                  <a:txBody>
+                    <a:bodyPr/>
+                    <a:lstStyle/>
+                    <a:p>
+                      <a:pPr indent="0" marL="0">
+                        <a:buNone/>
+                      </a:pPr>
+                      <a:r>
+                        <a:rPr lang="en-US" sz="1200" dirty="0">
+                          <a:solidFill>
+                            <a:srgbClr val="1D2B2A"/>
+                          </a:solidFill>
+                          <a:latin typeface="Calibri" pitchFamily="34" charset="0"/>
+                          <a:ea typeface="Calibri" pitchFamily="34" charset="-122"/>
+                          <a:cs typeface="Calibri" pitchFamily="34" charset="-120"/>
+                        </a:rPr>
+                        <a:t>Json, JsonReader</a:t>
+                      </a:r>
+                      <a:endParaRPr lang="en-US" sz="1200" dirty="0">
+                        <a:latin typeface="Calibri" charset="0"/>
+                        <a:ea typeface="Calibri" charset="0"/>
+                        <a:cs typeface="Calibri" charset="0"/>
+                      </a:endParaRPr>
+                    </a:p>
+                  </a:txBody>
+                  <a:tcPr marL="91440" marR="91440" marT="45720" marB="45720" anchor="ctr">
+                    <a:lnL w="6350" cap="flat" cmpd="sng" algn="ctr">
+                      <a:solidFill>
+                        <a:srgbClr val="D5E0DD"/>
+                      </a:solidFill>
+                      <a:prstDash val="solid"/>
+                      <a:round/>
+                      <a:headEnd type="none" w="med" len="med"/>
+                      <a:tailEnd type="none" w="med" len="med"/>
+                    </a:lnL>
+                    <a:lnR w="6350" cap="flat" cmpd="sng" algn="ctr">
+                      <a:solidFill>
+                        <a:srgbClr val="D5E0DD"/>
+                      </a:solidFill>
+                      <a:prstDash val="solid"/>
+                      <a:round/>
+                      <a:headEnd type="none" w="med" len="med"/>
+                      <a:tailEnd type="none" w="med" len="med"/>
+                    </a:lnR>
+                    <a:lnT w="6350" cap="flat" cmpd="sng" algn="ctr">
+                      <a:solidFill>
+                        <a:srgbClr val="D5E0DD"/>
+                      </a:solidFill>
+                      <a:prstDash val="solid"/>
+                      <a:round/>
+                      <a:headEnd type="none" w="med" len="med"/>
+                      <a:tailEnd type="none" w="med" len="med"/>
+                    </a:lnT>
+                    <a:lnB w="6350" cap="flat" cmpd="sng" algn="ctr">
+                      <a:solidFill>
+                        <a:srgbClr val="D5E0DD"/>
+                      </a:solidFill>
+                      <a:prstDash val="solid"/>
+                      <a:round/>
+                      <a:headEnd type="none" w="med" len="med"/>
+                      <a:tailEnd type="none" w="med" len="med"/>
+                    </a:lnB>
+                    <a:solidFill>
+                      <a:srgbClr val="FFFFFF"/>
+                    </a:solidFill>
+                  </a:tcPr>
+                </a:tc>
+                <a:tc>
+                  <a:txBody>
+                    <a:bodyPr/>
+                    <a:lstStyle/>
+                    <a:p>
+                      <a:pPr indent="0" marL="0">
+                        <a:buNone/>
+                      </a:pPr>
+                      <a:r>
+                        <a:rPr lang="en-US" sz="1200" dirty="0">
+                          <a:solidFill>
+                            <a:srgbClr val="1D2B2A"/>
+                          </a:solidFill>
+                          <a:latin typeface="Courier New" pitchFamily="34" charset="0"/>
+                          <a:ea typeface="Courier New" pitchFamily="34" charset="-122"/>
+                          <a:cs typeface="Courier New" pitchFamily="34" charset="-120"/>
+                        </a:rPr>
+                        <a:t>json</a:t>
+                      </a:r>
+                      <a:endParaRPr lang="en-US" sz="1200" dirty="0">
+                        <a:latin typeface="Courier New" charset="0"/>
+                        <a:ea typeface="Courier New" charset="0"/>
+                        <a:cs typeface="Courier New" charset="0"/>
+                      </a:endParaRPr>
+                    </a:p>
+                  </a:txBody>
+                  <a:tcPr marL="91440" marR="91440" marT="45720" marB="45720" anchor="ctr">
+                    <a:lnL w="6350" cap="flat" cmpd="sng" algn="ctr">
+                      <a:solidFill>
+                        <a:srgbClr val="D5E0DD"/>
+                      </a:solidFill>
+                      <a:prstDash val="solid"/>
+                      <a:round/>
+                      <a:headEnd type="none" w="med" len="med"/>
+                      <a:tailEnd type="none" w="med" len="med"/>
+                    </a:lnL>
+                    <a:lnR w="6350" cap="flat" cmpd="sng" algn="ctr">
+                      <a:solidFill>
+                        <a:srgbClr val="D5E0DD"/>
+                      </a:solidFill>
+                      <a:prstDash val="solid"/>
+                      <a:round/>
+                      <a:headEnd type="none" w="med" len="med"/>
+                      <a:tailEnd type="none" w="med" len="med"/>
+                    </a:lnR>
+                    <a:lnT w="6350" cap="flat" cmpd="sng" algn="ctr">
+                      <a:solidFill>
+                        <a:srgbClr val="D5E0DD"/>
+                      </a:solidFill>
+                      <a:prstDash val="solid"/>
+                      <a:round/>
+                      <a:headEnd type="none" w="med" len="med"/>
+                      <a:tailEnd type="none" w="med" len="med"/>
+                    </a:lnT>
+                    <a:lnB w="6350" cap="flat" cmpd="sng" algn="ctr">
+                      <a:solidFill>
+                        <a:srgbClr val="D5E0DD"/>
+                      </a:solidFill>
+                      <a:prstDash val="solid"/>
+                      <a:round/>
+                      <a:headEnd type="none" w="med" len="med"/>
+                      <a:tailEnd type="none" w="med" len="med"/>
+                    </a:lnB>
+                    <a:solidFill>
+                      <a:srgbClr val="FFFFFF"/>
+                    </a:solidFill>
+                  </a:tcPr>
+                </a:tc>
+              </a:tr>
+              <a:tr h="420624">
+                <a:tc>
+                  <a:txBody>
+                    <a:bodyPr/>
+                    <a:lstStyle/>
+                    <a:p>
+                      <a:pPr indent="0" marL="0">
+                        <a:buNone/>
+                      </a:pPr>
+                      <a:r>
+                        <a:rPr lang="en-US" sz="1200" dirty="0">
+                          <a:solidFill>
+                            <a:srgbClr val="1D2B2A"/>
+                          </a:solidFill>
+                          <a:latin typeface="Calibri" pitchFamily="34" charset="0"/>
+                          <a:ea typeface="Calibri" pitchFamily="34" charset="-122"/>
+                          <a:cs typeface="Calibri" pitchFamily="34" charset="-120"/>
+                        </a:rPr>
+                        <a:t>TestCase, TestRunner</a:t>
+                      </a:r>
+                      <a:endParaRPr lang="en-US" sz="1200" dirty="0">
+                        <a:latin typeface="Calibri" charset="0"/>
+                        <a:ea typeface="Calibri" charset="0"/>
+                        <a:cs typeface="Calibri" charset="0"/>
+                      </a:endParaRPr>
+                    </a:p>
+                  </a:txBody>
+                  <a:tcPr marL="91440" marR="91440" marT="45720" marB="45720" anchor="ctr">
+                    <a:lnL w="6350" cap="flat" cmpd="sng" algn="ctr">
+                      <a:solidFill>
+                        <a:srgbClr val="D5E0DD"/>
+                      </a:solidFill>
+                      <a:prstDash val="solid"/>
+                      <a:round/>
+                      <a:headEnd type="none" w="med" len="med"/>
+                      <a:tailEnd type="none" w="med" len="med"/>
+                    </a:lnL>
+                    <a:lnR w="6350" cap="flat" cmpd="sng" algn="ctr">
+                      <a:solidFill>
+                        <a:srgbClr val="D5E0DD"/>
+                      </a:solidFill>
+                      <a:prstDash val="solid"/>
+                      <a:round/>
+                      <a:headEnd type="none" w="med" len="med"/>
+                      <a:tailEnd type="none" w="med" len="med"/>
+                    </a:lnR>
+                    <a:lnT w="6350" cap="flat" cmpd="sng" algn="ctr">
+                      <a:solidFill>
+                        <a:srgbClr val="D5E0DD"/>
+                      </a:solidFill>
+                      <a:prstDash val="solid"/>
+                      <a:round/>
+                      <a:headEnd type="none" w="med" len="med"/>
+                      <a:tailEnd type="none" w="med" len="med"/>
+                    </a:lnT>
+                    <a:lnB w="6350" cap="flat" cmpd="sng" algn="ctr">
+                      <a:solidFill>
+                        <a:srgbClr val="D5E0DD"/>
+                      </a:solidFill>
+                      <a:prstDash val="solid"/>
+                      <a:round/>
+                      <a:headEnd type="none" w="med" len="med"/>
+                      <a:tailEnd type="none" w="med" len="med"/>
+                    </a:lnB>
+                    <a:solidFill>
+                      <a:srgbClr val="F4F8F7"/>
+                    </a:solidFill>
+                  </a:tcPr>
+                </a:tc>
+                <a:tc>
+                  <a:txBody>
+                    <a:bodyPr/>
+                    <a:lstStyle/>
+                    <a:p>
+                      <a:pPr indent="0" marL="0">
+                        <a:buNone/>
+                      </a:pPr>
+                      <a:r>
+                        <a:rPr lang="en-US" sz="1200" dirty="0">
+                          <a:solidFill>
+                            <a:srgbClr val="1D2B2A"/>
+                          </a:solidFill>
+                          <a:latin typeface="Courier New" pitchFamily="34" charset="0"/>
+                          <a:ea typeface="Courier New" pitchFamily="34" charset="-122"/>
+                          <a:cs typeface="Courier New" pitchFamily="34" charset="-120"/>
+                        </a:rPr>
+                        <a:t>unittest</a:t>
+                      </a:r>
+                      <a:endParaRPr lang="en-US" sz="1200" dirty="0">
+                        <a:latin typeface="Courier New" charset="0"/>
+                        <a:ea typeface="Courier New" charset="0"/>
+                        <a:cs typeface="Courier New" charset="0"/>
+                      </a:endParaRPr>
+                    </a:p>
+                  </a:txBody>
+                  <a:tcPr marL="91440" marR="91440" marT="45720" marB="45720" anchor="ctr">
+                    <a:lnL w="6350" cap="flat" cmpd="sng" algn="ctr">
+                      <a:solidFill>
+                        <a:srgbClr val="D5E0DD"/>
+                      </a:solidFill>
+                      <a:prstDash val="solid"/>
+                      <a:round/>
+                      <a:headEnd type="none" w="med" len="med"/>
+                      <a:tailEnd type="none" w="med" len="med"/>
+                    </a:lnL>
+                    <a:lnR w="6350" cap="flat" cmpd="sng" algn="ctr">
+                      <a:solidFill>
+                        <a:srgbClr val="D5E0DD"/>
+                      </a:solidFill>
+                      <a:prstDash val="solid"/>
+                      <a:round/>
+                      <a:headEnd type="none" w="med" len="med"/>
+                      <a:tailEnd type="none" w="med" len="med"/>
+                    </a:lnR>
+                    <a:lnT w="6350" cap="flat" cmpd="sng" algn="ctr">
+                      <a:solidFill>
+                        <a:srgbClr val="D5E0DD"/>
+                      </a:solidFill>
+                      <a:prstDash val="solid"/>
+                      <a:round/>
+                      <a:headEnd type="none" w="med" len="med"/>
+                      <a:tailEnd type="none" w="med" len="med"/>
+                    </a:lnT>
+                    <a:lnB w="6350" cap="flat" cmpd="sng" algn="ctr">
+                      <a:solidFill>
+                        <a:srgbClr val="D5E0DD"/>
+                      </a:solidFill>
+                      <a:prstDash val="solid"/>
+                      <a:round/>
+                      <a:headEnd type="none" w="med" len="med"/>
+                      <a:tailEnd type="none" w="med" len="med"/>
+                    </a:lnB>
+                    <a:solidFill>
+                      <a:srgbClr val="F4F8F7"/>
+                    </a:solidFill>
+                  </a:tcPr>
+                </a:tc>
+              </a:tr>
+              <a:tr h="420624">
+                <a:tc>
+                  <a:txBody>
+                    <a:bodyPr/>
+                    <a:lstStyle/>
+                    <a:p>
+                      <a:pPr indent="0" marL="0">
+                        <a:buNone/>
+                      </a:pPr>
+                      <a:r>
+                        <a:rPr lang="en-US" sz="1200" dirty="0">
+                          <a:solidFill>
+                            <a:srgbClr val="1D2B2A"/>
+                          </a:solidFill>
+                          <a:latin typeface="Calibri" pitchFamily="34" charset="0"/>
+                          <a:ea typeface="Calibri" pitchFamily="34" charset="-122"/>
+                          <a:cs typeface="Calibri" pitchFamily="34" charset="-120"/>
+                        </a:rPr>
+                        <a:t>DemoLog, SourceIndex</a:t>
+                      </a:r>
+                      <a:endParaRPr lang="en-US" sz="1200" dirty="0">
+                        <a:latin typeface="Calibri" charset="0"/>
+                        <a:ea typeface="Calibri" charset="0"/>
+                        <a:cs typeface="Calibri" charset="0"/>
+                      </a:endParaRPr>
+                    </a:p>
+                  </a:txBody>
+                  <a:tcPr marL="91440" marR="91440" marT="45720" marB="45720" anchor="ctr">
+                    <a:lnL w="6350" cap="flat" cmpd="sng" algn="ctr">
+                      <a:solidFill>
+                        <a:srgbClr val="D5E0DD"/>
+                      </a:solidFill>
+                      <a:prstDash val="solid"/>
+                      <a:round/>
+                      <a:headEnd type="none" w="med" len="med"/>
+                      <a:tailEnd type="none" w="med" len="med"/>
+                    </a:lnL>
+                    <a:lnR w="6350" cap="flat" cmpd="sng" algn="ctr">
+                      <a:solidFill>
+                        <a:srgbClr val="D5E0DD"/>
+                      </a:solidFill>
+                      <a:prstDash val="solid"/>
+                      <a:round/>
+                      <a:headEnd type="none" w="med" len="med"/>
+                      <a:tailEnd type="none" w="med" len="med"/>
+                    </a:lnR>
+                    <a:lnT w="6350" cap="flat" cmpd="sng" algn="ctr">
+                      <a:solidFill>
+                        <a:srgbClr val="D5E0DD"/>
+                      </a:solidFill>
+                      <a:prstDash val="solid"/>
+                      <a:round/>
+                      <a:headEnd type="none" w="med" len="med"/>
+                      <a:tailEnd type="none" w="med" len="med"/>
+                    </a:lnT>
+                    <a:lnB w="6350" cap="flat" cmpd="sng" algn="ctr">
+                      <a:solidFill>
+                        <a:srgbClr val="D5E0DD"/>
+                      </a:solidFill>
+                      <a:prstDash val="solid"/>
+                      <a:round/>
+                      <a:headEnd type="none" w="med" len="med"/>
+                      <a:tailEnd type="none" w="med" len="med"/>
+                    </a:lnB>
+                    <a:solidFill>
+                      <a:srgbClr val="FFFFFF"/>
+                    </a:solidFill>
+                  </a:tcPr>
+                </a:tc>
+                <a:tc>
+                  <a:txBody>
+                    <a:bodyPr/>
+                    <a:lstStyle/>
+                    <a:p>
+                      <a:pPr indent="0" marL="0">
+                        <a:buNone/>
+                      </a:pPr>
+                      <a:r>
+                        <a:rPr lang="en-US" sz="1200" dirty="0">
+                          <a:solidFill>
+                            <a:srgbClr val="1D2B2A"/>
+                          </a:solidFill>
+                          <a:latin typeface="Courier New" pitchFamily="34" charset="0"/>
+                          <a:ea typeface="Courier New" pitchFamily="34" charset="-122"/>
+                          <a:cs typeface="Courier New" pitchFamily="34" charset="-120"/>
+                        </a:rPr>
+                        <a:t>io, inspect</a:t>
+                      </a:r>
+                      <a:endParaRPr lang="en-US" sz="1200" dirty="0">
+                        <a:latin typeface="Courier New" charset="0"/>
+                        <a:ea typeface="Courier New" charset="0"/>
+                        <a:cs typeface="Courier New" charset="0"/>
+                      </a:endParaRPr>
+                    </a:p>
+                  </a:txBody>
+                  <a:tcPr marL="91440" marR="91440" marT="45720" marB="45720" anchor="ctr">
+                    <a:lnL w="6350" cap="flat" cmpd="sng" algn="ctr">
+                      <a:solidFill>
+                        <a:srgbClr val="D5E0DD"/>
+                      </a:solidFill>
+                      <a:prstDash val="solid"/>
+                      <a:round/>
+                      <a:headEnd type="none" w="med" len="med"/>
+                      <a:tailEnd type="none" w="med" len="med"/>
+                    </a:lnL>
+                    <a:lnR w="6350" cap="flat" cmpd="sng" algn="ctr">
+                      <a:solidFill>
+                        <a:srgbClr val="D5E0DD"/>
+                      </a:solidFill>
+                      <a:prstDash val="solid"/>
+                      <a:round/>
+                      <a:headEnd type="none" w="med" len="med"/>
+                      <a:tailEnd type="none" w="med" len="med"/>
+                    </a:lnR>
+                    <a:lnT w="6350" cap="flat" cmpd="sng" algn="ctr">
+                      <a:solidFill>
+                        <a:srgbClr val="D5E0DD"/>
+                      </a:solidFill>
+                      <a:prstDash val="solid"/>
+                      <a:round/>
+                      <a:headEnd type="none" w="med" len="med"/>
+                      <a:tailEnd type="none" w="med" len="med"/>
+                    </a:lnT>
+                    <a:lnB w="6350" cap="flat" cmpd="sng" algn="ctr">
+                      <a:solidFill>
+                        <a:srgbClr val="D5E0DD"/>
+                      </a:solidFill>
+                      <a:prstDash val="solid"/>
+                      <a:round/>
+                      <a:headEnd type="none" w="med" len="med"/>
+                      <a:tailEnd type="none" w="med" len="med"/>
+                    </a:lnB>
+                    <a:solidFill>
+                      <a:srgbClr val="FFFFFF"/>
+                    </a:solidFill>
+                  </a:tcPr>
+                </a:tc>
+              </a:tr>
+            </a:tbl>
+          </a:graphicData>
+        </a:graphic>
+      </p:graphicFrame>
+      <p:sp>
+        <p:nvSpPr>
+          <p:cNvPr id="5" name="Text 2"/>
+          <p:cNvSpPr txBox="1"/>
+          <p:nvPr/>
+        </p:nvSpPr>
+        <p:spPr>
+          <a:xfrm>
+            <a:off x="457200" y="4343400"/>
+            <a:ext cx="3931920" cy="457200"/>
+          </a:xfrm>
+          <a:prstGeom prst="rect">
+            <a:avLst/>
+          </a:prstGeom>
+          <a:noFill/>
+          <a:ln/>
+        </p:spPr>
+        <p:txBody>
+          <a:bodyPr wrap="square" lIns="0" tIns="0" rIns="0" bIns="0" rtlCol="0" anchor="ctr"/>
+          <a:lstStyle/>
+          <a:p>
+            <a:pPr indent="0" marL="0">
+              <a:buNone/>
+            </a:pPr>
+            <a:r>
+              <a:rPr lang="en-US" sz="1100" i="1" dirty="0">
+                <a:solidFill>
+                  <a:srgbClr val="5B6B69"/>
+                </a:solidFill>
+                <a:latin typeface="Calibri" pitchFamily="34" charset="0"/>
+                <a:ea typeface="Calibri" pitchFamily="34" charset="-122"/>
+                <a:cs typeface="Calibri" pitchFamily="34" charset="-120"/>
+              </a:rPr>
+              <a:t>Money inherits all of Exact's arithmetic and adds one rule: round half up to the paisa.</a:t>
+            </a:r>
+            <a:endParaRPr lang="en-US" sz="1100" dirty="0"/>
+          </a:p>
+        </p:txBody>
+      </p:sp>
+      <p:sp>
+        <p:nvSpPr>
+          <p:cNvPr id="6" name="Shape 3"/>
           <p:cNvSpPr/>
           <p:nvPr/>
         </p:nvSpPr>
         <p:spPr>
           <a:xfrm>
-            <a:off x="457200" y="1188720"/>
-            <a:ext cx="5577840" cy="3611880"/>
+            <a:off x="4663440" y="1280160"/>
+            <a:ext cx="4023360" cy="3520440"/>
           </a:xfrm>
           <a:prstGeom prst="roundRect">
             <a:avLst>
-              <a:gd name="adj" fmla="val 2025"/>
+              <a:gd name="adj" fmla="val 2078"/>
             </a:avLst>
           </a:prstGeom>
           <a:solidFill>
-            <a:srgbClr val="F4F8F7"/>
+            <a:srgbClr val="E8F0EE"/>
           </a:solidFill>
           <a:ln w="12700">
             <a:solidFill>
-              <a:srgbClr val="F4F8F7"/>
+              <a:srgbClr val="E8F0EE"/>
             </a:solidFill>
             <a:prstDash val="solid"/>
           </a:ln>
         </p:spPr>
       </p:sp>
-      <p:pic>
-        <p:nvPicPr>
-          <p:cNvPr id="5" name="Image 0" descr="/home/user/commercial-banking/docs/screenshots/gui_02_overview.png">    </p:cNvPr>
-          <p:cNvPicPr>
-            <a:picLocks noChangeAspect="1"/>
-          </p:cNvPicPr>
-          <p:nvPr/>
-        </p:nvPicPr>
-        <p:blipFill>
-          <a:blip r:embed="rId1"/>
-          <a:stretch>
-            <a:fillRect/>
-          </a:stretch>
-        </p:blipFill>
-        <p:spPr>
-          <a:xfrm>
-            <a:off x="548640" y="1280160"/>
-            <a:ext cx="5394960" cy="3291840"/>
-          </a:xfrm>
-          <a:prstGeom prst="rect">
-            <a:avLst/>
-          </a:prstGeom>
-        </p:spPr>
-      </p:pic>
-      <p:sp>
-        <p:nvSpPr>
-          <p:cNvPr id="6" name="Text 3"/>
-          <p:cNvSpPr txBox="1"/>
-          <p:nvPr/>
-        </p:nvSpPr>
-        <p:spPr>
-          <a:xfrm>
-            <a:off x="6263640" y="1234440"/>
-            <a:ext cx="2468880" cy="3566160"/>
+      <p:sp>
+        <p:nvSpPr>
+          <p:cNvPr id="7" name="Text 4"/>
+          <p:cNvSpPr txBox="1"/>
+          <p:nvPr/>
+        </p:nvSpPr>
+        <p:spPr>
+          <a:xfrm>
+            <a:off x="4846320" y="1389888"/>
+            <a:ext cx="3657600" cy="411480"/>
+          </a:xfrm>
+          <a:prstGeom prst="rect">
+            <a:avLst/>
+          </a:prstGeom>
+          <a:noFill/>
+          <a:ln/>
+        </p:spPr>
+        <p:txBody>
+          <a:bodyPr wrap="square" lIns="0" tIns="0" rIns="0" bIns="0" rtlCol="0" anchor="ctr"/>
+          <a:lstStyle/>
+          <a:p>
+            <a:pPr indent="0" marL="0">
+              <a:buNone/>
+            </a:pPr>
+            <a:r>
+              <a:rPr lang="en-US" sz="1600" b="1" dirty="0">
+                <a:solidFill>
+                  <a:srgbClr val="0B4F4A"/>
+                </a:solidFill>
+                <a:latin typeface="Cambria" pitchFamily="34" charset="0"/>
+                <a:ea typeface="Cambria" pitchFamily="34" charset="-122"/>
+                <a:cs typeface="Cambria" pitchFamily="34" charset="-120"/>
+              </a:rPr>
+              <a:t>Numbers that check themselves</a:t>
+            </a:r>
+            <a:endParaRPr lang="en-US" sz="1600" dirty="0"/>
+          </a:p>
+        </p:txBody>
+      </p:sp>
+      <p:sp>
+        <p:nvSpPr>
+          <p:cNvPr id="8" name="Text 5"/>
+          <p:cNvSpPr txBox="1"/>
+          <p:nvPr/>
+        </p:nvSpPr>
+        <p:spPr>
+          <a:xfrm>
+            <a:off x="4800600" y="1874520"/>
+            <a:ext cx="3749040" cy="2834640"/>
           </a:xfrm>
           <a:prstGeom prst="rect">
             <a:avLst/>
@@ -9426,7 +10586,7 @@
               <a:buChar char="•"/>
             </a:pPr>
             <a:r>
-              <a:rPr lang="en-US" sz="1200" dirty="0">
+              <a:rPr lang="en-US" sz="1250" dirty="0">
                 <a:solidFill>
                   <a:srgbClr val="1D2B2A"/>
                 </a:solidFill>
@@ -9434,9 +10594,9 @@
                 <a:ea typeface="Calibri" pitchFamily="34" charset="-122"/>
                 <a:cs typeface="Calibri" pitchFamily="34" charset="-120"/>
               </a:rPr>
-              <a:t>Sign in as staff or as a customer; the model checks that person's authority</a:t>
-            </a:r>
-            <a:endParaRPr lang="en-US" sz="1200" dirty="0"/>
+              <a:t>Iban (ISO 13616): PK, 2 check digits, bank code, 16 digits; rearranged and divided by 97, it leaves 1</a:t>
+            </a:r>
+            <a:endParaRPr lang="en-US" sz="1250" dirty="0"/>
           </a:p>
           <a:p>
             <a:pPr marL="342900" indent="-342900">
@@ -9447,7 +10607,7 @@
               <a:buChar char="•"/>
             </a:pPr>
             <a:r>
-              <a:rPr lang="en-US" sz="1200" dirty="0">
+              <a:rPr lang="en-US" sz="1250" dirty="0">
                 <a:solidFill>
                   <a:srgbClr val="1D2B2A"/>
                 </a:solidFill>
@@ -9455,9 +10615,9 @@
                 <a:ea typeface="Calibri" pitchFamily="34" charset="-122"/>
                 <a:cs typeface="Calibri" pitchFamily="34" charset="-120"/>
               </a:rPr>
-              <a:t>Staff: forms list what your role may do and record you automatically</a:t>
-            </a:r>
-            <a:endParaRPr lang="en-US" sz="1200" dirty="0"/>
+              <a:t>A mistyped IBAN, or a UBL IBAN entered as HBL, is refused before any payment</a:t>
+            </a:r>
+            <a:endParaRPr lang="en-US" sz="1250" dirty="0"/>
           </a:p>
           <a:p>
             <a:pPr marL="342900" indent="-342900">
@@ -9468,7 +10628,7 @@
               <a:buChar char="•"/>
             </a:pPr>
             <a:r>
-              <a:rPr lang="en-US" sz="1200" dirty="0">
+              <a:rPr lang="en-US" sz="1250" dirty="0">
                 <a:solidFill>
                   <a:srgbClr val="1D2B2A"/>
                 </a:solidFill>
@@ -9476,9 +10636,9 @@
                 <a:ea typeface="Calibri" pitchFamily="34" charset="-122"/>
                 <a:cs typeface="Calibri" pitchFamily="34" charset="-120"/>
               </a:rPr>
-              <a:t>Digital banking: own accounts plus companies under a mandate; approvals, cards, disputes</a:t>
-            </a:r>
-            <a:endParaRPr lang="en-US" sz="1200" dirty="0"/>
+              <a:t>CardNumber (ISO/IEC 7812): the last digit is a Luhn check digit</a:t>
+            </a:r>
+            <a:endParaRPr lang="en-US" sz="1250" dirty="0"/>
           </a:p>
           <a:p>
             <a:pPr marL="342900" indent="-342900">
@@ -9489,7 +10649,7 @@
               <a:buChar char="•"/>
             </a:pPr>
             <a:r>
-              <a:rPr lang="en-US" sz="1200" dirty="0">
+              <a:rPr lang="en-US" sz="1250" dirty="0">
                 <a:solidFill>
                   <a:srgbClr val="1D2B2A"/>
                 </a:solidFill>
@@ -9497,30 +10657,9 @@
                 <a:ea typeface="Calibri" pitchFamily="34" charset="-122"/>
                 <a:cs typeface="Calibri" pitchFamily="34" charset="-120"/>
               </a:rPr>
-              <a:t>80 forms and 14 guided checks cover every workflow in the brief</a:t>
-            </a:r>
-            <a:endParaRPr lang="en-US" sz="1200" dirty="0"/>
-          </a:p>
-          <a:p>
-            <a:pPr marL="342900" indent="-342900">
-              <a:spcAft>
-                <a:spcPts val="600"/>
-              </a:spcAft>
-              <a:buSzPct val="100000"/>
-              <a:buChar char="•"/>
-            </a:pPr>
-            <a:r>
-              <a:rPr lang="en-US" sz="1200" dirty="0">
-                <a:solidFill>
-                  <a:srgbClr val="1D2B2A"/>
-                </a:solidFill>
-                <a:latin typeface="Calibri" pitchFamily="34" charset="0"/>
-                <a:ea typeface="Calibri" pitchFamily="34" charset="-122"/>
-                <a:cs typeface="Calibri" pitchFamily="34" charset="-120"/>
-              </a:rPr>
-              <a:t>GUI classes inherit too: Page -&gt; MasterDetailPage, CustomerView, Chart</a:t>
-            </a:r>
-            <a:endParaRPr lang="en-US" sz="1200" dirty="0"/>
+              <a:t>Only the first 6 and last 4 digits are kept (PCI DSS), so no screen or file shows a full card number</a:t>
+            </a:r>
+            <a:endParaRPr lang="en-US" sz="1250" dirty="0"/>
           </a:p>
         </p:txBody>
       </p:sp>
@@ -9630,7 +10769,7 @@
                 <a:ea typeface="Calibri" pitchFamily="34" charset="-122"/>
                 <a:cs typeface="Calibri" pitchFamily="34" charset="-120"/>
               </a:rPr>
-              <a:t>About 18 minutes of slides, 8 minutes of live demonstration, then questions</a:t>
+              <a:t>About 19 minutes of slides, 7½ minutes of live demonstration, then questions</a:t>
             </a:r>
             <a:endParaRPr lang="en-US" sz="1200" dirty="0"/>
           </a:p>
@@ -10487,7 +11626,7 @@
                 <a:ea typeface="Cambria" pitchFamily="34" charset="-122"/>
                 <a:cs typeface="Cambria" pitchFamily="34" charset="-120"/>
               </a:rPr>
-              <a:t>Code review: 20 defects fixed, each with a test</a:t>
+              <a:t>Live demo: staff console and digital banking</a:t>
             </a:r>
             <a:endParaRPr lang="en-US" sz="2200" dirty="0"/>
           </a:p>
@@ -10495,119 +11634,104 @@
       </p:sp>
       <p:sp>
         <p:nvSpPr>
-          <p:cNvPr id="3" name="Shape 1"/>
+          <p:cNvPr id="3" name="Text 1"/>
+          <p:cNvSpPr txBox="1"/>
+          <p:nvPr/>
+        </p:nvSpPr>
+        <p:spPr>
+          <a:xfrm>
+            <a:off x="457200" y="804672"/>
+            <a:ext cx="8229600" cy="320040"/>
+          </a:xfrm>
+          <a:prstGeom prst="rect">
+            <a:avLst/>
+          </a:prstGeom>
+          <a:noFill/>
+          <a:ln/>
+        </p:spPr>
+        <p:txBody>
+          <a:bodyPr wrap="square" lIns="0" tIns="0" rIns="0" bIns="0" rtlCol="0" anchor="ctr"/>
+          <a:lstStyle/>
+          <a:p>
+            <a:pPr indent="0" marL="0">
+              <a:buNone/>
+            </a:pPr>
+            <a:r>
+              <a:rPr lang="en-US" sz="1200" i="1" dirty="0">
+                <a:solidFill>
+                  <a:srgbClr val="5B6B69"/>
+                </a:solidFill>
+                <a:latin typeface="Calibri" pitchFamily="34" charset="0"/>
+                <a:ea typeface="Calibri" pitchFamily="34" charset="-122"/>
+                <a:cs typeface="Calibri" pitchFamily="34" charset="-120"/>
+              </a:rPr>
+              <a:t>banking_gui.py - Python and Tkinter only; every button calls one Bank operation</a:t>
+            </a:r>
+            <a:endParaRPr lang="en-US" sz="1200" dirty="0"/>
+          </a:p>
+        </p:txBody>
+      </p:sp>
+      <p:sp>
+        <p:nvSpPr>
+          <p:cNvPr id="4" name="Shape 2"/>
           <p:cNvSpPr/>
           <p:nvPr/>
         </p:nvSpPr>
         <p:spPr>
           <a:xfrm>
-            <a:off x="457200" y="1097280"/>
-            <a:ext cx="2651760" cy="3566160"/>
+            <a:off x="457200" y="1188720"/>
+            <a:ext cx="5577840" cy="3611880"/>
           </a:xfrm>
           <a:prstGeom prst="roundRect">
             <a:avLst>
-              <a:gd name="adj" fmla="val 2759"/>
+              <a:gd name="adj" fmla="val 2025"/>
             </a:avLst>
           </a:prstGeom>
           <a:solidFill>
-            <a:srgbClr val="0B4F4A"/>
+            <a:srgbClr val="F4F8F7"/>
           </a:solidFill>
           <a:ln w="12700">
             <a:solidFill>
-              <a:srgbClr val="0B4F4A"/>
+              <a:srgbClr val="F4F8F7"/>
             </a:solidFill>
             <a:prstDash val="solid"/>
           </a:ln>
         </p:spPr>
       </p:sp>
-      <p:sp>
-        <p:nvSpPr>
-          <p:cNvPr id="4" name="Text 2"/>
-          <p:cNvSpPr txBox="1"/>
-          <p:nvPr/>
-        </p:nvSpPr>
-        <p:spPr>
-          <a:xfrm>
-            <a:off x="457200" y="1463040"/>
-            <a:ext cx="2651760" cy="1097280"/>
-          </a:xfrm>
-          <a:prstGeom prst="rect">
-            <a:avLst/>
-          </a:prstGeom>
-          <a:noFill/>
-          <a:ln/>
-        </p:spPr>
-        <p:txBody>
-          <a:bodyPr wrap="square" lIns="0" tIns="0" rIns="0" bIns="0" rtlCol="0" anchor="ctr"/>
-          <a:lstStyle/>
-          <a:p>
-            <a:pPr algn="ctr" indent="0" marL="0">
-              <a:buNone/>
-            </a:pPr>
-            <a:r>
-              <a:rPr lang="en-US" sz="6000" b="1" dirty="0">
-                <a:solidFill>
-                  <a:srgbClr val="FFFFFF"/>
-                </a:solidFill>
-                <a:latin typeface="Cambria" pitchFamily="34" charset="0"/>
-                <a:ea typeface="Cambria" pitchFamily="34" charset="-122"/>
-                <a:cs typeface="Cambria" pitchFamily="34" charset="-120"/>
-              </a:rPr>
-              <a:t>20</a:t>
-            </a:r>
-            <a:endParaRPr lang="en-US" sz="6000" dirty="0"/>
-          </a:p>
-        </p:txBody>
-      </p:sp>
-      <p:sp>
-        <p:nvSpPr>
-          <p:cNvPr id="5" name="Text 3"/>
-          <p:cNvSpPr txBox="1"/>
-          <p:nvPr/>
-        </p:nvSpPr>
-        <p:spPr>
-          <a:xfrm>
-            <a:off x="685800" y="2651760"/>
-            <a:ext cx="2194560" cy="1097280"/>
-          </a:xfrm>
-          <a:prstGeom prst="rect">
-            <a:avLst/>
-          </a:prstGeom>
-          <a:noFill/>
-          <a:ln/>
-        </p:spPr>
-        <p:txBody>
-          <a:bodyPr wrap="square" lIns="0" tIns="0" rIns="0" bIns="0" rtlCol="0" anchor="ctr"/>
-          <a:lstStyle/>
-          <a:p>
-            <a:pPr algn="ctr" indent="0" marL="0">
-              <a:buNone/>
-            </a:pPr>
-            <a:r>
-              <a:rPr lang="en-US" sz="1400" dirty="0">
-                <a:solidFill>
-                  <a:srgbClr val="CFE3DF"/>
-                </a:solidFill>
-                <a:latin typeface="Calibri" pitchFamily="34" charset="0"/>
-                <a:ea typeface="Calibri" pitchFamily="34" charset="-122"/>
-                <a:cs typeface="Calibri" pitchFamily="34" charset="-120"/>
-              </a:rPr>
-              <a:t>defects found and fixed, each with a regression test</a:t>
-            </a:r>
-            <a:endParaRPr lang="en-US" sz="1400" dirty="0"/>
-          </a:p>
-        </p:txBody>
-      </p:sp>
-      <p:sp>
-        <p:nvSpPr>
-          <p:cNvPr id="6" name="Text 4"/>
-          <p:cNvSpPr txBox="1"/>
-          <p:nvPr/>
-        </p:nvSpPr>
-        <p:spPr>
-          <a:xfrm>
-            <a:off x="3474720" y="1143000"/>
-            <a:ext cx="5212080" cy="3566160"/>
+      <p:pic>
+        <p:nvPicPr>
+          <p:cNvPr id="5" name="Image 0" descr="/home/user/commercial-banking/docs/screenshots/gui_02_overview.png">    </p:cNvPr>
+          <p:cNvPicPr>
+            <a:picLocks noChangeAspect="1"/>
+          </p:cNvPicPr>
+          <p:nvPr/>
+        </p:nvPicPr>
+        <p:blipFill>
+          <a:blip r:embed="rId1"/>
+          <a:stretch>
+            <a:fillRect/>
+          </a:stretch>
+        </p:blipFill>
+        <p:spPr>
+          <a:xfrm>
+            <a:off x="548640" y="1280160"/>
+            <a:ext cx="5394960" cy="3291840"/>
+          </a:xfrm>
+          <a:prstGeom prst="rect">
+            <a:avLst/>
+          </a:prstGeom>
+        </p:spPr>
+      </p:pic>
+      <p:sp>
+        <p:nvSpPr>
+          <p:cNvPr id="6" name="Text 3"/>
+          <p:cNvSpPr txBox="1"/>
+          <p:nvPr/>
+        </p:nvSpPr>
+        <p:spPr>
+          <a:xfrm>
+            <a:off x="6263640" y="1234440"/>
+            <a:ext cx="2468880" cy="3566160"/>
           </a:xfrm>
           <a:prstGeom prst="rect">
             <a:avLst/>
@@ -10627,7 +11751,7 @@
               <a:buChar char="•"/>
             </a:pPr>
             <a:r>
-              <a:rPr lang="en-US" sz="1350" dirty="0">
+              <a:rPr lang="en-US" sz="1200" dirty="0">
                 <a:solidFill>
                   <a:srgbClr val="1D2B2A"/>
                 </a:solidFill>
@@ -10635,9 +11759,9 @@
                 <a:ea typeface="Calibri" pitchFamily="34" charset="-122"/>
                 <a:cs typeface="Calibri" pitchFamily="34" charset="-120"/>
               </a:rPr>
-              <a:t>A refused loan overpayment still marked installments as paid</a:t>
-            </a:r>
-            <a:endParaRPr lang="en-US" sz="1350" dirty="0"/>
+              <a:t>Sign in as staff or as a customer; the model checks that person's authority</a:t>
+            </a:r>
+            <a:endParaRPr lang="en-US" sz="1200" dirty="0"/>
           </a:p>
           <a:p>
             <a:pPr marL="342900" indent="-342900">
@@ -10648,7 +11772,7 @@
               <a:buChar char="•"/>
             </a:pPr>
             <a:r>
-              <a:rPr lang="en-US" sz="1350" dirty="0">
+              <a:rPr lang="en-US" sz="1200" dirty="0">
                 <a:solidFill>
                   <a:srgbClr val="1D2B2A"/>
                 </a:solidFill>
@@ -10656,9 +11780,9 @@
                 <a:ea typeface="Calibri" pitchFamily="34" charset="-122"/>
                 <a:cs typeface="Calibri" pitchFamily="34" charset="-120"/>
               </a:rPr>
-              <a:t>Resolving a dispute twice refunded the customer twice</a:t>
-            </a:r>
-            <a:endParaRPr lang="en-US" sz="1350" dirty="0"/>
+              <a:t>Staff: forms list what your role may do and record you automatically</a:t>
+            </a:r>
+            <a:endParaRPr lang="en-US" sz="1200" dirty="0"/>
           </a:p>
           <a:p>
             <a:pPr marL="342900" indent="-342900">
@@ -10669,7 +11793,7 @@
               <a:buChar char="•"/>
             </a:pPr>
             <a:r>
-              <a:rPr lang="en-US" sz="1350" dirty="0">
+              <a:rPr lang="en-US" sz="1200" dirty="0">
                 <a:solidFill>
                   <a:srgbClr val="1D2B2A"/>
                 </a:solidFill>
@@ -10677,9 +11801,9 @@
                 <a:ea typeface="Calibri" pitchFamily="34" charset="-122"/>
                 <a:cs typeface="Calibri" pitchFamily="34" charset="-120"/>
               </a:rPr>
-              <a:t>Recording an ACTIVE card as found destroyed it</a:t>
-            </a:r>
-            <a:endParaRPr lang="en-US" sz="1350" dirty="0"/>
+              <a:t>Digital banking: own accounts plus companies under a mandate; approvals, cards, disputes</a:t>
+            </a:r>
+            <a:endParaRPr lang="en-US" sz="1200" dirty="0"/>
           </a:p>
           <a:p>
             <a:pPr marL="342900" indent="-342900">
@@ -10690,7 +11814,7 @@
               <a:buChar char="•"/>
             </a:pPr>
             <a:r>
-              <a:rPr lang="en-US" sz="1350" dirty="0">
+              <a:rPr lang="en-US" sz="1200" dirty="0">
                 <a:solidFill>
                   <a:srgbClr val="1D2B2A"/>
                 </a:solidFill>
@@ -10698,9 +11822,9 @@
                 <a:ea typeface="Calibri" pitchFamily="34" charset="-122"/>
                 <a:cs typeface="Calibri" pitchFamily="34" charset="-120"/>
               </a:rPr>
-              <a:t>Replacement cards blocked once the product was withdrawn</a:t>
-            </a:r>
-            <a:endParaRPr lang="en-US" sz="1350" dirty="0"/>
+              <a:t>80 forms and 14 guided checks cover every workflow in the brief</a:t>
+            </a:r>
+            <a:endParaRPr lang="en-US" sz="1200" dirty="0"/>
           </a:p>
           <a:p>
             <a:pPr marL="342900" indent="-342900">
@@ -10711,7 +11835,7 @@
               <a:buChar char="•"/>
             </a:pPr>
             <a:r>
-              <a:rPr lang="en-US" sz="1350" dirty="0">
+              <a:rPr lang="en-US" sz="1200" dirty="0">
                 <a:solidFill>
                   <a:srgbClr val="1D2B2A"/>
                 </a:solidFill>
@@ -10719,51 +11843,9 @@
                 <a:ea typeface="Calibri" pitchFamily="34" charset="-122"/>
                 <a:cs typeface="Calibri" pitchFamily="34" charset="-120"/>
               </a:rPr>
-              <a:t>Bank fees used up customers' savings withdrawals</a:t>
-            </a:r>
-            <a:endParaRPr lang="en-US" sz="1350" dirty="0"/>
-          </a:p>
-          <a:p>
-            <a:pPr marL="342900" indent="-342900">
-              <a:spcAft>
-                <a:spcPts val="600"/>
-              </a:spcAft>
-              <a:buSzPct val="100000"/>
-              <a:buChar char="•"/>
-            </a:pPr>
-            <a:r>
-              <a:rPr lang="en-US" sz="1350" dirty="0">
-                <a:solidFill>
-                  <a:srgbClr val="1D2B2A"/>
-                </a:solidFill>
-                <a:latin typeface="Calibri" pitchFamily="34" charset="0"/>
-                <a:ea typeface="Calibri" pitchFamily="34" charset="-122"/>
-                <a:cs typeface="Calibri" pitchFamily="34" charset="-120"/>
-              </a:rPr>
-              <a:t>Account closure ignored holds and pending payments</a:t>
-            </a:r>
-            <a:endParaRPr lang="en-US" sz="1350" dirty="0"/>
-          </a:p>
-          <a:p>
-            <a:pPr marL="342900" indent="-342900">
-              <a:spcAft>
-                <a:spcPts val="600"/>
-              </a:spcAft>
-              <a:buSzPct val="100000"/>
-              <a:buChar char="•"/>
-            </a:pPr>
-            <a:r>
-              <a:rPr lang="en-US" sz="1350" dirty="0">
-                <a:solidFill>
-                  <a:srgbClr val="1D2B2A"/>
-                </a:solidFill>
-                <a:latin typeface="Calibri" pitchFamily="34" charset="0"/>
-                <a:ea typeface="Calibri" pitchFamily="34" charset="-122"/>
-                <a:cs typeface="Calibri" pitchFamily="34" charset="-120"/>
-              </a:rPr>
-              <a:t>No delegated limit on credit approvals</a:t>
-            </a:r>
-            <a:endParaRPr lang="en-US" sz="1350" dirty="0"/>
+              <a:t>GUI classes inherit too: Page -&gt; MasterDetailPage, CustomerView, Chart</a:t>
+            </a:r>
+            <a:endParaRPr lang="en-US" sz="1200" dirty="0"/>
           </a:p>
         </p:txBody>
       </p:sp>
@@ -10778,6 +11860,353 @@
 <file path=ppt/slides/slide21.xml><?xml version="1.0" encoding="utf-8"?>
 <p:sld xmlns:a="http://schemas.openxmlformats.org/drawingml/2006/main" xmlns:r="http://schemas.openxmlformats.org/officeDocument/2006/relationships" xmlns:p="http://schemas.openxmlformats.org/presentationml/2006/main">
   <p:cSld name="Slide 21">
+    <p:bg>
+      <p:bgPr>
+        <a:solidFill>
+          <a:srgbClr val="FFFFFF"/>
+        </a:solidFill>
+      </p:bgPr>
+    </p:bg>
+    <p:spTree>
+      <p:nvGrpSpPr>
+        <p:cNvPr id="1" name=""/>
+        <p:cNvGrpSpPr/>
+        <p:nvPr/>
+      </p:nvGrpSpPr>
+      <p:grpSpPr>
+        <a:xfrm>
+          <a:off x="0" y="0"/>
+          <a:ext cx="0" cy="0"/>
+          <a:chOff x="0" y="0"/>
+          <a:chExt cx="0" cy="0"/>
+        </a:xfrm>
+      </p:grpSpPr>
+      <p:sp>
+        <p:nvSpPr>
+          <p:cNvPr id="2" name="Text 0"/>
+          <p:cNvSpPr txBox="1"/>
+          <p:nvPr/>
+        </p:nvSpPr>
+        <p:spPr>
+          <a:xfrm>
+            <a:off x="457200" y="274320"/>
+            <a:ext cx="8229600" cy="548640"/>
+          </a:xfrm>
+          <a:prstGeom prst="rect">
+            <a:avLst/>
+          </a:prstGeom>
+          <a:noFill/>
+          <a:ln/>
+        </p:spPr>
+        <p:txBody>
+          <a:bodyPr wrap="square" lIns="0" tIns="0" rIns="0" bIns="0" rtlCol="0" anchor="ctr">
+            <a:normAutofit/>
+          </a:bodyPr>
+          <a:lstStyle/>
+          <a:p>
+            <a:pPr indent="0" marL="0">
+              <a:buNone/>
+            </a:pPr>
+            <a:r>
+              <a:rPr lang="en-US" sz="2200" b="1" dirty="0">
+                <a:solidFill>
+                  <a:srgbClr val="0B4F4A"/>
+                </a:solidFill>
+                <a:latin typeface="Cambria" pitchFamily="34" charset="0"/>
+                <a:ea typeface="Cambria" pitchFamily="34" charset="-122"/>
+                <a:cs typeface="Cambria" pitchFamily="34" charset="-120"/>
+              </a:rPr>
+              <a:t>Code review: 20 defects fixed, each with a test</a:t>
+            </a:r>
+            <a:endParaRPr lang="en-US" sz="2200" dirty="0"/>
+          </a:p>
+        </p:txBody>
+      </p:sp>
+      <p:sp>
+        <p:nvSpPr>
+          <p:cNvPr id="3" name="Shape 1"/>
+          <p:cNvSpPr/>
+          <p:nvPr/>
+        </p:nvSpPr>
+        <p:spPr>
+          <a:xfrm>
+            <a:off x="457200" y="1097280"/>
+            <a:ext cx="2651760" cy="3566160"/>
+          </a:xfrm>
+          <a:prstGeom prst="roundRect">
+            <a:avLst>
+              <a:gd name="adj" fmla="val 2759"/>
+            </a:avLst>
+          </a:prstGeom>
+          <a:solidFill>
+            <a:srgbClr val="0B4F4A"/>
+          </a:solidFill>
+          <a:ln w="12700">
+            <a:solidFill>
+              <a:srgbClr val="0B4F4A"/>
+            </a:solidFill>
+            <a:prstDash val="solid"/>
+          </a:ln>
+        </p:spPr>
+      </p:sp>
+      <p:sp>
+        <p:nvSpPr>
+          <p:cNvPr id="4" name="Text 2"/>
+          <p:cNvSpPr txBox="1"/>
+          <p:nvPr/>
+        </p:nvSpPr>
+        <p:spPr>
+          <a:xfrm>
+            <a:off x="457200" y="1463040"/>
+            <a:ext cx="2651760" cy="1097280"/>
+          </a:xfrm>
+          <a:prstGeom prst="rect">
+            <a:avLst/>
+          </a:prstGeom>
+          <a:noFill/>
+          <a:ln/>
+        </p:spPr>
+        <p:txBody>
+          <a:bodyPr wrap="square" lIns="0" tIns="0" rIns="0" bIns="0" rtlCol="0" anchor="ctr"/>
+          <a:lstStyle/>
+          <a:p>
+            <a:pPr algn="ctr" indent="0" marL="0">
+              <a:buNone/>
+            </a:pPr>
+            <a:r>
+              <a:rPr lang="en-US" sz="6000" b="1" dirty="0">
+                <a:solidFill>
+                  <a:srgbClr val="FFFFFF"/>
+                </a:solidFill>
+                <a:latin typeface="Cambria" pitchFamily="34" charset="0"/>
+                <a:ea typeface="Cambria" pitchFamily="34" charset="-122"/>
+                <a:cs typeface="Cambria" pitchFamily="34" charset="-120"/>
+              </a:rPr>
+              <a:t>20</a:t>
+            </a:r>
+            <a:endParaRPr lang="en-US" sz="6000" dirty="0"/>
+          </a:p>
+        </p:txBody>
+      </p:sp>
+      <p:sp>
+        <p:nvSpPr>
+          <p:cNvPr id="5" name="Text 3"/>
+          <p:cNvSpPr txBox="1"/>
+          <p:nvPr/>
+        </p:nvSpPr>
+        <p:spPr>
+          <a:xfrm>
+            <a:off x="685800" y="2651760"/>
+            <a:ext cx="2194560" cy="1097280"/>
+          </a:xfrm>
+          <a:prstGeom prst="rect">
+            <a:avLst/>
+          </a:prstGeom>
+          <a:noFill/>
+          <a:ln/>
+        </p:spPr>
+        <p:txBody>
+          <a:bodyPr wrap="square" lIns="0" tIns="0" rIns="0" bIns="0" rtlCol="0" anchor="ctr"/>
+          <a:lstStyle/>
+          <a:p>
+            <a:pPr algn="ctr" indent="0" marL="0">
+              <a:buNone/>
+            </a:pPr>
+            <a:r>
+              <a:rPr lang="en-US" sz="1400" dirty="0">
+                <a:solidFill>
+                  <a:srgbClr val="CFE3DF"/>
+                </a:solidFill>
+                <a:latin typeface="Calibri" pitchFamily="34" charset="0"/>
+                <a:ea typeface="Calibri" pitchFamily="34" charset="-122"/>
+                <a:cs typeface="Calibri" pitchFamily="34" charset="-120"/>
+              </a:rPr>
+              <a:t>defects found and fixed, each with a regression test</a:t>
+            </a:r>
+            <a:endParaRPr lang="en-US" sz="1400" dirty="0"/>
+          </a:p>
+        </p:txBody>
+      </p:sp>
+      <p:sp>
+        <p:nvSpPr>
+          <p:cNvPr id="6" name="Text 4"/>
+          <p:cNvSpPr txBox="1"/>
+          <p:nvPr/>
+        </p:nvSpPr>
+        <p:spPr>
+          <a:xfrm>
+            <a:off x="3474720" y="1143000"/>
+            <a:ext cx="5212080" cy="3566160"/>
+          </a:xfrm>
+          <a:prstGeom prst="rect">
+            <a:avLst/>
+          </a:prstGeom>
+          <a:noFill/>
+          <a:ln/>
+        </p:spPr>
+        <p:txBody>
+          <a:bodyPr wrap="square" lIns="635" tIns="635" rIns="635" bIns="635" rtlCol="0" anchor="t"/>
+          <a:lstStyle/>
+          <a:p>
+            <a:pPr marL="342900" indent="-342900">
+              <a:spcAft>
+                <a:spcPts val="600"/>
+              </a:spcAft>
+              <a:buSzPct val="100000"/>
+              <a:buChar char="•"/>
+            </a:pPr>
+            <a:r>
+              <a:rPr lang="en-US" sz="1350" dirty="0">
+                <a:solidFill>
+                  <a:srgbClr val="1D2B2A"/>
+                </a:solidFill>
+                <a:latin typeface="Calibri" pitchFamily="34" charset="0"/>
+                <a:ea typeface="Calibri" pitchFamily="34" charset="-122"/>
+                <a:cs typeface="Calibri" pitchFamily="34" charset="-120"/>
+              </a:rPr>
+              <a:t>A refused loan overpayment still marked installments as paid</a:t>
+            </a:r>
+            <a:endParaRPr lang="en-US" sz="1350" dirty="0"/>
+          </a:p>
+          <a:p>
+            <a:pPr marL="342900" indent="-342900">
+              <a:spcAft>
+                <a:spcPts val="600"/>
+              </a:spcAft>
+              <a:buSzPct val="100000"/>
+              <a:buChar char="•"/>
+            </a:pPr>
+            <a:r>
+              <a:rPr lang="en-US" sz="1350" dirty="0">
+                <a:solidFill>
+                  <a:srgbClr val="1D2B2A"/>
+                </a:solidFill>
+                <a:latin typeface="Calibri" pitchFamily="34" charset="0"/>
+                <a:ea typeface="Calibri" pitchFamily="34" charset="-122"/>
+                <a:cs typeface="Calibri" pitchFamily="34" charset="-120"/>
+              </a:rPr>
+              <a:t>Resolving a dispute twice refunded the customer twice</a:t>
+            </a:r>
+            <a:endParaRPr lang="en-US" sz="1350" dirty="0"/>
+          </a:p>
+          <a:p>
+            <a:pPr marL="342900" indent="-342900">
+              <a:spcAft>
+                <a:spcPts val="600"/>
+              </a:spcAft>
+              <a:buSzPct val="100000"/>
+              <a:buChar char="•"/>
+            </a:pPr>
+            <a:r>
+              <a:rPr lang="en-US" sz="1350" dirty="0">
+                <a:solidFill>
+                  <a:srgbClr val="1D2B2A"/>
+                </a:solidFill>
+                <a:latin typeface="Calibri" pitchFamily="34" charset="0"/>
+                <a:ea typeface="Calibri" pitchFamily="34" charset="-122"/>
+                <a:cs typeface="Calibri" pitchFamily="34" charset="-120"/>
+              </a:rPr>
+              <a:t>Recording an ACTIVE card as found destroyed it</a:t>
+            </a:r>
+            <a:endParaRPr lang="en-US" sz="1350" dirty="0"/>
+          </a:p>
+          <a:p>
+            <a:pPr marL="342900" indent="-342900">
+              <a:spcAft>
+                <a:spcPts val="600"/>
+              </a:spcAft>
+              <a:buSzPct val="100000"/>
+              <a:buChar char="•"/>
+            </a:pPr>
+            <a:r>
+              <a:rPr lang="en-US" sz="1350" dirty="0">
+                <a:solidFill>
+                  <a:srgbClr val="1D2B2A"/>
+                </a:solidFill>
+                <a:latin typeface="Calibri" pitchFamily="34" charset="0"/>
+                <a:ea typeface="Calibri" pitchFamily="34" charset="-122"/>
+                <a:cs typeface="Calibri" pitchFamily="34" charset="-120"/>
+              </a:rPr>
+              <a:t>Replacement cards blocked once the product was withdrawn</a:t>
+            </a:r>
+            <a:endParaRPr lang="en-US" sz="1350" dirty="0"/>
+          </a:p>
+          <a:p>
+            <a:pPr marL="342900" indent="-342900">
+              <a:spcAft>
+                <a:spcPts val="600"/>
+              </a:spcAft>
+              <a:buSzPct val="100000"/>
+              <a:buChar char="•"/>
+            </a:pPr>
+            <a:r>
+              <a:rPr lang="en-US" sz="1350" dirty="0">
+                <a:solidFill>
+                  <a:srgbClr val="1D2B2A"/>
+                </a:solidFill>
+                <a:latin typeface="Calibri" pitchFamily="34" charset="0"/>
+                <a:ea typeface="Calibri" pitchFamily="34" charset="-122"/>
+                <a:cs typeface="Calibri" pitchFamily="34" charset="-120"/>
+              </a:rPr>
+              <a:t>Bank fees used up customers' savings withdrawals</a:t>
+            </a:r>
+            <a:endParaRPr lang="en-US" sz="1350" dirty="0"/>
+          </a:p>
+          <a:p>
+            <a:pPr marL="342900" indent="-342900">
+              <a:spcAft>
+                <a:spcPts val="600"/>
+              </a:spcAft>
+              <a:buSzPct val="100000"/>
+              <a:buChar char="•"/>
+            </a:pPr>
+            <a:r>
+              <a:rPr lang="en-US" sz="1350" dirty="0">
+                <a:solidFill>
+                  <a:srgbClr val="1D2B2A"/>
+                </a:solidFill>
+                <a:latin typeface="Calibri" pitchFamily="34" charset="0"/>
+                <a:ea typeface="Calibri" pitchFamily="34" charset="-122"/>
+                <a:cs typeface="Calibri" pitchFamily="34" charset="-120"/>
+              </a:rPr>
+              <a:t>Account closure ignored holds and pending payments</a:t>
+            </a:r>
+            <a:endParaRPr lang="en-US" sz="1350" dirty="0"/>
+          </a:p>
+          <a:p>
+            <a:pPr marL="342900" indent="-342900">
+              <a:spcAft>
+                <a:spcPts val="600"/>
+              </a:spcAft>
+              <a:buSzPct val="100000"/>
+              <a:buChar char="•"/>
+            </a:pPr>
+            <a:r>
+              <a:rPr lang="en-US" sz="1350" dirty="0">
+                <a:solidFill>
+                  <a:srgbClr val="1D2B2A"/>
+                </a:solidFill>
+                <a:latin typeface="Calibri" pitchFamily="34" charset="0"/>
+                <a:ea typeface="Calibri" pitchFamily="34" charset="-122"/>
+                <a:cs typeface="Calibri" pitchFamily="34" charset="-120"/>
+              </a:rPr>
+              <a:t>No delegated limit on credit approvals</a:t>
+            </a:r>
+            <a:endParaRPr lang="en-US" sz="1350" dirty="0"/>
+          </a:p>
+        </p:txBody>
+      </p:sp>
+    </p:spTree>
+  </p:cSld>
+  <p:clrMapOvr>
+    <a:masterClrMapping/>
+  </p:clrMapOvr>
+</p:sld>
+</file>
+
+<file path=ppt/slides/slide22.xml><?xml version="1.0" encoding="utf-8"?>
+<p:sld xmlns:a="http://schemas.openxmlformats.org/drawingml/2006/main" xmlns:r="http://schemas.openxmlformats.org/officeDocument/2006/relationships" xmlns:p="http://schemas.openxmlformats.org/presentationml/2006/main">
+  <p:cSld name="Slide 22">
     <p:bg>
       <p:bgPr>
         <a:solidFill>
@@ -11234,7 +12663,7 @@
                 <a:ea typeface="Cambria" pitchFamily="34" charset="-122"/>
                 <a:cs typeface="Cambria" pitchFamily="34" charset="-120"/>
               </a:rPr>
-              <a:t>Domain research: eight sources</a:t>
+              <a:t>Domain research: eight banking sources</a:t>
             </a:r>
             <a:endParaRPr lang="en-US" sz="2800" dirty="0"/>
           </a:p>
@@ -12599,8 +14028,8 @@
         </p:nvSpPr>
         <p:spPr>
           <a:xfrm>
-            <a:off x="457200" y="4663440"/>
-            <a:ext cx="8229600" cy="274320"/>
+            <a:off x="457200" y="4553712"/>
+            <a:ext cx="8229600" cy="457200"/>
           </a:xfrm>
           <a:prstGeom prst="rect">
             <a:avLst/>
@@ -12624,7 +14053,7 @@
                 <a:ea typeface="Calibri" pitchFamily="34" charset="-122"/>
                 <a:cs typeface="Calibri" pitchFamily="34" charset="-120"/>
               </a:rPr>
-              <a:t>Full references and a 27-term glossary: design report section 1</a:t>
+              <a:t>Plus four behind the code: the IBAN standard, card numbering (ISO/IEC 7812), PCI DSS, and Money / JSON / xUnit. All twelve and a 31-term glossary: report section 1</a:t>
             </a:r>
             <a:endParaRPr lang="en-US" sz="1050" dirty="0"/>
           </a:p>
@@ -13799,6 +15228,212 @@
                   </a:tcPr>
                 </a:tc>
               </a:tr>
+              <a:tr h="566928">
+                <a:tc>
+                  <a:txBody>
+                    <a:bodyPr/>
+                    <a:lstStyle/>
+                    <a:p>
+                      <a:pPr indent="0" marL="0">
+                        <a:buNone/>
+                      </a:pPr>
+                      <a:r>
+                        <a:rPr lang="en-US" sz="1150" dirty="0">
+                          <a:solidFill>
+                            <a:srgbClr val="1D2B2A"/>
+                          </a:solidFill>
+                          <a:latin typeface="Calibri" pitchFamily="34" charset="0"/>
+                          <a:ea typeface="Calibri" pitchFamily="34" charset="-122"/>
+                          <a:cs typeface="Calibri" pitchFamily="34" charset="-120"/>
+                        </a:rPr>
+                        <a:t>A payee's account number is free text</a:t>
+                      </a:r>
+                      <a:endParaRPr lang="en-US" sz="1150" dirty="0">
+                        <a:latin typeface="Calibri" charset="0"/>
+                        <a:ea typeface="Calibri" charset="0"/>
+                        <a:cs typeface="Calibri" charset="0"/>
+                      </a:endParaRPr>
+                    </a:p>
+                  </a:txBody>
+                  <a:tcPr marL="91440" marR="91440" marT="45720" marB="45720" anchor="ctr">
+                    <a:lnL w="6350" cap="flat" cmpd="sng" algn="ctr">
+                      <a:solidFill>
+                        <a:srgbClr val="D5E0DD"/>
+                      </a:solidFill>
+                      <a:prstDash val="solid"/>
+                      <a:round/>
+                      <a:headEnd type="none" w="med" len="med"/>
+                      <a:tailEnd type="none" w="med" len="med"/>
+                    </a:lnL>
+                    <a:lnR w="6350" cap="flat" cmpd="sng" algn="ctr">
+                      <a:solidFill>
+                        <a:srgbClr val="D5E0DD"/>
+                      </a:solidFill>
+                      <a:prstDash val="solid"/>
+                      <a:round/>
+                      <a:headEnd type="none" w="med" len="med"/>
+                      <a:tailEnd type="none" w="med" len="med"/>
+                    </a:lnR>
+                    <a:lnT w="6350" cap="flat" cmpd="sng" algn="ctr">
+                      <a:solidFill>
+                        <a:srgbClr val="D5E0DD"/>
+                      </a:solidFill>
+                      <a:prstDash val="solid"/>
+                      <a:round/>
+                      <a:headEnd type="none" w="med" len="med"/>
+                      <a:tailEnd type="none" w="med" len="med"/>
+                    </a:lnT>
+                    <a:lnB w="6350" cap="flat" cmpd="sng" algn="ctr">
+                      <a:solidFill>
+                        <a:srgbClr val="D5E0DD"/>
+                      </a:solidFill>
+                      <a:prstDash val="solid"/>
+                      <a:round/>
+                      <a:headEnd type="none" w="med" len="med"/>
+                      <a:tailEnd type="none" w="med" len="med"/>
+                    </a:lnB>
+                    <a:solidFill>
+                      <a:srgbClr val="F4F8F7"/>
+                    </a:solidFill>
+                  </a:tcPr>
+                </a:tc>
+                <a:tc>
+                  <a:txBody>
+                    <a:bodyPr/>
+                    <a:lstStyle/>
+                    <a:p>
+                      <a:pPr indent="0" marL="0">
+                        <a:buNone/>
+                      </a:pPr>
+                      <a:r>
+                        <a:rPr lang="en-US" sz="1150" dirty="0">
+                          <a:solidFill>
+                            <a:srgbClr val="1D2B2A"/>
+                          </a:solidFill>
+                          <a:latin typeface="Calibri" pitchFamily="34" charset="0"/>
+                          <a:ea typeface="Calibri" pitchFamily="34" charset="-122"/>
+                          <a:cs typeface="Calibri" pitchFamily="34" charset="-120"/>
+                        </a:rPr>
+                        <a:t>IBAN standard: check digits catch typing mistakes</a:t>
+                      </a:r>
+                      <a:endParaRPr lang="en-US" sz="1150" dirty="0">
+                        <a:latin typeface="Calibri" charset="0"/>
+                        <a:ea typeface="Calibri" charset="0"/>
+                        <a:cs typeface="Calibri" charset="0"/>
+                      </a:endParaRPr>
+                    </a:p>
+                  </a:txBody>
+                  <a:tcPr marL="91440" marR="91440" marT="45720" marB="45720" anchor="ctr">
+                    <a:lnL w="6350" cap="flat" cmpd="sng" algn="ctr">
+                      <a:solidFill>
+                        <a:srgbClr val="D5E0DD"/>
+                      </a:solidFill>
+                      <a:prstDash val="solid"/>
+                      <a:round/>
+                      <a:headEnd type="none" w="med" len="med"/>
+                      <a:tailEnd type="none" w="med" len="med"/>
+                    </a:lnL>
+                    <a:lnR w="6350" cap="flat" cmpd="sng" algn="ctr">
+                      <a:solidFill>
+                        <a:srgbClr val="D5E0DD"/>
+                      </a:solidFill>
+                      <a:prstDash val="solid"/>
+                      <a:round/>
+                      <a:headEnd type="none" w="med" len="med"/>
+                      <a:tailEnd type="none" w="med" len="med"/>
+                    </a:lnR>
+                    <a:lnT w="6350" cap="flat" cmpd="sng" algn="ctr">
+                      <a:solidFill>
+                        <a:srgbClr val="D5E0DD"/>
+                      </a:solidFill>
+                      <a:prstDash val="solid"/>
+                      <a:round/>
+                      <a:headEnd type="none" w="med" len="med"/>
+                      <a:tailEnd type="none" w="med" len="med"/>
+                    </a:lnT>
+                    <a:lnB w="6350" cap="flat" cmpd="sng" algn="ctr">
+                      <a:solidFill>
+                        <a:srgbClr val="D5E0DD"/>
+                      </a:solidFill>
+                      <a:prstDash val="solid"/>
+                      <a:round/>
+                      <a:headEnd type="none" w="med" len="med"/>
+                      <a:tailEnd type="none" w="med" len="med"/>
+                    </a:lnB>
+                    <a:solidFill>
+                      <a:srgbClr val="F4F8F7"/>
+                    </a:solidFill>
+                  </a:tcPr>
+                </a:tc>
+                <a:tc>
+                  <a:txBody>
+                    <a:bodyPr/>
+                    <a:lstStyle/>
+                    <a:p>
+                      <a:pPr indent="0" marL="0">
+                        <a:buNone/>
+                      </a:pPr>
+                      <a:r>
+                        <a:rPr lang="en-US" sz="1150" dirty="0">
+                          <a:solidFill>
+                            <a:srgbClr val="1D2B2A"/>
+                          </a:solidFill>
+                          <a:latin typeface="Calibri" pitchFamily="34" charset="0"/>
+                          <a:ea typeface="Calibri" pitchFamily="34" charset="-122"/>
+                          <a:cs typeface="Calibri" pitchFamily="34" charset="-120"/>
+                        </a:rPr>
+                        <a:t>Iban class; a mistyped IBAN is refused</a:t>
+                      </a:r>
+                      <a:endParaRPr lang="en-US" sz="1150" dirty="0">
+                        <a:latin typeface="Calibri" charset="0"/>
+                        <a:ea typeface="Calibri" charset="0"/>
+                        <a:cs typeface="Calibri" charset="0"/>
+                      </a:endParaRPr>
+                    </a:p>
+                  </a:txBody>
+                  <a:tcPr marL="91440" marR="91440" marT="45720" marB="45720" anchor="ctr">
+                    <a:lnL w="6350" cap="flat" cmpd="sng" algn="ctr">
+                      <a:solidFill>
+                        <a:srgbClr val="D5E0DD"/>
+                      </a:solidFill>
+                      <a:prstDash val="solid"/>
+                      <a:round/>
+                      <a:headEnd type="none" w="med" len="med"/>
+                      <a:tailEnd type="none" w="med" len="med"/>
+                    </a:lnL>
+                    <a:lnR w="6350" cap="flat" cmpd="sng" algn="ctr">
+                      <a:solidFill>
+                        <a:srgbClr val="D5E0DD"/>
+                      </a:solidFill>
+                      <a:prstDash val="solid"/>
+                      <a:round/>
+                      <a:headEnd type="none" w="med" len="med"/>
+                      <a:tailEnd type="none" w="med" len="med"/>
+                    </a:lnR>
+                    <a:lnT w="6350" cap="flat" cmpd="sng" algn="ctr">
+                      <a:solidFill>
+                        <a:srgbClr val="D5E0DD"/>
+                      </a:solidFill>
+                      <a:prstDash val="solid"/>
+                      <a:round/>
+                      <a:headEnd type="none" w="med" len="med"/>
+                      <a:tailEnd type="none" w="med" len="med"/>
+                    </a:lnT>
+                    <a:lnB w="6350" cap="flat" cmpd="sng" algn="ctr">
+                      <a:solidFill>
+                        <a:srgbClr val="D5E0DD"/>
+                      </a:solidFill>
+                      <a:prstDash val="solid"/>
+                      <a:round/>
+                      <a:headEnd type="none" w="med" len="med"/>
+                      <a:tailEnd type="none" w="med" len="med"/>
+                    </a:lnB>
+                    <a:solidFill>
+                      <a:srgbClr val="F4F8F7"/>
+                    </a:solidFill>
+                  </a:tcPr>
+                </a:tc>
+              </a:tr>
             </a:tbl>
           </a:graphicData>
         </a:graphic>
@@ -13909,7 +15544,7 @@
                 <a:ea typeface="Calibri" pitchFamily="34" charset="-122"/>
                 <a:cs typeface="Calibri" pitchFamily="34" charset="-120"/>
               </a:rPr>
-              <a:t>One Python file, standard library only - banking_system.py</a:t>
+              <a:t>One Python file, no libraries - banking_system.py</a:t>
             </a:r>
             <a:endParaRPr lang="en-US" sz="1200" dirty="0"/>
           </a:p>
@@ -13975,7 +15610,7 @@
                 <a:ea typeface="Cambria" pitchFamily="34" charset="-122"/>
                 <a:cs typeface="Cambria" pitchFamily="34" charset="-120"/>
               </a:rPr>
-              <a:t>71</a:t>
+              <a:t>74</a:t>
             </a:r>
             <a:endParaRPr lang="en-US" sz="4000" dirty="0"/>
           </a:p>
@@ -14014,7 +15649,7 @@
                 <a:ea typeface="Calibri" pitchFamily="34" charset="-122"/>
                 <a:cs typeface="Calibri" pitchFamily="34" charset="-120"/>
               </a:rPr>
-              <a:t>business classes (+9 supporting)</a:t>
+              <a:t>business classes (+16 supporting)</a:t>
             </a:r>
             <a:endParaRPr lang="en-US" sz="1300" dirty="0"/>
           </a:p>
@@ -14395,7 +16030,7 @@
                 <a:ea typeface="Cambria" pitchFamily="34" charset="-122"/>
                 <a:cs typeface="Cambria" pitchFamily="34" charset="-120"/>
               </a:rPr>
-              <a:t>77</a:t>
+              <a:t>81</a:t>
             </a:r>
             <a:endParaRPr lang="en-US" sz="4000" dirty="0"/>
           </a:p>

--- a/docs/Viva_Presentation.pptx
+++ b/docs/Viva_Presentation.pptx
@@ -27,9 +27,11 @@
     <p:sldId id="275" r:id="rId21"/>
     <p:sldId id="276" r:id="rId22"/>
     <p:sldId id="277" r:id="rId23"/>
+    <p:sldId id="278" r:id="rId24"/>
+    <p:sldId id="279" r:id="rId25"/>
   </p:sldIdLst>
   <p:notesMasterIdLst>
-    <p:notesMasterId r:id="rId24"/>
+    <p:notesMasterId r:id="rId26"/>
   </p:notesMasterIdLst>
   <p:sldSz cx="9144000" cy="5143500"/>
   <p:notesSz cx="5143500" cy="9144000"/>
@@ -1051,7 +1053,7 @@
           <a:p>
             <a:r>
               <a:rPr lang="en-US" dirty="0"/>
-              <a:t>Run python banking_system.py to show them live. Each refusal prints the exact rule, e.g. AuthorityError: the initiator cannot also be the second signatory.</a:t>
+              <a:t>SOLID was used as a checklist, not as decoration. Single responsibility: small classes each do one job; Bank is the exception, an application service that coordinates while the rules live in the domain classes. Open/closed: two type checks were found and replaced; a test defines a new IslamicTermDeposit subclass and the bank handles it unchanged. Liskov: SavingsAccount refuses more debits than its parent, but only with the same kind of BankingError, so every caller still works. Report section 6.4.</a:t>
             </a:r>
             <a:endParaRPr lang="en-US" dirty="0"/>
           </a:p>
@@ -1139,7 +1141,7 @@
           <a:p>
             <a:r>
               <a:rPr lang="en-US" dirty="0"/>
-              <a:t>Report section 3.2 maps every participant, research area and scope item in the brief to a class, operation and scenario. Section 3.1 answers the brief's eight open questions one by one.</a:t>
+              <a:t>Run python banking_system.py to show them live. Each refusal prints the exact rule, e.g. AuthorityError: the initiator cannot also be the second signatory.</a:t>
             </a:r>
             <a:endParaRPr lang="en-US" dirty="0"/>
           </a:p>
@@ -1227,7 +1229,7 @@
           <a:p>
             <a:r>
               <a:rPr lang="en-US" dirty="0"/>
-              <a:t>The class diagrams show structure; the flowcharts show behaviour. Walk through the transfer: beneficiary, authority (mandate within limit), funds, dual control, then the PKR 1,000,000 compliance hold. Every red terminator is a refusal that is still kept on record.</a:t>
+              <a:t>Report section 3.2 maps every participant, research area and scope item in the brief to a class, operation and scenario. Section 3.1 answers the brief's eight open questions one by one.</a:t>
             </a:r>
             <a:endParaRPr lang="en-US" dirty="0"/>
           </a:p>
@@ -1315,7 +1317,7 @@
           <a:p>
             <a:r>
               <a:rPr lang="en-US" dirty="0"/>
-              <a:t>These are not marked by the brief; they show the same OOP thinking. The repository is a template method: the format lives once in the parent. The assistant can only read and pre-fill; a person presses Run, so every rule still applies.</a:t>
+              <a:t>The class diagrams show structure; the flowcharts show behaviour. Walk through the transfer: beneficiary, authority (mandate within limit), funds, dual control, then the PKR 1,000,000 compliance hold. Every red terminator is a refusal that is still kept on record.</a:t>
             </a:r>
             <a:endParaRPr lang="en-US" dirty="0"/>
           </a:p>
@@ -1403,7 +1405,7 @@
           <a:p>
             <a:r>
               <a:rPr lang="en-US" dirty="0"/>
-              <a:t>Every piece a library would normally give me is a small class I can explain: an exact fraction for money, the Gregorian calendar for dates, my own abstract-class check, a JSON reader with one method per grammar rule, and an xUnit-style test runner. Money is a subclass of Exact: it inherits the arithmetic and only adds paisa rounding. The research added two checks banks run before money moves: IBAN check digits (mod 97) and the Luhn digit on card numbers, and the bank keeps only six plus four card digits.</a:t>
+              <a:t>The class diagrams show what each class is, the flowcharts the order of the checks. The sequence diagram shows which objects talk to each other over three days for one real payment. Point at the three moments: Hamza starts it, Ayesha approves it, Kamran releases it. Notice that the mandate and the funds are asked again at each step, because they can change in between. Report section 4.3.</a:t>
             </a:r>
             <a:endParaRPr lang="en-US" dirty="0"/>
           </a:p>
@@ -1579,7 +1581,7 @@
           <a:p>
             <a:r>
               <a:rPr lang="en-US" dirty="0"/>
-              <a:t>Follow the demo path in docs/Final_Presentation_Script.md. Sign in as Kamran (compliance) and show the Overview and a guided check. Then switch user to digital banking: Noor is refused (view only), Hamza starts a PKR 1.2m payment that waits for a 2nd signatory, Ayesha approves it. The GUI contains no business rules: refusals come from the model and name its rule.</a:t>
+              <a:t>These are not marked by the brief; they show the same OOP thinking. The repository is a template method: the format lives once in the parent. The assistant can only read and pre-fill; a person presses Run, so every rule still applies.</a:t>
             </a:r>
             <a:endParaRPr lang="en-US" dirty="0"/>
           </a:p>
@@ -1667,7 +1669,7 @@
           <a:p>
             <a:r>
               <a:rPr lang="en-US" dirty="0"/>
-              <a:t>Full table in docs/Code_Review.md. Every fix is protected by a test, so it cannot silently come back.</a:t>
+              <a:t>Every piece a library would normally give me is a small class I can explain: an exact fraction for money, the Gregorian calendar for dates, my own abstract-class check, a JSON reader with one method per grammar rule, and an xUnit-style test runner. Money is a subclass of Exact: it inherits the arithmetic and only adds paisa rounding. The research added two checks banks run before money moves: IBAN check digits (mod 97) and the Luhn digit on card numbers, and the bank keeps only six plus four card digits.</a:t>
             </a:r>
             <a:endParaRPr lang="en-US" dirty="0"/>
           </a:p>
@@ -1755,7 +1757,7 @@
           <a:p>
             <a:r>
               <a:rPr lang="en-US" dirty="0"/>
-              <a:t>The Arrangement level is where the design pays off for new business models: an Ijarah or Murabaha contract is a new kind of arrangement, not a change to existing classes.</a:t>
+              <a:t>Follow the demo path in docs/Final_Presentation_Script.md. Sign in as Kamran (compliance) and show the Overview and a guided check. Then switch user to digital banking: Noor is refused (view only), Hamza starts a PKR 1.2m payment that waits for a 2nd signatory, Ayesha approves it. The GUI contains no business rules: refusals come from the model and name its rule.</a:t>
             </a:r>
             <a:endParaRPr lang="en-US" dirty="0"/>
           </a:p>
@@ -1779,6 +1781,182 @@
             <a:fld id="{F7021451-1387-4CA6-816F-3879F97B5CBC}" type="slidenum">
               <a:rPr lang="en-US"/>
               <a:t>22</a:t>
+            </a:fld>
+            <a:endParaRPr lang="en-US"/>
+          </a:p>
+        </p:txBody>
+      </p:sp>
+    </p:spTree>
+    <p:extLst>
+      <p:ext uri="{BB962C8B-B14F-4D97-AF65-F5344CB8AC3E}">
+        <p14:creationId xmlns:p14="http://schemas.microsoft.com/office/powerpoint/2010/main" val="1024086991"/>
+      </p:ext>
+    </p:extLst>
+  </p:cSld>
+  <p:clrMapOvr>
+    <a:masterClrMapping/>
+  </p:clrMapOvr>
+</p:notes>
+</file>
+
+<file path=ppt/notesSlides/notesSlide23.xml><?xml version="1.0" encoding="utf-8"?>
+<p:notes xmlns:a="http://schemas.openxmlformats.org/drawingml/2006/main" xmlns:r="http://schemas.openxmlformats.org/officeDocument/2006/relationships" xmlns:p="http://schemas.openxmlformats.org/presentationml/2006/main">
+  <p:cSld>
+    <p:spTree>
+      <p:nvGrpSpPr>
+        <p:cNvPr id="1" name=""/>
+        <p:cNvGrpSpPr/>
+        <p:nvPr/>
+      </p:nvGrpSpPr>
+      <p:grpSpPr>
+        <a:xfrm>
+          <a:off x="0" y="0"/>
+          <a:ext cx="0" cy="0"/>
+          <a:chOff x="0" y="0"/>
+          <a:chExt cx="0" cy="0"/>
+        </a:xfrm>
+      </p:grpSpPr>
+      <p:sp>
+        <p:nvSpPr>
+          <p:cNvPr id="2" name="Slide Image Placeholder 1"/>
+          <p:cNvSpPr>
+            <a:spLocks noGrp="1" noRot="1" noChangeAspect="1"/>
+          </p:cNvSpPr>
+          <p:nvPr>
+            <p:ph type="sldImg"/>
+          </p:nvPr>
+        </p:nvSpPr>
+        <p:spPr/>
+      </p:sp>
+      <p:sp>
+        <p:nvSpPr>
+          <p:cNvPr id="3" name="Notes Placeholder 2"/>
+          <p:cNvSpPr>
+            <a:spLocks noGrp="1"/>
+          </p:cNvSpPr>
+          <p:nvPr>
+            <p:ph type="body" idx="1"/>
+          </p:nvPr>
+        </p:nvSpPr>
+        <p:spPr/>
+        <p:txBody>
+          <a:bodyPr/>
+          <a:lstStyle/>
+          <a:p>
+            <a:r>
+              <a:rPr lang="en-US" dirty="0"/>
+              <a:t>Full table in docs/Code_Review.md. Every fix is protected by a test, so it cannot silently come back.</a:t>
+            </a:r>
+            <a:endParaRPr lang="en-US" dirty="0"/>
+          </a:p>
+        </p:txBody>
+      </p:sp>
+      <p:sp>
+        <p:nvSpPr>
+          <p:cNvPr id="4" name="Slide Number Placeholder 3"/>
+          <p:cNvSpPr>
+            <a:spLocks noGrp="1"/>
+          </p:cNvSpPr>
+          <p:nvPr>
+            <p:ph type="sldNum" sz="quarter" idx="10"/>
+          </p:nvPr>
+        </p:nvSpPr>
+        <p:spPr/>
+        <p:txBody>
+          <a:bodyPr/>
+          <a:lstStyle/>
+          <a:p>
+            <a:fld id="{F7021451-1387-4CA6-816F-3879F97B5CBC}" type="slidenum">
+              <a:rPr lang="en-US"/>
+              <a:t>23</a:t>
+            </a:fld>
+            <a:endParaRPr lang="en-US"/>
+          </a:p>
+        </p:txBody>
+      </p:sp>
+    </p:spTree>
+    <p:extLst>
+      <p:ext uri="{BB962C8B-B14F-4D97-AF65-F5344CB8AC3E}">
+        <p14:creationId xmlns:p14="http://schemas.microsoft.com/office/powerpoint/2010/main" val="1024086991"/>
+      </p:ext>
+    </p:extLst>
+  </p:cSld>
+  <p:clrMapOvr>
+    <a:masterClrMapping/>
+  </p:clrMapOvr>
+</p:notes>
+</file>
+
+<file path=ppt/notesSlides/notesSlide24.xml><?xml version="1.0" encoding="utf-8"?>
+<p:notes xmlns:a="http://schemas.openxmlformats.org/drawingml/2006/main" xmlns:r="http://schemas.openxmlformats.org/officeDocument/2006/relationships" xmlns:p="http://schemas.openxmlformats.org/presentationml/2006/main">
+  <p:cSld>
+    <p:spTree>
+      <p:nvGrpSpPr>
+        <p:cNvPr id="1" name=""/>
+        <p:cNvGrpSpPr/>
+        <p:nvPr/>
+      </p:nvGrpSpPr>
+      <p:grpSpPr>
+        <a:xfrm>
+          <a:off x="0" y="0"/>
+          <a:ext cx="0" cy="0"/>
+          <a:chOff x="0" y="0"/>
+          <a:chExt cx="0" cy="0"/>
+        </a:xfrm>
+      </p:grpSpPr>
+      <p:sp>
+        <p:nvSpPr>
+          <p:cNvPr id="2" name="Slide Image Placeholder 1"/>
+          <p:cNvSpPr>
+            <a:spLocks noGrp="1" noRot="1" noChangeAspect="1"/>
+          </p:cNvSpPr>
+          <p:nvPr>
+            <p:ph type="sldImg"/>
+          </p:nvPr>
+        </p:nvSpPr>
+        <p:spPr/>
+      </p:sp>
+      <p:sp>
+        <p:nvSpPr>
+          <p:cNvPr id="3" name="Notes Placeholder 2"/>
+          <p:cNvSpPr>
+            <a:spLocks noGrp="1"/>
+          </p:cNvSpPr>
+          <p:nvPr>
+            <p:ph type="body" idx="1"/>
+          </p:nvPr>
+        </p:nvSpPr>
+        <p:spPr/>
+        <p:txBody>
+          <a:bodyPr/>
+          <a:lstStyle/>
+          <a:p>
+            <a:r>
+              <a:rPr lang="en-US" dirty="0"/>
+              <a:t>The Arrangement level is where the design pays off for new business models: an Ijarah or Murabaha contract is a new kind of arrangement, not a change to existing classes.</a:t>
+            </a:r>
+            <a:endParaRPr lang="en-US" dirty="0"/>
+          </a:p>
+        </p:txBody>
+      </p:sp>
+      <p:sp>
+        <p:nvSpPr>
+          <p:cNvPr id="4" name="Slide Number Placeholder 3"/>
+          <p:cNvSpPr>
+            <a:spLocks noGrp="1"/>
+          </p:cNvSpPr>
+          <p:nvPr>
+            <p:ph type="sldNum" sz="quarter" idx="10"/>
+          </p:nvPr>
+        </p:nvSpPr>
+        <p:spPr/>
+        <p:txBody>
+          <a:bodyPr/>
+          <a:lstStyle/>
+          <a:p>
+            <a:fld id="{F7021451-1387-4CA6-816F-3879F97B5CBC}" type="slidenum">
+              <a:rPr lang="en-US"/>
+              <a:t>24</a:t>
             </a:fld>
             <a:endParaRPr lang="en-US"/>
           </a:p>
@@ -3504,7 +3682,7 @@
                 <a:ea typeface="Calibri" pitchFamily="34" charset="-122"/>
                 <a:cs typeface="Calibri" pitchFamily="34" charset="-120"/>
               </a:rPr>
-              <a:t>Hierarchy roots are abstract (abc): no "plain" transaction or party can exist</a:t>
+              <a:t>Hierarchy roots are abstract (my own Abstract class): no "plain" transaction or party can exist</a:t>
             </a:r>
             <a:endParaRPr lang="en-US" sz="1300" dirty="0"/>
           </a:p>
@@ -5818,7 +5996,7 @@
               <a:buNone/>
             </a:pPr>
             <a:r>
-              <a:rPr lang="en-US" sz="2800" b="1" dirty="0">
+              <a:rPr lang="en-US" sz="2200" b="1" dirty="0">
                 <a:solidFill>
                   <a:srgbClr val="0B4F4A"/>
                 </a:solidFill>
@@ -5826,9 +6004,9 @@
                 <a:ea typeface="Cambria" pitchFamily="34" charset="-122"/>
                 <a:cs typeface="Cambria" pitchFamily="34" charset="-120"/>
               </a:rPr>
-              <a:t>16 scenarios break the normal workflow</a:t>
-            </a:r>
-            <a:endParaRPr lang="en-US" sz="2800" dirty="0"/>
+              <a:t>Checked against SOLID and design patterns</a:t>
+            </a:r>
+            <a:endParaRPr lang="en-US" sz="2200" dirty="0"/>
           </a:p>
         </p:txBody>
       </p:sp>
@@ -5865,7 +6043,7 @@
                 <a:ea typeface="Calibri" pitchFamily="34" charset="-122"/>
                 <a:cs typeface="Calibri" pitchFamily="34" charset="-120"/>
               </a:rPr>
-              <a:t>All ten critical cases in the brief are covered, plus every participant it names</a:t>
+              <a:t>The course's principles used as a checklist on the finished code: two problems found and fixed</a:t>
             </a:r>
             <a:endParaRPr lang="en-US" sz="1200" dirty="0"/>
           </a:p>
@@ -5879,7 +6057,7 @@
         </p:nvSpPr>
         <p:spPr>
           <a:xfrm>
-            <a:off x="457200" y="1188720"/>
+            <a:off x="457200" y="1234440"/>
             <a:ext cx="384048" cy="384048"/>
           </a:xfrm>
           <a:prstGeom prst="ellipse">
@@ -5899,7 +6077,7 @@
         </p:nvSpPr>
         <p:spPr>
           <a:xfrm>
-            <a:off x="457200" y="1188720"/>
+            <a:off x="457200" y="1234440"/>
             <a:ext cx="384048" cy="384048"/>
           </a:xfrm>
           <a:prstGeom prst="rect">
@@ -5924,7 +6102,7 @@
                 <a:ea typeface="Cambria" pitchFamily="34" charset="-122"/>
                 <a:cs typeface="Cambria" pitchFamily="34" charset="-120"/>
               </a:rPr>
-              <a:t>1</a:t>
+              <a:t>S</a:t>
             </a:r>
             <a:endParaRPr lang="en-US" sz="1400" dirty="0"/>
           </a:p>
@@ -5939,7 +6117,7 @@
         <p:spPr>
           <a:xfrm>
             <a:off x="960120" y="1188720"/>
-            <a:ext cx="3566160" cy="384048"/>
+            <a:ext cx="3977640" cy="512064"/>
           </a:xfrm>
           <a:prstGeom prst="rect">
             <a:avLst/>
@@ -5955,7 +6133,7 @@
               <a:buNone/>
             </a:pPr>
             <a:r>
-              <a:rPr lang="en-US" sz="1250" dirty="0">
+              <a:rPr lang="en-US" sz="1200" dirty="0">
                 <a:solidFill>
                   <a:srgbClr val="1D2B2A"/>
                 </a:solidFill>
@@ -5963,9 +6141,9 @@
                 <a:ea typeface="Calibri" pitchFamily="34" charset="-122"/>
                 <a:cs typeface="Calibri" pitchFamily="34" charset="-120"/>
               </a:rPr>
-              <a:t>Document expires mid-onboarding</a:t>
-            </a:r>
-            <a:endParaRPr lang="en-US" sz="1250" dirty="0"/>
+              <a:t>One job per class (Period, StatusHistory, Iban). Bank coordinates; honest limit: it is large</a:t>
+            </a:r>
+            <a:endParaRPr lang="en-US" sz="1200" dirty="0"/>
           </a:p>
         </p:txBody>
       </p:sp>
@@ -5977,7 +6155,7 @@
         </p:nvSpPr>
         <p:spPr>
           <a:xfrm>
-            <a:off x="457200" y="1645920"/>
+            <a:off x="457200" y="1837944"/>
             <a:ext cx="384048" cy="384048"/>
           </a:xfrm>
           <a:prstGeom prst="ellipse">
@@ -5997,7 +6175,7 @@
         </p:nvSpPr>
         <p:spPr>
           <a:xfrm>
-            <a:off x="457200" y="1645920"/>
+            <a:off x="457200" y="1837944"/>
             <a:ext cx="384048" cy="384048"/>
           </a:xfrm>
           <a:prstGeom prst="rect">
@@ -6022,7 +6200,7 @@
                 <a:ea typeface="Cambria" pitchFamily="34" charset="-122"/>
                 <a:cs typeface="Cambria" pitchFamily="34" charset="-120"/>
               </a:rPr>
-              <a:t>2</a:t>
+              <a:t>O</a:t>
             </a:r>
             <a:endParaRPr lang="en-US" sz="1400" dirty="0"/>
           </a:p>
@@ -6036,8 +6214,8 @@
         </p:nvSpPr>
         <p:spPr>
           <a:xfrm>
-            <a:off x="960120" y="1645920"/>
-            <a:ext cx="3566160" cy="384048"/>
+            <a:off x="960120" y="1792224"/>
+            <a:ext cx="3977640" cy="512064"/>
           </a:xfrm>
           <a:prstGeom prst="rect">
             <a:avLst/>
@@ -6053,7 +6231,7 @@
               <a:buNone/>
             </a:pPr>
             <a:r>
-              <a:rPr lang="en-US" sz="1250" dirty="0">
+              <a:rPr lang="en-US" sz="1200" dirty="0">
                 <a:solidFill>
                   <a:srgbClr val="1D2B2A"/>
                 </a:solidFill>
@@ -6061,9 +6239,9 @@
                 <a:ea typeface="Calibri" pitchFamily="34" charset="-122"/>
                 <a:cs typeface="Calibri" pitchFamily="34" charset="-120"/>
               </a:rPr>
-              <a:t>Large transfer: dual control, hold, release</a:t>
-            </a:r>
-            <a:endParaRPr lang="en-US" sz="1250" dirty="0"/>
+              <a:t>A new kind is a new subclass, Bank unchanged: a test adds an IslamicTermDeposit</a:t>
+            </a:r>
+            <a:endParaRPr lang="en-US" sz="1200" dirty="0"/>
           </a:p>
         </p:txBody>
       </p:sp>
@@ -6075,7 +6253,7 @@
         </p:nvSpPr>
         <p:spPr>
           <a:xfrm>
-            <a:off x="457200" y="2103120"/>
+            <a:off x="457200" y="2441448"/>
             <a:ext cx="384048" cy="384048"/>
           </a:xfrm>
           <a:prstGeom prst="ellipse">
@@ -6095,7 +6273,7 @@
         </p:nvSpPr>
         <p:spPr>
           <a:xfrm>
-            <a:off x="457200" y="2103120"/>
+            <a:off x="457200" y="2441448"/>
             <a:ext cx="384048" cy="384048"/>
           </a:xfrm>
           <a:prstGeom prst="rect">
@@ -6120,7 +6298,7 @@
                 <a:ea typeface="Cambria" pitchFamily="34" charset="-122"/>
                 <a:cs typeface="Cambria" pitchFamily="34" charset="-120"/>
               </a:rPr>
-              <a:t>3</a:t>
+              <a:t>L</a:t>
             </a:r>
             <a:endParaRPr lang="en-US" sz="1400" dirty="0"/>
           </a:p>
@@ -6134,8 +6312,8 @@
         </p:nvSpPr>
         <p:spPr>
           <a:xfrm>
-            <a:off x="960120" y="2103120"/>
-            <a:ext cx="3566160" cy="384048"/>
+            <a:off x="960120" y="2395728"/>
+            <a:ext cx="3977640" cy="512064"/>
           </a:xfrm>
           <a:prstGeom prst="rect">
             <a:avLst/>
@@ -6151,7 +6329,7 @@
               <a:buNone/>
             </a:pPr>
             <a:r>
-              <a:rPr lang="en-US" sz="1250" dirty="0">
+              <a:rPr lang="en-US" sz="1200" dirty="0">
                 <a:solidFill>
                   <a:srgbClr val="1D2B2A"/>
                 </a:solidFill>
@@ -6159,9 +6337,9 @@
                 <a:ea typeface="Calibri" pitchFamily="34" charset="-122"/>
                 <a:cs typeface="Calibri" pitchFamily="34" charset="-120"/>
               </a:rPr>
-              <a:t>Card stolen, replaced twice, found</a:t>
-            </a:r>
-            <a:endParaRPr lang="en-US" sz="1250" dirty="0"/>
+              <a:t>Every subclass keeps its parent's promises; SubstitutionTests check every demo object</a:t>
+            </a:r>
+            <a:endParaRPr lang="en-US" sz="1200" dirty="0"/>
           </a:p>
         </p:txBody>
       </p:sp>
@@ -6173,7 +6351,7 @@
         </p:nvSpPr>
         <p:spPr>
           <a:xfrm>
-            <a:off x="457200" y="2560320"/>
+            <a:off x="457200" y="3044952"/>
             <a:ext cx="384048" cy="384048"/>
           </a:xfrm>
           <a:prstGeom prst="ellipse">
@@ -6193,7 +6371,7 @@
         </p:nvSpPr>
         <p:spPr>
           <a:xfrm>
-            <a:off x="457200" y="2560320"/>
+            <a:off x="457200" y="3044952"/>
             <a:ext cx="384048" cy="384048"/>
           </a:xfrm>
           <a:prstGeom prst="rect">
@@ -6218,7 +6396,7 @@
                 <a:ea typeface="Cambria" pitchFamily="34" charset="-122"/>
                 <a:cs typeface="Cambria" pitchFamily="34" charset="-120"/>
               </a:rPr>
-              <a:t>4</a:t>
+              <a:t>I</a:t>
             </a:r>
             <a:endParaRPr lang="en-US" sz="1400" dirty="0"/>
           </a:p>
@@ -6232,8 +6410,8 @@
         </p:nvSpPr>
         <p:spPr>
           <a:xfrm>
-            <a:off x="960120" y="2560320"/>
-            <a:ext cx="3566160" cy="384048"/>
+            <a:off x="960120" y="2999232"/>
+            <a:ext cx="3977640" cy="512064"/>
           </a:xfrm>
           <a:prstGeom prst="rect">
             <a:avLst/>
@@ -6249,7 +6427,7 @@
               <a:buNone/>
             </a:pPr>
             <a:r>
-              <a:rPr lang="en-US" sz="1250" dirty="0">
+              <a:rPr lang="en-US" sz="1200" dirty="0">
                 <a:solidFill>
                   <a:srgbClr val="1D2B2A"/>
                 </a:solidFill>
@@ -6257,9 +6435,9 @@
                 <a:ea typeface="Calibri" pitchFamily="34" charset="-122"/>
                 <a:cs typeface="Calibri" pitchFamily="34" charset="-120"/>
               </a:rPr>
-              <a:t>Posted, reversed, re-posted, disputed</a:t>
-            </a:r>
-            <a:endParaRPr lang="en-US" sz="1250" dirty="0"/>
+              <a:t>Abstract classes ask for little: DepositAccount needs only overdraft_limit()</a:t>
+            </a:r>
+            <a:endParaRPr lang="en-US" sz="1200" dirty="0"/>
           </a:p>
         </p:txBody>
       </p:sp>
@@ -6271,7 +6449,7 @@
         </p:nvSpPr>
         <p:spPr>
           <a:xfrm>
-            <a:off x="457200" y="3017520"/>
+            <a:off x="457200" y="3648456"/>
             <a:ext cx="384048" cy="384048"/>
           </a:xfrm>
           <a:prstGeom prst="ellipse">
@@ -6291,7 +6469,7 @@
         </p:nvSpPr>
         <p:spPr>
           <a:xfrm>
-            <a:off x="457200" y="3017520"/>
+            <a:off x="457200" y="3648456"/>
             <a:ext cx="384048" cy="384048"/>
           </a:xfrm>
           <a:prstGeom prst="rect">
@@ -6316,7 +6494,7 @@
                 <a:ea typeface="Cambria" pitchFamily="34" charset="-122"/>
                 <a:cs typeface="Cambria" pitchFamily="34" charset="-120"/>
               </a:rPr>
-              <a:t>5</a:t>
+              <a:t>D</a:t>
             </a:r>
             <a:endParaRPr lang="en-US" sz="1400" dirty="0"/>
           </a:p>
@@ -6330,8 +6508,8 @@
         </p:nvSpPr>
         <p:spPr>
           <a:xfrm>
-            <a:off x="960120" y="3017520"/>
-            <a:ext cx="3566160" cy="384048"/>
+            <a:off x="960120" y="3602736"/>
+            <a:ext cx="3977640" cy="512064"/>
           </a:xfrm>
           <a:prstGeom prst="rect">
             <a:avLst/>
@@ -6347,7 +6525,7 @@
               <a:buNone/>
             </a:pPr>
             <a:r>
-              <a:rPr lang="en-US" sz="1250" dirty="0">
+              <a:rPr lang="en-US" sz="1200" dirty="0">
                 <a:solidFill>
                   <a:srgbClr val="1D2B2A"/>
                 </a:solidFill>
@@ -6355,9 +6533,9 @@
                 <a:ea typeface="Calibri" pitchFamily="34" charset="-122"/>
                 <a:cs typeface="Calibri" pitchFamily="34" charset="-120"/>
               </a:rPr>
-              <a:t>Restricted then cleared</a:t>
-            </a:r>
-            <a:endParaRPr lang="en-US" sz="1250" dirty="0"/>
+              <a:t>Depend on abstractions: Repository, the injected Claude client, bank_source</a:t>
+            </a:r>
+            <a:endParaRPr lang="en-US" sz="1200" dirty="0"/>
           </a:p>
         </p:txBody>
       </p:sp>
@@ -6369,16 +6547,23 @@
         </p:nvSpPr>
         <p:spPr>
           <a:xfrm>
-            <a:off x="457200" y="3474720"/>
-            <a:ext cx="384048" cy="384048"/>
-          </a:xfrm>
-          <a:prstGeom prst="ellipse">
-            <a:avLst/>
+            <a:off x="5166360" y="1188720"/>
+            <a:ext cx="3520440" cy="2971800"/>
+          </a:xfrm>
+          <a:prstGeom prst="roundRect">
+            <a:avLst>
+              <a:gd name="adj" fmla="val 2462"/>
+            </a:avLst>
           </a:prstGeom>
           <a:solidFill>
-            <a:srgbClr val="B8862F"/>
+            <a:srgbClr val="E8F0EE"/>
           </a:solidFill>
-          <a:ln/>
+          <a:ln w="12700">
+            <a:solidFill>
+              <a:srgbClr val="E8F0EE"/>
+            </a:solidFill>
+            <a:prstDash val="solid"/>
+          </a:ln>
         </p:spPr>
       </p:sp>
       <p:sp>
@@ -6389,8 +6574,8 @@
         </p:nvSpPr>
         <p:spPr>
           <a:xfrm>
-            <a:off x="457200" y="3474720"/>
-            <a:ext cx="384048" cy="384048"/>
+            <a:off x="5349240" y="1298448"/>
+            <a:ext cx="3200400" cy="365760"/>
           </a:xfrm>
           <a:prstGeom prst="rect">
             <a:avLst/>
@@ -6402,21 +6587,21 @@
           <a:bodyPr wrap="square" lIns="0" tIns="0" rIns="0" bIns="0" rtlCol="0" anchor="ctr"/>
           <a:lstStyle/>
           <a:p>
-            <a:pPr algn="ctr" indent="0" marL="0">
-              <a:buNone/>
-            </a:pPr>
-            <a:r>
-              <a:rPr lang="en-US" sz="1400" b="1" dirty="0">
-                <a:solidFill>
-                  <a:srgbClr val="FFFFFF"/>
+            <a:pPr indent="0" marL="0">
+              <a:buNone/>
+            </a:pPr>
+            <a:r>
+              <a:rPr lang="en-US" sz="1500" b="1" dirty="0">
+                <a:solidFill>
+                  <a:srgbClr val="0B4F4A"/>
                 </a:solidFill>
                 <a:latin typeface="Cambria" pitchFamily="34" charset="0"/>
                 <a:ea typeface="Cambria" pitchFamily="34" charset="-122"/>
                 <a:cs typeface="Cambria" pitchFamily="34" charset="-120"/>
               </a:rPr>
-              <a:t>6</a:t>
-            </a:r>
-            <a:endParaRPr lang="en-US" sz="1400" dirty="0"/>
+              <a:t>Found and fixed</a:t>
+            </a:r>
+            <a:endParaRPr lang="en-US" sz="1500" dirty="0"/>
           </a:p>
         </p:txBody>
       </p:sp>
@@ -6428,24 +6613,28 @@
         </p:nvSpPr>
         <p:spPr>
           <a:xfrm>
-            <a:off x="960120" y="3474720"/>
-            <a:ext cx="3566160" cy="384048"/>
-          </a:xfrm>
-          <a:prstGeom prst="rect">
-            <a:avLst/>
-          </a:prstGeom>
-          <a:noFill/>
-          <a:ln/>
-        </p:spPr>
-        <p:txBody>
-          <a:bodyPr wrap="square" lIns="0" tIns="0" rIns="0" bIns="0" rtlCol="0" anchor="ctr"/>
-          <a:lstStyle/>
-          <a:p>
-            <a:pPr indent="0" marL="0">
-              <a:buNone/>
-            </a:pPr>
-            <a:r>
-              <a:rPr lang="en-US" sz="1250" dirty="0">
+            <a:off x="5303520" y="1737360"/>
+            <a:ext cx="3246120" cy="2377440"/>
+          </a:xfrm>
+          <a:prstGeom prst="rect">
+            <a:avLst/>
+          </a:prstGeom>
+          <a:noFill/>
+          <a:ln/>
+        </p:spPr>
+        <p:txBody>
+          <a:bodyPr wrap="square" lIns="635" tIns="635" rIns="635" bIns="635" rtlCol="0" anchor="t"/>
+          <a:lstStyle/>
+          <a:p>
+            <a:pPr marL="342900" indent="-342900">
+              <a:spcAft>
+                <a:spcPts val="600"/>
+              </a:spcAft>
+              <a:buSzPct val="100000"/>
+              <a:buChar char="•"/>
+            </a:pPr>
+            <a:r>
+              <a:rPr lang="en-US" sz="1200" dirty="0">
                 <a:solidFill>
                   <a:srgbClr val="1D2B2A"/>
                 </a:solidFill>
@@ -6453,97 +6642,20 @@
                 <a:ea typeface="Calibri" pitchFamily="34" charset="-122"/>
                 <a:cs typeface="Calibri" pitchFamily="34" charset="-120"/>
               </a:rPr>
-              <a:t>Financing: limits, arrears, restructure</a:t>
-            </a:r>
-            <a:endParaRPr lang="en-US" sz="1250" dirty="0"/>
-          </a:p>
-        </p:txBody>
-      </p:sp>
-      <p:sp>
-        <p:nvSpPr>
-          <p:cNvPr id="22" name="Shape 20"/>
-          <p:cNvSpPr/>
-          <p:nvPr/>
-        </p:nvSpPr>
-        <p:spPr>
-          <a:xfrm>
-            <a:off x="457200" y="3931920"/>
-            <a:ext cx="384048" cy="384048"/>
-          </a:xfrm>
-          <a:prstGeom prst="ellipse">
-            <a:avLst/>
-          </a:prstGeom>
-          <a:solidFill>
-            <a:srgbClr val="B8862F"/>
-          </a:solidFill>
-          <a:ln/>
-        </p:spPr>
-      </p:sp>
-      <p:sp>
-        <p:nvSpPr>
-          <p:cNvPr id="23" name="Text 21"/>
-          <p:cNvSpPr txBox="1"/>
-          <p:nvPr/>
-        </p:nvSpPr>
-        <p:spPr>
-          <a:xfrm>
-            <a:off x="457200" y="3931920"/>
-            <a:ext cx="384048" cy="384048"/>
-          </a:xfrm>
-          <a:prstGeom prst="rect">
-            <a:avLst/>
-          </a:prstGeom>
-          <a:noFill/>
-          <a:ln/>
-        </p:spPr>
-        <p:txBody>
-          <a:bodyPr wrap="square" lIns="0" tIns="0" rIns="0" bIns="0" rtlCol="0" anchor="ctr"/>
-          <a:lstStyle/>
-          <a:p>
-            <a:pPr algn="ctr" indent="0" marL="0">
-              <a:buNone/>
-            </a:pPr>
-            <a:r>
-              <a:rPr lang="en-US" sz="1400" b="1" dirty="0">
-                <a:solidFill>
-                  <a:srgbClr val="FFFFFF"/>
-                </a:solidFill>
-                <a:latin typeface="Cambria" pitchFamily="34" charset="0"/>
-                <a:ea typeface="Cambria" pitchFamily="34" charset="-122"/>
-                <a:cs typeface="Cambria" pitchFamily="34" charset="-120"/>
-              </a:rPr>
-              <a:t>7</a:t>
-            </a:r>
-            <a:endParaRPr lang="en-US" sz="1400" dirty="0"/>
-          </a:p>
-        </p:txBody>
-      </p:sp>
-      <p:sp>
-        <p:nvSpPr>
-          <p:cNvPr id="24" name="Text 22"/>
-          <p:cNvSpPr txBox="1"/>
-          <p:nvPr/>
-        </p:nvSpPr>
-        <p:spPr>
-          <a:xfrm>
-            <a:off x="960120" y="3931920"/>
-            <a:ext cx="3566160" cy="384048"/>
-          </a:xfrm>
-          <a:prstGeom prst="rect">
-            <a:avLst/>
-          </a:prstGeom>
-          <a:noFill/>
-          <a:ln/>
-        </p:spPr>
-        <p:txBody>
-          <a:bodyPr wrap="square" lIns="0" tIns="0" rIns="0" bIns="0" rtlCol="0" anchor="ctr"/>
-          <a:lstStyle/>
-          <a:p>
-            <a:pPr indent="0" marL="0">
-              <a:buNone/>
-            </a:pPr>
-            <a:r>
-              <a:rPr lang="en-US" sz="1250" dirty="0">
+              <a:t>open_deposit_account tested "is FixedTermDeposit": a subclass skipped the payout rule. Now a class constant every term deposit inherits</a:t>
+            </a:r>
+            <a:endParaRPr lang="en-US" sz="1200" dirty="0"/>
+          </a:p>
+          <a:p>
+            <a:pPr marL="342900" indent="-342900">
+              <a:spcAft>
+                <a:spcPts val="600"/>
+              </a:spcAft>
+              <a:buSzPct val="100000"/>
+              <a:buChar char="•"/>
+            </a:pPr>
+            <a:r>
+              <a:rPr lang="en-US" sz="1200" dirty="0">
                 <a:solidFill>
                   <a:srgbClr val="1D2B2A"/>
                 </a:solidFill>
@@ -6551,42 +6663,22 @@
                 <a:ea typeface="Calibri" pitchFamily="34" charset="-122"/>
                 <a:cs typeface="Calibri" pitchFamily="34" charset="-120"/>
               </a:rPr>
-              <a:t>Director leaves; authority provable</a:t>
-            </a:r>
-            <a:endParaRPr lang="en-US" sz="1250" dirty="0"/>
-          </a:p>
-        </p:txBody>
-      </p:sp>
-      <p:sp>
-        <p:nvSpPr>
-          <p:cNvPr id="25" name="Shape 23"/>
-          <p:cNvSpPr/>
-          <p:nvPr/>
-        </p:nvSpPr>
-        <p:spPr>
-          <a:xfrm>
-            <a:off x="457200" y="4389120"/>
-            <a:ext cx="384048" cy="384048"/>
-          </a:xfrm>
-          <a:prstGeom prst="ellipse">
-            <a:avLst/>
-          </a:prstGeom>
-          <a:solidFill>
-            <a:srgbClr val="B8862F"/>
-          </a:solidFill>
-          <a:ln/>
-        </p:spPr>
-      </p:sp>
-      <p:sp>
-        <p:nvSpPr>
-          <p:cNvPr id="26" name="Text 24"/>
-          <p:cNvSpPr txBox="1"/>
-          <p:nvPr/>
-        </p:nvSpPr>
-        <p:spPr>
-          <a:xfrm>
-            <a:off x="457200" y="4389120"/>
-            <a:ext cx="384048" cy="384048"/>
+              <a:t>resolve_dispute tested for CardPayment. Now the payment answers dispute_refund(): Reversal, or Chargeback</a:t>
+            </a:r>
+            <a:endParaRPr lang="en-US" sz="1200" dirty="0"/>
+          </a:p>
+        </p:txBody>
+      </p:sp>
+      <p:sp>
+        <p:nvSpPr>
+          <p:cNvPr id="22" name="Text 20"/>
+          <p:cNvSpPr txBox="1"/>
+          <p:nvPr/>
+        </p:nvSpPr>
+        <p:spPr>
+          <a:xfrm>
+            <a:off x="457200" y="4343400"/>
+            <a:ext cx="8229600" cy="411480"/>
           </a:xfrm>
           <a:prstGeom prst="rect">
             <a:avLst/>
@@ -6598,844 +6690,21 @@
           <a:bodyPr wrap="square" lIns="0" tIns="0" rIns="0" bIns="0" rtlCol="0" anchor="ctr"/>
           <a:lstStyle/>
           <a:p>
-            <a:pPr algn="ctr" indent="0" marL="0">
-              <a:buNone/>
-            </a:pPr>
-            <a:r>
-              <a:rPr lang="en-US" sz="1400" b="1" dirty="0">
-                <a:solidFill>
-                  <a:srgbClr val="FFFFFF"/>
-                </a:solidFill>
-                <a:latin typeface="Cambria" pitchFamily="34" charset="0"/>
-                <a:ea typeface="Cambria" pitchFamily="34" charset="-122"/>
-                <a:cs typeface="Cambria" pitchFamily="34" charset="-120"/>
-              </a:rPr>
-              <a:t>8</a:t>
-            </a:r>
-            <a:endParaRPr lang="en-US" sz="1400" dirty="0"/>
-          </a:p>
-        </p:txBody>
-      </p:sp>
-      <p:sp>
-        <p:nvSpPr>
-          <p:cNvPr id="27" name="Text 25"/>
-          <p:cNvSpPr txBox="1"/>
-          <p:nvPr/>
-        </p:nvSpPr>
-        <p:spPr>
-          <a:xfrm>
-            <a:off x="960120" y="4389120"/>
-            <a:ext cx="3566160" cy="384048"/>
-          </a:xfrm>
-          <a:prstGeom prst="rect">
-            <a:avLst/>
-          </a:prstGeom>
-          <a:noFill/>
-          <a:ln/>
-        </p:spPr>
-        <p:txBody>
-          <a:bodyPr wrap="square" lIns="0" tIns="0" rIns="0" bIns="0" rtlCol="0" anchor="ctr"/>
-          <a:lstStyle/>
-          <a:p>
             <a:pPr indent="0" marL="0">
               <a:buNone/>
             </a:pPr>
             <a:r>
-              <a:rPr lang="en-US" sz="1250" dirty="0">
-                <a:solidFill>
-                  <a:srgbClr val="1D2B2A"/>
+              <a:rPr lang="en-US" sz="1150" i="1" dirty="0">
+                <a:solidFill>
+                  <a:srgbClr val="5B6B69"/>
                 </a:solidFill>
                 <a:latin typeface="Calibri" pitchFamily="34" charset="0"/>
                 <a:ea typeface="Calibri" pitchFamily="34" charset="-122"/>
                 <a:cs typeface="Calibri" pitchFamily="34" charset="-120"/>
               </a:rPr>
-              <a:t>Beneficiary changes bank details</a:t>
-            </a:r>
-            <a:endParaRPr lang="en-US" sz="1250" dirty="0"/>
-          </a:p>
-        </p:txBody>
-      </p:sp>
-      <p:sp>
-        <p:nvSpPr>
-          <p:cNvPr id="28" name="Shape 26"/>
-          <p:cNvSpPr/>
-          <p:nvPr/>
-        </p:nvSpPr>
-        <p:spPr>
-          <a:xfrm>
-            <a:off x="4663440" y="1188720"/>
-            <a:ext cx="384048" cy="384048"/>
-          </a:xfrm>
-          <a:prstGeom prst="ellipse">
-            <a:avLst/>
-          </a:prstGeom>
-          <a:solidFill>
-            <a:srgbClr val="B8862F"/>
-          </a:solidFill>
-          <a:ln/>
-        </p:spPr>
-      </p:sp>
-      <p:sp>
-        <p:nvSpPr>
-          <p:cNvPr id="29" name="Text 27"/>
-          <p:cNvSpPr txBox="1"/>
-          <p:nvPr/>
-        </p:nvSpPr>
-        <p:spPr>
-          <a:xfrm>
-            <a:off x="4663440" y="1188720"/>
-            <a:ext cx="384048" cy="384048"/>
-          </a:xfrm>
-          <a:prstGeom prst="rect">
-            <a:avLst/>
-          </a:prstGeom>
-          <a:noFill/>
-          <a:ln/>
-        </p:spPr>
-        <p:txBody>
-          <a:bodyPr wrap="square" lIns="0" tIns="0" rIns="0" bIns="0" rtlCol="0" anchor="ctr"/>
-          <a:lstStyle/>
-          <a:p>
-            <a:pPr algn="ctr" indent="0" marL="0">
-              <a:buNone/>
-            </a:pPr>
-            <a:r>
-              <a:rPr lang="en-US" sz="1400" b="1" dirty="0">
-                <a:solidFill>
-                  <a:srgbClr val="FFFFFF"/>
-                </a:solidFill>
-                <a:latin typeface="Cambria" pitchFamily="34" charset="0"/>
-                <a:ea typeface="Cambria" pitchFamily="34" charset="-122"/>
-                <a:cs typeface="Cambria" pitchFamily="34" charset="-120"/>
-              </a:rPr>
-              <a:t>9</a:t>
-            </a:r>
-            <a:endParaRPr lang="en-US" sz="1400" dirty="0"/>
-          </a:p>
-        </p:txBody>
-      </p:sp>
-      <p:sp>
-        <p:nvSpPr>
-          <p:cNvPr id="30" name="Text 28"/>
-          <p:cNvSpPr txBox="1"/>
-          <p:nvPr/>
-        </p:nvSpPr>
-        <p:spPr>
-          <a:xfrm>
-            <a:off x="5166360" y="1188720"/>
-            <a:ext cx="3566160" cy="384048"/>
-          </a:xfrm>
-          <a:prstGeom prst="rect">
-            <a:avLst/>
-          </a:prstGeom>
-          <a:noFill/>
-          <a:ln/>
-        </p:spPr>
-        <p:txBody>
-          <a:bodyPr wrap="square" lIns="0" tIns="0" rIns="0" bIns="0" rtlCol="0" anchor="ctr"/>
-          <a:lstStyle/>
-          <a:p>
-            <a:pPr indent="0" marL="0">
-              <a:buNone/>
-            </a:pPr>
-            <a:r>
-              <a:rPr lang="en-US" sz="1250" dirty="0">
-                <a:solidFill>
-                  <a:srgbClr val="1D2B2A"/>
-                </a:solidFill>
-                <a:latin typeface="Calibri" pitchFamily="34" charset="0"/>
-                <a:ea typeface="Calibri" pitchFamily="34" charset="-122"/>
-                <a:cs typeface="Calibri" pitchFamily="34" charset="-120"/>
-              </a:rPr>
-              <a:t>Evidence keeps corrected data</a:t>
-            </a:r>
-            <a:endParaRPr lang="en-US" sz="1250" dirty="0"/>
-          </a:p>
-        </p:txBody>
-      </p:sp>
-      <p:sp>
-        <p:nvSpPr>
-          <p:cNvPr id="31" name="Shape 29"/>
-          <p:cNvSpPr/>
-          <p:nvPr/>
-        </p:nvSpPr>
-        <p:spPr>
-          <a:xfrm>
-            <a:off x="4663440" y="1645920"/>
-            <a:ext cx="384048" cy="384048"/>
-          </a:xfrm>
-          <a:prstGeom prst="ellipse">
-            <a:avLst/>
-          </a:prstGeom>
-          <a:solidFill>
-            <a:srgbClr val="B8862F"/>
-          </a:solidFill>
-          <a:ln/>
-        </p:spPr>
-      </p:sp>
-      <p:sp>
-        <p:nvSpPr>
-          <p:cNvPr id="32" name="Text 30"/>
-          <p:cNvSpPr txBox="1"/>
-          <p:nvPr/>
-        </p:nvSpPr>
-        <p:spPr>
-          <a:xfrm>
-            <a:off x="4663440" y="1645920"/>
-            <a:ext cx="384048" cy="384048"/>
-          </a:xfrm>
-          <a:prstGeom prst="rect">
-            <a:avLst/>
-          </a:prstGeom>
-          <a:noFill/>
-          <a:ln/>
-        </p:spPr>
-        <p:txBody>
-          <a:bodyPr wrap="square" lIns="0" tIns="0" rIns="0" bIns="0" rtlCol="0" anchor="ctr"/>
-          <a:lstStyle/>
-          <a:p>
-            <a:pPr algn="ctr" indent="0" marL="0">
-              <a:buNone/>
-            </a:pPr>
-            <a:r>
-              <a:rPr lang="en-US" sz="1400" b="1" dirty="0">
-                <a:solidFill>
-                  <a:srgbClr val="FFFFFF"/>
-                </a:solidFill>
-                <a:latin typeface="Cambria" pitchFamily="34" charset="0"/>
-                <a:ea typeface="Cambria" pitchFamily="34" charset="-122"/>
-                <a:cs typeface="Cambria" pitchFamily="34" charset="-120"/>
-              </a:rPr>
-              <a:t>10</a:t>
-            </a:r>
-            <a:endParaRPr lang="en-US" sz="1400" dirty="0"/>
-          </a:p>
-        </p:txBody>
-      </p:sp>
-      <p:sp>
-        <p:nvSpPr>
-          <p:cNvPr id="33" name="Text 31"/>
-          <p:cNvSpPr txBox="1"/>
-          <p:nvPr/>
-        </p:nvSpPr>
-        <p:spPr>
-          <a:xfrm>
-            <a:off x="5166360" y="1645920"/>
-            <a:ext cx="3566160" cy="384048"/>
-          </a:xfrm>
-          <a:prstGeom prst="rect">
-            <a:avLst/>
-          </a:prstGeom>
-          <a:noFill/>
-          <a:ln/>
-        </p:spPr>
-        <p:txBody>
-          <a:bodyPr wrap="square" lIns="0" tIns="0" rIns="0" bIns="0" rtlCol="0" anchor="ctr"/>
-          <a:lstStyle/>
-          <a:p>
-            <a:pPr indent="0" marL="0">
-              <a:buNone/>
-            </a:pPr>
-            <a:r>
-              <a:rPr lang="en-US" sz="1250" dirty="0">
-                <a:solidFill>
-                  <a:srgbClr val="1D2B2A"/>
-                </a:solidFill>
-                <a:latin typeface="Calibri" pitchFamily="34" charset="0"/>
-                <a:ea typeface="Calibri" pitchFamily="34" charset="-122"/>
-                <a:cs typeface="Calibri" pitchFamily="34" charset="-120"/>
-              </a:rPr>
-              <a:t>Product withdrawn, terms pinned</a:t>
-            </a:r>
-            <a:endParaRPr lang="en-US" sz="1250" dirty="0"/>
-          </a:p>
-        </p:txBody>
-      </p:sp>
-      <p:sp>
-        <p:nvSpPr>
-          <p:cNvPr id="34" name="Shape 32"/>
-          <p:cNvSpPr/>
-          <p:nvPr/>
-        </p:nvSpPr>
-        <p:spPr>
-          <a:xfrm>
-            <a:off x="4663440" y="2103120"/>
-            <a:ext cx="384048" cy="384048"/>
-          </a:xfrm>
-          <a:prstGeom prst="ellipse">
-            <a:avLst/>
-          </a:prstGeom>
-          <a:solidFill>
-            <a:srgbClr val="B8862F"/>
-          </a:solidFill>
-          <a:ln/>
-        </p:spPr>
-      </p:sp>
-      <p:sp>
-        <p:nvSpPr>
-          <p:cNvPr id="35" name="Text 33"/>
-          <p:cNvSpPr txBox="1"/>
-          <p:nvPr/>
-        </p:nvSpPr>
-        <p:spPr>
-          <a:xfrm>
-            <a:off x="4663440" y="2103120"/>
-            <a:ext cx="384048" cy="384048"/>
-          </a:xfrm>
-          <a:prstGeom prst="rect">
-            <a:avLst/>
-          </a:prstGeom>
-          <a:noFill/>
-          <a:ln/>
-        </p:spPr>
-        <p:txBody>
-          <a:bodyPr wrap="square" lIns="0" tIns="0" rIns="0" bIns="0" rtlCol="0" anchor="ctr"/>
-          <a:lstStyle/>
-          <a:p>
-            <a:pPr algn="ctr" indent="0" marL="0">
-              <a:buNone/>
-            </a:pPr>
-            <a:r>
-              <a:rPr lang="en-US" sz="1400" b="1" dirty="0">
-                <a:solidFill>
-                  <a:srgbClr val="FFFFFF"/>
-                </a:solidFill>
-                <a:latin typeface="Cambria" pitchFamily="34" charset="0"/>
-                <a:ea typeface="Cambria" pitchFamily="34" charset="-122"/>
-                <a:cs typeface="Cambria" pitchFamily="34" charset="-120"/>
-              </a:rPr>
-              <a:t>11</a:t>
-            </a:r>
-            <a:endParaRPr lang="en-US" sz="1400" dirty="0"/>
-          </a:p>
-        </p:txBody>
-      </p:sp>
-      <p:sp>
-        <p:nvSpPr>
-          <p:cNvPr id="36" name="Text 34"/>
-          <p:cNvSpPr txBox="1"/>
-          <p:nvPr/>
-        </p:nvSpPr>
-        <p:spPr>
-          <a:xfrm>
-            <a:off x="5166360" y="2103120"/>
-            <a:ext cx="3566160" cy="384048"/>
-          </a:xfrm>
-          <a:prstGeom prst="rect">
-            <a:avLst/>
-          </a:prstGeom>
-          <a:noFill/>
-          <a:ln/>
-        </p:spPr>
-        <p:txBody>
-          <a:bodyPr wrap="square" lIns="0" tIns="0" rIns="0" bIns="0" rtlCol="0" anchor="ctr"/>
-          <a:lstStyle/>
-          <a:p>
-            <a:pPr indent="0" marL="0">
-              <a:buNone/>
-            </a:pPr>
-            <a:r>
-              <a:rPr lang="en-US" sz="1250" dirty="0">
-                <a:solidFill>
-                  <a:srgbClr val="1D2B2A"/>
-                </a:solidFill>
-                <a:latin typeface="Calibri" pitchFamily="34" charset="0"/>
-                <a:ea typeface="Calibri" pitchFamily="34" charset="-122"/>
-                <a:cs typeface="Calibri" pitchFamily="34" charset="-120"/>
-              </a:rPr>
-              <a:t>Branch closes; all moves</a:t>
-            </a:r>
-            <a:endParaRPr lang="en-US" sz="1250" dirty="0"/>
-          </a:p>
-        </p:txBody>
-      </p:sp>
-      <p:sp>
-        <p:nvSpPr>
-          <p:cNvPr id="37" name="Shape 35"/>
-          <p:cNvSpPr/>
-          <p:nvPr/>
-        </p:nvSpPr>
-        <p:spPr>
-          <a:xfrm>
-            <a:off x="4663440" y="2560320"/>
-            <a:ext cx="384048" cy="384048"/>
-          </a:xfrm>
-          <a:prstGeom prst="ellipse">
-            <a:avLst/>
-          </a:prstGeom>
-          <a:solidFill>
-            <a:srgbClr val="B8862F"/>
-          </a:solidFill>
-          <a:ln/>
-        </p:spPr>
-      </p:sp>
-      <p:sp>
-        <p:nvSpPr>
-          <p:cNvPr id="38" name="Text 36"/>
-          <p:cNvSpPr txBox="1"/>
-          <p:nvPr/>
-        </p:nvSpPr>
-        <p:spPr>
-          <a:xfrm>
-            <a:off x="4663440" y="2560320"/>
-            <a:ext cx="384048" cy="384048"/>
-          </a:xfrm>
-          <a:prstGeom prst="rect">
-            <a:avLst/>
-          </a:prstGeom>
-          <a:noFill/>
-          <a:ln/>
-        </p:spPr>
-        <p:txBody>
-          <a:bodyPr wrap="square" lIns="0" tIns="0" rIns="0" bIns="0" rtlCol="0" anchor="ctr"/>
-          <a:lstStyle/>
-          <a:p>
-            <a:pPr algn="ctr" indent="0" marL="0">
-              <a:buNone/>
-            </a:pPr>
-            <a:r>
-              <a:rPr lang="en-US" sz="1400" b="1" dirty="0">
-                <a:solidFill>
-                  <a:srgbClr val="FFFFFF"/>
-                </a:solidFill>
-                <a:latin typeface="Cambria" pitchFamily="34" charset="0"/>
-                <a:ea typeface="Cambria" pitchFamily="34" charset="-122"/>
-                <a:cs typeface="Cambria" pitchFamily="34" charset="-120"/>
-              </a:rPr>
-              <a:t>12</a:t>
-            </a:r>
-            <a:endParaRPr lang="en-US" sz="1400" dirty="0"/>
-          </a:p>
-        </p:txBody>
-      </p:sp>
-      <p:sp>
-        <p:nvSpPr>
-          <p:cNvPr id="39" name="Text 37"/>
-          <p:cNvSpPr txBox="1"/>
-          <p:nvPr/>
-        </p:nvSpPr>
-        <p:spPr>
-          <a:xfrm>
-            <a:off x="5166360" y="2560320"/>
-            <a:ext cx="3566160" cy="384048"/>
-          </a:xfrm>
-          <a:prstGeom prst="rect">
-            <a:avLst/>
-          </a:prstGeom>
-          <a:noFill/>
-          <a:ln/>
-        </p:spPr>
-        <p:txBody>
-          <a:bodyPr wrap="square" lIns="0" tIns="0" rIns="0" bIns="0" rtlCol="0" anchor="ctr"/>
-          <a:lstStyle/>
-          <a:p>
-            <a:pPr indent="0" marL="0">
-              <a:buNone/>
-            </a:pPr>
-            <a:r>
-              <a:rPr lang="en-US" sz="1250" dirty="0">
-                <a:solidFill>
-                  <a:srgbClr val="1D2B2A"/>
-                </a:solidFill>
-                <a:latin typeface="Calibri" pitchFamily="34" charset="0"/>
-                <a:ea typeface="Calibri" pitchFamily="34" charset="-122"/>
-                <a:cs typeface="Calibri" pitchFamily="34" charset="-120"/>
-              </a:rPr>
-              <a:t>Savings limit; closure not deletion</a:t>
-            </a:r>
-            <a:endParaRPr lang="en-US" sz="1250" dirty="0"/>
-          </a:p>
-        </p:txBody>
-      </p:sp>
-      <p:sp>
-        <p:nvSpPr>
-          <p:cNvPr id="40" name="Shape 38"/>
-          <p:cNvSpPr/>
-          <p:nvPr/>
-        </p:nvSpPr>
-        <p:spPr>
-          <a:xfrm>
-            <a:off x="4663440" y="3017520"/>
-            <a:ext cx="384048" cy="384048"/>
-          </a:xfrm>
-          <a:prstGeom prst="ellipse">
-            <a:avLst/>
-          </a:prstGeom>
-          <a:solidFill>
-            <a:srgbClr val="B8862F"/>
-          </a:solidFill>
-          <a:ln/>
-        </p:spPr>
-      </p:sp>
-      <p:sp>
-        <p:nvSpPr>
-          <p:cNvPr id="41" name="Text 39"/>
-          <p:cNvSpPr txBox="1"/>
-          <p:nvPr/>
-        </p:nvSpPr>
-        <p:spPr>
-          <a:xfrm>
-            <a:off x="4663440" y="3017520"/>
-            <a:ext cx="384048" cy="384048"/>
-          </a:xfrm>
-          <a:prstGeom prst="rect">
-            <a:avLst/>
-          </a:prstGeom>
-          <a:noFill/>
-          <a:ln/>
-        </p:spPr>
-        <p:txBody>
-          <a:bodyPr wrap="square" lIns="0" tIns="0" rIns="0" bIns="0" rtlCol="0" anchor="ctr"/>
-          <a:lstStyle/>
-          <a:p>
-            <a:pPr algn="ctr" indent="0" marL="0">
-              <a:buNone/>
-            </a:pPr>
-            <a:r>
-              <a:rPr lang="en-US" sz="1400" b="1" dirty="0">
-                <a:solidFill>
-                  <a:srgbClr val="FFFFFF"/>
-                </a:solidFill>
-                <a:latin typeface="Cambria" pitchFamily="34" charset="0"/>
-                <a:ea typeface="Cambria" pitchFamily="34" charset="-122"/>
-                <a:cs typeface="Cambria" pitchFamily="34" charset="-120"/>
-              </a:rPr>
-              <a:t>13</a:t>
-            </a:r>
-            <a:endParaRPr lang="en-US" sz="1400" dirty="0"/>
-          </a:p>
-        </p:txBody>
-      </p:sp>
-      <p:sp>
-        <p:nvSpPr>
-          <p:cNvPr id="42" name="Text 40"/>
-          <p:cNvSpPr txBox="1"/>
-          <p:nvPr/>
-        </p:nvSpPr>
-        <p:spPr>
-          <a:xfrm>
-            <a:off x="5166360" y="3017520"/>
-            <a:ext cx="3566160" cy="384048"/>
-          </a:xfrm>
-          <a:prstGeom prst="rect">
-            <a:avLst/>
-          </a:prstGeom>
-          <a:noFill/>
-          <a:ln/>
-        </p:spPr>
-        <p:txBody>
-          <a:bodyPr wrap="square" lIns="0" tIns="0" rIns="0" bIns="0" rtlCol="0" anchor="ctr"/>
-          <a:lstStyle/>
-          <a:p>
-            <a:pPr indent="0" marL="0">
-              <a:buNone/>
-            </a:pPr>
-            <a:r>
-              <a:rPr lang="en-US" sz="1250" dirty="0">
-                <a:solidFill>
-                  <a:srgbClr val="1D2B2A"/>
-                </a:solidFill>
-                <a:latin typeface="Calibri" pitchFamily="34" charset="0"/>
-                <a:ea typeface="Calibri" pitchFamily="34" charset="-122"/>
-                <a:cs typeface="Calibri" pitchFamily="34" charset="-120"/>
-              </a:rPr>
-              <a:t>Staff and customer leave</a:t>
-            </a:r>
-            <a:endParaRPr lang="en-US" sz="1250" dirty="0"/>
-          </a:p>
-        </p:txBody>
-      </p:sp>
-      <p:sp>
-        <p:nvSpPr>
-          <p:cNvPr id="43" name="Shape 41"/>
-          <p:cNvSpPr/>
-          <p:nvPr/>
-        </p:nvSpPr>
-        <p:spPr>
-          <a:xfrm>
-            <a:off x="4663440" y="3474720"/>
-            <a:ext cx="384048" cy="384048"/>
-          </a:xfrm>
-          <a:prstGeom prst="ellipse">
-            <a:avLst/>
-          </a:prstGeom>
-          <a:solidFill>
-            <a:srgbClr val="B8862F"/>
-          </a:solidFill>
-          <a:ln/>
-        </p:spPr>
-      </p:sp>
-      <p:sp>
-        <p:nvSpPr>
-          <p:cNvPr id="44" name="Text 42"/>
-          <p:cNvSpPr txBox="1"/>
-          <p:nvPr/>
-        </p:nvSpPr>
-        <p:spPr>
-          <a:xfrm>
-            <a:off x="4663440" y="3474720"/>
-            <a:ext cx="384048" cy="384048"/>
-          </a:xfrm>
-          <a:prstGeom prst="rect">
-            <a:avLst/>
-          </a:prstGeom>
-          <a:noFill/>
-          <a:ln/>
-        </p:spPr>
-        <p:txBody>
-          <a:bodyPr wrap="square" lIns="0" tIns="0" rIns="0" bIns="0" rtlCol="0" anchor="ctr"/>
-          <a:lstStyle/>
-          <a:p>
-            <a:pPr algn="ctr" indent="0" marL="0">
-              <a:buNone/>
-            </a:pPr>
-            <a:r>
-              <a:rPr lang="en-US" sz="1400" b="1" dirty="0">
-                <a:solidFill>
-                  <a:srgbClr val="FFFFFF"/>
-                </a:solidFill>
-                <a:latin typeface="Cambria" pitchFamily="34" charset="0"/>
-                <a:ea typeface="Cambria" pitchFamily="34" charset="-122"/>
-                <a:cs typeface="Cambria" pitchFamily="34" charset="-120"/>
-              </a:rPr>
-              <a:t>14</a:t>
-            </a:r>
-            <a:endParaRPr lang="en-US" sz="1400" dirty="0"/>
-          </a:p>
-        </p:txBody>
-      </p:sp>
-      <p:sp>
-        <p:nvSpPr>
-          <p:cNvPr id="45" name="Text 43"/>
-          <p:cNvSpPr txBox="1"/>
-          <p:nvPr/>
-        </p:nvSpPr>
-        <p:spPr>
-          <a:xfrm>
-            <a:off x="5166360" y="3474720"/>
-            <a:ext cx="3566160" cy="384048"/>
-          </a:xfrm>
-          <a:prstGeom prst="rect">
-            <a:avLst/>
-          </a:prstGeom>
-          <a:noFill/>
-          <a:ln/>
-        </p:spPr>
-        <p:txBody>
-          <a:bodyPr wrap="square" lIns="0" tIns="0" rIns="0" bIns="0" rtlCol="0" anchor="ctr"/>
-          <a:lstStyle/>
-          <a:p>
-            <a:pPr indent="0" marL="0">
-              <a:buNone/>
-            </a:pPr>
-            <a:r>
-              <a:rPr lang="en-US" sz="1250" dirty="0">
-                <a:solidFill>
-                  <a:srgbClr val="1D2B2A"/>
-                </a:solidFill>
-                <a:latin typeface="Calibri" pitchFamily="34" charset="0"/>
-                <a:ea typeface="Calibri" pitchFamily="34" charset="-122"/>
-                <a:cs typeface="Calibri" pitchFamily="34" charset="-120"/>
-              </a:rPr>
-              <a:t>Sole trader, private client, term deposits</a:t>
-            </a:r>
-            <a:endParaRPr lang="en-US" sz="1250" dirty="0"/>
-          </a:p>
-        </p:txBody>
-      </p:sp>
-      <p:sp>
-        <p:nvSpPr>
-          <p:cNvPr id="46" name="Shape 44"/>
-          <p:cNvSpPr/>
-          <p:nvPr/>
-        </p:nvSpPr>
-        <p:spPr>
-          <a:xfrm>
-            <a:off x="4663440" y="3931920"/>
-            <a:ext cx="384048" cy="384048"/>
-          </a:xfrm>
-          <a:prstGeom prst="ellipse">
-            <a:avLst/>
-          </a:prstGeom>
-          <a:solidFill>
-            <a:srgbClr val="B8862F"/>
-          </a:solidFill>
-          <a:ln/>
-        </p:spPr>
-      </p:sp>
-      <p:sp>
-        <p:nvSpPr>
-          <p:cNvPr id="47" name="Text 45"/>
-          <p:cNvSpPr txBox="1"/>
-          <p:nvPr/>
-        </p:nvSpPr>
-        <p:spPr>
-          <a:xfrm>
-            <a:off x="4663440" y="3931920"/>
-            <a:ext cx="384048" cy="384048"/>
-          </a:xfrm>
-          <a:prstGeom prst="rect">
-            <a:avLst/>
-          </a:prstGeom>
-          <a:noFill/>
-          <a:ln/>
-        </p:spPr>
-        <p:txBody>
-          <a:bodyPr wrap="square" lIns="0" tIns="0" rIns="0" bIns="0" rtlCol="0" anchor="ctr"/>
-          <a:lstStyle/>
-          <a:p>
-            <a:pPr algn="ctr" indent="0" marL="0">
-              <a:buNone/>
-            </a:pPr>
-            <a:r>
-              <a:rPr lang="en-US" sz="1400" b="1" dirty="0">
-                <a:solidFill>
-                  <a:srgbClr val="FFFFFF"/>
-                </a:solidFill>
-                <a:latin typeface="Cambria" pitchFamily="34" charset="0"/>
-                <a:ea typeface="Cambria" pitchFamily="34" charset="-122"/>
-                <a:cs typeface="Cambria" pitchFamily="34" charset="-120"/>
-              </a:rPr>
-              <a:t>15</a:t>
-            </a:r>
-            <a:endParaRPr lang="en-US" sz="1400" dirty="0"/>
-          </a:p>
-        </p:txBody>
-      </p:sp>
-      <p:sp>
-        <p:nvSpPr>
-          <p:cNvPr id="48" name="Text 46"/>
-          <p:cNvSpPr txBox="1"/>
-          <p:nvPr/>
-        </p:nvSpPr>
-        <p:spPr>
-          <a:xfrm>
-            <a:off x="5166360" y="3931920"/>
-            <a:ext cx="3566160" cy="384048"/>
-          </a:xfrm>
-          <a:prstGeom prst="rect">
-            <a:avLst/>
-          </a:prstGeom>
-          <a:noFill/>
-          <a:ln/>
-        </p:spPr>
-        <p:txBody>
-          <a:bodyPr wrap="square" lIns="0" tIns="0" rIns="0" bIns="0" rtlCol="0" anchor="ctr"/>
-          <a:lstStyle/>
-          <a:p>
-            <a:pPr indent="0" marL="0">
-              <a:buNone/>
-            </a:pPr>
-            <a:r>
-              <a:rPr lang="en-US" sz="1250" dirty="0">
-                <a:solidFill>
-                  <a:srgbClr val="1D2B2A"/>
-                </a:solidFill>
-                <a:latin typeface="Calibri" pitchFamily="34" charset="0"/>
-                <a:ea typeface="Calibri" pitchFamily="34" charset="-122"/>
-                <a:cs typeface="Calibri" pitchFamily="34" charset="-120"/>
-              </a:rPr>
-              <a:t>Card controls, bills, card search</a:t>
-            </a:r>
-            <a:endParaRPr lang="en-US" sz="1250" dirty="0"/>
-          </a:p>
-        </p:txBody>
-      </p:sp>
-      <p:sp>
-        <p:nvSpPr>
-          <p:cNvPr id="49" name="Shape 47"/>
-          <p:cNvSpPr/>
-          <p:nvPr/>
-        </p:nvSpPr>
-        <p:spPr>
-          <a:xfrm>
-            <a:off x="4663440" y="4389120"/>
-            <a:ext cx="384048" cy="384048"/>
-          </a:xfrm>
-          <a:prstGeom prst="ellipse">
-            <a:avLst/>
-          </a:prstGeom>
-          <a:solidFill>
-            <a:srgbClr val="B8862F"/>
-          </a:solidFill>
-          <a:ln/>
-        </p:spPr>
-      </p:sp>
-      <p:sp>
-        <p:nvSpPr>
-          <p:cNvPr id="50" name="Text 48"/>
-          <p:cNvSpPr txBox="1"/>
-          <p:nvPr/>
-        </p:nvSpPr>
-        <p:spPr>
-          <a:xfrm>
-            <a:off x="4663440" y="4389120"/>
-            <a:ext cx="384048" cy="384048"/>
-          </a:xfrm>
-          <a:prstGeom prst="rect">
-            <a:avLst/>
-          </a:prstGeom>
-          <a:noFill/>
-          <a:ln/>
-        </p:spPr>
-        <p:txBody>
-          <a:bodyPr wrap="square" lIns="0" tIns="0" rIns="0" bIns="0" rtlCol="0" anchor="ctr"/>
-          <a:lstStyle/>
-          <a:p>
-            <a:pPr algn="ctr" indent="0" marL="0">
-              <a:buNone/>
-            </a:pPr>
-            <a:r>
-              <a:rPr lang="en-US" sz="1400" b="1" dirty="0">
-                <a:solidFill>
-                  <a:srgbClr val="FFFFFF"/>
-                </a:solidFill>
-                <a:latin typeface="Cambria" pitchFamily="34" charset="0"/>
-                <a:ea typeface="Cambria" pitchFamily="34" charset="-122"/>
-                <a:cs typeface="Cambria" pitchFamily="34" charset="-120"/>
-              </a:rPr>
-              <a:t>16</a:t>
-            </a:r>
-            <a:endParaRPr lang="en-US" sz="1400" dirty="0"/>
-          </a:p>
-        </p:txBody>
-      </p:sp>
-      <p:sp>
-        <p:nvSpPr>
-          <p:cNvPr id="51" name="Text 49"/>
-          <p:cNvSpPr txBox="1"/>
-          <p:nvPr/>
-        </p:nvSpPr>
-        <p:spPr>
-          <a:xfrm>
-            <a:off x="5166360" y="4389120"/>
-            <a:ext cx="3566160" cy="384048"/>
-          </a:xfrm>
-          <a:prstGeom prst="rect">
-            <a:avLst/>
-          </a:prstGeom>
-          <a:noFill/>
-          <a:ln/>
-        </p:spPr>
-        <p:txBody>
-          <a:bodyPr wrap="square" lIns="0" tIns="0" rIns="0" bIns="0" rtlCol="0" anchor="ctr"/>
-          <a:lstStyle/>
-          <a:p>
-            <a:pPr indent="0" marL="0">
-              <a:buNone/>
-            </a:pPr>
-            <a:r>
-              <a:rPr lang="en-US" sz="1250" dirty="0">
-                <a:solidFill>
-                  <a:srgbClr val="1D2B2A"/>
-                </a:solidFill>
-                <a:latin typeface="Calibri" pitchFamily="34" charset="0"/>
-                <a:ea typeface="Calibri" pitchFamily="34" charset="-122"/>
-                <a:cs typeface="Calibri" pitchFamily="34" charset="-120"/>
-              </a:rPr>
-              <a:t>Auditor review; archive vs delete</a:t>
-            </a:r>
-            <a:endParaRPr lang="en-US" sz="1250" dirty="0"/>
+              <a:t>Patterns in the code: template method, factory method, facade, value object, repository, state machine as data</a:t>
+            </a:r>
+            <a:endParaRPr lang="en-US" sz="1150" dirty="0"/>
           </a:p>
         </p:txBody>
       </p:sp>
@@ -7506,7 +6775,7 @@
                 <a:ea typeface="Cambria" pitchFamily="34" charset="-122"/>
                 <a:cs typeface="Cambria" pitchFamily="34" charset="-120"/>
               </a:rPr>
-              <a:t>Everything the brief names is modelled</a:t>
+              <a:t>16 scenarios break the normal workflow</a:t>
             </a:r>
             <a:endParaRPr lang="en-US" sz="2800" dirty="0"/>
           </a:p>
@@ -7545,7 +6814,7 @@
                 <a:ea typeface="Calibri" pitchFamily="34" charset="-122"/>
                 <a:cs typeface="Calibri" pitchFamily="34" charset="-120"/>
               </a:rPr>
-              <a:t>Found by rereading Problem 4 line by line; each has a test</a:t>
+              <a:t>All ten critical cases in the brief are covered, plus every participant it names</a:t>
             </a:r>
             <a:endParaRPr lang="en-US" sz="1200" dirty="0"/>
           </a:p>
@@ -7559,23 +6828,16 @@
         </p:nvSpPr>
         <p:spPr>
           <a:xfrm>
-            <a:off x="457200" y="1280160"/>
-            <a:ext cx="2606040" cy="1600200"/>
-          </a:xfrm>
-          <a:prstGeom prst="roundRect">
-            <a:avLst>
-              <a:gd name="adj" fmla="val 4571"/>
-            </a:avLst>
+            <a:off x="457200" y="1188720"/>
+            <a:ext cx="384048" cy="384048"/>
+          </a:xfrm>
+          <a:prstGeom prst="ellipse">
+            <a:avLst/>
           </a:prstGeom>
           <a:solidFill>
-            <a:srgbClr val="E8F0EE"/>
+            <a:srgbClr val="B8862F"/>
           </a:solidFill>
-          <a:ln w="12700">
-            <a:solidFill>
-              <a:srgbClr val="E8F0EE"/>
-            </a:solidFill>
-            <a:prstDash val="solid"/>
-          </a:ln>
+          <a:ln/>
         </p:spPr>
       </p:sp>
       <p:sp>
@@ -7586,8 +6848,8 @@
         </p:nvSpPr>
         <p:spPr>
           <a:xfrm>
-            <a:off x="594360" y="1389888"/>
-            <a:ext cx="2331720" cy="502920"/>
+            <a:off x="457200" y="1188720"/>
+            <a:ext cx="384048" cy="384048"/>
           </a:xfrm>
           <a:prstGeom prst="rect">
             <a:avLst/>
@@ -7599,19 +6861,19 @@
           <a:bodyPr wrap="square" lIns="0" tIns="0" rIns="0" bIns="0" rtlCol="0" anchor="ctr"/>
           <a:lstStyle/>
           <a:p>
-            <a:pPr indent="0" marL="0">
+            <a:pPr algn="ctr" indent="0" marL="0">
               <a:buNone/>
             </a:pPr>
             <a:r>
               <a:rPr lang="en-US" sz="1400" b="1" dirty="0">
                 <a:solidFill>
-                  <a:srgbClr val="0B4F4A"/>
+                  <a:srgbClr val="FFFFFF"/>
                 </a:solidFill>
                 <a:latin typeface="Cambria" pitchFamily="34" charset="0"/>
                 <a:ea typeface="Cambria" pitchFamily="34" charset="-122"/>
                 <a:cs typeface="Cambria" pitchFamily="34" charset="-120"/>
               </a:rPr>
-              <a:t>Sole traders &amp; private clients</a:t>
+              <a:t>1</a:t>
             </a:r>
             <a:endParaRPr lang="en-US" sz="1400" dirty="0"/>
           </a:p>
@@ -7625,24 +6887,24 @@
         </p:nvSpPr>
         <p:spPr>
           <a:xfrm>
-            <a:off x="594360" y="1920240"/>
-            <a:ext cx="2331720" cy="868680"/>
-          </a:xfrm>
-          <a:prstGeom prst="rect">
-            <a:avLst/>
-          </a:prstGeom>
-          <a:noFill/>
-          <a:ln/>
-        </p:spPr>
-        <p:txBody>
-          <a:bodyPr wrap="square" lIns="0" tIns="0" rIns="0" bIns="0" rtlCol="0" anchor="t"/>
+            <a:off x="960120" y="1188720"/>
+            <a:ext cx="3566160" cy="384048"/>
+          </a:xfrm>
+          <a:prstGeom prst="rect">
+            <a:avLst/>
+          </a:prstGeom>
+          <a:noFill/>
+          <a:ln/>
+        </p:spPr>
+        <p:txBody>
+          <a:bodyPr wrap="square" lIns="0" tIns="0" rIns="0" bIns="0" rtlCol="0" anchor="ctr"/>
           <a:lstStyle/>
           <a:p>
             <a:pPr indent="0" marL="0">
               <a:buNone/>
             </a:pPr>
             <a:r>
-              <a:rPr lang="en-US" sz="1200" dirty="0">
+              <a:rPr lang="en-US" sz="1250" dirty="0">
                 <a:solidFill>
                   <a:srgbClr val="1D2B2A"/>
                 </a:solidFill>
@@ -7650,9 +6912,9 @@
                 <a:ea typeface="Calibri" pitchFamily="34" charset="-122"/>
                 <a:cs typeface="Calibri" pitchFamily="34" charset="-120"/>
               </a:rPr>
-              <a:t>Person with a trading name; PRIVATE needs verified source of wealth (EDD)</a:t>
-            </a:r>
-            <a:endParaRPr lang="en-US" sz="1200" dirty="0"/>
+              <a:t>Document expires mid-onboarding</a:t>
+            </a:r>
+            <a:endParaRPr lang="en-US" sz="1250" dirty="0"/>
           </a:p>
         </p:txBody>
       </p:sp>
@@ -7664,23 +6926,16 @@
         </p:nvSpPr>
         <p:spPr>
           <a:xfrm>
-            <a:off x="3246120" y="1280160"/>
-            <a:ext cx="2606040" cy="1600200"/>
-          </a:xfrm>
-          <a:prstGeom prst="roundRect">
-            <a:avLst>
-              <a:gd name="adj" fmla="val 4571"/>
-            </a:avLst>
+            <a:off x="457200" y="1645920"/>
+            <a:ext cx="384048" cy="384048"/>
+          </a:xfrm>
+          <a:prstGeom prst="ellipse">
+            <a:avLst/>
           </a:prstGeom>
           <a:solidFill>
-            <a:srgbClr val="E8F0EE"/>
+            <a:srgbClr val="B8862F"/>
           </a:solidFill>
-          <a:ln w="12700">
-            <a:solidFill>
-              <a:srgbClr val="E8F0EE"/>
-            </a:solidFill>
-            <a:prstDash val="solid"/>
-          </a:ln>
+          <a:ln/>
         </p:spPr>
       </p:sp>
       <p:sp>
@@ -7691,8 +6946,8 @@
         </p:nvSpPr>
         <p:spPr>
           <a:xfrm>
-            <a:off x="3383280" y="1389888"/>
-            <a:ext cx="2331720" cy="502920"/>
+            <a:off x="457200" y="1645920"/>
+            <a:ext cx="384048" cy="384048"/>
           </a:xfrm>
           <a:prstGeom prst="rect">
             <a:avLst/>
@@ -7704,19 +6959,19 @@
           <a:bodyPr wrap="square" lIns="0" tIns="0" rIns="0" bIns="0" rtlCol="0" anchor="ctr"/>
           <a:lstStyle/>
           <a:p>
-            <a:pPr indent="0" marL="0">
+            <a:pPr algn="ctr" indent="0" marL="0">
               <a:buNone/>
             </a:pPr>
             <a:r>
               <a:rPr lang="en-US" sz="1400" b="1" dirty="0">
                 <a:solidFill>
-                  <a:srgbClr val="0B4F4A"/>
+                  <a:srgbClr val="FFFFFF"/>
                 </a:solidFill>
                 <a:latin typeface="Cambria" pitchFamily="34" charset="0"/>
                 <a:ea typeface="Cambria" pitchFamily="34" charset="-122"/>
                 <a:cs typeface="Cambria" pitchFamily="34" charset="-120"/>
               </a:rPr>
-              <a:t>Fixed-term deposits</a:t>
+              <a:t>2</a:t>
             </a:r>
             <a:endParaRPr lang="en-US" sz="1400" dirty="0"/>
           </a:p>
@@ -7730,24 +6985,24 @@
         </p:nvSpPr>
         <p:spPr>
           <a:xfrm>
-            <a:off x="3383280" y="1920240"/>
-            <a:ext cx="2331720" cy="868680"/>
-          </a:xfrm>
-          <a:prstGeom prst="rect">
-            <a:avLst/>
-          </a:prstGeom>
-          <a:noFill/>
-          <a:ln/>
-        </p:spPr>
-        <p:txBody>
-          <a:bodyPr wrap="square" lIns="0" tIns="0" rIns="0" bIns="0" rtlCol="0" anchor="t"/>
+            <a:off x="960120" y="1645920"/>
+            <a:ext cx="3566160" cy="384048"/>
+          </a:xfrm>
+          <a:prstGeom prst="rect">
+            <a:avLst/>
+          </a:prstGeom>
+          <a:noFill/>
+          <a:ln/>
+        </p:spPr>
+        <p:txBody>
+          <a:bodyPr wrap="square" lIns="0" tIns="0" rIns="0" bIns="0" rtlCol="0" anchor="ctr"/>
           <a:lstStyle/>
           <a:p>
             <a:pPr indent="0" marL="0">
               <a:buNone/>
             </a:pPr>
             <a:r>
-              <a:rPr lang="en-US" sz="1200" dirty="0">
+              <a:rPr lang="en-US" sz="1250" dirty="0">
                 <a:solidFill>
                   <a:srgbClr val="1D2B2A"/>
                 </a:solidFill>
@@ -7755,9 +7010,9 @@
                 <a:ea typeface="Calibri" pitchFamily="34" charset="-122"/>
                 <a:cs typeface="Calibri" pitchFamily="34" charset="-120"/>
               </a:rPr>
-              <a:t>Third DepositAccount subclass: no early debits, maturity payout, break penalty</a:t>
-            </a:r>
-            <a:endParaRPr lang="en-US" sz="1200" dirty="0"/>
+              <a:t>Large transfer: dual control, hold, release</a:t>
+            </a:r>
+            <a:endParaRPr lang="en-US" sz="1250" dirty="0"/>
           </a:p>
         </p:txBody>
       </p:sp>
@@ -7769,23 +7024,16 @@
         </p:nvSpPr>
         <p:spPr>
           <a:xfrm>
-            <a:off x="6035040" y="1280160"/>
-            <a:ext cx="2606040" cy="1600200"/>
-          </a:xfrm>
-          <a:prstGeom prst="roundRect">
-            <a:avLst>
-              <a:gd name="adj" fmla="val 4571"/>
-            </a:avLst>
+            <a:off x="457200" y="2103120"/>
+            <a:ext cx="384048" cy="384048"/>
+          </a:xfrm>
+          <a:prstGeom prst="ellipse">
+            <a:avLst/>
           </a:prstGeom>
           <a:solidFill>
-            <a:srgbClr val="E8F0EE"/>
+            <a:srgbClr val="B8862F"/>
           </a:solidFill>
-          <a:ln w="12700">
-            <a:solidFill>
-              <a:srgbClr val="E8F0EE"/>
-            </a:solidFill>
-            <a:prstDash val="solid"/>
-          </a:ln>
+          <a:ln/>
         </p:spPr>
       </p:sp>
       <p:sp>
@@ -7796,8 +7044,8 @@
         </p:nvSpPr>
         <p:spPr>
           <a:xfrm>
-            <a:off x="6172200" y="1389888"/>
-            <a:ext cx="2331720" cy="502920"/>
+            <a:off x="457200" y="2103120"/>
+            <a:ext cx="384048" cy="384048"/>
           </a:xfrm>
           <a:prstGeom prst="rect">
             <a:avLst/>
@@ -7809,19 +7057,19 @@
           <a:bodyPr wrap="square" lIns="0" tIns="0" rIns="0" bIns="0" rtlCol="0" anchor="ctr"/>
           <a:lstStyle/>
           <a:p>
-            <a:pPr indent="0" marL="0">
+            <a:pPr algn="ctr" indent="0" marL="0">
               <a:buNone/>
             </a:pPr>
             <a:r>
               <a:rPr lang="en-US" sz="1400" b="1" dirty="0">
                 <a:solidFill>
-                  <a:srgbClr val="0B4F4A"/>
+                  <a:srgbClr val="FFFFFF"/>
                 </a:solidFill>
                 <a:latin typeface="Cambria" pitchFamily="34" charset="0"/>
                 <a:ea typeface="Cambria" pitchFamily="34" charset="-122"/>
                 <a:cs typeface="Cambria" pitchFamily="34" charset="-120"/>
               </a:rPr>
-              <a:t>Card controls</a:t>
+              <a:t>3</a:t>
             </a:r>
             <a:endParaRPr lang="en-US" sz="1400" dirty="0"/>
           </a:p>
@@ -7835,24 +7083,24 @@
         </p:nvSpPr>
         <p:spPr>
           <a:xfrm>
-            <a:off x="6172200" y="1920240"/>
-            <a:ext cx="2331720" cy="868680"/>
-          </a:xfrm>
-          <a:prstGeom prst="rect">
-            <a:avLst/>
-          </a:prstGeom>
-          <a:noFill/>
-          <a:ln/>
-        </p:spPr>
-        <p:txBody>
-          <a:bodyPr wrap="square" lIns="0" tIns="0" rIns="0" bIns="0" rtlCol="0" anchor="t"/>
+            <a:off x="960120" y="2103120"/>
+            <a:ext cx="3566160" cy="384048"/>
+          </a:xfrm>
+          <a:prstGeom prst="rect">
+            <a:avLst/>
+          </a:prstGeom>
+          <a:noFill/>
+          <a:ln/>
+        </p:spPr>
+        <p:txBody>
+          <a:bodyPr wrap="square" lIns="0" tIns="0" rIns="0" bIns="0" rtlCol="0" anchor="ctr"/>
           <a:lstStyle/>
           <a:p>
             <a:pPr indent="0" marL="0">
               <a:buNone/>
             </a:pPr>
             <a:r>
-              <a:rPr lang="en-US" sz="1200" dirty="0">
+              <a:rPr lang="en-US" sz="1250" dirty="0">
                 <a:solidFill>
                   <a:srgbClr val="1D2B2A"/>
                 </a:solidFill>
@@ -7860,9 +7108,9 @@
                 <a:ea typeface="Calibri" pitchFamily="34" charset="-122"/>
                 <a:cs typeface="Calibri" pitchFamily="34" charset="-120"/>
               </a:rPr>
-              <a:t>Online, international, cash, merchant category - each with a validity period</a:t>
-            </a:r>
-            <a:endParaRPr lang="en-US" sz="1200" dirty="0"/>
+              <a:t>Card stolen, replaced twice, found</a:t>
+            </a:r>
+            <a:endParaRPr lang="en-US" sz="1250" dirty="0"/>
           </a:p>
         </p:txBody>
       </p:sp>
@@ -7874,23 +7122,16 @@
         </p:nvSpPr>
         <p:spPr>
           <a:xfrm>
-            <a:off x="457200" y="3063240"/>
-            <a:ext cx="2606040" cy="1600200"/>
-          </a:xfrm>
-          <a:prstGeom prst="roundRect">
-            <a:avLst>
-              <a:gd name="adj" fmla="val 4571"/>
-            </a:avLst>
+            <a:off x="457200" y="2560320"/>
+            <a:ext cx="384048" cy="384048"/>
+          </a:xfrm>
+          <a:prstGeom prst="ellipse">
+            <a:avLst/>
           </a:prstGeom>
           <a:solidFill>
-            <a:srgbClr val="E8F0EE"/>
+            <a:srgbClr val="B8862F"/>
           </a:solidFill>
-          <a:ln w="12700">
-            <a:solidFill>
-              <a:srgbClr val="E8F0EE"/>
-            </a:solidFill>
-            <a:prstDash val="solid"/>
-          </a:ln>
+          <a:ln/>
         </p:spPr>
       </p:sp>
       <p:sp>
@@ -7901,8 +7142,8 @@
         </p:nvSpPr>
         <p:spPr>
           <a:xfrm>
-            <a:off x="594360" y="3172968"/>
-            <a:ext cx="2331720" cy="502920"/>
+            <a:off x="457200" y="2560320"/>
+            <a:ext cx="384048" cy="384048"/>
           </a:xfrm>
           <a:prstGeom prst="rect">
             <a:avLst/>
@@ -7914,19 +7155,19 @@
           <a:bodyPr wrap="square" lIns="0" tIns="0" rIns="0" bIns="0" rtlCol="0" anchor="ctr"/>
           <a:lstStyle/>
           <a:p>
-            <a:pPr indent="0" marL="0">
+            <a:pPr algn="ctr" indent="0" marL="0">
               <a:buNone/>
             </a:pPr>
             <a:r>
               <a:rPr lang="en-US" sz="1400" b="1" dirty="0">
                 <a:solidFill>
-                  <a:srgbClr val="0B4F4A"/>
+                  <a:srgbClr val="FFFFFF"/>
                 </a:solidFill>
                 <a:latin typeface="Cambria" pitchFamily="34" charset="0"/>
                 <a:ea typeface="Cambria" pitchFamily="34" charset="-122"/>
                 <a:cs typeface="Cambria" pitchFamily="34" charset="-120"/>
               </a:rPr>
-              <a:t>Billers</a:t>
+              <a:t>4</a:t>
             </a:r>
             <a:endParaRPr lang="en-US" sz="1400" dirty="0"/>
           </a:p>
@@ -7940,24 +7181,24 @@
         </p:nvSpPr>
         <p:spPr>
           <a:xfrm>
-            <a:off x="594360" y="3703320"/>
-            <a:ext cx="2331720" cy="868680"/>
-          </a:xfrm>
-          <a:prstGeom prst="rect">
-            <a:avLst/>
-          </a:prstGeom>
-          <a:noFill/>
-          <a:ln/>
-        </p:spPr>
-        <p:txBody>
-          <a:bodyPr wrap="square" lIns="0" tIns="0" rIns="0" bIns="0" rtlCol="0" anchor="t"/>
+            <a:off x="960120" y="2560320"/>
+            <a:ext cx="3566160" cy="384048"/>
+          </a:xfrm>
+          <a:prstGeom prst="rect">
+            <a:avLst/>
+          </a:prstGeom>
+          <a:noFill/>
+          <a:ln/>
+        </p:spPr>
+        <p:txBody>
+          <a:bodyPr wrap="square" lIns="0" tIns="0" rIns="0" bIns="0" rtlCol="0" anchor="ctr"/>
           <a:lstStyle/>
           <a:p>
             <a:pPr indent="0" marL="0">
               <a:buNone/>
             </a:pPr>
             <a:r>
-              <a:rPr lang="en-US" sz="1200" dirty="0">
+              <a:rPr lang="en-US" sz="1250" dirty="0">
                 <a:solidFill>
                   <a:srgbClr val="1D2B2A"/>
                 </a:solidFill>
@@ -7965,9 +7206,9 @@
                 <a:ea typeface="Calibri" pitchFamily="34" charset="-122"/>
                 <a:cs typeface="Calibri" pitchFamily="34" charset="-120"/>
               </a:rPr>
-              <a:t>BillPayment is a CustomerPayment: same mandates, restrictions, dual control</a:t>
-            </a:r>
-            <a:endParaRPr lang="en-US" sz="1200" dirty="0"/>
+              <a:t>Posted, reversed, re-posted, disputed</a:t>
+            </a:r>
+            <a:endParaRPr lang="en-US" sz="1250" dirty="0"/>
           </a:p>
         </p:txBody>
       </p:sp>
@@ -7979,23 +7220,16 @@
         </p:nvSpPr>
         <p:spPr>
           <a:xfrm>
-            <a:off x="3246120" y="3063240"/>
-            <a:ext cx="2606040" cy="1600200"/>
-          </a:xfrm>
-          <a:prstGeom prst="roundRect">
-            <a:avLst>
-              <a:gd name="adj" fmla="val 4571"/>
-            </a:avLst>
+            <a:off x="457200" y="3017520"/>
+            <a:ext cx="384048" cy="384048"/>
+          </a:xfrm>
+          <a:prstGeom prst="ellipse">
+            <a:avLst/>
           </a:prstGeom>
           <a:solidFill>
-            <a:srgbClr val="E8F0EE"/>
+            <a:srgbClr val="B8862F"/>
           </a:solidFill>
-          <a:ln w="12700">
-            <a:solidFill>
-              <a:srgbClr val="E8F0EE"/>
-            </a:solidFill>
-            <a:prstDash val="solid"/>
-          </a:ln>
+          <a:ln/>
         </p:spPr>
       </p:sp>
       <p:sp>
@@ -8006,8 +7240,8 @@
         </p:nvSpPr>
         <p:spPr>
           <a:xfrm>
-            <a:off x="3383280" y="3172968"/>
-            <a:ext cx="2331720" cy="502920"/>
+            <a:off x="457200" y="3017520"/>
+            <a:ext cx="384048" cy="384048"/>
           </a:xfrm>
           <a:prstGeom prst="rect">
             <a:avLst/>
@@ -8019,19 +7253,19 @@
           <a:bodyPr wrap="square" lIns="0" tIns="0" rIns="0" bIns="0" rtlCol="0" anchor="ctr"/>
           <a:lstStyle/>
           <a:p>
-            <a:pPr indent="0" marL="0">
+            <a:pPr algn="ctr" indent="0" marL="0">
               <a:buNone/>
             </a:pPr>
             <a:r>
               <a:rPr lang="en-US" sz="1400" b="1" dirty="0">
                 <a:solidFill>
-                  <a:srgbClr val="0B4F4A"/>
+                  <a:srgbClr val="FFFFFF"/>
                 </a:solidFill>
                 <a:latin typeface="Cambria" pitchFamily="34" charset="0"/>
                 <a:ea typeface="Cambria" pitchFamily="34" charset="-122"/>
                 <a:cs typeface="Cambria" pitchFamily="34" charset="-120"/>
               </a:rPr>
-              <a:t>Collections staff</a:t>
+              <a:t>5</a:t>
             </a:r>
             <a:endParaRPr lang="en-US" sz="1400" dirty="0"/>
           </a:p>
@@ -8045,24 +7279,24 @@
         </p:nvSpPr>
         <p:spPr>
           <a:xfrm>
-            <a:off x="3383280" y="3703320"/>
-            <a:ext cx="2331720" cy="868680"/>
-          </a:xfrm>
-          <a:prstGeom prst="rect">
-            <a:avLst/>
-          </a:prstGeom>
-          <a:noFill/>
-          <a:ln/>
-        </p:spPr>
-        <p:txBody>
-          <a:bodyPr wrap="square" lIns="0" tIns="0" rIns="0" bIns="0" rtlCol="0" anchor="t"/>
+            <a:off x="960120" y="3017520"/>
+            <a:ext cx="3566160" cy="384048"/>
+          </a:xfrm>
+          <a:prstGeom prst="rect">
+            <a:avLst/>
+          </a:prstGeom>
+          <a:noFill/>
+          <a:ln/>
+        </p:spPr>
+        <p:txBody>
+          <a:bodyPr wrap="square" lIns="0" tIns="0" rIns="0" bIns="0" rtlCol="0" anchor="ctr"/>
           <a:lstStyle/>
           <a:p>
             <a:pPr indent="0" marL="0">
               <a:buNone/>
             </a:pPr>
             <a:r>
-              <a:rPr lang="en-US" sz="1200" dirty="0">
+              <a:rPr lang="en-US" sz="1250" dirty="0">
                 <a:solidFill>
                   <a:srgbClr val="1D2B2A"/>
                 </a:solidFill>
@@ -8070,9 +7304,9 @@
                 <a:ea typeface="Calibri" pitchFamily="34" charset="-122"/>
                 <a:cs typeface="Calibri" pitchFamily="34" charset="-120"/>
               </a:rPr>
-              <a:t>Collections officer works the case; promise to pay marked kept or broken</a:t>
-            </a:r>
-            <a:endParaRPr lang="en-US" sz="1200" dirty="0"/>
+              <a:t>Restricted then cleared</a:t>
+            </a:r>
+            <a:endParaRPr lang="en-US" sz="1250" dirty="0"/>
           </a:p>
         </p:txBody>
       </p:sp>
@@ -8084,23 +7318,16 @@
         </p:nvSpPr>
         <p:spPr>
           <a:xfrm>
-            <a:off x="6035040" y="3063240"/>
-            <a:ext cx="2606040" cy="1600200"/>
-          </a:xfrm>
-          <a:prstGeom prst="roundRect">
-            <a:avLst>
-              <a:gd name="adj" fmla="val 4571"/>
-            </a:avLst>
+            <a:off x="457200" y="3474720"/>
+            <a:ext cx="384048" cy="384048"/>
+          </a:xfrm>
+          <a:prstGeom prst="ellipse">
+            <a:avLst/>
           </a:prstGeom>
           <a:solidFill>
-            <a:srgbClr val="E8F0EE"/>
+            <a:srgbClr val="B8862F"/>
           </a:solidFill>
-          <a:ln w="12700">
-            <a:solidFill>
-              <a:srgbClr val="E8F0EE"/>
-            </a:solidFill>
-            <a:prstDash val="solid"/>
-          </a:ln>
+          <a:ln/>
         </p:spPr>
       </p:sp>
       <p:sp>
@@ -8111,8 +7338,8 @@
         </p:nvSpPr>
         <p:spPr>
           <a:xfrm>
-            <a:off x="6172200" y="3172968"/>
-            <a:ext cx="2331720" cy="502920"/>
+            <a:off x="457200" y="3474720"/>
+            <a:ext cx="384048" cy="384048"/>
           </a:xfrm>
           <a:prstGeom prst="rect">
             <a:avLst/>
@@ -8124,19 +7351,19 @@
           <a:bodyPr wrap="square" lIns="0" tIns="0" rIns="0" bIns="0" rtlCol="0" anchor="ctr"/>
           <a:lstStyle/>
           <a:p>
-            <a:pPr indent="0" marL="0">
+            <a:pPr algn="ctr" indent="0" marL="0">
               <a:buNone/>
             </a:pPr>
             <a:r>
               <a:rPr lang="en-US" sz="1400" b="1" dirty="0">
                 <a:solidFill>
-                  <a:srgbClr val="0B4F4A"/>
+                  <a:srgbClr val="FFFFFF"/>
                 </a:solidFill>
                 <a:latin typeface="Cambria" pitchFamily="34" charset="0"/>
                 <a:ea typeface="Cambria" pitchFamily="34" charset="-122"/>
                 <a:cs typeface="Cambria" pitchFamily="34" charset="-120"/>
               </a:rPr>
-              <a:t>Auditors &amp; retention</a:t>
+              <a:t>6</a:t>
             </a:r>
             <a:endParaRPr lang="en-US" sz="1400" dirty="0"/>
           </a:p>
@@ -8150,24 +7377,24 @@
         </p:nvSpPr>
         <p:spPr>
           <a:xfrm>
-            <a:off x="6172200" y="3703320"/>
-            <a:ext cx="2331720" cy="868680"/>
-          </a:xfrm>
-          <a:prstGeom prst="rect">
-            <a:avLst/>
-          </a:prstGeom>
-          <a:noFill/>
-          <a:ln/>
-        </p:spPr>
-        <p:txBody>
-          <a:bodyPr wrap="square" lIns="0" tIns="0" rIns="0" bIns="0" rtlCol="0" anchor="t"/>
+            <a:off x="960120" y="3474720"/>
+            <a:ext cx="3566160" cy="384048"/>
+          </a:xfrm>
+          <a:prstGeom prst="rect">
+            <a:avLst/>
+          </a:prstGeom>
+          <a:noFill/>
+          <a:ln/>
+        </p:spPr>
+        <p:txBody>
+          <a:bodyPr wrap="square" lIns="0" tIns="0" rIns="0" bIns="0" rtlCol="0" anchor="ctr"/>
           <a:lstStyle/>
           <a:p>
             <a:pPr indent="0" marL="0">
               <a:buNone/>
             </a:pPr>
             <a:r>
-              <a:rPr lang="en-US" sz="1200" dirty="0">
+              <a:rPr lang="en-US" sz="1250" dirty="0">
                 <a:solidFill>
                   <a:srgbClr val="1D2B2A"/>
                 </a:solidFill>
@@ -8175,9 +7402,989 @@
                 <a:ea typeface="Calibri" pitchFamily="34" charset="-122"/>
                 <a:cs typeface="Calibri" pitchFamily="34" charset="-120"/>
               </a:rPr>
-              <a:t>Approvals audit with role at the time; archive, never delete (10-year retention)</a:t>
-            </a:r>
-            <a:endParaRPr lang="en-US" sz="1200" dirty="0"/>
+              <a:t>Financing: limits, arrears, restructure</a:t>
+            </a:r>
+            <a:endParaRPr lang="en-US" sz="1250" dirty="0"/>
+          </a:p>
+        </p:txBody>
+      </p:sp>
+      <p:sp>
+        <p:nvSpPr>
+          <p:cNvPr id="22" name="Shape 20"/>
+          <p:cNvSpPr/>
+          <p:nvPr/>
+        </p:nvSpPr>
+        <p:spPr>
+          <a:xfrm>
+            <a:off x="457200" y="3931920"/>
+            <a:ext cx="384048" cy="384048"/>
+          </a:xfrm>
+          <a:prstGeom prst="ellipse">
+            <a:avLst/>
+          </a:prstGeom>
+          <a:solidFill>
+            <a:srgbClr val="B8862F"/>
+          </a:solidFill>
+          <a:ln/>
+        </p:spPr>
+      </p:sp>
+      <p:sp>
+        <p:nvSpPr>
+          <p:cNvPr id="23" name="Text 21"/>
+          <p:cNvSpPr txBox="1"/>
+          <p:nvPr/>
+        </p:nvSpPr>
+        <p:spPr>
+          <a:xfrm>
+            <a:off x="457200" y="3931920"/>
+            <a:ext cx="384048" cy="384048"/>
+          </a:xfrm>
+          <a:prstGeom prst="rect">
+            <a:avLst/>
+          </a:prstGeom>
+          <a:noFill/>
+          <a:ln/>
+        </p:spPr>
+        <p:txBody>
+          <a:bodyPr wrap="square" lIns="0" tIns="0" rIns="0" bIns="0" rtlCol="0" anchor="ctr"/>
+          <a:lstStyle/>
+          <a:p>
+            <a:pPr algn="ctr" indent="0" marL="0">
+              <a:buNone/>
+            </a:pPr>
+            <a:r>
+              <a:rPr lang="en-US" sz="1400" b="1" dirty="0">
+                <a:solidFill>
+                  <a:srgbClr val="FFFFFF"/>
+                </a:solidFill>
+                <a:latin typeface="Cambria" pitchFamily="34" charset="0"/>
+                <a:ea typeface="Cambria" pitchFamily="34" charset="-122"/>
+                <a:cs typeface="Cambria" pitchFamily="34" charset="-120"/>
+              </a:rPr>
+              <a:t>7</a:t>
+            </a:r>
+            <a:endParaRPr lang="en-US" sz="1400" dirty="0"/>
+          </a:p>
+        </p:txBody>
+      </p:sp>
+      <p:sp>
+        <p:nvSpPr>
+          <p:cNvPr id="24" name="Text 22"/>
+          <p:cNvSpPr txBox="1"/>
+          <p:nvPr/>
+        </p:nvSpPr>
+        <p:spPr>
+          <a:xfrm>
+            <a:off x="960120" y="3931920"/>
+            <a:ext cx="3566160" cy="384048"/>
+          </a:xfrm>
+          <a:prstGeom prst="rect">
+            <a:avLst/>
+          </a:prstGeom>
+          <a:noFill/>
+          <a:ln/>
+        </p:spPr>
+        <p:txBody>
+          <a:bodyPr wrap="square" lIns="0" tIns="0" rIns="0" bIns="0" rtlCol="0" anchor="ctr"/>
+          <a:lstStyle/>
+          <a:p>
+            <a:pPr indent="0" marL="0">
+              <a:buNone/>
+            </a:pPr>
+            <a:r>
+              <a:rPr lang="en-US" sz="1250" dirty="0">
+                <a:solidFill>
+                  <a:srgbClr val="1D2B2A"/>
+                </a:solidFill>
+                <a:latin typeface="Calibri" pitchFamily="34" charset="0"/>
+                <a:ea typeface="Calibri" pitchFamily="34" charset="-122"/>
+                <a:cs typeface="Calibri" pitchFamily="34" charset="-120"/>
+              </a:rPr>
+              <a:t>Director leaves; authority provable</a:t>
+            </a:r>
+            <a:endParaRPr lang="en-US" sz="1250" dirty="0"/>
+          </a:p>
+        </p:txBody>
+      </p:sp>
+      <p:sp>
+        <p:nvSpPr>
+          <p:cNvPr id="25" name="Shape 23"/>
+          <p:cNvSpPr/>
+          <p:nvPr/>
+        </p:nvSpPr>
+        <p:spPr>
+          <a:xfrm>
+            <a:off x="457200" y="4389120"/>
+            <a:ext cx="384048" cy="384048"/>
+          </a:xfrm>
+          <a:prstGeom prst="ellipse">
+            <a:avLst/>
+          </a:prstGeom>
+          <a:solidFill>
+            <a:srgbClr val="B8862F"/>
+          </a:solidFill>
+          <a:ln/>
+        </p:spPr>
+      </p:sp>
+      <p:sp>
+        <p:nvSpPr>
+          <p:cNvPr id="26" name="Text 24"/>
+          <p:cNvSpPr txBox="1"/>
+          <p:nvPr/>
+        </p:nvSpPr>
+        <p:spPr>
+          <a:xfrm>
+            <a:off x="457200" y="4389120"/>
+            <a:ext cx="384048" cy="384048"/>
+          </a:xfrm>
+          <a:prstGeom prst="rect">
+            <a:avLst/>
+          </a:prstGeom>
+          <a:noFill/>
+          <a:ln/>
+        </p:spPr>
+        <p:txBody>
+          <a:bodyPr wrap="square" lIns="0" tIns="0" rIns="0" bIns="0" rtlCol="0" anchor="ctr"/>
+          <a:lstStyle/>
+          <a:p>
+            <a:pPr algn="ctr" indent="0" marL="0">
+              <a:buNone/>
+            </a:pPr>
+            <a:r>
+              <a:rPr lang="en-US" sz="1400" b="1" dirty="0">
+                <a:solidFill>
+                  <a:srgbClr val="FFFFFF"/>
+                </a:solidFill>
+                <a:latin typeface="Cambria" pitchFamily="34" charset="0"/>
+                <a:ea typeface="Cambria" pitchFamily="34" charset="-122"/>
+                <a:cs typeface="Cambria" pitchFamily="34" charset="-120"/>
+              </a:rPr>
+              <a:t>8</a:t>
+            </a:r>
+            <a:endParaRPr lang="en-US" sz="1400" dirty="0"/>
+          </a:p>
+        </p:txBody>
+      </p:sp>
+      <p:sp>
+        <p:nvSpPr>
+          <p:cNvPr id="27" name="Text 25"/>
+          <p:cNvSpPr txBox="1"/>
+          <p:nvPr/>
+        </p:nvSpPr>
+        <p:spPr>
+          <a:xfrm>
+            <a:off x="960120" y="4389120"/>
+            <a:ext cx="3566160" cy="384048"/>
+          </a:xfrm>
+          <a:prstGeom prst="rect">
+            <a:avLst/>
+          </a:prstGeom>
+          <a:noFill/>
+          <a:ln/>
+        </p:spPr>
+        <p:txBody>
+          <a:bodyPr wrap="square" lIns="0" tIns="0" rIns="0" bIns="0" rtlCol="0" anchor="ctr"/>
+          <a:lstStyle/>
+          <a:p>
+            <a:pPr indent="0" marL="0">
+              <a:buNone/>
+            </a:pPr>
+            <a:r>
+              <a:rPr lang="en-US" sz="1250" dirty="0">
+                <a:solidFill>
+                  <a:srgbClr val="1D2B2A"/>
+                </a:solidFill>
+                <a:latin typeface="Calibri" pitchFamily="34" charset="0"/>
+                <a:ea typeface="Calibri" pitchFamily="34" charset="-122"/>
+                <a:cs typeface="Calibri" pitchFamily="34" charset="-120"/>
+              </a:rPr>
+              <a:t>Beneficiary changes bank details</a:t>
+            </a:r>
+            <a:endParaRPr lang="en-US" sz="1250" dirty="0"/>
+          </a:p>
+        </p:txBody>
+      </p:sp>
+      <p:sp>
+        <p:nvSpPr>
+          <p:cNvPr id="28" name="Shape 26"/>
+          <p:cNvSpPr/>
+          <p:nvPr/>
+        </p:nvSpPr>
+        <p:spPr>
+          <a:xfrm>
+            <a:off x="4663440" y="1188720"/>
+            <a:ext cx="384048" cy="384048"/>
+          </a:xfrm>
+          <a:prstGeom prst="ellipse">
+            <a:avLst/>
+          </a:prstGeom>
+          <a:solidFill>
+            <a:srgbClr val="B8862F"/>
+          </a:solidFill>
+          <a:ln/>
+        </p:spPr>
+      </p:sp>
+      <p:sp>
+        <p:nvSpPr>
+          <p:cNvPr id="29" name="Text 27"/>
+          <p:cNvSpPr txBox="1"/>
+          <p:nvPr/>
+        </p:nvSpPr>
+        <p:spPr>
+          <a:xfrm>
+            <a:off x="4663440" y="1188720"/>
+            <a:ext cx="384048" cy="384048"/>
+          </a:xfrm>
+          <a:prstGeom prst="rect">
+            <a:avLst/>
+          </a:prstGeom>
+          <a:noFill/>
+          <a:ln/>
+        </p:spPr>
+        <p:txBody>
+          <a:bodyPr wrap="square" lIns="0" tIns="0" rIns="0" bIns="0" rtlCol="0" anchor="ctr"/>
+          <a:lstStyle/>
+          <a:p>
+            <a:pPr algn="ctr" indent="0" marL="0">
+              <a:buNone/>
+            </a:pPr>
+            <a:r>
+              <a:rPr lang="en-US" sz="1400" b="1" dirty="0">
+                <a:solidFill>
+                  <a:srgbClr val="FFFFFF"/>
+                </a:solidFill>
+                <a:latin typeface="Cambria" pitchFamily="34" charset="0"/>
+                <a:ea typeface="Cambria" pitchFamily="34" charset="-122"/>
+                <a:cs typeface="Cambria" pitchFamily="34" charset="-120"/>
+              </a:rPr>
+              <a:t>9</a:t>
+            </a:r>
+            <a:endParaRPr lang="en-US" sz="1400" dirty="0"/>
+          </a:p>
+        </p:txBody>
+      </p:sp>
+      <p:sp>
+        <p:nvSpPr>
+          <p:cNvPr id="30" name="Text 28"/>
+          <p:cNvSpPr txBox="1"/>
+          <p:nvPr/>
+        </p:nvSpPr>
+        <p:spPr>
+          <a:xfrm>
+            <a:off x="5166360" y="1188720"/>
+            <a:ext cx="3566160" cy="384048"/>
+          </a:xfrm>
+          <a:prstGeom prst="rect">
+            <a:avLst/>
+          </a:prstGeom>
+          <a:noFill/>
+          <a:ln/>
+        </p:spPr>
+        <p:txBody>
+          <a:bodyPr wrap="square" lIns="0" tIns="0" rIns="0" bIns="0" rtlCol="0" anchor="ctr"/>
+          <a:lstStyle/>
+          <a:p>
+            <a:pPr indent="0" marL="0">
+              <a:buNone/>
+            </a:pPr>
+            <a:r>
+              <a:rPr lang="en-US" sz="1250" dirty="0">
+                <a:solidFill>
+                  <a:srgbClr val="1D2B2A"/>
+                </a:solidFill>
+                <a:latin typeface="Calibri" pitchFamily="34" charset="0"/>
+                <a:ea typeface="Calibri" pitchFamily="34" charset="-122"/>
+                <a:cs typeface="Calibri" pitchFamily="34" charset="-120"/>
+              </a:rPr>
+              <a:t>Evidence keeps corrected data</a:t>
+            </a:r>
+            <a:endParaRPr lang="en-US" sz="1250" dirty="0"/>
+          </a:p>
+        </p:txBody>
+      </p:sp>
+      <p:sp>
+        <p:nvSpPr>
+          <p:cNvPr id="31" name="Shape 29"/>
+          <p:cNvSpPr/>
+          <p:nvPr/>
+        </p:nvSpPr>
+        <p:spPr>
+          <a:xfrm>
+            <a:off x="4663440" y="1645920"/>
+            <a:ext cx="384048" cy="384048"/>
+          </a:xfrm>
+          <a:prstGeom prst="ellipse">
+            <a:avLst/>
+          </a:prstGeom>
+          <a:solidFill>
+            <a:srgbClr val="B8862F"/>
+          </a:solidFill>
+          <a:ln/>
+        </p:spPr>
+      </p:sp>
+      <p:sp>
+        <p:nvSpPr>
+          <p:cNvPr id="32" name="Text 30"/>
+          <p:cNvSpPr txBox="1"/>
+          <p:nvPr/>
+        </p:nvSpPr>
+        <p:spPr>
+          <a:xfrm>
+            <a:off x="4663440" y="1645920"/>
+            <a:ext cx="384048" cy="384048"/>
+          </a:xfrm>
+          <a:prstGeom prst="rect">
+            <a:avLst/>
+          </a:prstGeom>
+          <a:noFill/>
+          <a:ln/>
+        </p:spPr>
+        <p:txBody>
+          <a:bodyPr wrap="square" lIns="0" tIns="0" rIns="0" bIns="0" rtlCol="0" anchor="ctr"/>
+          <a:lstStyle/>
+          <a:p>
+            <a:pPr algn="ctr" indent="0" marL="0">
+              <a:buNone/>
+            </a:pPr>
+            <a:r>
+              <a:rPr lang="en-US" sz="1400" b="1" dirty="0">
+                <a:solidFill>
+                  <a:srgbClr val="FFFFFF"/>
+                </a:solidFill>
+                <a:latin typeface="Cambria" pitchFamily="34" charset="0"/>
+                <a:ea typeface="Cambria" pitchFamily="34" charset="-122"/>
+                <a:cs typeface="Cambria" pitchFamily="34" charset="-120"/>
+              </a:rPr>
+              <a:t>10</a:t>
+            </a:r>
+            <a:endParaRPr lang="en-US" sz="1400" dirty="0"/>
+          </a:p>
+        </p:txBody>
+      </p:sp>
+      <p:sp>
+        <p:nvSpPr>
+          <p:cNvPr id="33" name="Text 31"/>
+          <p:cNvSpPr txBox="1"/>
+          <p:nvPr/>
+        </p:nvSpPr>
+        <p:spPr>
+          <a:xfrm>
+            <a:off x="5166360" y="1645920"/>
+            <a:ext cx="3566160" cy="384048"/>
+          </a:xfrm>
+          <a:prstGeom prst="rect">
+            <a:avLst/>
+          </a:prstGeom>
+          <a:noFill/>
+          <a:ln/>
+        </p:spPr>
+        <p:txBody>
+          <a:bodyPr wrap="square" lIns="0" tIns="0" rIns="0" bIns="0" rtlCol="0" anchor="ctr"/>
+          <a:lstStyle/>
+          <a:p>
+            <a:pPr indent="0" marL="0">
+              <a:buNone/>
+            </a:pPr>
+            <a:r>
+              <a:rPr lang="en-US" sz="1250" dirty="0">
+                <a:solidFill>
+                  <a:srgbClr val="1D2B2A"/>
+                </a:solidFill>
+                <a:latin typeface="Calibri" pitchFamily="34" charset="0"/>
+                <a:ea typeface="Calibri" pitchFamily="34" charset="-122"/>
+                <a:cs typeface="Calibri" pitchFamily="34" charset="-120"/>
+              </a:rPr>
+              <a:t>Product withdrawn, terms pinned</a:t>
+            </a:r>
+            <a:endParaRPr lang="en-US" sz="1250" dirty="0"/>
+          </a:p>
+        </p:txBody>
+      </p:sp>
+      <p:sp>
+        <p:nvSpPr>
+          <p:cNvPr id="34" name="Shape 32"/>
+          <p:cNvSpPr/>
+          <p:nvPr/>
+        </p:nvSpPr>
+        <p:spPr>
+          <a:xfrm>
+            <a:off x="4663440" y="2103120"/>
+            <a:ext cx="384048" cy="384048"/>
+          </a:xfrm>
+          <a:prstGeom prst="ellipse">
+            <a:avLst/>
+          </a:prstGeom>
+          <a:solidFill>
+            <a:srgbClr val="B8862F"/>
+          </a:solidFill>
+          <a:ln/>
+        </p:spPr>
+      </p:sp>
+      <p:sp>
+        <p:nvSpPr>
+          <p:cNvPr id="35" name="Text 33"/>
+          <p:cNvSpPr txBox="1"/>
+          <p:nvPr/>
+        </p:nvSpPr>
+        <p:spPr>
+          <a:xfrm>
+            <a:off x="4663440" y="2103120"/>
+            <a:ext cx="384048" cy="384048"/>
+          </a:xfrm>
+          <a:prstGeom prst="rect">
+            <a:avLst/>
+          </a:prstGeom>
+          <a:noFill/>
+          <a:ln/>
+        </p:spPr>
+        <p:txBody>
+          <a:bodyPr wrap="square" lIns="0" tIns="0" rIns="0" bIns="0" rtlCol="0" anchor="ctr"/>
+          <a:lstStyle/>
+          <a:p>
+            <a:pPr algn="ctr" indent="0" marL="0">
+              <a:buNone/>
+            </a:pPr>
+            <a:r>
+              <a:rPr lang="en-US" sz="1400" b="1" dirty="0">
+                <a:solidFill>
+                  <a:srgbClr val="FFFFFF"/>
+                </a:solidFill>
+                <a:latin typeface="Cambria" pitchFamily="34" charset="0"/>
+                <a:ea typeface="Cambria" pitchFamily="34" charset="-122"/>
+                <a:cs typeface="Cambria" pitchFamily="34" charset="-120"/>
+              </a:rPr>
+              <a:t>11</a:t>
+            </a:r>
+            <a:endParaRPr lang="en-US" sz="1400" dirty="0"/>
+          </a:p>
+        </p:txBody>
+      </p:sp>
+      <p:sp>
+        <p:nvSpPr>
+          <p:cNvPr id="36" name="Text 34"/>
+          <p:cNvSpPr txBox="1"/>
+          <p:nvPr/>
+        </p:nvSpPr>
+        <p:spPr>
+          <a:xfrm>
+            <a:off x="5166360" y="2103120"/>
+            <a:ext cx="3566160" cy="384048"/>
+          </a:xfrm>
+          <a:prstGeom prst="rect">
+            <a:avLst/>
+          </a:prstGeom>
+          <a:noFill/>
+          <a:ln/>
+        </p:spPr>
+        <p:txBody>
+          <a:bodyPr wrap="square" lIns="0" tIns="0" rIns="0" bIns="0" rtlCol="0" anchor="ctr"/>
+          <a:lstStyle/>
+          <a:p>
+            <a:pPr indent="0" marL="0">
+              <a:buNone/>
+            </a:pPr>
+            <a:r>
+              <a:rPr lang="en-US" sz="1250" dirty="0">
+                <a:solidFill>
+                  <a:srgbClr val="1D2B2A"/>
+                </a:solidFill>
+                <a:latin typeface="Calibri" pitchFamily="34" charset="0"/>
+                <a:ea typeface="Calibri" pitchFamily="34" charset="-122"/>
+                <a:cs typeface="Calibri" pitchFamily="34" charset="-120"/>
+              </a:rPr>
+              <a:t>Branch closes; all moves</a:t>
+            </a:r>
+            <a:endParaRPr lang="en-US" sz="1250" dirty="0"/>
+          </a:p>
+        </p:txBody>
+      </p:sp>
+      <p:sp>
+        <p:nvSpPr>
+          <p:cNvPr id="37" name="Shape 35"/>
+          <p:cNvSpPr/>
+          <p:nvPr/>
+        </p:nvSpPr>
+        <p:spPr>
+          <a:xfrm>
+            <a:off x="4663440" y="2560320"/>
+            <a:ext cx="384048" cy="384048"/>
+          </a:xfrm>
+          <a:prstGeom prst="ellipse">
+            <a:avLst/>
+          </a:prstGeom>
+          <a:solidFill>
+            <a:srgbClr val="B8862F"/>
+          </a:solidFill>
+          <a:ln/>
+        </p:spPr>
+      </p:sp>
+      <p:sp>
+        <p:nvSpPr>
+          <p:cNvPr id="38" name="Text 36"/>
+          <p:cNvSpPr txBox="1"/>
+          <p:nvPr/>
+        </p:nvSpPr>
+        <p:spPr>
+          <a:xfrm>
+            <a:off x="4663440" y="2560320"/>
+            <a:ext cx="384048" cy="384048"/>
+          </a:xfrm>
+          <a:prstGeom prst="rect">
+            <a:avLst/>
+          </a:prstGeom>
+          <a:noFill/>
+          <a:ln/>
+        </p:spPr>
+        <p:txBody>
+          <a:bodyPr wrap="square" lIns="0" tIns="0" rIns="0" bIns="0" rtlCol="0" anchor="ctr"/>
+          <a:lstStyle/>
+          <a:p>
+            <a:pPr algn="ctr" indent="0" marL="0">
+              <a:buNone/>
+            </a:pPr>
+            <a:r>
+              <a:rPr lang="en-US" sz="1400" b="1" dirty="0">
+                <a:solidFill>
+                  <a:srgbClr val="FFFFFF"/>
+                </a:solidFill>
+                <a:latin typeface="Cambria" pitchFamily="34" charset="0"/>
+                <a:ea typeface="Cambria" pitchFamily="34" charset="-122"/>
+                <a:cs typeface="Cambria" pitchFamily="34" charset="-120"/>
+              </a:rPr>
+              <a:t>12</a:t>
+            </a:r>
+            <a:endParaRPr lang="en-US" sz="1400" dirty="0"/>
+          </a:p>
+        </p:txBody>
+      </p:sp>
+      <p:sp>
+        <p:nvSpPr>
+          <p:cNvPr id="39" name="Text 37"/>
+          <p:cNvSpPr txBox="1"/>
+          <p:nvPr/>
+        </p:nvSpPr>
+        <p:spPr>
+          <a:xfrm>
+            <a:off x="5166360" y="2560320"/>
+            <a:ext cx="3566160" cy="384048"/>
+          </a:xfrm>
+          <a:prstGeom prst="rect">
+            <a:avLst/>
+          </a:prstGeom>
+          <a:noFill/>
+          <a:ln/>
+        </p:spPr>
+        <p:txBody>
+          <a:bodyPr wrap="square" lIns="0" tIns="0" rIns="0" bIns="0" rtlCol="0" anchor="ctr"/>
+          <a:lstStyle/>
+          <a:p>
+            <a:pPr indent="0" marL="0">
+              <a:buNone/>
+            </a:pPr>
+            <a:r>
+              <a:rPr lang="en-US" sz="1250" dirty="0">
+                <a:solidFill>
+                  <a:srgbClr val="1D2B2A"/>
+                </a:solidFill>
+                <a:latin typeface="Calibri" pitchFamily="34" charset="0"/>
+                <a:ea typeface="Calibri" pitchFamily="34" charset="-122"/>
+                <a:cs typeface="Calibri" pitchFamily="34" charset="-120"/>
+              </a:rPr>
+              <a:t>Savings limit; closure not deletion</a:t>
+            </a:r>
+            <a:endParaRPr lang="en-US" sz="1250" dirty="0"/>
+          </a:p>
+        </p:txBody>
+      </p:sp>
+      <p:sp>
+        <p:nvSpPr>
+          <p:cNvPr id="40" name="Shape 38"/>
+          <p:cNvSpPr/>
+          <p:nvPr/>
+        </p:nvSpPr>
+        <p:spPr>
+          <a:xfrm>
+            <a:off x="4663440" y="3017520"/>
+            <a:ext cx="384048" cy="384048"/>
+          </a:xfrm>
+          <a:prstGeom prst="ellipse">
+            <a:avLst/>
+          </a:prstGeom>
+          <a:solidFill>
+            <a:srgbClr val="B8862F"/>
+          </a:solidFill>
+          <a:ln/>
+        </p:spPr>
+      </p:sp>
+      <p:sp>
+        <p:nvSpPr>
+          <p:cNvPr id="41" name="Text 39"/>
+          <p:cNvSpPr txBox="1"/>
+          <p:nvPr/>
+        </p:nvSpPr>
+        <p:spPr>
+          <a:xfrm>
+            <a:off x="4663440" y="3017520"/>
+            <a:ext cx="384048" cy="384048"/>
+          </a:xfrm>
+          <a:prstGeom prst="rect">
+            <a:avLst/>
+          </a:prstGeom>
+          <a:noFill/>
+          <a:ln/>
+        </p:spPr>
+        <p:txBody>
+          <a:bodyPr wrap="square" lIns="0" tIns="0" rIns="0" bIns="0" rtlCol="0" anchor="ctr"/>
+          <a:lstStyle/>
+          <a:p>
+            <a:pPr algn="ctr" indent="0" marL="0">
+              <a:buNone/>
+            </a:pPr>
+            <a:r>
+              <a:rPr lang="en-US" sz="1400" b="1" dirty="0">
+                <a:solidFill>
+                  <a:srgbClr val="FFFFFF"/>
+                </a:solidFill>
+                <a:latin typeface="Cambria" pitchFamily="34" charset="0"/>
+                <a:ea typeface="Cambria" pitchFamily="34" charset="-122"/>
+                <a:cs typeface="Cambria" pitchFamily="34" charset="-120"/>
+              </a:rPr>
+              <a:t>13</a:t>
+            </a:r>
+            <a:endParaRPr lang="en-US" sz="1400" dirty="0"/>
+          </a:p>
+        </p:txBody>
+      </p:sp>
+      <p:sp>
+        <p:nvSpPr>
+          <p:cNvPr id="42" name="Text 40"/>
+          <p:cNvSpPr txBox="1"/>
+          <p:nvPr/>
+        </p:nvSpPr>
+        <p:spPr>
+          <a:xfrm>
+            <a:off x="5166360" y="3017520"/>
+            <a:ext cx="3566160" cy="384048"/>
+          </a:xfrm>
+          <a:prstGeom prst="rect">
+            <a:avLst/>
+          </a:prstGeom>
+          <a:noFill/>
+          <a:ln/>
+        </p:spPr>
+        <p:txBody>
+          <a:bodyPr wrap="square" lIns="0" tIns="0" rIns="0" bIns="0" rtlCol="0" anchor="ctr"/>
+          <a:lstStyle/>
+          <a:p>
+            <a:pPr indent="0" marL="0">
+              <a:buNone/>
+            </a:pPr>
+            <a:r>
+              <a:rPr lang="en-US" sz="1250" dirty="0">
+                <a:solidFill>
+                  <a:srgbClr val="1D2B2A"/>
+                </a:solidFill>
+                <a:latin typeface="Calibri" pitchFamily="34" charset="0"/>
+                <a:ea typeface="Calibri" pitchFamily="34" charset="-122"/>
+                <a:cs typeface="Calibri" pitchFamily="34" charset="-120"/>
+              </a:rPr>
+              <a:t>Staff and customer leave</a:t>
+            </a:r>
+            <a:endParaRPr lang="en-US" sz="1250" dirty="0"/>
+          </a:p>
+        </p:txBody>
+      </p:sp>
+      <p:sp>
+        <p:nvSpPr>
+          <p:cNvPr id="43" name="Shape 41"/>
+          <p:cNvSpPr/>
+          <p:nvPr/>
+        </p:nvSpPr>
+        <p:spPr>
+          <a:xfrm>
+            <a:off x="4663440" y="3474720"/>
+            <a:ext cx="384048" cy="384048"/>
+          </a:xfrm>
+          <a:prstGeom prst="ellipse">
+            <a:avLst/>
+          </a:prstGeom>
+          <a:solidFill>
+            <a:srgbClr val="B8862F"/>
+          </a:solidFill>
+          <a:ln/>
+        </p:spPr>
+      </p:sp>
+      <p:sp>
+        <p:nvSpPr>
+          <p:cNvPr id="44" name="Text 42"/>
+          <p:cNvSpPr txBox="1"/>
+          <p:nvPr/>
+        </p:nvSpPr>
+        <p:spPr>
+          <a:xfrm>
+            <a:off x="4663440" y="3474720"/>
+            <a:ext cx="384048" cy="384048"/>
+          </a:xfrm>
+          <a:prstGeom prst="rect">
+            <a:avLst/>
+          </a:prstGeom>
+          <a:noFill/>
+          <a:ln/>
+        </p:spPr>
+        <p:txBody>
+          <a:bodyPr wrap="square" lIns="0" tIns="0" rIns="0" bIns="0" rtlCol="0" anchor="ctr"/>
+          <a:lstStyle/>
+          <a:p>
+            <a:pPr algn="ctr" indent="0" marL="0">
+              <a:buNone/>
+            </a:pPr>
+            <a:r>
+              <a:rPr lang="en-US" sz="1400" b="1" dirty="0">
+                <a:solidFill>
+                  <a:srgbClr val="FFFFFF"/>
+                </a:solidFill>
+                <a:latin typeface="Cambria" pitchFamily="34" charset="0"/>
+                <a:ea typeface="Cambria" pitchFamily="34" charset="-122"/>
+                <a:cs typeface="Cambria" pitchFamily="34" charset="-120"/>
+              </a:rPr>
+              <a:t>14</a:t>
+            </a:r>
+            <a:endParaRPr lang="en-US" sz="1400" dirty="0"/>
+          </a:p>
+        </p:txBody>
+      </p:sp>
+      <p:sp>
+        <p:nvSpPr>
+          <p:cNvPr id="45" name="Text 43"/>
+          <p:cNvSpPr txBox="1"/>
+          <p:nvPr/>
+        </p:nvSpPr>
+        <p:spPr>
+          <a:xfrm>
+            <a:off x="5166360" y="3474720"/>
+            <a:ext cx="3566160" cy="384048"/>
+          </a:xfrm>
+          <a:prstGeom prst="rect">
+            <a:avLst/>
+          </a:prstGeom>
+          <a:noFill/>
+          <a:ln/>
+        </p:spPr>
+        <p:txBody>
+          <a:bodyPr wrap="square" lIns="0" tIns="0" rIns="0" bIns="0" rtlCol="0" anchor="ctr"/>
+          <a:lstStyle/>
+          <a:p>
+            <a:pPr indent="0" marL="0">
+              <a:buNone/>
+            </a:pPr>
+            <a:r>
+              <a:rPr lang="en-US" sz="1250" dirty="0">
+                <a:solidFill>
+                  <a:srgbClr val="1D2B2A"/>
+                </a:solidFill>
+                <a:latin typeface="Calibri" pitchFamily="34" charset="0"/>
+                <a:ea typeface="Calibri" pitchFamily="34" charset="-122"/>
+                <a:cs typeface="Calibri" pitchFamily="34" charset="-120"/>
+              </a:rPr>
+              <a:t>Sole trader, private client, term deposits</a:t>
+            </a:r>
+            <a:endParaRPr lang="en-US" sz="1250" dirty="0"/>
+          </a:p>
+        </p:txBody>
+      </p:sp>
+      <p:sp>
+        <p:nvSpPr>
+          <p:cNvPr id="46" name="Shape 44"/>
+          <p:cNvSpPr/>
+          <p:nvPr/>
+        </p:nvSpPr>
+        <p:spPr>
+          <a:xfrm>
+            <a:off x="4663440" y="3931920"/>
+            <a:ext cx="384048" cy="384048"/>
+          </a:xfrm>
+          <a:prstGeom prst="ellipse">
+            <a:avLst/>
+          </a:prstGeom>
+          <a:solidFill>
+            <a:srgbClr val="B8862F"/>
+          </a:solidFill>
+          <a:ln/>
+        </p:spPr>
+      </p:sp>
+      <p:sp>
+        <p:nvSpPr>
+          <p:cNvPr id="47" name="Text 45"/>
+          <p:cNvSpPr txBox="1"/>
+          <p:nvPr/>
+        </p:nvSpPr>
+        <p:spPr>
+          <a:xfrm>
+            <a:off x="4663440" y="3931920"/>
+            <a:ext cx="384048" cy="384048"/>
+          </a:xfrm>
+          <a:prstGeom prst="rect">
+            <a:avLst/>
+          </a:prstGeom>
+          <a:noFill/>
+          <a:ln/>
+        </p:spPr>
+        <p:txBody>
+          <a:bodyPr wrap="square" lIns="0" tIns="0" rIns="0" bIns="0" rtlCol="0" anchor="ctr"/>
+          <a:lstStyle/>
+          <a:p>
+            <a:pPr algn="ctr" indent="0" marL="0">
+              <a:buNone/>
+            </a:pPr>
+            <a:r>
+              <a:rPr lang="en-US" sz="1400" b="1" dirty="0">
+                <a:solidFill>
+                  <a:srgbClr val="FFFFFF"/>
+                </a:solidFill>
+                <a:latin typeface="Cambria" pitchFamily="34" charset="0"/>
+                <a:ea typeface="Cambria" pitchFamily="34" charset="-122"/>
+                <a:cs typeface="Cambria" pitchFamily="34" charset="-120"/>
+              </a:rPr>
+              <a:t>15</a:t>
+            </a:r>
+            <a:endParaRPr lang="en-US" sz="1400" dirty="0"/>
+          </a:p>
+        </p:txBody>
+      </p:sp>
+      <p:sp>
+        <p:nvSpPr>
+          <p:cNvPr id="48" name="Text 46"/>
+          <p:cNvSpPr txBox="1"/>
+          <p:nvPr/>
+        </p:nvSpPr>
+        <p:spPr>
+          <a:xfrm>
+            <a:off x="5166360" y="3931920"/>
+            <a:ext cx="3566160" cy="384048"/>
+          </a:xfrm>
+          <a:prstGeom prst="rect">
+            <a:avLst/>
+          </a:prstGeom>
+          <a:noFill/>
+          <a:ln/>
+        </p:spPr>
+        <p:txBody>
+          <a:bodyPr wrap="square" lIns="0" tIns="0" rIns="0" bIns="0" rtlCol="0" anchor="ctr"/>
+          <a:lstStyle/>
+          <a:p>
+            <a:pPr indent="0" marL="0">
+              <a:buNone/>
+            </a:pPr>
+            <a:r>
+              <a:rPr lang="en-US" sz="1250" dirty="0">
+                <a:solidFill>
+                  <a:srgbClr val="1D2B2A"/>
+                </a:solidFill>
+                <a:latin typeface="Calibri" pitchFamily="34" charset="0"/>
+                <a:ea typeface="Calibri" pitchFamily="34" charset="-122"/>
+                <a:cs typeface="Calibri" pitchFamily="34" charset="-120"/>
+              </a:rPr>
+              <a:t>Card controls, bills, card search</a:t>
+            </a:r>
+            <a:endParaRPr lang="en-US" sz="1250" dirty="0"/>
+          </a:p>
+        </p:txBody>
+      </p:sp>
+      <p:sp>
+        <p:nvSpPr>
+          <p:cNvPr id="49" name="Shape 47"/>
+          <p:cNvSpPr/>
+          <p:nvPr/>
+        </p:nvSpPr>
+        <p:spPr>
+          <a:xfrm>
+            <a:off x="4663440" y="4389120"/>
+            <a:ext cx="384048" cy="384048"/>
+          </a:xfrm>
+          <a:prstGeom prst="ellipse">
+            <a:avLst/>
+          </a:prstGeom>
+          <a:solidFill>
+            <a:srgbClr val="B8862F"/>
+          </a:solidFill>
+          <a:ln/>
+        </p:spPr>
+      </p:sp>
+      <p:sp>
+        <p:nvSpPr>
+          <p:cNvPr id="50" name="Text 48"/>
+          <p:cNvSpPr txBox="1"/>
+          <p:nvPr/>
+        </p:nvSpPr>
+        <p:spPr>
+          <a:xfrm>
+            <a:off x="4663440" y="4389120"/>
+            <a:ext cx="384048" cy="384048"/>
+          </a:xfrm>
+          <a:prstGeom prst="rect">
+            <a:avLst/>
+          </a:prstGeom>
+          <a:noFill/>
+          <a:ln/>
+        </p:spPr>
+        <p:txBody>
+          <a:bodyPr wrap="square" lIns="0" tIns="0" rIns="0" bIns="0" rtlCol="0" anchor="ctr"/>
+          <a:lstStyle/>
+          <a:p>
+            <a:pPr algn="ctr" indent="0" marL="0">
+              <a:buNone/>
+            </a:pPr>
+            <a:r>
+              <a:rPr lang="en-US" sz="1400" b="1" dirty="0">
+                <a:solidFill>
+                  <a:srgbClr val="FFFFFF"/>
+                </a:solidFill>
+                <a:latin typeface="Cambria" pitchFamily="34" charset="0"/>
+                <a:ea typeface="Cambria" pitchFamily="34" charset="-122"/>
+                <a:cs typeface="Cambria" pitchFamily="34" charset="-120"/>
+              </a:rPr>
+              <a:t>16</a:t>
+            </a:r>
+            <a:endParaRPr lang="en-US" sz="1400" dirty="0"/>
+          </a:p>
+        </p:txBody>
+      </p:sp>
+      <p:sp>
+        <p:nvSpPr>
+          <p:cNvPr id="51" name="Text 49"/>
+          <p:cNvSpPr txBox="1"/>
+          <p:nvPr/>
+        </p:nvSpPr>
+        <p:spPr>
+          <a:xfrm>
+            <a:off x="5166360" y="4389120"/>
+            <a:ext cx="3566160" cy="384048"/>
+          </a:xfrm>
+          <a:prstGeom prst="rect">
+            <a:avLst/>
+          </a:prstGeom>
+          <a:noFill/>
+          <a:ln/>
+        </p:spPr>
+        <p:txBody>
+          <a:bodyPr wrap="square" lIns="0" tIns="0" rIns="0" bIns="0" rtlCol="0" anchor="ctr"/>
+          <a:lstStyle/>
+          <a:p>
+            <a:pPr indent="0" marL="0">
+              <a:buNone/>
+            </a:pPr>
+            <a:r>
+              <a:rPr lang="en-US" sz="1250" dirty="0">
+                <a:solidFill>
+                  <a:srgbClr val="1D2B2A"/>
+                </a:solidFill>
+                <a:latin typeface="Calibri" pitchFamily="34" charset="0"/>
+                <a:ea typeface="Calibri" pitchFamily="34" charset="-122"/>
+                <a:cs typeface="Calibri" pitchFamily="34" charset="-120"/>
+              </a:rPr>
+              <a:t>Auditor review; archive vs delete</a:t>
+            </a:r>
+            <a:endParaRPr lang="en-US" sz="1250" dirty="0"/>
           </a:p>
         </p:txBody>
       </p:sp>
@@ -8240,7 +8447,7 @@
               <a:buNone/>
             </a:pPr>
             <a:r>
-              <a:rPr lang="en-US" sz="2200" b="1" dirty="0">
+              <a:rPr lang="en-US" sz="2800" b="1" dirty="0">
                 <a:solidFill>
                   <a:srgbClr val="0B4F4A"/>
                 </a:solidFill>
@@ -8248,9 +8455,9 @@
                 <a:ea typeface="Cambria" pitchFamily="34" charset="-122"/>
                 <a:cs typeface="Cambria" pitchFamily="34" charset="-120"/>
               </a:rPr>
-              <a:t>Behaviour: six flowcharts traced from the code</a:t>
-            </a:r>
-            <a:endParaRPr lang="en-US" sz="2200" dirty="0"/>
+              <a:t>Everything the brief names is modelled</a:t>
+            </a:r>
+            <a:endParaRPr lang="en-US" sz="2800" dirty="0"/>
           </a:p>
         </p:txBody>
       </p:sp>
@@ -8287,7 +8494,7 @@
                 <a:ea typeface="Calibri" pitchFamily="34" charset="-122"/>
                 <a:cs typeface="Calibri" pitchFamily="34" charset="-120"/>
               </a:rPr>
-              <a:t>Standard symbols (ISO 5807); the diamonds are in the order the code checks the rules</a:t>
+              <a:t>Found by rereading Problem 4 line by line; each has a test</a:t>
             </a:r>
             <a:endParaRPr lang="en-US" sz="1200" dirty="0"/>
           </a:p>
@@ -8301,69 +8508,20 @@
         </p:nvSpPr>
         <p:spPr>
           <a:xfrm>
-            <a:off x="457200" y="1188720"/>
-            <a:ext cx="3200400" cy="3611880"/>
+            <a:off x="457200" y="1280160"/>
+            <a:ext cx="2606040" cy="1600200"/>
           </a:xfrm>
           <a:prstGeom prst="roundRect">
             <a:avLst>
-              <a:gd name="adj" fmla="val 2286"/>
+              <a:gd name="adj" fmla="val 4571"/>
             </a:avLst>
-          </a:prstGeom>
-          <a:solidFill>
-            <a:srgbClr val="F4F8F7"/>
-          </a:solidFill>
-          <a:ln w="12700">
-            <a:solidFill>
-              <a:srgbClr val="F4F8F7"/>
-            </a:solidFill>
-            <a:prstDash val="solid"/>
-          </a:ln>
-        </p:spPr>
-      </p:sp>
-      <p:pic>
-        <p:nvPicPr>
-          <p:cNvPr id="5" name="Image 0" descr="/home/user/commercial-banking/docs/flowchart_3_transfer.png">    </p:cNvPr>
-          <p:cNvPicPr>
-            <a:picLocks noChangeAspect="1"/>
-          </p:cNvPicPr>
-          <p:nvPr/>
-        </p:nvPicPr>
-        <p:blipFill>
-          <a:blip r:embed="rId1"/>
-          <a:stretch>
-            <a:fillRect/>
-          </a:stretch>
-        </p:blipFill>
-        <p:spPr>
-          <a:xfrm>
-            <a:off x="782195" y="1261872"/>
-            <a:ext cx="2550410" cy="3474720"/>
-          </a:xfrm>
-          <a:prstGeom prst="rect">
-            <a:avLst/>
-          </a:prstGeom>
-        </p:spPr>
-      </p:pic>
-      <p:sp>
-        <p:nvSpPr>
-          <p:cNvPr id="6" name="Shape 3"/>
-          <p:cNvSpPr/>
-          <p:nvPr/>
-        </p:nvSpPr>
-        <p:spPr>
-          <a:xfrm>
-            <a:off x="3931920" y="1234440"/>
-            <a:ext cx="640080" cy="329184"/>
-          </a:xfrm>
-          <a:prstGeom prst="flowChartTerminator">
-            <a:avLst/>
           </a:prstGeom>
           <a:solidFill>
             <a:srgbClr val="E8F0EE"/>
           </a:solidFill>
           <a:ln w="12700">
             <a:solidFill>
-              <a:srgbClr val="0B4F4A"/>
+              <a:srgbClr val="E8F0EE"/>
             </a:solidFill>
             <a:prstDash val="solid"/>
           </a:ln>
@@ -8371,14 +8529,14 @@
       </p:sp>
       <p:sp>
         <p:nvSpPr>
-          <p:cNvPr id="7" name="Text 4"/>
-          <p:cNvSpPr txBox="1"/>
-          <p:nvPr/>
-        </p:nvSpPr>
-        <p:spPr>
-          <a:xfrm>
-            <a:off x="4663440" y="1234440"/>
-            <a:ext cx="1874520" cy="329184"/>
+          <p:cNvPr id="5" name="Text 3"/>
+          <p:cNvSpPr txBox="1"/>
+          <p:nvPr/>
+        </p:nvSpPr>
+        <p:spPr>
+          <a:xfrm>
+            <a:off x="594360" y="1389888"/>
+            <a:ext cx="2331720" cy="502920"/>
           </a:xfrm>
           <a:prstGeom prst="rect">
             <a:avLst/>
@@ -8394,7 +8552,46 @@
               <a:buNone/>
             </a:pPr>
             <a:r>
-              <a:rPr lang="en-US" sz="1100" dirty="0">
+              <a:rPr lang="en-US" sz="1400" b="1" dirty="0">
+                <a:solidFill>
+                  <a:srgbClr val="0B4F4A"/>
+                </a:solidFill>
+                <a:latin typeface="Cambria" pitchFamily="34" charset="0"/>
+                <a:ea typeface="Cambria" pitchFamily="34" charset="-122"/>
+                <a:cs typeface="Cambria" pitchFamily="34" charset="-120"/>
+              </a:rPr>
+              <a:t>Sole traders &amp; private clients</a:t>
+            </a:r>
+            <a:endParaRPr lang="en-US" sz="1400" dirty="0"/>
+          </a:p>
+        </p:txBody>
+      </p:sp>
+      <p:sp>
+        <p:nvSpPr>
+          <p:cNvPr id="6" name="Text 4"/>
+          <p:cNvSpPr txBox="1"/>
+          <p:nvPr/>
+        </p:nvSpPr>
+        <p:spPr>
+          <a:xfrm>
+            <a:off x="594360" y="1920240"/>
+            <a:ext cx="2331720" cy="868680"/>
+          </a:xfrm>
+          <a:prstGeom prst="rect">
+            <a:avLst/>
+          </a:prstGeom>
+          <a:noFill/>
+          <a:ln/>
+        </p:spPr>
+        <p:txBody>
+          <a:bodyPr wrap="square" lIns="0" tIns="0" rIns="0" bIns="0" rtlCol="0" anchor="t"/>
+          <a:lstStyle/>
+          <a:p>
+            <a:pPr indent="0" marL="0">
+              <a:buNone/>
+            </a:pPr>
+            <a:r>
+              <a:rPr lang="en-US" sz="1200" dirty="0">
                 <a:solidFill>
                   <a:srgbClr val="1D2B2A"/>
                 </a:solidFill>
@@ -8402,32 +8599,34 @@
                 <a:ea typeface="Calibri" pitchFamily="34" charset="-122"/>
                 <a:cs typeface="Calibri" pitchFamily="34" charset="-120"/>
               </a:rPr>
-              <a:t>Start / end; red = refused</a:t>
-            </a:r>
-            <a:endParaRPr lang="en-US" sz="1100" dirty="0"/>
-          </a:p>
-        </p:txBody>
-      </p:sp>
-      <p:sp>
-        <p:nvSpPr>
-          <p:cNvPr id="8" name="Shape 5"/>
+              <a:t>Person with a trading name; PRIVATE needs verified source of wealth (EDD)</a:t>
+            </a:r>
+            <a:endParaRPr lang="en-US" sz="1200" dirty="0"/>
+          </a:p>
+        </p:txBody>
+      </p:sp>
+      <p:sp>
+        <p:nvSpPr>
+          <p:cNvPr id="7" name="Shape 5"/>
           <p:cNvSpPr/>
           <p:nvPr/>
         </p:nvSpPr>
         <p:spPr>
           <a:xfrm>
-            <a:off x="3931920" y="1664208"/>
-            <a:ext cx="640080" cy="329184"/>
-          </a:xfrm>
-          <a:prstGeom prst="flowChartProcess">
-            <a:avLst/>
+            <a:off x="3246120" y="1280160"/>
+            <a:ext cx="2606040" cy="1600200"/>
+          </a:xfrm>
+          <a:prstGeom prst="roundRect">
+            <a:avLst>
+              <a:gd name="adj" fmla="val 4571"/>
+            </a:avLst>
           </a:prstGeom>
           <a:solidFill>
             <a:srgbClr val="E8F0EE"/>
           </a:solidFill>
           <a:ln w="12700">
             <a:solidFill>
-              <a:srgbClr val="0B4F4A"/>
+              <a:srgbClr val="E8F0EE"/>
             </a:solidFill>
             <a:prstDash val="solid"/>
           </a:ln>
@@ -8435,14 +8634,14 @@
       </p:sp>
       <p:sp>
         <p:nvSpPr>
-          <p:cNvPr id="9" name="Text 6"/>
-          <p:cNvSpPr txBox="1"/>
-          <p:nvPr/>
-        </p:nvSpPr>
-        <p:spPr>
-          <a:xfrm>
-            <a:off x="4663440" y="1664208"/>
-            <a:ext cx="1874520" cy="329184"/>
+          <p:cNvPr id="8" name="Text 6"/>
+          <p:cNvSpPr txBox="1"/>
+          <p:nvPr/>
+        </p:nvSpPr>
+        <p:spPr>
+          <a:xfrm>
+            <a:off x="3383280" y="1389888"/>
+            <a:ext cx="2331720" cy="502920"/>
           </a:xfrm>
           <a:prstGeom prst="rect">
             <a:avLst/>
@@ -8458,7 +8657,46 @@
               <a:buNone/>
             </a:pPr>
             <a:r>
-              <a:rPr lang="en-US" sz="1100" dirty="0">
+              <a:rPr lang="en-US" sz="1400" b="1" dirty="0">
+                <a:solidFill>
+                  <a:srgbClr val="0B4F4A"/>
+                </a:solidFill>
+                <a:latin typeface="Cambria" pitchFamily="34" charset="0"/>
+                <a:ea typeface="Cambria" pitchFamily="34" charset="-122"/>
+                <a:cs typeface="Cambria" pitchFamily="34" charset="-120"/>
+              </a:rPr>
+              <a:t>Fixed-term deposits</a:t>
+            </a:r>
+            <a:endParaRPr lang="en-US" sz="1400" dirty="0"/>
+          </a:p>
+        </p:txBody>
+      </p:sp>
+      <p:sp>
+        <p:nvSpPr>
+          <p:cNvPr id="9" name="Text 7"/>
+          <p:cNvSpPr txBox="1"/>
+          <p:nvPr/>
+        </p:nvSpPr>
+        <p:spPr>
+          <a:xfrm>
+            <a:off x="3383280" y="1920240"/>
+            <a:ext cx="2331720" cy="868680"/>
+          </a:xfrm>
+          <a:prstGeom prst="rect">
+            <a:avLst/>
+          </a:prstGeom>
+          <a:noFill/>
+          <a:ln/>
+        </p:spPr>
+        <p:txBody>
+          <a:bodyPr wrap="square" lIns="0" tIns="0" rIns="0" bIns="0" rtlCol="0" anchor="t"/>
+          <a:lstStyle/>
+          <a:p>
+            <a:pPr indent="0" marL="0">
+              <a:buNone/>
+            </a:pPr>
+            <a:r>
+              <a:rPr lang="en-US" sz="1200" dirty="0">
                 <a:solidFill>
                   <a:srgbClr val="1D2B2A"/>
                 </a:solidFill>
@@ -8466,96 +8704,34 @@
                 <a:ea typeface="Calibri" pitchFamily="34" charset="-122"/>
                 <a:cs typeface="Calibri" pitchFamily="34" charset="-120"/>
               </a:rPr>
-              <a:t>Process: one step</a:t>
-            </a:r>
-            <a:endParaRPr lang="en-US" sz="1100" dirty="0"/>
-          </a:p>
-        </p:txBody>
-      </p:sp>
-      <p:sp>
-        <p:nvSpPr>
-          <p:cNvPr id="10" name="Shape 7"/>
+              <a:t>Third DepositAccount subclass: no early debits, maturity payout, break penalty</a:t>
+            </a:r>
+            <a:endParaRPr lang="en-US" sz="1200" dirty="0"/>
+          </a:p>
+        </p:txBody>
+      </p:sp>
+      <p:sp>
+        <p:nvSpPr>
+          <p:cNvPr id="10" name="Shape 8"/>
           <p:cNvSpPr/>
           <p:nvPr/>
         </p:nvSpPr>
         <p:spPr>
           <a:xfrm>
-            <a:off x="3931920" y="2093976"/>
-            <a:ext cx="640080" cy="329184"/>
-          </a:xfrm>
-          <a:prstGeom prst="flowChartDecision">
-            <a:avLst/>
-          </a:prstGeom>
-          <a:solidFill>
-            <a:srgbClr val="FDF1D6"/>
-          </a:solidFill>
-          <a:ln w="12700">
-            <a:solidFill>
-              <a:srgbClr val="0B4F4A"/>
-            </a:solidFill>
-            <a:prstDash val="solid"/>
-          </a:ln>
-        </p:spPr>
-      </p:sp>
-      <p:sp>
-        <p:nvSpPr>
-          <p:cNvPr id="11" name="Text 8"/>
-          <p:cNvSpPr txBox="1"/>
-          <p:nvPr/>
-        </p:nvSpPr>
-        <p:spPr>
-          <a:xfrm>
-            <a:off x="4663440" y="2093976"/>
-            <a:ext cx="1874520" cy="329184"/>
-          </a:xfrm>
-          <a:prstGeom prst="rect">
-            <a:avLst/>
-          </a:prstGeom>
-          <a:noFill/>
-          <a:ln/>
-        </p:spPr>
-        <p:txBody>
-          <a:bodyPr wrap="square" lIns="0" tIns="0" rIns="0" bIns="0" rtlCol="0" anchor="ctr"/>
-          <a:lstStyle/>
-          <a:p>
-            <a:pPr indent="0" marL="0">
-              <a:buNone/>
-            </a:pPr>
-            <a:r>
-              <a:rPr lang="en-US" sz="1100" dirty="0">
-                <a:solidFill>
-                  <a:srgbClr val="1D2B2A"/>
-                </a:solidFill>
-                <a:latin typeface="Calibri" pitchFamily="34" charset="0"/>
-                <a:ea typeface="Calibri" pitchFamily="34" charset="-122"/>
-                <a:cs typeface="Calibri" pitchFamily="34" charset="-120"/>
-              </a:rPr>
-              <a:t>Decision: Yes / No</a:t>
-            </a:r>
-            <a:endParaRPr lang="en-US" sz="1100" dirty="0"/>
-          </a:p>
-        </p:txBody>
-      </p:sp>
-      <p:sp>
-        <p:nvSpPr>
-          <p:cNvPr id="12" name="Shape 9"/>
-          <p:cNvSpPr/>
-          <p:nvPr/>
-        </p:nvSpPr>
-        <p:spPr>
-          <a:xfrm>
-            <a:off x="3931920" y="2523744"/>
-            <a:ext cx="640080" cy="329184"/>
-          </a:xfrm>
-          <a:prstGeom prst="flowChartInputOutput">
-            <a:avLst/>
+            <a:off x="6035040" y="1280160"/>
+            <a:ext cx="2606040" cy="1600200"/>
+          </a:xfrm>
+          <a:prstGeom prst="roundRect">
+            <a:avLst>
+              <a:gd name="adj" fmla="val 4571"/>
+            </a:avLst>
           </a:prstGeom>
           <a:solidFill>
             <a:srgbClr val="E8F0EE"/>
           </a:solidFill>
           <a:ln w="12700">
             <a:solidFill>
-              <a:srgbClr val="0B4F4A"/>
+              <a:srgbClr val="E8F0EE"/>
             </a:solidFill>
             <a:prstDash val="solid"/>
           </a:ln>
@@ -8563,14 +8739,14 @@
       </p:sp>
       <p:sp>
         <p:nvSpPr>
-          <p:cNvPr id="13" name="Text 10"/>
-          <p:cNvSpPr txBox="1"/>
-          <p:nvPr/>
-        </p:nvSpPr>
-        <p:spPr>
-          <a:xfrm>
-            <a:off x="4663440" y="2523744"/>
-            <a:ext cx="1874520" cy="329184"/>
+          <p:cNvPr id="11" name="Text 9"/>
+          <p:cNvSpPr txBox="1"/>
+          <p:nvPr/>
+        </p:nvSpPr>
+        <p:spPr>
+          <a:xfrm>
+            <a:off x="6172200" y="1389888"/>
+            <a:ext cx="2331720" cy="502920"/>
           </a:xfrm>
           <a:prstGeom prst="rect">
             <a:avLst/>
@@ -8586,7 +8762,46 @@
               <a:buNone/>
             </a:pPr>
             <a:r>
-              <a:rPr lang="en-US" sz="1100" dirty="0">
+              <a:rPr lang="en-US" sz="1400" b="1" dirty="0">
+                <a:solidFill>
+                  <a:srgbClr val="0B4F4A"/>
+                </a:solidFill>
+                <a:latin typeface="Cambria" pitchFamily="34" charset="0"/>
+                <a:ea typeface="Cambria" pitchFamily="34" charset="-122"/>
+                <a:cs typeface="Cambria" pitchFamily="34" charset="-120"/>
+              </a:rPr>
+              <a:t>Card controls</a:t>
+            </a:r>
+            <a:endParaRPr lang="en-US" sz="1400" dirty="0"/>
+          </a:p>
+        </p:txBody>
+      </p:sp>
+      <p:sp>
+        <p:nvSpPr>
+          <p:cNvPr id="12" name="Text 10"/>
+          <p:cNvSpPr txBox="1"/>
+          <p:nvPr/>
+        </p:nvSpPr>
+        <p:spPr>
+          <a:xfrm>
+            <a:off x="6172200" y="1920240"/>
+            <a:ext cx="2331720" cy="868680"/>
+          </a:xfrm>
+          <a:prstGeom prst="rect">
+            <a:avLst/>
+          </a:prstGeom>
+          <a:noFill/>
+          <a:ln/>
+        </p:spPr>
+        <p:txBody>
+          <a:bodyPr wrap="square" lIns="0" tIns="0" rIns="0" bIns="0" rtlCol="0" anchor="t"/>
+          <a:lstStyle/>
+          <a:p>
+            <a:pPr indent="0" marL="0">
+              <a:buNone/>
+            </a:pPr>
+            <a:r>
+              <a:rPr lang="en-US" sz="1200" dirty="0">
                 <a:solidFill>
                   <a:srgbClr val="1D2B2A"/>
                 </a:solidFill>
@@ -8594,32 +8809,34 @@
                 <a:ea typeface="Calibri" pitchFamily="34" charset="-122"/>
                 <a:cs typeface="Calibri" pitchFamily="34" charset="-120"/>
               </a:rPr>
-              <a:t>Input / output</a:t>
-            </a:r>
-            <a:endParaRPr lang="en-US" sz="1100" dirty="0"/>
-          </a:p>
-        </p:txBody>
-      </p:sp>
-      <p:sp>
-        <p:nvSpPr>
-          <p:cNvPr id="14" name="Shape 11"/>
+              <a:t>Online, international, cash, merchant category - each with a validity period</a:t>
+            </a:r>
+            <a:endParaRPr lang="en-US" sz="1200" dirty="0"/>
+          </a:p>
+        </p:txBody>
+      </p:sp>
+      <p:sp>
+        <p:nvSpPr>
+          <p:cNvPr id="13" name="Shape 11"/>
           <p:cNvSpPr/>
           <p:nvPr/>
         </p:nvSpPr>
         <p:spPr>
           <a:xfrm>
-            <a:off x="3931920" y="2953512"/>
-            <a:ext cx="640080" cy="329184"/>
-          </a:xfrm>
-          <a:prstGeom prst="flowChartPredefinedProcess">
-            <a:avLst/>
+            <a:off x="457200" y="3063240"/>
+            <a:ext cx="2606040" cy="1600200"/>
+          </a:xfrm>
+          <a:prstGeom prst="roundRect">
+            <a:avLst>
+              <a:gd name="adj" fmla="val 4571"/>
+            </a:avLst>
           </a:prstGeom>
           <a:solidFill>
             <a:srgbClr val="E8F0EE"/>
           </a:solidFill>
           <a:ln w="12700">
             <a:solidFill>
-              <a:srgbClr val="0B4F4A"/>
+              <a:srgbClr val="E8F0EE"/>
             </a:solidFill>
             <a:prstDash val="solid"/>
           </a:ln>
@@ -8627,14 +8844,14 @@
       </p:sp>
       <p:sp>
         <p:nvSpPr>
-          <p:cNvPr id="15" name="Text 12"/>
-          <p:cNvSpPr txBox="1"/>
-          <p:nvPr/>
-        </p:nvSpPr>
-        <p:spPr>
-          <a:xfrm>
-            <a:off x="4663440" y="2953512"/>
-            <a:ext cx="1874520" cy="329184"/>
+          <p:cNvPr id="14" name="Text 12"/>
+          <p:cNvSpPr txBox="1"/>
+          <p:nvPr/>
+        </p:nvSpPr>
+        <p:spPr>
+          <a:xfrm>
+            <a:off x="594360" y="3172968"/>
+            <a:ext cx="2331720" cy="502920"/>
           </a:xfrm>
           <a:prstGeom prst="rect">
             <a:avLst/>
@@ -8650,7 +8867,46 @@
               <a:buNone/>
             </a:pPr>
             <a:r>
-              <a:rPr lang="en-US" sz="1100" dirty="0">
+              <a:rPr lang="en-US" sz="1400" b="1" dirty="0">
+                <a:solidFill>
+                  <a:srgbClr val="0B4F4A"/>
+                </a:solidFill>
+                <a:latin typeface="Cambria" pitchFamily="34" charset="0"/>
+                <a:ea typeface="Cambria" pitchFamily="34" charset="-122"/>
+                <a:cs typeface="Cambria" pitchFamily="34" charset="-120"/>
+              </a:rPr>
+              <a:t>Billers</a:t>
+            </a:r>
+            <a:endParaRPr lang="en-US" sz="1400" dirty="0"/>
+          </a:p>
+        </p:txBody>
+      </p:sp>
+      <p:sp>
+        <p:nvSpPr>
+          <p:cNvPr id="15" name="Text 13"/>
+          <p:cNvSpPr txBox="1"/>
+          <p:nvPr/>
+        </p:nvSpPr>
+        <p:spPr>
+          <a:xfrm>
+            <a:off x="594360" y="3703320"/>
+            <a:ext cx="2331720" cy="868680"/>
+          </a:xfrm>
+          <a:prstGeom prst="rect">
+            <a:avLst/>
+          </a:prstGeom>
+          <a:noFill/>
+          <a:ln/>
+        </p:spPr>
+        <p:txBody>
+          <a:bodyPr wrap="square" lIns="0" tIns="0" rIns="0" bIns="0" rtlCol="0" anchor="t"/>
+          <a:lstStyle/>
+          <a:p>
+            <a:pPr indent="0" marL="0">
+              <a:buNone/>
+            </a:pPr>
+            <a:r>
+              <a:rPr lang="en-US" sz="1200" dirty="0">
                 <a:solidFill>
                   <a:srgbClr val="1D2B2A"/>
                 </a:solidFill>
@@ -8658,32 +8914,34 @@
                 <a:ea typeface="Calibri" pitchFamily="34" charset="-122"/>
                 <a:cs typeface="Calibri" pitchFamily="34" charset="-120"/>
               </a:rPr>
-              <a:t>A named Bank operation</a:t>
-            </a:r>
-            <a:endParaRPr lang="en-US" sz="1100" dirty="0"/>
-          </a:p>
-        </p:txBody>
-      </p:sp>
-      <p:sp>
-        <p:nvSpPr>
-          <p:cNvPr id="16" name="Shape 13"/>
+              <a:t>BillPayment is a CustomerPayment: same mandates, restrictions, dual control</a:t>
+            </a:r>
+            <a:endParaRPr lang="en-US" sz="1200" dirty="0"/>
+          </a:p>
+        </p:txBody>
+      </p:sp>
+      <p:sp>
+        <p:nvSpPr>
+          <p:cNvPr id="16" name="Shape 14"/>
           <p:cNvSpPr/>
           <p:nvPr/>
         </p:nvSpPr>
         <p:spPr>
           <a:xfrm>
-            <a:off x="3931920" y="3383280"/>
-            <a:ext cx="640080" cy="329184"/>
-          </a:xfrm>
-          <a:prstGeom prst="flowChartMagneticDisk">
-            <a:avLst/>
+            <a:off x="3246120" y="3063240"/>
+            <a:ext cx="2606040" cy="1600200"/>
+          </a:xfrm>
+          <a:prstGeom prst="roundRect">
+            <a:avLst>
+              <a:gd name="adj" fmla="val 4571"/>
+            </a:avLst>
           </a:prstGeom>
           <a:solidFill>
             <a:srgbClr val="E8F0EE"/>
           </a:solidFill>
           <a:ln w="12700">
             <a:solidFill>
-              <a:srgbClr val="0B4F4A"/>
+              <a:srgbClr val="E8F0EE"/>
             </a:solidFill>
             <a:prstDash val="solid"/>
           </a:ln>
@@ -8691,14 +8949,14 @@
       </p:sp>
       <p:sp>
         <p:nvSpPr>
-          <p:cNvPr id="17" name="Text 14"/>
-          <p:cNvSpPr txBox="1"/>
-          <p:nvPr/>
-        </p:nvSpPr>
-        <p:spPr>
-          <a:xfrm>
-            <a:off x="4663440" y="3383280"/>
-            <a:ext cx="1874520" cy="329184"/>
+          <p:cNvPr id="17" name="Text 15"/>
+          <p:cNvSpPr txBox="1"/>
+          <p:nvPr/>
+        </p:nvSpPr>
+        <p:spPr>
+          <a:xfrm>
+            <a:off x="3383280" y="3172968"/>
+            <a:ext cx="2331720" cy="502920"/>
           </a:xfrm>
           <a:prstGeom prst="rect">
             <a:avLst/>
@@ -8714,7 +8972,46 @@
               <a:buNone/>
             </a:pPr>
             <a:r>
-              <a:rPr lang="en-US" sz="1100" dirty="0">
+              <a:rPr lang="en-US" sz="1400" b="1" dirty="0">
+                <a:solidFill>
+                  <a:srgbClr val="0B4F4A"/>
+                </a:solidFill>
+                <a:latin typeface="Cambria" pitchFamily="34" charset="0"/>
+                <a:ea typeface="Cambria" pitchFamily="34" charset="-122"/>
+                <a:cs typeface="Cambria" pitchFamily="34" charset="-120"/>
+              </a:rPr>
+              <a:t>Collections staff</a:t>
+            </a:r>
+            <a:endParaRPr lang="en-US" sz="1400" dirty="0"/>
+          </a:p>
+        </p:txBody>
+      </p:sp>
+      <p:sp>
+        <p:nvSpPr>
+          <p:cNvPr id="18" name="Text 16"/>
+          <p:cNvSpPr txBox="1"/>
+          <p:nvPr/>
+        </p:nvSpPr>
+        <p:spPr>
+          <a:xfrm>
+            <a:off x="3383280" y="3703320"/>
+            <a:ext cx="2331720" cy="868680"/>
+          </a:xfrm>
+          <a:prstGeom prst="rect">
+            <a:avLst/>
+          </a:prstGeom>
+          <a:noFill/>
+          <a:ln/>
+        </p:spPr>
+        <p:txBody>
+          <a:bodyPr wrap="square" lIns="0" tIns="0" rIns="0" bIns="0" rtlCol="0" anchor="t"/>
+          <a:lstStyle/>
+          <a:p>
+            <a:pPr indent="0" marL="0">
+              <a:buNone/>
+            </a:pPr>
+            <a:r>
+              <a:rPr lang="en-US" sz="1200" dirty="0">
                 <a:solidFill>
                   <a:srgbClr val="1D2B2A"/>
                 </a:solidFill>
@@ -8722,22 +9019,88 @@
                 <a:ea typeface="Calibri" pitchFamily="34" charset="-122"/>
                 <a:cs typeface="Calibri" pitchFamily="34" charset="-120"/>
               </a:rPr>
-              <a:t>Ledger / audit log</a:t>
-            </a:r>
-            <a:endParaRPr lang="en-US" sz="1100" dirty="0"/>
-          </a:p>
-        </p:txBody>
-      </p:sp>
-      <p:sp>
-        <p:nvSpPr>
-          <p:cNvPr id="18" name="Text 15"/>
-          <p:cNvSpPr txBox="1"/>
-          <p:nvPr/>
-        </p:nvSpPr>
-        <p:spPr>
-          <a:xfrm>
-            <a:off x="6720840" y="1234440"/>
-            <a:ext cx="1965960" cy="2560320"/>
+              <a:t>Collections officer works the case; promise to pay marked kept or broken</a:t>
+            </a:r>
+            <a:endParaRPr lang="en-US" sz="1200" dirty="0"/>
+          </a:p>
+        </p:txBody>
+      </p:sp>
+      <p:sp>
+        <p:nvSpPr>
+          <p:cNvPr id="19" name="Shape 17"/>
+          <p:cNvSpPr/>
+          <p:nvPr/>
+        </p:nvSpPr>
+        <p:spPr>
+          <a:xfrm>
+            <a:off x="6035040" y="3063240"/>
+            <a:ext cx="2606040" cy="1600200"/>
+          </a:xfrm>
+          <a:prstGeom prst="roundRect">
+            <a:avLst>
+              <a:gd name="adj" fmla="val 4571"/>
+            </a:avLst>
+          </a:prstGeom>
+          <a:solidFill>
+            <a:srgbClr val="E8F0EE"/>
+          </a:solidFill>
+          <a:ln w="12700">
+            <a:solidFill>
+              <a:srgbClr val="E8F0EE"/>
+            </a:solidFill>
+            <a:prstDash val="solid"/>
+          </a:ln>
+        </p:spPr>
+      </p:sp>
+      <p:sp>
+        <p:nvSpPr>
+          <p:cNvPr id="20" name="Text 18"/>
+          <p:cNvSpPr txBox="1"/>
+          <p:nvPr/>
+        </p:nvSpPr>
+        <p:spPr>
+          <a:xfrm>
+            <a:off x="6172200" y="3172968"/>
+            <a:ext cx="2331720" cy="502920"/>
+          </a:xfrm>
+          <a:prstGeom prst="rect">
+            <a:avLst/>
+          </a:prstGeom>
+          <a:noFill/>
+          <a:ln/>
+        </p:spPr>
+        <p:txBody>
+          <a:bodyPr wrap="square" lIns="0" tIns="0" rIns="0" bIns="0" rtlCol="0" anchor="ctr"/>
+          <a:lstStyle/>
+          <a:p>
+            <a:pPr indent="0" marL="0">
+              <a:buNone/>
+            </a:pPr>
+            <a:r>
+              <a:rPr lang="en-US" sz="1400" b="1" dirty="0">
+                <a:solidFill>
+                  <a:srgbClr val="0B4F4A"/>
+                </a:solidFill>
+                <a:latin typeface="Cambria" pitchFamily="34" charset="0"/>
+                <a:ea typeface="Cambria" pitchFamily="34" charset="-122"/>
+                <a:cs typeface="Cambria" pitchFamily="34" charset="-120"/>
+              </a:rPr>
+              <a:t>Auditors &amp; retention</a:t>
+            </a:r>
+            <a:endParaRPr lang="en-US" sz="1400" dirty="0"/>
+          </a:p>
+        </p:txBody>
+      </p:sp>
+      <p:sp>
+        <p:nvSpPr>
+          <p:cNvPr id="21" name="Text 19"/>
+          <p:cNvSpPr txBox="1"/>
+          <p:nvPr/>
+        </p:nvSpPr>
+        <p:spPr>
+          <a:xfrm>
+            <a:off x="6172200" y="3703320"/>
+            <a:ext cx="2331720" cy="868680"/>
           </a:xfrm>
           <a:prstGeom prst="rect">
             <a:avLst/>
@@ -8750,9 +9113,6 @@
           <a:lstStyle/>
           <a:p>
             <a:pPr indent="0" marL="0">
-              <a:spcAft>
-                <a:spcPts val="600"/>
-              </a:spcAft>
               <a:buNone/>
             </a:pPr>
             <a:r>
@@ -8764,148 +9124,9 @@
                 <a:ea typeface="Calibri" pitchFamily="34" charset="-122"/>
                 <a:cs typeface="Calibri" pitchFamily="34" charset="-120"/>
               </a:rPr>
-              <a:t>1. Program overview</a:t>
+              <a:t>Approvals audit with role at the time; archive, never delete (10-year retention)</a:t>
             </a:r>
             <a:endParaRPr lang="en-US" sz="1200" dirty="0"/>
-          </a:p>
-          <a:p>
-            <a:pPr indent="0" marL="0">
-              <a:spcAft>
-                <a:spcPts val="600"/>
-              </a:spcAft>
-              <a:buNone/>
-            </a:pPr>
-            <a:r>
-              <a:rPr lang="en-US" sz="1200" dirty="0">
-                <a:solidFill>
-                  <a:srgbClr val="1D2B2A"/>
-                </a:solidFill>
-                <a:latin typeface="Calibri" pitchFamily="34" charset="0"/>
-                <a:ea typeface="Calibri" pitchFamily="34" charset="-122"/>
-                <a:cs typeface="Calibri" pitchFamily="34" charset="-120"/>
-              </a:rPr>
-              <a:t>2. Onboarding</a:t>
-            </a:r>
-            <a:endParaRPr lang="en-US" sz="1200" dirty="0"/>
-          </a:p>
-          <a:p>
-            <a:pPr indent="0" marL="0">
-              <a:spcAft>
-                <a:spcPts val="600"/>
-              </a:spcAft>
-              <a:buNone/>
-            </a:pPr>
-            <a:r>
-              <a:rPr lang="en-US" sz="1200" dirty="0">
-                <a:solidFill>
-                  <a:srgbClr val="1D2B2A"/>
-                </a:solidFill>
-                <a:latin typeface="Calibri" pitchFamily="34" charset="0"/>
-                <a:ea typeface="Calibri" pitchFamily="34" charset="-122"/>
-                <a:cs typeface="Calibri" pitchFamily="34" charset="-120"/>
-              </a:rPr>
-              <a:t>3. Transfer payment</a:t>
-            </a:r>
-            <a:endParaRPr lang="en-US" sz="1200" dirty="0"/>
-          </a:p>
-          <a:p>
-            <a:pPr indent="0" marL="0">
-              <a:spcAft>
-                <a:spcPts val="600"/>
-              </a:spcAft>
-              <a:buNone/>
-            </a:pPr>
-            <a:r>
-              <a:rPr lang="en-US" sz="1200" dirty="0">
-                <a:solidFill>
-                  <a:srgbClr val="1D2B2A"/>
-                </a:solidFill>
-                <a:latin typeface="Calibri" pitchFamily="34" charset="0"/>
-                <a:ea typeface="Calibri" pitchFamily="34" charset="-122"/>
-                <a:cs typeface="Calibri" pitchFamily="34" charset="-120"/>
-              </a:rPr>
-              <a:t>4. Card purchase</a:t>
-            </a:r>
-            <a:endParaRPr lang="en-US" sz="1200" dirty="0"/>
-          </a:p>
-          <a:p>
-            <a:pPr indent="0" marL="0">
-              <a:spcAft>
-                <a:spcPts val="600"/>
-              </a:spcAft>
-              <a:buNone/>
-            </a:pPr>
-            <a:r>
-              <a:rPr lang="en-US" sz="1200" dirty="0">
-                <a:solidFill>
-                  <a:srgbClr val="1D2B2A"/>
-                </a:solidFill>
-                <a:latin typeface="Calibri" pitchFamily="34" charset="0"/>
-                <a:ea typeface="Calibri" pitchFamily="34" charset="-122"/>
-                <a:cs typeface="Calibri" pitchFamily="34" charset="-120"/>
-              </a:rPr>
-              <a:t>5. Financing lifecycle</a:t>
-            </a:r>
-            <a:endParaRPr lang="en-US" sz="1200" dirty="0"/>
-          </a:p>
-          <a:p>
-            <a:pPr indent="0" marL="0">
-              <a:spcAft>
-                <a:spcPts val="600"/>
-              </a:spcAft>
-              <a:buNone/>
-            </a:pPr>
-            <a:r>
-              <a:rPr lang="en-US" sz="1200" dirty="0">
-                <a:solidFill>
-                  <a:srgbClr val="1D2B2A"/>
-                </a:solidFill>
-                <a:latin typeface="Calibri" pitchFamily="34" charset="0"/>
-                <a:ea typeface="Calibri" pitchFamily="34" charset="-122"/>
-                <a:cs typeface="Calibri" pitchFamily="34" charset="-120"/>
-              </a:rPr>
-              <a:t>6. Desktop console</a:t>
-            </a:r>
-            <a:endParaRPr lang="en-US" sz="1200" dirty="0"/>
-          </a:p>
-        </p:txBody>
-      </p:sp>
-      <p:sp>
-        <p:nvSpPr>
-          <p:cNvPr id="19" name="Text 16"/>
-          <p:cNvSpPr txBox="1"/>
-          <p:nvPr/>
-        </p:nvSpPr>
-        <p:spPr>
-          <a:xfrm>
-            <a:off x="3931920" y="4069080"/>
-            <a:ext cx="4754880" cy="457200"/>
-          </a:xfrm>
-          <a:prstGeom prst="rect">
-            <a:avLst/>
-          </a:prstGeom>
-          <a:noFill/>
-          <a:ln/>
-        </p:spPr>
-        <p:txBody>
-          <a:bodyPr wrap="square" lIns="0" tIns="0" rIns="0" bIns="0" rtlCol="0" anchor="ctr"/>
-          <a:lstStyle/>
-          <a:p>
-            <a:pPr indent="0" marL="0">
-              <a:buNone/>
-            </a:pPr>
-            <a:r>
-              <a:rPr lang="en-US" sz="1100" i="1" dirty="0">
-                <a:solidFill>
-                  <a:srgbClr val="5B6B69"/>
-                </a:solidFill>
-                <a:latin typeface="Calibri" pitchFamily="34" charset="0"/>
-                <a:ea typeface="Calibri" pitchFamily="34" charset="-122"/>
-                <a:cs typeface="Calibri" pitchFamily="34" charset="-120"/>
-              </a:rPr>
-              <a:t>Report section 4.1 (flowcharts) and 4.2 (state machines)</a:t>
-            </a:r>
-            <a:endParaRPr lang="en-US" sz="1100" dirty="0"/>
           </a:p>
         </p:txBody>
       </p:sp>
@@ -8976,7 +9197,7 @@
                 <a:ea typeface="Cambria" pitchFamily="34" charset="-122"/>
                 <a:cs typeface="Cambria" pitchFamily="34" charset="-120"/>
               </a:rPr>
-              <a:t>Beyond the brief: saving and an assistant</a:t>
+              <a:t>Behaviour: six flowcharts traced from the code</a:t>
             </a:r>
             <a:endParaRPr lang="en-US" sz="2200" dirty="0"/>
           </a:p>
@@ -9015,7 +9236,7 @@
                 <a:ea typeface="Calibri" pitchFamily="34" charset="-122"/>
                 <a:cs typeface="Calibri" pitchFamily="34" charset="-120"/>
               </a:rPr>
-              <a:t>Both are small class hierarchies, built like the model</a:t>
+              <a:t>Standard symbols (ISO 5807); the diamonds are in the order the code checks the rules</a:t>
             </a:r>
             <a:endParaRPr lang="en-US" sz="1200" dirty="0"/>
           </a:p>
@@ -9029,20 +9250,69 @@
         </p:nvSpPr>
         <p:spPr>
           <a:xfrm>
-            <a:off x="457200" y="1234440"/>
-            <a:ext cx="4023360" cy="3474720"/>
+            <a:off x="457200" y="1188720"/>
+            <a:ext cx="3200400" cy="3611880"/>
           </a:xfrm>
           <a:prstGeom prst="roundRect">
             <a:avLst>
-              <a:gd name="adj" fmla="val 2105"/>
+              <a:gd name="adj" fmla="val 2286"/>
             </a:avLst>
+          </a:prstGeom>
+          <a:solidFill>
+            <a:srgbClr val="F4F8F7"/>
+          </a:solidFill>
+          <a:ln w="12700">
+            <a:solidFill>
+              <a:srgbClr val="F4F8F7"/>
+            </a:solidFill>
+            <a:prstDash val="solid"/>
+          </a:ln>
+        </p:spPr>
+      </p:sp>
+      <p:pic>
+        <p:nvPicPr>
+          <p:cNvPr id="5" name="Image 0" descr="/home/user/commercial-banking/docs/flowchart_3_transfer.png">    </p:cNvPr>
+          <p:cNvPicPr>
+            <a:picLocks noChangeAspect="1"/>
+          </p:cNvPicPr>
+          <p:nvPr/>
+        </p:nvPicPr>
+        <p:blipFill>
+          <a:blip r:embed="rId1"/>
+          <a:stretch>
+            <a:fillRect/>
+          </a:stretch>
+        </p:blipFill>
+        <p:spPr>
+          <a:xfrm>
+            <a:off x="782195" y="1261872"/>
+            <a:ext cx="2550410" cy="3474720"/>
+          </a:xfrm>
+          <a:prstGeom prst="rect">
+            <a:avLst/>
+          </a:prstGeom>
+        </p:spPr>
+      </p:pic>
+      <p:sp>
+        <p:nvSpPr>
+          <p:cNvPr id="6" name="Shape 3"/>
+          <p:cNvSpPr/>
+          <p:nvPr/>
+        </p:nvSpPr>
+        <p:spPr>
+          <a:xfrm>
+            <a:off x="3931920" y="1234440"/>
+            <a:ext cx="640080" cy="329184"/>
+          </a:xfrm>
+          <a:prstGeom prst="flowChartTerminator">
+            <a:avLst/>
           </a:prstGeom>
           <a:solidFill>
             <a:srgbClr val="E8F0EE"/>
           </a:solidFill>
           <a:ln w="12700">
             <a:solidFill>
-              <a:srgbClr val="E8F0EE"/>
+              <a:srgbClr val="0B4F4A"/>
             </a:solidFill>
             <a:prstDash val="solid"/>
           </a:ln>
@@ -9050,14 +9320,14 @@
       </p:sp>
       <p:sp>
         <p:nvSpPr>
-          <p:cNvPr id="5" name="Text 3"/>
-          <p:cNvSpPr txBox="1"/>
-          <p:nvPr/>
-        </p:nvSpPr>
-        <p:spPr>
-          <a:xfrm>
-            <a:off x="640080" y="1371600"/>
-            <a:ext cx="3657600" cy="457200"/>
+          <p:cNvPr id="7" name="Text 4"/>
+          <p:cNvSpPr txBox="1"/>
+          <p:nvPr/>
+        </p:nvSpPr>
+        <p:spPr>
+          <a:xfrm>
+            <a:off x="4663440" y="1234440"/>
+            <a:ext cx="1874520" cy="329184"/>
           </a:xfrm>
           <a:prstGeom prst="rect">
             <a:avLst/>
@@ -9073,50 +9343,7 @@
               <a:buNone/>
             </a:pPr>
             <a:r>
-              <a:rPr lang="en-US" sz="1600" b="1" dirty="0">
-                <a:solidFill>
-                  <a:srgbClr val="0B4F4A"/>
-                </a:solidFill>
-                <a:latin typeface="Cambria" pitchFamily="34" charset="0"/>
-                <a:ea typeface="Cambria" pitchFamily="34" charset="-122"/>
-                <a:cs typeface="Cambria" pitchFamily="34" charset="-120"/>
-              </a:rPr>
-              <a:t>Save and load the whole bank (JSON)</a:t>
-            </a:r>
-            <a:endParaRPr lang="en-US" sz="1600" dirty="0"/>
-          </a:p>
-        </p:txBody>
-      </p:sp>
-      <p:sp>
-        <p:nvSpPr>
-          <p:cNvPr id="6" name="Text 4"/>
-          <p:cNvSpPr txBox="1"/>
-          <p:nvPr/>
-        </p:nvSpPr>
-        <p:spPr>
-          <a:xfrm>
-            <a:off x="594360" y="1920240"/>
-            <a:ext cx="3749040" cy="2651760"/>
-          </a:xfrm>
-          <a:prstGeom prst="rect">
-            <a:avLst/>
-          </a:prstGeom>
-          <a:noFill/>
-          <a:ln/>
-        </p:spPr>
-        <p:txBody>
-          <a:bodyPr wrap="square" lIns="635" tIns="635" rIns="635" bIns="635" rtlCol="0" anchor="t"/>
-          <a:lstStyle/>
-          <a:p>
-            <a:pPr marL="342900" indent="-342900">
-              <a:spcAft>
-                <a:spcPts val="600"/>
-              </a:spcAft>
-              <a:buSzPct val="100000"/>
-              <a:buChar char="•"/>
-            </a:pPr>
-            <a:r>
-              <a:rPr lang="en-US" sz="1300" dirty="0">
+              <a:rPr lang="en-US" sz="1100" dirty="0">
                 <a:solidFill>
                   <a:srgbClr val="1D2B2A"/>
                 </a:solidFill>
@@ -9124,97 +9351,32 @@
                 <a:ea typeface="Calibri" pitchFamily="34" charset="-122"/>
                 <a:cs typeface="Calibri" pitchFamily="34" charset="-120"/>
               </a:rPr>
-              <a:t>Repository (abstract): the JSON format, save() / load()</a:t>
-            </a:r>
-            <a:endParaRPr lang="en-US" sz="1300" dirty="0"/>
-          </a:p>
-          <a:p>
-            <a:pPr marL="342900" indent="-342900">
-              <a:spcAft>
-                <a:spcPts val="600"/>
-              </a:spcAft>
-              <a:buSzPct val="100000"/>
-              <a:buChar char="•"/>
-            </a:pPr>
-            <a:r>
-              <a:rPr lang="en-US" sz="1300" dirty="0">
-                <a:solidFill>
-                  <a:srgbClr val="1D2B2A"/>
-                </a:solidFill>
-                <a:latin typeface="Calibri" pitchFamily="34" charset="0"/>
-                <a:ea typeface="Calibri" pitchFamily="34" charset="-122"/>
-                <a:cs typeface="Calibri" pitchFamily="34" charset="-120"/>
-              </a:rPr>
-              <a:t>JsonFileRepository and MemoryRepository only decide where</a:t>
-            </a:r>
-            <a:endParaRPr lang="en-US" sz="1300" dirty="0"/>
-          </a:p>
-          <a:p>
-            <a:pPr marL="342900" indent="-342900">
-              <a:spcAft>
-                <a:spcPts val="600"/>
-              </a:spcAft>
-              <a:buSzPct val="100000"/>
-              <a:buChar char="•"/>
-            </a:pPr>
-            <a:r>
-              <a:rPr lang="en-US" sz="1300" dirty="0">
-                <a:solidFill>
-                  <a:srgbClr val="1D2B2A"/>
-                </a:solidFill>
-                <a:latin typeface="Calibri" pitchFamily="34" charset="0"/>
-                <a:ea typeface="Calibri" pitchFamily="34" charset="-122"/>
-                <a:cs typeface="Calibri" pitchFamily="34" charset="-120"/>
-              </a:rPr>
-              <a:t>Links saved as references; an exact round trip of 1,375 objects</a:t>
-            </a:r>
-            <a:endParaRPr lang="en-US" sz="1300" dirty="0"/>
-          </a:p>
-          <a:p>
-            <a:pPr marL="342900" indent="-342900">
-              <a:spcAft>
-                <a:spcPts val="600"/>
-              </a:spcAft>
-              <a:buSzPct val="100000"/>
-              <a:buChar char="•"/>
-            </a:pPr>
-            <a:r>
-              <a:rPr lang="en-US" sz="1300" dirty="0">
-                <a:solidFill>
-                  <a:srgbClr val="1D2B2A"/>
-                </a:solidFill>
-                <a:latin typeface="Calibri" pitchFamily="34" charset="0"/>
-                <a:ea typeface="Calibri" pitchFamily="34" charset="-122"/>
-                <a:cs typeface="Calibri" pitchFamily="34" charset="-120"/>
-              </a:rPr>
-              <a:t>JSON written and read by the model's own Json and JsonReader</a:t>
-            </a:r>
-            <a:endParaRPr lang="en-US" sz="1300" dirty="0"/>
-          </a:p>
-        </p:txBody>
-      </p:sp>
-      <p:sp>
-        <p:nvSpPr>
-          <p:cNvPr id="7" name="Shape 5"/>
+              <a:t>Start / end; red = refused</a:t>
+            </a:r>
+            <a:endParaRPr lang="en-US" sz="1100" dirty="0"/>
+          </a:p>
+        </p:txBody>
+      </p:sp>
+      <p:sp>
+        <p:nvSpPr>
+          <p:cNvPr id="8" name="Shape 5"/>
           <p:cNvSpPr/>
           <p:nvPr/>
         </p:nvSpPr>
         <p:spPr>
           <a:xfrm>
-            <a:off x="4663440" y="1234440"/>
-            <a:ext cx="4023360" cy="3474720"/>
-          </a:xfrm>
-          <a:prstGeom prst="roundRect">
-            <a:avLst>
-              <a:gd name="adj" fmla="val 2105"/>
-            </a:avLst>
+            <a:off x="3931920" y="1664208"/>
+            <a:ext cx="640080" cy="329184"/>
+          </a:xfrm>
+          <a:prstGeom prst="flowChartProcess">
+            <a:avLst/>
           </a:prstGeom>
           <a:solidFill>
             <a:srgbClr val="E8F0EE"/>
           </a:solidFill>
           <a:ln w="12700">
             <a:solidFill>
-              <a:srgbClr val="E8F0EE"/>
+              <a:srgbClr val="0B4F4A"/>
             </a:solidFill>
             <a:prstDash val="solid"/>
           </a:ln>
@@ -9222,14 +9384,14 @@
       </p:sp>
       <p:sp>
         <p:nvSpPr>
-          <p:cNvPr id="8" name="Text 6"/>
-          <p:cNvSpPr txBox="1"/>
-          <p:nvPr/>
-        </p:nvSpPr>
-        <p:spPr>
-          <a:xfrm>
-            <a:off x="4846320" y="1371600"/>
-            <a:ext cx="3657600" cy="457200"/>
+          <p:cNvPr id="9" name="Text 6"/>
+          <p:cNvSpPr txBox="1"/>
+          <p:nvPr/>
+        </p:nvSpPr>
+        <p:spPr>
+          <a:xfrm>
+            <a:off x="4663440" y="1664208"/>
+            <a:ext cx="1874520" cy="329184"/>
           </a:xfrm>
           <a:prstGeom prst="rect">
             <a:avLst/>
@@ -9245,50 +9407,305 @@
               <a:buNone/>
             </a:pPr>
             <a:r>
-              <a:rPr lang="en-US" sz="1600" b="1" dirty="0">
-                <a:solidFill>
-                  <a:srgbClr val="0B4F4A"/>
-                </a:solidFill>
-                <a:latin typeface="Cambria" pitchFamily="34" charset="0"/>
-                <a:ea typeface="Cambria" pitchFamily="34" charset="-122"/>
-                <a:cs typeface="Cambria" pitchFamily="34" charset="-120"/>
-              </a:rPr>
-              <a:t>AI assistant (optional)</a:t>
-            </a:r>
-            <a:endParaRPr lang="en-US" sz="1600" dirty="0"/>
-          </a:p>
-        </p:txBody>
-      </p:sp>
-      <p:sp>
-        <p:nvSpPr>
-          <p:cNvPr id="9" name="Text 7"/>
-          <p:cNvSpPr txBox="1"/>
-          <p:nvPr/>
-        </p:nvSpPr>
-        <p:spPr>
-          <a:xfrm>
-            <a:off x="4800600" y="1920240"/>
-            <a:ext cx="3749040" cy="2651760"/>
-          </a:xfrm>
-          <a:prstGeom prst="rect">
-            <a:avLst/>
-          </a:prstGeom>
-          <a:noFill/>
-          <a:ln/>
-        </p:spPr>
-        <p:txBody>
-          <a:bodyPr wrap="square" lIns="635" tIns="635" rIns="635" bIns="635" rtlCol="0" anchor="t"/>
-          <a:lstStyle/>
-          <a:p>
-            <a:pPr marL="342900" indent="-342900">
+              <a:rPr lang="en-US" sz="1100" dirty="0">
+                <a:solidFill>
+                  <a:srgbClr val="1D2B2A"/>
+                </a:solidFill>
+                <a:latin typeface="Calibri" pitchFamily="34" charset="0"/>
+                <a:ea typeface="Calibri" pitchFamily="34" charset="-122"/>
+                <a:cs typeface="Calibri" pitchFamily="34" charset="-120"/>
+              </a:rPr>
+              <a:t>Process: one step</a:t>
+            </a:r>
+            <a:endParaRPr lang="en-US" sz="1100" dirty="0"/>
+          </a:p>
+        </p:txBody>
+      </p:sp>
+      <p:sp>
+        <p:nvSpPr>
+          <p:cNvPr id="10" name="Shape 7"/>
+          <p:cNvSpPr/>
+          <p:nvPr/>
+        </p:nvSpPr>
+        <p:spPr>
+          <a:xfrm>
+            <a:off x="3931920" y="2093976"/>
+            <a:ext cx="640080" cy="329184"/>
+          </a:xfrm>
+          <a:prstGeom prst="flowChartDecision">
+            <a:avLst/>
+          </a:prstGeom>
+          <a:solidFill>
+            <a:srgbClr val="FDF1D6"/>
+          </a:solidFill>
+          <a:ln w="12700">
+            <a:solidFill>
+              <a:srgbClr val="0B4F4A"/>
+            </a:solidFill>
+            <a:prstDash val="solid"/>
+          </a:ln>
+        </p:spPr>
+      </p:sp>
+      <p:sp>
+        <p:nvSpPr>
+          <p:cNvPr id="11" name="Text 8"/>
+          <p:cNvSpPr txBox="1"/>
+          <p:nvPr/>
+        </p:nvSpPr>
+        <p:spPr>
+          <a:xfrm>
+            <a:off x="4663440" y="2093976"/>
+            <a:ext cx="1874520" cy="329184"/>
+          </a:xfrm>
+          <a:prstGeom prst="rect">
+            <a:avLst/>
+          </a:prstGeom>
+          <a:noFill/>
+          <a:ln/>
+        </p:spPr>
+        <p:txBody>
+          <a:bodyPr wrap="square" lIns="0" tIns="0" rIns="0" bIns="0" rtlCol="0" anchor="ctr"/>
+          <a:lstStyle/>
+          <a:p>
+            <a:pPr indent="0" marL="0">
+              <a:buNone/>
+            </a:pPr>
+            <a:r>
+              <a:rPr lang="en-US" sz="1100" dirty="0">
+                <a:solidFill>
+                  <a:srgbClr val="1D2B2A"/>
+                </a:solidFill>
+                <a:latin typeface="Calibri" pitchFamily="34" charset="0"/>
+                <a:ea typeface="Calibri" pitchFamily="34" charset="-122"/>
+                <a:cs typeface="Calibri" pitchFamily="34" charset="-120"/>
+              </a:rPr>
+              <a:t>Decision: Yes / No</a:t>
+            </a:r>
+            <a:endParaRPr lang="en-US" sz="1100" dirty="0"/>
+          </a:p>
+        </p:txBody>
+      </p:sp>
+      <p:sp>
+        <p:nvSpPr>
+          <p:cNvPr id="12" name="Shape 9"/>
+          <p:cNvSpPr/>
+          <p:nvPr/>
+        </p:nvSpPr>
+        <p:spPr>
+          <a:xfrm>
+            <a:off x="3931920" y="2523744"/>
+            <a:ext cx="640080" cy="329184"/>
+          </a:xfrm>
+          <a:prstGeom prst="flowChartInputOutput">
+            <a:avLst/>
+          </a:prstGeom>
+          <a:solidFill>
+            <a:srgbClr val="E8F0EE"/>
+          </a:solidFill>
+          <a:ln w="12700">
+            <a:solidFill>
+              <a:srgbClr val="0B4F4A"/>
+            </a:solidFill>
+            <a:prstDash val="solid"/>
+          </a:ln>
+        </p:spPr>
+      </p:sp>
+      <p:sp>
+        <p:nvSpPr>
+          <p:cNvPr id="13" name="Text 10"/>
+          <p:cNvSpPr txBox="1"/>
+          <p:nvPr/>
+        </p:nvSpPr>
+        <p:spPr>
+          <a:xfrm>
+            <a:off x="4663440" y="2523744"/>
+            <a:ext cx="1874520" cy="329184"/>
+          </a:xfrm>
+          <a:prstGeom prst="rect">
+            <a:avLst/>
+          </a:prstGeom>
+          <a:noFill/>
+          <a:ln/>
+        </p:spPr>
+        <p:txBody>
+          <a:bodyPr wrap="square" lIns="0" tIns="0" rIns="0" bIns="0" rtlCol="0" anchor="ctr"/>
+          <a:lstStyle/>
+          <a:p>
+            <a:pPr indent="0" marL="0">
+              <a:buNone/>
+            </a:pPr>
+            <a:r>
+              <a:rPr lang="en-US" sz="1100" dirty="0">
+                <a:solidFill>
+                  <a:srgbClr val="1D2B2A"/>
+                </a:solidFill>
+                <a:latin typeface="Calibri" pitchFamily="34" charset="0"/>
+                <a:ea typeface="Calibri" pitchFamily="34" charset="-122"/>
+                <a:cs typeface="Calibri" pitchFamily="34" charset="-120"/>
+              </a:rPr>
+              <a:t>Input / output</a:t>
+            </a:r>
+            <a:endParaRPr lang="en-US" sz="1100" dirty="0"/>
+          </a:p>
+        </p:txBody>
+      </p:sp>
+      <p:sp>
+        <p:nvSpPr>
+          <p:cNvPr id="14" name="Shape 11"/>
+          <p:cNvSpPr/>
+          <p:nvPr/>
+        </p:nvSpPr>
+        <p:spPr>
+          <a:xfrm>
+            <a:off x="3931920" y="2953512"/>
+            <a:ext cx="640080" cy="329184"/>
+          </a:xfrm>
+          <a:prstGeom prst="flowChartPredefinedProcess">
+            <a:avLst/>
+          </a:prstGeom>
+          <a:solidFill>
+            <a:srgbClr val="E8F0EE"/>
+          </a:solidFill>
+          <a:ln w="12700">
+            <a:solidFill>
+              <a:srgbClr val="0B4F4A"/>
+            </a:solidFill>
+            <a:prstDash val="solid"/>
+          </a:ln>
+        </p:spPr>
+      </p:sp>
+      <p:sp>
+        <p:nvSpPr>
+          <p:cNvPr id="15" name="Text 12"/>
+          <p:cNvSpPr txBox="1"/>
+          <p:nvPr/>
+        </p:nvSpPr>
+        <p:spPr>
+          <a:xfrm>
+            <a:off x="4663440" y="2953512"/>
+            <a:ext cx="1874520" cy="329184"/>
+          </a:xfrm>
+          <a:prstGeom prst="rect">
+            <a:avLst/>
+          </a:prstGeom>
+          <a:noFill/>
+          <a:ln/>
+        </p:spPr>
+        <p:txBody>
+          <a:bodyPr wrap="square" lIns="0" tIns="0" rIns="0" bIns="0" rtlCol="0" anchor="ctr"/>
+          <a:lstStyle/>
+          <a:p>
+            <a:pPr indent="0" marL="0">
+              <a:buNone/>
+            </a:pPr>
+            <a:r>
+              <a:rPr lang="en-US" sz="1100" dirty="0">
+                <a:solidFill>
+                  <a:srgbClr val="1D2B2A"/>
+                </a:solidFill>
+                <a:latin typeface="Calibri" pitchFamily="34" charset="0"/>
+                <a:ea typeface="Calibri" pitchFamily="34" charset="-122"/>
+                <a:cs typeface="Calibri" pitchFamily="34" charset="-120"/>
+              </a:rPr>
+              <a:t>A named Bank operation</a:t>
+            </a:r>
+            <a:endParaRPr lang="en-US" sz="1100" dirty="0"/>
+          </a:p>
+        </p:txBody>
+      </p:sp>
+      <p:sp>
+        <p:nvSpPr>
+          <p:cNvPr id="16" name="Shape 13"/>
+          <p:cNvSpPr/>
+          <p:nvPr/>
+        </p:nvSpPr>
+        <p:spPr>
+          <a:xfrm>
+            <a:off x="3931920" y="3383280"/>
+            <a:ext cx="640080" cy="329184"/>
+          </a:xfrm>
+          <a:prstGeom prst="flowChartMagneticDisk">
+            <a:avLst/>
+          </a:prstGeom>
+          <a:solidFill>
+            <a:srgbClr val="E8F0EE"/>
+          </a:solidFill>
+          <a:ln w="12700">
+            <a:solidFill>
+              <a:srgbClr val="0B4F4A"/>
+            </a:solidFill>
+            <a:prstDash val="solid"/>
+          </a:ln>
+        </p:spPr>
+      </p:sp>
+      <p:sp>
+        <p:nvSpPr>
+          <p:cNvPr id="17" name="Text 14"/>
+          <p:cNvSpPr txBox="1"/>
+          <p:nvPr/>
+        </p:nvSpPr>
+        <p:spPr>
+          <a:xfrm>
+            <a:off x="4663440" y="3383280"/>
+            <a:ext cx="1874520" cy="329184"/>
+          </a:xfrm>
+          <a:prstGeom prst="rect">
+            <a:avLst/>
+          </a:prstGeom>
+          <a:noFill/>
+          <a:ln/>
+        </p:spPr>
+        <p:txBody>
+          <a:bodyPr wrap="square" lIns="0" tIns="0" rIns="0" bIns="0" rtlCol="0" anchor="ctr"/>
+          <a:lstStyle/>
+          <a:p>
+            <a:pPr indent="0" marL="0">
+              <a:buNone/>
+            </a:pPr>
+            <a:r>
+              <a:rPr lang="en-US" sz="1100" dirty="0">
+                <a:solidFill>
+                  <a:srgbClr val="1D2B2A"/>
+                </a:solidFill>
+                <a:latin typeface="Calibri" pitchFamily="34" charset="0"/>
+                <a:ea typeface="Calibri" pitchFamily="34" charset="-122"/>
+                <a:cs typeface="Calibri" pitchFamily="34" charset="-120"/>
+              </a:rPr>
+              <a:t>Ledger / audit log</a:t>
+            </a:r>
+            <a:endParaRPr lang="en-US" sz="1100" dirty="0"/>
+          </a:p>
+        </p:txBody>
+      </p:sp>
+      <p:sp>
+        <p:nvSpPr>
+          <p:cNvPr id="18" name="Text 15"/>
+          <p:cNvSpPr txBox="1"/>
+          <p:nvPr/>
+        </p:nvSpPr>
+        <p:spPr>
+          <a:xfrm>
+            <a:off x="6720840" y="1234440"/>
+            <a:ext cx="1965960" cy="2560320"/>
+          </a:xfrm>
+          <a:prstGeom prst="rect">
+            <a:avLst/>
+          </a:prstGeom>
+          <a:noFill/>
+          <a:ln/>
+        </p:spPr>
+        <p:txBody>
+          <a:bodyPr wrap="square" lIns="0" tIns="0" rIns="0" bIns="0" rtlCol="0" anchor="t"/>
+          <a:lstStyle/>
+          <a:p>
+            <a:pPr indent="0" marL="0">
               <a:spcAft>
                 <a:spcPts val="600"/>
               </a:spcAft>
-              <a:buSzPct val="100000"/>
-              <a:buChar char="•"/>
-            </a:pPr>
-            <a:r>
-              <a:rPr lang="en-US" sz="1300" dirty="0">
+              <a:buNone/>
+            </a:pPr>
+            <a:r>
+              <a:rPr lang="en-US" sz="1200" dirty="0">
                 <a:solidFill>
                   <a:srgbClr val="1D2B2A"/>
                 </a:solidFill>
@@ -9296,20 +9713,19 @@
                 <a:ea typeface="Calibri" pitchFamily="34" charset="-122"/>
                 <a:cs typeface="Calibri" pitchFamily="34" charset="-120"/>
               </a:rPr>
-              <a:t>Assistant -&gt; OfflineAssistant -&gt; ClaudeAssistant</a:t>
-            </a:r>
-            <a:endParaRPr lang="en-US" sz="1300" dirty="0"/>
-          </a:p>
-          <a:p>
-            <a:pPr marL="342900" indent="-342900">
+              <a:t>1. Program overview</a:t>
+            </a:r>
+            <a:endParaRPr lang="en-US" sz="1200" dirty="0"/>
+          </a:p>
+          <a:p>
+            <a:pPr indent="0" marL="0">
               <a:spcAft>
                 <a:spcPts val="600"/>
               </a:spcAft>
-              <a:buSzPct val="100000"/>
-              <a:buChar char="•"/>
-            </a:pPr>
-            <a:r>
-              <a:rPr lang="en-US" sz="1300" dirty="0">
+              <a:buNone/>
+            </a:pPr>
+            <a:r>
+              <a:rPr lang="en-US" sz="1200" dirty="0">
                 <a:solidFill>
                   <a:srgbClr val="1D2B2A"/>
                 </a:solidFill>
@@ -9317,20 +9733,19 @@
                 <a:ea typeface="Calibri" pitchFamily="34" charset="-122"/>
                 <a:cs typeface="Calibri" pitchFamily="34" charset="-120"/>
               </a:rPr>
-              <a:t>Answers from the records; prepares a form, never runs it</a:t>
-            </a:r>
-            <a:endParaRPr lang="en-US" sz="1300" dirty="0"/>
-          </a:p>
-          <a:p>
-            <a:pPr marL="342900" indent="-342900">
+              <a:t>2. Onboarding</a:t>
+            </a:r>
+            <a:endParaRPr lang="en-US" sz="1200" dirty="0"/>
+          </a:p>
+          <a:p>
+            <a:pPr indent="0" marL="0">
               <a:spcAft>
                 <a:spcPts val="600"/>
               </a:spcAft>
-              <a:buSzPct val="100000"/>
-              <a:buChar char="•"/>
-            </a:pPr>
-            <a:r>
-              <a:rPr lang="en-US" sz="1300" dirty="0">
+              <a:buNone/>
+            </a:pPr>
+            <a:r>
+              <a:rPr lang="en-US" sz="1200" dirty="0">
                 <a:solidFill>
                   <a:srgbClr val="1D2B2A"/>
                 </a:solidFill>
@@ -9338,9 +9753,108 @@
                 <a:ea typeface="Calibri" pitchFamily="34" charset="-122"/>
                 <a:cs typeface="Calibri" pitchFamily="34" charset="-120"/>
               </a:rPr>
-              <a:t>Works offline; Claude only sees the facts it needs</a:t>
-            </a:r>
-            <a:endParaRPr lang="en-US" sz="1300" dirty="0"/>
+              <a:t>3. Transfer payment</a:t>
+            </a:r>
+            <a:endParaRPr lang="en-US" sz="1200" dirty="0"/>
+          </a:p>
+          <a:p>
+            <a:pPr indent="0" marL="0">
+              <a:spcAft>
+                <a:spcPts val="600"/>
+              </a:spcAft>
+              <a:buNone/>
+            </a:pPr>
+            <a:r>
+              <a:rPr lang="en-US" sz="1200" dirty="0">
+                <a:solidFill>
+                  <a:srgbClr val="1D2B2A"/>
+                </a:solidFill>
+                <a:latin typeface="Calibri" pitchFamily="34" charset="0"/>
+                <a:ea typeface="Calibri" pitchFamily="34" charset="-122"/>
+                <a:cs typeface="Calibri" pitchFamily="34" charset="-120"/>
+              </a:rPr>
+              <a:t>4. Card purchase</a:t>
+            </a:r>
+            <a:endParaRPr lang="en-US" sz="1200" dirty="0"/>
+          </a:p>
+          <a:p>
+            <a:pPr indent="0" marL="0">
+              <a:spcAft>
+                <a:spcPts val="600"/>
+              </a:spcAft>
+              <a:buNone/>
+            </a:pPr>
+            <a:r>
+              <a:rPr lang="en-US" sz="1200" dirty="0">
+                <a:solidFill>
+                  <a:srgbClr val="1D2B2A"/>
+                </a:solidFill>
+                <a:latin typeface="Calibri" pitchFamily="34" charset="0"/>
+                <a:ea typeface="Calibri" pitchFamily="34" charset="-122"/>
+                <a:cs typeface="Calibri" pitchFamily="34" charset="-120"/>
+              </a:rPr>
+              <a:t>5. Financing lifecycle</a:t>
+            </a:r>
+            <a:endParaRPr lang="en-US" sz="1200" dirty="0"/>
+          </a:p>
+          <a:p>
+            <a:pPr indent="0" marL="0">
+              <a:spcAft>
+                <a:spcPts val="600"/>
+              </a:spcAft>
+              <a:buNone/>
+            </a:pPr>
+            <a:r>
+              <a:rPr lang="en-US" sz="1200" dirty="0">
+                <a:solidFill>
+                  <a:srgbClr val="1D2B2A"/>
+                </a:solidFill>
+                <a:latin typeface="Calibri" pitchFamily="34" charset="0"/>
+                <a:ea typeface="Calibri" pitchFamily="34" charset="-122"/>
+                <a:cs typeface="Calibri" pitchFamily="34" charset="-120"/>
+              </a:rPr>
+              <a:t>6. Desktop console</a:t>
+            </a:r>
+            <a:endParaRPr lang="en-US" sz="1200" dirty="0"/>
+          </a:p>
+        </p:txBody>
+      </p:sp>
+      <p:sp>
+        <p:nvSpPr>
+          <p:cNvPr id="19" name="Text 16"/>
+          <p:cNvSpPr txBox="1"/>
+          <p:nvPr/>
+        </p:nvSpPr>
+        <p:spPr>
+          <a:xfrm>
+            <a:off x="3931920" y="4069080"/>
+            <a:ext cx="4754880" cy="457200"/>
+          </a:xfrm>
+          <a:prstGeom prst="rect">
+            <a:avLst/>
+          </a:prstGeom>
+          <a:noFill/>
+          <a:ln/>
+        </p:spPr>
+        <p:txBody>
+          <a:bodyPr wrap="square" lIns="0" tIns="0" rIns="0" bIns="0" rtlCol="0" anchor="ctr"/>
+          <a:lstStyle/>
+          <a:p>
+            <a:pPr indent="0" marL="0">
+              <a:buNone/>
+            </a:pPr>
+            <a:r>
+              <a:rPr lang="en-US" sz="1100" i="1" dirty="0">
+                <a:solidFill>
+                  <a:srgbClr val="5B6B69"/>
+                </a:solidFill>
+                <a:latin typeface="Calibri" pitchFamily="34" charset="0"/>
+                <a:ea typeface="Calibri" pitchFamily="34" charset="-122"/>
+                <a:cs typeface="Calibri" pitchFamily="34" charset="-120"/>
+              </a:rPr>
+              <a:t>Report section 4.1 (flowcharts) and 4.2 (state machines)</a:t>
+            </a:r>
+            <a:endParaRPr lang="en-US" sz="1100" dirty="0"/>
           </a:p>
         </p:txBody>
       </p:sp>
@@ -9411,7 +9925,7 @@
                 <a:ea typeface="Cambria" pitchFamily="34" charset="-122"/>
                 <a:cs typeface="Cambria" pitchFamily="34" charset="-120"/>
               </a:rPr>
-              <a:t>No libraries: the building blocks are classes too</a:t>
+              <a:t>Objects working together: one large transfer</a:t>
             </a:r>
             <a:endParaRPr lang="en-US" sz="2200" dirty="0"/>
           </a:p>
@@ -9450,6 +9964,1627 @@
                 <a:ea typeface="Calibri" pitchFamily="34" charset="-122"/>
                 <a:cs typeface="Calibri" pitchFamily="34" charset="-120"/>
               </a:rPr>
+              <a:t>UML sequence diagram of scenario 2 (TRF-002), labelled from the demonstration's own records</a:t>
+            </a:r>
+            <a:endParaRPr lang="en-US" sz="1200" dirty="0"/>
+          </a:p>
+        </p:txBody>
+      </p:sp>
+      <p:sp>
+        <p:nvSpPr>
+          <p:cNvPr id="4" name="Shape 2"/>
+          <p:cNvSpPr/>
+          <p:nvPr/>
+        </p:nvSpPr>
+        <p:spPr>
+          <a:xfrm>
+            <a:off x="457200" y="1188720"/>
+            <a:ext cx="3429000" cy="3611880"/>
+          </a:xfrm>
+          <a:prstGeom prst="roundRect">
+            <a:avLst>
+              <a:gd name="adj" fmla="val 2133"/>
+            </a:avLst>
+          </a:prstGeom>
+          <a:solidFill>
+            <a:srgbClr val="F4F8F7"/>
+          </a:solidFill>
+          <a:ln w="12700">
+            <a:solidFill>
+              <a:srgbClr val="F4F8F7"/>
+            </a:solidFill>
+            <a:prstDash val="solid"/>
+          </a:ln>
+        </p:spPr>
+      </p:sp>
+      <p:pic>
+        <p:nvPicPr>
+          <p:cNvPr id="5" name="Image 0" descr="/home/user/commercial-banking/docs/sequence_1_large_transfer.png">    </p:cNvPr>
+          <p:cNvPicPr>
+            <a:picLocks noChangeAspect="1"/>
+          </p:cNvPicPr>
+          <p:nvPr/>
+        </p:nvPicPr>
+        <p:blipFill>
+          <a:blip r:embed="rId1"/>
+          <a:stretch>
+            <a:fillRect/>
+          </a:stretch>
+        </p:blipFill>
+        <p:spPr>
+          <a:xfrm>
+            <a:off x="581755" y="1234440"/>
+            <a:ext cx="3179890" cy="3520440"/>
+          </a:xfrm>
+          <a:prstGeom prst="rect">
+            <a:avLst/>
+          </a:prstGeom>
+        </p:spPr>
+      </p:pic>
+      <p:sp>
+        <p:nvSpPr>
+          <p:cNvPr id="6" name="Text 3"/>
+          <p:cNvSpPr txBox="1"/>
+          <p:nvPr/>
+        </p:nvSpPr>
+        <p:spPr>
+          <a:xfrm>
+            <a:off x="4160520" y="1234440"/>
+            <a:ext cx="4526280" cy="3566160"/>
+          </a:xfrm>
+          <a:prstGeom prst="rect">
+            <a:avLst/>
+          </a:prstGeom>
+          <a:noFill/>
+          <a:ln/>
+        </p:spPr>
+        <p:txBody>
+          <a:bodyPr wrap="square" lIns="635" tIns="635" rIns="635" bIns="635" rtlCol="0" anchor="t"/>
+          <a:lstStyle/>
+          <a:p>
+            <a:pPr marL="342900" indent="-342900">
+              <a:spcAft>
+                <a:spcPts val="600"/>
+              </a:spcAft>
+              <a:buSzPct val="100000"/>
+              <a:buChar char="•"/>
+            </a:pPr>
+            <a:r>
+              <a:rPr lang="en-US" sz="1250" dirty="0">
+                <a:solidFill>
+                  <a:srgbClr val="1D2B2A"/>
+                </a:solidFill>
+                <a:latin typeface="Calibri" pitchFamily="34" charset="0"/>
+                <a:ea typeface="Calibri" pitchFamily="34" charset="-122"/>
+                <a:cs typeface="Calibri" pitchFamily="34" charset="-120"/>
+              </a:rPr>
+              <a:t>Hamza starts TRF-002: the Bank asks Ravi Textiles for his mandate and CUR-002 for the funds</a:t>
+            </a:r>
+            <a:endParaRPr lang="en-US" sz="1250" dirty="0"/>
+          </a:p>
+          <a:p>
+            <a:pPr marL="342900" indent="-342900">
+              <a:spcAft>
+                <a:spcPts val="600"/>
+              </a:spcAft>
+              <a:buSzPct val="100000"/>
+              <a:buChar char="•"/>
+            </a:pPr>
+            <a:r>
+              <a:rPr lang="en-US" sz="1250" dirty="0">
+                <a:solidFill>
+                  <a:srgbClr val="1D2B2A"/>
+                </a:solidFill>
+                <a:latin typeface="Calibri" pitchFamily="34" charset="0"/>
+                <a:ea typeface="Calibri" pitchFamily="34" charset="-122"/>
+                <a:cs typeface="Calibri" pitchFamily="34" charset="-120"/>
+              </a:rPr>
+              <a:t>Above PKR 1,000,000 the mandate needs a second signatory: the payment waits</a:t>
+            </a:r>
+            <a:endParaRPr lang="en-US" sz="1250" dirty="0"/>
+          </a:p>
+          <a:p>
+            <a:pPr marL="342900" indent="-342900">
+              <a:spcAft>
+                <a:spcPts val="600"/>
+              </a:spcAft>
+              <a:buSzPct val="100000"/>
+              <a:buChar char="•"/>
+            </a:pPr>
+            <a:r>
+              <a:rPr lang="en-US" sz="1250" dirty="0">
+                <a:solidFill>
+                  <a:srgbClr val="1D2B2A"/>
+                </a:solidFill>
+                <a:latin typeface="Calibri" pitchFamily="34" charset="0"/>
+                <a:ea typeface="Calibri" pitchFamily="34" charset="-122"/>
+                <a:cs typeface="Calibri" pitchFamily="34" charset="-120"/>
+              </a:rPr>
+              <a:t>Ayesha approves: mandate and funds are checked again; above the review threshold it is held and a FraudAlert is created</a:t>
+            </a:r>
+            <a:endParaRPr lang="en-US" sz="1250" dirty="0"/>
+          </a:p>
+          <a:p>
+            <a:pPr marL="342900" indent="-342900">
+              <a:spcAft>
+                <a:spcPts val="600"/>
+              </a:spcAft>
+              <a:buSzPct val="100000"/>
+              <a:buChar char="•"/>
+            </a:pPr>
+            <a:r>
+              <a:rPr lang="en-US" sz="1250" dirty="0">
+                <a:solidFill>
+                  <a:srgbClr val="1D2B2A"/>
+                </a:solidFill>
+                <a:latin typeface="Calibri" pitchFamily="34" charset="0"/>
+                <a:ea typeface="Calibri" pitchFamily="34" charset="-122"/>
+                <a:cs typeface="Calibri" pitchFamily="34" charset="-120"/>
+              </a:rPr>
+              <a:t>Kamran (compliance) releases it: the hold ends and post() writes two legs that sum to zero</a:t>
+            </a:r>
+            <a:endParaRPr lang="en-US" sz="1250" dirty="0"/>
+          </a:p>
+          <a:p>
+            <a:pPr marL="342900" indent="-342900">
+              <a:spcAft>
+                <a:spcPts val="600"/>
+              </a:spcAft>
+              <a:buSzPct val="100000"/>
+              <a:buChar char="•"/>
+            </a:pPr>
+            <a:r>
+              <a:rPr lang="en-US" sz="1250" dirty="0">
+                <a:solidFill>
+                  <a:srgbClr val="1D2B2A"/>
+                </a:solidFill>
+                <a:latin typeface="Calibri" pitchFamily="34" charset="0"/>
+                <a:ea typeface="Calibri" pitchFamily="34" charset="-122"/>
+                <a:cs typeface="Calibri" pitchFamily="34" charset="-120"/>
+              </a:rPr>
+              <a:t>The script that draws it stops if the diagram differs from the payment's recorded status trail</a:t>
+            </a:r>
+            <a:endParaRPr lang="en-US" sz="1250" dirty="0"/>
+          </a:p>
+        </p:txBody>
+      </p:sp>
+    </p:spTree>
+  </p:cSld>
+  <p:clrMapOvr>
+    <a:masterClrMapping/>
+  </p:clrMapOvr>
+</p:sld>
+</file>
+
+<file path=ppt/slides/slide2.xml><?xml version="1.0" encoding="utf-8"?>
+<p:sld xmlns:a="http://schemas.openxmlformats.org/drawingml/2006/main" xmlns:r="http://schemas.openxmlformats.org/officeDocument/2006/relationships" xmlns:p="http://schemas.openxmlformats.org/presentationml/2006/main">
+  <p:cSld name="Slide 2">
+    <p:bg>
+      <p:bgPr>
+        <a:solidFill>
+          <a:srgbClr val="FFFFFF"/>
+        </a:solidFill>
+      </p:bgPr>
+    </p:bg>
+    <p:spTree>
+      <p:nvGrpSpPr>
+        <p:cNvPr id="1" name=""/>
+        <p:cNvGrpSpPr/>
+        <p:nvPr/>
+      </p:nvGrpSpPr>
+      <p:grpSpPr>
+        <a:xfrm>
+          <a:off x="0" y="0"/>
+          <a:ext cx="0" cy="0"/>
+          <a:chOff x="0" y="0"/>
+          <a:chExt cx="0" cy="0"/>
+        </a:xfrm>
+      </p:grpSpPr>
+      <p:sp>
+        <p:nvSpPr>
+          <p:cNvPr id="2" name="Text 0"/>
+          <p:cNvSpPr txBox="1"/>
+          <p:nvPr/>
+        </p:nvSpPr>
+        <p:spPr>
+          <a:xfrm>
+            <a:off x="457200" y="274320"/>
+            <a:ext cx="8229600" cy="548640"/>
+          </a:xfrm>
+          <a:prstGeom prst="rect">
+            <a:avLst/>
+          </a:prstGeom>
+          <a:noFill/>
+          <a:ln/>
+        </p:spPr>
+        <p:txBody>
+          <a:bodyPr wrap="square" lIns="0" tIns="0" rIns="0" bIns="0" rtlCol="0" anchor="ctr">
+            <a:normAutofit/>
+          </a:bodyPr>
+          <a:lstStyle/>
+          <a:p>
+            <a:pPr indent="0" marL="0">
+              <a:buNone/>
+            </a:pPr>
+            <a:r>
+              <a:rPr lang="en-US" sz="2800" b="1" dirty="0">
+                <a:solidFill>
+                  <a:srgbClr val="0B4F4A"/>
+                </a:solidFill>
+                <a:latin typeface="Cambria" pitchFamily="34" charset="0"/>
+                <a:ea typeface="Cambria" pitchFamily="34" charset="-122"/>
+                <a:cs typeface="Cambria" pitchFamily="34" charset="-120"/>
+              </a:rPr>
+              <a:t>What I will show, in order</a:t>
+            </a:r>
+            <a:endParaRPr lang="en-US" sz="2800" dirty="0"/>
+          </a:p>
+        </p:txBody>
+      </p:sp>
+      <p:sp>
+        <p:nvSpPr>
+          <p:cNvPr id="3" name="Text 1"/>
+          <p:cNvSpPr txBox="1"/>
+          <p:nvPr/>
+        </p:nvSpPr>
+        <p:spPr>
+          <a:xfrm>
+            <a:off x="457200" y="804672"/>
+            <a:ext cx="8229600" cy="320040"/>
+          </a:xfrm>
+          <a:prstGeom prst="rect">
+            <a:avLst/>
+          </a:prstGeom>
+          <a:noFill/>
+          <a:ln/>
+        </p:spPr>
+        <p:txBody>
+          <a:bodyPr wrap="square" lIns="0" tIns="0" rIns="0" bIns="0" rtlCol="0" anchor="ctr"/>
+          <a:lstStyle/>
+          <a:p>
+            <a:pPr indent="0" marL="0">
+              <a:buNone/>
+            </a:pPr>
+            <a:r>
+              <a:rPr lang="en-US" sz="1200" i="1" dirty="0">
+                <a:solidFill>
+                  <a:srgbClr val="5B6B69"/>
+                </a:solidFill>
+                <a:latin typeface="Calibri" pitchFamily="34" charset="0"/>
+                <a:ea typeface="Calibri" pitchFamily="34" charset="-122"/>
+                <a:cs typeface="Calibri" pitchFamily="34" charset="-120"/>
+              </a:rPr>
+              <a:t>About 20 minutes of slides, 7 minutes of live demonstration, then questions</a:t>
+            </a:r>
+            <a:endParaRPr lang="en-US" sz="1200" dirty="0"/>
+          </a:p>
+        </p:txBody>
+      </p:sp>
+      <p:sp>
+        <p:nvSpPr>
+          <p:cNvPr id="4" name="Shape 2"/>
+          <p:cNvSpPr/>
+          <p:nvPr/>
+        </p:nvSpPr>
+        <p:spPr>
+          <a:xfrm>
+            <a:off x="548640" y="1234440"/>
+            <a:ext cx="384048" cy="384048"/>
+          </a:xfrm>
+          <a:prstGeom prst="ellipse">
+            <a:avLst/>
+          </a:prstGeom>
+          <a:solidFill>
+            <a:srgbClr val="B8862F"/>
+          </a:solidFill>
+          <a:ln/>
+        </p:spPr>
+      </p:sp>
+      <p:sp>
+        <p:nvSpPr>
+          <p:cNvPr id="5" name="Text 3"/>
+          <p:cNvSpPr txBox="1"/>
+          <p:nvPr/>
+        </p:nvSpPr>
+        <p:spPr>
+          <a:xfrm>
+            <a:off x="548640" y="1234440"/>
+            <a:ext cx="384048" cy="384048"/>
+          </a:xfrm>
+          <a:prstGeom prst="rect">
+            <a:avLst/>
+          </a:prstGeom>
+          <a:noFill/>
+          <a:ln/>
+        </p:spPr>
+        <p:txBody>
+          <a:bodyPr wrap="square" lIns="0" tIns="0" rIns="0" bIns="0" rtlCol="0" anchor="ctr"/>
+          <a:lstStyle/>
+          <a:p>
+            <a:pPr algn="ctr" indent="0" marL="0">
+              <a:buNone/>
+            </a:pPr>
+            <a:r>
+              <a:rPr lang="en-US" sz="1400" b="1" dirty="0">
+                <a:solidFill>
+                  <a:srgbClr val="FFFFFF"/>
+                </a:solidFill>
+                <a:latin typeface="Cambria" pitchFamily="34" charset="0"/>
+                <a:ea typeface="Cambria" pitchFamily="34" charset="-122"/>
+                <a:cs typeface="Cambria" pitchFamily="34" charset="-120"/>
+              </a:rPr>
+              <a:t>1</a:t>
+            </a:r>
+            <a:endParaRPr lang="en-US" sz="1400" dirty="0"/>
+          </a:p>
+        </p:txBody>
+      </p:sp>
+      <p:sp>
+        <p:nvSpPr>
+          <p:cNvPr id="6" name="Text 4"/>
+          <p:cNvSpPr txBox="1"/>
+          <p:nvPr/>
+        </p:nvSpPr>
+        <p:spPr>
+          <a:xfrm>
+            <a:off x="1097280" y="1234440"/>
+            <a:ext cx="7589520" cy="384048"/>
+          </a:xfrm>
+          <a:prstGeom prst="rect">
+            <a:avLst/>
+          </a:prstGeom>
+          <a:noFill/>
+          <a:ln/>
+        </p:spPr>
+        <p:txBody>
+          <a:bodyPr wrap="square" lIns="0" tIns="0" rIns="0" bIns="0" rtlCol="0" anchor="ctr"/>
+          <a:lstStyle/>
+          <a:p>
+            <a:pPr indent="0" marL="0">
+              <a:buNone/>
+            </a:pPr>
+            <a:r>
+              <a:rPr lang="en-US" sz="1400" b="1" dirty="0">
+                <a:solidFill>
+                  <a:srgbClr val="0B4F4A"/>
+                </a:solidFill>
+                <a:latin typeface="Calibri" pitchFamily="34" charset="0"/>
+                <a:ea typeface="Calibri" pitchFamily="34" charset="-122"/>
+                <a:cs typeface="Calibri" pitchFamily="34" charset="-120"/>
+              </a:rPr>
+              <a:t>Research   </a:t>
+            </a:r>
+            <a:pPr indent="0" marL="0">
+              <a:buNone/>
+            </a:pPr>
+            <a:r>
+              <a:rPr lang="en-US" sz="1400" dirty="0">
+                <a:solidFill>
+                  <a:srgbClr val="1D2B2A"/>
+                </a:solidFill>
+                <a:latin typeface="Calibri" pitchFamily="34" charset="0"/>
+                <a:ea typeface="Calibri" pitchFamily="34" charset="-122"/>
+                <a:cs typeface="Calibri" pitchFamily="34" charset="-120"/>
+              </a:rPr>
+              <a:t>What I studied and how it changed the design</a:t>
+            </a:r>
+            <a:endParaRPr lang="en-US" sz="1400" dirty="0"/>
+          </a:p>
+        </p:txBody>
+      </p:sp>
+      <p:sp>
+        <p:nvSpPr>
+          <p:cNvPr id="7" name="Shape 5"/>
+          <p:cNvSpPr/>
+          <p:nvPr/>
+        </p:nvSpPr>
+        <p:spPr>
+          <a:xfrm>
+            <a:off x="548640" y="1737360"/>
+            <a:ext cx="384048" cy="384048"/>
+          </a:xfrm>
+          <a:prstGeom prst="ellipse">
+            <a:avLst/>
+          </a:prstGeom>
+          <a:solidFill>
+            <a:srgbClr val="B8862F"/>
+          </a:solidFill>
+          <a:ln/>
+        </p:spPr>
+      </p:sp>
+      <p:sp>
+        <p:nvSpPr>
+          <p:cNvPr id="8" name="Text 6"/>
+          <p:cNvSpPr txBox="1"/>
+          <p:nvPr/>
+        </p:nvSpPr>
+        <p:spPr>
+          <a:xfrm>
+            <a:off x="548640" y="1737360"/>
+            <a:ext cx="384048" cy="384048"/>
+          </a:xfrm>
+          <a:prstGeom prst="rect">
+            <a:avLst/>
+          </a:prstGeom>
+          <a:noFill/>
+          <a:ln/>
+        </p:spPr>
+        <p:txBody>
+          <a:bodyPr wrap="square" lIns="0" tIns="0" rIns="0" bIns="0" rtlCol="0" anchor="ctr"/>
+          <a:lstStyle/>
+          <a:p>
+            <a:pPr algn="ctr" indent="0" marL="0">
+              <a:buNone/>
+            </a:pPr>
+            <a:r>
+              <a:rPr lang="en-US" sz="1400" b="1" dirty="0">
+                <a:solidFill>
+                  <a:srgbClr val="FFFFFF"/>
+                </a:solidFill>
+                <a:latin typeface="Cambria" pitchFamily="34" charset="0"/>
+                <a:ea typeface="Cambria" pitchFamily="34" charset="-122"/>
+                <a:cs typeface="Cambria" pitchFamily="34" charset="-120"/>
+              </a:rPr>
+              <a:t>2</a:t>
+            </a:r>
+            <a:endParaRPr lang="en-US" sz="1400" dirty="0"/>
+          </a:p>
+        </p:txBody>
+      </p:sp>
+      <p:sp>
+        <p:nvSpPr>
+          <p:cNvPr id="9" name="Text 7"/>
+          <p:cNvSpPr txBox="1"/>
+          <p:nvPr/>
+        </p:nvSpPr>
+        <p:spPr>
+          <a:xfrm>
+            <a:off x="1097280" y="1737360"/>
+            <a:ext cx="7589520" cy="384048"/>
+          </a:xfrm>
+          <a:prstGeom prst="rect">
+            <a:avLst/>
+          </a:prstGeom>
+          <a:noFill/>
+          <a:ln/>
+        </p:spPr>
+        <p:txBody>
+          <a:bodyPr wrap="square" lIns="0" tIns="0" rIns="0" bIns="0" rtlCol="0" anchor="ctr"/>
+          <a:lstStyle/>
+          <a:p>
+            <a:pPr indent="0" marL="0">
+              <a:buNone/>
+            </a:pPr>
+            <a:r>
+              <a:rPr lang="en-US" sz="1400" b="1" dirty="0">
+                <a:solidFill>
+                  <a:srgbClr val="0B4F4A"/>
+                </a:solidFill>
+                <a:latin typeface="Calibri" pitchFamily="34" charset="0"/>
+                <a:ea typeface="Calibri" pitchFamily="34" charset="-122"/>
+                <a:cs typeface="Calibri" pitchFamily="34" charset="-120"/>
+              </a:rPr>
+              <a:t>Scale and core rule   </a:t>
+            </a:r>
+            <a:pPr indent="0" marL="0">
+              <a:buNone/>
+            </a:pPr>
+            <a:r>
+              <a:rPr lang="en-US" sz="1400" dirty="0">
+                <a:solidFill>
+                  <a:srgbClr val="1D2B2A"/>
+                </a:solidFill>
+                <a:latin typeface="Calibri" pitchFamily="34" charset="0"/>
+                <a:ea typeface="Calibri" pitchFamily="34" charset="-122"/>
+                <a:cs typeface="Calibri" pitchFamily="34" charset="-120"/>
+              </a:rPr>
+              <a:t>What the brief asks for, and "nothing is deleted"</a:t>
+            </a:r>
+            <a:endParaRPr lang="en-US" sz="1400" dirty="0"/>
+          </a:p>
+        </p:txBody>
+      </p:sp>
+      <p:sp>
+        <p:nvSpPr>
+          <p:cNvPr id="10" name="Shape 8"/>
+          <p:cNvSpPr/>
+          <p:nvPr/>
+        </p:nvSpPr>
+        <p:spPr>
+          <a:xfrm>
+            <a:off x="548640" y="2240280"/>
+            <a:ext cx="384048" cy="384048"/>
+          </a:xfrm>
+          <a:prstGeom prst="ellipse">
+            <a:avLst/>
+          </a:prstGeom>
+          <a:solidFill>
+            <a:srgbClr val="B8862F"/>
+          </a:solidFill>
+          <a:ln/>
+        </p:spPr>
+      </p:sp>
+      <p:sp>
+        <p:nvSpPr>
+          <p:cNvPr id="11" name="Text 9"/>
+          <p:cNvSpPr txBox="1"/>
+          <p:nvPr/>
+        </p:nvSpPr>
+        <p:spPr>
+          <a:xfrm>
+            <a:off x="548640" y="2240280"/>
+            <a:ext cx="384048" cy="384048"/>
+          </a:xfrm>
+          <a:prstGeom prst="rect">
+            <a:avLst/>
+          </a:prstGeom>
+          <a:noFill/>
+          <a:ln/>
+        </p:spPr>
+        <p:txBody>
+          <a:bodyPr wrap="square" lIns="0" tIns="0" rIns="0" bIns="0" rtlCol="0" anchor="ctr"/>
+          <a:lstStyle/>
+          <a:p>
+            <a:pPr algn="ctr" indent="0" marL="0">
+              <a:buNone/>
+            </a:pPr>
+            <a:r>
+              <a:rPr lang="en-US" sz="1400" b="1" dirty="0">
+                <a:solidFill>
+                  <a:srgbClr val="FFFFFF"/>
+                </a:solidFill>
+                <a:latin typeface="Cambria" pitchFamily="34" charset="0"/>
+                <a:ea typeface="Cambria" pitchFamily="34" charset="-122"/>
+                <a:cs typeface="Cambria" pitchFamily="34" charset="-120"/>
+              </a:rPr>
+              <a:t>3</a:t>
+            </a:r>
+            <a:endParaRPr lang="en-US" sz="1400" dirty="0"/>
+          </a:p>
+        </p:txBody>
+      </p:sp>
+      <p:sp>
+        <p:nvSpPr>
+          <p:cNvPr id="12" name="Text 10"/>
+          <p:cNvSpPr txBox="1"/>
+          <p:nvPr/>
+        </p:nvSpPr>
+        <p:spPr>
+          <a:xfrm>
+            <a:off x="1097280" y="2240280"/>
+            <a:ext cx="7589520" cy="384048"/>
+          </a:xfrm>
+          <a:prstGeom prst="rect">
+            <a:avLst/>
+          </a:prstGeom>
+          <a:noFill/>
+          <a:ln/>
+        </p:spPr>
+        <p:txBody>
+          <a:bodyPr wrap="square" lIns="0" tIns="0" rIns="0" bIns="0" rtlCol="0" anchor="ctr"/>
+          <a:lstStyle/>
+          <a:p>
+            <a:pPr indent="0" marL="0">
+              <a:buNone/>
+            </a:pPr>
+            <a:r>
+              <a:rPr lang="en-US" sz="1400" b="1" dirty="0">
+                <a:solidFill>
+                  <a:srgbClr val="0B4F4A"/>
+                </a:solidFill>
+                <a:latin typeface="Calibri" pitchFamily="34" charset="0"/>
+                <a:ea typeface="Calibri" pitchFamily="34" charset="-122"/>
+                <a:cs typeface="Calibri" pitchFamily="34" charset="-120"/>
+              </a:rPr>
+              <a:t>Class model   </a:t>
+            </a:r>
+            <a:pPr indent="0" marL="0">
+              <a:buNone/>
+            </a:pPr>
+            <a:r>
+              <a:rPr lang="en-US" sz="1400" dirty="0">
+                <a:solidFill>
+                  <a:srgbClr val="1D2B2A"/>
+                </a:solidFill>
+                <a:latin typeface="Calibri" pitchFamily="34" charset="0"/>
+                <a:ea typeface="Calibri" pitchFamily="34" charset="-122"/>
+                <a:cs typeface="Calibri" pitchFamily="34" charset="-120"/>
+              </a:rPr>
+              <a:t>The four hierarchies, level by level</a:t>
+            </a:r>
+            <a:endParaRPr lang="en-US" sz="1400" dirty="0"/>
+          </a:p>
+        </p:txBody>
+      </p:sp>
+      <p:sp>
+        <p:nvSpPr>
+          <p:cNvPr id="13" name="Shape 11"/>
+          <p:cNvSpPr/>
+          <p:nvPr/>
+        </p:nvSpPr>
+        <p:spPr>
+          <a:xfrm>
+            <a:off x="548640" y="2743200"/>
+            <a:ext cx="384048" cy="384048"/>
+          </a:xfrm>
+          <a:prstGeom prst="ellipse">
+            <a:avLst/>
+          </a:prstGeom>
+          <a:solidFill>
+            <a:srgbClr val="B8862F"/>
+          </a:solidFill>
+          <a:ln/>
+        </p:spPr>
+      </p:sp>
+      <p:sp>
+        <p:nvSpPr>
+          <p:cNvPr id="14" name="Text 12"/>
+          <p:cNvSpPr txBox="1"/>
+          <p:nvPr/>
+        </p:nvSpPr>
+        <p:spPr>
+          <a:xfrm>
+            <a:off x="548640" y="2743200"/>
+            <a:ext cx="384048" cy="384048"/>
+          </a:xfrm>
+          <a:prstGeom prst="rect">
+            <a:avLst/>
+          </a:prstGeom>
+          <a:noFill/>
+          <a:ln/>
+        </p:spPr>
+        <p:txBody>
+          <a:bodyPr wrap="square" lIns="0" tIns="0" rIns="0" bIns="0" rtlCol="0" anchor="ctr"/>
+          <a:lstStyle/>
+          <a:p>
+            <a:pPr algn="ctr" indent="0" marL="0">
+              <a:buNone/>
+            </a:pPr>
+            <a:r>
+              <a:rPr lang="en-US" sz="1400" b="1" dirty="0">
+                <a:solidFill>
+                  <a:srgbClr val="FFFFFF"/>
+                </a:solidFill>
+                <a:latin typeface="Cambria" pitchFamily="34" charset="0"/>
+                <a:ea typeface="Cambria" pitchFamily="34" charset="-122"/>
+                <a:cs typeface="Cambria" pitchFamily="34" charset="-120"/>
+              </a:rPr>
+              <a:t>4</a:t>
+            </a:r>
+            <a:endParaRPr lang="en-US" sz="1400" dirty="0"/>
+          </a:p>
+        </p:txBody>
+      </p:sp>
+      <p:sp>
+        <p:nvSpPr>
+          <p:cNvPr id="15" name="Text 13"/>
+          <p:cNvSpPr txBox="1"/>
+          <p:nvPr/>
+        </p:nvSpPr>
+        <p:spPr>
+          <a:xfrm>
+            <a:off x="1097280" y="2743200"/>
+            <a:ext cx="7589520" cy="384048"/>
+          </a:xfrm>
+          <a:prstGeom prst="rect">
+            <a:avLst/>
+          </a:prstGeom>
+          <a:noFill/>
+          <a:ln/>
+        </p:spPr>
+        <p:txBody>
+          <a:bodyPr wrap="square" lIns="0" tIns="0" rIns="0" bIns="0" rtlCol="0" anchor="ctr"/>
+          <a:lstStyle/>
+          <a:p>
+            <a:pPr indent="0" marL="0">
+              <a:buNone/>
+            </a:pPr>
+            <a:r>
+              <a:rPr lang="en-US" sz="1400" b="1" dirty="0">
+                <a:solidFill>
+                  <a:srgbClr val="0B4F4A"/>
+                </a:solidFill>
+                <a:latin typeface="Calibri" pitchFamily="34" charset="0"/>
+                <a:ea typeface="Calibri" pitchFamily="34" charset="-122"/>
+                <a:cs typeface="Calibri" pitchFamily="34" charset="-120"/>
+              </a:rPr>
+              <a:t>Design decisions   </a:t>
+            </a:r>
+            <a:pPr indent="0" marL="0">
+              <a:buNone/>
+            </a:pPr>
+            <a:r>
+              <a:rPr lang="en-US" sz="1400" dirty="0">
+                <a:solidFill>
+                  <a:srgbClr val="1D2B2A"/>
+                </a:solidFill>
+                <a:latin typeface="Calibri" pitchFamily="34" charset="0"/>
+                <a:ea typeface="Calibri" pitchFamily="34" charset="-122"/>
+                <a:cs typeface="Calibri" pitchFamily="34" charset="-120"/>
+              </a:rPr>
+              <a:t>Rejected inheritances; the alternative; SOLID and patterns</a:t>
+            </a:r>
+            <a:endParaRPr lang="en-US" sz="1400" dirty="0"/>
+          </a:p>
+        </p:txBody>
+      </p:sp>
+      <p:sp>
+        <p:nvSpPr>
+          <p:cNvPr id="16" name="Shape 14"/>
+          <p:cNvSpPr/>
+          <p:nvPr/>
+        </p:nvSpPr>
+        <p:spPr>
+          <a:xfrm>
+            <a:off x="548640" y="3246120"/>
+            <a:ext cx="384048" cy="384048"/>
+          </a:xfrm>
+          <a:prstGeom prst="ellipse">
+            <a:avLst/>
+          </a:prstGeom>
+          <a:solidFill>
+            <a:srgbClr val="B8862F"/>
+          </a:solidFill>
+          <a:ln/>
+        </p:spPr>
+      </p:sp>
+      <p:sp>
+        <p:nvSpPr>
+          <p:cNvPr id="17" name="Text 15"/>
+          <p:cNvSpPr txBox="1"/>
+          <p:nvPr/>
+        </p:nvSpPr>
+        <p:spPr>
+          <a:xfrm>
+            <a:off x="548640" y="3246120"/>
+            <a:ext cx="384048" cy="384048"/>
+          </a:xfrm>
+          <a:prstGeom prst="rect">
+            <a:avLst/>
+          </a:prstGeom>
+          <a:noFill/>
+          <a:ln/>
+        </p:spPr>
+        <p:txBody>
+          <a:bodyPr wrap="square" lIns="0" tIns="0" rIns="0" bIns="0" rtlCol="0" anchor="ctr"/>
+          <a:lstStyle/>
+          <a:p>
+            <a:pPr algn="ctr" indent="0" marL="0">
+              <a:buNone/>
+            </a:pPr>
+            <a:r>
+              <a:rPr lang="en-US" sz="1400" b="1" dirty="0">
+                <a:solidFill>
+                  <a:srgbClr val="FFFFFF"/>
+                </a:solidFill>
+                <a:latin typeface="Cambria" pitchFamily="34" charset="0"/>
+                <a:ea typeface="Cambria" pitchFamily="34" charset="-122"/>
+                <a:cs typeface="Cambria" pitchFamily="34" charset="-120"/>
+              </a:rPr>
+              <a:t>5</a:t>
+            </a:r>
+            <a:endParaRPr lang="en-US" sz="1400" dirty="0"/>
+          </a:p>
+        </p:txBody>
+      </p:sp>
+      <p:sp>
+        <p:nvSpPr>
+          <p:cNvPr id="18" name="Text 16"/>
+          <p:cNvSpPr txBox="1"/>
+          <p:nvPr/>
+        </p:nvSpPr>
+        <p:spPr>
+          <a:xfrm>
+            <a:off x="1097280" y="3246120"/>
+            <a:ext cx="7589520" cy="384048"/>
+          </a:xfrm>
+          <a:prstGeom prst="rect">
+            <a:avLst/>
+          </a:prstGeom>
+          <a:noFill/>
+          <a:ln/>
+        </p:spPr>
+        <p:txBody>
+          <a:bodyPr wrap="square" lIns="0" tIns="0" rIns="0" bIns="0" rtlCol="0" anchor="ctr"/>
+          <a:lstStyle/>
+          <a:p>
+            <a:pPr indent="0" marL="0">
+              <a:buNone/>
+            </a:pPr>
+            <a:r>
+              <a:rPr lang="en-US" sz="1400" b="1" dirty="0">
+                <a:solidFill>
+                  <a:srgbClr val="0B4F4A"/>
+                </a:solidFill>
+                <a:latin typeface="Calibri" pitchFamily="34" charset="0"/>
+                <a:ea typeface="Calibri" pitchFamily="34" charset="-122"/>
+                <a:cs typeface="Calibri" pitchFamily="34" charset="-120"/>
+              </a:rPr>
+              <a:t>Behaviour   </a:t>
+            </a:r>
+            <a:pPr indent="0" marL="0">
+              <a:buNone/>
+            </a:pPr>
+            <a:r>
+              <a:rPr lang="en-US" sz="1400" dirty="0">
+                <a:solidFill>
+                  <a:srgbClr val="1D2B2A"/>
+                </a:solidFill>
+                <a:latin typeface="Calibri" pitchFamily="34" charset="0"/>
+                <a:ea typeface="Calibri" pitchFamily="34" charset="-122"/>
+                <a:cs typeface="Calibri" pitchFamily="34" charset="-120"/>
+              </a:rPr>
+              <a:t>16 scenarios, flowcharts, a sequence diagram</a:t>
+            </a:r>
+            <a:endParaRPr lang="en-US" sz="1400" dirty="0"/>
+          </a:p>
+        </p:txBody>
+      </p:sp>
+      <p:sp>
+        <p:nvSpPr>
+          <p:cNvPr id="19" name="Shape 17"/>
+          <p:cNvSpPr/>
+          <p:nvPr/>
+        </p:nvSpPr>
+        <p:spPr>
+          <a:xfrm>
+            <a:off x="548640" y="3749040"/>
+            <a:ext cx="384048" cy="384048"/>
+          </a:xfrm>
+          <a:prstGeom prst="ellipse">
+            <a:avLst/>
+          </a:prstGeom>
+          <a:solidFill>
+            <a:srgbClr val="B8862F"/>
+          </a:solidFill>
+          <a:ln/>
+        </p:spPr>
+      </p:sp>
+      <p:sp>
+        <p:nvSpPr>
+          <p:cNvPr id="20" name="Text 18"/>
+          <p:cNvSpPr txBox="1"/>
+          <p:nvPr/>
+        </p:nvSpPr>
+        <p:spPr>
+          <a:xfrm>
+            <a:off x="548640" y="3749040"/>
+            <a:ext cx="384048" cy="384048"/>
+          </a:xfrm>
+          <a:prstGeom prst="rect">
+            <a:avLst/>
+          </a:prstGeom>
+          <a:noFill/>
+          <a:ln/>
+        </p:spPr>
+        <p:txBody>
+          <a:bodyPr wrap="square" lIns="0" tIns="0" rIns="0" bIns="0" rtlCol="0" anchor="ctr"/>
+          <a:lstStyle/>
+          <a:p>
+            <a:pPr algn="ctr" indent="0" marL="0">
+              <a:buNone/>
+            </a:pPr>
+            <a:r>
+              <a:rPr lang="en-US" sz="1400" b="1" dirty="0">
+                <a:solidFill>
+                  <a:srgbClr val="FFFFFF"/>
+                </a:solidFill>
+                <a:latin typeface="Cambria" pitchFamily="34" charset="0"/>
+                <a:ea typeface="Cambria" pitchFamily="34" charset="-122"/>
+                <a:cs typeface="Cambria" pitchFamily="34" charset="-120"/>
+              </a:rPr>
+              <a:t>6</a:t>
+            </a:r>
+            <a:endParaRPr lang="en-US" sz="1400" dirty="0"/>
+          </a:p>
+        </p:txBody>
+      </p:sp>
+      <p:sp>
+        <p:nvSpPr>
+          <p:cNvPr id="21" name="Text 19"/>
+          <p:cNvSpPr txBox="1"/>
+          <p:nvPr/>
+        </p:nvSpPr>
+        <p:spPr>
+          <a:xfrm>
+            <a:off x="1097280" y="3749040"/>
+            <a:ext cx="7589520" cy="384048"/>
+          </a:xfrm>
+          <a:prstGeom prst="rect">
+            <a:avLst/>
+          </a:prstGeom>
+          <a:noFill/>
+          <a:ln/>
+        </p:spPr>
+        <p:txBody>
+          <a:bodyPr wrap="square" lIns="0" tIns="0" rIns="0" bIns="0" rtlCol="0" anchor="ctr"/>
+          <a:lstStyle/>
+          <a:p>
+            <a:pPr indent="0" marL="0">
+              <a:buNone/>
+            </a:pPr>
+            <a:r>
+              <a:rPr lang="en-US" sz="1400" b="1" dirty="0">
+                <a:solidFill>
+                  <a:srgbClr val="0B4F4A"/>
+                </a:solidFill>
+                <a:latin typeface="Calibri" pitchFamily="34" charset="0"/>
+                <a:ea typeface="Calibri" pitchFamily="34" charset="-122"/>
+                <a:cs typeface="Calibri" pitchFamily="34" charset="-120"/>
+              </a:rPr>
+              <a:t>Live demonstration   </a:t>
+            </a:r>
+            <a:pPr indent="0" marL="0">
+              <a:buNone/>
+            </a:pPr>
+            <a:r>
+              <a:rPr lang="en-US" sz="1400" dirty="0">
+                <a:solidFill>
+                  <a:srgbClr val="1D2B2A"/>
+                </a:solidFill>
+                <a:latin typeface="Calibri" pitchFamily="34" charset="0"/>
+                <a:ea typeface="Calibri" pitchFamily="34" charset="-122"/>
+                <a:cs typeface="Calibri" pitchFamily="34" charset="-120"/>
+              </a:rPr>
+              <a:t>Staff console, digital banking, assistant</a:t>
+            </a:r>
+            <a:endParaRPr lang="en-US" sz="1400" dirty="0"/>
+          </a:p>
+        </p:txBody>
+      </p:sp>
+      <p:sp>
+        <p:nvSpPr>
+          <p:cNvPr id="22" name="Shape 20"/>
+          <p:cNvSpPr/>
+          <p:nvPr/>
+        </p:nvSpPr>
+        <p:spPr>
+          <a:xfrm>
+            <a:off x="548640" y="4251960"/>
+            <a:ext cx="384048" cy="384048"/>
+          </a:xfrm>
+          <a:prstGeom prst="ellipse">
+            <a:avLst/>
+          </a:prstGeom>
+          <a:solidFill>
+            <a:srgbClr val="B8862F"/>
+          </a:solidFill>
+          <a:ln/>
+        </p:spPr>
+      </p:sp>
+      <p:sp>
+        <p:nvSpPr>
+          <p:cNvPr id="23" name="Text 21"/>
+          <p:cNvSpPr txBox="1"/>
+          <p:nvPr/>
+        </p:nvSpPr>
+        <p:spPr>
+          <a:xfrm>
+            <a:off x="548640" y="4251960"/>
+            <a:ext cx="384048" cy="384048"/>
+          </a:xfrm>
+          <a:prstGeom prst="rect">
+            <a:avLst/>
+          </a:prstGeom>
+          <a:noFill/>
+          <a:ln/>
+        </p:spPr>
+        <p:txBody>
+          <a:bodyPr wrap="square" lIns="0" tIns="0" rIns="0" bIns="0" rtlCol="0" anchor="ctr"/>
+          <a:lstStyle/>
+          <a:p>
+            <a:pPr algn="ctr" indent="0" marL="0">
+              <a:buNone/>
+            </a:pPr>
+            <a:r>
+              <a:rPr lang="en-US" sz="1400" b="1" dirty="0">
+                <a:solidFill>
+                  <a:srgbClr val="FFFFFF"/>
+                </a:solidFill>
+                <a:latin typeface="Cambria" pitchFamily="34" charset="0"/>
+                <a:ea typeface="Cambria" pitchFamily="34" charset="-122"/>
+                <a:cs typeface="Cambria" pitchFamily="34" charset="-120"/>
+              </a:rPr>
+              <a:t>7</a:t>
+            </a:r>
+            <a:endParaRPr lang="en-US" sz="1400" dirty="0"/>
+          </a:p>
+        </p:txBody>
+      </p:sp>
+      <p:sp>
+        <p:nvSpPr>
+          <p:cNvPr id="24" name="Text 22"/>
+          <p:cNvSpPr txBox="1"/>
+          <p:nvPr/>
+        </p:nvSpPr>
+        <p:spPr>
+          <a:xfrm>
+            <a:off x="1097280" y="4251960"/>
+            <a:ext cx="7589520" cy="384048"/>
+          </a:xfrm>
+          <a:prstGeom prst="rect">
+            <a:avLst/>
+          </a:prstGeom>
+          <a:noFill/>
+          <a:ln/>
+        </p:spPr>
+        <p:txBody>
+          <a:bodyPr wrap="square" lIns="0" tIns="0" rIns="0" bIns="0" rtlCol="0" anchor="ctr"/>
+          <a:lstStyle/>
+          <a:p>
+            <a:pPr indent="0" marL="0">
+              <a:buNone/>
+            </a:pPr>
+            <a:r>
+              <a:rPr lang="en-US" sz="1400" b="1" dirty="0">
+                <a:solidFill>
+                  <a:srgbClr val="0B4F4A"/>
+                </a:solidFill>
+                <a:latin typeface="Calibri" pitchFamily="34" charset="0"/>
+                <a:ea typeface="Calibri" pitchFamily="34" charset="-122"/>
+                <a:cs typeface="Calibri" pitchFamily="34" charset="-120"/>
+              </a:rPr>
+              <a:t>Limits   </a:t>
+            </a:r>
+            <a:pPr indent="0" marL="0">
+              <a:buNone/>
+            </a:pPr>
+            <a:r>
+              <a:rPr lang="en-US" sz="1400" dirty="0">
+                <a:solidFill>
+                  <a:srgbClr val="1D2B2A"/>
+                </a:solidFill>
+                <a:latin typeface="Calibri" pitchFamily="34" charset="0"/>
+                <a:ea typeface="Calibri" pitchFamily="34" charset="-122"/>
+                <a:cs typeface="Calibri" pitchFamily="34" charset="-120"/>
+              </a:rPr>
+              <a:t>What would change at a larger bank</a:t>
+            </a:r>
+            <a:endParaRPr lang="en-US" sz="1400" dirty="0"/>
+          </a:p>
+        </p:txBody>
+      </p:sp>
+    </p:spTree>
+  </p:cSld>
+  <p:clrMapOvr>
+    <a:masterClrMapping/>
+  </p:clrMapOvr>
+</p:sld>
+</file>
+
+<file path=ppt/slides/slide20.xml><?xml version="1.0" encoding="utf-8"?>
+<p:sld xmlns:a="http://schemas.openxmlformats.org/drawingml/2006/main" xmlns:r="http://schemas.openxmlformats.org/officeDocument/2006/relationships" xmlns:p="http://schemas.openxmlformats.org/presentationml/2006/main">
+  <p:cSld name="Slide 20">
+    <p:bg>
+      <p:bgPr>
+        <a:solidFill>
+          <a:srgbClr val="FFFFFF"/>
+        </a:solidFill>
+      </p:bgPr>
+    </p:bg>
+    <p:spTree>
+      <p:nvGrpSpPr>
+        <p:cNvPr id="1" name=""/>
+        <p:cNvGrpSpPr/>
+        <p:nvPr/>
+      </p:nvGrpSpPr>
+      <p:grpSpPr>
+        <a:xfrm>
+          <a:off x="0" y="0"/>
+          <a:ext cx="0" cy="0"/>
+          <a:chOff x="0" y="0"/>
+          <a:chExt cx="0" cy="0"/>
+        </a:xfrm>
+      </p:grpSpPr>
+      <p:sp>
+        <p:nvSpPr>
+          <p:cNvPr id="2" name="Text 0"/>
+          <p:cNvSpPr txBox="1"/>
+          <p:nvPr/>
+        </p:nvSpPr>
+        <p:spPr>
+          <a:xfrm>
+            <a:off x="457200" y="274320"/>
+            <a:ext cx="8229600" cy="548640"/>
+          </a:xfrm>
+          <a:prstGeom prst="rect">
+            <a:avLst/>
+          </a:prstGeom>
+          <a:noFill/>
+          <a:ln/>
+        </p:spPr>
+        <p:txBody>
+          <a:bodyPr wrap="square" lIns="0" tIns="0" rIns="0" bIns="0" rtlCol="0" anchor="ctr">
+            <a:normAutofit/>
+          </a:bodyPr>
+          <a:lstStyle/>
+          <a:p>
+            <a:pPr indent="0" marL="0">
+              <a:buNone/>
+            </a:pPr>
+            <a:r>
+              <a:rPr lang="en-US" sz="2200" b="1" dirty="0">
+                <a:solidFill>
+                  <a:srgbClr val="0B4F4A"/>
+                </a:solidFill>
+                <a:latin typeface="Cambria" pitchFamily="34" charset="0"/>
+                <a:ea typeface="Cambria" pitchFamily="34" charset="-122"/>
+                <a:cs typeface="Cambria" pitchFamily="34" charset="-120"/>
+              </a:rPr>
+              <a:t>Beyond the brief: saving and an assistant</a:t>
+            </a:r>
+            <a:endParaRPr lang="en-US" sz="2200" dirty="0"/>
+          </a:p>
+        </p:txBody>
+      </p:sp>
+      <p:sp>
+        <p:nvSpPr>
+          <p:cNvPr id="3" name="Text 1"/>
+          <p:cNvSpPr txBox="1"/>
+          <p:nvPr/>
+        </p:nvSpPr>
+        <p:spPr>
+          <a:xfrm>
+            <a:off x="457200" y="804672"/>
+            <a:ext cx="8229600" cy="320040"/>
+          </a:xfrm>
+          <a:prstGeom prst="rect">
+            <a:avLst/>
+          </a:prstGeom>
+          <a:noFill/>
+          <a:ln/>
+        </p:spPr>
+        <p:txBody>
+          <a:bodyPr wrap="square" lIns="0" tIns="0" rIns="0" bIns="0" rtlCol="0" anchor="ctr"/>
+          <a:lstStyle/>
+          <a:p>
+            <a:pPr indent="0" marL="0">
+              <a:buNone/>
+            </a:pPr>
+            <a:r>
+              <a:rPr lang="en-US" sz="1200" i="1" dirty="0">
+                <a:solidFill>
+                  <a:srgbClr val="5B6B69"/>
+                </a:solidFill>
+                <a:latin typeface="Calibri" pitchFamily="34" charset="0"/>
+                <a:ea typeface="Calibri" pitchFamily="34" charset="-122"/>
+                <a:cs typeface="Calibri" pitchFamily="34" charset="-120"/>
+              </a:rPr>
+              <a:t>Both are small class hierarchies, built like the model</a:t>
+            </a:r>
+            <a:endParaRPr lang="en-US" sz="1200" dirty="0"/>
+          </a:p>
+        </p:txBody>
+      </p:sp>
+      <p:sp>
+        <p:nvSpPr>
+          <p:cNvPr id="4" name="Shape 2"/>
+          <p:cNvSpPr/>
+          <p:nvPr/>
+        </p:nvSpPr>
+        <p:spPr>
+          <a:xfrm>
+            <a:off x="457200" y="1234440"/>
+            <a:ext cx="4023360" cy="3474720"/>
+          </a:xfrm>
+          <a:prstGeom prst="roundRect">
+            <a:avLst>
+              <a:gd name="adj" fmla="val 2105"/>
+            </a:avLst>
+          </a:prstGeom>
+          <a:solidFill>
+            <a:srgbClr val="E8F0EE"/>
+          </a:solidFill>
+          <a:ln w="12700">
+            <a:solidFill>
+              <a:srgbClr val="E8F0EE"/>
+            </a:solidFill>
+            <a:prstDash val="solid"/>
+          </a:ln>
+        </p:spPr>
+      </p:sp>
+      <p:sp>
+        <p:nvSpPr>
+          <p:cNvPr id="5" name="Text 3"/>
+          <p:cNvSpPr txBox="1"/>
+          <p:nvPr/>
+        </p:nvSpPr>
+        <p:spPr>
+          <a:xfrm>
+            <a:off x="640080" y="1371600"/>
+            <a:ext cx="3657600" cy="457200"/>
+          </a:xfrm>
+          <a:prstGeom prst="rect">
+            <a:avLst/>
+          </a:prstGeom>
+          <a:noFill/>
+          <a:ln/>
+        </p:spPr>
+        <p:txBody>
+          <a:bodyPr wrap="square" lIns="0" tIns="0" rIns="0" bIns="0" rtlCol="0" anchor="ctr"/>
+          <a:lstStyle/>
+          <a:p>
+            <a:pPr indent="0" marL="0">
+              <a:buNone/>
+            </a:pPr>
+            <a:r>
+              <a:rPr lang="en-US" sz="1600" b="1" dirty="0">
+                <a:solidFill>
+                  <a:srgbClr val="0B4F4A"/>
+                </a:solidFill>
+                <a:latin typeface="Cambria" pitchFamily="34" charset="0"/>
+                <a:ea typeface="Cambria" pitchFamily="34" charset="-122"/>
+                <a:cs typeface="Cambria" pitchFamily="34" charset="-120"/>
+              </a:rPr>
+              <a:t>Save and load the whole bank (JSON)</a:t>
+            </a:r>
+            <a:endParaRPr lang="en-US" sz="1600" dirty="0"/>
+          </a:p>
+        </p:txBody>
+      </p:sp>
+      <p:sp>
+        <p:nvSpPr>
+          <p:cNvPr id="6" name="Text 4"/>
+          <p:cNvSpPr txBox="1"/>
+          <p:nvPr/>
+        </p:nvSpPr>
+        <p:spPr>
+          <a:xfrm>
+            <a:off x="594360" y="1920240"/>
+            <a:ext cx="3749040" cy="2651760"/>
+          </a:xfrm>
+          <a:prstGeom prst="rect">
+            <a:avLst/>
+          </a:prstGeom>
+          <a:noFill/>
+          <a:ln/>
+        </p:spPr>
+        <p:txBody>
+          <a:bodyPr wrap="square" lIns="635" tIns="635" rIns="635" bIns="635" rtlCol="0" anchor="t"/>
+          <a:lstStyle/>
+          <a:p>
+            <a:pPr marL="342900" indent="-342900">
+              <a:spcAft>
+                <a:spcPts val="600"/>
+              </a:spcAft>
+              <a:buSzPct val="100000"/>
+              <a:buChar char="•"/>
+            </a:pPr>
+            <a:r>
+              <a:rPr lang="en-US" sz="1300" dirty="0">
+                <a:solidFill>
+                  <a:srgbClr val="1D2B2A"/>
+                </a:solidFill>
+                <a:latin typeface="Calibri" pitchFamily="34" charset="0"/>
+                <a:ea typeface="Calibri" pitchFamily="34" charset="-122"/>
+                <a:cs typeface="Calibri" pitchFamily="34" charset="-120"/>
+              </a:rPr>
+              <a:t>Repository (abstract): the JSON format, save() / load()</a:t>
+            </a:r>
+            <a:endParaRPr lang="en-US" sz="1300" dirty="0"/>
+          </a:p>
+          <a:p>
+            <a:pPr marL="342900" indent="-342900">
+              <a:spcAft>
+                <a:spcPts val="600"/>
+              </a:spcAft>
+              <a:buSzPct val="100000"/>
+              <a:buChar char="•"/>
+            </a:pPr>
+            <a:r>
+              <a:rPr lang="en-US" sz="1300" dirty="0">
+                <a:solidFill>
+                  <a:srgbClr val="1D2B2A"/>
+                </a:solidFill>
+                <a:latin typeface="Calibri" pitchFamily="34" charset="0"/>
+                <a:ea typeface="Calibri" pitchFamily="34" charset="-122"/>
+                <a:cs typeface="Calibri" pitchFamily="34" charset="-120"/>
+              </a:rPr>
+              <a:t>JsonFileRepository and MemoryRepository only decide where</a:t>
+            </a:r>
+            <a:endParaRPr lang="en-US" sz="1300" dirty="0"/>
+          </a:p>
+          <a:p>
+            <a:pPr marL="342900" indent="-342900">
+              <a:spcAft>
+                <a:spcPts val="600"/>
+              </a:spcAft>
+              <a:buSzPct val="100000"/>
+              <a:buChar char="•"/>
+            </a:pPr>
+            <a:r>
+              <a:rPr lang="en-US" sz="1300" dirty="0">
+                <a:solidFill>
+                  <a:srgbClr val="1D2B2A"/>
+                </a:solidFill>
+                <a:latin typeface="Calibri" pitchFamily="34" charset="0"/>
+                <a:ea typeface="Calibri" pitchFamily="34" charset="-122"/>
+                <a:cs typeface="Calibri" pitchFamily="34" charset="-120"/>
+              </a:rPr>
+              <a:t>Links saved as references; an exact round trip of 1,375 objects</a:t>
+            </a:r>
+            <a:endParaRPr lang="en-US" sz="1300" dirty="0"/>
+          </a:p>
+          <a:p>
+            <a:pPr marL="342900" indent="-342900">
+              <a:spcAft>
+                <a:spcPts val="600"/>
+              </a:spcAft>
+              <a:buSzPct val="100000"/>
+              <a:buChar char="•"/>
+            </a:pPr>
+            <a:r>
+              <a:rPr lang="en-US" sz="1300" dirty="0">
+                <a:solidFill>
+                  <a:srgbClr val="1D2B2A"/>
+                </a:solidFill>
+                <a:latin typeface="Calibri" pitchFamily="34" charset="0"/>
+                <a:ea typeface="Calibri" pitchFamily="34" charset="-122"/>
+                <a:cs typeface="Calibri" pitchFamily="34" charset="-120"/>
+              </a:rPr>
+              <a:t>JSON written and read by the model's own Json and JsonReader</a:t>
+            </a:r>
+            <a:endParaRPr lang="en-US" sz="1300" dirty="0"/>
+          </a:p>
+        </p:txBody>
+      </p:sp>
+      <p:sp>
+        <p:nvSpPr>
+          <p:cNvPr id="7" name="Shape 5"/>
+          <p:cNvSpPr/>
+          <p:nvPr/>
+        </p:nvSpPr>
+        <p:spPr>
+          <a:xfrm>
+            <a:off x="4663440" y="1234440"/>
+            <a:ext cx="4023360" cy="3474720"/>
+          </a:xfrm>
+          <a:prstGeom prst="roundRect">
+            <a:avLst>
+              <a:gd name="adj" fmla="val 2105"/>
+            </a:avLst>
+          </a:prstGeom>
+          <a:solidFill>
+            <a:srgbClr val="E8F0EE"/>
+          </a:solidFill>
+          <a:ln w="12700">
+            <a:solidFill>
+              <a:srgbClr val="E8F0EE"/>
+            </a:solidFill>
+            <a:prstDash val="solid"/>
+          </a:ln>
+        </p:spPr>
+      </p:sp>
+      <p:sp>
+        <p:nvSpPr>
+          <p:cNvPr id="8" name="Text 6"/>
+          <p:cNvSpPr txBox="1"/>
+          <p:nvPr/>
+        </p:nvSpPr>
+        <p:spPr>
+          <a:xfrm>
+            <a:off x="4846320" y="1371600"/>
+            <a:ext cx="3657600" cy="457200"/>
+          </a:xfrm>
+          <a:prstGeom prst="rect">
+            <a:avLst/>
+          </a:prstGeom>
+          <a:noFill/>
+          <a:ln/>
+        </p:spPr>
+        <p:txBody>
+          <a:bodyPr wrap="square" lIns="0" tIns="0" rIns="0" bIns="0" rtlCol="0" anchor="ctr"/>
+          <a:lstStyle/>
+          <a:p>
+            <a:pPr indent="0" marL="0">
+              <a:buNone/>
+            </a:pPr>
+            <a:r>
+              <a:rPr lang="en-US" sz="1600" b="1" dirty="0">
+                <a:solidFill>
+                  <a:srgbClr val="0B4F4A"/>
+                </a:solidFill>
+                <a:latin typeface="Cambria" pitchFamily="34" charset="0"/>
+                <a:ea typeface="Cambria" pitchFamily="34" charset="-122"/>
+                <a:cs typeface="Cambria" pitchFamily="34" charset="-120"/>
+              </a:rPr>
+              <a:t>AI assistant (optional)</a:t>
+            </a:r>
+            <a:endParaRPr lang="en-US" sz="1600" dirty="0"/>
+          </a:p>
+        </p:txBody>
+      </p:sp>
+      <p:sp>
+        <p:nvSpPr>
+          <p:cNvPr id="9" name="Text 7"/>
+          <p:cNvSpPr txBox="1"/>
+          <p:nvPr/>
+        </p:nvSpPr>
+        <p:spPr>
+          <a:xfrm>
+            <a:off x="4800600" y="1920240"/>
+            <a:ext cx="3749040" cy="2651760"/>
+          </a:xfrm>
+          <a:prstGeom prst="rect">
+            <a:avLst/>
+          </a:prstGeom>
+          <a:noFill/>
+          <a:ln/>
+        </p:spPr>
+        <p:txBody>
+          <a:bodyPr wrap="square" lIns="635" tIns="635" rIns="635" bIns="635" rtlCol="0" anchor="t"/>
+          <a:lstStyle/>
+          <a:p>
+            <a:pPr marL="342900" indent="-342900">
+              <a:spcAft>
+                <a:spcPts val="600"/>
+              </a:spcAft>
+              <a:buSzPct val="100000"/>
+              <a:buChar char="•"/>
+            </a:pPr>
+            <a:r>
+              <a:rPr lang="en-US" sz="1300" dirty="0">
+                <a:solidFill>
+                  <a:srgbClr val="1D2B2A"/>
+                </a:solidFill>
+                <a:latin typeface="Calibri" pitchFamily="34" charset="0"/>
+                <a:ea typeface="Calibri" pitchFamily="34" charset="-122"/>
+                <a:cs typeface="Calibri" pitchFamily="34" charset="-120"/>
+              </a:rPr>
+              <a:t>Assistant -&gt; OfflineAssistant -&gt; ClaudeAssistant</a:t>
+            </a:r>
+            <a:endParaRPr lang="en-US" sz="1300" dirty="0"/>
+          </a:p>
+          <a:p>
+            <a:pPr marL="342900" indent="-342900">
+              <a:spcAft>
+                <a:spcPts val="600"/>
+              </a:spcAft>
+              <a:buSzPct val="100000"/>
+              <a:buChar char="•"/>
+            </a:pPr>
+            <a:r>
+              <a:rPr lang="en-US" sz="1300" dirty="0">
+                <a:solidFill>
+                  <a:srgbClr val="1D2B2A"/>
+                </a:solidFill>
+                <a:latin typeface="Calibri" pitchFamily="34" charset="0"/>
+                <a:ea typeface="Calibri" pitchFamily="34" charset="-122"/>
+                <a:cs typeface="Calibri" pitchFamily="34" charset="-120"/>
+              </a:rPr>
+              <a:t>Answers from the records; prepares a form, never runs it</a:t>
+            </a:r>
+            <a:endParaRPr lang="en-US" sz="1300" dirty="0"/>
+          </a:p>
+          <a:p>
+            <a:pPr marL="342900" indent="-342900">
+              <a:spcAft>
+                <a:spcPts val="600"/>
+              </a:spcAft>
+              <a:buSzPct val="100000"/>
+              <a:buChar char="•"/>
+            </a:pPr>
+            <a:r>
+              <a:rPr lang="en-US" sz="1300" dirty="0">
+                <a:solidFill>
+                  <a:srgbClr val="1D2B2A"/>
+                </a:solidFill>
+                <a:latin typeface="Calibri" pitchFamily="34" charset="0"/>
+                <a:ea typeface="Calibri" pitchFamily="34" charset="-122"/>
+                <a:cs typeface="Calibri" pitchFamily="34" charset="-120"/>
+              </a:rPr>
+              <a:t>Works offline; Claude only sees the facts it needs</a:t>
+            </a:r>
+            <a:endParaRPr lang="en-US" sz="1300" dirty="0"/>
+          </a:p>
+        </p:txBody>
+      </p:sp>
+    </p:spTree>
+  </p:cSld>
+  <p:clrMapOvr>
+    <a:masterClrMapping/>
+  </p:clrMapOvr>
+</p:sld>
+</file>
+
+<file path=ppt/slides/slide21.xml><?xml version="1.0" encoding="utf-8"?>
+<p:sld xmlns:a="http://schemas.openxmlformats.org/drawingml/2006/main" xmlns:r="http://schemas.openxmlformats.org/officeDocument/2006/relationships" xmlns:p="http://schemas.openxmlformats.org/presentationml/2006/main">
+  <p:cSld name="Slide 21">
+    <p:bg>
+      <p:bgPr>
+        <a:solidFill>
+          <a:srgbClr val="FFFFFF"/>
+        </a:solidFill>
+      </p:bgPr>
+    </p:bg>
+    <p:spTree>
+      <p:nvGrpSpPr>
+        <p:cNvPr id="1" name=""/>
+        <p:cNvGrpSpPr/>
+        <p:nvPr/>
+      </p:nvGrpSpPr>
+      <p:grpSpPr>
+        <a:xfrm>
+          <a:off x="0" y="0"/>
+          <a:ext cx="0" cy="0"/>
+          <a:chOff x="0" y="0"/>
+          <a:chExt cx="0" cy="0"/>
+        </a:xfrm>
+      </p:grpSpPr>
+      <p:sp>
+        <p:nvSpPr>
+          <p:cNvPr id="2" name="Text 0"/>
+          <p:cNvSpPr txBox="1"/>
+          <p:nvPr/>
+        </p:nvSpPr>
+        <p:spPr>
+          <a:xfrm>
+            <a:off x="457200" y="274320"/>
+            <a:ext cx="8229600" cy="548640"/>
+          </a:xfrm>
+          <a:prstGeom prst="rect">
+            <a:avLst/>
+          </a:prstGeom>
+          <a:noFill/>
+          <a:ln/>
+        </p:spPr>
+        <p:txBody>
+          <a:bodyPr wrap="square" lIns="0" tIns="0" rIns="0" bIns="0" rtlCol="0" anchor="ctr">
+            <a:normAutofit/>
+          </a:bodyPr>
+          <a:lstStyle/>
+          <a:p>
+            <a:pPr indent="0" marL="0">
+              <a:buNone/>
+            </a:pPr>
+            <a:r>
+              <a:rPr lang="en-US" sz="2200" b="1" dirty="0">
+                <a:solidFill>
+                  <a:srgbClr val="0B4F4A"/>
+                </a:solidFill>
+                <a:latin typeface="Cambria" pitchFamily="34" charset="0"/>
+                <a:ea typeface="Cambria" pitchFamily="34" charset="-122"/>
+                <a:cs typeface="Cambria" pitchFamily="34" charset="-120"/>
+              </a:rPr>
+              <a:t>No libraries: the building blocks are classes too</a:t>
+            </a:r>
+            <a:endParaRPr lang="en-US" sz="2200" dirty="0"/>
+          </a:p>
+        </p:txBody>
+      </p:sp>
+      <p:sp>
+        <p:nvSpPr>
+          <p:cNvPr id="3" name="Text 1"/>
+          <p:cNvSpPr txBox="1"/>
+          <p:nvPr/>
+        </p:nvSpPr>
+        <p:spPr>
+          <a:xfrm>
+            <a:off x="457200" y="804672"/>
+            <a:ext cx="8229600" cy="320040"/>
+          </a:xfrm>
+          <a:prstGeom prst="rect">
+            <a:avLst/>
+          </a:prstGeom>
+          <a:noFill/>
+          <a:ln/>
+        </p:spPr>
+        <p:txBody>
+          <a:bodyPr wrap="square" lIns="0" tIns="0" rIns="0" bIns="0" rtlCol="0" anchor="ctr"/>
+          <a:lstStyle/>
+          <a:p>
+            <a:pPr indent="0" marL="0">
+              <a:buNone/>
+            </a:pPr>
+            <a:r>
+              <a:rPr lang="en-US" sz="1200" i="1" dirty="0">
+                <a:solidFill>
+                  <a:srgbClr val="5B6B69"/>
+                </a:solidFill>
+                <a:latin typeface="Calibri" pitchFamily="34" charset="0"/>
+                <a:ea typeface="Calibri" pitchFamily="34" charset="-122"/>
+                <a:cs typeface="Calibri" pitchFamily="34" charset="-120"/>
+              </a:rPr>
               <a:t>banking_system.py imports only sys; a test reads the file's own source to prove it</a:t>
             </a:r>
             <a:endParaRPr lang="en-US" sz="1200" dirty="0"/>
@@ -9458,7 +11593,7 @@
       </p:sp>
       <p:graphicFrame>
         <p:nvGraphicFramePr>
-          <p:cNvPr id="20" name="Table 0"/>
+          <p:cNvPr id="22" name="Table 0"/>
           <p:cNvGraphicFramePr>
             <a:graphicFrameLocks noGrp="1"/>
           </p:cNvGraphicFramePr>
@@ -10671,9 +12806,9 @@
 </p:sld>
 </file>
 
-<file path=ppt/slides/slide2.xml><?xml version="1.0" encoding="utf-8"?>
+<file path=ppt/slides/slide22.xml><?xml version="1.0" encoding="utf-8"?>
 <p:sld xmlns:a="http://schemas.openxmlformats.org/drawingml/2006/main" xmlns:r="http://schemas.openxmlformats.org/officeDocument/2006/relationships" xmlns:p="http://schemas.openxmlformats.org/presentationml/2006/main">
-  <p:cSld name="Slide 2">
+  <p:cSld name="Slide 22">
     <p:bg>
       <p:bgPr>
         <a:solidFill>
@@ -10722,7 +12857,7 @@
               <a:buNone/>
             </a:pPr>
             <a:r>
-              <a:rPr lang="en-US" sz="2800" b="1" dirty="0">
+              <a:rPr lang="en-US" sz="2200" b="1" dirty="0">
                 <a:solidFill>
                   <a:srgbClr val="0B4F4A"/>
                 </a:solidFill>
@@ -10730,9 +12865,9 @@
                 <a:ea typeface="Cambria" pitchFamily="34" charset="-122"/>
                 <a:cs typeface="Cambria" pitchFamily="34" charset="-120"/>
               </a:rPr>
-              <a:t>What I will show, in order</a:t>
-            </a:r>
-            <a:endParaRPr lang="en-US" sz="2800" dirty="0"/>
+              <a:t>Live demo: staff console and digital banking</a:t>
+            </a:r>
+            <a:endParaRPr lang="en-US" sz="2200" dirty="0"/>
           </a:p>
         </p:txBody>
       </p:sp>
@@ -10769,7 +12904,7 @@
                 <a:ea typeface="Calibri" pitchFamily="34" charset="-122"/>
                 <a:cs typeface="Calibri" pitchFamily="34" charset="-120"/>
               </a:rPr>
-              <a:t>About 19 minutes of slides, 7½ minutes of live demonstration, then questions</a:t>
+              <a:t>banking_gui.py - Python and Tkinter only; every button calls one Bank operation</a:t>
             </a:r>
             <a:endParaRPr lang="en-US" sz="1200" dirty="0"/>
           </a:p>
@@ -10783,97 +12918,100 @@
         </p:nvSpPr>
         <p:spPr>
           <a:xfrm>
-            <a:off x="548640" y="1234440"/>
-            <a:ext cx="384048" cy="384048"/>
-          </a:xfrm>
-          <a:prstGeom prst="ellipse">
-            <a:avLst/>
+            <a:off x="457200" y="1188720"/>
+            <a:ext cx="5577840" cy="3611880"/>
+          </a:xfrm>
+          <a:prstGeom prst="roundRect">
+            <a:avLst>
+              <a:gd name="adj" fmla="val 2025"/>
+            </a:avLst>
           </a:prstGeom>
           <a:solidFill>
-            <a:srgbClr val="B8862F"/>
+            <a:srgbClr val="F4F8F7"/>
           </a:solidFill>
-          <a:ln/>
-        </p:spPr>
-      </p:sp>
-      <p:sp>
-        <p:nvSpPr>
-          <p:cNvPr id="5" name="Text 3"/>
-          <p:cNvSpPr txBox="1"/>
-          <p:nvPr/>
-        </p:nvSpPr>
-        <p:spPr>
-          <a:xfrm>
-            <a:off x="548640" y="1234440"/>
-            <a:ext cx="384048" cy="384048"/>
-          </a:xfrm>
-          <a:prstGeom prst="rect">
-            <a:avLst/>
-          </a:prstGeom>
-          <a:noFill/>
-          <a:ln/>
-        </p:spPr>
-        <p:txBody>
-          <a:bodyPr wrap="square" lIns="0" tIns="0" rIns="0" bIns="0" rtlCol="0" anchor="ctr"/>
-          <a:lstStyle/>
-          <a:p>
-            <a:pPr algn="ctr" indent="0" marL="0">
-              <a:buNone/>
-            </a:pPr>
-            <a:r>
-              <a:rPr lang="en-US" sz="1400" b="1" dirty="0">
-                <a:solidFill>
-                  <a:srgbClr val="FFFFFF"/>
-                </a:solidFill>
-                <a:latin typeface="Cambria" pitchFamily="34" charset="0"/>
-                <a:ea typeface="Cambria" pitchFamily="34" charset="-122"/>
-                <a:cs typeface="Cambria" pitchFamily="34" charset="-120"/>
-              </a:rPr>
-              <a:t>1</a:t>
-            </a:r>
-            <a:endParaRPr lang="en-US" sz="1400" dirty="0"/>
-          </a:p>
-        </p:txBody>
-      </p:sp>
-      <p:sp>
-        <p:nvSpPr>
-          <p:cNvPr id="6" name="Text 4"/>
-          <p:cNvSpPr txBox="1"/>
-          <p:nvPr/>
-        </p:nvSpPr>
-        <p:spPr>
-          <a:xfrm>
-            <a:off x="1097280" y="1234440"/>
-            <a:ext cx="7589520" cy="384048"/>
-          </a:xfrm>
-          <a:prstGeom prst="rect">
-            <a:avLst/>
-          </a:prstGeom>
-          <a:noFill/>
-          <a:ln/>
-        </p:spPr>
-        <p:txBody>
-          <a:bodyPr wrap="square" lIns="0" tIns="0" rIns="0" bIns="0" rtlCol="0" anchor="ctr"/>
-          <a:lstStyle/>
-          <a:p>
-            <a:pPr indent="0" marL="0">
-              <a:buNone/>
-            </a:pPr>
-            <a:r>
-              <a:rPr lang="en-US" sz="1400" b="1" dirty="0">
-                <a:solidFill>
-                  <a:srgbClr val="0B4F4A"/>
+          <a:ln w="12700">
+            <a:solidFill>
+              <a:srgbClr val="F4F8F7"/>
+            </a:solidFill>
+            <a:prstDash val="solid"/>
+          </a:ln>
+        </p:spPr>
+      </p:sp>
+      <p:pic>
+        <p:nvPicPr>
+          <p:cNvPr id="5" name="Image 0" descr="/home/user/commercial-banking/docs/screenshots/gui_02_overview.png">    </p:cNvPr>
+          <p:cNvPicPr>
+            <a:picLocks noChangeAspect="1"/>
+          </p:cNvPicPr>
+          <p:nvPr/>
+        </p:nvPicPr>
+        <p:blipFill>
+          <a:blip r:embed="rId1"/>
+          <a:stretch>
+            <a:fillRect/>
+          </a:stretch>
+        </p:blipFill>
+        <p:spPr>
+          <a:xfrm>
+            <a:off x="548640" y="1280160"/>
+            <a:ext cx="5394960" cy="3291840"/>
+          </a:xfrm>
+          <a:prstGeom prst="rect">
+            <a:avLst/>
+          </a:prstGeom>
+        </p:spPr>
+      </p:pic>
+      <p:sp>
+        <p:nvSpPr>
+          <p:cNvPr id="6" name="Text 3"/>
+          <p:cNvSpPr txBox="1"/>
+          <p:nvPr/>
+        </p:nvSpPr>
+        <p:spPr>
+          <a:xfrm>
+            <a:off x="6263640" y="1234440"/>
+            <a:ext cx="2468880" cy="3566160"/>
+          </a:xfrm>
+          <a:prstGeom prst="rect">
+            <a:avLst/>
+          </a:prstGeom>
+          <a:noFill/>
+          <a:ln/>
+        </p:spPr>
+        <p:txBody>
+          <a:bodyPr wrap="square" lIns="635" tIns="635" rIns="635" bIns="635" rtlCol="0" anchor="t"/>
+          <a:lstStyle/>
+          <a:p>
+            <a:pPr marL="342900" indent="-342900">
+              <a:spcAft>
+                <a:spcPts val="600"/>
+              </a:spcAft>
+              <a:buSzPct val="100000"/>
+              <a:buChar char="•"/>
+            </a:pPr>
+            <a:r>
+              <a:rPr lang="en-US" sz="1200" dirty="0">
+                <a:solidFill>
+                  <a:srgbClr val="1D2B2A"/>
                 </a:solidFill>
                 <a:latin typeface="Calibri" pitchFamily="34" charset="0"/>
                 <a:ea typeface="Calibri" pitchFamily="34" charset="-122"/>
                 <a:cs typeface="Calibri" pitchFamily="34" charset="-120"/>
               </a:rPr>
-              <a:t>Research   </a:t>
-            </a:r>
-            <a:pPr indent="0" marL="0">
-              <a:buNone/>
-            </a:pPr>
-            <a:r>
-              <a:rPr lang="en-US" sz="1400" dirty="0">
+              <a:t>Sign in as staff or as a customer; the model checks that person's authority</a:t>
+            </a:r>
+            <a:endParaRPr lang="en-US" sz="1200" dirty="0"/>
+          </a:p>
+          <a:p>
+            <a:pPr marL="342900" indent="-342900">
+              <a:spcAft>
+                <a:spcPts val="600"/>
+              </a:spcAft>
+              <a:buSzPct val="100000"/>
+              <a:buChar char="•"/>
+            </a:pPr>
+            <a:r>
+              <a:rPr lang="en-US" sz="1200" dirty="0">
                 <a:solidFill>
                   <a:srgbClr val="1D2B2A"/>
                 </a:solidFill>
@@ -10881,111 +13019,41 @@
                 <a:ea typeface="Calibri" pitchFamily="34" charset="-122"/>
                 <a:cs typeface="Calibri" pitchFamily="34" charset="-120"/>
               </a:rPr>
-              <a:t>What I studied and how it changed the design</a:t>
-            </a:r>
-            <a:endParaRPr lang="en-US" sz="1400" dirty="0"/>
-          </a:p>
-        </p:txBody>
-      </p:sp>
-      <p:sp>
-        <p:nvSpPr>
-          <p:cNvPr id="7" name="Shape 5"/>
-          <p:cNvSpPr/>
-          <p:nvPr/>
-        </p:nvSpPr>
-        <p:spPr>
-          <a:xfrm>
-            <a:off x="548640" y="1737360"/>
-            <a:ext cx="384048" cy="384048"/>
-          </a:xfrm>
-          <a:prstGeom prst="ellipse">
-            <a:avLst/>
-          </a:prstGeom>
-          <a:solidFill>
-            <a:srgbClr val="B8862F"/>
-          </a:solidFill>
-          <a:ln/>
-        </p:spPr>
-      </p:sp>
-      <p:sp>
-        <p:nvSpPr>
-          <p:cNvPr id="8" name="Text 6"/>
-          <p:cNvSpPr txBox="1"/>
-          <p:nvPr/>
-        </p:nvSpPr>
-        <p:spPr>
-          <a:xfrm>
-            <a:off x="548640" y="1737360"/>
-            <a:ext cx="384048" cy="384048"/>
-          </a:xfrm>
-          <a:prstGeom prst="rect">
-            <a:avLst/>
-          </a:prstGeom>
-          <a:noFill/>
-          <a:ln/>
-        </p:spPr>
-        <p:txBody>
-          <a:bodyPr wrap="square" lIns="0" tIns="0" rIns="0" bIns="0" rtlCol="0" anchor="ctr"/>
-          <a:lstStyle/>
-          <a:p>
-            <a:pPr algn="ctr" indent="0" marL="0">
-              <a:buNone/>
-            </a:pPr>
-            <a:r>
-              <a:rPr lang="en-US" sz="1400" b="1" dirty="0">
-                <a:solidFill>
-                  <a:srgbClr val="FFFFFF"/>
-                </a:solidFill>
-                <a:latin typeface="Cambria" pitchFamily="34" charset="0"/>
-                <a:ea typeface="Cambria" pitchFamily="34" charset="-122"/>
-                <a:cs typeface="Cambria" pitchFamily="34" charset="-120"/>
-              </a:rPr>
-              <a:t>2</a:t>
-            </a:r>
-            <a:endParaRPr lang="en-US" sz="1400" dirty="0"/>
-          </a:p>
-        </p:txBody>
-      </p:sp>
-      <p:sp>
-        <p:nvSpPr>
-          <p:cNvPr id="9" name="Text 7"/>
-          <p:cNvSpPr txBox="1"/>
-          <p:nvPr/>
-        </p:nvSpPr>
-        <p:spPr>
-          <a:xfrm>
-            <a:off x="1097280" y="1737360"/>
-            <a:ext cx="7589520" cy="384048"/>
-          </a:xfrm>
-          <a:prstGeom prst="rect">
-            <a:avLst/>
-          </a:prstGeom>
-          <a:noFill/>
-          <a:ln/>
-        </p:spPr>
-        <p:txBody>
-          <a:bodyPr wrap="square" lIns="0" tIns="0" rIns="0" bIns="0" rtlCol="0" anchor="ctr"/>
-          <a:lstStyle/>
-          <a:p>
-            <a:pPr indent="0" marL="0">
-              <a:buNone/>
-            </a:pPr>
-            <a:r>
-              <a:rPr lang="en-US" sz="1400" b="1" dirty="0">
-                <a:solidFill>
-                  <a:srgbClr val="0B4F4A"/>
+              <a:t>Staff: forms list what your role may do and record you automatically</a:t>
+            </a:r>
+            <a:endParaRPr lang="en-US" sz="1200" dirty="0"/>
+          </a:p>
+          <a:p>
+            <a:pPr marL="342900" indent="-342900">
+              <a:spcAft>
+                <a:spcPts val="600"/>
+              </a:spcAft>
+              <a:buSzPct val="100000"/>
+              <a:buChar char="•"/>
+            </a:pPr>
+            <a:r>
+              <a:rPr lang="en-US" sz="1200" dirty="0">
+                <a:solidFill>
+                  <a:srgbClr val="1D2B2A"/>
                 </a:solidFill>
                 <a:latin typeface="Calibri" pitchFamily="34" charset="0"/>
                 <a:ea typeface="Calibri" pitchFamily="34" charset="-122"/>
                 <a:cs typeface="Calibri" pitchFamily="34" charset="-120"/>
               </a:rPr>
-              <a:t>Scale and core rule   </a:t>
-            </a:r>
-            <a:pPr indent="0" marL="0">
-              <a:buNone/>
-            </a:pPr>
-            <a:r>
-              <a:rPr lang="en-US" sz="1400" dirty="0">
+              <a:t>Digital banking: own accounts plus companies under a mandate; approvals, cards, disputes</a:t>
+            </a:r>
+            <a:endParaRPr lang="en-US" sz="1200" dirty="0"/>
+          </a:p>
+          <a:p>
+            <a:pPr marL="342900" indent="-342900">
+              <a:spcAft>
+                <a:spcPts val="600"/>
+              </a:spcAft>
+              <a:buSzPct val="100000"/>
+              <a:buChar char="•"/>
+            </a:pPr>
+            <a:r>
+              <a:rPr lang="en-US" sz="1200" dirty="0">
                 <a:solidFill>
                   <a:srgbClr val="1D2B2A"/>
                 </a:solidFill>
@@ -10993,569 +13061,30 @@
                 <a:ea typeface="Calibri" pitchFamily="34" charset="-122"/>
                 <a:cs typeface="Calibri" pitchFamily="34" charset="-120"/>
               </a:rPr>
-              <a:t>What the brief asks for, and "nothing is deleted"</a:t>
-            </a:r>
-            <a:endParaRPr lang="en-US" sz="1400" dirty="0"/>
-          </a:p>
-        </p:txBody>
-      </p:sp>
-      <p:sp>
-        <p:nvSpPr>
-          <p:cNvPr id="10" name="Shape 8"/>
-          <p:cNvSpPr/>
-          <p:nvPr/>
-        </p:nvSpPr>
-        <p:spPr>
-          <a:xfrm>
-            <a:off x="548640" y="2240280"/>
-            <a:ext cx="384048" cy="384048"/>
-          </a:xfrm>
-          <a:prstGeom prst="ellipse">
-            <a:avLst/>
-          </a:prstGeom>
-          <a:solidFill>
-            <a:srgbClr val="B8862F"/>
-          </a:solidFill>
-          <a:ln/>
-        </p:spPr>
-      </p:sp>
-      <p:sp>
-        <p:nvSpPr>
-          <p:cNvPr id="11" name="Text 9"/>
-          <p:cNvSpPr txBox="1"/>
-          <p:nvPr/>
-        </p:nvSpPr>
-        <p:spPr>
-          <a:xfrm>
-            <a:off x="548640" y="2240280"/>
-            <a:ext cx="384048" cy="384048"/>
-          </a:xfrm>
-          <a:prstGeom prst="rect">
-            <a:avLst/>
-          </a:prstGeom>
-          <a:noFill/>
-          <a:ln/>
-        </p:spPr>
-        <p:txBody>
-          <a:bodyPr wrap="square" lIns="0" tIns="0" rIns="0" bIns="0" rtlCol="0" anchor="ctr"/>
-          <a:lstStyle/>
-          <a:p>
-            <a:pPr algn="ctr" indent="0" marL="0">
-              <a:buNone/>
-            </a:pPr>
-            <a:r>
-              <a:rPr lang="en-US" sz="1400" b="1" dirty="0">
-                <a:solidFill>
-                  <a:srgbClr val="FFFFFF"/>
-                </a:solidFill>
-                <a:latin typeface="Cambria" pitchFamily="34" charset="0"/>
-                <a:ea typeface="Cambria" pitchFamily="34" charset="-122"/>
-                <a:cs typeface="Cambria" pitchFamily="34" charset="-120"/>
-              </a:rPr>
-              <a:t>3</a:t>
-            </a:r>
-            <a:endParaRPr lang="en-US" sz="1400" dirty="0"/>
-          </a:p>
-        </p:txBody>
-      </p:sp>
-      <p:sp>
-        <p:nvSpPr>
-          <p:cNvPr id="12" name="Text 10"/>
-          <p:cNvSpPr txBox="1"/>
-          <p:nvPr/>
-        </p:nvSpPr>
-        <p:spPr>
-          <a:xfrm>
-            <a:off x="1097280" y="2240280"/>
-            <a:ext cx="7589520" cy="384048"/>
-          </a:xfrm>
-          <a:prstGeom prst="rect">
-            <a:avLst/>
-          </a:prstGeom>
-          <a:noFill/>
-          <a:ln/>
-        </p:spPr>
-        <p:txBody>
-          <a:bodyPr wrap="square" lIns="0" tIns="0" rIns="0" bIns="0" rtlCol="0" anchor="ctr"/>
-          <a:lstStyle/>
-          <a:p>
-            <a:pPr indent="0" marL="0">
-              <a:buNone/>
-            </a:pPr>
-            <a:r>
-              <a:rPr lang="en-US" sz="1400" b="1" dirty="0">
-                <a:solidFill>
-                  <a:srgbClr val="0B4F4A"/>
+              <a:t>80 forms and 14 guided checks cover every workflow in the brief</a:t>
+            </a:r>
+            <a:endParaRPr lang="en-US" sz="1200" dirty="0"/>
+          </a:p>
+          <a:p>
+            <a:pPr marL="342900" indent="-342900">
+              <a:spcAft>
+                <a:spcPts val="600"/>
+              </a:spcAft>
+              <a:buSzPct val="100000"/>
+              <a:buChar char="•"/>
+            </a:pPr>
+            <a:r>
+              <a:rPr lang="en-US" sz="1200" dirty="0">
+                <a:solidFill>
+                  <a:srgbClr val="1D2B2A"/>
                 </a:solidFill>
                 <a:latin typeface="Calibri" pitchFamily="34" charset="0"/>
                 <a:ea typeface="Calibri" pitchFamily="34" charset="-122"/>
                 <a:cs typeface="Calibri" pitchFamily="34" charset="-120"/>
               </a:rPr>
-              <a:t>Class model   </a:t>
-            </a:r>
-            <a:pPr indent="0" marL="0">
-              <a:buNone/>
-            </a:pPr>
-            <a:r>
-              <a:rPr lang="en-US" sz="1400" dirty="0">
-                <a:solidFill>
-                  <a:srgbClr val="1D2B2A"/>
-                </a:solidFill>
-                <a:latin typeface="Calibri" pitchFamily="34" charset="0"/>
-                <a:ea typeface="Calibri" pitchFamily="34" charset="-122"/>
-                <a:cs typeface="Calibri" pitchFamily="34" charset="-120"/>
-              </a:rPr>
-              <a:t>The four hierarchies, level by level</a:t>
-            </a:r>
-            <a:endParaRPr lang="en-US" sz="1400" dirty="0"/>
-          </a:p>
-        </p:txBody>
-      </p:sp>
-      <p:sp>
-        <p:nvSpPr>
-          <p:cNvPr id="13" name="Shape 11"/>
-          <p:cNvSpPr/>
-          <p:nvPr/>
-        </p:nvSpPr>
-        <p:spPr>
-          <a:xfrm>
-            <a:off x="548640" y="2743200"/>
-            <a:ext cx="384048" cy="384048"/>
-          </a:xfrm>
-          <a:prstGeom prst="ellipse">
-            <a:avLst/>
-          </a:prstGeom>
-          <a:solidFill>
-            <a:srgbClr val="B8862F"/>
-          </a:solidFill>
-          <a:ln/>
-        </p:spPr>
-      </p:sp>
-      <p:sp>
-        <p:nvSpPr>
-          <p:cNvPr id="14" name="Text 12"/>
-          <p:cNvSpPr txBox="1"/>
-          <p:nvPr/>
-        </p:nvSpPr>
-        <p:spPr>
-          <a:xfrm>
-            <a:off x="548640" y="2743200"/>
-            <a:ext cx="384048" cy="384048"/>
-          </a:xfrm>
-          <a:prstGeom prst="rect">
-            <a:avLst/>
-          </a:prstGeom>
-          <a:noFill/>
-          <a:ln/>
-        </p:spPr>
-        <p:txBody>
-          <a:bodyPr wrap="square" lIns="0" tIns="0" rIns="0" bIns="0" rtlCol="0" anchor="ctr"/>
-          <a:lstStyle/>
-          <a:p>
-            <a:pPr algn="ctr" indent="0" marL="0">
-              <a:buNone/>
-            </a:pPr>
-            <a:r>
-              <a:rPr lang="en-US" sz="1400" b="1" dirty="0">
-                <a:solidFill>
-                  <a:srgbClr val="FFFFFF"/>
-                </a:solidFill>
-                <a:latin typeface="Cambria" pitchFamily="34" charset="0"/>
-                <a:ea typeface="Cambria" pitchFamily="34" charset="-122"/>
-                <a:cs typeface="Cambria" pitchFamily="34" charset="-120"/>
-              </a:rPr>
-              <a:t>4</a:t>
-            </a:r>
-            <a:endParaRPr lang="en-US" sz="1400" dirty="0"/>
-          </a:p>
-        </p:txBody>
-      </p:sp>
-      <p:sp>
-        <p:nvSpPr>
-          <p:cNvPr id="15" name="Text 13"/>
-          <p:cNvSpPr txBox="1"/>
-          <p:nvPr/>
-        </p:nvSpPr>
-        <p:spPr>
-          <a:xfrm>
-            <a:off x="1097280" y="2743200"/>
-            <a:ext cx="7589520" cy="384048"/>
-          </a:xfrm>
-          <a:prstGeom prst="rect">
-            <a:avLst/>
-          </a:prstGeom>
-          <a:noFill/>
-          <a:ln/>
-        </p:spPr>
-        <p:txBody>
-          <a:bodyPr wrap="square" lIns="0" tIns="0" rIns="0" bIns="0" rtlCol="0" anchor="ctr"/>
-          <a:lstStyle/>
-          <a:p>
-            <a:pPr indent="0" marL="0">
-              <a:buNone/>
-            </a:pPr>
-            <a:r>
-              <a:rPr lang="en-US" sz="1400" b="1" dirty="0">
-                <a:solidFill>
-                  <a:srgbClr val="0B4F4A"/>
-                </a:solidFill>
-                <a:latin typeface="Calibri" pitchFamily="34" charset="0"/>
-                <a:ea typeface="Calibri" pitchFamily="34" charset="-122"/>
-                <a:cs typeface="Calibri" pitchFamily="34" charset="-120"/>
-              </a:rPr>
-              <a:t>Design decisions   </a:t>
-            </a:r>
-            <a:pPr indent="0" marL="0">
-              <a:buNone/>
-            </a:pPr>
-            <a:r>
-              <a:rPr lang="en-US" sz="1400" dirty="0">
-                <a:solidFill>
-                  <a:srgbClr val="1D2B2A"/>
-                </a:solidFill>
-                <a:latin typeface="Calibri" pitchFamily="34" charset="0"/>
-                <a:ea typeface="Calibri" pitchFamily="34" charset="-122"/>
-                <a:cs typeface="Calibri" pitchFamily="34" charset="-120"/>
-              </a:rPr>
-              <a:t>Rejected inheritances; why not an account-centric model</a:t>
-            </a:r>
-            <a:endParaRPr lang="en-US" sz="1400" dirty="0"/>
-          </a:p>
-        </p:txBody>
-      </p:sp>
-      <p:sp>
-        <p:nvSpPr>
-          <p:cNvPr id="16" name="Shape 14"/>
-          <p:cNvSpPr/>
-          <p:nvPr/>
-        </p:nvSpPr>
-        <p:spPr>
-          <a:xfrm>
-            <a:off x="548640" y="3246120"/>
-            <a:ext cx="384048" cy="384048"/>
-          </a:xfrm>
-          <a:prstGeom prst="ellipse">
-            <a:avLst/>
-          </a:prstGeom>
-          <a:solidFill>
-            <a:srgbClr val="B8862F"/>
-          </a:solidFill>
-          <a:ln/>
-        </p:spPr>
-      </p:sp>
-      <p:sp>
-        <p:nvSpPr>
-          <p:cNvPr id="17" name="Text 15"/>
-          <p:cNvSpPr txBox="1"/>
-          <p:nvPr/>
-        </p:nvSpPr>
-        <p:spPr>
-          <a:xfrm>
-            <a:off x="548640" y="3246120"/>
-            <a:ext cx="384048" cy="384048"/>
-          </a:xfrm>
-          <a:prstGeom prst="rect">
-            <a:avLst/>
-          </a:prstGeom>
-          <a:noFill/>
-          <a:ln/>
-        </p:spPr>
-        <p:txBody>
-          <a:bodyPr wrap="square" lIns="0" tIns="0" rIns="0" bIns="0" rtlCol="0" anchor="ctr"/>
-          <a:lstStyle/>
-          <a:p>
-            <a:pPr algn="ctr" indent="0" marL="0">
-              <a:buNone/>
-            </a:pPr>
-            <a:r>
-              <a:rPr lang="en-US" sz="1400" b="1" dirty="0">
-                <a:solidFill>
-                  <a:srgbClr val="FFFFFF"/>
-                </a:solidFill>
-                <a:latin typeface="Cambria" pitchFamily="34" charset="0"/>
-                <a:ea typeface="Cambria" pitchFamily="34" charset="-122"/>
-                <a:cs typeface="Cambria" pitchFamily="34" charset="-120"/>
-              </a:rPr>
-              <a:t>5</a:t>
-            </a:r>
-            <a:endParaRPr lang="en-US" sz="1400" dirty="0"/>
-          </a:p>
-        </p:txBody>
-      </p:sp>
-      <p:sp>
-        <p:nvSpPr>
-          <p:cNvPr id="18" name="Text 16"/>
-          <p:cNvSpPr txBox="1"/>
-          <p:nvPr/>
-        </p:nvSpPr>
-        <p:spPr>
-          <a:xfrm>
-            <a:off x="1097280" y="3246120"/>
-            <a:ext cx="7589520" cy="384048"/>
-          </a:xfrm>
-          <a:prstGeom prst="rect">
-            <a:avLst/>
-          </a:prstGeom>
-          <a:noFill/>
-          <a:ln/>
-        </p:spPr>
-        <p:txBody>
-          <a:bodyPr wrap="square" lIns="0" tIns="0" rIns="0" bIns="0" rtlCol="0" anchor="ctr"/>
-          <a:lstStyle/>
-          <a:p>
-            <a:pPr indent="0" marL="0">
-              <a:buNone/>
-            </a:pPr>
-            <a:r>
-              <a:rPr lang="en-US" sz="1400" b="1" dirty="0">
-                <a:solidFill>
-                  <a:srgbClr val="0B4F4A"/>
-                </a:solidFill>
-                <a:latin typeface="Calibri" pitchFamily="34" charset="0"/>
-                <a:ea typeface="Calibri" pitchFamily="34" charset="-122"/>
-                <a:cs typeface="Calibri" pitchFamily="34" charset="-120"/>
-              </a:rPr>
-              <a:t>Behaviour   </a:t>
-            </a:r>
-            <a:pPr indent="0" marL="0">
-              <a:buNone/>
-            </a:pPr>
-            <a:r>
-              <a:rPr lang="en-US" sz="1400" dirty="0">
-                <a:solidFill>
-                  <a:srgbClr val="1D2B2A"/>
-                </a:solidFill>
-                <a:latin typeface="Calibri" pitchFamily="34" charset="0"/>
-                <a:ea typeface="Calibri" pitchFamily="34" charset="-122"/>
-                <a:cs typeface="Calibri" pitchFamily="34" charset="-120"/>
-              </a:rPr>
-              <a:t>16 scenarios, flowcharts and lifecycles</a:t>
-            </a:r>
-            <a:endParaRPr lang="en-US" sz="1400" dirty="0"/>
-          </a:p>
-        </p:txBody>
-      </p:sp>
-      <p:sp>
-        <p:nvSpPr>
-          <p:cNvPr id="19" name="Shape 17"/>
-          <p:cNvSpPr/>
-          <p:nvPr/>
-        </p:nvSpPr>
-        <p:spPr>
-          <a:xfrm>
-            <a:off x="548640" y="3749040"/>
-            <a:ext cx="384048" cy="384048"/>
-          </a:xfrm>
-          <a:prstGeom prst="ellipse">
-            <a:avLst/>
-          </a:prstGeom>
-          <a:solidFill>
-            <a:srgbClr val="B8862F"/>
-          </a:solidFill>
-          <a:ln/>
-        </p:spPr>
-      </p:sp>
-      <p:sp>
-        <p:nvSpPr>
-          <p:cNvPr id="20" name="Text 18"/>
-          <p:cNvSpPr txBox="1"/>
-          <p:nvPr/>
-        </p:nvSpPr>
-        <p:spPr>
-          <a:xfrm>
-            <a:off x="548640" y="3749040"/>
-            <a:ext cx="384048" cy="384048"/>
-          </a:xfrm>
-          <a:prstGeom prst="rect">
-            <a:avLst/>
-          </a:prstGeom>
-          <a:noFill/>
-          <a:ln/>
-        </p:spPr>
-        <p:txBody>
-          <a:bodyPr wrap="square" lIns="0" tIns="0" rIns="0" bIns="0" rtlCol="0" anchor="ctr"/>
-          <a:lstStyle/>
-          <a:p>
-            <a:pPr algn="ctr" indent="0" marL="0">
-              <a:buNone/>
-            </a:pPr>
-            <a:r>
-              <a:rPr lang="en-US" sz="1400" b="1" dirty="0">
-                <a:solidFill>
-                  <a:srgbClr val="FFFFFF"/>
-                </a:solidFill>
-                <a:latin typeface="Cambria" pitchFamily="34" charset="0"/>
-                <a:ea typeface="Cambria" pitchFamily="34" charset="-122"/>
-                <a:cs typeface="Cambria" pitchFamily="34" charset="-120"/>
-              </a:rPr>
-              <a:t>6</a:t>
-            </a:r>
-            <a:endParaRPr lang="en-US" sz="1400" dirty="0"/>
-          </a:p>
-        </p:txBody>
-      </p:sp>
-      <p:sp>
-        <p:nvSpPr>
-          <p:cNvPr id="21" name="Text 19"/>
-          <p:cNvSpPr txBox="1"/>
-          <p:nvPr/>
-        </p:nvSpPr>
-        <p:spPr>
-          <a:xfrm>
-            <a:off x="1097280" y="3749040"/>
-            <a:ext cx="7589520" cy="384048"/>
-          </a:xfrm>
-          <a:prstGeom prst="rect">
-            <a:avLst/>
-          </a:prstGeom>
-          <a:noFill/>
-          <a:ln/>
-        </p:spPr>
-        <p:txBody>
-          <a:bodyPr wrap="square" lIns="0" tIns="0" rIns="0" bIns="0" rtlCol="0" anchor="ctr"/>
-          <a:lstStyle/>
-          <a:p>
-            <a:pPr indent="0" marL="0">
-              <a:buNone/>
-            </a:pPr>
-            <a:r>
-              <a:rPr lang="en-US" sz="1400" b="1" dirty="0">
-                <a:solidFill>
-                  <a:srgbClr val="0B4F4A"/>
-                </a:solidFill>
-                <a:latin typeface="Calibri" pitchFamily="34" charset="0"/>
-                <a:ea typeface="Calibri" pitchFamily="34" charset="-122"/>
-                <a:cs typeface="Calibri" pitchFamily="34" charset="-120"/>
-              </a:rPr>
-              <a:t>Live demonstration   </a:t>
-            </a:r>
-            <a:pPr indent="0" marL="0">
-              <a:buNone/>
-            </a:pPr>
-            <a:r>
-              <a:rPr lang="en-US" sz="1400" dirty="0">
-                <a:solidFill>
-                  <a:srgbClr val="1D2B2A"/>
-                </a:solidFill>
-                <a:latin typeface="Calibri" pitchFamily="34" charset="0"/>
-                <a:ea typeface="Calibri" pitchFamily="34" charset="-122"/>
-                <a:cs typeface="Calibri" pitchFamily="34" charset="-120"/>
-              </a:rPr>
-              <a:t>Staff console, digital banking, assistant</a:t>
-            </a:r>
-            <a:endParaRPr lang="en-US" sz="1400" dirty="0"/>
-          </a:p>
-        </p:txBody>
-      </p:sp>
-      <p:sp>
-        <p:nvSpPr>
-          <p:cNvPr id="22" name="Shape 20"/>
-          <p:cNvSpPr/>
-          <p:nvPr/>
-        </p:nvSpPr>
-        <p:spPr>
-          <a:xfrm>
-            <a:off x="548640" y="4251960"/>
-            <a:ext cx="384048" cy="384048"/>
-          </a:xfrm>
-          <a:prstGeom prst="ellipse">
-            <a:avLst/>
-          </a:prstGeom>
-          <a:solidFill>
-            <a:srgbClr val="B8862F"/>
-          </a:solidFill>
-          <a:ln/>
-        </p:spPr>
-      </p:sp>
-      <p:sp>
-        <p:nvSpPr>
-          <p:cNvPr id="23" name="Text 21"/>
-          <p:cNvSpPr txBox="1"/>
-          <p:nvPr/>
-        </p:nvSpPr>
-        <p:spPr>
-          <a:xfrm>
-            <a:off x="548640" y="4251960"/>
-            <a:ext cx="384048" cy="384048"/>
-          </a:xfrm>
-          <a:prstGeom prst="rect">
-            <a:avLst/>
-          </a:prstGeom>
-          <a:noFill/>
-          <a:ln/>
-        </p:spPr>
-        <p:txBody>
-          <a:bodyPr wrap="square" lIns="0" tIns="0" rIns="0" bIns="0" rtlCol="0" anchor="ctr"/>
-          <a:lstStyle/>
-          <a:p>
-            <a:pPr algn="ctr" indent="0" marL="0">
-              <a:buNone/>
-            </a:pPr>
-            <a:r>
-              <a:rPr lang="en-US" sz="1400" b="1" dirty="0">
-                <a:solidFill>
-                  <a:srgbClr val="FFFFFF"/>
-                </a:solidFill>
-                <a:latin typeface="Cambria" pitchFamily="34" charset="0"/>
-                <a:ea typeface="Cambria" pitchFamily="34" charset="-122"/>
-                <a:cs typeface="Cambria" pitchFamily="34" charset="-120"/>
-              </a:rPr>
-              <a:t>7</a:t>
-            </a:r>
-            <a:endParaRPr lang="en-US" sz="1400" dirty="0"/>
-          </a:p>
-        </p:txBody>
-      </p:sp>
-      <p:sp>
-        <p:nvSpPr>
-          <p:cNvPr id="24" name="Text 22"/>
-          <p:cNvSpPr txBox="1"/>
-          <p:nvPr/>
-        </p:nvSpPr>
-        <p:spPr>
-          <a:xfrm>
-            <a:off x="1097280" y="4251960"/>
-            <a:ext cx="7589520" cy="384048"/>
-          </a:xfrm>
-          <a:prstGeom prst="rect">
-            <a:avLst/>
-          </a:prstGeom>
-          <a:noFill/>
-          <a:ln/>
-        </p:spPr>
-        <p:txBody>
-          <a:bodyPr wrap="square" lIns="0" tIns="0" rIns="0" bIns="0" rtlCol="0" anchor="ctr"/>
-          <a:lstStyle/>
-          <a:p>
-            <a:pPr indent="0" marL="0">
-              <a:buNone/>
-            </a:pPr>
-            <a:r>
-              <a:rPr lang="en-US" sz="1400" b="1" dirty="0">
-                <a:solidFill>
-                  <a:srgbClr val="0B4F4A"/>
-                </a:solidFill>
-                <a:latin typeface="Calibri" pitchFamily="34" charset="0"/>
-                <a:ea typeface="Calibri" pitchFamily="34" charset="-122"/>
-                <a:cs typeface="Calibri" pitchFamily="34" charset="-120"/>
-              </a:rPr>
-              <a:t>Limits   </a:t>
-            </a:r>
-            <a:pPr indent="0" marL="0">
-              <a:buNone/>
-            </a:pPr>
-            <a:r>
-              <a:rPr lang="en-US" sz="1400" dirty="0">
-                <a:solidFill>
-                  <a:srgbClr val="1D2B2A"/>
-                </a:solidFill>
-                <a:latin typeface="Calibri" pitchFamily="34" charset="0"/>
-                <a:ea typeface="Calibri" pitchFamily="34" charset="-122"/>
-                <a:cs typeface="Calibri" pitchFamily="34" charset="-120"/>
-              </a:rPr>
-              <a:t>What would change at a larger bank</a:t>
-            </a:r>
-            <a:endParaRPr lang="en-US" sz="1400" dirty="0"/>
+              <a:t>GUI classes inherit too: Page -&gt; MasterDetailPage, CustomerView, Chart</a:t>
+            </a:r>
+            <a:endParaRPr lang="en-US" sz="1200" dirty="0"/>
           </a:p>
         </p:txBody>
       </p:sp>
@@ -11567,9 +13096,9 @@
 </p:sld>
 </file>
 
-<file path=ppt/slides/slide20.xml><?xml version="1.0" encoding="utf-8"?>
+<file path=ppt/slides/slide23.xml><?xml version="1.0" encoding="utf-8"?>
 <p:sld xmlns:a="http://schemas.openxmlformats.org/drawingml/2006/main" xmlns:r="http://schemas.openxmlformats.org/officeDocument/2006/relationships" xmlns:p="http://schemas.openxmlformats.org/presentationml/2006/main">
-  <p:cSld name="Slide 20">
+  <p:cSld name="Slide 23">
     <p:bg>
       <p:bgPr>
         <a:solidFill>
@@ -11626,296 +13155,6 @@
                 <a:ea typeface="Cambria" pitchFamily="34" charset="-122"/>
                 <a:cs typeface="Cambria" pitchFamily="34" charset="-120"/>
               </a:rPr>
-              <a:t>Live demo: staff console and digital banking</a:t>
-            </a:r>
-            <a:endParaRPr lang="en-US" sz="2200" dirty="0"/>
-          </a:p>
-        </p:txBody>
-      </p:sp>
-      <p:sp>
-        <p:nvSpPr>
-          <p:cNvPr id="3" name="Text 1"/>
-          <p:cNvSpPr txBox="1"/>
-          <p:nvPr/>
-        </p:nvSpPr>
-        <p:spPr>
-          <a:xfrm>
-            <a:off x="457200" y="804672"/>
-            <a:ext cx="8229600" cy="320040"/>
-          </a:xfrm>
-          <a:prstGeom prst="rect">
-            <a:avLst/>
-          </a:prstGeom>
-          <a:noFill/>
-          <a:ln/>
-        </p:spPr>
-        <p:txBody>
-          <a:bodyPr wrap="square" lIns="0" tIns="0" rIns="0" bIns="0" rtlCol="0" anchor="ctr"/>
-          <a:lstStyle/>
-          <a:p>
-            <a:pPr indent="0" marL="0">
-              <a:buNone/>
-            </a:pPr>
-            <a:r>
-              <a:rPr lang="en-US" sz="1200" i="1" dirty="0">
-                <a:solidFill>
-                  <a:srgbClr val="5B6B69"/>
-                </a:solidFill>
-                <a:latin typeface="Calibri" pitchFamily="34" charset="0"/>
-                <a:ea typeface="Calibri" pitchFamily="34" charset="-122"/>
-                <a:cs typeface="Calibri" pitchFamily="34" charset="-120"/>
-              </a:rPr>
-              <a:t>banking_gui.py - Python and Tkinter only; every button calls one Bank operation</a:t>
-            </a:r>
-            <a:endParaRPr lang="en-US" sz="1200" dirty="0"/>
-          </a:p>
-        </p:txBody>
-      </p:sp>
-      <p:sp>
-        <p:nvSpPr>
-          <p:cNvPr id="4" name="Shape 2"/>
-          <p:cNvSpPr/>
-          <p:nvPr/>
-        </p:nvSpPr>
-        <p:spPr>
-          <a:xfrm>
-            <a:off x="457200" y="1188720"/>
-            <a:ext cx="5577840" cy="3611880"/>
-          </a:xfrm>
-          <a:prstGeom prst="roundRect">
-            <a:avLst>
-              <a:gd name="adj" fmla="val 2025"/>
-            </a:avLst>
-          </a:prstGeom>
-          <a:solidFill>
-            <a:srgbClr val="F4F8F7"/>
-          </a:solidFill>
-          <a:ln w="12700">
-            <a:solidFill>
-              <a:srgbClr val="F4F8F7"/>
-            </a:solidFill>
-            <a:prstDash val="solid"/>
-          </a:ln>
-        </p:spPr>
-      </p:sp>
-      <p:pic>
-        <p:nvPicPr>
-          <p:cNvPr id="5" name="Image 0" descr="/home/user/commercial-banking/docs/screenshots/gui_02_overview.png">    </p:cNvPr>
-          <p:cNvPicPr>
-            <a:picLocks noChangeAspect="1"/>
-          </p:cNvPicPr>
-          <p:nvPr/>
-        </p:nvPicPr>
-        <p:blipFill>
-          <a:blip r:embed="rId1"/>
-          <a:stretch>
-            <a:fillRect/>
-          </a:stretch>
-        </p:blipFill>
-        <p:spPr>
-          <a:xfrm>
-            <a:off x="548640" y="1280160"/>
-            <a:ext cx="5394960" cy="3291840"/>
-          </a:xfrm>
-          <a:prstGeom prst="rect">
-            <a:avLst/>
-          </a:prstGeom>
-        </p:spPr>
-      </p:pic>
-      <p:sp>
-        <p:nvSpPr>
-          <p:cNvPr id="6" name="Text 3"/>
-          <p:cNvSpPr txBox="1"/>
-          <p:nvPr/>
-        </p:nvSpPr>
-        <p:spPr>
-          <a:xfrm>
-            <a:off x="6263640" y="1234440"/>
-            <a:ext cx="2468880" cy="3566160"/>
-          </a:xfrm>
-          <a:prstGeom prst="rect">
-            <a:avLst/>
-          </a:prstGeom>
-          <a:noFill/>
-          <a:ln/>
-        </p:spPr>
-        <p:txBody>
-          <a:bodyPr wrap="square" lIns="635" tIns="635" rIns="635" bIns="635" rtlCol="0" anchor="t"/>
-          <a:lstStyle/>
-          <a:p>
-            <a:pPr marL="342900" indent="-342900">
-              <a:spcAft>
-                <a:spcPts val="600"/>
-              </a:spcAft>
-              <a:buSzPct val="100000"/>
-              <a:buChar char="•"/>
-            </a:pPr>
-            <a:r>
-              <a:rPr lang="en-US" sz="1200" dirty="0">
-                <a:solidFill>
-                  <a:srgbClr val="1D2B2A"/>
-                </a:solidFill>
-                <a:latin typeface="Calibri" pitchFamily="34" charset="0"/>
-                <a:ea typeface="Calibri" pitchFamily="34" charset="-122"/>
-                <a:cs typeface="Calibri" pitchFamily="34" charset="-120"/>
-              </a:rPr>
-              <a:t>Sign in as staff or as a customer; the model checks that person's authority</a:t>
-            </a:r>
-            <a:endParaRPr lang="en-US" sz="1200" dirty="0"/>
-          </a:p>
-          <a:p>
-            <a:pPr marL="342900" indent="-342900">
-              <a:spcAft>
-                <a:spcPts val="600"/>
-              </a:spcAft>
-              <a:buSzPct val="100000"/>
-              <a:buChar char="•"/>
-            </a:pPr>
-            <a:r>
-              <a:rPr lang="en-US" sz="1200" dirty="0">
-                <a:solidFill>
-                  <a:srgbClr val="1D2B2A"/>
-                </a:solidFill>
-                <a:latin typeface="Calibri" pitchFamily="34" charset="0"/>
-                <a:ea typeface="Calibri" pitchFamily="34" charset="-122"/>
-                <a:cs typeface="Calibri" pitchFamily="34" charset="-120"/>
-              </a:rPr>
-              <a:t>Staff: forms list what your role may do and record you automatically</a:t>
-            </a:r>
-            <a:endParaRPr lang="en-US" sz="1200" dirty="0"/>
-          </a:p>
-          <a:p>
-            <a:pPr marL="342900" indent="-342900">
-              <a:spcAft>
-                <a:spcPts val="600"/>
-              </a:spcAft>
-              <a:buSzPct val="100000"/>
-              <a:buChar char="•"/>
-            </a:pPr>
-            <a:r>
-              <a:rPr lang="en-US" sz="1200" dirty="0">
-                <a:solidFill>
-                  <a:srgbClr val="1D2B2A"/>
-                </a:solidFill>
-                <a:latin typeface="Calibri" pitchFamily="34" charset="0"/>
-                <a:ea typeface="Calibri" pitchFamily="34" charset="-122"/>
-                <a:cs typeface="Calibri" pitchFamily="34" charset="-120"/>
-              </a:rPr>
-              <a:t>Digital banking: own accounts plus companies under a mandate; approvals, cards, disputes</a:t>
-            </a:r>
-            <a:endParaRPr lang="en-US" sz="1200" dirty="0"/>
-          </a:p>
-          <a:p>
-            <a:pPr marL="342900" indent="-342900">
-              <a:spcAft>
-                <a:spcPts val="600"/>
-              </a:spcAft>
-              <a:buSzPct val="100000"/>
-              <a:buChar char="•"/>
-            </a:pPr>
-            <a:r>
-              <a:rPr lang="en-US" sz="1200" dirty="0">
-                <a:solidFill>
-                  <a:srgbClr val="1D2B2A"/>
-                </a:solidFill>
-                <a:latin typeface="Calibri" pitchFamily="34" charset="0"/>
-                <a:ea typeface="Calibri" pitchFamily="34" charset="-122"/>
-                <a:cs typeface="Calibri" pitchFamily="34" charset="-120"/>
-              </a:rPr>
-              <a:t>80 forms and 14 guided checks cover every workflow in the brief</a:t>
-            </a:r>
-            <a:endParaRPr lang="en-US" sz="1200" dirty="0"/>
-          </a:p>
-          <a:p>
-            <a:pPr marL="342900" indent="-342900">
-              <a:spcAft>
-                <a:spcPts val="600"/>
-              </a:spcAft>
-              <a:buSzPct val="100000"/>
-              <a:buChar char="•"/>
-            </a:pPr>
-            <a:r>
-              <a:rPr lang="en-US" sz="1200" dirty="0">
-                <a:solidFill>
-                  <a:srgbClr val="1D2B2A"/>
-                </a:solidFill>
-                <a:latin typeface="Calibri" pitchFamily="34" charset="0"/>
-                <a:ea typeface="Calibri" pitchFamily="34" charset="-122"/>
-                <a:cs typeface="Calibri" pitchFamily="34" charset="-120"/>
-              </a:rPr>
-              <a:t>GUI classes inherit too: Page -&gt; MasterDetailPage, CustomerView, Chart</a:t>
-            </a:r>
-            <a:endParaRPr lang="en-US" sz="1200" dirty="0"/>
-          </a:p>
-        </p:txBody>
-      </p:sp>
-    </p:spTree>
-  </p:cSld>
-  <p:clrMapOvr>
-    <a:masterClrMapping/>
-  </p:clrMapOvr>
-</p:sld>
-</file>
-
-<file path=ppt/slides/slide21.xml><?xml version="1.0" encoding="utf-8"?>
-<p:sld xmlns:a="http://schemas.openxmlformats.org/drawingml/2006/main" xmlns:r="http://schemas.openxmlformats.org/officeDocument/2006/relationships" xmlns:p="http://schemas.openxmlformats.org/presentationml/2006/main">
-  <p:cSld name="Slide 21">
-    <p:bg>
-      <p:bgPr>
-        <a:solidFill>
-          <a:srgbClr val="FFFFFF"/>
-        </a:solidFill>
-      </p:bgPr>
-    </p:bg>
-    <p:spTree>
-      <p:nvGrpSpPr>
-        <p:cNvPr id="1" name=""/>
-        <p:cNvGrpSpPr/>
-        <p:nvPr/>
-      </p:nvGrpSpPr>
-      <p:grpSpPr>
-        <a:xfrm>
-          <a:off x="0" y="0"/>
-          <a:ext cx="0" cy="0"/>
-          <a:chOff x="0" y="0"/>
-          <a:chExt cx="0" cy="0"/>
-        </a:xfrm>
-      </p:grpSpPr>
-      <p:sp>
-        <p:nvSpPr>
-          <p:cNvPr id="2" name="Text 0"/>
-          <p:cNvSpPr txBox="1"/>
-          <p:nvPr/>
-        </p:nvSpPr>
-        <p:spPr>
-          <a:xfrm>
-            <a:off x="457200" y="274320"/>
-            <a:ext cx="8229600" cy="548640"/>
-          </a:xfrm>
-          <a:prstGeom prst="rect">
-            <a:avLst/>
-          </a:prstGeom>
-          <a:noFill/>
-          <a:ln/>
-        </p:spPr>
-        <p:txBody>
-          <a:bodyPr wrap="square" lIns="0" tIns="0" rIns="0" bIns="0" rtlCol="0" anchor="ctr">
-            <a:normAutofit/>
-          </a:bodyPr>
-          <a:lstStyle/>
-          <a:p>
-            <a:pPr indent="0" marL="0">
-              <a:buNone/>
-            </a:pPr>
-            <a:r>
-              <a:rPr lang="en-US" sz="2200" b="1" dirty="0">
-                <a:solidFill>
-                  <a:srgbClr val="0B4F4A"/>
-                </a:solidFill>
-                <a:latin typeface="Cambria" pitchFamily="34" charset="0"/>
-                <a:ea typeface="Cambria" pitchFamily="34" charset="-122"/>
-                <a:cs typeface="Cambria" pitchFamily="34" charset="-120"/>
-              </a:rPr>
               <a:t>Code review: 20 defects fixed, each with a test</a:t>
             </a:r>
             <a:endParaRPr lang="en-US" sz="2200" dirty="0"/>
@@ -12204,9 +13443,9 @@
 </p:sld>
 </file>
 
-<file path=ppt/slides/slide22.xml><?xml version="1.0" encoding="utf-8"?>
+<file path=ppt/slides/slide24.xml><?xml version="1.0" encoding="utf-8"?>
 <p:sld xmlns:a="http://schemas.openxmlformats.org/drawingml/2006/main" xmlns:r="http://schemas.openxmlformats.org/officeDocument/2006/relationships" xmlns:p="http://schemas.openxmlformats.org/presentationml/2006/main">
-  <p:cSld name="Slide 22">
+  <p:cSld name="Slide 24">
     <p:bg>
       <p:bgPr>
         <a:solidFill>
@@ -16030,7 +17269,7 @@
                 <a:ea typeface="Cambria" pitchFamily="34" charset="-122"/>
                 <a:cs typeface="Cambria" pitchFamily="34" charset="-120"/>
               </a:rPr>
-              <a:t>81</a:t>
+              <a:t>84</a:t>
             </a:r>
             <a:endParaRPr lang="en-US" sz="4000" dirty="0"/>
           </a:p>
